--- a/docs/AIForgeCrew-Overview.pptx
+++ b/docs/AIForgeCrew-Overview.pptx
@@ -24,6 +24,7 @@
     <p:sldId id="272" r:id="rId23"/>
     <p:sldId id="273" r:id="rId24"/>
     <p:sldId id="274" r:id="rId25"/>
+    <p:sldId id="275" r:id="rId26"/>
   </p:sldIdLst>
   <p:sldSz cx="12191695" cy="6858000" type="screen4x3"/>
   <p:notesSz cx="6858000" cy="9144000"/>
@@ -5102,6 +5103,680 @@
                 </a:solidFill>
                 <a:latin typeface="Calibri"/>
               </a:rPr>
+              <a:t>Security and data control</a:t>
+            </a:r>
+          </a:p>
+        </p:txBody>
+      </p:sp>
+      <p:sp>
+        <p:nvSpPr>
+          <p:cNvPr id="3" name="Rectangle 2"/>
+          <p:cNvSpPr/>
+          <p:nvPr/>
+        </p:nvSpPr>
+        <p:spPr>
+          <a:xfrm>
+            <a:off x="685800" y="1078992"/>
+            <a:ext cx="10817352" cy="17780"/>
+          </a:xfrm>
+          <a:prstGeom prst="rect">
+            <a:avLst/>
+          </a:prstGeom>
+          <a:solidFill>
+            <a:srgbClr val="1F4E79"/>
+          </a:solidFill>
+          <a:ln>
+            <a:noFill/>
+          </a:ln>
+          <a:effectLst/>
+        </p:spPr>
+        <p:style>
+          <a:lnRef idx="1">
+            <a:schemeClr val="accent1"/>
+          </a:lnRef>
+          <a:fillRef idx="3">
+            <a:schemeClr val="accent1"/>
+          </a:fillRef>
+          <a:effectRef idx="2">
+            <a:schemeClr val="accent1"/>
+          </a:effectRef>
+          <a:fontRef idx="minor">
+            <a:schemeClr val="lt1"/>
+          </a:fontRef>
+        </p:style>
+        <p:txBody>
+          <a:bodyPr rtlCol="0" anchor="ctr"/>
+          <a:lstStyle/>
+          <a:p>
+            <a:pPr algn="ctr"/>
+          </a:p>
+        </p:txBody>
+      </p:sp>
+      <p:sp>
+        <p:nvSpPr>
+          <p:cNvPr id="4" name="TextBox 3"/>
+          <p:cNvSpPr txBox="1"/>
+          <p:nvPr/>
+        </p:nvSpPr>
+        <p:spPr>
+          <a:xfrm>
+            <a:off x="685800" y="1188720"/>
+            <a:ext cx="10817352" cy="384048"/>
+          </a:xfrm>
+          <a:prstGeom prst="rect">
+            <a:avLst/>
+          </a:prstGeom>
+          <a:noFill/>
+        </p:spPr>
+        <p:txBody>
+          <a:bodyPr wrap="none">
+            <a:spAutoFit/>
+          </a:bodyPr>
+          <a:lstStyle/>
+          <a:p>
+            <a:r>
+              <a:rPr sz="1400" i="1">
+                <a:solidFill>
+                  <a:srgbClr val="666666"/>
+                </a:solidFill>
+                <a:latin typeface="Calibri"/>
+              </a:rPr>
+              <a:t>No telemetry. Nothing leaves the machine unless you point it somewhere.</a:t>
+            </a:r>
+          </a:p>
+        </p:txBody>
+      </p:sp>
+      <p:graphicFrame>
+        <p:nvGraphicFramePr>
+          <p:cNvPr id="5" name="Table 4"/>
+          <p:cNvGraphicFramePr>
+            <a:graphicFrameLocks noGrp="1"/>
+          </p:cNvGraphicFramePr>
+          <p:nvPr/>
+        </p:nvGraphicFramePr>
+        <p:xfrm>
+          <a:off x="685800" y="1664208"/>
+          <a:ext cx="10817352" cy="4114800"/>
+        </p:xfrm>
+        <a:graphic>
+          <a:graphicData uri="http://schemas.openxmlformats.org/drawingml/2006/table">
+            <a:tbl>
+              <a:tblPr firstRow="1" bandRow="1">
+                <a:tableStyleId>{5C22544A-7EE6-4342-B048-85BDC9FD1C3A}</a:tableStyleId>
+              </a:tblPr>
+              <a:tblGrid>
+                <a:gridCol w="1737360"/>
+                <a:gridCol w="9079992"/>
+              </a:tblGrid>
+              <a:tr h="457200">
+                <a:tc>
+                  <a:txBody>
+                    <a:bodyPr/>
+                    <a:lstStyle/>
+                    <a:p>
+                      <a:r>
+                        <a:rPr sz="1100" b="1">
+                          <a:solidFill>
+                            <a:srgbClr val="1F4E79"/>
+                          </a:solidFill>
+                          <a:latin typeface="Calibri"/>
+                        </a:rPr>
+                        <a:t>Concern</a:t>
+                      </a:r>
+                    </a:p>
+                  </a:txBody>
+                  <a:tcPr marL="64008" marT="27432" marB="27432">
+                    <a:solidFill>
+                      <a:srgbClr val="FFFFFF"/>
+                    </a:solidFill>
+                  </a:tcPr>
+                </a:tc>
+                <a:tc>
+                  <a:txBody>
+                    <a:bodyPr/>
+                    <a:lstStyle/>
+                    <a:p>
+                      <a:r>
+                        <a:rPr sz="1100" b="1">
+                          <a:solidFill>
+                            <a:srgbClr val="1F4E79"/>
+                          </a:solidFill>
+                          <a:latin typeface="Calibri"/>
+                        </a:rPr>
+                        <a:t>How it is handled</a:t>
+                      </a:r>
+                    </a:p>
+                  </a:txBody>
+                  <a:tcPr marL="64008" marT="27432" marB="27432">
+                    <a:solidFill>
+                      <a:srgbClr val="FFFFFF"/>
+                    </a:solidFill>
+                  </a:tcPr>
+                </a:tc>
+              </a:tr>
+              <a:tr h="457200">
+                <a:tc>
+                  <a:txBody>
+                    <a:bodyPr wrap="square"/>
+                    <a:lstStyle/>
+                    <a:p>
+                      <a:r>
+                        <a:rPr sz="1100" b="1">
+                          <a:solidFill>
+                            <a:srgbClr val="333333"/>
+                          </a:solidFill>
+                          <a:latin typeface="Calibri"/>
+                        </a:rPr>
+                        <a:t>Telemetry</a:t>
+                      </a:r>
+                    </a:p>
+                  </a:txBody>
+                  <a:tcPr marL="64008" marT="27432" marB="27432">
+                    <a:solidFill>
+                      <a:srgbClr val="FFFFFF"/>
+                    </a:solidFill>
+                  </a:tcPr>
+                </a:tc>
+                <a:tc>
+                  <a:txBody>
+                    <a:bodyPr wrap="square"/>
+                    <a:lstStyle/>
+                    <a:p>
+                      <a:r>
+                        <a:rPr sz="1100" b="0">
+                          <a:solidFill>
+                            <a:srgbClr val="333333"/>
+                          </a:solidFill>
+                          <a:latin typeface="Calibri"/>
+                        </a:rPr>
+                        <a:t>None. DO_NOT_TRACK=1, Hugging Face and LiteLLM telemetry off, cost map read locally — and no analytics package in the 599-package lock</a:t>
+                      </a:r>
+                    </a:p>
+                  </a:txBody>
+                  <a:tcPr marL="64008" marT="27432" marB="27432">
+                    <a:solidFill>
+                      <a:srgbClr val="FFFFFF"/>
+                    </a:solidFill>
+                  </a:tcPr>
+                </a:tc>
+              </a:tr>
+              <a:tr h="457200">
+                <a:tc>
+                  <a:txBody>
+                    <a:bodyPr wrap="square"/>
+                    <a:lstStyle/>
+                    <a:p>
+                      <a:r>
+                        <a:rPr sz="1100" b="1">
+                          <a:solidFill>
+                            <a:srgbClr val="333333"/>
+                          </a:solidFill>
+                          <a:latin typeface="Calibri"/>
+                        </a:rPr>
+                        <a:t>Prompts and code</a:t>
+                      </a:r>
+                    </a:p>
+                  </a:txBody>
+                  <a:tcPr marL="64008" marT="27432" marB="27432">
+                    <a:solidFill>
+                      <a:srgbClr val="F7F7F7"/>
+                    </a:solidFill>
+                  </a:tcPr>
+                </a:tc>
+                <a:tc>
+                  <a:txBody>
+                    <a:bodyPr wrap="square"/>
+                    <a:lstStyle/>
+                    <a:p>
+                      <a:r>
+                        <a:rPr sz="1100" b="0">
+                          <a:solidFill>
+                            <a:srgbClr val="333333"/>
+                          </a:solidFill>
+                          <a:latin typeface="Calibri"/>
+                        </a:rPr>
+                        <a:t>Go only to the endpoint you configure. Point it at LM Studio, vLLM or mlx on your own hardware and nothing leaves the box</a:t>
+                      </a:r>
+                    </a:p>
+                  </a:txBody>
+                  <a:tcPr marL="64008" marT="27432" marB="27432">
+                    <a:solidFill>
+                      <a:srgbClr val="F7F7F7"/>
+                    </a:solidFill>
+                  </a:tcPr>
+                </a:tc>
+              </a:tr>
+              <a:tr h="457200">
+                <a:tc>
+                  <a:txBody>
+                    <a:bodyPr wrap="square"/>
+                    <a:lstStyle/>
+                    <a:p>
+                      <a:r>
+                        <a:rPr sz="1100" b="1">
+                          <a:solidFill>
+                            <a:srgbClr val="333333"/>
+                          </a:solidFill>
+                          <a:latin typeface="Calibri"/>
+                        </a:rPr>
+                        <a:t>Data at rest</a:t>
+                      </a:r>
+                    </a:p>
+                  </a:txBody>
+                  <a:tcPr marL="64008" marT="27432" marB="27432">
+                    <a:solidFill>
+                      <a:srgbClr val="FFFFFF"/>
+                    </a:solidFill>
+                  </a:tcPr>
+                </a:tc>
+                <a:tc>
+                  <a:txBody>
+                    <a:bodyPr wrap="square"/>
+                    <a:lstStyle/>
+                    <a:p>
+                      <a:r>
+                        <a:rPr sz="1100" b="0">
+                          <a:solidFill>
+                            <a:srgbClr val="333333"/>
+                          </a:solidFill>
+                          <a:latin typeface="Calibri"/>
+                        </a:rPr>
+                        <a:t>~/.aiforge/ — markdown files and one SQLite file. Delete the folder and the memory is gone; there is no second copy</a:t>
+                      </a:r>
+                    </a:p>
+                  </a:txBody>
+                  <a:tcPr marL="64008" marT="27432" marB="27432">
+                    <a:solidFill>
+                      <a:srgbClr val="FFFFFF"/>
+                    </a:solidFill>
+                  </a:tcPr>
+                </a:tc>
+              </a:tr>
+              <a:tr h="457200">
+                <a:tc>
+                  <a:txBody>
+                    <a:bodyPr wrap="square"/>
+                    <a:lstStyle/>
+                    <a:p>
+                      <a:r>
+                        <a:rPr sz="1100" b="1">
+                          <a:solidFill>
+                            <a:srgbClr val="333333"/>
+                          </a:solidFill>
+                          <a:latin typeface="Calibri"/>
+                        </a:rPr>
+                        <a:t>Network exposure</a:t>
+                      </a:r>
+                    </a:p>
+                  </a:txBody>
+                  <a:tcPr marL="64008" marT="27432" marB="27432">
+                    <a:solidFill>
+                      <a:srgbClr val="F7F7F7"/>
+                    </a:solidFill>
+                  </a:tcPr>
+                </a:tc>
+                <a:tc>
+                  <a:txBody>
+                    <a:bodyPr wrap="square"/>
+                    <a:lstStyle/>
+                    <a:p>
+                      <a:r>
+                        <a:rPr sz="1100" b="0">
+                          <a:solidFill>
+                            <a:srgbClr val="333333"/>
+                          </a:solidFill>
+                          <a:latin typeface="Calibri"/>
+                        </a:rPr>
+                        <a:t>Loopback by default, and a loud warning if bound off-loopback with no AIFORGE_API_TOKEN. Fleet sync is open for LAN or WireGuard; one flag closes it</a:t>
+                      </a:r>
+                    </a:p>
+                  </a:txBody>
+                  <a:tcPr marL="64008" marT="27432" marB="27432">
+                    <a:solidFill>
+                      <a:srgbClr val="F7F7F7"/>
+                    </a:solidFill>
+                  </a:tcPr>
+                </a:tc>
+              </a:tr>
+              <a:tr h="457200">
+                <a:tc>
+                  <a:txBody>
+                    <a:bodyPr wrap="square"/>
+                    <a:lstStyle/>
+                    <a:p>
+                      <a:r>
+                        <a:rPr sz="1100" b="1">
+                          <a:solidFill>
+                            <a:srgbClr val="333333"/>
+                          </a:solidFill>
+                          <a:latin typeface="Calibri"/>
+                        </a:rPr>
+                        <a:t>Outbound knowledge</a:t>
+                      </a:r>
+                    </a:p>
+                  </a:txBody>
+                  <a:tcPr marL="64008" marT="27432" marB="27432">
+                    <a:solidFill>
+                      <a:srgbClr val="FFFFFF"/>
+                    </a:solidFill>
+                  </a:tcPr>
+                </a:tc>
+                <a:tc>
+                  <a:txBody>
+                    <a:bodyPr wrap="square"/>
+                    <a:lstStyle/>
+                    <a:p>
+                      <a:r>
+                        <a:rPr sz="1100" b="0">
+                          <a:solidFill>
+                            <a:srgbClr val="333333"/>
+                          </a:solidFill>
+                          <a:latin typeface="Calibri"/>
+                        </a:rPr>
+                        <a:t>A secrets / private / noise filter runs on the client before a note is advertised; a blocked note is dropped whole, never edited</a:t>
+                      </a:r>
+                    </a:p>
+                  </a:txBody>
+                  <a:tcPr marL="64008" marT="27432" marB="27432">
+                    <a:solidFill>
+                      <a:srgbClr val="FFFFFF"/>
+                    </a:solidFill>
+                  </a:tcPr>
+                </a:tc>
+              </a:tr>
+              <a:tr h="457200">
+                <a:tc>
+                  <a:txBody>
+                    <a:bodyPr wrap="square"/>
+                    <a:lstStyle/>
+                    <a:p>
+                      <a:r>
+                        <a:rPr sz="1100" b="1">
+                          <a:solidFill>
+                            <a:srgbClr val="333333"/>
+                          </a:solidFill>
+                          <a:latin typeface="Calibri"/>
+                        </a:rPr>
+                        <a:t>Tool egress</a:t>
+                      </a:r>
+                    </a:p>
+                  </a:txBody>
+                  <a:tcPr marL="64008" marT="27432" marB="27432">
+                    <a:solidFill>
+                      <a:srgbClr val="F7F7F7"/>
+                    </a:solidFill>
+                  </a:tcPr>
+                </a:tc>
+                <a:tc>
+                  <a:txBody>
+                    <a:bodyPr wrap="square"/>
+                    <a:lstStyle/>
+                    <a:p>
+                      <a:r>
+                        <a:rPr sz="1100" b="0">
+                          <a:solidFill>
+                            <a:srgbClr val="333333"/>
+                          </a:solidFill>
+                          <a:latin typeface="Calibri"/>
+                        </a:rPr>
+                        <a:t>SSRF guard on web fetch and crawl. TLS verification is disabled only per endpoint, opt-in, for self-signed internal hosts</a:t>
+                      </a:r>
+                    </a:p>
+                  </a:txBody>
+                  <a:tcPr marL="64008" marT="27432" marB="27432">
+                    <a:solidFill>
+                      <a:srgbClr val="F7F7F7"/>
+                    </a:solidFill>
+                  </a:tcPr>
+                </a:tc>
+              </a:tr>
+              <a:tr h="457200">
+                <a:tc>
+                  <a:txBody>
+                    <a:bodyPr wrap="square"/>
+                    <a:lstStyle/>
+                    <a:p>
+                      <a:r>
+                        <a:rPr sz="1100" b="1">
+                          <a:solidFill>
+                            <a:srgbClr val="333333"/>
+                          </a:solidFill>
+                          <a:latin typeface="Calibri"/>
+                        </a:rPr>
+                        <a:t>Supply chain</a:t>
+                      </a:r>
+                    </a:p>
+                  </a:txBody>
+                  <a:tcPr marL="64008" marT="27432" marB="27432">
+                    <a:solidFill>
+                      <a:srgbClr val="FFFFFF"/>
+                    </a:solidFill>
+                  </a:tcPr>
+                </a:tc>
+                <a:tc>
+                  <a:txBody>
+                    <a:bodyPr wrap="square"/>
+                    <a:lstStyle/>
+                    <a:p>
+                      <a:r>
+                        <a:rPr sz="1100" b="0">
+                          <a:solidFill>
+                            <a:srgbClr val="333333"/>
+                          </a:solidFill>
+                          <a:latin typeface="Calibri"/>
+                        </a:rPr>
+                        <a:t>uv.lock pinned and shipped; Trivy clean; CI emits a CycloneDX SBOM and pinned requirements for Black Duck; Sonar reports 0 bugs</a:t>
+                      </a:r>
+                    </a:p>
+                  </a:txBody>
+                  <a:tcPr marL="64008" marT="27432" marB="27432">
+                    <a:solidFill>
+                      <a:srgbClr val="FFFFFF"/>
+                    </a:solidFill>
+                  </a:tcPr>
+                </a:tc>
+              </a:tr>
+              <a:tr h="457200">
+                <a:tc>
+                  <a:txBody>
+                    <a:bodyPr wrap="square"/>
+                    <a:lstStyle/>
+                    <a:p>
+                      <a:r>
+                        <a:rPr sz="1100" b="1">
+                          <a:solidFill>
+                            <a:srgbClr val="333333"/>
+                          </a:solidFill>
+                          <a:latin typeface="Calibri"/>
+                        </a:rPr>
+                        <a:t>Isolation</a:t>
+                      </a:r>
+                    </a:p>
+                  </a:txBody>
+                  <a:tcPr marL="64008" marT="27432" marB="27432">
+                    <a:solidFill>
+                      <a:srgbClr val="F7F7F7"/>
+                    </a:solidFill>
+                  </a:tcPr>
+                </a:tc>
+                <a:tc>
+                  <a:txBody>
+                    <a:bodyPr wrap="square"/>
+                    <a:lstStyle/>
+                    <a:p>
+                      <a:r>
+                        <a:rPr sz="1100" b="0">
+                          <a:solidFill>
+                            <a:srgbClr val="333333"/>
+                          </a:solidFill>
+                          <a:latin typeface="Calibri"/>
+                        </a:rPr>
+                        <a:t>AIFORGE_WORKSPACE_DIR clamps file and exec to one directory; the workspace jail is on by default; container mode for untrusted use</a:t>
+                      </a:r>
+                    </a:p>
+                  </a:txBody>
+                  <a:tcPr marL="64008" marT="27432" marB="27432">
+                    <a:solidFill>
+                      <a:srgbClr val="F7F7F7"/>
+                    </a:solidFill>
+                  </a:tcPr>
+                </a:tc>
+              </a:tr>
+            </a:tbl>
+          </a:graphicData>
+        </a:graphic>
+      </p:graphicFrame>
+      <p:sp>
+        <p:nvSpPr>
+          <p:cNvPr id="6" name="TextBox 5"/>
+          <p:cNvSpPr txBox="1"/>
+          <p:nvPr/>
+        </p:nvSpPr>
+        <p:spPr>
+          <a:xfrm>
+            <a:off x="685800" y="5532120"/>
+            <a:ext cx="10817352" cy="457200"/>
+          </a:xfrm>
+          <a:prstGeom prst="rect">
+            <a:avLst/>
+          </a:prstGeom>
+          <a:noFill/>
+        </p:spPr>
+        <p:txBody>
+          <a:bodyPr wrap="square">
+            <a:spAutoFit/>
+          </a:bodyPr>
+          <a:lstStyle/>
+          <a:p>
+            <a:pPr algn="l"/>
+            <a:r>
+              <a:rPr sz="1100" i="1">
+                <a:solidFill>
+                  <a:srgbClr val="666666"/>
+                </a:solidFill>
+                <a:latin typeface="Calibri"/>
+              </a:rPr>
+              <a:t>Stated plainly: by default the chat agent has full, unsandboxed shell access on the host. The jail guards file tools, not arbitrary shell — treat the chat box like a terminal, and run untrusted work in the container mode.</a:t>
+            </a:r>
+          </a:p>
+        </p:txBody>
+      </p:sp>
+      <p:sp>
+        <p:nvSpPr>
+          <p:cNvPr id="7" name="TextBox 6"/>
+          <p:cNvSpPr txBox="1"/>
+          <p:nvPr/>
+        </p:nvSpPr>
+        <p:spPr>
+          <a:xfrm>
+            <a:off x="11064240" y="6355080"/>
+            <a:ext cx="822960" cy="320040"/>
+          </a:xfrm>
+          <a:prstGeom prst="rect">
+            <a:avLst/>
+          </a:prstGeom>
+          <a:noFill/>
+        </p:spPr>
+        <p:txBody>
+          <a:bodyPr wrap="none">
+            <a:spAutoFit/>
+          </a:bodyPr>
+          <a:lstStyle/>
+          <a:p>
+            <a:pPr algn="r"/>
+            <a:r>
+              <a:rPr sz="1000">
+                <a:solidFill>
+                  <a:srgbClr val="666666"/>
+                </a:solidFill>
+                <a:latin typeface="Calibri"/>
+              </a:rPr>
+              <a:t>14</a:t>
+            </a:r>
+          </a:p>
+        </p:txBody>
+      </p:sp>
+      <p:sp>
+        <p:nvSpPr>
+          <p:cNvPr id="8" name="TextBox 7"/>
+          <p:cNvSpPr txBox="1"/>
+          <p:nvPr/>
+        </p:nvSpPr>
+        <p:spPr>
+          <a:xfrm>
+            <a:off x="685800" y="6355080"/>
+            <a:ext cx="5486400" cy="320040"/>
+          </a:xfrm>
+          <a:prstGeom prst="rect">
+            <a:avLst/>
+          </a:prstGeom>
+          <a:noFill/>
+        </p:spPr>
+        <p:txBody>
+          <a:bodyPr wrap="none">
+            <a:spAutoFit/>
+          </a:bodyPr>
+          <a:lstStyle/>
+          <a:p>
+            <a:r>
+              <a:rPr sz="1000">
+                <a:solidFill>
+                  <a:srgbClr val="666666"/>
+                </a:solidFill>
+                <a:latin typeface="Calibri"/>
+              </a:rPr>
+              <a:t>AIForgeCrew</a:t>
+            </a:r>
+          </a:p>
+        </p:txBody>
+      </p:sp>
+    </p:spTree>
+  </p:cSld>
+  <p:clrMapOvr>
+    <a:masterClrMapping/>
+  </p:clrMapOvr>
+</p:sld>
+</file>
+
+<file path=ppt/slides/slide15.xml><?xml version="1.0" encoding="utf-8"?>
+<p:sld xmlns:a="http://schemas.openxmlformats.org/drawingml/2006/main" xmlns:p="http://schemas.openxmlformats.org/presentationml/2006/main" xmlns:r="http://schemas.openxmlformats.org/officeDocument/2006/relationships">
+  <p:cSld>
+    <p:spTree>
+      <p:nvGrpSpPr>
+        <p:cNvPr id="1" name=""/>
+        <p:cNvGrpSpPr/>
+        <p:nvPr/>
+      </p:nvGrpSpPr>
+      <p:grpSpPr/>
+      <p:sp>
+        <p:nvSpPr>
+          <p:cNvPr id="2" name="TextBox 1"/>
+          <p:cNvSpPr txBox="1"/>
+          <p:nvPr/>
+        </p:nvSpPr>
+        <p:spPr>
+          <a:xfrm>
+            <a:off x="685800" y="411480"/>
+            <a:ext cx="10817352" cy="640080"/>
+          </a:xfrm>
+          <a:prstGeom prst="rect">
+            <a:avLst/>
+          </a:prstGeom>
+          <a:noFill/>
+        </p:spPr>
+        <p:txBody>
+          <a:bodyPr wrap="none">
+            <a:spAutoFit/>
+          </a:bodyPr>
+          <a:lstStyle/>
+          <a:p>
+            <a:r>
+              <a:rPr sz="3000" b="1">
+                <a:solidFill>
+                  <a:srgbClr val="111111"/>
+                </a:solidFill>
+                <a:latin typeface="Calibri"/>
+              </a:rPr>
               <a:t>Groups and fleet memory sync</a:t>
             </a:r>
           </a:p>
@@ -5749,7 +6424,7 @@
                 </a:solidFill>
                 <a:latin typeface="Calibri"/>
               </a:rPr>
-              <a:t>14</a:t>
+              <a:t>15</a:t>
             </a:r>
           </a:p>
         </p:txBody>
@@ -5796,7 +6471,7 @@
 </p:sld>
 </file>
 
-<file path=ppt/slides/slide15.xml><?xml version="1.0" encoding="utf-8"?>
+<file path=ppt/slides/slide16.xml><?xml version="1.0" encoding="utf-8"?>
 <p:sld xmlns:a="http://schemas.openxmlformats.org/drawingml/2006/main" xmlns:p="http://schemas.openxmlformats.org/presentationml/2006/main" xmlns:r="http://schemas.openxmlformats.org/officeDocument/2006/relationships">
   <p:cSld>
     <p:spTree>
@@ -6486,7 +7161,7 @@
                 </a:solidFill>
                 <a:latin typeface="Calibri"/>
               </a:rPr>
-              <a:t>15</a:t>
+              <a:t>16</a:t>
             </a:r>
           </a:p>
         </p:txBody>
@@ -6533,7 +7208,7 @@
 </p:sld>
 </file>
 
-<file path=ppt/slides/slide16.xml><?xml version="1.0" encoding="utf-8"?>
+<file path=ppt/slides/slide17.xml><?xml version="1.0" encoding="utf-8"?>
 <p:sld xmlns:a="http://schemas.openxmlformats.org/drawingml/2006/main" xmlns:p="http://schemas.openxmlformats.org/presentationml/2006/main" xmlns:r="http://schemas.openxmlformats.org/officeDocument/2006/relationships">
   <p:cSld>
     <p:spTree>
@@ -7256,7 +7931,7 @@
                 </a:solidFill>
                 <a:latin typeface="Calibri"/>
               </a:rPr>
-              <a:t>16</a:t>
+              <a:t>17</a:t>
             </a:r>
           </a:p>
         </p:txBody>
@@ -7303,7 +7978,7 @@
 </p:sld>
 </file>
 
-<file path=ppt/slides/slide17.xml><?xml version="1.0" encoding="utf-8"?>
+<file path=ppt/slides/slide18.xml><?xml version="1.0" encoding="utf-8"?>
 <p:sld xmlns:a="http://schemas.openxmlformats.org/drawingml/2006/main" xmlns:p="http://schemas.openxmlformats.org/presentationml/2006/main" xmlns:r="http://schemas.openxmlformats.org/officeDocument/2006/relationships">
   <p:cSld>
     <p:spTree>
@@ -7988,7 +8663,7 @@
                 </a:solidFill>
                 <a:latin typeface="Calibri"/>
               </a:rPr>
-              <a:t>17</a:t>
+              <a:t>18</a:t>
             </a:r>
           </a:p>
         </p:txBody>
@@ -7996,378 +8671,6 @@
       <p:sp>
         <p:nvSpPr>
           <p:cNvPr id="8" name="TextBox 7"/>
-          <p:cNvSpPr txBox="1"/>
-          <p:nvPr/>
-        </p:nvSpPr>
-        <p:spPr>
-          <a:xfrm>
-            <a:off x="685800" y="6355080"/>
-            <a:ext cx="5486400" cy="320040"/>
-          </a:xfrm>
-          <a:prstGeom prst="rect">
-            <a:avLst/>
-          </a:prstGeom>
-          <a:noFill/>
-        </p:spPr>
-        <p:txBody>
-          <a:bodyPr wrap="none">
-            <a:spAutoFit/>
-          </a:bodyPr>
-          <a:lstStyle/>
-          <a:p>
-            <a:r>
-              <a:rPr sz="1000">
-                <a:solidFill>
-                  <a:srgbClr val="666666"/>
-                </a:solidFill>
-                <a:latin typeface="Calibri"/>
-              </a:rPr>
-              <a:t>AIForgeCrew</a:t>
-            </a:r>
-          </a:p>
-        </p:txBody>
-      </p:sp>
-    </p:spTree>
-  </p:cSld>
-  <p:clrMapOvr>
-    <a:masterClrMapping/>
-  </p:clrMapOvr>
-</p:sld>
-</file>
-
-<file path=ppt/slides/slide18.xml><?xml version="1.0" encoding="utf-8"?>
-<p:sld xmlns:a="http://schemas.openxmlformats.org/drawingml/2006/main" xmlns:p="http://schemas.openxmlformats.org/presentationml/2006/main" xmlns:r="http://schemas.openxmlformats.org/officeDocument/2006/relationships">
-  <p:cSld>
-    <p:spTree>
-      <p:nvGrpSpPr>
-        <p:cNvPr id="1" name=""/>
-        <p:cNvGrpSpPr/>
-        <p:nvPr/>
-      </p:nvGrpSpPr>
-      <p:grpSpPr/>
-      <p:sp>
-        <p:nvSpPr>
-          <p:cNvPr id="2" name="TextBox 1"/>
-          <p:cNvSpPr txBox="1"/>
-          <p:nvPr/>
-        </p:nvSpPr>
-        <p:spPr>
-          <a:xfrm>
-            <a:off x="685800" y="411480"/>
-            <a:ext cx="10817352" cy="640080"/>
-          </a:xfrm>
-          <a:prstGeom prst="rect">
-            <a:avLst/>
-          </a:prstGeom>
-          <a:noFill/>
-        </p:spPr>
-        <p:txBody>
-          <a:bodyPr wrap="none">
-            <a:spAutoFit/>
-          </a:bodyPr>
-          <a:lstStyle/>
-          <a:p>
-            <a:r>
-              <a:rPr sz="3000" b="1">
-                <a:solidFill>
-                  <a:srgbClr val="111111"/>
-                </a:solidFill>
-                <a:latin typeface="Calibri"/>
-              </a:rPr>
-              <a:t>How it is kept honest</a:t>
-            </a:r>
-          </a:p>
-        </p:txBody>
-      </p:sp>
-      <p:sp>
-        <p:nvSpPr>
-          <p:cNvPr id="3" name="Rectangle 2"/>
-          <p:cNvSpPr/>
-          <p:nvPr/>
-        </p:nvSpPr>
-        <p:spPr>
-          <a:xfrm>
-            <a:off x="685800" y="1078992"/>
-            <a:ext cx="10817352" cy="17780"/>
-          </a:xfrm>
-          <a:prstGeom prst="rect">
-            <a:avLst/>
-          </a:prstGeom>
-          <a:solidFill>
-            <a:srgbClr val="1F4E79"/>
-          </a:solidFill>
-          <a:ln>
-            <a:noFill/>
-          </a:ln>
-          <a:effectLst/>
-        </p:spPr>
-        <p:style>
-          <a:lnRef idx="1">
-            <a:schemeClr val="accent1"/>
-          </a:lnRef>
-          <a:fillRef idx="3">
-            <a:schemeClr val="accent1"/>
-          </a:fillRef>
-          <a:effectRef idx="2">
-            <a:schemeClr val="accent1"/>
-          </a:effectRef>
-          <a:fontRef idx="minor">
-            <a:schemeClr val="lt1"/>
-          </a:fontRef>
-        </p:style>
-        <p:txBody>
-          <a:bodyPr rtlCol="0" anchor="ctr"/>
-          <a:lstStyle/>
-          <a:p>
-            <a:pPr algn="ctr"/>
-          </a:p>
-        </p:txBody>
-      </p:sp>
-      <p:sp>
-        <p:nvSpPr>
-          <p:cNvPr id="4" name="TextBox 3"/>
-          <p:cNvSpPr txBox="1"/>
-          <p:nvPr/>
-        </p:nvSpPr>
-        <p:spPr>
-          <a:xfrm>
-            <a:off x="685800" y="1188720"/>
-            <a:ext cx="10817352" cy="384048"/>
-          </a:xfrm>
-          <a:prstGeom prst="rect">
-            <a:avLst/>
-          </a:prstGeom>
-          <a:noFill/>
-        </p:spPr>
-        <p:txBody>
-          <a:bodyPr wrap="none">
-            <a:spAutoFit/>
-          </a:bodyPr>
-          <a:lstStyle/>
-          <a:p>
-            <a:r>
-              <a:rPr sz="1400" i="1">
-                <a:solidFill>
-                  <a:srgbClr val="666666"/>
-                </a:solidFill>
-                <a:latin typeface="Calibri"/>
-              </a:rPr>
-              <a:t>Nothing here is claimed without a way to re-check it.</a:t>
-            </a:r>
-          </a:p>
-        </p:txBody>
-      </p:sp>
-      <p:sp>
-        <p:nvSpPr>
-          <p:cNvPr id="5" name="TextBox 4"/>
-          <p:cNvSpPr txBox="1"/>
-          <p:nvPr/>
-        </p:nvSpPr>
-        <p:spPr>
-          <a:xfrm>
-            <a:off x="685800" y="1664208"/>
-            <a:ext cx="10817352" cy="4754880"/>
-          </a:xfrm>
-          <a:prstGeom prst="rect">
-            <a:avLst/>
-          </a:prstGeom>
-          <a:noFill/>
-        </p:spPr>
-        <p:txBody>
-          <a:bodyPr wrap="square">
-            <a:spAutoFit/>
-          </a:bodyPr>
-          <a:lstStyle/>
-          <a:p>
-            <a:pPr>
-              <a:spcAft>
-                <a:spcPts val="800"/>
-              </a:spcAft>
-            </a:pPr>
-            <a:r>
-              <a:rPr b="1" sz="1600">
-                <a:solidFill>
-                  <a:srgbClr val="111111"/>
-                </a:solidFill>
-                <a:latin typeface="Calibri"/>
-              </a:rPr>
-              <a:t>•  ~4,000 tests on main, zero failing</a:t>
-            </a:r>
-            <a:r>
-              <a:rPr sz="1600">
-                <a:solidFill>
-                  <a:srgbClr val="333333"/>
-                </a:solidFill>
-                <a:latin typeface="Calibri"/>
-              </a:rPr>
-              <a:t> — and a fresh-environment reproduction in one command (`make test-docker`) so "works on my machine" is testable.</a:t>
-            </a:r>
-          </a:p>
-          <a:p>
-            <a:pPr>
-              <a:spcAft>
-                <a:spcPts val="800"/>
-              </a:spcAft>
-            </a:pPr>
-            <a:r>
-              <a:rPr b="1" sz="1600">
-                <a:solidFill>
-                  <a:srgbClr val="111111"/>
-                </a:solidFill>
-                <a:latin typeface="Calibri"/>
-              </a:rPr>
-              <a:t>•  Every fix is mutation-pinned</a:t>
-            </a:r>
-            <a:r>
-              <a:rPr sz="1600">
-                <a:solidFill>
-                  <a:srgbClr val="333333"/>
-                </a:solidFill>
-                <a:latin typeface="Calibri"/>
-              </a:rPr>
-              <a:t> — revert the fix and a named test must go red. Sweeps have found fixes that were pinned by nothing.</a:t>
-            </a:r>
-          </a:p>
-          <a:p>
-            <a:pPr>
-              <a:spcAft>
-                <a:spcPts val="800"/>
-              </a:spcAft>
-            </a:pPr>
-            <a:r>
-              <a:rPr b="1" sz="1600">
-                <a:solidFill>
-                  <a:srgbClr val="111111"/>
-                </a:solidFill>
-                <a:latin typeface="Calibri"/>
-              </a:rPr>
-              <a:t>•  New tests are run against the unfixed tree first</a:t>
-            </a:r>
-            <a:r>
-              <a:rPr sz="1600">
-                <a:solidFill>
-                  <a:srgbClr val="333333"/>
-                </a:solidFill>
-                <a:latin typeface="Calibri"/>
-              </a:rPr>
-              <a:t> — a test that passes before the fix proves nothing.</a:t>
-            </a:r>
-          </a:p>
-          <a:p>
-            <a:pPr>
-              <a:spcAft>
-                <a:spcPts val="800"/>
-              </a:spcAft>
-            </a:pPr>
-            <a:r>
-              <a:rPr b="1" sz="1600">
-                <a:solidFill>
-                  <a:srgbClr val="111111"/>
-                </a:solidFill>
-                <a:latin typeface="Calibri"/>
-              </a:rPr>
-              <a:t>•  Real static analysis, not a hand-rolled meter</a:t>
-            </a:r>
-            <a:r>
-              <a:rPr sz="1600">
-                <a:solidFill>
-                  <a:srgbClr val="333333"/>
-                </a:solidFill>
-                <a:latin typeface="Calibri"/>
-              </a:rPr>
-              <a:t> — SonarQube is ground truth; a local complexity counter under-read one function by 38 points.</a:t>
-            </a:r>
-          </a:p>
-          <a:p>
-            <a:pPr>
-              <a:spcAft>
-                <a:spcPts val="800"/>
-              </a:spcAft>
-            </a:pPr>
-            <a:r>
-              <a:rPr b="1" sz="1600">
-                <a:solidFill>
-                  <a:srgbClr val="111111"/>
-                </a:solidFill>
-                <a:latin typeface="Calibri"/>
-              </a:rPr>
-              <a:t>•  Review rounds are repeated until they find nothing</a:t>
-            </a:r>
-            <a:r>
-              <a:rPr sz="1600">
-                <a:solidFill>
-                  <a:srgbClr val="333333"/>
-                </a:solidFill>
-                <a:latin typeface="Calibri"/>
-              </a:rPr>
-              <a:t> — on several features every round found real defects inside the previous round's fixes.</a:t>
-            </a:r>
-          </a:p>
-          <a:p>
-            <a:pPr>
-              <a:spcAft>
-                <a:spcPts val="800"/>
-              </a:spcAft>
-            </a:pPr>
-            <a:r>
-              <a:rPr b="1" sz="1600">
-                <a:solidFill>
-                  <a:srgbClr val="111111"/>
-                </a:solidFill>
-                <a:latin typeface="Calibri"/>
-              </a:rPr>
-              <a:t>•  CI emits its own scan inputs</a:t>
-            </a:r>
-            <a:r>
-              <a:rPr sz="1600">
-                <a:solidFill>
-                  <a:srgbClr val="333333"/>
-                </a:solidFill>
-                <a:latin typeface="Calibri"/>
-              </a:rPr>
-              <a:t> — one build stage produces coverage, JUnit, pinned requirements and an SBOM for Sonar and Black Duck.</a:t>
-            </a:r>
-          </a:p>
-        </p:txBody>
-      </p:sp>
-      <p:sp>
-        <p:nvSpPr>
-          <p:cNvPr id="6" name="TextBox 5"/>
-          <p:cNvSpPr txBox="1"/>
-          <p:nvPr/>
-        </p:nvSpPr>
-        <p:spPr>
-          <a:xfrm>
-            <a:off x="11064240" y="6355080"/>
-            <a:ext cx="822960" cy="320040"/>
-          </a:xfrm>
-          <a:prstGeom prst="rect">
-            <a:avLst/>
-          </a:prstGeom>
-          <a:noFill/>
-        </p:spPr>
-        <p:txBody>
-          <a:bodyPr wrap="none">
-            <a:spAutoFit/>
-          </a:bodyPr>
-          <a:lstStyle/>
-          <a:p>
-            <a:pPr algn="r"/>
-            <a:r>
-              <a:rPr sz="1000">
-                <a:solidFill>
-                  <a:srgbClr val="666666"/>
-                </a:solidFill>
-                <a:latin typeface="Calibri"/>
-              </a:rPr>
-              <a:t>18</a:t>
-            </a:r>
-          </a:p>
-        </p:txBody>
-      </p:sp>
-      <p:sp>
-        <p:nvSpPr>
-          <p:cNvPr id="7" name="TextBox 6"/>
           <p:cNvSpPr txBox="1"/>
           <p:nvPr/>
         </p:nvSpPr>
@@ -8446,7 +8749,7 @@
                 </a:solidFill>
                 <a:latin typeface="Calibri"/>
               </a:rPr>
-              <a:t>In one slide</a:t>
+              <a:t>How it is kept honest</a:t>
             </a:r>
           </a:p>
         </p:txBody>
@@ -8503,7 +8806,41 @@
         </p:nvSpPr>
         <p:spPr>
           <a:xfrm>
-            <a:off x="685800" y="1298448"/>
+            <a:off x="685800" y="1188720"/>
+            <a:ext cx="10817352" cy="384048"/>
+          </a:xfrm>
+          <a:prstGeom prst="rect">
+            <a:avLst/>
+          </a:prstGeom>
+          <a:noFill/>
+        </p:spPr>
+        <p:txBody>
+          <a:bodyPr wrap="none">
+            <a:spAutoFit/>
+          </a:bodyPr>
+          <a:lstStyle/>
+          <a:p>
+            <a:r>
+              <a:rPr sz="1400" i="1">
+                <a:solidFill>
+                  <a:srgbClr val="666666"/>
+                </a:solidFill>
+                <a:latin typeface="Calibri"/>
+              </a:rPr>
+              <a:t>Nothing here is claimed without a way to re-check it.</a:t>
+            </a:r>
+          </a:p>
+        </p:txBody>
+      </p:sp>
+      <p:sp>
+        <p:nvSpPr>
+          <p:cNvPr id="5" name="TextBox 4"/>
+          <p:cNvSpPr txBox="1"/>
+          <p:nvPr/>
+        </p:nvSpPr>
+        <p:spPr>
+          <a:xfrm>
+            <a:off x="685800" y="1664208"/>
             <a:ext cx="10817352" cy="4754880"/>
           </a:xfrm>
           <a:prstGeom prst="rect">
@@ -8519,172 +8856,158 @@
           <a:p>
             <a:pPr>
               <a:spcAft>
-                <a:spcPts val="1300"/>
+                <a:spcPts val="800"/>
               </a:spcAft>
             </a:pPr>
             <a:r>
-              <a:rPr b="1" sz="1700">
+              <a:rPr b="1" sz="1600">
                 <a:solidFill>
                   <a:srgbClr val="111111"/>
                 </a:solidFill>
                 <a:latin typeface="Calibri"/>
               </a:rPr>
-              <a:t>•  Built as one FastAPI process</a:t>
-            </a:r>
-            <a:r>
-              <a:rPr sz="1700">
+              <a:t>•  ~4,000 tests on main, zero failing</a:t>
+            </a:r>
+            <a:r>
+              <a:rPr sz="1600">
                 <a:solidFill>
                   <a:srgbClr val="333333"/>
                 </a:solidFill>
                 <a:latin typeface="Calibri"/>
               </a:rPr>
-              <a:t> — no database to operate, no vendor lock, any OpenAI-compatible model.</a:t>
+              <a:t> — and a fresh-environment reproduction in one command (`make test-docker`) so "works on my machine" is testable.</a:t>
             </a:r>
           </a:p>
           <a:p>
             <a:pPr>
               <a:spcAft>
-                <a:spcPts val="1300"/>
+                <a:spcPts val="800"/>
               </a:spcAft>
             </a:pPr>
             <a:r>
-              <a:rPr b="1" sz="1700">
+              <a:rPr b="1" sz="1600">
                 <a:solidFill>
                   <a:srgbClr val="111111"/>
                 </a:solidFill>
                 <a:latin typeface="Calibri"/>
               </a:rPr>
-              <a:t>•  Two entry points on one engine</a:t>
-            </a:r>
-            <a:r>
-              <a:rPr sz="1700">
+              <a:t>•  Every fix is mutation-pinned</a:t>
+            </a:r>
+            <a:r>
+              <a:rPr sz="1600">
                 <a:solidFill>
                   <a:srgbClr val="333333"/>
                 </a:solidFill>
                 <a:latin typeface="Calibri"/>
               </a:rPr>
-              <a:t> — a chat coding agent and an autonomous ticket-to-PR pipeline of 19 agents.</a:t>
+              <a:t> — revert the fix and a named test must go red. Sweeps have found fixes that were pinned by nothing.</a:t>
             </a:r>
           </a:p>
           <a:p>
             <a:pPr>
               <a:spcAft>
-                <a:spcPts val="1300"/>
+                <a:spcPts val="800"/>
               </a:spcAft>
             </a:pPr>
             <a:r>
-              <a:rPr b="1" sz="1700">
+              <a:rPr b="1" sz="1600">
                 <a:solidFill>
                   <a:srgbClr val="111111"/>
                 </a:solidFill>
                 <a:latin typeface="Calibri"/>
               </a:rPr>
-              <a:t>•  Memory is a folder of markdown with typed edges</a:t>
-            </a:r>
-            <a:r>
-              <a:rPr sz="1700">
+              <a:t>•  New tests are run against the unfixed tree first</a:t>
+            </a:r>
+            <a:r>
+              <a:rPr sz="1600">
                 <a:solidFill>
                   <a:srgbClr val="333333"/>
                 </a:solidFill>
                 <a:latin typeface="Calibri"/>
               </a:rPr>
-              <a:t> — readable, diffable, revertible; vectors are optional, not load-bearing.</a:t>
+              <a:t> — a test that passes before the fix proves nothing.</a:t>
             </a:r>
           </a:p>
           <a:p>
             <a:pPr>
               <a:spcAft>
-                <a:spcPts val="1300"/>
+                <a:spcPts val="800"/>
               </a:spcAft>
             </a:pPr>
             <a:r>
-              <a:rPr sz="1700">
+              <a:rPr b="1" sz="1600">
+                <a:solidFill>
+                  <a:srgbClr val="111111"/>
+                </a:solidFill>
+                <a:latin typeface="Calibri"/>
+              </a:rPr>
+              <a:t>•  Real static analysis, not a hand-rolled meter</a:t>
+            </a:r>
+            <a:r>
+              <a:rPr sz="1600">
                 <a:solidFill>
                   <a:srgbClr val="333333"/>
                 </a:solidFill>
                 <a:latin typeface="Calibri"/>
               </a:rPr>
-              <a:t>•  Context is budgeted from the model's real window, folded once a day, and resumable rather than restartable.</a:t>
+              <a:t> — SonarQube is ground truth; a local complexity counter under-read one function by 38 points.</a:t>
             </a:r>
           </a:p>
           <a:p>
             <a:pPr>
               <a:spcAft>
-                <a:spcPts val="1300"/>
+                <a:spcPts val="800"/>
               </a:spcAft>
             </a:pPr>
             <a:r>
-              <a:rPr sz="1700">
+              <a:rPr b="1" sz="1600">
+                <a:solidFill>
+                  <a:srgbClr val="111111"/>
+                </a:solidFill>
+                <a:latin typeface="Calibri"/>
+              </a:rPr>
+              <a:t>•  Review rounds are repeated until they find nothing</a:t>
+            </a:r>
+            <a:r>
+              <a:rPr sz="1600">
                 <a:solidFill>
                   <a:srgbClr val="333333"/>
                 </a:solidFill>
                 <a:latin typeface="Calibri"/>
               </a:rPr>
-              <a:t>•  Long work runs in isolated git worktrees, fans out four ways, and extends its budget only when it is genuinely making progress.</a:t>
+              <a:t> — on several features every round found real defects inside the previous round's fixes.</a:t>
             </a:r>
           </a:p>
           <a:p>
             <a:pPr>
               <a:spcAft>
-                <a:spcPts val="1300"/>
+                <a:spcPts val="800"/>
               </a:spcAft>
             </a:pPr>
             <a:r>
-              <a:rPr sz="1700">
+              <a:rPr b="1" sz="1600">
+                <a:solidFill>
+                  <a:srgbClr val="111111"/>
+                </a:solidFill>
+                <a:latin typeface="Calibri"/>
+              </a:rPr>
+              <a:t>•  CI emits its own scan inputs</a:t>
+            </a:r>
+            <a:r>
+              <a:rPr sz="1600">
                 <a:solidFill>
                   <a:srgbClr val="333333"/>
                 </a:solidFill>
                 <a:latin typeface="Calibri"/>
               </a:rPr>
-              <a:t>•  Spend is capped by a sliding-window ceiling on every transport and shown in a live meter.</a:t>
-            </a:r>
-          </a:p>
-          <a:p>
-            <a:pPr>
-              <a:spcAft>
-                <a:spcPts val="1300"/>
-              </a:spcAft>
-            </a:pPr>
-            <a:r>
-              <a:rPr sz="1700">
-                <a:solidFill>
-                  <a:srgbClr val="333333"/>
-                </a:solidFill>
-                <a:latin typeface="Calibri"/>
-              </a:rPr>
-              <a:t>•  Autonomy is granted by blast radius; irreversible actions never run themselves.</a:t>
-            </a:r>
-          </a:p>
-          <a:p>
-            <a:pPr>
-              <a:spcAft>
-                <a:spcPts val="1300"/>
-              </a:spcAft>
-            </a:pPr>
-            <a:r>
-              <a:rPr b="1" sz="1700">
-                <a:solidFill>
-                  <a:srgbClr val="111111"/>
-                </a:solidFill>
-                <a:latin typeface="Calibri"/>
-              </a:rPr>
-              <a:t>•  A fleet shares durable knowledge through one admin hub, per group, with secrets filtered before anything is advertised</a:t>
-            </a:r>
-            <a:r>
-              <a:rPr sz="1700">
-                <a:solidFill>
-                  <a:srgbClr val="333333"/>
-                </a:solidFill>
-                <a:latin typeface="Calibri"/>
-              </a:rPr>
-              <a:t> — and per-person identity is the next step.</a:t>
-            </a:r>
-          </a:p>
-        </p:txBody>
-      </p:sp>
-      <p:sp>
-        <p:nvSpPr>
-          <p:cNvPr id="5" name="TextBox 4"/>
+              <a:t> — one build stage produces coverage, JUnit, pinned requirements and an SBOM for Sonar and Black Duck.</a:t>
+            </a:r>
+          </a:p>
+        </p:txBody>
+      </p:sp>
+      <p:sp>
+        <p:nvSpPr>
+          <p:cNvPr id="6" name="TextBox 5"/>
           <p:cNvSpPr txBox="1"/>
           <p:nvPr/>
         </p:nvSpPr>
@@ -8719,7 +9042,7 @@
       </p:sp>
       <p:sp>
         <p:nvSpPr>
-          <p:cNvPr id="6" name="TextBox 5"/>
+          <p:cNvPr id="7" name="TextBox 6"/>
           <p:cNvSpPr txBox="1"/>
           <p:nvPr/>
         </p:nvSpPr>
@@ -9067,6 +9390,383 @@
       <p:sp>
         <p:nvSpPr>
           <p:cNvPr id="7" name="TextBox 6"/>
+          <p:cNvSpPr txBox="1"/>
+          <p:nvPr/>
+        </p:nvSpPr>
+        <p:spPr>
+          <a:xfrm>
+            <a:off x="685800" y="6355080"/>
+            <a:ext cx="5486400" cy="320040"/>
+          </a:xfrm>
+          <a:prstGeom prst="rect">
+            <a:avLst/>
+          </a:prstGeom>
+          <a:noFill/>
+        </p:spPr>
+        <p:txBody>
+          <a:bodyPr wrap="none">
+            <a:spAutoFit/>
+          </a:bodyPr>
+          <a:lstStyle/>
+          <a:p>
+            <a:r>
+              <a:rPr sz="1000">
+                <a:solidFill>
+                  <a:srgbClr val="666666"/>
+                </a:solidFill>
+                <a:latin typeface="Calibri"/>
+              </a:rPr>
+              <a:t>AIForgeCrew</a:t>
+            </a:r>
+          </a:p>
+        </p:txBody>
+      </p:sp>
+    </p:spTree>
+  </p:cSld>
+  <p:clrMapOvr>
+    <a:masterClrMapping/>
+  </p:clrMapOvr>
+</p:sld>
+</file>
+
+<file path=ppt/slides/slide20.xml><?xml version="1.0" encoding="utf-8"?>
+<p:sld xmlns:a="http://schemas.openxmlformats.org/drawingml/2006/main" xmlns:p="http://schemas.openxmlformats.org/presentationml/2006/main" xmlns:r="http://schemas.openxmlformats.org/officeDocument/2006/relationships">
+  <p:cSld>
+    <p:spTree>
+      <p:nvGrpSpPr>
+        <p:cNvPr id="1" name=""/>
+        <p:cNvGrpSpPr/>
+        <p:nvPr/>
+      </p:nvGrpSpPr>
+      <p:grpSpPr/>
+      <p:sp>
+        <p:nvSpPr>
+          <p:cNvPr id="2" name="TextBox 1"/>
+          <p:cNvSpPr txBox="1"/>
+          <p:nvPr/>
+        </p:nvSpPr>
+        <p:spPr>
+          <a:xfrm>
+            <a:off x="685800" y="411480"/>
+            <a:ext cx="10817352" cy="640080"/>
+          </a:xfrm>
+          <a:prstGeom prst="rect">
+            <a:avLst/>
+          </a:prstGeom>
+          <a:noFill/>
+        </p:spPr>
+        <p:txBody>
+          <a:bodyPr wrap="none">
+            <a:spAutoFit/>
+          </a:bodyPr>
+          <a:lstStyle/>
+          <a:p>
+            <a:r>
+              <a:rPr sz="3000" b="1">
+                <a:solidFill>
+                  <a:srgbClr val="111111"/>
+                </a:solidFill>
+                <a:latin typeface="Calibri"/>
+              </a:rPr>
+              <a:t>In one slide</a:t>
+            </a:r>
+          </a:p>
+        </p:txBody>
+      </p:sp>
+      <p:sp>
+        <p:nvSpPr>
+          <p:cNvPr id="3" name="Rectangle 2"/>
+          <p:cNvSpPr/>
+          <p:nvPr/>
+        </p:nvSpPr>
+        <p:spPr>
+          <a:xfrm>
+            <a:off x="685800" y="1078992"/>
+            <a:ext cx="10817352" cy="17780"/>
+          </a:xfrm>
+          <a:prstGeom prst="rect">
+            <a:avLst/>
+          </a:prstGeom>
+          <a:solidFill>
+            <a:srgbClr val="1F4E79"/>
+          </a:solidFill>
+          <a:ln>
+            <a:noFill/>
+          </a:ln>
+          <a:effectLst/>
+        </p:spPr>
+        <p:style>
+          <a:lnRef idx="1">
+            <a:schemeClr val="accent1"/>
+          </a:lnRef>
+          <a:fillRef idx="3">
+            <a:schemeClr val="accent1"/>
+          </a:fillRef>
+          <a:effectRef idx="2">
+            <a:schemeClr val="accent1"/>
+          </a:effectRef>
+          <a:fontRef idx="minor">
+            <a:schemeClr val="lt1"/>
+          </a:fontRef>
+        </p:style>
+        <p:txBody>
+          <a:bodyPr rtlCol="0" anchor="ctr"/>
+          <a:lstStyle/>
+          <a:p>
+            <a:pPr algn="ctr"/>
+          </a:p>
+        </p:txBody>
+      </p:sp>
+      <p:sp>
+        <p:nvSpPr>
+          <p:cNvPr id="4" name="TextBox 3"/>
+          <p:cNvSpPr txBox="1"/>
+          <p:nvPr/>
+        </p:nvSpPr>
+        <p:spPr>
+          <a:xfrm>
+            <a:off x="685800" y="1298448"/>
+            <a:ext cx="10817352" cy="4754880"/>
+          </a:xfrm>
+          <a:prstGeom prst="rect">
+            <a:avLst/>
+          </a:prstGeom>
+          <a:noFill/>
+        </p:spPr>
+        <p:txBody>
+          <a:bodyPr wrap="square">
+            <a:spAutoFit/>
+          </a:bodyPr>
+          <a:lstStyle/>
+          <a:p>
+            <a:pPr>
+              <a:spcAft>
+                <a:spcPts val="1300"/>
+              </a:spcAft>
+            </a:pPr>
+            <a:r>
+              <a:rPr b="1" sz="1700">
+                <a:solidFill>
+                  <a:srgbClr val="111111"/>
+                </a:solidFill>
+                <a:latin typeface="Calibri"/>
+              </a:rPr>
+              <a:t>•  Built as one FastAPI process</a:t>
+            </a:r>
+            <a:r>
+              <a:rPr sz="1700">
+                <a:solidFill>
+                  <a:srgbClr val="333333"/>
+                </a:solidFill>
+                <a:latin typeface="Calibri"/>
+              </a:rPr>
+              <a:t> — no database to operate, no vendor lock, any OpenAI-compatible model.</a:t>
+            </a:r>
+          </a:p>
+          <a:p>
+            <a:pPr>
+              <a:spcAft>
+                <a:spcPts val="1300"/>
+              </a:spcAft>
+            </a:pPr>
+            <a:r>
+              <a:rPr b="1" sz="1700">
+                <a:solidFill>
+                  <a:srgbClr val="111111"/>
+                </a:solidFill>
+                <a:latin typeface="Calibri"/>
+              </a:rPr>
+              <a:t>•  Two entry points on one engine</a:t>
+            </a:r>
+            <a:r>
+              <a:rPr sz="1700">
+                <a:solidFill>
+                  <a:srgbClr val="333333"/>
+                </a:solidFill>
+                <a:latin typeface="Calibri"/>
+              </a:rPr>
+              <a:t> — a chat coding agent and an autonomous ticket-to-PR pipeline of 19 agents.</a:t>
+            </a:r>
+          </a:p>
+          <a:p>
+            <a:pPr>
+              <a:spcAft>
+                <a:spcPts val="1300"/>
+              </a:spcAft>
+            </a:pPr>
+            <a:r>
+              <a:rPr b="1" sz="1700">
+                <a:solidFill>
+                  <a:srgbClr val="111111"/>
+                </a:solidFill>
+                <a:latin typeface="Calibri"/>
+              </a:rPr>
+              <a:t>•  Memory is a folder of markdown with typed edges</a:t>
+            </a:r>
+            <a:r>
+              <a:rPr sz="1700">
+                <a:solidFill>
+                  <a:srgbClr val="333333"/>
+                </a:solidFill>
+                <a:latin typeface="Calibri"/>
+              </a:rPr>
+              <a:t> — readable, diffable, revertible; vectors are optional, not load-bearing.</a:t>
+            </a:r>
+          </a:p>
+          <a:p>
+            <a:pPr>
+              <a:spcAft>
+                <a:spcPts val="1300"/>
+              </a:spcAft>
+            </a:pPr>
+            <a:r>
+              <a:rPr sz="1700">
+                <a:solidFill>
+                  <a:srgbClr val="333333"/>
+                </a:solidFill>
+                <a:latin typeface="Calibri"/>
+              </a:rPr>
+              <a:t>•  Context is budgeted from the model's real window, folded once a day, and resumable rather than restartable.</a:t>
+            </a:r>
+          </a:p>
+          <a:p>
+            <a:pPr>
+              <a:spcAft>
+                <a:spcPts val="1300"/>
+              </a:spcAft>
+            </a:pPr>
+            <a:r>
+              <a:rPr sz="1700">
+                <a:solidFill>
+                  <a:srgbClr val="333333"/>
+                </a:solidFill>
+                <a:latin typeface="Calibri"/>
+              </a:rPr>
+              <a:t>•  Long work runs in isolated git worktrees, fans out four ways, and extends its budget only when it is genuinely making progress.</a:t>
+            </a:r>
+          </a:p>
+          <a:p>
+            <a:pPr>
+              <a:spcAft>
+                <a:spcPts val="1300"/>
+              </a:spcAft>
+            </a:pPr>
+            <a:r>
+              <a:rPr sz="1700">
+                <a:solidFill>
+                  <a:srgbClr val="333333"/>
+                </a:solidFill>
+                <a:latin typeface="Calibri"/>
+              </a:rPr>
+              <a:t>•  Spend is capped by a sliding-window ceiling on every transport and shown in a live meter.</a:t>
+            </a:r>
+          </a:p>
+          <a:p>
+            <a:pPr>
+              <a:spcAft>
+                <a:spcPts val="1300"/>
+              </a:spcAft>
+            </a:pPr>
+            <a:r>
+              <a:rPr sz="1700">
+                <a:solidFill>
+                  <a:srgbClr val="333333"/>
+                </a:solidFill>
+                <a:latin typeface="Calibri"/>
+              </a:rPr>
+              <a:t>•  Autonomy is granted by blast radius; irreversible actions never run themselves.</a:t>
+            </a:r>
+          </a:p>
+          <a:p>
+            <a:pPr>
+              <a:spcAft>
+                <a:spcPts val="1300"/>
+              </a:spcAft>
+            </a:pPr>
+            <a:r>
+              <a:rPr b="1" sz="1700">
+                <a:solidFill>
+                  <a:srgbClr val="111111"/>
+                </a:solidFill>
+                <a:latin typeface="Calibri"/>
+              </a:rPr>
+              <a:t>•  No telemetry, no vendor account, no hosted service</a:t>
+            </a:r>
+            <a:r>
+              <a:rPr sz="1700">
+                <a:solidFill>
+                  <a:srgbClr val="333333"/>
+                </a:solidFill>
+                <a:latin typeface="Calibri"/>
+              </a:rPr>
+              <a:t> — you own the model endpoint, the data and the machine.</a:t>
+            </a:r>
+          </a:p>
+          <a:p>
+            <a:pPr>
+              <a:spcAft>
+                <a:spcPts val="1300"/>
+              </a:spcAft>
+            </a:pPr>
+            <a:r>
+              <a:rPr b="1" sz="1700">
+                <a:solidFill>
+                  <a:srgbClr val="111111"/>
+                </a:solidFill>
+                <a:latin typeface="Calibri"/>
+              </a:rPr>
+              <a:t>•  A fleet shares durable knowledge through one admin hub, per group, with secrets filtered before anything is advertised</a:t>
+            </a:r>
+            <a:r>
+              <a:rPr sz="1700">
+                <a:solidFill>
+                  <a:srgbClr val="333333"/>
+                </a:solidFill>
+                <a:latin typeface="Calibri"/>
+              </a:rPr>
+              <a:t> — and per-person identity is the next step.</a:t>
+            </a:r>
+          </a:p>
+        </p:txBody>
+      </p:sp>
+      <p:sp>
+        <p:nvSpPr>
+          <p:cNvPr id="5" name="TextBox 4"/>
+          <p:cNvSpPr txBox="1"/>
+          <p:nvPr/>
+        </p:nvSpPr>
+        <p:spPr>
+          <a:xfrm>
+            <a:off x="11064240" y="6355080"/>
+            <a:ext cx="822960" cy="320040"/>
+          </a:xfrm>
+          <a:prstGeom prst="rect">
+            <a:avLst/>
+          </a:prstGeom>
+          <a:noFill/>
+        </p:spPr>
+        <p:txBody>
+          <a:bodyPr wrap="none">
+            <a:spAutoFit/>
+          </a:bodyPr>
+          <a:lstStyle/>
+          <a:p>
+            <a:pPr algn="r"/>
+            <a:r>
+              <a:rPr sz="1000">
+                <a:solidFill>
+                  <a:srgbClr val="666666"/>
+                </a:solidFill>
+                <a:latin typeface="Calibri"/>
+              </a:rPr>
+              <a:t>20</a:t>
+            </a:r>
+          </a:p>
+        </p:txBody>
+      </p:sp>
+      <p:sp>
+        <p:nvSpPr>
+          <p:cNvPr id="6" name="TextBox 5"/>
           <p:cNvSpPr txBox="1"/>
           <p:nvPr/>
         </p:nvSpPr>

--- a/docs/AIForgeCrew-Overview.pptx
+++ b/docs/AIForgeCrew-Overview.pptx
@@ -24,6 +24,7 @@
     <p:sldId id="272" r:id="rId23"/>
     <p:sldId id="273" r:id="rId24"/>
     <p:sldId id="274" r:id="rId25"/>
+    <p:sldId id="275" r:id="rId26"/>
   </p:sldIdLst>
   <p:sldSz cx="12191695" cy="6858000" type="screen4x3"/>
   <p:notesSz cx="6858000" cy="9144000"/>
@@ -10536,7 +10537,7 @@
                 </a:solidFill>
                 <a:latin typeface="Segoe UI"/>
               </a:rPr>
-              <a:t>Security and supply chain</a:t>
+              <a:t>Containment: what may run, what may leave</a:t>
             </a:r>
           </a:p>
         </p:txBody>
@@ -10575,7 +10576,7 @@
                 </a:solidFill>
                 <a:latin typeface="Segoe UI"/>
               </a:rPr>
-              <a:t>No telemetry. Nothing leaves the machine unless you point it somewhere.</a:t>
+              <a:t>Two questions, one place each — a gate on execution, a gate on egress.</a:t>
             </a:r>
           </a:p>
         </p:txBody>
@@ -10658,7 +10659,7 @@
                 </a:solidFill>
                 <a:latin typeface="Segoe UI"/>
               </a:rPr>
-              <a:t>Stated plainly: by default the chat agent has full, unsandboxed shell access on the host. The workspace jail guards file tools, not arbitrary shell — run untrusted work in container mode.</a:t>
+              <a:t>Kill switches: AIFORGE_EGRESS_OFF · AIFORGE_&lt;CLASS&gt;_DISABLE · AIFORGE_WEB_FETCH_DISABLE · AIFORGE_UPLOAD_DISABLE · AIFORGE_TOOL_POLICY="run_command=deny"</a:t>
             </a:r>
           </a:p>
         </p:txBody>
@@ -10711,7 +10712,7 @@
         <p:spPr>
           <a:xfrm>
             <a:off x="685800" y="1325880"/>
-            <a:ext cx="5486400" cy="228600"/>
+            <a:ext cx="5349240" cy="237744"/>
           </a:xfrm>
           <a:prstGeom prst="rect">
             <a:avLst/>
@@ -10732,25 +10733,307 @@
             <a:r>
               <a:rPr sz="1000" b="1">
                 <a:solidFill>
-                  <a:srgbClr val="6B6B6B"/>
-                </a:solidFill>
-                <a:latin typeface="Segoe UI"/>
-              </a:rPr>
-              <a:t>SCANNED AND TRIAGED</a:t>
-            </a:r>
-          </a:p>
-        </p:txBody>
-      </p:sp>
-      <p:sp>
-        <p:nvSpPr>
-          <p:cNvPr id="8" name="Rounded Rectangle 7"/>
+                  <a:srgbClr val="1F4E79"/>
+                </a:solidFill>
+                <a:latin typeface="Segoe UI"/>
+              </a:rPr>
+              <a:t>WHAT MAY RUN  —  a tool call reaching the shell</a:t>
+            </a:r>
+          </a:p>
+        </p:txBody>
+      </p:sp>
+      <p:sp>
+        <p:nvSpPr>
+          <p:cNvPr id="8" name="TextBox 7"/>
+          <p:cNvSpPr txBox="1"/>
+          <p:nvPr/>
+        </p:nvSpPr>
+        <p:spPr>
+          <a:xfrm>
+            <a:off x="6355080" y="1325880"/>
+            <a:ext cx="5148072" cy="237744"/>
+          </a:xfrm>
+          <a:prstGeom prst="rect">
+            <a:avLst/>
+          </a:prstGeom>
+          <a:noFill/>
+        </p:spPr>
+        <p:txBody>
+          <a:bodyPr wrap="square" anchor="t" lIns="0" rIns="0" tIns="0" bIns="0">
+            <a:spAutoFit/>
+          </a:bodyPr>
+          <a:lstStyle/>
+          <a:p>
+            <a:pPr algn="l">
+              <a:spcAft>
+                <a:spcPts val="0"/>
+              </a:spcAft>
+            </a:pPr>
+            <a:r>
+              <a:rPr sz="1000" b="1">
+                <a:solidFill>
+                  <a:srgbClr val="5B3A6E"/>
+                </a:solidFill>
+                <a:latin typeface="Segoe UI"/>
+              </a:rPr>
+              <a:t>WHAT MAY LEAVE  —  a byte reaching the network</a:t>
+            </a:r>
+          </a:p>
+        </p:txBody>
+      </p:sp>
+      <p:sp>
+        <p:nvSpPr>
+          <p:cNvPr id="9" name="Rounded Rectangle 8"/>
           <p:cNvSpPr/>
           <p:nvPr/>
         </p:nvSpPr>
         <p:spPr>
           <a:xfrm>
-            <a:off x="685800" y="1600200"/>
-            <a:ext cx="1691640" cy="1051560"/>
+            <a:off x="685800" y="1664208"/>
+            <a:ext cx="5349240" cy="713232"/>
+          </a:xfrm>
+          <a:prstGeom prst="roundRect">
+            <a:avLst>
+              <a:gd name="adj" fmla="val 10000"/>
+            </a:avLst>
+          </a:prstGeom>
+          <a:solidFill>
+            <a:srgbClr val="DCE7F2"/>
+          </a:solidFill>
+          <a:ln w="12700">
+            <a:solidFill>
+              <a:srgbClr val="1F4E79"/>
+            </a:solidFill>
+          </a:ln>
+          <a:effectLst/>
+        </p:spPr>
+        <p:style>
+          <a:lnRef idx="1">
+            <a:schemeClr val="accent1"/>
+          </a:lnRef>
+          <a:fillRef idx="3">
+            <a:schemeClr val="accent1"/>
+          </a:fillRef>
+          <a:effectRef idx="2">
+            <a:schemeClr val="accent1"/>
+          </a:effectRef>
+          <a:fontRef idx="minor">
+            <a:schemeClr val="lt1"/>
+          </a:fontRef>
+        </p:style>
+        <p:txBody>
+          <a:bodyPr rtlCol="0" anchor="ctr" wrap="square" lIns="54864" rIns="54864" tIns="27432" bIns="27432"/>
+          <a:lstStyle/>
+          <a:p>
+            <a:pPr algn="ctr"/>
+            <a:r>
+              <a:rPr sz="1150" b="1">
+                <a:solidFill>
+                  <a:srgbClr val="1F4E79"/>
+                </a:solidFill>
+                <a:latin typeface="Segoe UI"/>
+              </a:rPr>
+              <a:t>1 · Role tool allowlist</a:t>
+            </a:r>
+          </a:p>
+          <a:p>
+            <a:pPr algn="ctr"/>
+            <a:r>
+              <a:rPr sz="850" b="0">
+                <a:solidFill>
+                  <a:srgbClr val="1A1A1A"/>
+                </a:solidFill>
+                <a:latin typeface="Segoe UI"/>
+              </a:rPr>
+              <a:t>agents.yaml allowed / forbidden per role. A tool off the list is</a:t>
+            </a:r>
+          </a:p>
+          <a:p>
+            <a:pPr algn="ctr"/>
+            <a:r>
+              <a:rPr sz="850" b="0">
+                <a:solidFill>
+                  <a:srgbClr val="1A1A1A"/>
+                </a:solidFill>
+                <a:latin typeface="Segoe UI"/>
+              </a:rPr>
+              <a:t>never offered to the model; forbidden=ALL is a tool-less role.</a:t>
+            </a:r>
+          </a:p>
+        </p:txBody>
+      </p:sp>
+      <p:sp>
+        <p:nvSpPr>
+          <p:cNvPr id="10" name="Rounded Rectangle 9"/>
+          <p:cNvSpPr/>
+          <p:nvPr/>
+        </p:nvSpPr>
+        <p:spPr>
+          <a:xfrm>
+            <a:off x="685800" y="2459736"/>
+            <a:ext cx="5349240" cy="713232"/>
+          </a:xfrm>
+          <a:prstGeom prst="roundRect">
+            <a:avLst>
+              <a:gd name="adj" fmla="val 10000"/>
+            </a:avLst>
+          </a:prstGeom>
+          <a:solidFill>
+            <a:srgbClr val="DCE7F2"/>
+          </a:solidFill>
+          <a:ln w="12700">
+            <a:solidFill>
+              <a:srgbClr val="1F4E79"/>
+            </a:solidFill>
+          </a:ln>
+          <a:effectLst/>
+        </p:spPr>
+        <p:style>
+          <a:lnRef idx="1">
+            <a:schemeClr val="accent1"/>
+          </a:lnRef>
+          <a:fillRef idx="3">
+            <a:schemeClr val="accent1"/>
+          </a:fillRef>
+          <a:effectRef idx="2">
+            <a:schemeClr val="accent1"/>
+          </a:effectRef>
+          <a:fontRef idx="minor">
+            <a:schemeClr val="lt1"/>
+          </a:fontRef>
+        </p:style>
+        <p:txBody>
+          <a:bodyPr rtlCol="0" anchor="ctr" wrap="square" lIns="54864" rIns="54864" tIns="27432" bIns="27432"/>
+          <a:lstStyle/>
+          <a:p>
+            <a:pPr algn="ctr"/>
+            <a:r>
+              <a:rPr sz="1150" b="1">
+                <a:solidFill>
+                  <a:srgbClr val="1F4E79"/>
+                </a:solidFill>
+                <a:latin typeface="Segoe UI"/>
+              </a:rPr>
+              <a:t>2 · Per-tool policy: allow · ask · deny</a:t>
+            </a:r>
+          </a:p>
+          <a:p>
+            <a:pPr algn="ctr"/>
+            <a:r>
+              <a:rPr sz="850" b="0">
+                <a:solidFill>
+                  <a:srgbClr val="1A1A1A"/>
+                </a:solidFill>
+                <a:latin typeface="Segoe UI"/>
+              </a:rPr>
+              <a:t>AIFORGE_TOOL_POLICY. deny is a hard refusal, autonomous runs too;</a:t>
+            </a:r>
+          </a:p>
+          <a:p>
+            <a:pPr algn="ctr"/>
+            <a:r>
+              <a:rPr sz="850" b="0">
+                <a:solidFill>
+                  <a:srgbClr val="1A1A1A"/>
+                </a:solidFill>
+                <a:latin typeface="Segoe UI"/>
+              </a:rPr>
+              <a:t>ask blocks for Approve/Reject whenever a human is attached.</a:t>
+            </a:r>
+          </a:p>
+        </p:txBody>
+      </p:sp>
+      <p:sp>
+        <p:nvSpPr>
+          <p:cNvPr id="11" name="Rounded Rectangle 10"/>
+          <p:cNvSpPr/>
+          <p:nvPr/>
+        </p:nvSpPr>
+        <p:spPr>
+          <a:xfrm>
+            <a:off x="685800" y="3255264"/>
+            <a:ext cx="5349240" cy="713232"/>
+          </a:xfrm>
+          <a:prstGeom prst="roundRect">
+            <a:avLst>
+              <a:gd name="adj" fmla="val 10000"/>
+            </a:avLst>
+          </a:prstGeom>
+          <a:solidFill>
+            <a:srgbClr val="DCE7F2"/>
+          </a:solidFill>
+          <a:ln w="12700">
+            <a:solidFill>
+              <a:srgbClr val="1F4E79"/>
+            </a:solidFill>
+          </a:ln>
+          <a:effectLst/>
+        </p:spPr>
+        <p:style>
+          <a:lnRef idx="1">
+            <a:schemeClr val="accent1"/>
+          </a:lnRef>
+          <a:fillRef idx="3">
+            <a:schemeClr val="accent1"/>
+          </a:fillRef>
+          <a:effectRef idx="2">
+            <a:schemeClr val="accent1"/>
+          </a:effectRef>
+          <a:fontRef idx="minor">
+            <a:schemeClr val="lt1"/>
+          </a:fontRef>
+        </p:style>
+        <p:txBody>
+          <a:bodyPr rtlCol="0" anchor="ctr" wrap="square" lIns="54864" rIns="54864" tIns="27432" bIns="27432"/>
+          <a:lstStyle/>
+          <a:p>
+            <a:pPr algn="ctr"/>
+            <a:r>
+              <a:rPr sz="1150" b="1">
+                <a:solidFill>
+                  <a:srgbClr val="1F4E79"/>
+                </a:solidFill>
+                <a:latin typeface="Segoe UI"/>
+              </a:rPr>
+              <a:t>3 · Risk verdict on every shell string</a:t>
+            </a:r>
+          </a:p>
+          <a:p>
+            <a:pPr algn="ctr"/>
+            <a:r>
+              <a:rPr sz="850" b="0">
+                <a:solidFill>
+                  <a:srgbClr val="1A1A1A"/>
+                </a:solidFill>
+                <a:latin typeface="Segoe UI"/>
+              </a:rPr>
+              <a:t>safe · caution · dangerous — dangerous forces at least ASK.</a:t>
+            </a:r>
+          </a:p>
+          <a:p>
+            <a:pPr algn="ctr"/>
+            <a:r>
+              <a:rPr sz="850" b="0">
+                <a:solidFill>
+                  <a:srgbClr val="1A1A1A"/>
+                </a:solidFill>
+                <a:latin typeface="Segoe UI"/>
+              </a:rPr>
+              <a:t>run_command · bash · serve · watch_until · ui_check all assessed.</a:t>
+            </a:r>
+          </a:p>
+        </p:txBody>
+      </p:sp>
+      <p:sp>
+        <p:nvSpPr>
+          <p:cNvPr id="12" name="Rounded Rectangle 11"/>
+          <p:cNvSpPr/>
+          <p:nvPr/>
+        </p:nvSpPr>
+        <p:spPr>
+          <a:xfrm>
+            <a:off x="685800" y="4050792"/>
+            <a:ext cx="5349240" cy="713232"/>
           </a:xfrm>
           <a:prstGeom prst="roundRect">
             <a:avLst>
@@ -10787,13 +11070,13 @@
           <a:p>
             <a:pPr algn="ctr"/>
             <a:r>
-              <a:rPr sz="2200" b="1">
+              <a:rPr sz="1150" b="1">
                 <a:solidFill>
                   <a:srgbClr val="1E6B52"/>
                 </a:solidFill>
                 <a:latin typeface="Segoe UI"/>
               </a:rPr>
-              <a:t>0</a:t>
+              <a:t>4 · Floors the toggles cannot lower</a:t>
             </a:r>
           </a:p>
           <a:p>
@@ -10805,21 +11088,33 @@
                 </a:solidFill>
                 <a:latin typeface="Segoe UI"/>
               </a:rPr>
-              <a:t>Sonar bugs</a:t>
-            </a:r>
-          </a:p>
-        </p:txBody>
-      </p:sp>
-      <p:sp>
-        <p:nvSpPr>
-          <p:cNvPr id="9" name="Rounded Rectangle 8"/>
+              <a:t>delete guard fires with approvals off · git add -A refused ·</a:t>
+            </a:r>
+          </a:p>
+          <a:p>
+            <a:pPr algn="ctr"/>
+            <a:r>
+              <a:rPr sz="850" b="0">
+                <a:solidFill>
+                  <a:srgbClr val="1A1A1A"/>
+                </a:solidFill>
+                <a:latin typeface="Segoe UI"/>
+              </a:rPr>
+              <a:t>push always asks · writes must land inside the ticket's scope globs.</a:t>
+            </a:r>
+          </a:p>
+        </p:txBody>
+      </p:sp>
+      <p:sp>
+        <p:nvSpPr>
+          <p:cNvPr id="13" name="Rounded Rectangle 12"/>
           <p:cNvSpPr/>
           <p:nvPr/>
         </p:nvSpPr>
         <p:spPr>
           <a:xfrm>
-            <a:off x="2532888" y="1600200"/>
-            <a:ext cx="1691640" cy="1051560"/>
+            <a:off x="685800" y="4846320"/>
+            <a:ext cx="5349240" cy="713232"/>
           </a:xfrm>
           <a:prstGeom prst="roundRect">
             <a:avLst>
@@ -10856,13 +11151,13 @@
           <a:p>
             <a:pPr algn="ctr"/>
             <a:r>
-              <a:rPr sz="2200" b="1">
+              <a:rPr sz="1150" b="1">
                 <a:solidFill>
                   <a:srgbClr val="1E6B52"/>
                 </a:solidFill>
                 <a:latin typeface="Segoe UI"/>
               </a:rPr>
-              <a:t>0</a:t>
+              <a:t>5 · Where it runs at all</a:t>
             </a:r>
           </a:p>
           <a:p>
@@ -10874,21 +11169,438 @@
                 </a:solidFill>
                 <a:latin typeface="Segoe UI"/>
               </a:rPr>
-              <a:t>Trivy findings</a:t>
-            </a:r>
-          </a:p>
-        </p:txBody>
-      </p:sp>
-      <p:sp>
-        <p:nvSpPr>
-          <p:cNvPr id="10" name="Rounded Rectangle 9"/>
+              <a:t>Workspace jail on by default; Docker sandbox opt-in, and</a:t>
+            </a:r>
+          </a:p>
+          <a:p>
+            <a:pPr algn="ctr"/>
+            <a:r>
+              <a:rPr sz="850" b="0">
+                <a:solidFill>
+                  <a:srgbClr val="1A1A1A"/>
+                </a:solidFill>
+                <a:latin typeface="Segoe UI"/>
+              </a:rPr>
+              <a:t>AIFORGE_SANDBOX_REQUIRED=1 refuses to fall back to the host.</a:t>
+            </a:r>
+          </a:p>
+        </p:txBody>
+      </p:sp>
+      <p:sp>
+        <p:nvSpPr>
+          <p:cNvPr id="14" name="Rounded Rectangle 13"/>
           <p:cNvSpPr/>
           <p:nvPr/>
         </p:nvSpPr>
         <p:spPr>
           <a:xfrm>
-            <a:off x="4379976" y="1600200"/>
-            <a:ext cx="1691640" cy="1051560"/>
+            <a:off x="6355080" y="1664208"/>
+            <a:ext cx="5148072" cy="713232"/>
+          </a:xfrm>
+          <a:prstGeom prst="roundRect">
+            <a:avLst>
+              <a:gd name="adj" fmla="val 10000"/>
+            </a:avLst>
+          </a:prstGeom>
+          <a:solidFill>
+            <a:srgbClr val="EAE1F0"/>
+          </a:solidFill>
+          <a:ln w="12700">
+            <a:solidFill>
+              <a:srgbClr val="5B3A6E"/>
+            </a:solidFill>
+          </a:ln>
+          <a:effectLst/>
+        </p:spPr>
+        <p:style>
+          <a:lnRef idx="1">
+            <a:schemeClr val="accent1"/>
+          </a:lnRef>
+          <a:fillRef idx="3">
+            <a:schemeClr val="accent1"/>
+          </a:fillRef>
+          <a:effectRef idx="2">
+            <a:schemeClr val="accent1"/>
+          </a:effectRef>
+          <a:fontRef idx="minor">
+            <a:schemeClr val="lt1"/>
+          </a:fontRef>
+        </p:style>
+        <p:txBody>
+          <a:bodyPr rtlCol="0" anchor="ctr" wrap="square" lIns="54864" rIns="54864" tIns="27432" bIns="27432"/>
+          <a:lstStyle/>
+          <a:p>
+            <a:pPr algn="ctr"/>
+            <a:r>
+              <a:rPr sz="1150" b="1">
+                <a:solidFill>
+                  <a:srgbClr val="5B3A6E"/>
+                </a:solidFill>
+                <a:latin typeface="Segoe UI"/>
+              </a:rPr>
+              <a:t>1 · One module decides — net/egress.py</a:t>
+            </a:r>
+          </a:p>
+          <a:p>
+            <a:pPr algn="ctr"/>
+            <a:r>
+              <a:rPr sz="850" b="0">
+                <a:solidFill>
+                  <a:srgbClr val="1A1A1A"/>
+                </a:solidFill>
+                <a:latin typeface="Segoe UI"/>
+              </a:rPr>
+              <a:t>The switches used to be read in five places and honoured in two;</a:t>
+            </a:r>
+          </a:p>
+          <a:p>
+            <a:pPr algn="ctr"/>
+            <a:r>
+              <a:rPr sz="850" b="0">
+                <a:solidFill>
+                  <a:srgbClr val="1A1A1A"/>
+                </a:solidFill>
+                <a:latin typeface="Segoe UI"/>
+              </a:rPr>
+              <a:t>web_fetch closed while fetch_url, web_read, crawl, browse sailed past.</a:t>
+            </a:r>
+          </a:p>
+        </p:txBody>
+      </p:sp>
+      <p:sp>
+        <p:nvSpPr>
+          <p:cNvPr id="15" name="Rounded Rectangle 14"/>
+          <p:cNvSpPr/>
+          <p:nvPr/>
+        </p:nvSpPr>
+        <p:spPr>
+          <a:xfrm>
+            <a:off x="6355080" y="2459736"/>
+            <a:ext cx="5148072" cy="713232"/>
+          </a:xfrm>
+          <a:prstGeom prst="roundRect">
+            <a:avLst>
+              <a:gd name="adj" fmla="val 10000"/>
+            </a:avLst>
+          </a:prstGeom>
+          <a:solidFill>
+            <a:srgbClr val="EAE1F0"/>
+          </a:solidFill>
+          <a:ln w="12700">
+            <a:solidFill>
+              <a:srgbClr val="5B3A6E"/>
+            </a:solidFill>
+          </a:ln>
+          <a:effectLst/>
+        </p:spPr>
+        <p:style>
+          <a:lnRef idx="1">
+            <a:schemeClr val="accent1"/>
+          </a:lnRef>
+          <a:fillRef idx="3">
+            <a:schemeClr val="accent1"/>
+          </a:fillRef>
+          <a:effectRef idx="2">
+            <a:schemeClr val="accent1"/>
+          </a:effectRef>
+          <a:fontRef idx="minor">
+            <a:schemeClr val="lt1"/>
+          </a:fontRef>
+        </p:style>
+        <p:txBody>
+          <a:bodyPr rtlCol="0" anchor="ctr" wrap="square" lIns="54864" rIns="54864" tIns="27432" bIns="27432"/>
+          <a:lstStyle/>
+          <a:p>
+            <a:pPr algn="ctr"/>
+            <a:r>
+              <a:rPr sz="1150" b="1">
+                <a:solidFill>
+                  <a:srgbClr val="5B3A6E"/>
+                </a:solidFill>
+                <a:latin typeface="Segoe UI"/>
+              </a:rPr>
+              <a:t>2 · Host allowlist, default DENY</a:t>
+            </a:r>
+          </a:p>
+          <a:p>
+            <a:pPr algn="ctr"/>
+            <a:r>
+              <a:rPr sz="850" b="0">
+                <a:solidFill>
+                  <a:srgbClr val="1A1A1A"/>
+                </a:solidFill>
+                <a:latin typeface="Segoe UI"/>
+              </a:rPr>
+              <a:t>Seeded from the integrations you configured + the model endpoint;</a:t>
+            </a:r>
+          </a:p>
+          <a:p>
+            <a:pPr algn="ctr"/>
+            <a:r>
+              <a:rPr sz="850" b="0">
+                <a:solidFill>
+                  <a:srgbClr val="1A1A1A"/>
+                </a:solidFill>
+                <a:latin typeface="Segoe UI"/>
+              </a:rPr>
+              <a:t>extras added in Settings. A list that will not load refuses.</a:t>
+            </a:r>
+          </a:p>
+        </p:txBody>
+      </p:sp>
+      <p:sp>
+        <p:nvSpPr>
+          <p:cNvPr id="16" name="Rounded Rectangle 15"/>
+          <p:cNvSpPr/>
+          <p:nvPr/>
+        </p:nvSpPr>
+        <p:spPr>
+          <a:xfrm>
+            <a:off x="6355080" y="3255264"/>
+            <a:ext cx="5148072" cy="713232"/>
+          </a:xfrm>
+          <a:prstGeom prst="roundRect">
+            <a:avLst>
+              <a:gd name="adj" fmla="val 10000"/>
+            </a:avLst>
+          </a:prstGeom>
+          <a:solidFill>
+            <a:srgbClr val="EAE1F0"/>
+          </a:solidFill>
+          <a:ln w="12700">
+            <a:solidFill>
+              <a:srgbClr val="5B3A6E"/>
+            </a:solidFill>
+          </a:ln>
+          <a:effectLst/>
+        </p:spPr>
+        <p:style>
+          <a:lnRef idx="1">
+            <a:schemeClr val="accent1"/>
+          </a:lnRef>
+          <a:fillRef idx="3">
+            <a:schemeClr val="accent1"/>
+          </a:fillRef>
+          <a:effectRef idx="2">
+            <a:schemeClr val="accent1"/>
+          </a:effectRef>
+          <a:fontRef idx="minor">
+            <a:schemeClr val="lt1"/>
+          </a:fontRef>
+        </p:style>
+        <p:txBody>
+          <a:bodyPr rtlCol="0" anchor="ctr" wrap="square" lIns="54864" rIns="54864" tIns="27432" bIns="27432"/>
+          <a:lstStyle/>
+          <a:p>
+            <a:pPr algn="ctr"/>
+            <a:r>
+              <a:rPr sz="1150" b="1">
+                <a:solidFill>
+                  <a:srgbClr val="5B3A6E"/>
+                </a:solidFill>
+                <a:latin typeface="Segoe UI"/>
+              </a:rPr>
+              <a:t>3 · Reading is not writing</a:t>
+            </a:r>
+          </a:p>
+          <a:p>
+            <a:pPr algn="ctr"/>
+            <a:r>
+              <a:rPr sz="850" b="0">
+                <a:solidFill>
+                  <a:srgbClr val="1A1A1A"/>
+                </a:solidFill>
+                <a:latin typeface="Segoe UI"/>
+              </a:rPr>
+              <a:t>A host added in Settings is readable only. Somewhere that RECEIVES</a:t>
+            </a:r>
+          </a:p>
+          <a:p>
+            <a:pPr algn="ctr"/>
+            <a:r>
+              <a:rPr sz="850" b="0">
+                <a:solidFill>
+                  <a:srgbClr val="1A1A1A"/>
+                </a:solidFill>
+                <a:latin typeface="Segoe UI"/>
+              </a:rPr>
+              <a:t>our data must be a configured integration, with a credential.</a:t>
+            </a:r>
+          </a:p>
+        </p:txBody>
+      </p:sp>
+      <p:sp>
+        <p:nvSpPr>
+          <p:cNvPr id="17" name="Rounded Rectangle 16"/>
+          <p:cNvSpPr/>
+          <p:nvPr/>
+        </p:nvSpPr>
+        <p:spPr>
+          <a:xfrm>
+            <a:off x="6355080" y="4050792"/>
+            <a:ext cx="5148072" cy="713232"/>
+          </a:xfrm>
+          <a:prstGeom prst="roundRect">
+            <a:avLst>
+              <a:gd name="adj" fmla="val 10000"/>
+            </a:avLst>
+          </a:prstGeom>
+          <a:solidFill>
+            <a:srgbClr val="DCEEE7"/>
+          </a:solidFill>
+          <a:ln w="12700">
+            <a:solidFill>
+              <a:srgbClr val="1E6B52"/>
+            </a:solidFill>
+          </a:ln>
+          <a:effectLst/>
+        </p:spPr>
+        <p:style>
+          <a:lnRef idx="1">
+            <a:schemeClr val="accent1"/>
+          </a:lnRef>
+          <a:fillRef idx="3">
+            <a:schemeClr val="accent1"/>
+          </a:fillRef>
+          <a:effectRef idx="2">
+            <a:schemeClr val="accent1"/>
+          </a:effectRef>
+          <a:fontRef idx="minor">
+            <a:schemeClr val="lt1"/>
+          </a:fontRef>
+        </p:style>
+        <p:txBody>
+          <a:bodyPr rtlCol="0" anchor="ctr" wrap="square" lIns="54864" rIns="54864" tIns="27432" bIns="27432"/>
+          <a:lstStyle/>
+          <a:p>
+            <a:pPr algn="ctr"/>
+            <a:r>
+              <a:rPr sz="1150" b="1">
+                <a:solidFill>
+                  <a:srgbClr val="1E6B52"/>
+                </a:solidFill>
+                <a:latin typeface="Segoe UI"/>
+              </a:rPr>
+              <a:t>4 · No human attached, no external write</a:t>
+            </a:r>
+          </a:p>
+          <a:p>
+            <a:pPr algn="ctr"/>
+            <a:r>
+              <a:rPr sz="850" b="0">
+                <a:solidFill>
+                  <a:srgbClr val="1A1A1A"/>
+                </a:solidFill>
+                <a:latin typeface="Segoe UI"/>
+              </a:rPr>
+              <a:t>An unattended run refuses writes and uploads outright — approval is</a:t>
+            </a:r>
+          </a:p>
+          <a:p>
+            <a:pPr algn="ctr"/>
+            <a:r>
+              <a:rPr sz="850" b="0">
+                <a:solidFill>
+                  <a:srgbClr val="1A1A1A"/>
+                </a:solidFill>
+                <a:latin typeface="Segoe UI"/>
+              </a:rPr>
+              <a:t>what makes them safe. AIFORGE_UNATTENDED_WRITES=1 to opt in.</a:t>
+            </a:r>
+          </a:p>
+        </p:txBody>
+      </p:sp>
+      <p:sp>
+        <p:nvSpPr>
+          <p:cNvPr id="18" name="Rounded Rectangle 17"/>
+          <p:cNvSpPr/>
+          <p:nvPr/>
+        </p:nvSpPr>
+        <p:spPr>
+          <a:xfrm>
+            <a:off x="6355080" y="4846320"/>
+            <a:ext cx="5148072" cy="713232"/>
+          </a:xfrm>
+          <a:prstGeom prst="roundRect">
+            <a:avLst>
+              <a:gd name="adj" fmla="val 10000"/>
+            </a:avLst>
+          </a:prstGeom>
+          <a:solidFill>
+            <a:srgbClr val="DCEEE7"/>
+          </a:solidFill>
+          <a:ln w="12700">
+            <a:solidFill>
+              <a:srgbClr val="1E6B52"/>
+            </a:solidFill>
+          </a:ln>
+          <a:effectLst/>
+        </p:spPr>
+        <p:style>
+          <a:lnRef idx="1">
+            <a:schemeClr val="accent1"/>
+          </a:lnRef>
+          <a:fillRef idx="3">
+            <a:schemeClr val="accent1"/>
+          </a:fillRef>
+          <a:effectRef idx="2">
+            <a:schemeClr val="accent1"/>
+          </a:effectRef>
+          <a:fontRef idx="minor">
+            <a:schemeClr val="lt1"/>
+          </a:fontRef>
+        </p:style>
+        <p:txBody>
+          <a:bodyPr rtlCol="0" anchor="ctr" wrap="square" lIns="54864" rIns="54864" tIns="27432" bIns="27432"/>
+          <a:lstStyle/>
+          <a:p>
+            <a:pPr algn="ctr"/>
+            <a:r>
+              <a:rPr sz="1150" b="1">
+                <a:solidFill>
+                  <a:srgbClr val="1E6B52"/>
+                </a:solidFill>
+                <a:latin typeface="Segoe UI"/>
+              </a:rPr>
+              <a:t>5 · Re-checked on every redirect hop</a:t>
+            </a:r>
+          </a:p>
+          <a:p>
+            <a:pPr algn="ctr"/>
+            <a:r>
+              <a:rPr sz="850" b="0">
+                <a:solidFill>
+                  <a:srgbClr val="1A1A1A"/>
+                </a:solidFill>
+                <a:latin typeface="Segoe UI"/>
+              </a:rPr>
+              <a:t>Search endpoints, SSRF / metadata (169.254.169.254) and off-list</a:t>
+            </a:r>
+          </a:p>
+          <a:p>
+            <a:pPr algn="ctr"/>
+            <a:r>
+              <a:rPr sz="850" b="0">
+                <a:solidFill>
+                  <a:srgbClr val="1A1A1A"/>
+                </a:solidFill>
+                <a:latin typeface="Segoe UI"/>
+              </a:rPr>
+              <a:t>hosts are refused after the 302, not only on the URL we were handed.</a:t>
+            </a:r>
+          </a:p>
+        </p:txBody>
+      </p:sp>
+      <p:sp>
+        <p:nvSpPr>
+          <p:cNvPr id="19" name="Rounded Rectangle 18"/>
+          <p:cNvSpPr/>
+          <p:nvPr/>
+        </p:nvSpPr>
+        <p:spPr>
+          <a:xfrm>
+            <a:off x="685800" y="5715000"/>
+            <a:ext cx="10817352" cy="502920"/>
           </a:xfrm>
           <a:prstGeom prst="roundRect">
             <a:avLst>
@@ -10925,1252 +11637,25 @@
           <a:p>
             <a:pPr algn="ctr"/>
             <a:r>
-              <a:rPr sz="2200" b="1">
+              <a:rPr sz="1150" b="1">
                 <a:solidFill>
                   <a:srgbClr val="8A5A00"/>
                 </a:solidFill>
                 <a:latin typeface="Segoe UI"/>
               </a:rPr>
-              <a:t>9</a:t>
-            </a:r>
-          </a:p>
-          <a:p>
-            <a:pPr algn="ctr"/>
-            <a:r>
-              <a:rPr sz="850" b="0">
-                <a:solidFill>
-                  <a:srgbClr val="1A1A1A"/>
-                </a:solidFill>
-                <a:latin typeface="Segoe UI"/>
-              </a:rPr>
-              <a:t>vulns — all</a:t>
-            </a:r>
-          </a:p>
-          <a:p>
-            <a:pPr algn="ctr"/>
-            <a:r>
-              <a:rPr sz="850" b="0">
-                <a:solidFill>
-                  <a:srgbClr val="1A1A1A"/>
-                </a:solidFill>
-                <a:latin typeface="Segoe UI"/>
-              </a:rPr>
-              <a:t>documented TLS</a:t>
-            </a:r>
-          </a:p>
-          <a:p>
-            <a:pPr algn="ctr"/>
-            <a:r>
-              <a:rPr sz="850" b="0">
-                <a:solidFill>
-                  <a:srgbClr val="1A1A1A"/>
-                </a:solidFill>
-                <a:latin typeface="Segoe UI"/>
-              </a:rPr>
-              <a:t>opt-outs</a:t>
-            </a:r>
-          </a:p>
-        </p:txBody>
-      </p:sp>
-      <p:sp>
-        <p:nvSpPr>
-          <p:cNvPr id="11" name="Rounded Rectangle 10"/>
-          <p:cNvSpPr/>
-          <p:nvPr/>
-        </p:nvSpPr>
-        <p:spPr>
-          <a:xfrm>
-            <a:off x="6227064" y="1600200"/>
-            <a:ext cx="1691640" cy="1051560"/>
-          </a:xfrm>
-          <a:prstGeom prst="roundRect">
-            <a:avLst>
-              <a:gd name="adj" fmla="val 10000"/>
-            </a:avLst>
-          </a:prstGeom>
-          <a:solidFill>
-            <a:srgbClr val="ECECEC"/>
-          </a:solidFill>
-          <a:ln w="12700">
-            <a:solidFill>
-              <a:srgbClr val="3A3A3A"/>
-            </a:solidFill>
-          </a:ln>
-          <a:effectLst/>
-        </p:spPr>
-        <p:style>
-          <a:lnRef idx="1">
-            <a:schemeClr val="accent1"/>
-          </a:lnRef>
-          <a:fillRef idx="3">
-            <a:schemeClr val="accent1"/>
-          </a:fillRef>
-          <a:effectRef idx="2">
-            <a:schemeClr val="accent1"/>
-          </a:effectRef>
-          <a:fontRef idx="minor">
-            <a:schemeClr val="lt1"/>
-          </a:fontRef>
-        </p:style>
-        <p:txBody>
-          <a:bodyPr rtlCol="0" anchor="ctr" wrap="square" lIns="54864" rIns="54864" tIns="27432" bIns="27432"/>
-          <a:lstStyle/>
-          <a:p>
-            <a:pPr algn="ctr"/>
-            <a:r>
-              <a:rPr sz="2200" b="1">
-                <a:solidFill>
-                  <a:srgbClr val="3A3A3A"/>
-                </a:solidFill>
-                <a:latin typeface="Segoe UI"/>
-              </a:rPr>
-              <a:t>186</a:t>
-            </a:r>
-          </a:p>
-          <a:p>
-            <a:pPr algn="ctr"/>
-            <a:r>
-              <a:rPr sz="850" b="0">
-                <a:solidFill>
-                  <a:srgbClr val="1A1A1A"/>
-                </a:solidFill>
-                <a:latin typeface="Segoe UI"/>
-              </a:rPr>
-              <a:t>dependency</a:t>
-            </a:r>
-          </a:p>
-          <a:p>
-            <a:pPr algn="ctr"/>
-            <a:r>
-              <a:rPr sz="850" b="0">
-                <a:solidFill>
-                  <a:srgbClr val="1A1A1A"/>
-                </a:solidFill>
-                <a:latin typeface="Segoe UI"/>
-              </a:rPr>
-              <a:t>packages</a:t>
-            </a:r>
-          </a:p>
-        </p:txBody>
-      </p:sp>
-      <p:sp>
-        <p:nvSpPr>
-          <p:cNvPr id="12" name="Rounded Rectangle 11"/>
-          <p:cNvSpPr/>
-          <p:nvPr/>
-        </p:nvSpPr>
-        <p:spPr>
-          <a:xfrm>
-            <a:off x="8074152" y="1600200"/>
-            <a:ext cx="1691640" cy="1051560"/>
-          </a:xfrm>
-          <a:prstGeom prst="roundRect">
-            <a:avLst>
-              <a:gd name="adj" fmla="val 10000"/>
-            </a:avLst>
-          </a:prstGeom>
-          <a:solidFill>
-            <a:srgbClr val="DCEEE7"/>
-          </a:solidFill>
-          <a:ln w="12700">
-            <a:solidFill>
-              <a:srgbClr val="1E6B52"/>
-            </a:solidFill>
-          </a:ln>
-          <a:effectLst/>
-        </p:spPr>
-        <p:style>
-          <a:lnRef idx="1">
-            <a:schemeClr val="accent1"/>
-          </a:lnRef>
-          <a:fillRef idx="3">
-            <a:schemeClr val="accent1"/>
-          </a:fillRef>
-          <a:effectRef idx="2">
-            <a:schemeClr val="accent1"/>
-          </a:effectRef>
-          <a:fontRef idx="minor">
-            <a:schemeClr val="lt1"/>
-          </a:fontRef>
-        </p:style>
-        <p:txBody>
-          <a:bodyPr rtlCol="0" anchor="ctr" wrap="square" lIns="54864" rIns="54864" tIns="27432" bIns="27432"/>
-          <a:lstStyle/>
-          <a:p>
-            <a:pPr algn="ctr"/>
-            <a:r>
-              <a:rPr sz="2200" b="1">
-                <a:solidFill>
-                  <a:srgbClr val="1E6B52"/>
-                </a:solidFill>
-                <a:latin typeface="Segoe UI"/>
-              </a:rPr>
-              <a:t>86%</a:t>
-            </a:r>
-          </a:p>
-          <a:p>
-            <a:pPr algn="ctr"/>
-            <a:r>
-              <a:rPr sz="850" b="0">
-                <a:solidFill>
-                  <a:srgbClr val="1A1A1A"/>
-                </a:solidFill>
-                <a:latin typeface="Segoe UI"/>
-              </a:rPr>
-              <a:t>line coverage</a:t>
-            </a:r>
-          </a:p>
-          <a:p>
-            <a:pPr algn="ctr"/>
-            <a:r>
-              <a:rPr sz="850" b="0">
-                <a:solidFill>
-                  <a:srgbClr val="1A1A1A"/>
-                </a:solidFill>
-                <a:latin typeface="Segoe UI"/>
-              </a:rPr>
-              <a:t>~4,000 tests</a:t>
-            </a:r>
-          </a:p>
-        </p:txBody>
-      </p:sp>
-      <p:sp>
-        <p:nvSpPr>
-          <p:cNvPr id="13" name="Rounded Rectangle 12"/>
-          <p:cNvSpPr/>
-          <p:nvPr/>
-        </p:nvSpPr>
-        <p:spPr>
-          <a:xfrm>
-            <a:off x="9921240" y="1600200"/>
-            <a:ext cx="1691640" cy="1051560"/>
-          </a:xfrm>
-          <a:prstGeom prst="roundRect">
-            <a:avLst>
-              <a:gd name="adj" fmla="val 10000"/>
-            </a:avLst>
-          </a:prstGeom>
-          <a:solidFill>
-            <a:srgbClr val="DCEEE7"/>
-          </a:solidFill>
-          <a:ln w="12700">
-            <a:solidFill>
-              <a:srgbClr val="1E6B52"/>
-            </a:solidFill>
-          </a:ln>
-          <a:effectLst/>
-        </p:spPr>
-        <p:style>
-          <a:lnRef idx="1">
-            <a:schemeClr val="accent1"/>
-          </a:lnRef>
-          <a:fillRef idx="3">
-            <a:schemeClr val="accent1"/>
-          </a:fillRef>
-          <a:effectRef idx="2">
-            <a:schemeClr val="accent1"/>
-          </a:effectRef>
-          <a:fontRef idx="minor">
-            <a:schemeClr val="lt1"/>
-          </a:fontRef>
-        </p:style>
-        <p:txBody>
-          <a:bodyPr rtlCol="0" anchor="ctr" wrap="square" lIns="54864" rIns="54864" tIns="27432" bIns="27432"/>
-          <a:lstStyle/>
-          <a:p>
-            <a:pPr algn="ctr"/>
-            <a:r>
-              <a:rPr sz="2200" b="1">
-                <a:solidFill>
-                  <a:srgbClr val="1E6B52"/>
-                </a:solidFill>
-                <a:latin typeface="Segoe UI"/>
-              </a:rPr>
-              <a:t>≤15</a:t>
-            </a:r>
-          </a:p>
-          <a:p>
-            <a:pPr algn="ctr"/>
-            <a:r>
-              <a:rPr sz="850" b="0">
-                <a:solidFill>
-                  <a:srgbClr val="1A1A1A"/>
-                </a:solidFill>
-                <a:latin typeface="Segoe UI"/>
-              </a:rPr>
-              <a:t>cognitive</a:t>
-            </a:r>
-          </a:p>
-          <a:p>
-            <a:pPr algn="ctr"/>
-            <a:r>
-              <a:rPr sz="850" b="0">
-                <a:solidFill>
-                  <a:srgbClr val="1A1A1A"/>
-                </a:solidFill>
-                <a:latin typeface="Segoe UI"/>
-              </a:rPr>
-              <a:t>complexity, every</a:t>
-            </a:r>
-          </a:p>
-          <a:p>
-            <a:pPr algn="ctr"/>
-            <a:r>
-              <a:rPr sz="850" b="0">
-                <a:solidFill>
-                  <a:srgbClr val="1A1A1A"/>
-                </a:solidFill>
-                <a:latin typeface="Segoe UI"/>
-              </a:rPr>
-              <a:t>function</a:t>
-            </a:r>
-          </a:p>
-        </p:txBody>
-      </p:sp>
-      <p:sp>
-        <p:nvSpPr>
-          <p:cNvPr id="14" name="TextBox 13"/>
-          <p:cNvSpPr txBox="1"/>
-          <p:nvPr/>
-        </p:nvSpPr>
-        <p:spPr>
-          <a:xfrm>
-            <a:off x="685800" y="2880360"/>
-            <a:ext cx="5486400" cy="228600"/>
-          </a:xfrm>
-          <a:prstGeom prst="rect">
-            <a:avLst/>
-          </a:prstGeom>
-          <a:noFill/>
-        </p:spPr>
-        <p:txBody>
-          <a:bodyPr wrap="square" anchor="t" lIns="0" rIns="0" tIns="0" bIns="0">
-            <a:spAutoFit/>
-          </a:bodyPr>
-          <a:lstStyle/>
-          <a:p>
-            <a:pPr algn="l">
-              <a:spcAft>
-                <a:spcPts val="0"/>
-              </a:spcAft>
-            </a:pPr>
-            <a:r>
-              <a:rPr sz="1000" b="1">
-                <a:solidFill>
-                  <a:srgbClr val="6B6B6B"/>
-                </a:solidFill>
-                <a:latin typeface="Segoe UI"/>
-              </a:rPr>
-              <a:t>CI SCAN PIPELINE  (.gitlab-ci.yml)</a:t>
-            </a:r>
-          </a:p>
-        </p:txBody>
-      </p:sp>
-      <p:sp>
-        <p:nvSpPr>
-          <p:cNvPr id="15" name="Rounded Rectangle 14"/>
-          <p:cNvSpPr/>
-          <p:nvPr/>
-        </p:nvSpPr>
-        <p:spPr>
-          <a:xfrm>
-            <a:off x="685800" y="3154680"/>
-            <a:ext cx="2103120" cy="868680"/>
-          </a:xfrm>
-          <a:prstGeom prst="roundRect">
-            <a:avLst>
-              <a:gd name="adj" fmla="val 10000"/>
-            </a:avLst>
-          </a:prstGeom>
-          <a:solidFill>
-            <a:srgbClr val="DCE7F2"/>
-          </a:solidFill>
-          <a:ln w="12700">
-            <a:solidFill>
-              <a:srgbClr val="1F4E79"/>
-            </a:solidFill>
-          </a:ln>
-          <a:effectLst/>
-        </p:spPr>
-        <p:style>
-          <a:lnRef idx="1">
-            <a:schemeClr val="accent1"/>
-          </a:lnRef>
-          <a:fillRef idx="3">
-            <a:schemeClr val="accent1"/>
-          </a:fillRef>
-          <a:effectRef idx="2">
-            <a:schemeClr val="accent1"/>
-          </a:effectRef>
-          <a:fontRef idx="minor">
-            <a:schemeClr val="lt1"/>
-          </a:fontRef>
-        </p:style>
-        <p:txBody>
-          <a:bodyPr rtlCol="0" anchor="ctr" wrap="square" lIns="54864" rIns="54864" tIns="27432" bIns="27432"/>
-          <a:lstStyle/>
-          <a:p>
-            <a:pPr algn="ctr"/>
-            <a:r>
-              <a:rPr sz="1250" b="1">
-                <a:solidFill>
-                  <a:srgbClr val="1F4E79"/>
-                </a:solidFill>
-                <a:latin typeface="Segoe UI"/>
-              </a:rPr>
-              <a:t>build</a:t>
-            </a:r>
-          </a:p>
-          <a:p>
-            <a:pPr algn="ctr"/>
-            <a:r>
-              <a:rPr sz="850" b="0">
-                <a:solidFill>
-                  <a:srgbClr val="1A1A1A"/>
-                </a:solidFill>
-                <a:latin typeface="Segoe UI"/>
-              </a:rPr>
-              <a:t>uv sync --frozen</a:t>
-            </a:r>
-          </a:p>
-          <a:p>
-            <a:pPr algn="ctr"/>
-            <a:r>
-              <a:rPr sz="850" b="0">
-                <a:solidFill>
-                  <a:srgbClr val="1A1A1A"/>
-                </a:solidFill>
-                <a:latin typeface="Segoe UI"/>
-              </a:rPr>
-              <a:t>uv.lock decides versions</a:t>
-            </a:r>
-          </a:p>
-        </p:txBody>
-      </p:sp>
-      <p:cxnSp>
-        <p:nvCxnSpPr>
-          <p:cNvPr id="16" name="Connector 15"/>
-          <p:cNvCxnSpPr/>
-          <p:nvPr/>
-        </p:nvCxnSpPr>
-        <p:spPr>
-          <a:xfrm>
-            <a:off x="2788920" y="3584448"/>
-            <a:ext cx="365760" cy="0"/>
-          </a:xfrm>
-          <a:prstGeom prst="line">
-            <a:avLst/>
-          </a:prstGeom>
-          <a:ln w="19050">
-            <a:solidFill>
-              <a:srgbClr val="C9C9C9"/>
-            </a:solidFill>
-            <a:tailEnd type="triangle" w="med" len="med"/>
-          </a:ln>
-        </p:spPr>
-        <p:style>
-          <a:lnRef idx="2">
-            <a:schemeClr val="accent1"/>
-          </a:lnRef>
-          <a:fillRef idx="0">
-            <a:schemeClr val="accent1"/>
-          </a:fillRef>
-          <a:effectRef idx="1">
-            <a:schemeClr val="accent1"/>
-          </a:effectRef>
-          <a:fontRef idx="minor">
-            <a:schemeClr val="tx1"/>
-          </a:fontRef>
-        </p:style>
-      </p:cxnSp>
-      <p:sp>
-        <p:nvSpPr>
-          <p:cNvPr id="17" name="Rounded Rectangle 16"/>
-          <p:cNvSpPr/>
-          <p:nvPr/>
-        </p:nvSpPr>
-        <p:spPr>
-          <a:xfrm>
-            <a:off x="3154680" y="3154680"/>
-            <a:ext cx="2103120" cy="868680"/>
-          </a:xfrm>
-          <a:prstGeom prst="roundRect">
-            <a:avLst>
-              <a:gd name="adj" fmla="val 10000"/>
-            </a:avLst>
-          </a:prstGeom>
-          <a:solidFill>
-            <a:srgbClr val="DCEEE7"/>
-          </a:solidFill>
-          <a:ln w="12700">
-            <a:solidFill>
-              <a:srgbClr val="1E6B52"/>
-            </a:solidFill>
-          </a:ln>
-          <a:effectLst/>
-        </p:spPr>
-        <p:style>
-          <a:lnRef idx="1">
-            <a:schemeClr val="accent1"/>
-          </a:lnRef>
-          <a:fillRef idx="3">
-            <a:schemeClr val="accent1"/>
-          </a:fillRef>
-          <a:effectRef idx="2">
-            <a:schemeClr val="accent1"/>
-          </a:effectRef>
-          <a:fontRef idx="minor">
-            <a:schemeClr val="lt1"/>
-          </a:fontRef>
-        </p:style>
-        <p:txBody>
-          <a:bodyPr rtlCol="0" anchor="ctr" wrap="square" lIns="54864" rIns="54864" tIns="27432" bIns="27432"/>
-          <a:lstStyle/>
-          <a:p>
-            <a:pPr algn="ctr"/>
-            <a:r>
-              <a:rPr sz="1250" b="1">
-                <a:solidFill>
-                  <a:srgbClr val="1E6B52"/>
-                </a:solidFill>
-                <a:latin typeface="Segoe UI"/>
-              </a:rPr>
-              <a:t>sonar/</a:t>
-            </a:r>
-          </a:p>
-          <a:p>
-            <a:pPr algn="ctr"/>
-            <a:r>
-              <a:rPr sz="850" b="0">
-                <a:solidFill>
-                  <a:srgbClr val="1A1A1A"/>
-                </a:solidFill>
-                <a:latin typeface="Segoe UI"/>
-              </a:rPr>
-              <a:t>coverage.xml · junit.xml</a:t>
-            </a:r>
-          </a:p>
-          <a:p>
-            <a:pPr algn="ctr"/>
-            <a:r>
-              <a:rPr sz="850" b="0">
-                <a:solidFill>
-                  <a:srgbClr val="1A1A1A"/>
-                </a:solidFill>
-                <a:latin typeface="Segoe UI"/>
-              </a:rPr>
-              <a:t>+ web/src included</a:t>
-            </a:r>
-          </a:p>
-        </p:txBody>
-      </p:sp>
-      <p:sp>
-        <p:nvSpPr>
-          <p:cNvPr id="18" name="Rounded Rectangle 17"/>
-          <p:cNvSpPr/>
-          <p:nvPr/>
-        </p:nvSpPr>
-        <p:spPr>
-          <a:xfrm>
-            <a:off x="3154680" y="4160520"/>
-            <a:ext cx="2103120" cy="868680"/>
-          </a:xfrm>
-          <a:prstGeom prst="roundRect">
-            <a:avLst>
-              <a:gd name="adj" fmla="val 10000"/>
-            </a:avLst>
-          </a:prstGeom>
-          <a:solidFill>
-            <a:srgbClr val="EAE1F0"/>
-          </a:solidFill>
-          <a:ln w="12700">
-            <a:solidFill>
-              <a:srgbClr val="5B3A6E"/>
-            </a:solidFill>
-          </a:ln>
-          <a:effectLst/>
-        </p:spPr>
-        <p:style>
-          <a:lnRef idx="1">
-            <a:schemeClr val="accent1"/>
-          </a:lnRef>
-          <a:fillRef idx="3">
-            <a:schemeClr val="accent1"/>
-          </a:fillRef>
-          <a:effectRef idx="2">
-            <a:schemeClr val="accent1"/>
-          </a:effectRef>
-          <a:fontRef idx="minor">
-            <a:schemeClr val="lt1"/>
-          </a:fontRef>
-        </p:style>
-        <p:txBody>
-          <a:bodyPr rtlCol="0" anchor="ctr" wrap="square" lIns="54864" rIns="54864" tIns="27432" bIns="27432"/>
-          <a:lstStyle/>
-          <a:p>
-            <a:pPr algn="ctr"/>
-            <a:r>
-              <a:rPr sz="1250" b="1">
-                <a:solidFill>
-                  <a:srgbClr val="5B3A6E"/>
-                </a:solidFill>
-                <a:latin typeface="Segoe UI"/>
-              </a:rPr>
-              <a:t>blackduck/</a:t>
-            </a:r>
-          </a:p>
-          <a:p>
-            <a:pPr algn="ctr"/>
-            <a:r>
-              <a:rPr sz="850" b="0">
-                <a:solidFill>
-                  <a:srgbClr val="1A1A1A"/>
-                </a:solidFill>
-                <a:latin typeface="Segoe UI"/>
-              </a:rPr>
-              <a:t>pinned requirements</a:t>
-            </a:r>
-          </a:p>
-          <a:p>
-            <a:pPr algn="ctr"/>
-            <a:r>
-              <a:rPr sz="850" b="0">
-                <a:solidFill>
-                  <a:srgbClr val="1A1A1A"/>
-                </a:solidFill>
-                <a:latin typeface="Segoe UI"/>
-              </a:rPr>
-              <a:t>CycloneDX SBOM · wheels</a:t>
-            </a:r>
-          </a:p>
-        </p:txBody>
-      </p:sp>
-      <p:cxnSp>
-        <p:nvCxnSpPr>
-          <p:cNvPr id="19" name="Connector 18"/>
-          <p:cNvCxnSpPr/>
-          <p:nvPr/>
-        </p:nvCxnSpPr>
-        <p:spPr>
-          <a:xfrm>
-            <a:off x="2788920" y="3584448"/>
-            <a:ext cx="365760" cy="1005840"/>
-          </a:xfrm>
-          <a:prstGeom prst="line">
-            <a:avLst/>
-          </a:prstGeom>
-          <a:ln w="19050">
-            <a:solidFill>
-              <a:srgbClr val="C9C9C9"/>
-            </a:solidFill>
-            <a:tailEnd type="triangle" w="med" len="med"/>
-          </a:ln>
-        </p:spPr>
-        <p:style>
-          <a:lnRef idx="2">
-            <a:schemeClr val="accent1"/>
-          </a:lnRef>
-          <a:fillRef idx="0">
-            <a:schemeClr val="accent1"/>
-          </a:fillRef>
-          <a:effectRef idx="1">
-            <a:schemeClr val="accent1"/>
-          </a:effectRef>
-          <a:fontRef idx="minor">
-            <a:schemeClr val="tx1"/>
-          </a:fontRef>
-        </p:style>
-      </p:cxnSp>
-      <p:cxnSp>
-        <p:nvCxnSpPr>
-          <p:cNvPr id="20" name="Connector 19"/>
-          <p:cNvCxnSpPr/>
-          <p:nvPr/>
-        </p:nvCxnSpPr>
-        <p:spPr>
-          <a:xfrm>
-            <a:off x="5257800" y="3584448"/>
-            <a:ext cx="365760" cy="0"/>
-          </a:xfrm>
-          <a:prstGeom prst="line">
-            <a:avLst/>
-          </a:prstGeom>
-          <a:ln w="19050">
-            <a:solidFill>
-              <a:srgbClr val="C9C9C9"/>
-            </a:solidFill>
-            <a:tailEnd type="triangle" w="med" len="med"/>
-          </a:ln>
-        </p:spPr>
-        <p:style>
-          <a:lnRef idx="2">
-            <a:schemeClr val="accent1"/>
-          </a:lnRef>
-          <a:fillRef idx="0">
-            <a:schemeClr val="accent1"/>
-          </a:fillRef>
-          <a:effectRef idx="1">
-            <a:schemeClr val="accent1"/>
-          </a:effectRef>
-          <a:fontRef idx="minor">
-            <a:schemeClr val="tx1"/>
-          </a:fontRef>
-        </p:style>
-      </p:cxnSp>
-      <p:sp>
-        <p:nvSpPr>
-          <p:cNvPr id="21" name="Rounded Rectangle 20"/>
-          <p:cNvSpPr/>
-          <p:nvPr/>
-        </p:nvSpPr>
-        <p:spPr>
-          <a:xfrm>
-            <a:off x="5623560" y="3154680"/>
-            <a:ext cx="2011680" cy="868680"/>
-          </a:xfrm>
-          <a:prstGeom prst="roundRect">
-            <a:avLst>
-              <a:gd name="adj" fmla="val 10000"/>
-            </a:avLst>
-          </a:prstGeom>
-          <a:solidFill>
-            <a:srgbClr val="FFFFFF"/>
-          </a:solidFill>
-          <a:ln w="12700">
-            <a:solidFill>
-              <a:srgbClr val="1E6B52"/>
-            </a:solidFill>
-          </a:ln>
-          <a:effectLst/>
-        </p:spPr>
-        <p:style>
-          <a:lnRef idx="1">
-            <a:schemeClr val="accent1"/>
-          </a:lnRef>
-          <a:fillRef idx="3">
-            <a:schemeClr val="accent1"/>
-          </a:fillRef>
-          <a:effectRef idx="2">
-            <a:schemeClr val="accent1"/>
-          </a:effectRef>
-          <a:fontRef idx="minor">
-            <a:schemeClr val="lt1"/>
-          </a:fontRef>
-        </p:style>
-        <p:txBody>
-          <a:bodyPr rtlCol="0" anchor="ctr" wrap="square" lIns="54864" rIns="54864" tIns="27432" bIns="27432"/>
-          <a:lstStyle/>
-          <a:p>
-            <a:pPr algn="ctr"/>
-            <a:r>
-              <a:rPr sz="1250" b="1">
-                <a:solidFill>
-                  <a:srgbClr val="1E6B52"/>
-                </a:solidFill>
-                <a:latin typeface="Segoe UI"/>
-              </a:rPr>
-              <a:t>SonarQube</a:t>
-            </a:r>
-          </a:p>
-          <a:p>
-            <a:pPr algn="ctr"/>
-            <a:r>
-              <a:rPr sz="850" b="0">
-                <a:solidFill>
-                  <a:srgbClr val="1A1A1A"/>
-                </a:solidFill>
-                <a:latin typeface="Segoe UI"/>
-              </a:rPr>
-              <a:t>scanner-cli</a:t>
-            </a:r>
-          </a:p>
-          <a:p>
-            <a:pPr algn="ctr"/>
-            <a:r>
-              <a:rPr sz="850" b="0">
-                <a:solidFill>
-                  <a:srgbClr val="1A1A1A"/>
-                </a:solidFill>
-                <a:latin typeface="Segoe UI"/>
-              </a:rPr>
-              <a:t>GIT_DEPTH 0</a:t>
-            </a:r>
-          </a:p>
-        </p:txBody>
-      </p:sp>
-      <p:cxnSp>
-        <p:nvCxnSpPr>
-          <p:cNvPr id="22" name="Connector 21"/>
-          <p:cNvCxnSpPr/>
-          <p:nvPr/>
-        </p:nvCxnSpPr>
-        <p:spPr>
-          <a:xfrm>
-            <a:off x="5257800" y="4590288"/>
-            <a:ext cx="365760" cy="0"/>
-          </a:xfrm>
-          <a:prstGeom prst="line">
-            <a:avLst/>
-          </a:prstGeom>
-          <a:ln w="19050">
-            <a:solidFill>
-              <a:srgbClr val="C9C9C9"/>
-            </a:solidFill>
-            <a:tailEnd type="triangle" w="med" len="med"/>
-          </a:ln>
-        </p:spPr>
-        <p:style>
-          <a:lnRef idx="2">
-            <a:schemeClr val="accent1"/>
-          </a:lnRef>
-          <a:fillRef idx="0">
-            <a:schemeClr val="accent1"/>
-          </a:fillRef>
-          <a:effectRef idx="1">
-            <a:schemeClr val="accent1"/>
-          </a:effectRef>
-          <a:fontRef idx="minor">
-            <a:schemeClr val="tx1"/>
-          </a:fontRef>
-        </p:style>
-      </p:cxnSp>
-      <p:sp>
-        <p:nvSpPr>
-          <p:cNvPr id="23" name="Rounded Rectangle 22"/>
-          <p:cNvSpPr/>
-          <p:nvPr/>
-        </p:nvSpPr>
-        <p:spPr>
-          <a:xfrm>
-            <a:off x="5623560" y="4160520"/>
-            <a:ext cx="2011680" cy="868680"/>
-          </a:xfrm>
-          <a:prstGeom prst="roundRect">
-            <a:avLst>
-              <a:gd name="adj" fmla="val 10000"/>
-            </a:avLst>
-          </a:prstGeom>
-          <a:solidFill>
-            <a:srgbClr val="FFFFFF"/>
-          </a:solidFill>
-          <a:ln w="12700">
-            <a:solidFill>
-              <a:srgbClr val="5B3A6E"/>
-            </a:solidFill>
-          </a:ln>
-          <a:effectLst/>
-        </p:spPr>
-        <p:style>
-          <a:lnRef idx="1">
-            <a:schemeClr val="accent1"/>
-          </a:lnRef>
-          <a:fillRef idx="3">
-            <a:schemeClr val="accent1"/>
-          </a:fillRef>
-          <a:effectRef idx="2">
-            <a:schemeClr val="accent1"/>
-          </a:effectRef>
-          <a:fontRef idx="minor">
-            <a:schemeClr val="lt1"/>
-          </a:fontRef>
-        </p:style>
-        <p:txBody>
-          <a:bodyPr rtlCol="0" anchor="ctr" wrap="square" lIns="54864" rIns="54864" tIns="27432" bIns="27432"/>
-          <a:lstStyle/>
-          <a:p>
-            <a:pPr algn="ctr"/>
-            <a:r>
-              <a:rPr sz="1250" b="1">
-                <a:solidFill>
-                  <a:srgbClr val="5B3A6E"/>
-                </a:solidFill>
-                <a:latin typeface="Segoe UI"/>
-              </a:rPr>
-              <a:t>Black Duck</a:t>
-            </a:r>
-          </a:p>
-          <a:p>
-            <a:pPr algn="ctr"/>
-            <a:r>
-              <a:rPr sz="850" b="0">
-                <a:solidFill>
-                  <a:srgbClr val="1A1A1A"/>
-                </a:solidFill>
-                <a:latin typeface="Segoe UI"/>
-              </a:rPr>
-              <a:t>detect10.sh</a:t>
-            </a:r>
-          </a:p>
-          <a:p>
-            <a:pPr algn="ctr"/>
-            <a:r>
-              <a:rPr sz="850" b="0">
-                <a:solidFill>
-                  <a:srgbClr val="1A1A1A"/>
-                </a:solidFill>
-                <a:latin typeface="Segoe UI"/>
-              </a:rPr>
-              <a:t>ships SHIPPED pins</a:t>
-            </a:r>
-          </a:p>
-        </p:txBody>
-      </p:sp>
-      <p:sp>
-        <p:nvSpPr>
-          <p:cNvPr id="24" name="Rounded Rectangle 23"/>
-          <p:cNvSpPr/>
-          <p:nvPr/>
-        </p:nvSpPr>
-        <p:spPr>
-          <a:xfrm>
-            <a:off x="8001000" y="3154680"/>
-            <a:ext cx="3520440" cy="1874519"/>
-          </a:xfrm>
-          <a:prstGeom prst="roundRect">
-            <a:avLst>
-              <a:gd name="adj" fmla="val 10000"/>
-            </a:avLst>
-          </a:prstGeom>
-          <a:solidFill>
-            <a:srgbClr val="FFFFFF"/>
-          </a:solidFill>
-          <a:ln w="12700">
-            <a:solidFill>
-              <a:srgbClr val="3A3A3A"/>
-            </a:solidFill>
-          </a:ln>
-          <a:effectLst/>
-        </p:spPr>
-        <p:style>
-          <a:lnRef idx="1">
-            <a:schemeClr val="accent1"/>
-          </a:lnRef>
-          <a:fillRef idx="3">
-            <a:schemeClr val="accent1"/>
-          </a:fillRef>
-          <a:effectRef idx="2">
-            <a:schemeClr val="accent1"/>
-          </a:effectRef>
-          <a:fontRef idx="minor">
-            <a:schemeClr val="lt1"/>
-          </a:fontRef>
-        </p:style>
-        <p:txBody>
-          <a:bodyPr rtlCol="0" anchor="ctr" wrap="square" lIns="54864" rIns="54864" tIns="27432" bIns="27432"/>
-          <a:lstStyle/>
-          <a:p>
-            <a:pPr algn="ctr"/>
-            <a:r>
-              <a:rPr sz="1250" b="1">
-                <a:solidFill>
-                  <a:srgbClr val="3A3A3A"/>
-                </a:solidFill>
-                <a:latin typeface="Segoe UI"/>
-              </a:rPr>
-              <a:t>Data control</a:t>
-            </a:r>
-          </a:p>
-        </p:txBody>
-      </p:sp>
-      <p:sp>
-        <p:nvSpPr>
-          <p:cNvPr id="25" name="TextBox 24"/>
-          <p:cNvSpPr txBox="1"/>
-          <p:nvPr/>
-        </p:nvSpPr>
-        <p:spPr>
-          <a:xfrm>
-            <a:off x="8183879" y="3566160"/>
-            <a:ext cx="3246120" cy="228600"/>
-          </a:xfrm>
-          <a:prstGeom prst="rect">
-            <a:avLst/>
-          </a:prstGeom>
-          <a:noFill/>
-        </p:spPr>
-        <p:txBody>
-          <a:bodyPr wrap="square" anchor="t" lIns="0" rIns="0" tIns="0" bIns="0">
-            <a:spAutoFit/>
-          </a:bodyPr>
-          <a:lstStyle/>
-          <a:p>
-            <a:pPr algn="l">
-              <a:spcAft>
-                <a:spcPts val="0"/>
-              </a:spcAft>
-            </a:pPr>
-            <a:r>
-              <a:rPr sz="950" b="0">
-                <a:solidFill>
-                  <a:srgbClr val="1A1A1A"/>
-                </a:solidFill>
-                <a:latin typeface="Segoe UI"/>
-              </a:rPr>
-              <a:t>· Telemetry: none, and none in the lock</a:t>
-            </a:r>
-          </a:p>
-        </p:txBody>
-      </p:sp>
-      <p:sp>
-        <p:nvSpPr>
-          <p:cNvPr id="26" name="TextBox 25"/>
-          <p:cNvSpPr txBox="1"/>
-          <p:nvPr/>
-        </p:nvSpPr>
-        <p:spPr>
-          <a:xfrm>
-            <a:off x="8183879" y="3803904"/>
-            <a:ext cx="3246120" cy="228600"/>
-          </a:xfrm>
-          <a:prstGeom prst="rect">
-            <a:avLst/>
-          </a:prstGeom>
-          <a:noFill/>
-        </p:spPr>
-        <p:txBody>
-          <a:bodyPr wrap="square" anchor="t" lIns="0" rIns="0" tIns="0" bIns="0">
-            <a:spAutoFit/>
-          </a:bodyPr>
-          <a:lstStyle/>
-          <a:p>
-            <a:pPr algn="l">
-              <a:spcAft>
-                <a:spcPts val="0"/>
-              </a:spcAft>
-            </a:pPr>
-            <a:r>
-              <a:rPr sz="950" b="0">
-                <a:solidFill>
-                  <a:srgbClr val="1A1A1A"/>
-                </a:solidFill>
-                <a:latin typeface="Segoe UI"/>
-              </a:rPr>
-              <a:t>· Prompts go only to YOUR endpoint</a:t>
-            </a:r>
-          </a:p>
-        </p:txBody>
-      </p:sp>
-      <p:sp>
-        <p:nvSpPr>
-          <p:cNvPr id="27" name="TextBox 26"/>
-          <p:cNvSpPr txBox="1"/>
-          <p:nvPr/>
-        </p:nvSpPr>
-        <p:spPr>
-          <a:xfrm>
-            <a:off x="8183879" y="4041648"/>
-            <a:ext cx="3246120" cy="228600"/>
-          </a:xfrm>
-          <a:prstGeom prst="rect">
-            <a:avLst/>
-          </a:prstGeom>
-          <a:noFill/>
-        </p:spPr>
-        <p:txBody>
-          <a:bodyPr wrap="square" anchor="t" lIns="0" rIns="0" tIns="0" bIns="0">
-            <a:spAutoFit/>
-          </a:bodyPr>
-          <a:lstStyle/>
-          <a:p>
-            <a:pPr algn="l">
-              <a:spcAft>
-                <a:spcPts val="0"/>
-              </a:spcAft>
-            </a:pPr>
-            <a:r>
-              <a:rPr sz="950" b="0">
-                <a:solidFill>
-                  <a:srgbClr val="1A1A1A"/>
-                </a:solidFill>
-                <a:latin typeface="Segoe UI"/>
-              </a:rPr>
-              <a:t>· At rest: ~/.aiforge/ — delete it, it is gone</a:t>
-            </a:r>
-          </a:p>
-        </p:txBody>
-      </p:sp>
-      <p:sp>
-        <p:nvSpPr>
-          <p:cNvPr id="28" name="TextBox 27"/>
-          <p:cNvSpPr txBox="1"/>
-          <p:nvPr/>
-        </p:nvSpPr>
-        <p:spPr>
-          <a:xfrm>
-            <a:off x="8183879" y="4279392"/>
-            <a:ext cx="3246120" cy="228600"/>
-          </a:xfrm>
-          <a:prstGeom prst="rect">
-            <a:avLst/>
-          </a:prstGeom>
-          <a:noFill/>
-        </p:spPr>
-        <p:txBody>
-          <a:bodyPr wrap="square" anchor="t" lIns="0" rIns="0" tIns="0" bIns="0">
-            <a:spAutoFit/>
-          </a:bodyPr>
-          <a:lstStyle/>
-          <a:p>
-            <a:pPr algn="l">
-              <a:spcAft>
-                <a:spcPts val="0"/>
-              </a:spcAft>
-            </a:pPr>
-            <a:r>
-              <a:rPr sz="950" b="0">
-                <a:solidFill>
-                  <a:srgbClr val="1A1A1A"/>
-                </a:solidFill>
-                <a:latin typeface="Segoe UI"/>
-              </a:rPr>
-              <a:t>· Loopback by default; loud warning if not</a:t>
-            </a:r>
-          </a:p>
-        </p:txBody>
-      </p:sp>
-      <p:sp>
-        <p:nvSpPr>
-          <p:cNvPr id="29" name="TextBox 28"/>
-          <p:cNvSpPr txBox="1"/>
-          <p:nvPr/>
-        </p:nvSpPr>
-        <p:spPr>
-          <a:xfrm>
-            <a:off x="8183879" y="4517136"/>
-            <a:ext cx="3246120" cy="228600"/>
-          </a:xfrm>
-          <a:prstGeom prst="rect">
-            <a:avLst/>
-          </a:prstGeom>
-          <a:noFill/>
-        </p:spPr>
-        <p:txBody>
-          <a:bodyPr wrap="square" anchor="t" lIns="0" rIns="0" tIns="0" bIns="0">
-            <a:spAutoFit/>
-          </a:bodyPr>
-          <a:lstStyle/>
-          <a:p>
-            <a:pPr algn="l">
-              <a:spcAft>
-                <a:spcPts val="0"/>
-              </a:spcAft>
-            </a:pPr>
-            <a:r>
-              <a:rPr sz="950" b="0">
-                <a:solidFill>
-                  <a:srgbClr val="1A1A1A"/>
-                </a:solidFill>
-                <a:latin typeface="Segoe UI"/>
-              </a:rPr>
-              <a:t>· SSRF guard on fetch and crawl</a:t>
-            </a:r>
-          </a:p>
-        </p:txBody>
-      </p:sp>
-      <p:sp>
-        <p:nvSpPr>
-          <p:cNvPr id="30" name="TextBox 29"/>
-          <p:cNvSpPr txBox="1"/>
-          <p:nvPr/>
-        </p:nvSpPr>
-        <p:spPr>
-          <a:xfrm>
-            <a:off x="8183879" y="4754880"/>
-            <a:ext cx="3246120" cy="228600"/>
-          </a:xfrm>
-          <a:prstGeom prst="rect">
-            <a:avLst/>
-          </a:prstGeom>
-          <a:noFill/>
-        </p:spPr>
-        <p:txBody>
-          <a:bodyPr wrap="square" anchor="t" lIns="0" rIns="0" tIns="0" bIns="0">
-            <a:spAutoFit/>
-          </a:bodyPr>
-          <a:lstStyle/>
-          <a:p>
-            <a:pPr algn="l">
-              <a:spcAft>
-                <a:spcPts val="0"/>
-              </a:spcAft>
-            </a:pPr>
-            <a:r>
-              <a:rPr sz="950" b="0">
-                <a:solidFill>
-                  <a:srgbClr val="1A1A1A"/>
-                </a:solidFill>
-                <a:latin typeface="Segoe UI"/>
-              </a:rPr>
-              <a:t>· Workspace jail on by default</a:t>
-            </a:r>
-          </a:p>
-        </p:txBody>
-      </p:sp>
-      <p:sp>
-        <p:nvSpPr>
-          <p:cNvPr id="31" name="Rounded Rectangle 30"/>
-          <p:cNvSpPr/>
-          <p:nvPr/>
-        </p:nvSpPr>
-        <p:spPr>
-          <a:xfrm>
-            <a:off x="685800" y="5230368"/>
-            <a:ext cx="10853928" cy="548640"/>
-          </a:xfrm>
-          <a:prstGeom prst="roundRect">
-            <a:avLst>
-              <a:gd name="adj" fmla="val 10000"/>
-            </a:avLst>
-          </a:prstGeom>
-          <a:solidFill>
-            <a:srgbClr val="F7ECD5"/>
-          </a:solidFill>
-          <a:ln w="12700">
-            <a:solidFill>
-              <a:srgbClr val="8A5A00"/>
-            </a:solidFill>
-          </a:ln>
-          <a:effectLst/>
-        </p:spPr>
-        <p:style>
-          <a:lnRef idx="1">
-            <a:schemeClr val="accent1"/>
-          </a:lnRef>
-          <a:fillRef idx="3">
-            <a:schemeClr val="accent1"/>
-          </a:fillRef>
-          <a:effectRef idx="2">
-            <a:schemeClr val="accent1"/>
-          </a:effectRef>
-          <a:fontRef idx="minor">
-            <a:schemeClr val="lt1"/>
-          </a:fontRef>
-        </p:style>
-        <p:txBody>
-          <a:bodyPr rtlCol="0" anchor="ctr" wrap="square" lIns="54864" rIns="54864" tIns="27432" bIns="27432"/>
-          <a:lstStyle/>
-          <a:p>
-            <a:pPr algn="ctr"/>
-            <a:r>
-              <a:rPr sz="1200" b="1">
-                <a:solidFill>
-                  <a:srgbClr val="8A5A00"/>
-                </a:solidFill>
-                <a:latin typeface="Segoe UI"/>
-              </a:rPr>
-              <a:t>The 9 vulnerabilities are decisions, not debt</a:t>
-            </a:r>
-          </a:p>
-          <a:p>
-            <a:pPr algn="ctr"/>
-            <a:r>
-              <a:rPr sz="950" b="0">
-                <a:solidFill>
-                  <a:srgbClr val="1A1A1A"/>
-                </a:solidFill>
-                <a:latin typeface="Segoe UI"/>
-              </a:rPr>
-              <a:t>TLS verification is disabled only per endpoint, opt-in, for self-signed internal hosts (Jira / Confluence / GitLab) — each one individually triaged and documented</a:t>
+              <a:t>Stated plainly — the boundary this code does not draw</a:t>
+            </a:r>
+          </a:p>
+          <a:p>
+            <a:pPr algn="ctr"/>
+            <a:r>
+              <a:rPr sz="900" b="0">
+                <a:solidFill>
+                  <a:srgbClr val="1A1A1A"/>
+                </a:solidFill>
+                <a:latin typeface="Segoe UI"/>
+              </a:rPr>
+              <a:t>run_command and execute_ipython_cell open a socket themselves: curl in a shell never passes through the egress module and cannot be made to. That line is an OS firewall or a network namespace. Regex risk-matching is a floor, not a proof — pair it with the sandbox.</a:t>
             </a:r>
           </a:p>
         </p:txBody>
@@ -12227,7 +11712,7 @@
                 </a:solidFill>
                 <a:latin typeface="Segoe UI"/>
               </a:rPr>
-              <a:t>Where it differs from the other agent tools</a:t>
+              <a:t>Security and supply chain</a:t>
             </a:r>
           </a:p>
         </p:txBody>
@@ -12266,7 +11751,7 @@
                 </a:solidFill>
                 <a:latin typeface="Segoe UI"/>
               </a:rPr>
-              <a:t>It adopts their formats rather than replacing them — then adds the two things none of them do.</a:t>
+              <a:t>No telemetry. Nothing leaves the machine unless you point it somewhere.</a:t>
             </a:r>
           </a:p>
         </p:txBody>
@@ -12349,7 +11834,7 @@
                 </a:solidFill>
                 <a:latin typeface="Segoe UI"/>
               </a:rPr>
-              <a:t>Named comparisons are the ones the codebase itself cites: the SKILL.md gaps vs Hermes Agent / OpenClaw, and Cursor's glob-scoped rule format.</a:t>
+              <a:t>Stated plainly: by default the chat agent has full, unsandboxed shell access on the host. The workspace jail guards file tools, not arbitrary shell — run untrusted work in container mode.</a:t>
             </a:r>
           </a:p>
         </p:txBody>
@@ -12395,14 +11880,53 @@
       </p:sp>
       <p:sp>
         <p:nvSpPr>
-          <p:cNvPr id="7" name="Rounded Rectangle 6"/>
+          <p:cNvPr id="7" name="TextBox 6"/>
+          <p:cNvSpPr txBox="1"/>
+          <p:nvPr/>
+        </p:nvSpPr>
+        <p:spPr>
+          <a:xfrm>
+            <a:off x="685800" y="1325880"/>
+            <a:ext cx="5486400" cy="228600"/>
+          </a:xfrm>
+          <a:prstGeom prst="rect">
+            <a:avLst/>
+          </a:prstGeom>
+          <a:noFill/>
+        </p:spPr>
+        <p:txBody>
+          <a:bodyPr wrap="square" anchor="t" lIns="0" rIns="0" tIns="0" bIns="0">
+            <a:spAutoFit/>
+          </a:bodyPr>
+          <a:lstStyle/>
+          <a:p>
+            <a:pPr algn="l">
+              <a:spcAft>
+                <a:spcPts val="0"/>
+              </a:spcAft>
+            </a:pPr>
+            <a:r>
+              <a:rPr sz="1000" b="1">
+                <a:solidFill>
+                  <a:srgbClr val="6B6B6B"/>
+                </a:solidFill>
+                <a:latin typeface="Segoe UI"/>
+              </a:rPr>
+              <a:t>SCANNED AND TRIAGED</a:t>
+            </a:r>
+          </a:p>
+        </p:txBody>
+      </p:sp>
+      <p:sp>
+        <p:nvSpPr>
+          <p:cNvPr id="8" name="Rounded Rectangle 7"/>
           <p:cNvSpPr/>
           <p:nvPr/>
         </p:nvSpPr>
         <p:spPr>
           <a:xfrm>
-            <a:off x="685800" y="1389888"/>
-            <a:ext cx="10853928" cy="713232"/>
+            <a:off x="685800" y="1600200"/>
+            <a:ext cx="1691640" cy="1051560"/>
           </a:xfrm>
           <a:prstGeom prst="roundRect">
             <a:avLst>
@@ -12439,48 +11963,52 @@
           <a:p>
             <a:pPr algn="ctr"/>
             <a:r>
-              <a:rPr sz="1400" b="1">
+              <a:rPr sz="2200" b="1">
                 <a:solidFill>
                   <a:srgbClr val="1E6B52"/>
                 </a:solidFill>
                 <a:latin typeface="Segoe UI"/>
               </a:rPr>
-              <a:t>Reads what your repo already has</a:t>
-            </a:r>
-          </a:p>
-          <a:p>
-            <a:pPr algn="ctr"/>
-            <a:r>
-              <a:rPr sz="1050" b="0">
-                <a:solidFill>
-                  <a:srgbClr val="1A1A1A"/>
-                </a:solidFill>
-                <a:latin typeface="Segoe UI"/>
-              </a:rPr>
-              <a:t>.cursor/rules/*.mdc  ·  .cursorrules  ·  AGENTS.md  ·  SKILL.md (agentskills.io)  —  no migration, no lock-in</a:t>
-            </a:r>
-          </a:p>
-        </p:txBody>
-      </p:sp>
-      <p:sp>
-        <p:nvSpPr>
-          <p:cNvPr id="8" name="Rectangle 7"/>
+              <a:t>0</a:t>
+            </a:r>
+          </a:p>
+          <a:p>
+            <a:pPr algn="ctr"/>
+            <a:r>
+              <a:rPr sz="850" b="0">
+                <a:solidFill>
+                  <a:srgbClr val="1A1A1A"/>
+                </a:solidFill>
+                <a:latin typeface="Segoe UI"/>
+              </a:rPr>
+              <a:t>Sonar bugs</a:t>
+            </a:r>
+          </a:p>
+        </p:txBody>
+      </p:sp>
+      <p:sp>
+        <p:nvSpPr>
+          <p:cNvPr id="9" name="Rounded Rectangle 8"/>
           <p:cNvSpPr/>
           <p:nvPr/>
         </p:nvSpPr>
         <p:spPr>
           <a:xfrm>
-            <a:off x="685800" y="2267712"/>
-            <a:ext cx="10853928" cy="475488"/>
-          </a:xfrm>
-          <a:prstGeom prst="rect">
-            <a:avLst/>
+            <a:off x="2532888" y="1600200"/>
+            <a:ext cx="1691640" cy="1051560"/>
+          </a:xfrm>
+          <a:prstGeom prst="roundRect">
+            <a:avLst>
+              <a:gd name="adj" fmla="val 10000"/>
+            </a:avLst>
           </a:prstGeom>
           <a:solidFill>
-            <a:srgbClr val="F7F7F7"/>
+            <a:srgbClr val="DCEEE7"/>
           </a:solidFill>
-          <a:ln>
-            <a:noFill/>
+          <a:ln w="12700">
+            <a:solidFill>
+              <a:srgbClr val="1E6B52"/>
+            </a:solidFill>
           </a:ln>
           <a:effectLst/>
         </p:spPr>
@@ -12499,23 +12027,392 @@
           </a:fontRef>
         </p:style>
         <p:txBody>
-          <a:bodyPr rtlCol="0" anchor="ctr"/>
-          <a:lstStyle/>
-          <a:p>
-            <a:pPr algn="ctr"/>
-          </a:p>
-        </p:txBody>
-      </p:sp>
-      <p:sp>
-        <p:nvSpPr>
-          <p:cNvPr id="9" name="TextBox 8"/>
+          <a:bodyPr rtlCol="0" anchor="ctr" wrap="square" lIns="54864" rIns="54864" tIns="27432" bIns="27432"/>
+          <a:lstStyle/>
+          <a:p>
+            <a:pPr algn="ctr"/>
+            <a:r>
+              <a:rPr sz="2200" b="1">
+                <a:solidFill>
+                  <a:srgbClr val="1E6B52"/>
+                </a:solidFill>
+                <a:latin typeface="Segoe UI"/>
+              </a:rPr>
+              <a:t>0</a:t>
+            </a:r>
+          </a:p>
+          <a:p>
+            <a:pPr algn="ctr"/>
+            <a:r>
+              <a:rPr sz="850" b="0">
+                <a:solidFill>
+                  <a:srgbClr val="1A1A1A"/>
+                </a:solidFill>
+                <a:latin typeface="Segoe UI"/>
+              </a:rPr>
+              <a:t>Trivy findings</a:t>
+            </a:r>
+          </a:p>
+        </p:txBody>
+      </p:sp>
+      <p:sp>
+        <p:nvSpPr>
+          <p:cNvPr id="10" name="Rounded Rectangle 9"/>
+          <p:cNvSpPr/>
+          <p:nvPr/>
+        </p:nvSpPr>
+        <p:spPr>
+          <a:xfrm>
+            <a:off x="4379976" y="1600200"/>
+            <a:ext cx="1691640" cy="1051560"/>
+          </a:xfrm>
+          <a:prstGeom prst="roundRect">
+            <a:avLst>
+              <a:gd name="adj" fmla="val 10000"/>
+            </a:avLst>
+          </a:prstGeom>
+          <a:solidFill>
+            <a:srgbClr val="F7ECD5"/>
+          </a:solidFill>
+          <a:ln w="12700">
+            <a:solidFill>
+              <a:srgbClr val="8A5A00"/>
+            </a:solidFill>
+          </a:ln>
+          <a:effectLst/>
+        </p:spPr>
+        <p:style>
+          <a:lnRef idx="1">
+            <a:schemeClr val="accent1"/>
+          </a:lnRef>
+          <a:fillRef idx="3">
+            <a:schemeClr val="accent1"/>
+          </a:fillRef>
+          <a:effectRef idx="2">
+            <a:schemeClr val="accent1"/>
+          </a:effectRef>
+          <a:fontRef idx="minor">
+            <a:schemeClr val="lt1"/>
+          </a:fontRef>
+        </p:style>
+        <p:txBody>
+          <a:bodyPr rtlCol="0" anchor="ctr" wrap="square" lIns="54864" rIns="54864" tIns="27432" bIns="27432"/>
+          <a:lstStyle/>
+          <a:p>
+            <a:pPr algn="ctr"/>
+            <a:r>
+              <a:rPr sz="2200" b="1">
+                <a:solidFill>
+                  <a:srgbClr val="8A5A00"/>
+                </a:solidFill>
+                <a:latin typeface="Segoe UI"/>
+              </a:rPr>
+              <a:t>9</a:t>
+            </a:r>
+          </a:p>
+          <a:p>
+            <a:pPr algn="ctr"/>
+            <a:r>
+              <a:rPr sz="850" b="0">
+                <a:solidFill>
+                  <a:srgbClr val="1A1A1A"/>
+                </a:solidFill>
+                <a:latin typeface="Segoe UI"/>
+              </a:rPr>
+              <a:t>vulns — all</a:t>
+            </a:r>
+          </a:p>
+          <a:p>
+            <a:pPr algn="ctr"/>
+            <a:r>
+              <a:rPr sz="850" b="0">
+                <a:solidFill>
+                  <a:srgbClr val="1A1A1A"/>
+                </a:solidFill>
+                <a:latin typeface="Segoe UI"/>
+              </a:rPr>
+              <a:t>documented TLS</a:t>
+            </a:r>
+          </a:p>
+          <a:p>
+            <a:pPr algn="ctr"/>
+            <a:r>
+              <a:rPr sz="850" b="0">
+                <a:solidFill>
+                  <a:srgbClr val="1A1A1A"/>
+                </a:solidFill>
+                <a:latin typeface="Segoe UI"/>
+              </a:rPr>
+              <a:t>opt-outs</a:t>
+            </a:r>
+          </a:p>
+        </p:txBody>
+      </p:sp>
+      <p:sp>
+        <p:nvSpPr>
+          <p:cNvPr id="11" name="Rounded Rectangle 10"/>
+          <p:cNvSpPr/>
+          <p:nvPr/>
+        </p:nvSpPr>
+        <p:spPr>
+          <a:xfrm>
+            <a:off x="6227064" y="1600200"/>
+            <a:ext cx="1691640" cy="1051560"/>
+          </a:xfrm>
+          <a:prstGeom prst="roundRect">
+            <a:avLst>
+              <a:gd name="adj" fmla="val 10000"/>
+            </a:avLst>
+          </a:prstGeom>
+          <a:solidFill>
+            <a:srgbClr val="ECECEC"/>
+          </a:solidFill>
+          <a:ln w="12700">
+            <a:solidFill>
+              <a:srgbClr val="3A3A3A"/>
+            </a:solidFill>
+          </a:ln>
+          <a:effectLst/>
+        </p:spPr>
+        <p:style>
+          <a:lnRef idx="1">
+            <a:schemeClr val="accent1"/>
+          </a:lnRef>
+          <a:fillRef idx="3">
+            <a:schemeClr val="accent1"/>
+          </a:fillRef>
+          <a:effectRef idx="2">
+            <a:schemeClr val="accent1"/>
+          </a:effectRef>
+          <a:fontRef idx="minor">
+            <a:schemeClr val="lt1"/>
+          </a:fontRef>
+        </p:style>
+        <p:txBody>
+          <a:bodyPr rtlCol="0" anchor="ctr" wrap="square" lIns="54864" rIns="54864" tIns="27432" bIns="27432"/>
+          <a:lstStyle/>
+          <a:p>
+            <a:pPr algn="ctr"/>
+            <a:r>
+              <a:rPr sz="2200" b="1">
+                <a:solidFill>
+                  <a:srgbClr val="3A3A3A"/>
+                </a:solidFill>
+                <a:latin typeface="Segoe UI"/>
+              </a:rPr>
+              <a:t>186</a:t>
+            </a:r>
+          </a:p>
+          <a:p>
+            <a:pPr algn="ctr"/>
+            <a:r>
+              <a:rPr sz="850" b="0">
+                <a:solidFill>
+                  <a:srgbClr val="1A1A1A"/>
+                </a:solidFill>
+                <a:latin typeface="Segoe UI"/>
+              </a:rPr>
+              <a:t>dependency</a:t>
+            </a:r>
+          </a:p>
+          <a:p>
+            <a:pPr algn="ctr"/>
+            <a:r>
+              <a:rPr sz="850" b="0">
+                <a:solidFill>
+                  <a:srgbClr val="1A1A1A"/>
+                </a:solidFill>
+                <a:latin typeface="Segoe UI"/>
+              </a:rPr>
+              <a:t>packages</a:t>
+            </a:r>
+          </a:p>
+        </p:txBody>
+      </p:sp>
+      <p:sp>
+        <p:nvSpPr>
+          <p:cNvPr id="12" name="Rounded Rectangle 11"/>
+          <p:cNvSpPr/>
+          <p:nvPr/>
+        </p:nvSpPr>
+        <p:spPr>
+          <a:xfrm>
+            <a:off x="8074152" y="1600200"/>
+            <a:ext cx="1691640" cy="1051560"/>
+          </a:xfrm>
+          <a:prstGeom prst="roundRect">
+            <a:avLst>
+              <a:gd name="adj" fmla="val 10000"/>
+            </a:avLst>
+          </a:prstGeom>
+          <a:solidFill>
+            <a:srgbClr val="DCEEE7"/>
+          </a:solidFill>
+          <a:ln w="12700">
+            <a:solidFill>
+              <a:srgbClr val="1E6B52"/>
+            </a:solidFill>
+          </a:ln>
+          <a:effectLst/>
+        </p:spPr>
+        <p:style>
+          <a:lnRef idx="1">
+            <a:schemeClr val="accent1"/>
+          </a:lnRef>
+          <a:fillRef idx="3">
+            <a:schemeClr val="accent1"/>
+          </a:fillRef>
+          <a:effectRef idx="2">
+            <a:schemeClr val="accent1"/>
+          </a:effectRef>
+          <a:fontRef idx="minor">
+            <a:schemeClr val="lt1"/>
+          </a:fontRef>
+        </p:style>
+        <p:txBody>
+          <a:bodyPr rtlCol="0" anchor="ctr" wrap="square" lIns="54864" rIns="54864" tIns="27432" bIns="27432"/>
+          <a:lstStyle/>
+          <a:p>
+            <a:pPr algn="ctr"/>
+            <a:r>
+              <a:rPr sz="2200" b="1">
+                <a:solidFill>
+                  <a:srgbClr val="1E6B52"/>
+                </a:solidFill>
+                <a:latin typeface="Segoe UI"/>
+              </a:rPr>
+              <a:t>86%</a:t>
+            </a:r>
+          </a:p>
+          <a:p>
+            <a:pPr algn="ctr"/>
+            <a:r>
+              <a:rPr sz="850" b="0">
+                <a:solidFill>
+                  <a:srgbClr val="1A1A1A"/>
+                </a:solidFill>
+                <a:latin typeface="Segoe UI"/>
+              </a:rPr>
+              <a:t>line coverage</a:t>
+            </a:r>
+          </a:p>
+          <a:p>
+            <a:pPr algn="ctr"/>
+            <a:r>
+              <a:rPr sz="850" b="0">
+                <a:solidFill>
+                  <a:srgbClr val="1A1A1A"/>
+                </a:solidFill>
+                <a:latin typeface="Segoe UI"/>
+              </a:rPr>
+              <a:t>~4,000 tests</a:t>
+            </a:r>
+          </a:p>
+        </p:txBody>
+      </p:sp>
+      <p:sp>
+        <p:nvSpPr>
+          <p:cNvPr id="13" name="Rounded Rectangle 12"/>
+          <p:cNvSpPr/>
+          <p:nvPr/>
+        </p:nvSpPr>
+        <p:spPr>
+          <a:xfrm>
+            <a:off x="9921240" y="1600200"/>
+            <a:ext cx="1691640" cy="1051560"/>
+          </a:xfrm>
+          <a:prstGeom prst="roundRect">
+            <a:avLst>
+              <a:gd name="adj" fmla="val 10000"/>
+            </a:avLst>
+          </a:prstGeom>
+          <a:solidFill>
+            <a:srgbClr val="DCEEE7"/>
+          </a:solidFill>
+          <a:ln w="12700">
+            <a:solidFill>
+              <a:srgbClr val="1E6B52"/>
+            </a:solidFill>
+          </a:ln>
+          <a:effectLst/>
+        </p:spPr>
+        <p:style>
+          <a:lnRef idx="1">
+            <a:schemeClr val="accent1"/>
+          </a:lnRef>
+          <a:fillRef idx="3">
+            <a:schemeClr val="accent1"/>
+          </a:fillRef>
+          <a:effectRef idx="2">
+            <a:schemeClr val="accent1"/>
+          </a:effectRef>
+          <a:fontRef idx="minor">
+            <a:schemeClr val="lt1"/>
+          </a:fontRef>
+        </p:style>
+        <p:txBody>
+          <a:bodyPr rtlCol="0" anchor="ctr" wrap="square" lIns="54864" rIns="54864" tIns="27432" bIns="27432"/>
+          <a:lstStyle/>
+          <a:p>
+            <a:pPr algn="ctr"/>
+            <a:r>
+              <a:rPr sz="2200" b="1">
+                <a:solidFill>
+                  <a:srgbClr val="1E6B52"/>
+                </a:solidFill>
+                <a:latin typeface="Segoe UI"/>
+              </a:rPr>
+              <a:t>≤15</a:t>
+            </a:r>
+          </a:p>
+          <a:p>
+            <a:pPr algn="ctr"/>
+            <a:r>
+              <a:rPr sz="850" b="0">
+                <a:solidFill>
+                  <a:srgbClr val="1A1A1A"/>
+                </a:solidFill>
+                <a:latin typeface="Segoe UI"/>
+              </a:rPr>
+              <a:t>cognitive</a:t>
+            </a:r>
+          </a:p>
+          <a:p>
+            <a:pPr algn="ctr"/>
+            <a:r>
+              <a:rPr sz="850" b="0">
+                <a:solidFill>
+                  <a:srgbClr val="1A1A1A"/>
+                </a:solidFill>
+                <a:latin typeface="Segoe UI"/>
+              </a:rPr>
+              <a:t>complexity, every</a:t>
+            </a:r>
+          </a:p>
+          <a:p>
+            <a:pPr algn="ctr"/>
+            <a:r>
+              <a:rPr sz="850" b="0">
+                <a:solidFill>
+                  <a:srgbClr val="1A1A1A"/>
+                </a:solidFill>
+                <a:latin typeface="Segoe UI"/>
+              </a:rPr>
+              <a:t>function</a:t>
+            </a:r>
+          </a:p>
+        </p:txBody>
+      </p:sp>
+      <p:sp>
+        <p:nvSpPr>
+          <p:cNvPr id="14" name="TextBox 13"/>
           <p:cNvSpPr txBox="1"/>
           <p:nvPr/>
         </p:nvSpPr>
         <p:spPr>
           <a:xfrm>
-            <a:off x="822960" y="2395728"/>
-            <a:ext cx="2377440" cy="274320"/>
+            <a:off x="685800" y="2880360"/>
+            <a:ext cx="5486400" cy="228600"/>
           </a:xfrm>
           <a:prstGeom prst="rect">
             <a:avLst/>
@@ -12534,27 +12431,633 @@
               </a:spcAft>
             </a:pPr>
             <a:r>
-              <a:rPr sz="1100" b="1">
-                <a:solidFill>
-                  <a:srgbClr val="1A1A1A"/>
-                </a:solidFill>
-                <a:latin typeface="Segoe UI"/>
-              </a:rPr>
-              <a:t>Ticket → PR AND chat</a:t>
-            </a:r>
-          </a:p>
-        </p:txBody>
-      </p:sp>
-      <p:sp>
-        <p:nvSpPr>
-          <p:cNvPr id="10" name="TextBox 9"/>
+              <a:rPr sz="1000" b="1">
+                <a:solidFill>
+                  <a:srgbClr val="6B6B6B"/>
+                </a:solidFill>
+                <a:latin typeface="Segoe UI"/>
+              </a:rPr>
+              <a:t>CI SCAN PIPELINE  (.gitlab-ci.yml)</a:t>
+            </a:r>
+          </a:p>
+        </p:txBody>
+      </p:sp>
+      <p:sp>
+        <p:nvSpPr>
+          <p:cNvPr id="15" name="Rounded Rectangle 14"/>
+          <p:cNvSpPr/>
+          <p:nvPr/>
+        </p:nvSpPr>
+        <p:spPr>
+          <a:xfrm>
+            <a:off x="685800" y="3154680"/>
+            <a:ext cx="2103120" cy="868680"/>
+          </a:xfrm>
+          <a:prstGeom prst="roundRect">
+            <a:avLst>
+              <a:gd name="adj" fmla="val 10000"/>
+            </a:avLst>
+          </a:prstGeom>
+          <a:solidFill>
+            <a:srgbClr val="DCE7F2"/>
+          </a:solidFill>
+          <a:ln w="12700">
+            <a:solidFill>
+              <a:srgbClr val="1F4E79"/>
+            </a:solidFill>
+          </a:ln>
+          <a:effectLst/>
+        </p:spPr>
+        <p:style>
+          <a:lnRef idx="1">
+            <a:schemeClr val="accent1"/>
+          </a:lnRef>
+          <a:fillRef idx="3">
+            <a:schemeClr val="accent1"/>
+          </a:fillRef>
+          <a:effectRef idx="2">
+            <a:schemeClr val="accent1"/>
+          </a:effectRef>
+          <a:fontRef idx="minor">
+            <a:schemeClr val="lt1"/>
+          </a:fontRef>
+        </p:style>
+        <p:txBody>
+          <a:bodyPr rtlCol="0" anchor="ctr" wrap="square" lIns="54864" rIns="54864" tIns="27432" bIns="27432"/>
+          <a:lstStyle/>
+          <a:p>
+            <a:pPr algn="ctr"/>
+            <a:r>
+              <a:rPr sz="1250" b="1">
+                <a:solidFill>
+                  <a:srgbClr val="1F4E79"/>
+                </a:solidFill>
+                <a:latin typeface="Segoe UI"/>
+              </a:rPr>
+              <a:t>build</a:t>
+            </a:r>
+          </a:p>
+          <a:p>
+            <a:pPr algn="ctr"/>
+            <a:r>
+              <a:rPr sz="850" b="0">
+                <a:solidFill>
+                  <a:srgbClr val="1A1A1A"/>
+                </a:solidFill>
+                <a:latin typeface="Segoe UI"/>
+              </a:rPr>
+              <a:t>uv sync --frozen</a:t>
+            </a:r>
+          </a:p>
+          <a:p>
+            <a:pPr algn="ctr"/>
+            <a:r>
+              <a:rPr sz="850" b="0">
+                <a:solidFill>
+                  <a:srgbClr val="1A1A1A"/>
+                </a:solidFill>
+                <a:latin typeface="Segoe UI"/>
+              </a:rPr>
+              <a:t>uv.lock decides versions</a:t>
+            </a:r>
+          </a:p>
+        </p:txBody>
+      </p:sp>
+      <p:cxnSp>
+        <p:nvCxnSpPr>
+          <p:cNvPr id="16" name="Connector 15"/>
+          <p:cNvCxnSpPr/>
+          <p:nvPr/>
+        </p:nvCxnSpPr>
+        <p:spPr>
+          <a:xfrm>
+            <a:off x="2788920" y="3584448"/>
+            <a:ext cx="365760" cy="0"/>
+          </a:xfrm>
+          <a:prstGeom prst="line">
+            <a:avLst/>
+          </a:prstGeom>
+          <a:ln w="19050">
+            <a:solidFill>
+              <a:srgbClr val="C9C9C9"/>
+            </a:solidFill>
+            <a:tailEnd type="triangle" w="med" len="med"/>
+          </a:ln>
+        </p:spPr>
+        <p:style>
+          <a:lnRef idx="2">
+            <a:schemeClr val="accent1"/>
+          </a:lnRef>
+          <a:fillRef idx="0">
+            <a:schemeClr val="accent1"/>
+          </a:fillRef>
+          <a:effectRef idx="1">
+            <a:schemeClr val="accent1"/>
+          </a:effectRef>
+          <a:fontRef idx="minor">
+            <a:schemeClr val="tx1"/>
+          </a:fontRef>
+        </p:style>
+      </p:cxnSp>
+      <p:sp>
+        <p:nvSpPr>
+          <p:cNvPr id="17" name="Rounded Rectangle 16"/>
+          <p:cNvSpPr/>
+          <p:nvPr/>
+        </p:nvSpPr>
+        <p:spPr>
+          <a:xfrm>
+            <a:off x="3154680" y="3154680"/>
+            <a:ext cx="2103120" cy="868680"/>
+          </a:xfrm>
+          <a:prstGeom prst="roundRect">
+            <a:avLst>
+              <a:gd name="adj" fmla="val 10000"/>
+            </a:avLst>
+          </a:prstGeom>
+          <a:solidFill>
+            <a:srgbClr val="DCEEE7"/>
+          </a:solidFill>
+          <a:ln w="12700">
+            <a:solidFill>
+              <a:srgbClr val="1E6B52"/>
+            </a:solidFill>
+          </a:ln>
+          <a:effectLst/>
+        </p:spPr>
+        <p:style>
+          <a:lnRef idx="1">
+            <a:schemeClr val="accent1"/>
+          </a:lnRef>
+          <a:fillRef idx="3">
+            <a:schemeClr val="accent1"/>
+          </a:fillRef>
+          <a:effectRef idx="2">
+            <a:schemeClr val="accent1"/>
+          </a:effectRef>
+          <a:fontRef idx="minor">
+            <a:schemeClr val="lt1"/>
+          </a:fontRef>
+        </p:style>
+        <p:txBody>
+          <a:bodyPr rtlCol="0" anchor="ctr" wrap="square" lIns="54864" rIns="54864" tIns="27432" bIns="27432"/>
+          <a:lstStyle/>
+          <a:p>
+            <a:pPr algn="ctr"/>
+            <a:r>
+              <a:rPr sz="1250" b="1">
+                <a:solidFill>
+                  <a:srgbClr val="1E6B52"/>
+                </a:solidFill>
+                <a:latin typeface="Segoe UI"/>
+              </a:rPr>
+              <a:t>sonar/</a:t>
+            </a:r>
+          </a:p>
+          <a:p>
+            <a:pPr algn="ctr"/>
+            <a:r>
+              <a:rPr sz="850" b="0">
+                <a:solidFill>
+                  <a:srgbClr val="1A1A1A"/>
+                </a:solidFill>
+                <a:latin typeface="Segoe UI"/>
+              </a:rPr>
+              <a:t>coverage.xml · junit.xml</a:t>
+            </a:r>
+          </a:p>
+          <a:p>
+            <a:pPr algn="ctr"/>
+            <a:r>
+              <a:rPr sz="850" b="0">
+                <a:solidFill>
+                  <a:srgbClr val="1A1A1A"/>
+                </a:solidFill>
+                <a:latin typeface="Segoe UI"/>
+              </a:rPr>
+              <a:t>+ web/src included</a:t>
+            </a:r>
+          </a:p>
+        </p:txBody>
+      </p:sp>
+      <p:sp>
+        <p:nvSpPr>
+          <p:cNvPr id="18" name="Rounded Rectangle 17"/>
+          <p:cNvSpPr/>
+          <p:nvPr/>
+        </p:nvSpPr>
+        <p:spPr>
+          <a:xfrm>
+            <a:off x="3154680" y="4160520"/>
+            <a:ext cx="2103120" cy="868680"/>
+          </a:xfrm>
+          <a:prstGeom prst="roundRect">
+            <a:avLst>
+              <a:gd name="adj" fmla="val 10000"/>
+            </a:avLst>
+          </a:prstGeom>
+          <a:solidFill>
+            <a:srgbClr val="EAE1F0"/>
+          </a:solidFill>
+          <a:ln w="12700">
+            <a:solidFill>
+              <a:srgbClr val="5B3A6E"/>
+            </a:solidFill>
+          </a:ln>
+          <a:effectLst/>
+        </p:spPr>
+        <p:style>
+          <a:lnRef idx="1">
+            <a:schemeClr val="accent1"/>
+          </a:lnRef>
+          <a:fillRef idx="3">
+            <a:schemeClr val="accent1"/>
+          </a:fillRef>
+          <a:effectRef idx="2">
+            <a:schemeClr val="accent1"/>
+          </a:effectRef>
+          <a:fontRef idx="minor">
+            <a:schemeClr val="lt1"/>
+          </a:fontRef>
+        </p:style>
+        <p:txBody>
+          <a:bodyPr rtlCol="0" anchor="ctr" wrap="square" lIns="54864" rIns="54864" tIns="27432" bIns="27432"/>
+          <a:lstStyle/>
+          <a:p>
+            <a:pPr algn="ctr"/>
+            <a:r>
+              <a:rPr sz="1250" b="1">
+                <a:solidFill>
+                  <a:srgbClr val="5B3A6E"/>
+                </a:solidFill>
+                <a:latin typeface="Segoe UI"/>
+              </a:rPr>
+              <a:t>blackduck/</a:t>
+            </a:r>
+          </a:p>
+          <a:p>
+            <a:pPr algn="ctr"/>
+            <a:r>
+              <a:rPr sz="850" b="0">
+                <a:solidFill>
+                  <a:srgbClr val="1A1A1A"/>
+                </a:solidFill>
+                <a:latin typeface="Segoe UI"/>
+              </a:rPr>
+              <a:t>pinned requirements</a:t>
+            </a:r>
+          </a:p>
+          <a:p>
+            <a:pPr algn="ctr"/>
+            <a:r>
+              <a:rPr sz="850" b="0">
+                <a:solidFill>
+                  <a:srgbClr val="1A1A1A"/>
+                </a:solidFill>
+                <a:latin typeface="Segoe UI"/>
+              </a:rPr>
+              <a:t>CycloneDX SBOM · wheels</a:t>
+            </a:r>
+          </a:p>
+        </p:txBody>
+      </p:sp>
+      <p:cxnSp>
+        <p:nvCxnSpPr>
+          <p:cNvPr id="19" name="Connector 18"/>
+          <p:cNvCxnSpPr/>
+          <p:nvPr/>
+        </p:nvCxnSpPr>
+        <p:spPr>
+          <a:xfrm>
+            <a:off x="2788920" y="3584448"/>
+            <a:ext cx="365760" cy="1005840"/>
+          </a:xfrm>
+          <a:prstGeom prst="line">
+            <a:avLst/>
+          </a:prstGeom>
+          <a:ln w="19050">
+            <a:solidFill>
+              <a:srgbClr val="C9C9C9"/>
+            </a:solidFill>
+            <a:tailEnd type="triangle" w="med" len="med"/>
+          </a:ln>
+        </p:spPr>
+        <p:style>
+          <a:lnRef idx="2">
+            <a:schemeClr val="accent1"/>
+          </a:lnRef>
+          <a:fillRef idx="0">
+            <a:schemeClr val="accent1"/>
+          </a:fillRef>
+          <a:effectRef idx="1">
+            <a:schemeClr val="accent1"/>
+          </a:effectRef>
+          <a:fontRef idx="minor">
+            <a:schemeClr val="tx1"/>
+          </a:fontRef>
+        </p:style>
+      </p:cxnSp>
+      <p:cxnSp>
+        <p:nvCxnSpPr>
+          <p:cNvPr id="20" name="Connector 19"/>
+          <p:cNvCxnSpPr/>
+          <p:nvPr/>
+        </p:nvCxnSpPr>
+        <p:spPr>
+          <a:xfrm>
+            <a:off x="5257800" y="3584448"/>
+            <a:ext cx="365760" cy="0"/>
+          </a:xfrm>
+          <a:prstGeom prst="line">
+            <a:avLst/>
+          </a:prstGeom>
+          <a:ln w="19050">
+            <a:solidFill>
+              <a:srgbClr val="C9C9C9"/>
+            </a:solidFill>
+            <a:tailEnd type="triangle" w="med" len="med"/>
+          </a:ln>
+        </p:spPr>
+        <p:style>
+          <a:lnRef idx="2">
+            <a:schemeClr val="accent1"/>
+          </a:lnRef>
+          <a:fillRef idx="0">
+            <a:schemeClr val="accent1"/>
+          </a:fillRef>
+          <a:effectRef idx="1">
+            <a:schemeClr val="accent1"/>
+          </a:effectRef>
+          <a:fontRef idx="minor">
+            <a:schemeClr val="tx1"/>
+          </a:fontRef>
+        </p:style>
+      </p:cxnSp>
+      <p:sp>
+        <p:nvSpPr>
+          <p:cNvPr id="21" name="Rounded Rectangle 20"/>
+          <p:cNvSpPr/>
+          <p:nvPr/>
+        </p:nvSpPr>
+        <p:spPr>
+          <a:xfrm>
+            <a:off x="5623560" y="3154680"/>
+            <a:ext cx="2011680" cy="868680"/>
+          </a:xfrm>
+          <a:prstGeom prst="roundRect">
+            <a:avLst>
+              <a:gd name="adj" fmla="val 10000"/>
+            </a:avLst>
+          </a:prstGeom>
+          <a:solidFill>
+            <a:srgbClr val="FFFFFF"/>
+          </a:solidFill>
+          <a:ln w="12700">
+            <a:solidFill>
+              <a:srgbClr val="1E6B52"/>
+            </a:solidFill>
+          </a:ln>
+          <a:effectLst/>
+        </p:spPr>
+        <p:style>
+          <a:lnRef idx="1">
+            <a:schemeClr val="accent1"/>
+          </a:lnRef>
+          <a:fillRef idx="3">
+            <a:schemeClr val="accent1"/>
+          </a:fillRef>
+          <a:effectRef idx="2">
+            <a:schemeClr val="accent1"/>
+          </a:effectRef>
+          <a:fontRef idx="minor">
+            <a:schemeClr val="lt1"/>
+          </a:fontRef>
+        </p:style>
+        <p:txBody>
+          <a:bodyPr rtlCol="0" anchor="ctr" wrap="square" lIns="54864" rIns="54864" tIns="27432" bIns="27432"/>
+          <a:lstStyle/>
+          <a:p>
+            <a:pPr algn="ctr"/>
+            <a:r>
+              <a:rPr sz="1250" b="1">
+                <a:solidFill>
+                  <a:srgbClr val="1E6B52"/>
+                </a:solidFill>
+                <a:latin typeface="Segoe UI"/>
+              </a:rPr>
+              <a:t>SonarQube</a:t>
+            </a:r>
+          </a:p>
+          <a:p>
+            <a:pPr algn="ctr"/>
+            <a:r>
+              <a:rPr sz="850" b="0">
+                <a:solidFill>
+                  <a:srgbClr val="1A1A1A"/>
+                </a:solidFill>
+                <a:latin typeface="Segoe UI"/>
+              </a:rPr>
+              <a:t>scanner-cli</a:t>
+            </a:r>
+          </a:p>
+          <a:p>
+            <a:pPr algn="ctr"/>
+            <a:r>
+              <a:rPr sz="850" b="0">
+                <a:solidFill>
+                  <a:srgbClr val="1A1A1A"/>
+                </a:solidFill>
+                <a:latin typeface="Segoe UI"/>
+              </a:rPr>
+              <a:t>GIT_DEPTH 0</a:t>
+            </a:r>
+          </a:p>
+        </p:txBody>
+      </p:sp>
+      <p:cxnSp>
+        <p:nvCxnSpPr>
+          <p:cNvPr id="22" name="Connector 21"/>
+          <p:cNvCxnSpPr/>
+          <p:nvPr/>
+        </p:nvCxnSpPr>
+        <p:spPr>
+          <a:xfrm>
+            <a:off x="5257800" y="4590288"/>
+            <a:ext cx="365760" cy="0"/>
+          </a:xfrm>
+          <a:prstGeom prst="line">
+            <a:avLst/>
+          </a:prstGeom>
+          <a:ln w="19050">
+            <a:solidFill>
+              <a:srgbClr val="C9C9C9"/>
+            </a:solidFill>
+            <a:tailEnd type="triangle" w="med" len="med"/>
+          </a:ln>
+        </p:spPr>
+        <p:style>
+          <a:lnRef idx="2">
+            <a:schemeClr val="accent1"/>
+          </a:lnRef>
+          <a:fillRef idx="0">
+            <a:schemeClr val="accent1"/>
+          </a:fillRef>
+          <a:effectRef idx="1">
+            <a:schemeClr val="accent1"/>
+          </a:effectRef>
+          <a:fontRef idx="minor">
+            <a:schemeClr val="tx1"/>
+          </a:fontRef>
+        </p:style>
+      </p:cxnSp>
+      <p:sp>
+        <p:nvSpPr>
+          <p:cNvPr id="23" name="Rounded Rectangle 22"/>
+          <p:cNvSpPr/>
+          <p:nvPr/>
+        </p:nvSpPr>
+        <p:spPr>
+          <a:xfrm>
+            <a:off x="5623560" y="4160520"/>
+            <a:ext cx="2011680" cy="868680"/>
+          </a:xfrm>
+          <a:prstGeom prst="roundRect">
+            <a:avLst>
+              <a:gd name="adj" fmla="val 10000"/>
+            </a:avLst>
+          </a:prstGeom>
+          <a:solidFill>
+            <a:srgbClr val="FFFFFF"/>
+          </a:solidFill>
+          <a:ln w="12700">
+            <a:solidFill>
+              <a:srgbClr val="5B3A6E"/>
+            </a:solidFill>
+          </a:ln>
+          <a:effectLst/>
+        </p:spPr>
+        <p:style>
+          <a:lnRef idx="1">
+            <a:schemeClr val="accent1"/>
+          </a:lnRef>
+          <a:fillRef idx="3">
+            <a:schemeClr val="accent1"/>
+          </a:fillRef>
+          <a:effectRef idx="2">
+            <a:schemeClr val="accent1"/>
+          </a:effectRef>
+          <a:fontRef idx="minor">
+            <a:schemeClr val="lt1"/>
+          </a:fontRef>
+        </p:style>
+        <p:txBody>
+          <a:bodyPr rtlCol="0" anchor="ctr" wrap="square" lIns="54864" rIns="54864" tIns="27432" bIns="27432"/>
+          <a:lstStyle/>
+          <a:p>
+            <a:pPr algn="ctr"/>
+            <a:r>
+              <a:rPr sz="1250" b="1">
+                <a:solidFill>
+                  <a:srgbClr val="5B3A6E"/>
+                </a:solidFill>
+                <a:latin typeface="Segoe UI"/>
+              </a:rPr>
+              <a:t>Black Duck</a:t>
+            </a:r>
+          </a:p>
+          <a:p>
+            <a:pPr algn="ctr"/>
+            <a:r>
+              <a:rPr sz="850" b="0">
+                <a:solidFill>
+                  <a:srgbClr val="1A1A1A"/>
+                </a:solidFill>
+                <a:latin typeface="Segoe UI"/>
+              </a:rPr>
+              <a:t>detect10.sh</a:t>
+            </a:r>
+          </a:p>
+          <a:p>
+            <a:pPr algn="ctr"/>
+            <a:r>
+              <a:rPr sz="850" b="0">
+                <a:solidFill>
+                  <a:srgbClr val="1A1A1A"/>
+                </a:solidFill>
+                <a:latin typeface="Segoe UI"/>
+              </a:rPr>
+              <a:t>ships SHIPPED pins</a:t>
+            </a:r>
+          </a:p>
+        </p:txBody>
+      </p:sp>
+      <p:sp>
+        <p:nvSpPr>
+          <p:cNvPr id="24" name="Rounded Rectangle 23"/>
+          <p:cNvSpPr/>
+          <p:nvPr/>
+        </p:nvSpPr>
+        <p:spPr>
+          <a:xfrm>
+            <a:off x="8001000" y="3154680"/>
+            <a:ext cx="3520440" cy="1874519"/>
+          </a:xfrm>
+          <a:prstGeom prst="roundRect">
+            <a:avLst>
+              <a:gd name="adj" fmla="val 10000"/>
+            </a:avLst>
+          </a:prstGeom>
+          <a:solidFill>
+            <a:srgbClr val="FFFFFF"/>
+          </a:solidFill>
+          <a:ln w="12700">
+            <a:solidFill>
+              <a:srgbClr val="3A3A3A"/>
+            </a:solidFill>
+          </a:ln>
+          <a:effectLst/>
+        </p:spPr>
+        <p:style>
+          <a:lnRef idx="1">
+            <a:schemeClr val="accent1"/>
+          </a:lnRef>
+          <a:fillRef idx="3">
+            <a:schemeClr val="accent1"/>
+          </a:fillRef>
+          <a:effectRef idx="2">
+            <a:schemeClr val="accent1"/>
+          </a:effectRef>
+          <a:fontRef idx="minor">
+            <a:schemeClr val="lt1"/>
+          </a:fontRef>
+        </p:style>
+        <p:txBody>
+          <a:bodyPr rtlCol="0" anchor="ctr" wrap="square" lIns="54864" rIns="54864" tIns="27432" bIns="27432"/>
+          <a:lstStyle/>
+          <a:p>
+            <a:pPr algn="ctr"/>
+            <a:r>
+              <a:rPr sz="1250" b="1">
+                <a:solidFill>
+                  <a:srgbClr val="3A3A3A"/>
+                </a:solidFill>
+                <a:latin typeface="Segoe UI"/>
+              </a:rPr>
+              <a:t>Data control</a:t>
+            </a:r>
+          </a:p>
+        </p:txBody>
+      </p:sp>
+      <p:sp>
+        <p:nvSpPr>
+          <p:cNvPr id="25" name="TextBox 24"/>
           <p:cNvSpPr txBox="1"/>
           <p:nvPr/>
         </p:nvSpPr>
         <p:spPr>
           <a:xfrm>
-            <a:off x="3246120" y="2395728"/>
-            <a:ext cx="3657600" cy="274320"/>
+            <a:off x="8183879" y="3566160"/>
+            <a:ext cx="3246120" cy="228600"/>
           </a:xfrm>
           <a:prstGeom prst="rect">
             <a:avLst/>
@@ -12573,27 +13076,27 @@
               </a:spcAft>
             </a:pPr>
             <a:r>
-              <a:rPr sz="1050" b="0">
-                <a:solidFill>
-                  <a:srgbClr val="6B6B6B"/>
-                </a:solidFill>
-                <a:latin typeface="Segoe UI"/>
-              </a:rPr>
-              <a:t>usually one or the other</a:t>
-            </a:r>
-          </a:p>
-        </p:txBody>
-      </p:sp>
-      <p:sp>
-        <p:nvSpPr>
-          <p:cNvPr id="11" name="TextBox 10"/>
+              <a:rPr sz="950" b="0">
+                <a:solidFill>
+                  <a:srgbClr val="1A1A1A"/>
+                </a:solidFill>
+                <a:latin typeface="Segoe UI"/>
+              </a:rPr>
+              <a:t>· Telemetry: none, and none in the lock</a:t>
+            </a:r>
+          </a:p>
+        </p:txBody>
+      </p:sp>
+      <p:sp>
+        <p:nvSpPr>
+          <p:cNvPr id="26" name="TextBox 25"/>
           <p:cNvSpPr txBox="1"/>
           <p:nvPr/>
         </p:nvSpPr>
         <p:spPr>
           <a:xfrm>
-            <a:off x="7040880" y="2395728"/>
-            <a:ext cx="4389120" cy="274320"/>
+            <a:off x="8183879" y="3803904"/>
+            <a:ext cx="3246120" cy="228600"/>
           </a:xfrm>
           <a:prstGeom prst="rect">
             <a:avLst/>
@@ -12612,71 +13115,27 @@
               </a:spcAft>
             </a:pPr>
             <a:r>
-              <a:rPr sz="1050" b="0">
-                <a:solidFill>
-                  <a:srgbClr val="1A1A1A"/>
-                </a:solidFill>
-                <a:latin typeface="Segoe UI"/>
-              </a:rPr>
-              <a:t>▸ one service does both, on the same tool registry</a:t>
-            </a:r>
-          </a:p>
-        </p:txBody>
-      </p:sp>
-      <p:sp>
-        <p:nvSpPr>
-          <p:cNvPr id="12" name="Rectangle 11"/>
-          <p:cNvSpPr/>
-          <p:nvPr/>
-        </p:nvSpPr>
-        <p:spPr>
-          <a:xfrm>
-            <a:off x="685800" y="2798064"/>
-            <a:ext cx="10853928" cy="475488"/>
-          </a:xfrm>
-          <a:prstGeom prst="rect">
-            <a:avLst/>
-          </a:prstGeom>
-          <a:solidFill>
-            <a:srgbClr val="FFFFFF"/>
-          </a:solidFill>
-          <a:ln>
-            <a:noFill/>
-          </a:ln>
-          <a:effectLst/>
-        </p:spPr>
-        <p:style>
-          <a:lnRef idx="1">
-            <a:schemeClr val="accent1"/>
-          </a:lnRef>
-          <a:fillRef idx="3">
-            <a:schemeClr val="accent1"/>
-          </a:fillRef>
-          <a:effectRef idx="2">
-            <a:schemeClr val="accent1"/>
-          </a:effectRef>
-          <a:fontRef idx="minor">
-            <a:schemeClr val="lt1"/>
-          </a:fontRef>
-        </p:style>
-        <p:txBody>
-          <a:bodyPr rtlCol="0" anchor="ctr"/>
-          <a:lstStyle/>
-          <a:p>
-            <a:pPr algn="ctr"/>
-          </a:p>
-        </p:txBody>
-      </p:sp>
-      <p:sp>
-        <p:nvSpPr>
-          <p:cNvPr id="13" name="TextBox 12"/>
+              <a:rPr sz="950" b="0">
+                <a:solidFill>
+                  <a:srgbClr val="1A1A1A"/>
+                </a:solidFill>
+                <a:latin typeface="Segoe UI"/>
+              </a:rPr>
+              <a:t>· Prompts go only to YOUR endpoint</a:t>
+            </a:r>
+          </a:p>
+        </p:txBody>
+      </p:sp>
+      <p:sp>
+        <p:nvSpPr>
+          <p:cNvPr id="27" name="TextBox 26"/>
           <p:cNvSpPr txBox="1"/>
           <p:nvPr/>
         </p:nvSpPr>
         <p:spPr>
           <a:xfrm>
-            <a:off x="822960" y="2926080"/>
-            <a:ext cx="2377440" cy="274320"/>
+            <a:off x="8183879" y="4041648"/>
+            <a:ext cx="3246120" cy="228600"/>
           </a:xfrm>
           <a:prstGeom prst="rect">
             <a:avLst/>
@@ -12695,27 +13154,27 @@
               </a:spcAft>
             </a:pPr>
             <a:r>
-              <a:rPr sz="1100" b="1">
-                <a:solidFill>
-                  <a:srgbClr val="1A1A1A"/>
-                </a:solidFill>
-                <a:latin typeface="Segoe UI"/>
-              </a:rPr>
-              <a:t>Model requirement</a:t>
-            </a:r>
-          </a:p>
-        </p:txBody>
-      </p:sp>
-      <p:sp>
-        <p:nvSpPr>
-          <p:cNvPr id="14" name="TextBox 13"/>
+              <a:rPr sz="950" b="0">
+                <a:solidFill>
+                  <a:srgbClr val="1A1A1A"/>
+                </a:solidFill>
+                <a:latin typeface="Segoe UI"/>
+              </a:rPr>
+              <a:t>· At rest: ~/.aiforge/ — delete it, it is gone</a:t>
+            </a:r>
+          </a:p>
+        </p:txBody>
+      </p:sp>
+      <p:sp>
+        <p:nvSpPr>
+          <p:cNvPr id="28" name="TextBox 27"/>
           <p:cNvSpPr txBox="1"/>
           <p:nvPr/>
         </p:nvSpPr>
         <p:spPr>
           <a:xfrm>
-            <a:off x="3246120" y="2926080"/>
-            <a:ext cx="3657600" cy="274320"/>
+            <a:off x="8183879" y="4279392"/>
+            <a:ext cx="3246120" cy="228600"/>
           </a:xfrm>
           <a:prstGeom prst="rect">
             <a:avLst/>
@@ -12734,27 +13193,27 @@
               </a:spcAft>
             </a:pPr>
             <a:r>
-              <a:rPr sz="1050" b="0">
-                <a:solidFill>
-                  <a:srgbClr val="6B6B6B"/>
-                </a:solidFill>
-                <a:latin typeface="Segoe UI"/>
-              </a:rPr>
-              <a:t>vendor function-calling</a:t>
-            </a:r>
-          </a:p>
-        </p:txBody>
-      </p:sp>
-      <p:sp>
-        <p:nvSpPr>
-          <p:cNvPr id="15" name="TextBox 14"/>
+              <a:rPr sz="950" b="0">
+                <a:solidFill>
+                  <a:srgbClr val="1A1A1A"/>
+                </a:solidFill>
+                <a:latin typeface="Segoe UI"/>
+              </a:rPr>
+              <a:t>· Loopback by default; loud warning if not</a:t>
+            </a:r>
+          </a:p>
+        </p:txBody>
+      </p:sp>
+      <p:sp>
+        <p:nvSpPr>
+          <p:cNvPr id="29" name="TextBox 28"/>
           <p:cNvSpPr txBox="1"/>
           <p:nvPr/>
         </p:nvSpPr>
         <p:spPr>
           <a:xfrm>
-            <a:off x="7040880" y="2926080"/>
-            <a:ext cx="4389120" cy="274320"/>
+            <a:off x="8183879" y="4517136"/>
+            <a:ext cx="3246120" cy="228600"/>
           </a:xfrm>
           <a:prstGeom prst="rect">
             <a:avLst/>
@@ -12773,71 +13232,27 @@
               </a:spcAft>
             </a:pPr>
             <a:r>
-              <a:rPr sz="1050" b="0">
-                <a:solidFill>
-                  <a:srgbClr val="1A1A1A"/>
-                </a:solidFill>
-                <a:latin typeface="Segoe UI"/>
-              </a:rPr>
-              <a:t>▸ plain-text ReAct — a 4-bit local model drives it</a:t>
-            </a:r>
-          </a:p>
-        </p:txBody>
-      </p:sp>
-      <p:sp>
-        <p:nvSpPr>
-          <p:cNvPr id="16" name="Rectangle 15"/>
-          <p:cNvSpPr/>
-          <p:nvPr/>
-        </p:nvSpPr>
-        <p:spPr>
-          <a:xfrm>
-            <a:off x="685800" y="3328416"/>
-            <a:ext cx="10853928" cy="475488"/>
-          </a:xfrm>
-          <a:prstGeom prst="rect">
-            <a:avLst/>
-          </a:prstGeom>
-          <a:solidFill>
-            <a:srgbClr val="F7F7F7"/>
-          </a:solidFill>
-          <a:ln>
-            <a:noFill/>
-          </a:ln>
-          <a:effectLst/>
-        </p:spPr>
-        <p:style>
-          <a:lnRef idx="1">
-            <a:schemeClr val="accent1"/>
-          </a:lnRef>
-          <a:fillRef idx="3">
-            <a:schemeClr val="accent1"/>
-          </a:fillRef>
-          <a:effectRef idx="2">
-            <a:schemeClr val="accent1"/>
-          </a:effectRef>
-          <a:fontRef idx="minor">
-            <a:schemeClr val="lt1"/>
-          </a:fontRef>
-        </p:style>
-        <p:txBody>
-          <a:bodyPr rtlCol="0" anchor="ctr"/>
-          <a:lstStyle/>
-          <a:p>
-            <a:pPr algn="ctr"/>
-          </a:p>
-        </p:txBody>
-      </p:sp>
-      <p:sp>
-        <p:nvSpPr>
-          <p:cNvPr id="17" name="TextBox 16"/>
+              <a:rPr sz="950" b="0">
+                <a:solidFill>
+                  <a:srgbClr val="1A1A1A"/>
+                </a:solidFill>
+                <a:latin typeface="Segoe UI"/>
+              </a:rPr>
+              <a:t>· SSRF guard on fetch and crawl</a:t>
+            </a:r>
+          </a:p>
+        </p:txBody>
+      </p:sp>
+      <p:sp>
+        <p:nvSpPr>
+          <p:cNvPr id="30" name="TextBox 29"/>
           <p:cNvSpPr txBox="1"/>
           <p:nvPr/>
         </p:nvSpPr>
         <p:spPr>
           <a:xfrm>
-            <a:off x="822960" y="3456432"/>
-            <a:ext cx="2377440" cy="274320"/>
+            <a:off x="8183879" y="4754880"/>
+            <a:ext cx="3246120" cy="228600"/>
           </a:xfrm>
           <a:prstGeom prst="rect">
             <a:avLst/>
@@ -12856,114 +13271,40 @@
               </a:spcAft>
             </a:pPr>
             <a:r>
-              <a:rPr sz="1100" b="1">
-                <a:solidFill>
-                  <a:srgbClr val="1A1A1A"/>
-                </a:solidFill>
-                <a:latin typeface="Segoe UI"/>
-              </a:rPr>
-              <a:t>Memory store</a:t>
-            </a:r>
-          </a:p>
-        </p:txBody>
-      </p:sp>
-      <p:sp>
-        <p:nvSpPr>
-          <p:cNvPr id="18" name="TextBox 17"/>
-          <p:cNvSpPr txBox="1"/>
-          <p:nvPr/>
-        </p:nvSpPr>
-        <p:spPr>
-          <a:xfrm>
-            <a:off x="3246120" y="3456432"/>
-            <a:ext cx="3657600" cy="274320"/>
-          </a:xfrm>
-          <a:prstGeom prst="rect">
-            <a:avLst/>
-          </a:prstGeom>
-          <a:noFill/>
-        </p:spPr>
-        <p:txBody>
-          <a:bodyPr wrap="square" anchor="t" lIns="0" rIns="0" tIns="0" bIns="0">
-            <a:spAutoFit/>
-          </a:bodyPr>
-          <a:lstStyle/>
-          <a:p>
-            <a:pPr algn="l">
-              <a:spcAft>
-                <a:spcPts val="0"/>
-              </a:spcAft>
-            </a:pPr>
-            <a:r>
-              <a:rPr sz="1050" b="0">
-                <a:solidFill>
-                  <a:srgbClr val="6B6B6B"/>
-                </a:solidFill>
-                <a:latin typeface="Segoe UI"/>
-              </a:rPr>
-              <a:t>a vector DB to install, tune, back up</a:t>
-            </a:r>
-          </a:p>
-        </p:txBody>
-      </p:sp>
-      <p:sp>
-        <p:nvSpPr>
-          <p:cNvPr id="19" name="TextBox 18"/>
-          <p:cNvSpPr txBox="1"/>
-          <p:nvPr/>
-        </p:nvSpPr>
-        <p:spPr>
-          <a:xfrm>
-            <a:off x="7040880" y="3456432"/>
-            <a:ext cx="4389120" cy="274320"/>
-          </a:xfrm>
-          <a:prstGeom prst="rect">
-            <a:avLst/>
-          </a:prstGeom>
-          <a:noFill/>
-        </p:spPr>
-        <p:txBody>
-          <a:bodyPr wrap="square" anchor="t" lIns="0" rIns="0" tIns="0" bIns="0">
-            <a:spAutoFit/>
-          </a:bodyPr>
-          <a:lstStyle/>
-          <a:p>
-            <a:pPr algn="l">
-              <a:spcAft>
-                <a:spcPts val="0"/>
-              </a:spcAft>
-            </a:pPr>
-            <a:r>
-              <a:rPr sz="1050" b="0">
-                <a:solidFill>
-                  <a:srgbClr val="1A1A1A"/>
-                </a:solidFill>
-                <a:latin typeface="Segoe UI"/>
-              </a:rPr>
-              <a:t>▸ markdown + one SQLite file; grep it, delete it</a:t>
-            </a:r>
-          </a:p>
-        </p:txBody>
-      </p:sp>
-      <p:sp>
-        <p:nvSpPr>
-          <p:cNvPr id="20" name="Rectangle 19"/>
+              <a:rPr sz="950" b="0">
+                <a:solidFill>
+                  <a:srgbClr val="1A1A1A"/>
+                </a:solidFill>
+                <a:latin typeface="Segoe UI"/>
+              </a:rPr>
+              <a:t>· Workspace jail on by default</a:t>
+            </a:r>
+          </a:p>
+        </p:txBody>
+      </p:sp>
+      <p:sp>
+        <p:nvSpPr>
+          <p:cNvPr id="31" name="Rounded Rectangle 30"/>
           <p:cNvSpPr/>
           <p:nvPr/>
         </p:nvSpPr>
         <p:spPr>
           <a:xfrm>
-            <a:off x="685800" y="3858768"/>
-            <a:ext cx="10853928" cy="475488"/>
-          </a:xfrm>
-          <a:prstGeom prst="rect">
-            <a:avLst/>
+            <a:off x="685800" y="5230368"/>
+            <a:ext cx="10853928" cy="548640"/>
+          </a:xfrm>
+          <a:prstGeom prst="roundRect">
+            <a:avLst>
+              <a:gd name="adj" fmla="val 10000"/>
+            </a:avLst>
           </a:prstGeom>
           <a:solidFill>
-            <a:srgbClr val="FFFFFF"/>
+            <a:srgbClr val="F7ECD5"/>
           </a:solidFill>
-          <a:ln>
-            <a:noFill/>
+          <a:ln w="12700">
+            <a:solidFill>
+              <a:srgbClr val="8A5A00"/>
+            </a:solidFill>
           </a:ln>
           <a:effectLst/>
         </p:spPr>
@@ -12982,687 +13323,30 @@
           </a:fontRef>
         </p:style>
         <p:txBody>
-          <a:bodyPr rtlCol="0" anchor="ctr"/>
-          <a:lstStyle/>
-          <a:p>
-            <a:pPr algn="ctr"/>
-          </a:p>
-        </p:txBody>
-      </p:sp>
-      <p:sp>
-        <p:nvSpPr>
-          <p:cNvPr id="21" name="TextBox 20"/>
-          <p:cNvSpPr txBox="1"/>
-          <p:nvPr/>
-        </p:nvSpPr>
-        <p:spPr>
-          <a:xfrm>
-            <a:off x="822960" y="3986784"/>
-            <a:ext cx="2377440" cy="274320"/>
-          </a:xfrm>
-          <a:prstGeom prst="rect">
-            <a:avLst/>
-          </a:prstGeom>
-          <a:noFill/>
-        </p:spPr>
-        <p:txBody>
-          <a:bodyPr wrap="square" anchor="t" lIns="0" rIns="0" tIns="0" bIns="0">
-            <a:spAutoFit/>
-          </a:bodyPr>
-          <a:lstStyle/>
-          <a:p>
-            <a:pPr algn="l">
-              <a:spcAft>
-                <a:spcPts val="0"/>
-              </a:spcAft>
-            </a:pPr>
-            <a:r>
-              <a:rPr sz="1100" b="1">
-                <a:solidFill>
-                  <a:srgbClr val="1A1A1A"/>
-                </a:solidFill>
-                <a:latin typeface="Segoe UI"/>
-              </a:rPr>
-              <a:t>Skill discovery</a:t>
-            </a:r>
-          </a:p>
-        </p:txBody>
-      </p:sp>
-      <p:sp>
-        <p:nvSpPr>
-          <p:cNvPr id="22" name="TextBox 21"/>
-          <p:cNvSpPr txBox="1"/>
-          <p:nvPr/>
-        </p:nvSpPr>
-        <p:spPr>
-          <a:xfrm>
-            <a:off x="3246120" y="3986784"/>
-            <a:ext cx="3657600" cy="274320"/>
-          </a:xfrm>
-          <a:prstGeom prst="rect">
-            <a:avLst/>
-          </a:prstGeom>
-          <a:noFill/>
-        </p:spPr>
-        <p:txBody>
-          <a:bodyPr wrap="square" anchor="t" lIns="0" rIns="0" tIns="0" bIns="0">
-            <a:spAutoFit/>
-          </a:bodyPr>
-          <a:lstStyle/>
-          <a:p>
-            <a:pPr algn="l">
-              <a:spcAft>
-                <a:spcPts val="0"/>
-              </a:spcAft>
-            </a:pPr>
-            <a:r>
-              <a:rPr sz="1050" b="0">
-                <a:solidFill>
-                  <a:srgbClr val="6B6B6B"/>
-                </a:solidFill>
-                <a:latin typeface="Segoe UI"/>
-              </a:rPr>
-              <a:t>trigger substring match</a:t>
-            </a:r>
-          </a:p>
-        </p:txBody>
-      </p:sp>
-      <p:sp>
-        <p:nvSpPr>
-          <p:cNvPr id="23" name="TextBox 22"/>
-          <p:cNvSpPr txBox="1"/>
-          <p:nvPr/>
-        </p:nvSpPr>
-        <p:spPr>
-          <a:xfrm>
-            <a:off x="7040880" y="3986784"/>
-            <a:ext cx="4389120" cy="274320"/>
-          </a:xfrm>
-          <a:prstGeom prst="rect">
-            <a:avLst/>
-          </a:prstGeom>
-          <a:noFill/>
-        </p:spPr>
-        <p:txBody>
-          <a:bodyPr wrap="square" anchor="t" lIns="0" rIns="0" tIns="0" bIns="0">
-            <a:spAutoFit/>
-          </a:bodyPr>
-          <a:lstStyle/>
-          <a:p>
-            <a:pPr algn="l">
-              <a:spcAft>
-                <a:spcPts val="0"/>
-              </a:spcAft>
-            </a:pPr>
-            <a:r>
-              <a:rPr sz="1050" b="0">
-                <a:solidFill>
-                  <a:srgbClr val="1A1A1A"/>
-                </a:solidFill>
-                <a:latin typeface="Segoe UI"/>
-              </a:rPr>
-              <a:t>▸ searched by RELEVANCE, so the right one is found</a:t>
-            </a:r>
-          </a:p>
-        </p:txBody>
-      </p:sp>
-      <p:sp>
-        <p:nvSpPr>
-          <p:cNvPr id="24" name="Rectangle 23"/>
-          <p:cNvSpPr/>
-          <p:nvPr/>
-        </p:nvSpPr>
-        <p:spPr>
-          <a:xfrm>
-            <a:off x="685800" y="4389120"/>
-            <a:ext cx="10853928" cy="475488"/>
-          </a:xfrm>
-          <a:prstGeom prst="rect">
-            <a:avLst/>
-          </a:prstGeom>
-          <a:solidFill>
-            <a:srgbClr val="F7F7F7"/>
-          </a:solidFill>
-          <a:ln>
-            <a:noFill/>
-          </a:ln>
-          <a:effectLst/>
-        </p:spPr>
-        <p:style>
-          <a:lnRef idx="1">
-            <a:schemeClr val="accent1"/>
-          </a:lnRef>
-          <a:fillRef idx="3">
-            <a:schemeClr val="accent1"/>
-          </a:fillRef>
-          <a:effectRef idx="2">
-            <a:schemeClr val="accent1"/>
-          </a:effectRef>
-          <a:fontRef idx="minor">
-            <a:schemeClr val="lt1"/>
-          </a:fontRef>
-        </p:style>
-        <p:txBody>
-          <a:bodyPr rtlCol="0" anchor="ctr"/>
-          <a:lstStyle/>
-          <a:p>
-            <a:pPr algn="ctr"/>
-          </a:p>
-        </p:txBody>
-      </p:sp>
-      <p:sp>
-        <p:nvSpPr>
-          <p:cNvPr id="25" name="TextBox 24"/>
-          <p:cNvSpPr txBox="1"/>
-          <p:nvPr/>
-        </p:nvSpPr>
-        <p:spPr>
-          <a:xfrm>
-            <a:off x="822960" y="4517136"/>
-            <a:ext cx="2377440" cy="274320"/>
-          </a:xfrm>
-          <a:prstGeom prst="rect">
-            <a:avLst/>
-          </a:prstGeom>
-          <a:noFill/>
-        </p:spPr>
-        <p:txBody>
-          <a:bodyPr wrap="square" anchor="t" lIns="0" rIns="0" tIns="0" bIns="0">
-            <a:spAutoFit/>
-          </a:bodyPr>
-          <a:lstStyle/>
-          <a:p>
-            <a:pPr algn="l">
-              <a:spcAft>
-                <a:spcPts val="0"/>
-              </a:spcAft>
-            </a:pPr>
-            <a:r>
-              <a:rPr sz="1100" b="1">
-                <a:solidFill>
-                  <a:srgbClr val="1A1A1A"/>
-                </a:solidFill>
-                <a:latin typeface="Segoe UI"/>
-              </a:rPr>
-              <a:t>Gets better how</a:t>
-            </a:r>
-          </a:p>
-        </p:txBody>
-      </p:sp>
-      <p:sp>
-        <p:nvSpPr>
-          <p:cNvPr id="26" name="TextBox 25"/>
-          <p:cNvSpPr txBox="1"/>
-          <p:nvPr/>
-        </p:nvSpPr>
-        <p:spPr>
-          <a:xfrm>
-            <a:off x="3246120" y="4517136"/>
-            <a:ext cx="3657600" cy="274320"/>
-          </a:xfrm>
-          <a:prstGeom prst="rect">
-            <a:avLst/>
-          </a:prstGeom>
-          <a:noFill/>
-        </p:spPr>
-        <p:txBody>
-          <a:bodyPr wrap="square" anchor="t" lIns="0" rIns="0" tIns="0" bIns="0">
-            <a:spAutoFit/>
-          </a:bodyPr>
-          <a:lstStyle/>
-          <a:p>
-            <a:pPr algn="l">
-              <a:spcAft>
-                <a:spcPts val="0"/>
-              </a:spcAft>
-            </a:pPr>
-            <a:r>
-              <a:rPr sz="1050" b="0">
-                <a:solidFill>
-                  <a:srgbClr val="6B6B6B"/>
-                </a:solidFill>
-                <a:latin typeface="Segoe UI"/>
-              </a:rPr>
-              <a:t>you write the prompts</a:t>
-            </a:r>
-          </a:p>
-        </p:txBody>
-      </p:sp>
-      <p:sp>
-        <p:nvSpPr>
-          <p:cNvPr id="27" name="TextBox 26"/>
-          <p:cNvSpPr txBox="1"/>
-          <p:nvPr/>
-        </p:nvSpPr>
-        <p:spPr>
-          <a:xfrm>
-            <a:off x="7040880" y="4517136"/>
-            <a:ext cx="4389120" cy="274320"/>
-          </a:xfrm>
-          <a:prstGeom prst="rect">
-            <a:avLst/>
-          </a:prstGeom>
-          <a:noFill/>
-        </p:spPr>
-        <p:txBody>
-          <a:bodyPr wrap="square" anchor="t" lIns="0" rIns="0" tIns="0" bIns="0">
-            <a:spAutoFit/>
-          </a:bodyPr>
-          <a:lstStyle/>
-          <a:p>
-            <a:pPr algn="l">
-              <a:spcAft>
-                <a:spcPts val="0"/>
-              </a:spcAft>
-            </a:pPr>
-            <a:r>
-              <a:rPr sz="1050" b="0">
-                <a:solidFill>
-                  <a:srgbClr val="1A1A1A"/>
-                </a:solidFill>
-                <a:latin typeface="Segoe UI"/>
-              </a:rPr>
-              <a:t>▸ write_skill() / write_workflow() — it authors its own</a:t>
-            </a:r>
-          </a:p>
-        </p:txBody>
-      </p:sp>
-      <p:sp>
-        <p:nvSpPr>
-          <p:cNvPr id="28" name="Rectangle 27"/>
-          <p:cNvSpPr/>
-          <p:nvPr/>
-        </p:nvSpPr>
-        <p:spPr>
-          <a:xfrm>
-            <a:off x="685800" y="4919472"/>
-            <a:ext cx="10853928" cy="475488"/>
-          </a:xfrm>
-          <a:prstGeom prst="rect">
-            <a:avLst/>
-          </a:prstGeom>
-          <a:solidFill>
-            <a:srgbClr val="FFFFFF"/>
-          </a:solidFill>
-          <a:ln>
-            <a:noFill/>
-          </a:ln>
-          <a:effectLst/>
-        </p:spPr>
-        <p:style>
-          <a:lnRef idx="1">
-            <a:schemeClr val="accent1"/>
-          </a:lnRef>
-          <a:fillRef idx="3">
-            <a:schemeClr val="accent1"/>
-          </a:fillRef>
-          <a:effectRef idx="2">
-            <a:schemeClr val="accent1"/>
-          </a:effectRef>
-          <a:fontRef idx="minor">
-            <a:schemeClr val="lt1"/>
-          </a:fontRef>
-        </p:style>
-        <p:txBody>
-          <a:bodyPr rtlCol="0" anchor="ctr"/>
-          <a:lstStyle/>
-          <a:p>
-            <a:pPr algn="ctr"/>
-          </a:p>
-        </p:txBody>
-      </p:sp>
-      <p:sp>
-        <p:nvSpPr>
-          <p:cNvPr id="29" name="TextBox 28"/>
-          <p:cNvSpPr txBox="1"/>
-          <p:nvPr/>
-        </p:nvSpPr>
-        <p:spPr>
-          <a:xfrm>
-            <a:off x="822960" y="5047488"/>
-            <a:ext cx="2377440" cy="274320"/>
-          </a:xfrm>
-          <a:prstGeom prst="rect">
-            <a:avLst/>
-          </a:prstGeom>
-          <a:noFill/>
-        </p:spPr>
-        <p:txBody>
-          <a:bodyPr wrap="square" anchor="t" lIns="0" rIns="0" tIns="0" bIns="0">
-            <a:spAutoFit/>
-          </a:bodyPr>
-          <a:lstStyle/>
-          <a:p>
-            <a:pPr algn="l">
-              <a:spcAft>
-                <a:spcPts val="0"/>
-              </a:spcAft>
-            </a:pPr>
-            <a:r>
-              <a:rPr sz="1100" b="1">
-                <a:solidFill>
-                  <a:srgbClr val="1A1A1A"/>
-                </a:solidFill>
-                <a:latin typeface="Segoe UI"/>
-              </a:rPr>
-              <a:t>Across machines</a:t>
-            </a:r>
-          </a:p>
-        </p:txBody>
-      </p:sp>
-      <p:sp>
-        <p:nvSpPr>
-          <p:cNvPr id="30" name="TextBox 29"/>
-          <p:cNvSpPr txBox="1"/>
-          <p:nvPr/>
-        </p:nvSpPr>
-        <p:spPr>
-          <a:xfrm>
-            <a:off x="3246120" y="5047488"/>
-            <a:ext cx="3657600" cy="274320"/>
-          </a:xfrm>
-          <a:prstGeom prst="rect">
-            <a:avLst/>
-          </a:prstGeom>
-          <a:noFill/>
-        </p:spPr>
-        <p:txBody>
-          <a:bodyPr wrap="square" anchor="t" lIns="0" rIns="0" tIns="0" bIns="0">
-            <a:spAutoFit/>
-          </a:bodyPr>
-          <a:lstStyle/>
-          <a:p>
-            <a:pPr algn="l">
-              <a:spcAft>
-                <a:spcPts val="0"/>
-              </a:spcAft>
-            </a:pPr>
-            <a:r>
-              <a:rPr sz="1050" b="0">
-                <a:solidFill>
-                  <a:srgbClr val="6B6B6B"/>
-                </a:solidFill>
-                <a:latin typeface="Segoe UI"/>
-              </a:rPr>
-              <a:t>per-machine, or a vendor cloud</a:t>
-            </a:r>
-          </a:p>
-        </p:txBody>
-      </p:sp>
-      <p:sp>
-        <p:nvSpPr>
-          <p:cNvPr id="31" name="TextBox 30"/>
-          <p:cNvSpPr txBox="1"/>
-          <p:nvPr/>
-        </p:nvSpPr>
-        <p:spPr>
-          <a:xfrm>
-            <a:off x="7040880" y="5047488"/>
-            <a:ext cx="4389120" cy="274320"/>
-          </a:xfrm>
-          <a:prstGeom prst="rect">
-            <a:avLst/>
-          </a:prstGeom>
-          <a:noFill/>
-        </p:spPr>
-        <p:txBody>
-          <a:bodyPr wrap="square" anchor="t" lIns="0" rIns="0" tIns="0" bIns="0">
-            <a:spAutoFit/>
-          </a:bodyPr>
-          <a:lstStyle/>
-          <a:p>
-            <a:pPr algn="l">
-              <a:spcAft>
-                <a:spcPts val="0"/>
-              </a:spcAft>
-            </a:pPr>
-            <a:r>
-              <a:rPr sz="1050" b="0">
-                <a:solidFill>
-                  <a:srgbClr val="1A1A1A"/>
-                </a:solidFill>
-                <a:latin typeface="Segoe UI"/>
-              </a:rPr>
-              <a:t>▸ fleet sync: groups, redaction, snapshot + revert</a:t>
-            </a:r>
-          </a:p>
-        </p:txBody>
-      </p:sp>
-      <p:sp>
-        <p:nvSpPr>
-          <p:cNvPr id="32" name="Rectangle 31"/>
-          <p:cNvSpPr/>
-          <p:nvPr/>
-        </p:nvSpPr>
-        <p:spPr>
-          <a:xfrm>
-            <a:off x="685800" y="5449824"/>
-            <a:ext cx="10853928" cy="475488"/>
-          </a:xfrm>
-          <a:prstGeom prst="rect">
-            <a:avLst/>
-          </a:prstGeom>
-          <a:solidFill>
-            <a:srgbClr val="F7F7F7"/>
-          </a:solidFill>
-          <a:ln>
-            <a:noFill/>
-          </a:ln>
-          <a:effectLst/>
-        </p:spPr>
-        <p:style>
-          <a:lnRef idx="1">
-            <a:schemeClr val="accent1"/>
-          </a:lnRef>
-          <a:fillRef idx="3">
-            <a:schemeClr val="accent1"/>
-          </a:fillRef>
-          <a:effectRef idx="2">
-            <a:schemeClr val="accent1"/>
-          </a:effectRef>
-          <a:fontRef idx="minor">
-            <a:schemeClr val="lt1"/>
-          </a:fontRef>
-        </p:style>
-        <p:txBody>
-          <a:bodyPr rtlCol="0" anchor="ctr"/>
-          <a:lstStyle/>
-          <a:p>
-            <a:pPr algn="ctr"/>
-          </a:p>
-        </p:txBody>
-      </p:sp>
-      <p:sp>
-        <p:nvSpPr>
-          <p:cNvPr id="33" name="TextBox 32"/>
-          <p:cNvSpPr txBox="1"/>
-          <p:nvPr/>
-        </p:nvSpPr>
-        <p:spPr>
-          <a:xfrm>
-            <a:off x="822960" y="5577840"/>
-            <a:ext cx="2377440" cy="274320"/>
-          </a:xfrm>
-          <a:prstGeom prst="rect">
-            <a:avLst/>
-          </a:prstGeom>
-          <a:noFill/>
-        </p:spPr>
-        <p:txBody>
-          <a:bodyPr wrap="square" anchor="t" lIns="0" rIns="0" tIns="0" bIns="0">
-            <a:spAutoFit/>
-          </a:bodyPr>
-          <a:lstStyle/>
-          <a:p>
-            <a:pPr algn="l">
-              <a:spcAft>
-                <a:spcPts val="0"/>
-              </a:spcAft>
-            </a:pPr>
-            <a:r>
-              <a:rPr sz="1100" b="1">
-                <a:solidFill>
-                  <a:srgbClr val="1A1A1A"/>
-                </a:solidFill>
-                <a:latin typeface="Segoe UI"/>
-              </a:rPr>
-              <a:t>Telemetry</a:t>
-            </a:r>
-          </a:p>
-        </p:txBody>
-      </p:sp>
-      <p:sp>
-        <p:nvSpPr>
-          <p:cNvPr id="34" name="TextBox 33"/>
-          <p:cNvSpPr txBox="1"/>
-          <p:nvPr/>
-        </p:nvSpPr>
-        <p:spPr>
-          <a:xfrm>
-            <a:off x="3246120" y="5577840"/>
-            <a:ext cx="3657600" cy="274320"/>
-          </a:xfrm>
-          <a:prstGeom prst="rect">
-            <a:avLst/>
-          </a:prstGeom>
-          <a:noFill/>
-        </p:spPr>
-        <p:txBody>
-          <a:bodyPr wrap="square" anchor="t" lIns="0" rIns="0" tIns="0" bIns="0">
-            <a:spAutoFit/>
-          </a:bodyPr>
-          <a:lstStyle/>
-          <a:p>
-            <a:pPr algn="l">
-              <a:spcAft>
-                <a:spcPts val="0"/>
-              </a:spcAft>
-            </a:pPr>
-            <a:r>
-              <a:rPr sz="1050" b="0">
-                <a:solidFill>
-                  <a:srgbClr val="6B6B6B"/>
-                </a:solidFill>
-                <a:latin typeface="Segoe UI"/>
-              </a:rPr>
-              <a:t>usually on by default</a:t>
-            </a:r>
-          </a:p>
-        </p:txBody>
-      </p:sp>
-      <p:sp>
-        <p:nvSpPr>
-          <p:cNvPr id="35" name="TextBox 34"/>
-          <p:cNvSpPr txBox="1"/>
-          <p:nvPr/>
-        </p:nvSpPr>
-        <p:spPr>
-          <a:xfrm>
-            <a:off x="7040880" y="5577840"/>
-            <a:ext cx="4389120" cy="274320"/>
-          </a:xfrm>
-          <a:prstGeom prst="rect">
-            <a:avLst/>
-          </a:prstGeom>
-          <a:noFill/>
-        </p:spPr>
-        <p:txBody>
-          <a:bodyPr wrap="square" anchor="t" lIns="0" rIns="0" tIns="0" bIns="0">
-            <a:spAutoFit/>
-          </a:bodyPr>
-          <a:lstStyle/>
-          <a:p>
-            <a:pPr algn="l">
-              <a:spcAft>
-                <a:spcPts val="0"/>
-              </a:spcAft>
-            </a:pPr>
-            <a:r>
-              <a:rPr sz="1050" b="0">
-                <a:solidFill>
-                  <a:srgbClr val="1A1A1A"/>
-                </a:solidFill>
-                <a:latin typeface="Segoe UI"/>
-              </a:rPr>
-              <a:t>▸ none, and none in the lock</a:t>
-            </a:r>
-          </a:p>
-        </p:txBody>
-      </p:sp>
-      <p:sp>
-        <p:nvSpPr>
-          <p:cNvPr id="36" name="TextBox 35"/>
-          <p:cNvSpPr txBox="1"/>
-          <p:nvPr/>
-        </p:nvSpPr>
-        <p:spPr>
-          <a:xfrm>
-            <a:off x="3246120" y="2011680"/>
-            <a:ext cx="3657600" cy="256032"/>
-          </a:xfrm>
-          <a:prstGeom prst="rect">
-            <a:avLst/>
-          </a:prstGeom>
-          <a:noFill/>
-        </p:spPr>
-        <p:txBody>
-          <a:bodyPr wrap="square" anchor="t" lIns="0" rIns="0" tIns="0" bIns="0">
-            <a:spAutoFit/>
-          </a:bodyPr>
-          <a:lstStyle/>
-          <a:p>
-            <a:pPr algn="l">
-              <a:spcAft>
-                <a:spcPts val="0"/>
-              </a:spcAft>
-            </a:pPr>
-            <a:r>
-              <a:rPr sz="1100" b="1">
-                <a:solidFill>
-                  <a:srgbClr val="6B6B6B"/>
-                </a:solidFill>
-                <a:latin typeface="Segoe UI"/>
-              </a:rPr>
-              <a:t>typical agent tool</a:t>
-            </a:r>
-          </a:p>
-        </p:txBody>
-      </p:sp>
-      <p:sp>
-        <p:nvSpPr>
-          <p:cNvPr id="37" name="TextBox 36"/>
-          <p:cNvSpPr txBox="1"/>
-          <p:nvPr/>
-        </p:nvSpPr>
-        <p:spPr>
-          <a:xfrm>
-            <a:off x="7040880" y="2011680"/>
-            <a:ext cx="4389120" cy="256032"/>
-          </a:xfrm>
-          <a:prstGeom prst="rect">
-            <a:avLst/>
-          </a:prstGeom>
-          <a:noFill/>
-        </p:spPr>
-        <p:txBody>
-          <a:bodyPr wrap="square" anchor="t" lIns="0" rIns="0" tIns="0" bIns="0">
-            <a:spAutoFit/>
-          </a:bodyPr>
-          <a:lstStyle/>
-          <a:p>
-            <a:pPr algn="l">
-              <a:spcAft>
-                <a:spcPts val="0"/>
-              </a:spcAft>
-            </a:pPr>
-            <a:r>
-              <a:rPr sz="1100" b="1">
-                <a:solidFill>
-                  <a:srgbClr val="1F4E79"/>
-                </a:solidFill>
-                <a:latin typeface="Segoe UI"/>
-              </a:rPr>
-              <a:t>AIForgeCrew</a:t>
+          <a:bodyPr rtlCol="0" anchor="ctr" wrap="square" lIns="54864" rIns="54864" tIns="27432" bIns="27432"/>
+          <a:lstStyle/>
+          <a:p>
+            <a:pPr algn="ctr"/>
+            <a:r>
+              <a:rPr sz="1200" b="1">
+                <a:solidFill>
+                  <a:srgbClr val="8A5A00"/>
+                </a:solidFill>
+                <a:latin typeface="Segoe UI"/>
+              </a:rPr>
+              <a:t>The 9 vulnerabilities are decisions, not debt</a:t>
+            </a:r>
+          </a:p>
+          <a:p>
+            <a:pPr algn="ctr"/>
+            <a:r>
+              <a:rPr sz="950" b="0">
+                <a:solidFill>
+                  <a:srgbClr val="1A1A1A"/>
+                </a:solidFill>
+                <a:latin typeface="Segoe UI"/>
+              </a:rPr>
+              <a:t>TLS verification is disabled only per endpoint, opt-in, for self-signed internal hosts (Jira / Confluence / GitLab) — each one individually triaged and documented</a:t>
             </a:r>
           </a:p>
         </p:txBody>
@@ -13719,7 +13403,7 @@
                 </a:solidFill>
                 <a:latin typeface="Segoe UI"/>
               </a:rPr>
-              <a:t>Compared with the usual approach</a:t>
+              <a:t>Where it differs from the other agent tools</a:t>
             </a:r>
           </a:p>
         </p:txBody>
@@ -13758,7 +13442,7 @@
                 </a:solidFill>
                 <a:latin typeface="Segoe UI"/>
               </a:rPr>
-              <a:t>Every operational burden a vector-database stack adds, removed.</a:t>
+              <a:t>It adopts their formats rather than replacing them — then adds the two things none of them do.</a:t>
             </a:r>
           </a:p>
         </p:txBody>
@@ -13815,6 +13499,45 @@
         </p:nvSpPr>
         <p:spPr>
           <a:xfrm>
+            <a:off x="548640" y="6327648"/>
+            <a:ext cx="9692640" cy="320040"/>
+          </a:xfrm>
+          <a:prstGeom prst="rect">
+            <a:avLst/>
+          </a:prstGeom>
+          <a:noFill/>
+        </p:spPr>
+        <p:txBody>
+          <a:bodyPr wrap="square" anchor="t" lIns="0" rIns="0" tIns="0" bIns="0">
+            <a:spAutoFit/>
+          </a:bodyPr>
+          <a:lstStyle/>
+          <a:p>
+            <a:pPr algn="l">
+              <a:spcAft>
+                <a:spcPts val="0"/>
+              </a:spcAft>
+            </a:pPr>
+            <a:r>
+              <a:rPr sz="950" b="0">
+                <a:solidFill>
+                  <a:srgbClr val="6B6B6B"/>
+                </a:solidFill>
+                <a:latin typeface="Segoe UI"/>
+              </a:rPr>
+              <a:t>Named comparisons are the ones the codebase itself cites: the SKILL.md gaps vs Hermes Agent / OpenClaw, and Cursor's glob-scoped rule format.</a:t>
+            </a:r>
+          </a:p>
+        </p:txBody>
+      </p:sp>
+      <p:sp>
+        <p:nvSpPr>
+          <p:cNvPr id="6" name="TextBox 5"/>
+          <p:cNvSpPr txBox="1"/>
+          <p:nvPr/>
+        </p:nvSpPr>
+        <p:spPr>
+          <a:xfrm>
             <a:off x="11018520" y="6327648"/>
             <a:ext cx="640080" cy="274320"/>
           </a:xfrm>
@@ -13848,14 +13571,127 @@
       </p:sp>
       <p:sp>
         <p:nvSpPr>
-          <p:cNvPr id="6" name="TextBox 5"/>
+          <p:cNvPr id="7" name="Rounded Rectangle 6"/>
+          <p:cNvSpPr/>
+          <p:nvPr/>
+        </p:nvSpPr>
+        <p:spPr>
+          <a:xfrm>
+            <a:off x="685800" y="1389888"/>
+            <a:ext cx="10853928" cy="713232"/>
+          </a:xfrm>
+          <a:prstGeom prst="roundRect">
+            <a:avLst>
+              <a:gd name="adj" fmla="val 10000"/>
+            </a:avLst>
+          </a:prstGeom>
+          <a:solidFill>
+            <a:srgbClr val="DCEEE7"/>
+          </a:solidFill>
+          <a:ln w="12700">
+            <a:solidFill>
+              <a:srgbClr val="1E6B52"/>
+            </a:solidFill>
+          </a:ln>
+          <a:effectLst/>
+        </p:spPr>
+        <p:style>
+          <a:lnRef idx="1">
+            <a:schemeClr val="accent1"/>
+          </a:lnRef>
+          <a:fillRef idx="3">
+            <a:schemeClr val="accent1"/>
+          </a:fillRef>
+          <a:effectRef idx="2">
+            <a:schemeClr val="accent1"/>
+          </a:effectRef>
+          <a:fontRef idx="minor">
+            <a:schemeClr val="lt1"/>
+          </a:fontRef>
+        </p:style>
+        <p:txBody>
+          <a:bodyPr rtlCol="0" anchor="ctr" wrap="square" lIns="54864" rIns="54864" tIns="27432" bIns="27432"/>
+          <a:lstStyle/>
+          <a:p>
+            <a:pPr algn="ctr"/>
+            <a:r>
+              <a:rPr sz="1400" b="1">
+                <a:solidFill>
+                  <a:srgbClr val="1E6B52"/>
+                </a:solidFill>
+                <a:latin typeface="Segoe UI"/>
+              </a:rPr>
+              <a:t>Reads what your repo already has</a:t>
+            </a:r>
+          </a:p>
+          <a:p>
+            <a:pPr algn="ctr"/>
+            <a:r>
+              <a:rPr sz="1050" b="0">
+                <a:solidFill>
+                  <a:srgbClr val="1A1A1A"/>
+                </a:solidFill>
+                <a:latin typeface="Segoe UI"/>
+              </a:rPr>
+              <a:t>.cursor/rules/*.mdc  ·  .cursorrules  ·  AGENTS.md  ·  SKILL.md (agentskills.io)  —  no migration, no lock-in</a:t>
+            </a:r>
+          </a:p>
+        </p:txBody>
+      </p:sp>
+      <p:sp>
+        <p:nvSpPr>
+          <p:cNvPr id="8" name="Rectangle 7"/>
+          <p:cNvSpPr/>
+          <p:nvPr/>
+        </p:nvSpPr>
+        <p:spPr>
+          <a:xfrm>
+            <a:off x="685800" y="2267712"/>
+            <a:ext cx="10853928" cy="475488"/>
+          </a:xfrm>
+          <a:prstGeom prst="rect">
+            <a:avLst/>
+          </a:prstGeom>
+          <a:solidFill>
+            <a:srgbClr val="F7F7F7"/>
+          </a:solidFill>
+          <a:ln>
+            <a:noFill/>
+          </a:ln>
+          <a:effectLst/>
+        </p:spPr>
+        <p:style>
+          <a:lnRef idx="1">
+            <a:schemeClr val="accent1"/>
+          </a:lnRef>
+          <a:fillRef idx="3">
+            <a:schemeClr val="accent1"/>
+          </a:fillRef>
+          <a:effectRef idx="2">
+            <a:schemeClr val="accent1"/>
+          </a:effectRef>
+          <a:fontRef idx="minor">
+            <a:schemeClr val="lt1"/>
+          </a:fontRef>
+        </p:style>
+        <p:txBody>
+          <a:bodyPr rtlCol="0" anchor="ctr"/>
+          <a:lstStyle/>
+          <a:p>
+            <a:pPr algn="ctr"/>
+          </a:p>
+        </p:txBody>
+      </p:sp>
+      <p:sp>
+        <p:nvSpPr>
+          <p:cNvPr id="9" name="TextBox 8"/>
           <p:cNvSpPr txBox="1"/>
           <p:nvPr/>
         </p:nvSpPr>
         <p:spPr>
           <a:xfrm>
-            <a:off x="2788920" y="1417320"/>
-            <a:ext cx="4114800" cy="274320"/>
+            <a:off x="822960" y="2395728"/>
+            <a:ext cx="2377440" cy="274320"/>
           </a:xfrm>
           <a:prstGeom prst="rect">
             <a:avLst/>
@@ -13874,27 +13710,27 @@
               </a:spcAft>
             </a:pPr>
             <a:r>
-              <a:rPr sz="1150" b="1">
-                <a:solidFill>
-                  <a:srgbClr val="6B6B6B"/>
-                </a:solidFill>
-                <a:latin typeface="Segoe UI"/>
-              </a:rPr>
-              <a:t>Typical agent stack</a:t>
-            </a:r>
-          </a:p>
-        </p:txBody>
-      </p:sp>
-      <p:sp>
-        <p:nvSpPr>
-          <p:cNvPr id="7" name="TextBox 6"/>
+              <a:rPr sz="1100" b="1">
+                <a:solidFill>
+                  <a:srgbClr val="1A1A1A"/>
+                </a:solidFill>
+                <a:latin typeface="Segoe UI"/>
+              </a:rPr>
+              <a:t>Ticket → PR AND chat</a:t>
+            </a:r>
+          </a:p>
+        </p:txBody>
+      </p:sp>
+      <p:sp>
+        <p:nvSpPr>
+          <p:cNvPr id="10" name="TextBox 9"/>
           <p:cNvSpPr txBox="1"/>
           <p:nvPr/>
         </p:nvSpPr>
         <p:spPr>
           <a:xfrm>
-            <a:off x="7086600" y="1417320"/>
-            <a:ext cx="4453128" cy="274320"/>
+            <a:off x="3246120" y="2395728"/>
+            <a:ext cx="3657600" cy="274320"/>
           </a:xfrm>
           <a:prstGeom prst="rect">
             <a:avLst/>
@@ -13913,27 +13749,227 @@
               </a:spcAft>
             </a:pPr>
             <a:r>
-              <a:rPr sz="1150" b="1">
-                <a:solidFill>
-                  <a:srgbClr val="1F4E79"/>
-                </a:solidFill>
-                <a:latin typeface="Segoe UI"/>
-              </a:rPr>
-              <a:t>AIForgeCrew</a:t>
-            </a:r>
-          </a:p>
-        </p:txBody>
-      </p:sp>
-      <p:sp>
-        <p:nvSpPr>
-          <p:cNvPr id="8" name="Rectangle 7"/>
+              <a:rPr sz="1050" b="0">
+                <a:solidFill>
+                  <a:srgbClr val="6B6B6B"/>
+                </a:solidFill>
+                <a:latin typeface="Segoe UI"/>
+              </a:rPr>
+              <a:t>usually one or the other</a:t>
+            </a:r>
+          </a:p>
+        </p:txBody>
+      </p:sp>
+      <p:sp>
+        <p:nvSpPr>
+          <p:cNvPr id="11" name="TextBox 10"/>
+          <p:cNvSpPr txBox="1"/>
+          <p:nvPr/>
+        </p:nvSpPr>
+        <p:spPr>
+          <a:xfrm>
+            <a:off x="7040880" y="2395728"/>
+            <a:ext cx="4389120" cy="274320"/>
+          </a:xfrm>
+          <a:prstGeom prst="rect">
+            <a:avLst/>
+          </a:prstGeom>
+          <a:noFill/>
+        </p:spPr>
+        <p:txBody>
+          <a:bodyPr wrap="square" anchor="t" lIns="0" rIns="0" tIns="0" bIns="0">
+            <a:spAutoFit/>
+          </a:bodyPr>
+          <a:lstStyle/>
+          <a:p>
+            <a:pPr algn="l">
+              <a:spcAft>
+                <a:spcPts val="0"/>
+              </a:spcAft>
+            </a:pPr>
+            <a:r>
+              <a:rPr sz="1050" b="0">
+                <a:solidFill>
+                  <a:srgbClr val="1A1A1A"/>
+                </a:solidFill>
+                <a:latin typeface="Segoe UI"/>
+              </a:rPr>
+              <a:t>▸ one service does both, on the same tool registry</a:t>
+            </a:r>
+          </a:p>
+        </p:txBody>
+      </p:sp>
+      <p:sp>
+        <p:nvSpPr>
+          <p:cNvPr id="12" name="Rectangle 11"/>
           <p:cNvSpPr/>
           <p:nvPr/>
         </p:nvSpPr>
         <p:spPr>
           <a:xfrm>
-            <a:off x="685800" y="1783080"/>
-            <a:ext cx="10853928" cy="548640"/>
+            <a:off x="685800" y="2798064"/>
+            <a:ext cx="10853928" cy="475488"/>
+          </a:xfrm>
+          <a:prstGeom prst="rect">
+            <a:avLst/>
+          </a:prstGeom>
+          <a:solidFill>
+            <a:srgbClr val="FFFFFF"/>
+          </a:solidFill>
+          <a:ln>
+            <a:noFill/>
+          </a:ln>
+          <a:effectLst/>
+        </p:spPr>
+        <p:style>
+          <a:lnRef idx="1">
+            <a:schemeClr val="accent1"/>
+          </a:lnRef>
+          <a:fillRef idx="3">
+            <a:schemeClr val="accent1"/>
+          </a:fillRef>
+          <a:effectRef idx="2">
+            <a:schemeClr val="accent1"/>
+          </a:effectRef>
+          <a:fontRef idx="minor">
+            <a:schemeClr val="lt1"/>
+          </a:fontRef>
+        </p:style>
+        <p:txBody>
+          <a:bodyPr rtlCol="0" anchor="ctr"/>
+          <a:lstStyle/>
+          <a:p>
+            <a:pPr algn="ctr"/>
+          </a:p>
+        </p:txBody>
+      </p:sp>
+      <p:sp>
+        <p:nvSpPr>
+          <p:cNvPr id="13" name="TextBox 12"/>
+          <p:cNvSpPr txBox="1"/>
+          <p:nvPr/>
+        </p:nvSpPr>
+        <p:spPr>
+          <a:xfrm>
+            <a:off x="822960" y="2926080"/>
+            <a:ext cx="2377440" cy="274320"/>
+          </a:xfrm>
+          <a:prstGeom prst="rect">
+            <a:avLst/>
+          </a:prstGeom>
+          <a:noFill/>
+        </p:spPr>
+        <p:txBody>
+          <a:bodyPr wrap="square" anchor="t" lIns="0" rIns="0" tIns="0" bIns="0">
+            <a:spAutoFit/>
+          </a:bodyPr>
+          <a:lstStyle/>
+          <a:p>
+            <a:pPr algn="l">
+              <a:spcAft>
+                <a:spcPts val="0"/>
+              </a:spcAft>
+            </a:pPr>
+            <a:r>
+              <a:rPr sz="1100" b="1">
+                <a:solidFill>
+                  <a:srgbClr val="1A1A1A"/>
+                </a:solidFill>
+                <a:latin typeface="Segoe UI"/>
+              </a:rPr>
+              <a:t>Model requirement</a:t>
+            </a:r>
+          </a:p>
+        </p:txBody>
+      </p:sp>
+      <p:sp>
+        <p:nvSpPr>
+          <p:cNvPr id="14" name="TextBox 13"/>
+          <p:cNvSpPr txBox="1"/>
+          <p:nvPr/>
+        </p:nvSpPr>
+        <p:spPr>
+          <a:xfrm>
+            <a:off x="3246120" y="2926080"/>
+            <a:ext cx="3657600" cy="274320"/>
+          </a:xfrm>
+          <a:prstGeom prst="rect">
+            <a:avLst/>
+          </a:prstGeom>
+          <a:noFill/>
+        </p:spPr>
+        <p:txBody>
+          <a:bodyPr wrap="square" anchor="t" lIns="0" rIns="0" tIns="0" bIns="0">
+            <a:spAutoFit/>
+          </a:bodyPr>
+          <a:lstStyle/>
+          <a:p>
+            <a:pPr algn="l">
+              <a:spcAft>
+                <a:spcPts val="0"/>
+              </a:spcAft>
+            </a:pPr>
+            <a:r>
+              <a:rPr sz="1050" b="0">
+                <a:solidFill>
+                  <a:srgbClr val="6B6B6B"/>
+                </a:solidFill>
+                <a:latin typeface="Segoe UI"/>
+              </a:rPr>
+              <a:t>vendor function-calling</a:t>
+            </a:r>
+          </a:p>
+        </p:txBody>
+      </p:sp>
+      <p:sp>
+        <p:nvSpPr>
+          <p:cNvPr id="15" name="TextBox 14"/>
+          <p:cNvSpPr txBox="1"/>
+          <p:nvPr/>
+        </p:nvSpPr>
+        <p:spPr>
+          <a:xfrm>
+            <a:off x="7040880" y="2926080"/>
+            <a:ext cx="4389120" cy="274320"/>
+          </a:xfrm>
+          <a:prstGeom prst="rect">
+            <a:avLst/>
+          </a:prstGeom>
+          <a:noFill/>
+        </p:spPr>
+        <p:txBody>
+          <a:bodyPr wrap="square" anchor="t" lIns="0" rIns="0" tIns="0" bIns="0">
+            <a:spAutoFit/>
+          </a:bodyPr>
+          <a:lstStyle/>
+          <a:p>
+            <a:pPr algn="l">
+              <a:spcAft>
+                <a:spcPts val="0"/>
+              </a:spcAft>
+            </a:pPr>
+            <a:r>
+              <a:rPr sz="1050" b="0">
+                <a:solidFill>
+                  <a:srgbClr val="1A1A1A"/>
+                </a:solidFill>
+                <a:latin typeface="Segoe UI"/>
+              </a:rPr>
+              <a:t>▸ plain-text ReAct — a 4-bit local model drives it</a:t>
+            </a:r>
+          </a:p>
+        </p:txBody>
+      </p:sp>
+      <p:sp>
+        <p:nvSpPr>
+          <p:cNvPr id="16" name="Rectangle 15"/>
+          <p:cNvSpPr/>
+          <p:nvPr/>
+        </p:nvSpPr>
+        <p:spPr>
+          <a:xfrm>
+            <a:off x="685800" y="3328416"/>
+            <a:ext cx="10853928" cy="475488"/>
           </a:xfrm>
           <a:prstGeom prst="rect">
             <a:avLst/>
@@ -13970,14 +14006,14 @@
       </p:sp>
       <p:sp>
         <p:nvSpPr>
-          <p:cNvPr id="9" name="TextBox 8"/>
+          <p:cNvPr id="17" name="TextBox 16"/>
           <p:cNvSpPr txBox="1"/>
           <p:nvPr/>
         </p:nvSpPr>
         <p:spPr>
           <a:xfrm>
-            <a:off x="822960" y="1938528"/>
-            <a:ext cx="1920240" cy="274320"/>
+            <a:off x="822960" y="3456432"/>
+            <a:ext cx="2377440" cy="274320"/>
           </a:xfrm>
           <a:prstGeom prst="rect">
             <a:avLst/>
@@ -14002,21 +14038,21 @@
                 </a:solidFill>
                 <a:latin typeface="Segoe UI"/>
               </a:rPr>
-              <a:t>Storage</a:t>
-            </a:r>
-          </a:p>
-        </p:txBody>
-      </p:sp>
-      <p:sp>
-        <p:nvSpPr>
-          <p:cNvPr id="10" name="TextBox 9"/>
+              <a:t>Memory store</a:t>
+            </a:r>
+          </a:p>
+        </p:txBody>
+      </p:sp>
+      <p:sp>
+        <p:nvSpPr>
+          <p:cNvPr id="18" name="TextBox 17"/>
           <p:cNvSpPr txBox="1"/>
           <p:nvPr/>
         </p:nvSpPr>
         <p:spPr>
           <a:xfrm>
-            <a:off x="2788920" y="1938528"/>
-            <a:ext cx="4114800" cy="274320"/>
+            <a:off x="3246120" y="3456432"/>
+            <a:ext cx="3657600" cy="274320"/>
           </a:xfrm>
           <a:prstGeom prst="rect">
             <a:avLst/>
@@ -14041,21 +14077,21 @@
                 </a:solidFill>
                 <a:latin typeface="Segoe UI"/>
               </a:rPr>
-              <a:t>vector DB service to install, tune, back up</a:t>
-            </a:r>
-          </a:p>
-        </p:txBody>
-      </p:sp>
-      <p:sp>
-        <p:nvSpPr>
-          <p:cNvPr id="11" name="TextBox 10"/>
+              <a:t>a vector DB to install, tune, back up</a:t>
+            </a:r>
+          </a:p>
+        </p:txBody>
+      </p:sp>
+      <p:sp>
+        <p:nvSpPr>
+          <p:cNvPr id="19" name="TextBox 18"/>
           <p:cNvSpPr txBox="1"/>
           <p:nvPr/>
         </p:nvSpPr>
         <p:spPr>
           <a:xfrm>
-            <a:off x="7086600" y="1938528"/>
-            <a:ext cx="4297680" cy="274320"/>
+            <a:off x="7040880" y="3456432"/>
+            <a:ext cx="4389120" cy="274320"/>
           </a:xfrm>
           <a:prstGeom prst="rect">
             <a:avLst/>
@@ -14080,21 +14116,21 @@
                 </a:solidFill>
                 <a:latin typeface="Segoe UI"/>
               </a:rPr>
-              <a:t>markdown files + one SQLite under ~/.aiforge/</a:t>
-            </a:r>
-          </a:p>
-        </p:txBody>
-      </p:sp>
-      <p:sp>
-        <p:nvSpPr>
-          <p:cNvPr id="12" name="Rectangle 11"/>
+              <a:t>▸ markdown + one SQLite file; grep it, delete it</a:t>
+            </a:r>
+          </a:p>
+        </p:txBody>
+      </p:sp>
+      <p:sp>
+        <p:nvSpPr>
+          <p:cNvPr id="20" name="Rectangle 19"/>
           <p:cNvSpPr/>
           <p:nvPr/>
         </p:nvSpPr>
         <p:spPr>
           <a:xfrm>
-            <a:off x="685800" y="2386584"/>
-            <a:ext cx="10853928" cy="548640"/>
+            <a:off x="685800" y="3858768"/>
+            <a:ext cx="10853928" cy="475488"/>
           </a:xfrm>
           <a:prstGeom prst="rect">
             <a:avLst/>
@@ -14131,14 +14167,14 @@
       </p:sp>
       <p:sp>
         <p:nvSpPr>
-          <p:cNvPr id="13" name="TextBox 12"/>
+          <p:cNvPr id="21" name="TextBox 20"/>
           <p:cNvSpPr txBox="1"/>
           <p:nvPr/>
         </p:nvSpPr>
         <p:spPr>
           <a:xfrm>
-            <a:off x="822960" y="2542032"/>
-            <a:ext cx="1920240" cy="274320"/>
+            <a:off x="822960" y="3986784"/>
+            <a:ext cx="2377440" cy="274320"/>
           </a:xfrm>
           <a:prstGeom prst="rect">
             <a:avLst/>
@@ -14163,21 +14199,21 @@
                 </a:solidFill>
                 <a:latin typeface="Segoe UI"/>
               </a:rPr>
-              <a:t>Inspect</a:t>
-            </a:r>
-          </a:p>
-        </p:txBody>
-      </p:sp>
-      <p:sp>
-        <p:nvSpPr>
-          <p:cNvPr id="14" name="TextBox 13"/>
+              <a:t>Skill discovery</a:t>
+            </a:r>
+          </a:p>
+        </p:txBody>
+      </p:sp>
+      <p:sp>
+        <p:nvSpPr>
+          <p:cNvPr id="22" name="TextBox 21"/>
           <p:cNvSpPr txBox="1"/>
           <p:nvPr/>
         </p:nvSpPr>
         <p:spPr>
           <a:xfrm>
-            <a:off x="2788920" y="2542032"/>
-            <a:ext cx="4114800" cy="274320"/>
+            <a:off x="3246120" y="3986784"/>
+            <a:ext cx="3657600" cy="274320"/>
           </a:xfrm>
           <a:prstGeom prst="rect">
             <a:avLst/>
@@ -14202,21 +14238,21 @@
                 </a:solidFill>
                 <a:latin typeface="Segoe UI"/>
               </a:rPr>
-              <a:t>query the DB, decode embeddings</a:t>
-            </a:r>
-          </a:p>
-        </p:txBody>
-      </p:sp>
-      <p:sp>
-        <p:nvSpPr>
-          <p:cNvPr id="15" name="TextBox 14"/>
+              <a:t>trigger substring match</a:t>
+            </a:r>
+          </a:p>
+        </p:txBody>
+      </p:sp>
+      <p:sp>
+        <p:nvSpPr>
+          <p:cNvPr id="23" name="TextBox 22"/>
           <p:cNvSpPr txBox="1"/>
           <p:nvPr/>
         </p:nvSpPr>
         <p:spPr>
           <a:xfrm>
-            <a:off x="7086600" y="2542032"/>
-            <a:ext cx="4297680" cy="274320"/>
+            <a:off x="7040880" y="3986784"/>
+            <a:ext cx="4389120" cy="274320"/>
           </a:xfrm>
           <a:prstGeom prst="rect">
             <a:avLst/>
@@ -14241,21 +14277,21 @@
                 </a:solidFill>
                 <a:latin typeface="Segoe UI"/>
               </a:rPr>
-              <a:t>cat · grep · an editor</a:t>
-            </a:r>
-          </a:p>
-        </p:txBody>
-      </p:sp>
-      <p:sp>
-        <p:nvSpPr>
-          <p:cNvPr id="16" name="Rectangle 15"/>
+              <a:t>▸ searched by RELEVANCE, so the right one is found</a:t>
+            </a:r>
+          </a:p>
+        </p:txBody>
+      </p:sp>
+      <p:sp>
+        <p:nvSpPr>
+          <p:cNvPr id="24" name="Rectangle 23"/>
           <p:cNvSpPr/>
           <p:nvPr/>
         </p:nvSpPr>
         <p:spPr>
           <a:xfrm>
-            <a:off x="685800" y="2990088"/>
-            <a:ext cx="10853928" cy="548640"/>
+            <a:off x="685800" y="4389120"/>
+            <a:ext cx="10853928" cy="475488"/>
           </a:xfrm>
           <a:prstGeom prst="rect">
             <a:avLst/>
@@ -14292,14 +14328,14 @@
       </p:sp>
       <p:sp>
         <p:nvSpPr>
-          <p:cNvPr id="17" name="TextBox 16"/>
+          <p:cNvPr id="25" name="TextBox 24"/>
           <p:cNvSpPr txBox="1"/>
           <p:nvPr/>
         </p:nvSpPr>
         <p:spPr>
           <a:xfrm>
-            <a:off x="822960" y="3145536"/>
-            <a:ext cx="1920240" cy="274320"/>
+            <a:off x="822960" y="4517136"/>
+            <a:ext cx="2377440" cy="274320"/>
           </a:xfrm>
           <a:prstGeom prst="rect">
             <a:avLst/>
@@ -14324,21 +14360,21 @@
                 </a:solidFill>
                 <a:latin typeface="Segoe UI"/>
               </a:rPr>
-              <a:t>Version</a:t>
-            </a:r>
-          </a:p>
-        </p:txBody>
-      </p:sp>
-      <p:sp>
-        <p:nvSpPr>
-          <p:cNvPr id="18" name="TextBox 17"/>
+              <a:t>Gets better how</a:t>
+            </a:r>
+          </a:p>
+        </p:txBody>
+      </p:sp>
+      <p:sp>
+        <p:nvSpPr>
+          <p:cNvPr id="26" name="TextBox 25"/>
           <p:cNvSpPr txBox="1"/>
           <p:nvPr/>
         </p:nvSpPr>
         <p:spPr>
           <a:xfrm>
-            <a:off x="2788920" y="3145536"/>
-            <a:ext cx="4114800" cy="274320"/>
+            <a:off x="3246120" y="4517136"/>
+            <a:ext cx="3657600" cy="274320"/>
           </a:xfrm>
           <a:prstGeom prst="rect">
             <a:avLst/>
@@ -14363,21 +14399,21 @@
                 </a:solidFill>
                 <a:latin typeface="Segoe UI"/>
               </a:rPr>
-              <a:t>opaque rows</a:t>
-            </a:r>
-          </a:p>
-        </p:txBody>
-      </p:sp>
-      <p:sp>
-        <p:nvSpPr>
-          <p:cNvPr id="19" name="TextBox 18"/>
+              <a:t>you write the prompts</a:t>
+            </a:r>
+          </a:p>
+        </p:txBody>
+      </p:sp>
+      <p:sp>
+        <p:nvSpPr>
+          <p:cNvPr id="27" name="TextBox 26"/>
           <p:cNvSpPr txBox="1"/>
           <p:nvPr/>
         </p:nvSpPr>
         <p:spPr>
           <a:xfrm>
-            <a:off x="7086600" y="3145536"/>
-            <a:ext cx="4297680" cy="274320"/>
+            <a:off x="7040880" y="4517136"/>
+            <a:ext cx="4389120" cy="274320"/>
           </a:xfrm>
           <a:prstGeom prst="rect">
             <a:avLst/>
@@ -14402,21 +14438,21 @@
                 </a:solidFill>
                 <a:latin typeface="Segoe UI"/>
               </a:rPr>
-              <a:t>git-diffable; hardlink snapshots + revert endpoint</a:t>
-            </a:r>
-          </a:p>
-        </p:txBody>
-      </p:sp>
-      <p:sp>
-        <p:nvSpPr>
-          <p:cNvPr id="20" name="Rectangle 19"/>
+              <a:t>▸ write_skill() / write_workflow() — it authors its own</a:t>
+            </a:r>
+          </a:p>
+        </p:txBody>
+      </p:sp>
+      <p:sp>
+        <p:nvSpPr>
+          <p:cNvPr id="28" name="Rectangle 27"/>
           <p:cNvSpPr/>
           <p:nvPr/>
         </p:nvSpPr>
         <p:spPr>
           <a:xfrm>
-            <a:off x="685800" y="3593592"/>
-            <a:ext cx="10853928" cy="548640"/>
+            <a:off x="685800" y="4919472"/>
+            <a:ext cx="10853928" cy="475488"/>
           </a:xfrm>
           <a:prstGeom prst="rect">
             <a:avLst/>
@@ -14453,14 +14489,14 @@
       </p:sp>
       <p:sp>
         <p:nvSpPr>
-          <p:cNvPr id="21" name="TextBox 20"/>
+          <p:cNvPr id="29" name="TextBox 28"/>
           <p:cNvSpPr txBox="1"/>
           <p:nvPr/>
         </p:nvSpPr>
         <p:spPr>
           <a:xfrm>
-            <a:off x="822960" y="3749040"/>
-            <a:ext cx="1920240" cy="274320"/>
+            <a:off x="822960" y="5047488"/>
+            <a:ext cx="2377440" cy="274320"/>
           </a:xfrm>
           <a:prstGeom prst="rect">
             <a:avLst/>
@@ -14485,21 +14521,21 @@
                 </a:solidFill>
                 <a:latin typeface="Segoe UI"/>
               </a:rPr>
-              <a:t>Move a machine</a:t>
-            </a:r>
-          </a:p>
-        </p:txBody>
-      </p:sp>
-      <p:sp>
-        <p:nvSpPr>
-          <p:cNvPr id="22" name="TextBox 21"/>
+              <a:t>Across machines</a:t>
+            </a:r>
+          </a:p>
+        </p:txBody>
+      </p:sp>
+      <p:sp>
+        <p:nvSpPr>
+          <p:cNvPr id="30" name="TextBox 29"/>
           <p:cNvSpPr txBox="1"/>
           <p:nvPr/>
         </p:nvSpPr>
         <p:spPr>
           <a:xfrm>
-            <a:off x="2788920" y="3749040"/>
-            <a:ext cx="4114800" cy="274320"/>
+            <a:off x="3246120" y="5047488"/>
+            <a:ext cx="3657600" cy="274320"/>
           </a:xfrm>
           <a:prstGeom prst="rect">
             <a:avLst/>
@@ -14524,21 +14560,21 @@
                 </a:solidFill>
                 <a:latin typeface="Segoe UI"/>
               </a:rPr>
-              <a:t>dump and restore</a:t>
-            </a:r>
-          </a:p>
-        </p:txBody>
-      </p:sp>
-      <p:sp>
-        <p:nvSpPr>
-          <p:cNvPr id="23" name="TextBox 22"/>
+              <a:t>per-machine, or a vendor cloud</a:t>
+            </a:r>
+          </a:p>
+        </p:txBody>
+      </p:sp>
+      <p:sp>
+        <p:nvSpPr>
+          <p:cNvPr id="31" name="TextBox 30"/>
           <p:cNvSpPr txBox="1"/>
           <p:nvPr/>
         </p:nvSpPr>
         <p:spPr>
           <a:xfrm>
-            <a:off x="7086600" y="3749040"/>
-            <a:ext cx="4297680" cy="274320"/>
+            <a:off x="7040880" y="5047488"/>
+            <a:ext cx="4389120" cy="274320"/>
           </a:xfrm>
           <a:prstGeom prst="rect">
             <a:avLst/>
@@ -14563,21 +14599,21 @@
                 </a:solidFill>
                 <a:latin typeface="Segoe UI"/>
               </a:rPr>
-              <a:t>copy a folder</a:t>
-            </a:r>
-          </a:p>
-        </p:txBody>
-      </p:sp>
-      <p:sp>
-        <p:nvSpPr>
-          <p:cNvPr id="24" name="Rectangle 23"/>
+              <a:t>▸ fleet sync: groups, redaction, snapshot + revert</a:t>
+            </a:r>
+          </a:p>
+        </p:txBody>
+      </p:sp>
+      <p:sp>
+        <p:nvSpPr>
+          <p:cNvPr id="32" name="Rectangle 31"/>
           <p:cNvSpPr/>
           <p:nvPr/>
         </p:nvSpPr>
         <p:spPr>
           <a:xfrm>
-            <a:off x="685800" y="4197096"/>
-            <a:ext cx="10853928" cy="548640"/>
+            <a:off x="685800" y="5449824"/>
+            <a:ext cx="10853928" cy="475488"/>
           </a:xfrm>
           <a:prstGeom prst="rect">
             <a:avLst/>
@@ -14614,14 +14650,14 @@
       </p:sp>
       <p:sp>
         <p:nvSpPr>
-          <p:cNvPr id="25" name="TextBox 24"/>
+          <p:cNvPr id="33" name="TextBox 32"/>
           <p:cNvSpPr txBox="1"/>
           <p:nvPr/>
         </p:nvSpPr>
         <p:spPr>
           <a:xfrm>
-            <a:off x="822960" y="4352544"/>
-            <a:ext cx="1920240" cy="274320"/>
+            <a:off x="822960" y="5577840"/>
+            <a:ext cx="2377440" cy="274320"/>
           </a:xfrm>
           <a:prstGeom prst="rect">
             <a:avLst/>
@@ -14646,21 +14682,21 @@
                 </a:solidFill>
                 <a:latin typeface="Segoe UI"/>
               </a:rPr>
-              <a:t>Delete</a:t>
-            </a:r>
-          </a:p>
-        </p:txBody>
-      </p:sp>
-      <p:sp>
-        <p:nvSpPr>
-          <p:cNvPr id="26" name="TextBox 25"/>
+              <a:t>Telemetry</a:t>
+            </a:r>
+          </a:p>
+        </p:txBody>
+      </p:sp>
+      <p:sp>
+        <p:nvSpPr>
+          <p:cNvPr id="34" name="TextBox 33"/>
           <p:cNvSpPr txBox="1"/>
           <p:nvPr/>
         </p:nvSpPr>
         <p:spPr>
           <a:xfrm>
-            <a:off x="2788920" y="4352544"/>
-            <a:ext cx="4114800" cy="274320"/>
+            <a:off x="3246120" y="5577840"/>
+            <a:ext cx="3657600" cy="274320"/>
           </a:xfrm>
           <a:prstGeom prst="rect">
             <a:avLst/>
@@ -14685,21 +14721,21 @@
                 </a:solidFill>
                 <a:latin typeface="Segoe UI"/>
               </a:rPr>
-              <a:t>hope the rows are gone</a:t>
-            </a:r>
-          </a:p>
-        </p:txBody>
-      </p:sp>
-      <p:sp>
-        <p:nvSpPr>
-          <p:cNvPr id="27" name="TextBox 26"/>
+              <a:t>usually on by default</a:t>
+            </a:r>
+          </a:p>
+        </p:txBody>
+      </p:sp>
+      <p:sp>
+        <p:nvSpPr>
+          <p:cNvPr id="35" name="TextBox 34"/>
           <p:cNvSpPr txBox="1"/>
           <p:nvPr/>
         </p:nvSpPr>
         <p:spPr>
           <a:xfrm>
-            <a:off x="7086600" y="4352544"/>
-            <a:ext cx="4297680" cy="274320"/>
+            <a:off x="7040880" y="5577840"/>
+            <a:ext cx="4389120" cy="274320"/>
           </a:xfrm>
           <a:prstGeom prst="rect">
             <a:avLst/>
@@ -14724,65 +14760,21 @@
                 </a:solidFill>
                 <a:latin typeface="Segoe UI"/>
               </a:rPr>
-              <a:t>delete the folder — there is no second copy</a:t>
-            </a:r>
-          </a:p>
-        </p:txBody>
-      </p:sp>
-      <p:sp>
-        <p:nvSpPr>
-          <p:cNvPr id="28" name="Rectangle 27"/>
-          <p:cNvSpPr/>
-          <p:nvPr/>
-        </p:nvSpPr>
-        <p:spPr>
-          <a:xfrm>
-            <a:off x="685800" y="4800600"/>
-            <a:ext cx="10853928" cy="548640"/>
-          </a:xfrm>
-          <a:prstGeom prst="rect">
-            <a:avLst/>
-          </a:prstGeom>
-          <a:solidFill>
-            <a:srgbClr val="FFFFFF"/>
-          </a:solidFill>
-          <a:ln>
-            <a:noFill/>
-          </a:ln>
-          <a:effectLst/>
-        </p:spPr>
-        <p:style>
-          <a:lnRef idx="1">
-            <a:schemeClr val="accent1"/>
-          </a:lnRef>
-          <a:fillRef idx="3">
-            <a:schemeClr val="accent1"/>
-          </a:fillRef>
-          <a:effectRef idx="2">
-            <a:schemeClr val="accent1"/>
-          </a:effectRef>
-          <a:fontRef idx="minor">
-            <a:schemeClr val="lt1"/>
-          </a:fontRef>
-        </p:style>
-        <p:txBody>
-          <a:bodyPr rtlCol="0" anchor="ctr"/>
-          <a:lstStyle/>
-          <a:p>
-            <a:pPr algn="ctr"/>
-          </a:p>
-        </p:txBody>
-      </p:sp>
-      <p:sp>
-        <p:nvSpPr>
-          <p:cNvPr id="29" name="TextBox 28"/>
+              <a:t>▸ none, and none in the lock</a:t>
+            </a:r>
+          </a:p>
+        </p:txBody>
+      </p:sp>
+      <p:sp>
+        <p:nvSpPr>
+          <p:cNvPr id="36" name="TextBox 35"/>
           <p:cNvSpPr txBox="1"/>
           <p:nvPr/>
         </p:nvSpPr>
         <p:spPr>
           <a:xfrm>
-            <a:off x="822960" y="4956048"/>
-            <a:ext cx="1920240" cy="274320"/>
+            <a:off x="3246120" y="2011680"/>
+            <a:ext cx="3657600" cy="256032"/>
           </a:xfrm>
           <a:prstGeom prst="rect">
             <a:avLst/>
@@ -14803,25 +14795,25 @@
             <a:r>
               <a:rPr sz="1100" b="1">
                 <a:solidFill>
-                  <a:srgbClr val="1A1A1A"/>
-                </a:solidFill>
-                <a:latin typeface="Segoe UI"/>
-              </a:rPr>
-              <a:t>Model</a:t>
-            </a:r>
-          </a:p>
-        </p:txBody>
-      </p:sp>
-      <p:sp>
-        <p:nvSpPr>
-          <p:cNvPr id="30" name="TextBox 29"/>
+                  <a:srgbClr val="6B6B6B"/>
+                </a:solidFill>
+                <a:latin typeface="Segoe UI"/>
+              </a:rPr>
+              <a:t>typical agent tool</a:t>
+            </a:r>
+          </a:p>
+        </p:txBody>
+      </p:sp>
+      <p:sp>
+        <p:nvSpPr>
+          <p:cNvPr id="37" name="TextBox 36"/>
           <p:cNvSpPr txBox="1"/>
           <p:nvPr/>
         </p:nvSpPr>
         <p:spPr>
           <a:xfrm>
-            <a:off x="2788920" y="4956048"/>
-            <a:ext cx="4114800" cy="274320"/>
+            <a:off x="7040880" y="2011680"/>
+            <a:ext cx="4389120" cy="256032"/>
           </a:xfrm>
           <a:prstGeom prst="rect">
             <a:avLst/>
@@ -14840,213 +14832,13 @@
               </a:spcAft>
             </a:pPr>
             <a:r>
-              <a:rPr sz="1050" b="0">
-                <a:solidFill>
-                  <a:srgbClr val="6B6B6B"/>
-                </a:solidFill>
-                <a:latin typeface="Segoe UI"/>
-              </a:rPr>
-              <a:t>vendor function-calling required</a:t>
-            </a:r>
-          </a:p>
-        </p:txBody>
-      </p:sp>
-      <p:sp>
-        <p:nvSpPr>
-          <p:cNvPr id="31" name="TextBox 30"/>
-          <p:cNvSpPr txBox="1"/>
-          <p:nvPr/>
-        </p:nvSpPr>
-        <p:spPr>
-          <a:xfrm>
-            <a:off x="7086600" y="4956048"/>
-            <a:ext cx="4297680" cy="274320"/>
-          </a:xfrm>
-          <a:prstGeom prst="rect">
-            <a:avLst/>
-          </a:prstGeom>
-          <a:noFill/>
-        </p:spPr>
-        <p:txBody>
-          <a:bodyPr wrap="square" anchor="t" lIns="0" rIns="0" tIns="0" bIns="0">
-            <a:spAutoFit/>
-          </a:bodyPr>
-          <a:lstStyle/>
-          <a:p>
-            <a:pPr algn="l">
-              <a:spcAft>
-                <a:spcPts val="0"/>
-              </a:spcAft>
-            </a:pPr>
-            <a:r>
-              <a:rPr sz="1050" b="0">
-                <a:solidFill>
-                  <a:srgbClr val="1A1A1A"/>
-                </a:solidFill>
-                <a:latin typeface="Segoe UI"/>
-              </a:rPr>
-              <a:t>plain-text ReAct — any model drives it</a:t>
-            </a:r>
-          </a:p>
-        </p:txBody>
-      </p:sp>
-      <p:sp>
-        <p:nvSpPr>
-          <p:cNvPr id="32" name="Rectangle 31"/>
-          <p:cNvSpPr/>
-          <p:nvPr/>
-        </p:nvSpPr>
-        <p:spPr>
-          <a:xfrm>
-            <a:off x="685800" y="5404104"/>
-            <a:ext cx="10853928" cy="548640"/>
-          </a:xfrm>
-          <a:prstGeom prst="rect">
-            <a:avLst/>
-          </a:prstGeom>
-          <a:solidFill>
-            <a:srgbClr val="F7F7F7"/>
-          </a:solidFill>
-          <a:ln>
-            <a:noFill/>
-          </a:ln>
-          <a:effectLst/>
-        </p:spPr>
-        <p:style>
-          <a:lnRef idx="1">
-            <a:schemeClr val="accent1"/>
-          </a:lnRef>
-          <a:fillRef idx="3">
-            <a:schemeClr val="accent1"/>
-          </a:fillRef>
-          <a:effectRef idx="2">
-            <a:schemeClr val="accent1"/>
-          </a:effectRef>
-          <a:fontRef idx="minor">
-            <a:schemeClr val="lt1"/>
-          </a:fontRef>
-        </p:style>
-        <p:txBody>
-          <a:bodyPr rtlCol="0" anchor="ctr"/>
-          <a:lstStyle/>
-          <a:p>
-            <a:pPr algn="ctr"/>
-          </a:p>
-        </p:txBody>
-      </p:sp>
-      <p:sp>
-        <p:nvSpPr>
-          <p:cNvPr id="33" name="TextBox 32"/>
-          <p:cNvSpPr txBox="1"/>
-          <p:nvPr/>
-        </p:nvSpPr>
-        <p:spPr>
-          <a:xfrm>
-            <a:off x="822960" y="5559552"/>
-            <a:ext cx="1920240" cy="274320"/>
-          </a:xfrm>
-          <a:prstGeom prst="rect">
-            <a:avLst/>
-          </a:prstGeom>
-          <a:noFill/>
-        </p:spPr>
-        <p:txBody>
-          <a:bodyPr wrap="square" anchor="t" lIns="0" rIns="0" tIns="0" bIns="0">
-            <a:spAutoFit/>
-          </a:bodyPr>
-          <a:lstStyle/>
-          <a:p>
-            <a:pPr algn="l">
-              <a:spcAft>
-                <a:spcPts val="0"/>
-              </a:spcAft>
-            </a:pPr>
-            <a:r>
               <a:rPr sz="1100" b="1">
                 <a:solidFill>
-                  <a:srgbClr val="1A1A1A"/>
-                </a:solidFill>
-                <a:latin typeface="Segoe UI"/>
-              </a:rPr>
-              <a:t>Telemetry</a:t>
-            </a:r>
-          </a:p>
-        </p:txBody>
-      </p:sp>
-      <p:sp>
-        <p:nvSpPr>
-          <p:cNvPr id="34" name="TextBox 33"/>
-          <p:cNvSpPr txBox="1"/>
-          <p:nvPr/>
-        </p:nvSpPr>
-        <p:spPr>
-          <a:xfrm>
-            <a:off x="2788920" y="5559552"/>
-            <a:ext cx="4114800" cy="274320"/>
-          </a:xfrm>
-          <a:prstGeom prst="rect">
-            <a:avLst/>
-          </a:prstGeom>
-          <a:noFill/>
-        </p:spPr>
-        <p:txBody>
-          <a:bodyPr wrap="square" anchor="t" lIns="0" rIns="0" tIns="0" bIns="0">
-            <a:spAutoFit/>
-          </a:bodyPr>
-          <a:lstStyle/>
-          <a:p>
-            <a:pPr algn="l">
-              <a:spcAft>
-                <a:spcPts val="0"/>
-              </a:spcAft>
-            </a:pPr>
-            <a:r>
-              <a:rPr sz="1050" b="0">
-                <a:solidFill>
-                  <a:srgbClr val="6B6B6B"/>
-                </a:solidFill>
-                <a:latin typeface="Segoe UI"/>
-              </a:rPr>
-              <a:t>usually on by default</a:t>
-            </a:r>
-          </a:p>
-        </p:txBody>
-      </p:sp>
-      <p:sp>
-        <p:nvSpPr>
-          <p:cNvPr id="35" name="TextBox 34"/>
-          <p:cNvSpPr txBox="1"/>
-          <p:nvPr/>
-        </p:nvSpPr>
-        <p:spPr>
-          <a:xfrm>
-            <a:off x="7086600" y="5559552"/>
-            <a:ext cx="4297680" cy="274320"/>
-          </a:xfrm>
-          <a:prstGeom prst="rect">
-            <a:avLst/>
-          </a:prstGeom>
-          <a:noFill/>
-        </p:spPr>
-        <p:txBody>
-          <a:bodyPr wrap="square" anchor="t" lIns="0" rIns="0" tIns="0" bIns="0">
-            <a:spAutoFit/>
-          </a:bodyPr>
-          <a:lstStyle/>
-          <a:p>
-            <a:pPr algn="l">
-              <a:spcAft>
-                <a:spcPts val="0"/>
-              </a:spcAft>
-            </a:pPr>
-            <a:r>
-              <a:rPr sz="1050" b="0">
-                <a:solidFill>
-                  <a:srgbClr val="1A1A1A"/>
-                </a:solidFill>
-                <a:latin typeface="Segoe UI"/>
-              </a:rPr>
-              <a:t>none, and none in the lock</a:t>
+                  <a:srgbClr val="1F4E79"/>
+                </a:solidFill>
+                <a:latin typeface="Segoe UI"/>
+              </a:rPr>
+              <a:t>AIForgeCrew</a:t>
             </a:r>
           </a:p>
         </p:txBody>
@@ -15103,7 +14895,7 @@
                 </a:solidFill>
                 <a:latin typeface="Segoe UI"/>
               </a:rPr>
-              <a:t>How to deploy it</a:t>
+              <a:t>Compared with the usual approach</a:t>
             </a:r>
           </a:p>
         </p:txBody>
@@ -15142,7 +14934,7 @@
                 </a:solidFill>
                 <a:latin typeface="Segoe UI"/>
               </a:rPr>
-              <a:t>Zero-Docker is a first-class mode, not a degraded one.</a:t>
+              <a:t>Every operational burden a vector-database stack adds, removed.</a:t>
             </a:r>
           </a:p>
         </p:txBody>
@@ -15199,8 +14991,47 @@
         </p:nvSpPr>
         <p:spPr>
           <a:xfrm>
-            <a:off x="548640" y="6327648"/>
-            <a:ext cx="9692640" cy="320040"/>
+            <a:off x="11018520" y="6327648"/>
+            <a:ext cx="640080" cy="274320"/>
+          </a:xfrm>
+          <a:prstGeom prst="rect">
+            <a:avLst/>
+          </a:prstGeom>
+          <a:noFill/>
+        </p:spPr>
+        <p:txBody>
+          <a:bodyPr wrap="square" anchor="t" lIns="0" rIns="0" tIns="0" bIns="0">
+            <a:spAutoFit/>
+          </a:bodyPr>
+          <a:lstStyle/>
+          <a:p>
+            <a:pPr algn="r">
+              <a:spcAft>
+                <a:spcPts val="0"/>
+              </a:spcAft>
+            </a:pPr>
+            <a:r>
+              <a:rPr sz="950" b="0">
+                <a:solidFill>
+                  <a:srgbClr val="6B6B6B"/>
+                </a:solidFill>
+                <a:latin typeface="Segoe UI"/>
+              </a:rPr>
+              <a:t>17</a:t>
+            </a:r>
+          </a:p>
+        </p:txBody>
+      </p:sp>
+      <p:sp>
+        <p:nvSpPr>
+          <p:cNvPr id="6" name="TextBox 5"/>
+          <p:cNvSpPr txBox="1"/>
+          <p:nvPr/>
+        </p:nvSpPr>
+        <p:spPr>
+          <a:xfrm>
+            <a:off x="2788920" y="1417320"/>
+            <a:ext cx="4114800" cy="274320"/>
           </a:xfrm>
           <a:prstGeom prst="rect">
             <a:avLst/>
@@ -15219,27 +15050,27 @@
               </a:spcAft>
             </a:pPr>
             <a:r>
-              <a:rPr sz="950" b="0">
+              <a:rPr sz="1150" b="1">
                 <a:solidFill>
                   <a:srgbClr val="6B6B6B"/>
                 </a:solidFill>
                 <a:latin typeface="Segoe UI"/>
               </a:rPr>
-              <a:t>One service, one port, one folder of state. Moving a machine is copying ~/.aiforge/.</a:t>
-            </a:r>
-          </a:p>
-        </p:txBody>
-      </p:sp>
-      <p:sp>
-        <p:nvSpPr>
-          <p:cNvPr id="6" name="TextBox 5"/>
+              <a:t>Typical agent stack</a:t>
+            </a:r>
+          </a:p>
+        </p:txBody>
+      </p:sp>
+      <p:sp>
+        <p:nvSpPr>
+          <p:cNvPr id="7" name="TextBox 6"/>
           <p:cNvSpPr txBox="1"/>
           <p:nvPr/>
         </p:nvSpPr>
         <p:spPr>
           <a:xfrm>
-            <a:off x="11018520" y="6327648"/>
-            <a:ext cx="640080" cy="274320"/>
+            <a:off x="7086600" y="1417320"/>
+            <a:ext cx="4453128" cy="274320"/>
           </a:xfrm>
           <a:prstGeom prst="rect">
             <a:avLst/>
@@ -15252,343 +15083,203 @@
           </a:bodyPr>
           <a:lstStyle/>
           <a:p>
-            <a:pPr algn="r">
+            <a:pPr algn="l">
               <a:spcAft>
                 <a:spcPts val="0"/>
               </a:spcAft>
             </a:pPr>
             <a:r>
-              <a:rPr sz="950" b="0">
+              <a:rPr sz="1150" b="1">
+                <a:solidFill>
+                  <a:srgbClr val="1F4E79"/>
+                </a:solidFill>
+                <a:latin typeface="Segoe UI"/>
+              </a:rPr>
+              <a:t>AIForgeCrew</a:t>
+            </a:r>
+          </a:p>
+        </p:txBody>
+      </p:sp>
+      <p:sp>
+        <p:nvSpPr>
+          <p:cNvPr id="8" name="Rectangle 7"/>
+          <p:cNvSpPr/>
+          <p:nvPr/>
+        </p:nvSpPr>
+        <p:spPr>
+          <a:xfrm>
+            <a:off x="685800" y="1783080"/>
+            <a:ext cx="10853928" cy="548640"/>
+          </a:xfrm>
+          <a:prstGeom prst="rect">
+            <a:avLst/>
+          </a:prstGeom>
+          <a:solidFill>
+            <a:srgbClr val="F7F7F7"/>
+          </a:solidFill>
+          <a:ln>
+            <a:noFill/>
+          </a:ln>
+          <a:effectLst/>
+        </p:spPr>
+        <p:style>
+          <a:lnRef idx="1">
+            <a:schemeClr val="accent1"/>
+          </a:lnRef>
+          <a:fillRef idx="3">
+            <a:schemeClr val="accent1"/>
+          </a:fillRef>
+          <a:effectRef idx="2">
+            <a:schemeClr val="accent1"/>
+          </a:effectRef>
+          <a:fontRef idx="minor">
+            <a:schemeClr val="lt1"/>
+          </a:fontRef>
+        </p:style>
+        <p:txBody>
+          <a:bodyPr rtlCol="0" anchor="ctr"/>
+          <a:lstStyle/>
+          <a:p>
+            <a:pPr algn="ctr"/>
+          </a:p>
+        </p:txBody>
+      </p:sp>
+      <p:sp>
+        <p:nvSpPr>
+          <p:cNvPr id="9" name="TextBox 8"/>
+          <p:cNvSpPr txBox="1"/>
+          <p:nvPr/>
+        </p:nvSpPr>
+        <p:spPr>
+          <a:xfrm>
+            <a:off x="822960" y="1938528"/>
+            <a:ext cx="1920240" cy="274320"/>
+          </a:xfrm>
+          <a:prstGeom prst="rect">
+            <a:avLst/>
+          </a:prstGeom>
+          <a:noFill/>
+        </p:spPr>
+        <p:txBody>
+          <a:bodyPr wrap="square" anchor="t" lIns="0" rIns="0" tIns="0" bIns="0">
+            <a:spAutoFit/>
+          </a:bodyPr>
+          <a:lstStyle/>
+          <a:p>
+            <a:pPr algn="l">
+              <a:spcAft>
+                <a:spcPts val="0"/>
+              </a:spcAft>
+            </a:pPr>
+            <a:r>
+              <a:rPr sz="1100" b="1">
+                <a:solidFill>
+                  <a:srgbClr val="1A1A1A"/>
+                </a:solidFill>
+                <a:latin typeface="Segoe UI"/>
+              </a:rPr>
+              <a:t>Storage</a:t>
+            </a:r>
+          </a:p>
+        </p:txBody>
+      </p:sp>
+      <p:sp>
+        <p:nvSpPr>
+          <p:cNvPr id="10" name="TextBox 9"/>
+          <p:cNvSpPr txBox="1"/>
+          <p:nvPr/>
+        </p:nvSpPr>
+        <p:spPr>
+          <a:xfrm>
+            <a:off x="2788920" y="1938528"/>
+            <a:ext cx="4114800" cy="274320"/>
+          </a:xfrm>
+          <a:prstGeom prst="rect">
+            <a:avLst/>
+          </a:prstGeom>
+          <a:noFill/>
+        </p:spPr>
+        <p:txBody>
+          <a:bodyPr wrap="square" anchor="t" lIns="0" rIns="0" tIns="0" bIns="0">
+            <a:spAutoFit/>
+          </a:bodyPr>
+          <a:lstStyle/>
+          <a:p>
+            <a:pPr algn="l">
+              <a:spcAft>
+                <a:spcPts val="0"/>
+              </a:spcAft>
+            </a:pPr>
+            <a:r>
+              <a:rPr sz="1050" b="0">
                 <a:solidFill>
                   <a:srgbClr val="6B6B6B"/>
                 </a:solidFill>
                 <a:latin typeface="Segoe UI"/>
               </a:rPr>
-              <a:t>17</a:t>
-            </a:r>
-          </a:p>
-        </p:txBody>
-      </p:sp>
-      <p:sp>
-        <p:nvSpPr>
-          <p:cNvPr id="7" name="Rounded Rectangle 6"/>
+              <a:t>vector DB service to install, tune, back up</a:t>
+            </a:r>
+          </a:p>
+        </p:txBody>
+      </p:sp>
+      <p:sp>
+        <p:nvSpPr>
+          <p:cNvPr id="11" name="TextBox 10"/>
+          <p:cNvSpPr txBox="1"/>
+          <p:nvPr/>
+        </p:nvSpPr>
+        <p:spPr>
+          <a:xfrm>
+            <a:off x="7086600" y="1938528"/>
+            <a:ext cx="4297680" cy="274320"/>
+          </a:xfrm>
+          <a:prstGeom prst="rect">
+            <a:avLst/>
+          </a:prstGeom>
+          <a:noFill/>
+        </p:spPr>
+        <p:txBody>
+          <a:bodyPr wrap="square" anchor="t" lIns="0" rIns="0" tIns="0" bIns="0">
+            <a:spAutoFit/>
+          </a:bodyPr>
+          <a:lstStyle/>
+          <a:p>
+            <a:pPr algn="l">
+              <a:spcAft>
+                <a:spcPts val="0"/>
+              </a:spcAft>
+            </a:pPr>
+            <a:r>
+              <a:rPr sz="1050" b="0">
+                <a:solidFill>
+                  <a:srgbClr val="1A1A1A"/>
+                </a:solidFill>
+                <a:latin typeface="Segoe UI"/>
+              </a:rPr>
+              <a:t>markdown files + one SQLite under ~/.aiforge/</a:t>
+            </a:r>
+          </a:p>
+        </p:txBody>
+      </p:sp>
+      <p:sp>
+        <p:nvSpPr>
+          <p:cNvPr id="12" name="Rectangle 11"/>
           <p:cNvSpPr/>
           <p:nvPr/>
         </p:nvSpPr>
         <p:spPr>
           <a:xfrm>
-            <a:off x="685800" y="1554480"/>
-            <a:ext cx="3383280" cy="1737360"/>
-          </a:xfrm>
-          <a:prstGeom prst="roundRect">
-            <a:avLst>
-              <a:gd name="adj" fmla="val 10000"/>
-            </a:avLst>
-          </a:prstGeom>
-          <a:solidFill>
-            <a:srgbClr val="DCEEE7"/>
-          </a:solidFill>
-          <a:ln w="12700">
-            <a:solidFill>
-              <a:srgbClr val="1E6B52"/>
-            </a:solidFill>
-          </a:ln>
-          <a:effectLst/>
-        </p:spPr>
-        <p:style>
-          <a:lnRef idx="1">
-            <a:schemeClr val="accent1"/>
-          </a:lnRef>
-          <a:fillRef idx="3">
-            <a:schemeClr val="accent1"/>
-          </a:fillRef>
-          <a:effectRef idx="2">
-            <a:schemeClr val="accent1"/>
-          </a:effectRef>
-          <a:fontRef idx="minor">
-            <a:schemeClr val="lt1"/>
-          </a:fontRef>
-        </p:style>
-        <p:txBody>
-          <a:bodyPr rtlCol="0" anchor="ctr" wrap="square" lIns="54864" rIns="54864" tIns="27432" bIns="27432"/>
-          <a:lstStyle/>
-          <a:p>
-            <a:pPr algn="ctr"/>
-            <a:r>
-              <a:rPr sz="1700" b="1">
-                <a:solidFill>
-                  <a:srgbClr val="1E6B52"/>
-                </a:solidFill>
-                <a:latin typeface="Segoe UI"/>
-              </a:rPr>
-              <a:t>Laptop</a:t>
-            </a:r>
-          </a:p>
-          <a:p>
-            <a:pPr algn="ctr"/>
-          </a:p>
-          <a:p>
-            <a:pPr algn="ctr"/>
-            <a:r>
-              <a:rPr sz="1050" b="0">
-                <a:solidFill>
-                  <a:srgbClr val="1A1A1A"/>
-                </a:solidFill>
-                <a:latin typeface="Segoe UI"/>
-              </a:rPr>
-              <a:t>./run.sh</a:t>
-            </a:r>
-          </a:p>
-          <a:p>
-            <a:pPr algn="ctr"/>
-          </a:p>
-          <a:p>
-            <a:pPr algn="ctr"/>
-            <a:r>
-              <a:rPr sz="1050" b="0">
-                <a:solidFill>
-                  <a:srgbClr val="1A1A1A"/>
-                </a:solidFill>
-                <a:latin typeface="Segoe UI"/>
-              </a:rPr>
-              <a:t>everything local</a:t>
-            </a:r>
-          </a:p>
-          <a:p>
-            <a:pPr algn="ctr"/>
-            <a:r>
-              <a:rPr sz="1050" b="0">
-                <a:solidFill>
-                  <a:srgbClr val="1A1A1A"/>
-                </a:solidFill>
-                <a:latin typeface="Segoe UI"/>
-              </a:rPr>
-              <a:t>unset admin URL = you are the admin</a:t>
-            </a:r>
-          </a:p>
-        </p:txBody>
-      </p:sp>
-      <p:sp>
-        <p:nvSpPr>
-          <p:cNvPr id="8" name="Rounded Rectangle 7"/>
-          <p:cNvSpPr/>
-          <p:nvPr/>
-        </p:nvSpPr>
-        <p:spPr>
-          <a:xfrm>
-            <a:off x="4361687" y="1554480"/>
-            <a:ext cx="3383280" cy="1737360"/>
-          </a:xfrm>
-          <a:prstGeom prst="roundRect">
-            <a:avLst>
-              <a:gd name="adj" fmla="val 10000"/>
-            </a:avLst>
-          </a:prstGeom>
-          <a:solidFill>
-            <a:srgbClr val="DCE7F2"/>
-          </a:solidFill>
-          <a:ln w="12700">
-            <a:solidFill>
-              <a:srgbClr val="1F4E79"/>
-            </a:solidFill>
-          </a:ln>
-          <a:effectLst/>
-        </p:spPr>
-        <p:style>
-          <a:lnRef idx="1">
-            <a:schemeClr val="accent1"/>
-          </a:lnRef>
-          <a:fillRef idx="3">
-            <a:schemeClr val="accent1"/>
-          </a:fillRef>
-          <a:effectRef idx="2">
-            <a:schemeClr val="accent1"/>
-          </a:effectRef>
-          <a:fontRef idx="minor">
-            <a:schemeClr val="lt1"/>
-          </a:fontRef>
-        </p:style>
-        <p:txBody>
-          <a:bodyPr rtlCol="0" anchor="ctr" wrap="square" lIns="54864" rIns="54864" tIns="27432" bIns="27432"/>
-          <a:lstStyle/>
-          <a:p>
-            <a:pPr algn="ctr"/>
-            <a:r>
-              <a:rPr sz="1700" b="1">
-                <a:solidFill>
-                  <a:srgbClr val="1F4E79"/>
-                </a:solidFill>
-                <a:latin typeface="Segoe UI"/>
-              </a:rPr>
-              <a:t>NUC / server</a:t>
-            </a:r>
-          </a:p>
-          <a:p>
-            <a:pPr algn="ctr"/>
-          </a:p>
-          <a:p>
-            <a:pPr algn="ctr"/>
-            <a:r>
-              <a:rPr sz="1050" b="0">
-                <a:solidFill>
-                  <a:srgbClr val="1A1A1A"/>
-                </a:solidFill>
-                <a:latin typeface="Segoe UI"/>
-              </a:rPr>
-              <a:t>systemd user unit</a:t>
-            </a:r>
-          </a:p>
-          <a:p>
-            <a:pPr algn="ctr"/>
-          </a:p>
-          <a:p>
-            <a:pPr algn="ctr"/>
-            <a:r>
-              <a:rPr sz="1050" b="0">
-                <a:solidFill>
-                  <a:srgbClr val="1A1A1A"/>
-                </a:solidFill>
-                <a:latin typeface="Segoe UI"/>
-              </a:rPr>
-              <a:t>always-on admin hub</a:t>
-            </a:r>
-          </a:p>
-          <a:p>
-            <a:pPr algn="ctr"/>
-            <a:r>
-              <a:rPr sz="1050" b="0">
-                <a:solidFill>
-                  <a:srgbClr val="1A1A1A"/>
-                </a:solidFill>
-                <a:latin typeface="Segoe UI"/>
-              </a:rPr>
-              <a:t>spokes sync to it</a:t>
-            </a:r>
-          </a:p>
-        </p:txBody>
-      </p:sp>
-      <p:sp>
-        <p:nvSpPr>
-          <p:cNvPr id="9" name="Rounded Rectangle 8"/>
-          <p:cNvSpPr/>
-          <p:nvPr/>
-        </p:nvSpPr>
-        <p:spPr>
-          <a:xfrm>
-            <a:off x="8037574" y="1554480"/>
-            <a:ext cx="3383280" cy="1737360"/>
-          </a:xfrm>
-          <a:prstGeom prst="roundRect">
-            <a:avLst>
-              <a:gd name="adj" fmla="val 10000"/>
-            </a:avLst>
-          </a:prstGeom>
-          <a:solidFill>
-            <a:srgbClr val="EAE1F0"/>
-          </a:solidFill>
-          <a:ln w="12700">
-            <a:solidFill>
-              <a:srgbClr val="5B3A6E"/>
-            </a:solidFill>
-          </a:ln>
-          <a:effectLst/>
-        </p:spPr>
-        <p:style>
-          <a:lnRef idx="1">
-            <a:schemeClr val="accent1"/>
-          </a:lnRef>
-          <a:fillRef idx="3">
-            <a:schemeClr val="accent1"/>
-          </a:fillRef>
-          <a:effectRef idx="2">
-            <a:schemeClr val="accent1"/>
-          </a:effectRef>
-          <a:fontRef idx="minor">
-            <a:schemeClr val="lt1"/>
-          </a:fontRef>
-        </p:style>
-        <p:txBody>
-          <a:bodyPr rtlCol="0" anchor="ctr" wrap="square" lIns="54864" rIns="54864" tIns="27432" bIns="27432"/>
-          <a:lstStyle/>
-          <a:p>
-            <a:pPr algn="ctr"/>
-            <a:r>
-              <a:rPr sz="1700" b="1">
-                <a:solidFill>
-                  <a:srgbClr val="5B3A6E"/>
-                </a:solidFill>
-                <a:latin typeface="Segoe UI"/>
-              </a:rPr>
-              <a:t>Container</a:t>
-            </a:r>
-          </a:p>
-          <a:p>
-            <a:pPr algn="ctr"/>
-          </a:p>
-          <a:p>
-            <a:pPr algn="ctr"/>
-            <a:r>
-              <a:rPr sz="1050" b="0">
-                <a:solidFill>
-                  <a:srgbClr val="1A1A1A"/>
-                </a:solidFill>
-                <a:latin typeface="Segoe UI"/>
-              </a:rPr>
-              <a:t>docker compose</a:t>
-            </a:r>
-          </a:p>
-          <a:p>
-            <a:pPr algn="ctr"/>
-          </a:p>
-          <a:p>
-            <a:pPr algn="ctr"/>
-            <a:r>
-              <a:rPr sz="1050" b="0">
-                <a:solidFill>
-                  <a:srgbClr val="1A1A1A"/>
-                </a:solidFill>
-                <a:latin typeface="Segoe UI"/>
-              </a:rPr>
-              <a:t>for untrusted work</a:t>
-            </a:r>
-          </a:p>
-          <a:p>
-            <a:pPr algn="ctr"/>
-            <a:r>
-              <a:rPr sz="1050" b="0">
-                <a:solidFill>
-                  <a:srgbClr val="1A1A1A"/>
-                </a:solidFill>
-                <a:latin typeface="Segoe UI"/>
-              </a:rPr>
-              <a:t>the jail you actually want</a:t>
-            </a:r>
-          </a:p>
-        </p:txBody>
-      </p:sp>
-      <p:sp>
-        <p:nvSpPr>
-          <p:cNvPr id="10" name="Rounded Rectangle 9"/>
-          <p:cNvSpPr/>
-          <p:nvPr/>
-        </p:nvSpPr>
-        <p:spPr>
-          <a:xfrm>
-            <a:off x="685800" y="3611880"/>
-            <a:ext cx="10835640" cy="566928"/>
-          </a:xfrm>
-          <a:prstGeom prst="roundRect">
-            <a:avLst>
-              <a:gd name="adj" fmla="val 10000"/>
-            </a:avLst>
+            <a:off x="685800" y="2386584"/>
+            <a:ext cx="10853928" cy="548640"/>
+          </a:xfrm>
+          <a:prstGeom prst="rect">
+            <a:avLst/>
           </a:prstGeom>
           <a:solidFill>
             <a:srgbClr val="FFFFFF"/>
           </a:solidFill>
-          <a:ln w="12700">
-            <a:solidFill>
-              <a:srgbClr val="C9C9C9"/>
-            </a:solidFill>
+          <a:ln>
+            <a:noFill/>
           </a:ln>
           <a:effectLst/>
         </p:spPr>
@@ -15607,57 +15298,149 @@
           </a:fontRef>
         </p:style>
         <p:txBody>
-          <a:bodyPr rtlCol="0" anchor="ctr" wrap="square" lIns="54864" rIns="54864" tIns="27432" bIns="27432"/>
-          <a:lstStyle/>
-          <a:p>
-            <a:pPr algn="ctr"/>
-            <a:r>
-              <a:rPr sz="1300" b="1">
-                <a:solidFill>
-                  <a:srgbClr val="1A1A1A"/>
-                </a:solidFill>
-                <a:latin typeface="Segoe UI"/>
-              </a:rPr>
-              <a:t>Requires</a:t>
-            </a:r>
-          </a:p>
-          <a:p>
-            <a:pPr algn="ctr"/>
+          <a:bodyPr rtlCol="0" anchor="ctr"/>
+          <a:lstStyle/>
+          <a:p>
+            <a:pPr algn="ctr"/>
+          </a:p>
+        </p:txBody>
+      </p:sp>
+      <p:sp>
+        <p:nvSpPr>
+          <p:cNvPr id="13" name="TextBox 12"/>
+          <p:cNvSpPr txBox="1"/>
+          <p:nvPr/>
+        </p:nvSpPr>
+        <p:spPr>
+          <a:xfrm>
+            <a:off x="822960" y="2542032"/>
+            <a:ext cx="1920240" cy="274320"/>
+          </a:xfrm>
+          <a:prstGeom prst="rect">
+            <a:avLst/>
+          </a:prstGeom>
+          <a:noFill/>
+        </p:spPr>
+        <p:txBody>
+          <a:bodyPr wrap="square" anchor="t" lIns="0" rIns="0" tIns="0" bIns="0">
+            <a:spAutoFit/>
+          </a:bodyPr>
+          <a:lstStyle/>
+          <a:p>
+            <a:pPr algn="l">
+              <a:spcAft>
+                <a:spcPts val="0"/>
+              </a:spcAft>
+            </a:pPr>
+            <a:r>
+              <a:rPr sz="1100" b="1">
+                <a:solidFill>
+                  <a:srgbClr val="1A1A1A"/>
+                </a:solidFill>
+                <a:latin typeface="Segoe UI"/>
+              </a:rPr>
+              <a:t>Inspect</a:t>
+            </a:r>
+          </a:p>
+        </p:txBody>
+      </p:sp>
+      <p:sp>
+        <p:nvSpPr>
+          <p:cNvPr id="14" name="TextBox 13"/>
+          <p:cNvSpPr txBox="1"/>
+          <p:nvPr/>
+        </p:nvSpPr>
+        <p:spPr>
+          <a:xfrm>
+            <a:off x="2788920" y="2542032"/>
+            <a:ext cx="4114800" cy="274320"/>
+          </a:xfrm>
+          <a:prstGeom prst="rect">
+            <a:avLst/>
+          </a:prstGeom>
+          <a:noFill/>
+        </p:spPr>
+        <p:txBody>
+          <a:bodyPr wrap="square" anchor="t" lIns="0" rIns="0" tIns="0" bIns="0">
+            <a:spAutoFit/>
+          </a:bodyPr>
+          <a:lstStyle/>
+          <a:p>
+            <a:pPr algn="l">
+              <a:spcAft>
+                <a:spcPts val="0"/>
+              </a:spcAft>
+            </a:pPr>
             <a:r>
               <a:rPr sz="1050" b="0">
                 <a:solidFill>
-                  <a:srgbClr val="1A1A1A"/>
-                </a:solidFill>
-                <a:latin typeface="Segoe UI"/>
-              </a:rPr>
-              <a:t>Python 3.12  ·  one OpenAI-compatible endpoint  ·  no GPU, no torch, no Postgres, no Neo4j</a:t>
-            </a:r>
-          </a:p>
-        </p:txBody>
-      </p:sp>
-      <p:sp>
-        <p:nvSpPr>
-          <p:cNvPr id="11" name="Rounded Rectangle 10"/>
+                  <a:srgbClr val="6B6B6B"/>
+                </a:solidFill>
+                <a:latin typeface="Segoe UI"/>
+              </a:rPr>
+              <a:t>query the DB, decode embeddings</a:t>
+            </a:r>
+          </a:p>
+        </p:txBody>
+      </p:sp>
+      <p:sp>
+        <p:nvSpPr>
+          <p:cNvPr id="15" name="TextBox 14"/>
+          <p:cNvSpPr txBox="1"/>
+          <p:nvPr/>
+        </p:nvSpPr>
+        <p:spPr>
+          <a:xfrm>
+            <a:off x="7086600" y="2542032"/>
+            <a:ext cx="4297680" cy="274320"/>
+          </a:xfrm>
+          <a:prstGeom prst="rect">
+            <a:avLst/>
+          </a:prstGeom>
+          <a:noFill/>
+        </p:spPr>
+        <p:txBody>
+          <a:bodyPr wrap="square" anchor="t" lIns="0" rIns="0" tIns="0" bIns="0">
+            <a:spAutoFit/>
+          </a:bodyPr>
+          <a:lstStyle/>
+          <a:p>
+            <a:pPr algn="l">
+              <a:spcAft>
+                <a:spcPts val="0"/>
+              </a:spcAft>
+            </a:pPr>
+            <a:r>
+              <a:rPr sz="1050" b="0">
+                <a:solidFill>
+                  <a:srgbClr val="1A1A1A"/>
+                </a:solidFill>
+                <a:latin typeface="Segoe UI"/>
+              </a:rPr>
+              <a:t>cat · grep · an editor</a:t>
+            </a:r>
+          </a:p>
+        </p:txBody>
+      </p:sp>
+      <p:sp>
+        <p:nvSpPr>
+          <p:cNvPr id="16" name="Rectangle 15"/>
           <p:cNvSpPr/>
           <p:nvPr/>
         </p:nvSpPr>
         <p:spPr>
           <a:xfrm>
-            <a:off x="685800" y="4389120"/>
-            <a:ext cx="10835640" cy="1234440"/>
-          </a:xfrm>
-          <a:prstGeom prst="roundRect">
-            <a:avLst>
-              <a:gd name="adj" fmla="val 10000"/>
-            </a:avLst>
+            <a:off x="685800" y="2990088"/>
+            <a:ext cx="10853928" cy="548640"/>
+          </a:xfrm>
+          <a:prstGeom prst="rect">
+            <a:avLst/>
           </a:prstGeom>
           <a:solidFill>
-            <a:srgbClr val="ECECEC"/>
+            <a:srgbClr val="F7F7F7"/>
           </a:solidFill>
-          <a:ln w="12700">
-            <a:solidFill>
-              <a:srgbClr val="3A3A3A"/>
-            </a:solidFill>
+          <a:ln>
+            <a:noFill/>
           </a:ln>
           <a:effectLst/>
         </p:spPr>
@@ -15676,34 +15459,118 @@
           </a:fontRef>
         </p:style>
         <p:txBody>
-          <a:bodyPr rtlCol="0" anchor="ctr" wrap="square" lIns="54864" rIns="54864" tIns="27432" bIns="27432"/>
-          <a:lstStyle/>
-          <a:p>
-            <a:pPr algn="ctr"/>
-            <a:r>
-              <a:rPr sz="1300" b="1">
-                <a:solidFill>
-                  <a:srgbClr val="3A3A3A"/>
-                </a:solidFill>
-                <a:latin typeface="Segoe UI"/>
-              </a:rPr>
-              <a:t>Kept honest</a:t>
-            </a:r>
-          </a:p>
-          <a:p>
-            <a:pPr algn="ctr"/>
+          <a:bodyPr rtlCol="0" anchor="ctr"/>
+          <a:lstStyle/>
+          <a:p>
+            <a:pPr algn="ctr"/>
+          </a:p>
+        </p:txBody>
+      </p:sp>
+      <p:sp>
+        <p:nvSpPr>
+          <p:cNvPr id="17" name="TextBox 16"/>
+          <p:cNvSpPr txBox="1"/>
+          <p:nvPr/>
+        </p:nvSpPr>
+        <p:spPr>
+          <a:xfrm>
+            <a:off x="822960" y="3145536"/>
+            <a:ext cx="1920240" cy="274320"/>
+          </a:xfrm>
+          <a:prstGeom prst="rect">
+            <a:avLst/>
+          </a:prstGeom>
+          <a:noFill/>
+        </p:spPr>
+        <p:txBody>
+          <a:bodyPr wrap="square" anchor="t" lIns="0" rIns="0" tIns="0" bIns="0">
+            <a:spAutoFit/>
+          </a:bodyPr>
+          <a:lstStyle/>
+          <a:p>
+            <a:pPr algn="l">
+              <a:spcAft>
+                <a:spcPts val="0"/>
+              </a:spcAft>
+            </a:pPr>
+            <a:r>
+              <a:rPr sz="1100" b="1">
+                <a:solidFill>
+                  <a:srgbClr val="1A1A1A"/>
+                </a:solidFill>
+                <a:latin typeface="Segoe UI"/>
+              </a:rPr>
+              <a:t>Version</a:t>
+            </a:r>
+          </a:p>
+        </p:txBody>
+      </p:sp>
+      <p:sp>
+        <p:nvSpPr>
+          <p:cNvPr id="18" name="TextBox 17"/>
+          <p:cNvSpPr txBox="1"/>
+          <p:nvPr/>
+        </p:nvSpPr>
+        <p:spPr>
+          <a:xfrm>
+            <a:off x="2788920" y="3145536"/>
+            <a:ext cx="4114800" cy="274320"/>
+          </a:xfrm>
+          <a:prstGeom prst="rect">
+            <a:avLst/>
+          </a:prstGeom>
+          <a:noFill/>
+        </p:spPr>
+        <p:txBody>
+          <a:bodyPr wrap="square" anchor="t" lIns="0" rIns="0" tIns="0" bIns="0">
+            <a:spAutoFit/>
+          </a:bodyPr>
+          <a:lstStyle/>
+          <a:p>
+            <a:pPr algn="l">
+              <a:spcAft>
+                <a:spcPts val="0"/>
+              </a:spcAft>
+            </a:pPr>
             <a:r>
               <a:rPr sz="1050" b="0">
                 <a:solidFill>
-                  <a:srgbClr val="1A1A1A"/>
-                </a:solidFill>
-                <a:latin typeface="Segoe UI"/>
-              </a:rPr>
-              <a:t>~4,000 tests, 0 failing  ·  86% line coverage  ·  Sonar 0 bugs, every function under cognitive complexity 15</a:t>
-            </a:r>
-          </a:p>
-          <a:p>
-            <a:pPr algn="ctr"/>
+                  <a:srgbClr val="6B6B6B"/>
+                </a:solidFill>
+                <a:latin typeface="Segoe UI"/>
+              </a:rPr>
+              <a:t>opaque rows</a:t>
+            </a:r>
+          </a:p>
+        </p:txBody>
+      </p:sp>
+      <p:sp>
+        <p:nvSpPr>
+          <p:cNvPr id="19" name="TextBox 18"/>
+          <p:cNvSpPr txBox="1"/>
+          <p:nvPr/>
+        </p:nvSpPr>
+        <p:spPr>
+          <a:xfrm>
+            <a:off x="7086600" y="3145536"/>
+            <a:ext cx="4297680" cy="274320"/>
+          </a:xfrm>
+          <a:prstGeom prst="rect">
+            <a:avLst/>
+          </a:prstGeom>
+          <a:noFill/>
+        </p:spPr>
+        <p:txBody>
+          <a:bodyPr wrap="square" anchor="t" lIns="0" rIns="0" tIns="0" bIns="0">
+            <a:spAutoFit/>
+          </a:bodyPr>
+          <a:lstStyle/>
+          <a:p>
+            <a:pPr algn="l">
+              <a:spcAft>
+                <a:spcPts val="0"/>
+              </a:spcAft>
+            </a:pPr>
             <a:r>
               <a:rPr sz="1050" b="0">
                 <a:solidFill>
@@ -15711,7 +15578,651 @@
                 </a:solidFill>
                 <a:latin typeface="Segoe UI"/>
               </a:rPr>
-              <a:t>chat and pipeline tool registries are parity-tested  ·  uv.lock pinned and shipped  ·  CycloneDX SBOM in CI</a:t>
+              <a:t>git-diffable; hardlink snapshots + revert endpoint</a:t>
+            </a:r>
+          </a:p>
+        </p:txBody>
+      </p:sp>
+      <p:sp>
+        <p:nvSpPr>
+          <p:cNvPr id="20" name="Rectangle 19"/>
+          <p:cNvSpPr/>
+          <p:nvPr/>
+        </p:nvSpPr>
+        <p:spPr>
+          <a:xfrm>
+            <a:off x="685800" y="3593592"/>
+            <a:ext cx="10853928" cy="548640"/>
+          </a:xfrm>
+          <a:prstGeom prst="rect">
+            <a:avLst/>
+          </a:prstGeom>
+          <a:solidFill>
+            <a:srgbClr val="FFFFFF"/>
+          </a:solidFill>
+          <a:ln>
+            <a:noFill/>
+          </a:ln>
+          <a:effectLst/>
+        </p:spPr>
+        <p:style>
+          <a:lnRef idx="1">
+            <a:schemeClr val="accent1"/>
+          </a:lnRef>
+          <a:fillRef idx="3">
+            <a:schemeClr val="accent1"/>
+          </a:fillRef>
+          <a:effectRef idx="2">
+            <a:schemeClr val="accent1"/>
+          </a:effectRef>
+          <a:fontRef idx="minor">
+            <a:schemeClr val="lt1"/>
+          </a:fontRef>
+        </p:style>
+        <p:txBody>
+          <a:bodyPr rtlCol="0" anchor="ctr"/>
+          <a:lstStyle/>
+          <a:p>
+            <a:pPr algn="ctr"/>
+          </a:p>
+        </p:txBody>
+      </p:sp>
+      <p:sp>
+        <p:nvSpPr>
+          <p:cNvPr id="21" name="TextBox 20"/>
+          <p:cNvSpPr txBox="1"/>
+          <p:nvPr/>
+        </p:nvSpPr>
+        <p:spPr>
+          <a:xfrm>
+            <a:off x="822960" y="3749040"/>
+            <a:ext cx="1920240" cy="274320"/>
+          </a:xfrm>
+          <a:prstGeom prst="rect">
+            <a:avLst/>
+          </a:prstGeom>
+          <a:noFill/>
+        </p:spPr>
+        <p:txBody>
+          <a:bodyPr wrap="square" anchor="t" lIns="0" rIns="0" tIns="0" bIns="0">
+            <a:spAutoFit/>
+          </a:bodyPr>
+          <a:lstStyle/>
+          <a:p>
+            <a:pPr algn="l">
+              <a:spcAft>
+                <a:spcPts val="0"/>
+              </a:spcAft>
+            </a:pPr>
+            <a:r>
+              <a:rPr sz="1100" b="1">
+                <a:solidFill>
+                  <a:srgbClr val="1A1A1A"/>
+                </a:solidFill>
+                <a:latin typeface="Segoe UI"/>
+              </a:rPr>
+              <a:t>Move a machine</a:t>
+            </a:r>
+          </a:p>
+        </p:txBody>
+      </p:sp>
+      <p:sp>
+        <p:nvSpPr>
+          <p:cNvPr id="22" name="TextBox 21"/>
+          <p:cNvSpPr txBox="1"/>
+          <p:nvPr/>
+        </p:nvSpPr>
+        <p:spPr>
+          <a:xfrm>
+            <a:off x="2788920" y="3749040"/>
+            <a:ext cx="4114800" cy="274320"/>
+          </a:xfrm>
+          <a:prstGeom prst="rect">
+            <a:avLst/>
+          </a:prstGeom>
+          <a:noFill/>
+        </p:spPr>
+        <p:txBody>
+          <a:bodyPr wrap="square" anchor="t" lIns="0" rIns="0" tIns="0" bIns="0">
+            <a:spAutoFit/>
+          </a:bodyPr>
+          <a:lstStyle/>
+          <a:p>
+            <a:pPr algn="l">
+              <a:spcAft>
+                <a:spcPts val="0"/>
+              </a:spcAft>
+            </a:pPr>
+            <a:r>
+              <a:rPr sz="1050" b="0">
+                <a:solidFill>
+                  <a:srgbClr val="6B6B6B"/>
+                </a:solidFill>
+                <a:latin typeface="Segoe UI"/>
+              </a:rPr>
+              <a:t>dump and restore</a:t>
+            </a:r>
+          </a:p>
+        </p:txBody>
+      </p:sp>
+      <p:sp>
+        <p:nvSpPr>
+          <p:cNvPr id="23" name="TextBox 22"/>
+          <p:cNvSpPr txBox="1"/>
+          <p:nvPr/>
+        </p:nvSpPr>
+        <p:spPr>
+          <a:xfrm>
+            <a:off x="7086600" y="3749040"/>
+            <a:ext cx="4297680" cy="274320"/>
+          </a:xfrm>
+          <a:prstGeom prst="rect">
+            <a:avLst/>
+          </a:prstGeom>
+          <a:noFill/>
+        </p:spPr>
+        <p:txBody>
+          <a:bodyPr wrap="square" anchor="t" lIns="0" rIns="0" tIns="0" bIns="0">
+            <a:spAutoFit/>
+          </a:bodyPr>
+          <a:lstStyle/>
+          <a:p>
+            <a:pPr algn="l">
+              <a:spcAft>
+                <a:spcPts val="0"/>
+              </a:spcAft>
+            </a:pPr>
+            <a:r>
+              <a:rPr sz="1050" b="0">
+                <a:solidFill>
+                  <a:srgbClr val="1A1A1A"/>
+                </a:solidFill>
+                <a:latin typeface="Segoe UI"/>
+              </a:rPr>
+              <a:t>copy a folder</a:t>
+            </a:r>
+          </a:p>
+        </p:txBody>
+      </p:sp>
+      <p:sp>
+        <p:nvSpPr>
+          <p:cNvPr id="24" name="Rectangle 23"/>
+          <p:cNvSpPr/>
+          <p:nvPr/>
+        </p:nvSpPr>
+        <p:spPr>
+          <a:xfrm>
+            <a:off x="685800" y="4197096"/>
+            <a:ext cx="10853928" cy="548640"/>
+          </a:xfrm>
+          <a:prstGeom prst="rect">
+            <a:avLst/>
+          </a:prstGeom>
+          <a:solidFill>
+            <a:srgbClr val="F7F7F7"/>
+          </a:solidFill>
+          <a:ln>
+            <a:noFill/>
+          </a:ln>
+          <a:effectLst/>
+        </p:spPr>
+        <p:style>
+          <a:lnRef idx="1">
+            <a:schemeClr val="accent1"/>
+          </a:lnRef>
+          <a:fillRef idx="3">
+            <a:schemeClr val="accent1"/>
+          </a:fillRef>
+          <a:effectRef idx="2">
+            <a:schemeClr val="accent1"/>
+          </a:effectRef>
+          <a:fontRef idx="minor">
+            <a:schemeClr val="lt1"/>
+          </a:fontRef>
+        </p:style>
+        <p:txBody>
+          <a:bodyPr rtlCol="0" anchor="ctr"/>
+          <a:lstStyle/>
+          <a:p>
+            <a:pPr algn="ctr"/>
+          </a:p>
+        </p:txBody>
+      </p:sp>
+      <p:sp>
+        <p:nvSpPr>
+          <p:cNvPr id="25" name="TextBox 24"/>
+          <p:cNvSpPr txBox="1"/>
+          <p:nvPr/>
+        </p:nvSpPr>
+        <p:spPr>
+          <a:xfrm>
+            <a:off x="822960" y="4352544"/>
+            <a:ext cx="1920240" cy="274320"/>
+          </a:xfrm>
+          <a:prstGeom prst="rect">
+            <a:avLst/>
+          </a:prstGeom>
+          <a:noFill/>
+        </p:spPr>
+        <p:txBody>
+          <a:bodyPr wrap="square" anchor="t" lIns="0" rIns="0" tIns="0" bIns="0">
+            <a:spAutoFit/>
+          </a:bodyPr>
+          <a:lstStyle/>
+          <a:p>
+            <a:pPr algn="l">
+              <a:spcAft>
+                <a:spcPts val="0"/>
+              </a:spcAft>
+            </a:pPr>
+            <a:r>
+              <a:rPr sz="1100" b="1">
+                <a:solidFill>
+                  <a:srgbClr val="1A1A1A"/>
+                </a:solidFill>
+                <a:latin typeface="Segoe UI"/>
+              </a:rPr>
+              <a:t>Delete</a:t>
+            </a:r>
+          </a:p>
+        </p:txBody>
+      </p:sp>
+      <p:sp>
+        <p:nvSpPr>
+          <p:cNvPr id="26" name="TextBox 25"/>
+          <p:cNvSpPr txBox="1"/>
+          <p:nvPr/>
+        </p:nvSpPr>
+        <p:spPr>
+          <a:xfrm>
+            <a:off x="2788920" y="4352544"/>
+            <a:ext cx="4114800" cy="274320"/>
+          </a:xfrm>
+          <a:prstGeom prst="rect">
+            <a:avLst/>
+          </a:prstGeom>
+          <a:noFill/>
+        </p:spPr>
+        <p:txBody>
+          <a:bodyPr wrap="square" anchor="t" lIns="0" rIns="0" tIns="0" bIns="0">
+            <a:spAutoFit/>
+          </a:bodyPr>
+          <a:lstStyle/>
+          <a:p>
+            <a:pPr algn="l">
+              <a:spcAft>
+                <a:spcPts val="0"/>
+              </a:spcAft>
+            </a:pPr>
+            <a:r>
+              <a:rPr sz="1050" b="0">
+                <a:solidFill>
+                  <a:srgbClr val="6B6B6B"/>
+                </a:solidFill>
+                <a:latin typeface="Segoe UI"/>
+              </a:rPr>
+              <a:t>hope the rows are gone</a:t>
+            </a:r>
+          </a:p>
+        </p:txBody>
+      </p:sp>
+      <p:sp>
+        <p:nvSpPr>
+          <p:cNvPr id="27" name="TextBox 26"/>
+          <p:cNvSpPr txBox="1"/>
+          <p:nvPr/>
+        </p:nvSpPr>
+        <p:spPr>
+          <a:xfrm>
+            <a:off x="7086600" y="4352544"/>
+            <a:ext cx="4297680" cy="274320"/>
+          </a:xfrm>
+          <a:prstGeom prst="rect">
+            <a:avLst/>
+          </a:prstGeom>
+          <a:noFill/>
+        </p:spPr>
+        <p:txBody>
+          <a:bodyPr wrap="square" anchor="t" lIns="0" rIns="0" tIns="0" bIns="0">
+            <a:spAutoFit/>
+          </a:bodyPr>
+          <a:lstStyle/>
+          <a:p>
+            <a:pPr algn="l">
+              <a:spcAft>
+                <a:spcPts val="0"/>
+              </a:spcAft>
+            </a:pPr>
+            <a:r>
+              <a:rPr sz="1050" b="0">
+                <a:solidFill>
+                  <a:srgbClr val="1A1A1A"/>
+                </a:solidFill>
+                <a:latin typeface="Segoe UI"/>
+              </a:rPr>
+              <a:t>delete the folder — there is no second copy</a:t>
+            </a:r>
+          </a:p>
+        </p:txBody>
+      </p:sp>
+      <p:sp>
+        <p:nvSpPr>
+          <p:cNvPr id="28" name="Rectangle 27"/>
+          <p:cNvSpPr/>
+          <p:nvPr/>
+        </p:nvSpPr>
+        <p:spPr>
+          <a:xfrm>
+            <a:off x="685800" y="4800600"/>
+            <a:ext cx="10853928" cy="548640"/>
+          </a:xfrm>
+          <a:prstGeom prst="rect">
+            <a:avLst/>
+          </a:prstGeom>
+          <a:solidFill>
+            <a:srgbClr val="FFFFFF"/>
+          </a:solidFill>
+          <a:ln>
+            <a:noFill/>
+          </a:ln>
+          <a:effectLst/>
+        </p:spPr>
+        <p:style>
+          <a:lnRef idx="1">
+            <a:schemeClr val="accent1"/>
+          </a:lnRef>
+          <a:fillRef idx="3">
+            <a:schemeClr val="accent1"/>
+          </a:fillRef>
+          <a:effectRef idx="2">
+            <a:schemeClr val="accent1"/>
+          </a:effectRef>
+          <a:fontRef idx="minor">
+            <a:schemeClr val="lt1"/>
+          </a:fontRef>
+        </p:style>
+        <p:txBody>
+          <a:bodyPr rtlCol="0" anchor="ctr"/>
+          <a:lstStyle/>
+          <a:p>
+            <a:pPr algn="ctr"/>
+          </a:p>
+        </p:txBody>
+      </p:sp>
+      <p:sp>
+        <p:nvSpPr>
+          <p:cNvPr id="29" name="TextBox 28"/>
+          <p:cNvSpPr txBox="1"/>
+          <p:nvPr/>
+        </p:nvSpPr>
+        <p:spPr>
+          <a:xfrm>
+            <a:off x="822960" y="4956048"/>
+            <a:ext cx="1920240" cy="274320"/>
+          </a:xfrm>
+          <a:prstGeom prst="rect">
+            <a:avLst/>
+          </a:prstGeom>
+          <a:noFill/>
+        </p:spPr>
+        <p:txBody>
+          <a:bodyPr wrap="square" anchor="t" lIns="0" rIns="0" tIns="0" bIns="0">
+            <a:spAutoFit/>
+          </a:bodyPr>
+          <a:lstStyle/>
+          <a:p>
+            <a:pPr algn="l">
+              <a:spcAft>
+                <a:spcPts val="0"/>
+              </a:spcAft>
+            </a:pPr>
+            <a:r>
+              <a:rPr sz="1100" b="1">
+                <a:solidFill>
+                  <a:srgbClr val="1A1A1A"/>
+                </a:solidFill>
+                <a:latin typeface="Segoe UI"/>
+              </a:rPr>
+              <a:t>Model</a:t>
+            </a:r>
+          </a:p>
+        </p:txBody>
+      </p:sp>
+      <p:sp>
+        <p:nvSpPr>
+          <p:cNvPr id="30" name="TextBox 29"/>
+          <p:cNvSpPr txBox="1"/>
+          <p:nvPr/>
+        </p:nvSpPr>
+        <p:spPr>
+          <a:xfrm>
+            <a:off x="2788920" y="4956048"/>
+            <a:ext cx="4114800" cy="274320"/>
+          </a:xfrm>
+          <a:prstGeom prst="rect">
+            <a:avLst/>
+          </a:prstGeom>
+          <a:noFill/>
+        </p:spPr>
+        <p:txBody>
+          <a:bodyPr wrap="square" anchor="t" lIns="0" rIns="0" tIns="0" bIns="0">
+            <a:spAutoFit/>
+          </a:bodyPr>
+          <a:lstStyle/>
+          <a:p>
+            <a:pPr algn="l">
+              <a:spcAft>
+                <a:spcPts val="0"/>
+              </a:spcAft>
+            </a:pPr>
+            <a:r>
+              <a:rPr sz="1050" b="0">
+                <a:solidFill>
+                  <a:srgbClr val="6B6B6B"/>
+                </a:solidFill>
+                <a:latin typeface="Segoe UI"/>
+              </a:rPr>
+              <a:t>vendor function-calling required</a:t>
+            </a:r>
+          </a:p>
+        </p:txBody>
+      </p:sp>
+      <p:sp>
+        <p:nvSpPr>
+          <p:cNvPr id="31" name="TextBox 30"/>
+          <p:cNvSpPr txBox="1"/>
+          <p:nvPr/>
+        </p:nvSpPr>
+        <p:spPr>
+          <a:xfrm>
+            <a:off x="7086600" y="4956048"/>
+            <a:ext cx="4297680" cy="274320"/>
+          </a:xfrm>
+          <a:prstGeom prst="rect">
+            <a:avLst/>
+          </a:prstGeom>
+          <a:noFill/>
+        </p:spPr>
+        <p:txBody>
+          <a:bodyPr wrap="square" anchor="t" lIns="0" rIns="0" tIns="0" bIns="0">
+            <a:spAutoFit/>
+          </a:bodyPr>
+          <a:lstStyle/>
+          <a:p>
+            <a:pPr algn="l">
+              <a:spcAft>
+                <a:spcPts val="0"/>
+              </a:spcAft>
+            </a:pPr>
+            <a:r>
+              <a:rPr sz="1050" b="0">
+                <a:solidFill>
+                  <a:srgbClr val="1A1A1A"/>
+                </a:solidFill>
+                <a:latin typeface="Segoe UI"/>
+              </a:rPr>
+              <a:t>plain-text ReAct — any model drives it</a:t>
+            </a:r>
+          </a:p>
+        </p:txBody>
+      </p:sp>
+      <p:sp>
+        <p:nvSpPr>
+          <p:cNvPr id="32" name="Rectangle 31"/>
+          <p:cNvSpPr/>
+          <p:nvPr/>
+        </p:nvSpPr>
+        <p:spPr>
+          <a:xfrm>
+            <a:off x="685800" y="5404104"/>
+            <a:ext cx="10853928" cy="548640"/>
+          </a:xfrm>
+          <a:prstGeom prst="rect">
+            <a:avLst/>
+          </a:prstGeom>
+          <a:solidFill>
+            <a:srgbClr val="F7F7F7"/>
+          </a:solidFill>
+          <a:ln>
+            <a:noFill/>
+          </a:ln>
+          <a:effectLst/>
+        </p:spPr>
+        <p:style>
+          <a:lnRef idx="1">
+            <a:schemeClr val="accent1"/>
+          </a:lnRef>
+          <a:fillRef idx="3">
+            <a:schemeClr val="accent1"/>
+          </a:fillRef>
+          <a:effectRef idx="2">
+            <a:schemeClr val="accent1"/>
+          </a:effectRef>
+          <a:fontRef idx="minor">
+            <a:schemeClr val="lt1"/>
+          </a:fontRef>
+        </p:style>
+        <p:txBody>
+          <a:bodyPr rtlCol="0" anchor="ctr"/>
+          <a:lstStyle/>
+          <a:p>
+            <a:pPr algn="ctr"/>
+          </a:p>
+        </p:txBody>
+      </p:sp>
+      <p:sp>
+        <p:nvSpPr>
+          <p:cNvPr id="33" name="TextBox 32"/>
+          <p:cNvSpPr txBox="1"/>
+          <p:nvPr/>
+        </p:nvSpPr>
+        <p:spPr>
+          <a:xfrm>
+            <a:off x="822960" y="5559552"/>
+            <a:ext cx="1920240" cy="274320"/>
+          </a:xfrm>
+          <a:prstGeom prst="rect">
+            <a:avLst/>
+          </a:prstGeom>
+          <a:noFill/>
+        </p:spPr>
+        <p:txBody>
+          <a:bodyPr wrap="square" anchor="t" lIns="0" rIns="0" tIns="0" bIns="0">
+            <a:spAutoFit/>
+          </a:bodyPr>
+          <a:lstStyle/>
+          <a:p>
+            <a:pPr algn="l">
+              <a:spcAft>
+                <a:spcPts val="0"/>
+              </a:spcAft>
+            </a:pPr>
+            <a:r>
+              <a:rPr sz="1100" b="1">
+                <a:solidFill>
+                  <a:srgbClr val="1A1A1A"/>
+                </a:solidFill>
+                <a:latin typeface="Segoe UI"/>
+              </a:rPr>
+              <a:t>Telemetry</a:t>
+            </a:r>
+          </a:p>
+        </p:txBody>
+      </p:sp>
+      <p:sp>
+        <p:nvSpPr>
+          <p:cNvPr id="34" name="TextBox 33"/>
+          <p:cNvSpPr txBox="1"/>
+          <p:nvPr/>
+        </p:nvSpPr>
+        <p:spPr>
+          <a:xfrm>
+            <a:off x="2788920" y="5559552"/>
+            <a:ext cx="4114800" cy="274320"/>
+          </a:xfrm>
+          <a:prstGeom prst="rect">
+            <a:avLst/>
+          </a:prstGeom>
+          <a:noFill/>
+        </p:spPr>
+        <p:txBody>
+          <a:bodyPr wrap="square" anchor="t" lIns="0" rIns="0" tIns="0" bIns="0">
+            <a:spAutoFit/>
+          </a:bodyPr>
+          <a:lstStyle/>
+          <a:p>
+            <a:pPr algn="l">
+              <a:spcAft>
+                <a:spcPts val="0"/>
+              </a:spcAft>
+            </a:pPr>
+            <a:r>
+              <a:rPr sz="1050" b="0">
+                <a:solidFill>
+                  <a:srgbClr val="6B6B6B"/>
+                </a:solidFill>
+                <a:latin typeface="Segoe UI"/>
+              </a:rPr>
+              <a:t>usually on by default</a:t>
+            </a:r>
+          </a:p>
+        </p:txBody>
+      </p:sp>
+      <p:sp>
+        <p:nvSpPr>
+          <p:cNvPr id="35" name="TextBox 34"/>
+          <p:cNvSpPr txBox="1"/>
+          <p:nvPr/>
+        </p:nvSpPr>
+        <p:spPr>
+          <a:xfrm>
+            <a:off x="7086600" y="5559552"/>
+            <a:ext cx="4297680" cy="274320"/>
+          </a:xfrm>
+          <a:prstGeom prst="rect">
+            <a:avLst/>
+          </a:prstGeom>
+          <a:noFill/>
+        </p:spPr>
+        <p:txBody>
+          <a:bodyPr wrap="square" anchor="t" lIns="0" rIns="0" tIns="0" bIns="0">
+            <a:spAutoFit/>
+          </a:bodyPr>
+          <a:lstStyle/>
+          <a:p>
+            <a:pPr algn="l">
+              <a:spcAft>
+                <a:spcPts val="0"/>
+              </a:spcAft>
+            </a:pPr>
+            <a:r>
+              <a:rPr sz="1050" b="0">
+                <a:solidFill>
+                  <a:srgbClr val="1A1A1A"/>
+                </a:solidFill>
+                <a:latin typeface="Segoe UI"/>
+              </a:rPr>
+              <a:t>none, and none in the lock</a:t>
             </a:r>
           </a:p>
         </p:txBody>
@@ -15768,14 +16279,53 @@
                 </a:solidFill>
                 <a:latin typeface="Segoe UI"/>
               </a:rPr>
-              <a:t>In one slide</a:t>
-            </a:r>
-          </a:p>
-        </p:txBody>
-      </p:sp>
-      <p:sp>
-        <p:nvSpPr>
-          <p:cNvPr id="3" name="Rectangle 2"/>
+              <a:t>How to deploy it</a:t>
+            </a:r>
+          </a:p>
+        </p:txBody>
+      </p:sp>
+      <p:sp>
+        <p:nvSpPr>
+          <p:cNvPr id="3" name="TextBox 2"/>
+          <p:cNvSpPr txBox="1"/>
+          <p:nvPr/>
+        </p:nvSpPr>
+        <p:spPr>
+          <a:xfrm>
+            <a:off x="548640" y="841248"/>
+            <a:ext cx="11155680" cy="292608"/>
+          </a:xfrm>
+          <a:prstGeom prst="rect">
+            <a:avLst/>
+          </a:prstGeom>
+          <a:noFill/>
+        </p:spPr>
+        <p:txBody>
+          <a:bodyPr wrap="square" anchor="t" lIns="0" rIns="0" tIns="0" bIns="0">
+            <a:spAutoFit/>
+          </a:bodyPr>
+          <a:lstStyle/>
+          <a:p>
+            <a:pPr algn="l">
+              <a:spcAft>
+                <a:spcPts val="0"/>
+              </a:spcAft>
+            </a:pPr>
+            <a:r>
+              <a:rPr sz="1250" b="0">
+                <a:solidFill>
+                  <a:srgbClr val="6B6B6B"/>
+                </a:solidFill>
+                <a:latin typeface="Segoe UI"/>
+              </a:rPr>
+              <a:t>Zero-Docker is a first-class mode, not a degraded one.</a:t>
+            </a:r>
+          </a:p>
+        </p:txBody>
+      </p:sp>
+      <p:sp>
+        <p:nvSpPr>
+          <p:cNvPr id="4" name="Rectangle 3"/>
           <p:cNvSpPr/>
           <p:nvPr/>
         </p:nvSpPr>
@@ -15819,7 +16369,46 @@
       </p:sp>
       <p:sp>
         <p:nvSpPr>
-          <p:cNvPr id="4" name="TextBox 3"/>
+          <p:cNvPr id="5" name="TextBox 4"/>
+          <p:cNvSpPr txBox="1"/>
+          <p:nvPr/>
+        </p:nvSpPr>
+        <p:spPr>
+          <a:xfrm>
+            <a:off x="548640" y="6327648"/>
+            <a:ext cx="9692640" cy="320040"/>
+          </a:xfrm>
+          <a:prstGeom prst="rect">
+            <a:avLst/>
+          </a:prstGeom>
+          <a:noFill/>
+        </p:spPr>
+        <p:txBody>
+          <a:bodyPr wrap="square" anchor="t" lIns="0" rIns="0" tIns="0" bIns="0">
+            <a:spAutoFit/>
+          </a:bodyPr>
+          <a:lstStyle/>
+          <a:p>
+            <a:pPr algn="l">
+              <a:spcAft>
+                <a:spcPts val="0"/>
+              </a:spcAft>
+            </a:pPr>
+            <a:r>
+              <a:rPr sz="950" b="0">
+                <a:solidFill>
+                  <a:srgbClr val="6B6B6B"/>
+                </a:solidFill>
+                <a:latin typeface="Segoe UI"/>
+              </a:rPr>
+              <a:t>One service, one port, one folder of state. Moving a machine is copying ~/.aiforge/.</a:t>
+            </a:r>
+          </a:p>
+        </p:txBody>
+      </p:sp>
+      <p:sp>
+        <p:nvSpPr>
+          <p:cNvPr id="6" name="TextBox 5"/>
           <p:cNvSpPr txBox="1"/>
           <p:nvPr/>
         </p:nvSpPr>
@@ -15858,14 +16447,113 @@
       </p:sp>
       <p:sp>
         <p:nvSpPr>
-          <p:cNvPr id="5" name="Rounded Rectangle 4"/>
+          <p:cNvPr id="7" name="Rounded Rectangle 6"/>
           <p:cNvSpPr/>
           <p:nvPr/>
         </p:nvSpPr>
         <p:spPr>
           <a:xfrm>
             <a:off x="685800" y="1554480"/>
-            <a:ext cx="5321808" cy="1143000"/>
+            <a:ext cx="3383280" cy="1737360"/>
+          </a:xfrm>
+          <a:prstGeom prst="roundRect">
+            <a:avLst>
+              <a:gd name="adj" fmla="val 10000"/>
+            </a:avLst>
+          </a:prstGeom>
+          <a:solidFill>
+            <a:srgbClr val="DCEEE7"/>
+          </a:solidFill>
+          <a:ln w="12700">
+            <a:solidFill>
+              <a:srgbClr val="1E6B52"/>
+            </a:solidFill>
+          </a:ln>
+          <a:effectLst/>
+        </p:spPr>
+        <p:style>
+          <a:lnRef idx="1">
+            <a:schemeClr val="accent1"/>
+          </a:lnRef>
+          <a:fillRef idx="3">
+            <a:schemeClr val="accent1"/>
+          </a:fillRef>
+          <a:effectRef idx="2">
+            <a:schemeClr val="accent1"/>
+          </a:effectRef>
+          <a:fontRef idx="minor">
+            <a:schemeClr val="lt1"/>
+          </a:fontRef>
+        </p:style>
+        <p:txBody>
+          <a:bodyPr rtlCol="0" anchor="ctr" wrap="square" lIns="54864" rIns="54864" tIns="27432" bIns="27432"/>
+          <a:lstStyle/>
+          <a:p>
+            <a:pPr algn="ctr"/>
+            <a:r>
+              <a:rPr sz="1700" b="1">
+                <a:solidFill>
+                  <a:srgbClr val="1E6B52"/>
+                </a:solidFill>
+                <a:latin typeface="Segoe UI"/>
+              </a:rPr>
+              <a:t>Laptop</a:t>
+            </a:r>
+          </a:p>
+          <a:p>
+            <a:pPr algn="ctr"/>
+          </a:p>
+          <a:p>
+            <a:pPr algn="ctr"/>
+            <a:r>
+              <a:rPr sz="1050" b="0">
+                <a:solidFill>
+                  <a:srgbClr val="1A1A1A"/>
+                </a:solidFill>
+                <a:latin typeface="Segoe UI"/>
+              </a:rPr>
+              <a:t>./run.sh</a:t>
+            </a:r>
+          </a:p>
+          <a:p>
+            <a:pPr algn="ctr"/>
+          </a:p>
+          <a:p>
+            <a:pPr algn="ctr"/>
+            <a:r>
+              <a:rPr sz="1050" b="0">
+                <a:solidFill>
+                  <a:srgbClr val="1A1A1A"/>
+                </a:solidFill>
+                <a:latin typeface="Segoe UI"/>
+              </a:rPr>
+              <a:t>everything local</a:t>
+            </a:r>
+          </a:p>
+          <a:p>
+            <a:pPr algn="ctr"/>
+            <a:r>
+              <a:rPr sz="1050" b="0">
+                <a:solidFill>
+                  <a:srgbClr val="1A1A1A"/>
+                </a:solidFill>
+                <a:latin typeface="Segoe UI"/>
+              </a:rPr>
+              <a:t>unset admin URL = you are the admin</a:t>
+            </a:r>
+          </a:p>
+        </p:txBody>
+      </p:sp>
+      <p:sp>
+        <p:nvSpPr>
+          <p:cNvPr id="8" name="Rounded Rectangle 7"/>
+          <p:cNvSpPr/>
+          <p:nvPr/>
+        </p:nvSpPr>
+        <p:spPr>
+          <a:xfrm>
+            <a:off x="4361687" y="1554480"/>
+            <a:ext cx="3383280" cy="1737360"/>
           </a:xfrm>
           <a:prstGeom prst="roundRect">
             <a:avLst>
@@ -15902,244 +16590,55 @@
           <a:p>
             <a:pPr algn="ctr"/>
             <a:r>
-              <a:rPr sz="1500" b="1">
+              <a:rPr sz="1700" b="1">
                 <a:solidFill>
                   <a:srgbClr val="1F4E79"/>
                 </a:solidFill>
                 <a:latin typeface="Segoe UI"/>
               </a:rPr>
-              <a:t>One process</a:t>
-            </a:r>
-          </a:p>
-          <a:p>
-            <a:pPr algn="ctr"/>
-          </a:p>
-          <a:p>
-            <a:pPr algn="ctr"/>
-            <a:r>
-              <a:rPr sz="1100" b="0">
-                <a:solidFill>
-                  <a:srgbClr val="1A1A1A"/>
-                </a:solidFill>
-                <a:latin typeface="Segoe UI"/>
-              </a:rPr>
-              <a:t>FastAPI on 8799; every engine is a library inside it</a:t>
-            </a:r>
-          </a:p>
-        </p:txBody>
-      </p:sp>
-      <p:sp>
-        <p:nvSpPr>
-          <p:cNvPr id="6" name="Rounded Rectangle 5"/>
-          <p:cNvSpPr/>
-          <p:nvPr/>
-        </p:nvSpPr>
-        <p:spPr>
-          <a:xfrm>
-            <a:off x="6217920" y="1554480"/>
-            <a:ext cx="5321808" cy="1143000"/>
-          </a:xfrm>
-          <a:prstGeom prst="roundRect">
-            <a:avLst>
-              <a:gd name="adj" fmla="val 10000"/>
-            </a:avLst>
-          </a:prstGeom>
-          <a:solidFill>
-            <a:srgbClr val="DCEEE7"/>
-          </a:solidFill>
-          <a:ln w="12700">
-            <a:solidFill>
-              <a:srgbClr val="1E6B52"/>
-            </a:solidFill>
-          </a:ln>
-          <a:effectLst/>
-        </p:spPr>
-        <p:style>
-          <a:lnRef idx="1">
-            <a:schemeClr val="accent1"/>
-          </a:lnRef>
-          <a:fillRef idx="3">
-            <a:schemeClr val="accent1"/>
-          </a:fillRef>
-          <a:effectRef idx="2">
-            <a:schemeClr val="accent1"/>
-          </a:effectRef>
-          <a:fontRef idx="minor">
-            <a:schemeClr val="lt1"/>
-          </a:fontRef>
-        </p:style>
-        <p:txBody>
-          <a:bodyPr rtlCol="0" anchor="ctr" wrap="square" lIns="54864" rIns="54864" tIns="27432" bIns="27432"/>
-          <a:lstStyle/>
-          <a:p>
-            <a:pPr algn="ctr"/>
-            <a:r>
-              <a:rPr sz="1500" b="1">
-                <a:solidFill>
-                  <a:srgbClr val="1E6B52"/>
-                </a:solidFill>
-                <a:latin typeface="Segoe UI"/>
-              </a:rPr>
-              <a:t>Two ways in</a:t>
-            </a:r>
-          </a:p>
-          <a:p>
-            <a:pPr algn="ctr"/>
-          </a:p>
-          <a:p>
-            <a:pPr algn="ctr"/>
-            <a:r>
-              <a:rPr sz="1100" b="0">
-                <a:solidFill>
-                  <a:srgbClr val="1A1A1A"/>
-                </a:solidFill>
-                <a:latin typeface="Segoe UI"/>
-              </a:rPr>
-              <a:t>a ticket becomes a PR, or you chat with the filesystem</a:t>
-            </a:r>
-          </a:p>
-        </p:txBody>
-      </p:sp>
-      <p:sp>
-        <p:nvSpPr>
-          <p:cNvPr id="7" name="Rounded Rectangle 6"/>
-          <p:cNvSpPr/>
-          <p:nvPr/>
-        </p:nvSpPr>
-        <p:spPr>
-          <a:xfrm>
-            <a:off x="685800" y="2971800"/>
-            <a:ext cx="5321808" cy="1143000"/>
-          </a:xfrm>
-          <a:prstGeom prst="roundRect">
-            <a:avLst>
-              <a:gd name="adj" fmla="val 10000"/>
-            </a:avLst>
-          </a:prstGeom>
-          <a:solidFill>
-            <a:srgbClr val="DCEEE7"/>
-          </a:solidFill>
-          <a:ln w="12700">
-            <a:solidFill>
-              <a:srgbClr val="1E6B52"/>
-            </a:solidFill>
-          </a:ln>
-          <a:effectLst/>
-        </p:spPr>
-        <p:style>
-          <a:lnRef idx="1">
-            <a:schemeClr val="accent1"/>
-          </a:lnRef>
-          <a:fillRef idx="3">
-            <a:schemeClr val="accent1"/>
-          </a:fillRef>
-          <a:effectRef idx="2">
-            <a:schemeClr val="accent1"/>
-          </a:effectRef>
-          <a:fontRef idx="minor">
-            <a:schemeClr val="lt1"/>
-          </a:fontRef>
-        </p:style>
-        <p:txBody>
-          <a:bodyPr rtlCol="0" anchor="ctr" wrap="square" lIns="54864" rIns="54864" tIns="27432" bIns="27432"/>
-          <a:lstStyle/>
-          <a:p>
-            <a:pPr algn="ctr"/>
-            <a:r>
-              <a:rPr sz="1500" b="1">
-                <a:solidFill>
-                  <a:srgbClr val="1E6B52"/>
-                </a:solidFill>
-                <a:latin typeface="Segoe UI"/>
-              </a:rPr>
-              <a:t>Three chat modes</a:t>
-            </a:r>
-          </a:p>
-          <a:p>
-            <a:pPr algn="ctr"/>
-          </a:p>
-          <a:p>
-            <a:pPr algn="ctr"/>
-            <a:r>
-              <a:rPr sz="1100" b="0">
-                <a:solidFill>
-                  <a:srgbClr val="1A1A1A"/>
-                </a:solidFill>
-                <a:latin typeface="Segoe UI"/>
-              </a:rPr>
-              <a:t>Simple writes, Plan is read-only, Team is the pipeline</a:t>
-            </a:r>
-          </a:p>
-        </p:txBody>
-      </p:sp>
-      <p:sp>
-        <p:nvSpPr>
-          <p:cNvPr id="8" name="Rounded Rectangle 7"/>
-          <p:cNvSpPr/>
-          <p:nvPr/>
-        </p:nvSpPr>
-        <p:spPr>
-          <a:xfrm>
-            <a:off x="6217920" y="2971800"/>
-            <a:ext cx="5321808" cy="1143000"/>
-          </a:xfrm>
-          <a:prstGeom prst="roundRect">
-            <a:avLst>
-              <a:gd name="adj" fmla="val 10000"/>
-            </a:avLst>
-          </a:prstGeom>
-          <a:solidFill>
-            <a:srgbClr val="F7ECD5"/>
-          </a:solidFill>
-          <a:ln w="12700">
-            <a:solidFill>
-              <a:srgbClr val="8A5A00"/>
-            </a:solidFill>
-          </a:ln>
-          <a:effectLst/>
-        </p:spPr>
-        <p:style>
-          <a:lnRef idx="1">
-            <a:schemeClr val="accent1"/>
-          </a:lnRef>
-          <a:fillRef idx="3">
-            <a:schemeClr val="accent1"/>
-          </a:fillRef>
-          <a:effectRef idx="2">
-            <a:schemeClr val="accent1"/>
-          </a:effectRef>
-          <a:fontRef idx="minor">
-            <a:schemeClr val="lt1"/>
-          </a:fontRef>
-        </p:style>
-        <p:txBody>
-          <a:bodyPr rtlCol="0" anchor="ctr" wrap="square" lIns="54864" rIns="54864" tIns="27432" bIns="27432"/>
-          <a:lstStyle/>
-          <a:p>
-            <a:pPr algn="ctr"/>
-            <a:r>
-              <a:rPr sz="1500" b="1">
-                <a:solidFill>
-                  <a:srgbClr val="8A5A00"/>
-                </a:solidFill>
-                <a:latin typeface="Segoe UI"/>
-              </a:rPr>
-              <a:t>Memory is a folder</a:t>
-            </a:r>
-          </a:p>
-          <a:p>
-            <a:pPr algn="ctr"/>
-          </a:p>
-          <a:p>
-            <a:pPr algn="ctr"/>
-            <a:r>
-              <a:rPr sz="1100" b="0">
-                <a:solidFill>
-                  <a:srgbClr val="1A1A1A"/>
-                </a:solidFill>
-                <a:latin typeface="Segoe UI"/>
-              </a:rPr>
-              <a:t>markdown + one SQLite; grep it, diff it, delete it</a:t>
+              <a:t>NUC / server</a:t>
+            </a:r>
+          </a:p>
+          <a:p>
+            <a:pPr algn="ctr"/>
+          </a:p>
+          <a:p>
+            <a:pPr algn="ctr"/>
+            <a:r>
+              <a:rPr sz="1050" b="0">
+                <a:solidFill>
+                  <a:srgbClr val="1A1A1A"/>
+                </a:solidFill>
+                <a:latin typeface="Segoe UI"/>
+              </a:rPr>
+              <a:t>systemd user unit</a:t>
+            </a:r>
+          </a:p>
+          <a:p>
+            <a:pPr algn="ctr"/>
+          </a:p>
+          <a:p>
+            <a:pPr algn="ctr"/>
+            <a:r>
+              <a:rPr sz="1050" b="0">
+                <a:solidFill>
+                  <a:srgbClr val="1A1A1A"/>
+                </a:solidFill>
+                <a:latin typeface="Segoe UI"/>
+              </a:rPr>
+              <a:t>always-on admin hub</a:t>
+            </a:r>
+          </a:p>
+          <a:p>
+            <a:pPr algn="ctr"/>
+            <a:r>
+              <a:rPr sz="1050" b="0">
+                <a:solidFill>
+                  <a:srgbClr val="1A1A1A"/>
+                </a:solidFill>
+                <a:latin typeface="Segoe UI"/>
+              </a:rPr>
+              <a:t>spokes sync to it</a:t>
             </a:r>
           </a:p>
         </p:txBody>
@@ -16152,8 +16651,8 @@
         </p:nvSpPr>
         <p:spPr>
           <a:xfrm>
-            <a:off x="685800" y="4389120"/>
-            <a:ext cx="5321808" cy="1143000"/>
+            <a:off x="8037574" y="1554480"/>
+            <a:ext cx="3383280" cy="1737360"/>
           </a:xfrm>
           <a:prstGeom prst="roundRect">
             <a:avLst>
@@ -16190,28 +16689,55 @@
           <a:p>
             <a:pPr algn="ctr"/>
             <a:r>
-              <a:rPr sz="1500" b="1">
+              <a:rPr sz="1700" b="1">
                 <a:solidFill>
                   <a:srgbClr val="5B3A6E"/>
                 </a:solidFill>
                 <a:latin typeface="Segoe UI"/>
               </a:rPr>
-              <a:t>One admin merges</a:t>
-            </a:r>
-          </a:p>
-          <a:p>
-            <a:pPr algn="ctr"/>
-          </a:p>
-          <a:p>
-            <a:pPr algn="ctr"/>
-            <a:r>
-              <a:rPr sz="1100" b="0">
-                <a:solidFill>
-                  <a:srgbClr val="1A1A1A"/>
-                </a:solidFill>
-                <a:latin typeface="Segoe UI"/>
-              </a:rPr>
-              <a:t>spokes compact locally; redaction runs before a note is advertised</a:t>
+              <a:t>Container</a:t>
+            </a:r>
+          </a:p>
+          <a:p>
+            <a:pPr algn="ctr"/>
+          </a:p>
+          <a:p>
+            <a:pPr algn="ctr"/>
+            <a:r>
+              <a:rPr sz="1050" b="0">
+                <a:solidFill>
+                  <a:srgbClr val="1A1A1A"/>
+                </a:solidFill>
+                <a:latin typeface="Segoe UI"/>
+              </a:rPr>
+              <a:t>docker compose</a:t>
+            </a:r>
+          </a:p>
+          <a:p>
+            <a:pPr algn="ctr"/>
+          </a:p>
+          <a:p>
+            <a:pPr algn="ctr"/>
+            <a:r>
+              <a:rPr sz="1050" b="0">
+                <a:solidFill>
+                  <a:srgbClr val="1A1A1A"/>
+                </a:solidFill>
+                <a:latin typeface="Segoe UI"/>
+              </a:rPr>
+              <a:t>for untrusted work</a:t>
+            </a:r>
+          </a:p>
+          <a:p>
+            <a:pPr algn="ctr"/>
+            <a:r>
+              <a:rPr sz="1050" b="0">
+                <a:solidFill>
+                  <a:srgbClr val="1A1A1A"/>
+                </a:solidFill>
+                <a:latin typeface="Segoe UI"/>
+              </a:rPr>
+              <a:t>the jail you actually want</a:t>
             </a:r>
           </a:p>
         </p:txBody>
@@ -16224,8 +16750,8 @@
         </p:nvSpPr>
         <p:spPr>
           <a:xfrm>
-            <a:off x="6217920" y="4389120"/>
-            <a:ext cx="5321808" cy="1143000"/>
+            <a:off x="685800" y="3611880"/>
+            <a:ext cx="10835640" cy="566928"/>
           </a:xfrm>
           <a:prstGeom prst="roundRect">
             <a:avLst>
@@ -16233,11 +16759,11 @@
             </a:avLst>
           </a:prstGeom>
           <a:solidFill>
-            <a:srgbClr val="F7DFDF"/>
+            <a:srgbClr val="FFFFFF"/>
           </a:solidFill>
           <a:ln w="12700">
             <a:solidFill>
-              <a:srgbClr val="8C2F2F"/>
+              <a:srgbClr val="C9C9C9"/>
             </a:solidFill>
           </a:ln>
           <a:effectLst/>
@@ -16262,67 +16788,106 @@
           <a:p>
             <a:pPr algn="ctr"/>
             <a:r>
-              <a:rPr sz="1500" b="1">
-                <a:solidFill>
-                  <a:srgbClr val="8C2F2F"/>
-                </a:solidFill>
-                <a:latin typeface="Segoe UI"/>
-              </a:rPr>
-              <a:t>Nothing phones home</a:t>
-            </a:r>
-          </a:p>
-          <a:p>
-            <a:pPr algn="ctr"/>
-          </a:p>
-          <a:p>
-            <a:pPr algn="ctr"/>
-            <a:r>
-              <a:rPr sz="1100" b="0">
-                <a:solidFill>
-                  <a:srgbClr val="1A1A1A"/>
-                </a:solidFill>
-                <a:latin typeface="Segoe UI"/>
-              </a:rPr>
-              <a:t>no telemetry; prompts go only to the endpoint you set</a:t>
-            </a:r>
-          </a:p>
-        </p:txBody>
-      </p:sp>
-      <p:sp>
-        <p:nvSpPr>
-          <p:cNvPr id="11" name="TextBox 10"/>
-          <p:cNvSpPr txBox="1"/>
-          <p:nvPr/>
-        </p:nvSpPr>
-        <p:spPr>
-          <a:xfrm>
-            <a:off x="685800" y="5870448"/>
-            <a:ext cx="10853928" cy="274320"/>
-          </a:xfrm>
-          <a:prstGeom prst="rect">
-            <a:avLst/>
-          </a:prstGeom>
-          <a:noFill/>
-        </p:spPr>
-        <p:txBody>
-          <a:bodyPr wrap="square" anchor="t" lIns="0" rIns="0" tIns="0" bIns="0">
-            <a:spAutoFit/>
-          </a:bodyPr>
-          <a:lstStyle/>
-          <a:p>
-            <a:pPr algn="ctr">
-              <a:spcAft>
-                <a:spcPts val="0"/>
-              </a:spcAft>
-            </a:pPr>
-            <a:r>
-              <a:rPr sz="1100" b="0">
-                <a:solidFill>
-                  <a:srgbClr val="6B6B6B"/>
-                </a:solidFill>
-                <a:latin typeface="Segoe UI"/>
-              </a:rPr>
-              <a:t>Self-hosted · no database to operate · ~4,000 tests, 0 failing · 86% coverage · Sonar 0 bugs</a:t>
+              <a:rPr sz="1300" b="1">
+                <a:solidFill>
+                  <a:srgbClr val="1A1A1A"/>
+                </a:solidFill>
+                <a:latin typeface="Segoe UI"/>
+              </a:rPr>
+              <a:t>Requires</a:t>
+            </a:r>
+          </a:p>
+          <a:p>
+            <a:pPr algn="ctr"/>
+            <a:r>
+              <a:rPr sz="1050" b="0">
+                <a:solidFill>
+                  <a:srgbClr val="1A1A1A"/>
+                </a:solidFill>
+                <a:latin typeface="Segoe UI"/>
+              </a:rPr>
+              <a:t>Python 3.12  ·  one OpenAI-compatible endpoint  ·  no GPU, no torch, no Postgres, no Neo4j</a:t>
+            </a:r>
+          </a:p>
+        </p:txBody>
+      </p:sp>
+      <p:sp>
+        <p:nvSpPr>
+          <p:cNvPr id="11" name="Rounded Rectangle 10"/>
+          <p:cNvSpPr/>
+          <p:nvPr/>
+        </p:nvSpPr>
+        <p:spPr>
+          <a:xfrm>
+            <a:off x="685800" y="4389120"/>
+            <a:ext cx="10835640" cy="1234440"/>
+          </a:xfrm>
+          <a:prstGeom prst="roundRect">
+            <a:avLst>
+              <a:gd name="adj" fmla="val 10000"/>
+            </a:avLst>
+          </a:prstGeom>
+          <a:solidFill>
+            <a:srgbClr val="ECECEC"/>
+          </a:solidFill>
+          <a:ln w="12700">
+            <a:solidFill>
+              <a:srgbClr val="3A3A3A"/>
+            </a:solidFill>
+          </a:ln>
+          <a:effectLst/>
+        </p:spPr>
+        <p:style>
+          <a:lnRef idx="1">
+            <a:schemeClr val="accent1"/>
+          </a:lnRef>
+          <a:fillRef idx="3">
+            <a:schemeClr val="accent1"/>
+          </a:fillRef>
+          <a:effectRef idx="2">
+            <a:schemeClr val="accent1"/>
+          </a:effectRef>
+          <a:fontRef idx="minor">
+            <a:schemeClr val="lt1"/>
+          </a:fontRef>
+        </p:style>
+        <p:txBody>
+          <a:bodyPr rtlCol="0" anchor="ctr" wrap="square" lIns="54864" rIns="54864" tIns="27432" bIns="27432"/>
+          <a:lstStyle/>
+          <a:p>
+            <a:pPr algn="ctr"/>
+            <a:r>
+              <a:rPr sz="1300" b="1">
+                <a:solidFill>
+                  <a:srgbClr val="3A3A3A"/>
+                </a:solidFill>
+                <a:latin typeface="Segoe UI"/>
+              </a:rPr>
+              <a:t>Kept honest</a:t>
+            </a:r>
+          </a:p>
+          <a:p>
+            <a:pPr algn="ctr"/>
+            <a:r>
+              <a:rPr sz="1050" b="0">
+                <a:solidFill>
+                  <a:srgbClr val="1A1A1A"/>
+                </a:solidFill>
+                <a:latin typeface="Segoe UI"/>
+              </a:rPr>
+              <a:t>~4,000 tests, 0 failing  ·  86% line coverage  ·  Sonar 0 bugs, every function under cognitive complexity 15</a:t>
+            </a:r>
+          </a:p>
+          <a:p>
+            <a:pPr algn="ctr"/>
+            <a:r>
+              <a:rPr sz="1050" b="0">
+                <a:solidFill>
+                  <a:srgbClr val="1A1A1A"/>
+                </a:solidFill>
+                <a:latin typeface="Segoe UI"/>
+              </a:rPr>
+              <a:t>chat and pipeline tool registries are parity-tested  ·  uv.lock pinned and shipped  ·  CycloneDX SBOM in CI</a:t>
             </a:r>
           </a:p>
         </p:txBody>
@@ -17738,6 +18303,617 @@
 </p:sld>
 </file>
 
+<file path=ppt/slides/slide20.xml><?xml version="1.0" encoding="utf-8"?>
+<p:sld xmlns:a="http://schemas.openxmlformats.org/drawingml/2006/main" xmlns:p="http://schemas.openxmlformats.org/presentationml/2006/main" xmlns:r="http://schemas.openxmlformats.org/officeDocument/2006/relationships">
+  <p:cSld>
+    <p:spTree>
+      <p:nvGrpSpPr>
+        <p:cNvPr id="1" name=""/>
+        <p:cNvGrpSpPr/>
+        <p:nvPr/>
+      </p:nvGrpSpPr>
+      <p:grpSpPr/>
+      <p:sp>
+        <p:nvSpPr>
+          <p:cNvPr id="2" name="TextBox 1"/>
+          <p:cNvSpPr txBox="1"/>
+          <p:nvPr/>
+        </p:nvSpPr>
+        <p:spPr>
+          <a:xfrm>
+            <a:off x="548640" y="310896"/>
+            <a:ext cx="11155680" cy="457200"/>
+          </a:xfrm>
+          <a:prstGeom prst="rect">
+            <a:avLst/>
+          </a:prstGeom>
+          <a:noFill/>
+        </p:spPr>
+        <p:txBody>
+          <a:bodyPr wrap="square" anchor="t" lIns="0" rIns="0" tIns="0" bIns="0">
+            <a:spAutoFit/>
+          </a:bodyPr>
+          <a:lstStyle/>
+          <a:p>
+            <a:pPr algn="l">
+              <a:spcAft>
+                <a:spcPts val="0"/>
+              </a:spcAft>
+            </a:pPr>
+            <a:r>
+              <a:rPr sz="2700" b="1">
+                <a:solidFill>
+                  <a:srgbClr val="1A1A1A"/>
+                </a:solidFill>
+                <a:latin typeface="Segoe UI"/>
+              </a:rPr>
+              <a:t>In one slide</a:t>
+            </a:r>
+          </a:p>
+        </p:txBody>
+      </p:sp>
+      <p:sp>
+        <p:nvSpPr>
+          <p:cNvPr id="3" name="Rectangle 2"/>
+          <p:cNvSpPr/>
+          <p:nvPr/>
+        </p:nvSpPr>
+        <p:spPr>
+          <a:xfrm>
+            <a:off x="548640" y="1170432"/>
+            <a:ext cx="11091672" cy="9525"/>
+          </a:xfrm>
+          <a:prstGeom prst="rect">
+            <a:avLst/>
+          </a:prstGeom>
+          <a:solidFill>
+            <a:srgbClr val="C9C9C9"/>
+          </a:solidFill>
+          <a:ln>
+            <a:noFill/>
+          </a:ln>
+          <a:effectLst/>
+        </p:spPr>
+        <p:style>
+          <a:lnRef idx="1">
+            <a:schemeClr val="accent1"/>
+          </a:lnRef>
+          <a:fillRef idx="3">
+            <a:schemeClr val="accent1"/>
+          </a:fillRef>
+          <a:effectRef idx="2">
+            <a:schemeClr val="accent1"/>
+          </a:effectRef>
+          <a:fontRef idx="minor">
+            <a:schemeClr val="lt1"/>
+          </a:fontRef>
+        </p:style>
+        <p:txBody>
+          <a:bodyPr rtlCol="0" anchor="ctr"/>
+          <a:lstStyle/>
+          <a:p>
+            <a:pPr algn="ctr"/>
+          </a:p>
+        </p:txBody>
+      </p:sp>
+      <p:sp>
+        <p:nvSpPr>
+          <p:cNvPr id="4" name="TextBox 3"/>
+          <p:cNvSpPr txBox="1"/>
+          <p:nvPr/>
+        </p:nvSpPr>
+        <p:spPr>
+          <a:xfrm>
+            <a:off x="11018520" y="6327648"/>
+            <a:ext cx="640080" cy="274320"/>
+          </a:xfrm>
+          <a:prstGeom prst="rect">
+            <a:avLst/>
+          </a:prstGeom>
+          <a:noFill/>
+        </p:spPr>
+        <p:txBody>
+          <a:bodyPr wrap="square" anchor="t" lIns="0" rIns="0" tIns="0" bIns="0">
+            <a:spAutoFit/>
+          </a:bodyPr>
+          <a:lstStyle/>
+          <a:p>
+            <a:pPr algn="r">
+              <a:spcAft>
+                <a:spcPts val="0"/>
+              </a:spcAft>
+            </a:pPr>
+            <a:r>
+              <a:rPr sz="950" b="0">
+                <a:solidFill>
+                  <a:srgbClr val="6B6B6B"/>
+                </a:solidFill>
+                <a:latin typeface="Segoe UI"/>
+              </a:rPr>
+              <a:t>19</a:t>
+            </a:r>
+          </a:p>
+        </p:txBody>
+      </p:sp>
+      <p:sp>
+        <p:nvSpPr>
+          <p:cNvPr id="5" name="Rounded Rectangle 4"/>
+          <p:cNvSpPr/>
+          <p:nvPr/>
+        </p:nvSpPr>
+        <p:spPr>
+          <a:xfrm>
+            <a:off x="685800" y="1554480"/>
+            <a:ext cx="5321808" cy="1143000"/>
+          </a:xfrm>
+          <a:prstGeom prst="roundRect">
+            <a:avLst>
+              <a:gd name="adj" fmla="val 10000"/>
+            </a:avLst>
+          </a:prstGeom>
+          <a:solidFill>
+            <a:srgbClr val="DCE7F2"/>
+          </a:solidFill>
+          <a:ln w="12700">
+            <a:solidFill>
+              <a:srgbClr val="1F4E79"/>
+            </a:solidFill>
+          </a:ln>
+          <a:effectLst/>
+        </p:spPr>
+        <p:style>
+          <a:lnRef idx="1">
+            <a:schemeClr val="accent1"/>
+          </a:lnRef>
+          <a:fillRef idx="3">
+            <a:schemeClr val="accent1"/>
+          </a:fillRef>
+          <a:effectRef idx="2">
+            <a:schemeClr val="accent1"/>
+          </a:effectRef>
+          <a:fontRef idx="minor">
+            <a:schemeClr val="lt1"/>
+          </a:fontRef>
+        </p:style>
+        <p:txBody>
+          <a:bodyPr rtlCol="0" anchor="ctr" wrap="square" lIns="54864" rIns="54864" tIns="27432" bIns="27432"/>
+          <a:lstStyle/>
+          <a:p>
+            <a:pPr algn="ctr"/>
+            <a:r>
+              <a:rPr sz="1500" b="1">
+                <a:solidFill>
+                  <a:srgbClr val="1F4E79"/>
+                </a:solidFill>
+                <a:latin typeface="Segoe UI"/>
+              </a:rPr>
+              <a:t>One process</a:t>
+            </a:r>
+          </a:p>
+          <a:p>
+            <a:pPr algn="ctr"/>
+          </a:p>
+          <a:p>
+            <a:pPr algn="ctr"/>
+            <a:r>
+              <a:rPr sz="1100" b="0">
+                <a:solidFill>
+                  <a:srgbClr val="1A1A1A"/>
+                </a:solidFill>
+                <a:latin typeface="Segoe UI"/>
+              </a:rPr>
+              <a:t>FastAPI on 8799; every engine is a library inside it</a:t>
+            </a:r>
+          </a:p>
+        </p:txBody>
+      </p:sp>
+      <p:sp>
+        <p:nvSpPr>
+          <p:cNvPr id="6" name="Rounded Rectangle 5"/>
+          <p:cNvSpPr/>
+          <p:nvPr/>
+        </p:nvSpPr>
+        <p:spPr>
+          <a:xfrm>
+            <a:off x="6217920" y="1554480"/>
+            <a:ext cx="5321808" cy="1143000"/>
+          </a:xfrm>
+          <a:prstGeom prst="roundRect">
+            <a:avLst>
+              <a:gd name="adj" fmla="val 10000"/>
+            </a:avLst>
+          </a:prstGeom>
+          <a:solidFill>
+            <a:srgbClr val="DCEEE7"/>
+          </a:solidFill>
+          <a:ln w="12700">
+            <a:solidFill>
+              <a:srgbClr val="1E6B52"/>
+            </a:solidFill>
+          </a:ln>
+          <a:effectLst/>
+        </p:spPr>
+        <p:style>
+          <a:lnRef idx="1">
+            <a:schemeClr val="accent1"/>
+          </a:lnRef>
+          <a:fillRef idx="3">
+            <a:schemeClr val="accent1"/>
+          </a:fillRef>
+          <a:effectRef idx="2">
+            <a:schemeClr val="accent1"/>
+          </a:effectRef>
+          <a:fontRef idx="minor">
+            <a:schemeClr val="lt1"/>
+          </a:fontRef>
+        </p:style>
+        <p:txBody>
+          <a:bodyPr rtlCol="0" anchor="ctr" wrap="square" lIns="54864" rIns="54864" tIns="27432" bIns="27432"/>
+          <a:lstStyle/>
+          <a:p>
+            <a:pPr algn="ctr"/>
+            <a:r>
+              <a:rPr sz="1500" b="1">
+                <a:solidFill>
+                  <a:srgbClr val="1E6B52"/>
+                </a:solidFill>
+                <a:latin typeface="Segoe UI"/>
+              </a:rPr>
+              <a:t>Two ways in</a:t>
+            </a:r>
+          </a:p>
+          <a:p>
+            <a:pPr algn="ctr"/>
+          </a:p>
+          <a:p>
+            <a:pPr algn="ctr"/>
+            <a:r>
+              <a:rPr sz="1100" b="0">
+                <a:solidFill>
+                  <a:srgbClr val="1A1A1A"/>
+                </a:solidFill>
+                <a:latin typeface="Segoe UI"/>
+              </a:rPr>
+              <a:t>a ticket becomes a PR, or you chat with the filesystem</a:t>
+            </a:r>
+          </a:p>
+        </p:txBody>
+      </p:sp>
+      <p:sp>
+        <p:nvSpPr>
+          <p:cNvPr id="7" name="Rounded Rectangle 6"/>
+          <p:cNvSpPr/>
+          <p:nvPr/>
+        </p:nvSpPr>
+        <p:spPr>
+          <a:xfrm>
+            <a:off x="685800" y="2971800"/>
+            <a:ext cx="5321808" cy="1143000"/>
+          </a:xfrm>
+          <a:prstGeom prst="roundRect">
+            <a:avLst>
+              <a:gd name="adj" fmla="val 10000"/>
+            </a:avLst>
+          </a:prstGeom>
+          <a:solidFill>
+            <a:srgbClr val="DCEEE7"/>
+          </a:solidFill>
+          <a:ln w="12700">
+            <a:solidFill>
+              <a:srgbClr val="1E6B52"/>
+            </a:solidFill>
+          </a:ln>
+          <a:effectLst/>
+        </p:spPr>
+        <p:style>
+          <a:lnRef idx="1">
+            <a:schemeClr val="accent1"/>
+          </a:lnRef>
+          <a:fillRef idx="3">
+            <a:schemeClr val="accent1"/>
+          </a:fillRef>
+          <a:effectRef idx="2">
+            <a:schemeClr val="accent1"/>
+          </a:effectRef>
+          <a:fontRef idx="minor">
+            <a:schemeClr val="lt1"/>
+          </a:fontRef>
+        </p:style>
+        <p:txBody>
+          <a:bodyPr rtlCol="0" anchor="ctr" wrap="square" lIns="54864" rIns="54864" tIns="27432" bIns="27432"/>
+          <a:lstStyle/>
+          <a:p>
+            <a:pPr algn="ctr"/>
+            <a:r>
+              <a:rPr sz="1500" b="1">
+                <a:solidFill>
+                  <a:srgbClr val="1E6B52"/>
+                </a:solidFill>
+                <a:latin typeface="Segoe UI"/>
+              </a:rPr>
+              <a:t>Three chat modes</a:t>
+            </a:r>
+          </a:p>
+          <a:p>
+            <a:pPr algn="ctr"/>
+          </a:p>
+          <a:p>
+            <a:pPr algn="ctr"/>
+            <a:r>
+              <a:rPr sz="1100" b="0">
+                <a:solidFill>
+                  <a:srgbClr val="1A1A1A"/>
+                </a:solidFill>
+                <a:latin typeface="Segoe UI"/>
+              </a:rPr>
+              <a:t>Simple writes, Plan is read-only, Team is the pipeline</a:t>
+            </a:r>
+          </a:p>
+        </p:txBody>
+      </p:sp>
+      <p:sp>
+        <p:nvSpPr>
+          <p:cNvPr id="8" name="Rounded Rectangle 7"/>
+          <p:cNvSpPr/>
+          <p:nvPr/>
+        </p:nvSpPr>
+        <p:spPr>
+          <a:xfrm>
+            <a:off x="6217920" y="2971800"/>
+            <a:ext cx="5321808" cy="1143000"/>
+          </a:xfrm>
+          <a:prstGeom prst="roundRect">
+            <a:avLst>
+              <a:gd name="adj" fmla="val 10000"/>
+            </a:avLst>
+          </a:prstGeom>
+          <a:solidFill>
+            <a:srgbClr val="F7ECD5"/>
+          </a:solidFill>
+          <a:ln w="12700">
+            <a:solidFill>
+              <a:srgbClr val="8A5A00"/>
+            </a:solidFill>
+          </a:ln>
+          <a:effectLst/>
+        </p:spPr>
+        <p:style>
+          <a:lnRef idx="1">
+            <a:schemeClr val="accent1"/>
+          </a:lnRef>
+          <a:fillRef idx="3">
+            <a:schemeClr val="accent1"/>
+          </a:fillRef>
+          <a:effectRef idx="2">
+            <a:schemeClr val="accent1"/>
+          </a:effectRef>
+          <a:fontRef idx="minor">
+            <a:schemeClr val="lt1"/>
+          </a:fontRef>
+        </p:style>
+        <p:txBody>
+          <a:bodyPr rtlCol="0" anchor="ctr" wrap="square" lIns="54864" rIns="54864" tIns="27432" bIns="27432"/>
+          <a:lstStyle/>
+          <a:p>
+            <a:pPr algn="ctr"/>
+            <a:r>
+              <a:rPr sz="1500" b="1">
+                <a:solidFill>
+                  <a:srgbClr val="8A5A00"/>
+                </a:solidFill>
+                <a:latin typeface="Segoe UI"/>
+              </a:rPr>
+              <a:t>Memory is a folder</a:t>
+            </a:r>
+          </a:p>
+          <a:p>
+            <a:pPr algn="ctr"/>
+          </a:p>
+          <a:p>
+            <a:pPr algn="ctr"/>
+            <a:r>
+              <a:rPr sz="1100" b="0">
+                <a:solidFill>
+                  <a:srgbClr val="1A1A1A"/>
+                </a:solidFill>
+                <a:latin typeface="Segoe UI"/>
+              </a:rPr>
+              <a:t>markdown + one SQLite; grep it, diff it, delete it</a:t>
+            </a:r>
+          </a:p>
+        </p:txBody>
+      </p:sp>
+      <p:sp>
+        <p:nvSpPr>
+          <p:cNvPr id="9" name="Rounded Rectangle 8"/>
+          <p:cNvSpPr/>
+          <p:nvPr/>
+        </p:nvSpPr>
+        <p:spPr>
+          <a:xfrm>
+            <a:off x="685800" y="4389120"/>
+            <a:ext cx="5321808" cy="1143000"/>
+          </a:xfrm>
+          <a:prstGeom prst="roundRect">
+            <a:avLst>
+              <a:gd name="adj" fmla="val 10000"/>
+            </a:avLst>
+          </a:prstGeom>
+          <a:solidFill>
+            <a:srgbClr val="EAE1F0"/>
+          </a:solidFill>
+          <a:ln w="12700">
+            <a:solidFill>
+              <a:srgbClr val="5B3A6E"/>
+            </a:solidFill>
+          </a:ln>
+          <a:effectLst/>
+        </p:spPr>
+        <p:style>
+          <a:lnRef idx="1">
+            <a:schemeClr val="accent1"/>
+          </a:lnRef>
+          <a:fillRef idx="3">
+            <a:schemeClr val="accent1"/>
+          </a:fillRef>
+          <a:effectRef idx="2">
+            <a:schemeClr val="accent1"/>
+          </a:effectRef>
+          <a:fontRef idx="minor">
+            <a:schemeClr val="lt1"/>
+          </a:fontRef>
+        </p:style>
+        <p:txBody>
+          <a:bodyPr rtlCol="0" anchor="ctr" wrap="square" lIns="54864" rIns="54864" tIns="27432" bIns="27432"/>
+          <a:lstStyle/>
+          <a:p>
+            <a:pPr algn="ctr"/>
+            <a:r>
+              <a:rPr sz="1500" b="1">
+                <a:solidFill>
+                  <a:srgbClr val="5B3A6E"/>
+                </a:solidFill>
+                <a:latin typeface="Segoe UI"/>
+              </a:rPr>
+              <a:t>One admin merges</a:t>
+            </a:r>
+          </a:p>
+          <a:p>
+            <a:pPr algn="ctr"/>
+          </a:p>
+          <a:p>
+            <a:pPr algn="ctr"/>
+            <a:r>
+              <a:rPr sz="1100" b="0">
+                <a:solidFill>
+                  <a:srgbClr val="1A1A1A"/>
+                </a:solidFill>
+                <a:latin typeface="Segoe UI"/>
+              </a:rPr>
+              <a:t>spokes compact locally; redaction runs before a note is advertised</a:t>
+            </a:r>
+          </a:p>
+        </p:txBody>
+      </p:sp>
+      <p:sp>
+        <p:nvSpPr>
+          <p:cNvPr id="10" name="Rounded Rectangle 9"/>
+          <p:cNvSpPr/>
+          <p:nvPr/>
+        </p:nvSpPr>
+        <p:spPr>
+          <a:xfrm>
+            <a:off x="6217920" y="4389120"/>
+            <a:ext cx="5321808" cy="1143000"/>
+          </a:xfrm>
+          <a:prstGeom prst="roundRect">
+            <a:avLst>
+              <a:gd name="adj" fmla="val 10000"/>
+            </a:avLst>
+          </a:prstGeom>
+          <a:solidFill>
+            <a:srgbClr val="F7DFDF"/>
+          </a:solidFill>
+          <a:ln w="12700">
+            <a:solidFill>
+              <a:srgbClr val="8C2F2F"/>
+            </a:solidFill>
+          </a:ln>
+          <a:effectLst/>
+        </p:spPr>
+        <p:style>
+          <a:lnRef idx="1">
+            <a:schemeClr val="accent1"/>
+          </a:lnRef>
+          <a:fillRef idx="3">
+            <a:schemeClr val="accent1"/>
+          </a:fillRef>
+          <a:effectRef idx="2">
+            <a:schemeClr val="accent1"/>
+          </a:effectRef>
+          <a:fontRef idx="minor">
+            <a:schemeClr val="lt1"/>
+          </a:fontRef>
+        </p:style>
+        <p:txBody>
+          <a:bodyPr rtlCol="0" anchor="ctr" wrap="square" lIns="54864" rIns="54864" tIns="27432" bIns="27432"/>
+          <a:lstStyle/>
+          <a:p>
+            <a:pPr algn="ctr"/>
+            <a:r>
+              <a:rPr sz="1500" b="1">
+                <a:solidFill>
+                  <a:srgbClr val="8C2F2F"/>
+                </a:solidFill>
+                <a:latin typeface="Segoe UI"/>
+              </a:rPr>
+              <a:t>Nothing phones home</a:t>
+            </a:r>
+          </a:p>
+          <a:p>
+            <a:pPr algn="ctr"/>
+          </a:p>
+          <a:p>
+            <a:pPr algn="ctr"/>
+            <a:r>
+              <a:rPr sz="1100" b="0">
+                <a:solidFill>
+                  <a:srgbClr val="1A1A1A"/>
+                </a:solidFill>
+                <a:latin typeface="Segoe UI"/>
+              </a:rPr>
+              <a:t>no telemetry; prompts go only to the endpoint you set</a:t>
+            </a:r>
+          </a:p>
+        </p:txBody>
+      </p:sp>
+      <p:sp>
+        <p:nvSpPr>
+          <p:cNvPr id="11" name="TextBox 10"/>
+          <p:cNvSpPr txBox="1"/>
+          <p:nvPr/>
+        </p:nvSpPr>
+        <p:spPr>
+          <a:xfrm>
+            <a:off x="685800" y="5870448"/>
+            <a:ext cx="10853928" cy="274320"/>
+          </a:xfrm>
+          <a:prstGeom prst="rect">
+            <a:avLst/>
+          </a:prstGeom>
+          <a:noFill/>
+        </p:spPr>
+        <p:txBody>
+          <a:bodyPr wrap="square" anchor="t" lIns="0" rIns="0" tIns="0" bIns="0">
+            <a:spAutoFit/>
+          </a:bodyPr>
+          <a:lstStyle/>
+          <a:p>
+            <a:pPr algn="ctr">
+              <a:spcAft>
+                <a:spcPts val="0"/>
+              </a:spcAft>
+            </a:pPr>
+            <a:r>
+              <a:rPr sz="1100" b="0">
+                <a:solidFill>
+                  <a:srgbClr val="6B6B6B"/>
+                </a:solidFill>
+                <a:latin typeface="Segoe UI"/>
+              </a:rPr>
+              <a:t>Self-hosted · no database to operate · ~4,000 tests, 0 failing · 86% coverage · Sonar 0 bugs</a:t>
+            </a:r>
+          </a:p>
+        </p:txBody>
+      </p:sp>
+    </p:spTree>
+  </p:cSld>
+  <p:clrMapOvr>
+    <a:masterClrMapping/>
+  </p:clrMapOvr>
+</p:sld>
+</file>
+
 <file path=ppt/slides/slide3.xml><?xml version="1.0" encoding="utf-8"?>
 <p:sld xmlns:a="http://schemas.openxmlformats.org/drawingml/2006/main" xmlns:p="http://schemas.openxmlformats.org/presentationml/2006/main" xmlns:r="http://schemas.openxmlformats.org/officeDocument/2006/relationships">
   <p:cSld>
@@ -21409,7 +22585,7 @@
                 </a:solidFill>
                 <a:latin typeface="Segoe UI"/>
               </a:rPr>
-              <a:t>search · fetch</a:t>
+              <a:t>fetch · crawl</a:t>
             </a:r>
           </a:p>
           <a:p>
@@ -21421,7 +22597,7 @@
                 </a:solidFill>
                 <a:latin typeface="Segoe UI"/>
               </a:rPr>
-              <a:t>crawl · browser</a:t>
+              <a:t>browser (no search)</a:t>
             </a:r>
           </a:p>
         </p:txBody>
@@ -28077,7 +29253,7 @@
         <p:spPr>
           <a:xfrm>
             <a:off x="7767828" y="3803904"/>
-            <a:ext cx="1161288" cy="274320"/>
+            <a:ext cx="1083564" cy="274320"/>
           </a:xfrm>
           <a:prstGeom prst="roundRect">
             <a:avLst>
@@ -28120,7 +29296,7 @@
                 </a:solidFill>
                 <a:latin typeface="Segoe UI"/>
               </a:rPr>
-              <a:t>web_search</a:t>
+              <a:t>web fetch</a:t>
             </a:r>
           </a:p>
         </p:txBody>
@@ -28133,7 +29309,7 @@
         </p:nvSpPr>
         <p:spPr>
           <a:xfrm>
-            <a:off x="9038844" y="3803904"/>
+            <a:off x="8961120" y="3803904"/>
             <a:ext cx="772668" cy="274320"/>
           </a:xfrm>
           <a:prstGeom prst="roundRect">
@@ -28190,7 +29366,7 @@
         </p:nvSpPr>
         <p:spPr>
           <a:xfrm>
-            <a:off x="9921240" y="3803904"/>
+            <a:off x="9843516" y="3803904"/>
             <a:ext cx="928116" cy="274320"/>
           </a:xfrm>
           <a:prstGeom prst="roundRect">
@@ -28247,7 +29423,7 @@
         </p:nvSpPr>
         <p:spPr>
           <a:xfrm>
-            <a:off x="10959084" y="3803904"/>
+            <a:off x="10881360" y="3803904"/>
             <a:ext cx="617220" cy="274320"/>
           </a:xfrm>
           <a:prstGeom prst="roundRect">

--- a/docs/AIForgeCrew-Overview.pptx
+++ b/docs/AIForgeCrew-Overview.pptx
@@ -25,6 +25,7 @@
     <p:sldId id="273" r:id="rId24"/>
     <p:sldId id="274" r:id="rId25"/>
     <p:sldId id="275" r:id="rId26"/>
+    <p:sldId id="276" r:id="rId27"/>
   </p:sldIdLst>
   <p:sldSz cx="12191695" cy="6858000" type="screen4x3"/>
   <p:notesSz cx="6858000" cy="9144000"/>
@@ -10537,7 +10538,7 @@
                 </a:solidFill>
                 <a:latin typeface="Segoe UI"/>
               </a:rPr>
-              <a:t>Containment: what may run, what may leave</a:t>
+              <a:t>Tool access: who may call what</a:t>
             </a:r>
           </a:p>
         </p:txBody>
@@ -10576,7 +10577,7 @@
                 </a:solidFill>
                 <a:latin typeface="Segoe UI"/>
               </a:rPr>
-              <a:t>Two questions, one place each — a gate on execution, a gate on egress.</a:t>
+              <a:t>A role does not merely refrain from a tool — it never receives the schema.</a:t>
             </a:r>
           </a:p>
         </p:txBody>
@@ -10659,7 +10660,7 @@
                 </a:solidFill>
                 <a:latin typeface="Segoe UI"/>
               </a:rPr>
-              <a:t>Kill switches: AIFORGE_EGRESS_OFF · AIFORGE_&lt;CLASS&gt;_DISABLE · AIFORGE_WEB_FETCH_DISABLE · AIFORGE_UPLOAD_DISABLE · AIFORGE_TOOL_POLICY="run_command=deny"</a:t>
+              <a:t>Names are matched verbatim against the function name. Master opt-out: AIFORGE_TOOL_ENFORCE=0.</a:t>
             </a:r>
           </a:p>
         </p:txBody>
@@ -10711,8 +10712,8 @@
         </p:nvSpPr>
         <p:spPr>
           <a:xfrm>
-            <a:off x="685800" y="1325880"/>
-            <a:ext cx="5349240" cy="237744"/>
+            <a:off x="685800" y="1298448"/>
+            <a:ext cx="5486400" cy="219456"/>
           </a:xfrm>
           <a:prstGeom prst="rect">
             <a:avLst/>
@@ -10737,60 +10738,138 @@
                 </a:solidFill>
                 <a:latin typeface="Segoe UI"/>
               </a:rPr>
-              <a:t>WHAT MAY RUN  —  a tool call reaching the shell</a:t>
-            </a:r>
-          </a:p>
-        </p:txBody>
-      </p:sp>
-      <p:sp>
-        <p:nvSpPr>
-          <p:cNvPr id="8" name="TextBox 7"/>
-          <p:cNvSpPr txBox="1"/>
-          <p:nvPr/>
-        </p:nvSpPr>
-        <p:spPr>
-          <a:xfrm>
-            <a:off x="6355080" y="1325880"/>
-            <a:ext cx="5148072" cy="237744"/>
-          </a:xfrm>
-          <a:prstGeom prst="rect">
+              <a:t>1 · THE LIST IS APPLIED WHERE THE TOOLS ARE WIRED</a:t>
+            </a:r>
+          </a:p>
+        </p:txBody>
+      </p:sp>
+      <p:sp>
+        <p:nvSpPr>
+          <p:cNvPr id="8" name="Rounded Rectangle 7"/>
+          <p:cNvSpPr/>
+          <p:nvPr/>
+        </p:nvSpPr>
+        <p:spPr>
+          <a:xfrm>
+            <a:off x="685800" y="1572768"/>
+            <a:ext cx="2468880" cy="914400"/>
+          </a:xfrm>
+          <a:prstGeom prst="roundRect">
+            <a:avLst>
+              <a:gd name="adj" fmla="val 10000"/>
+            </a:avLst>
+          </a:prstGeom>
+          <a:solidFill>
+            <a:srgbClr val="ECECEC"/>
+          </a:solidFill>
+          <a:ln w="12700">
+            <a:solidFill>
+              <a:srgbClr val="3A3A3A"/>
+            </a:solidFill>
+          </a:ln>
+          <a:effectLst/>
+        </p:spPr>
+        <p:style>
+          <a:lnRef idx="1">
+            <a:schemeClr val="accent1"/>
+          </a:lnRef>
+          <a:fillRef idx="3">
+            <a:schemeClr val="accent1"/>
+          </a:fillRef>
+          <a:effectRef idx="2">
+            <a:schemeClr val="accent1"/>
+          </a:effectRef>
+          <a:fontRef idx="minor">
+            <a:schemeClr val="lt1"/>
+          </a:fontRef>
+        </p:style>
+        <p:txBody>
+          <a:bodyPr rtlCol="0" anchor="ctr" wrap="square" lIns="54864" rIns="54864" tIns="27432" bIns="27432"/>
+          <a:lstStyle/>
+          <a:p>
+            <a:pPr algn="ctr"/>
+            <a:r>
+              <a:rPr sz="1300" b="1">
+                <a:solidFill>
+                  <a:srgbClr val="3A3A3A"/>
+                </a:solidFill>
+                <a:latin typeface="Segoe UI"/>
+              </a:rPr>
+              <a:t>Tool registry</a:t>
+            </a:r>
+          </a:p>
+          <a:p>
+            <a:pPr algn="ctr"/>
+            <a:r>
+              <a:rPr sz="850" b="0">
+                <a:solidFill>
+                  <a:srgbClr val="1A1A1A"/>
+                </a:solidFill>
+                <a:latin typeface="Segoe UI"/>
+              </a:rPr>
+              <a:t>92 ADK tools for the</a:t>
+            </a:r>
+          </a:p>
+          <a:p>
+            <a:pPr algn="ctr"/>
+            <a:r>
+              <a:rPr sz="850" b="0">
+                <a:solidFill>
+                  <a:srgbClr val="1A1A1A"/>
+                </a:solidFill>
+                <a:latin typeface="Segoe UI"/>
+              </a:rPr>
+              <a:t>pipeline · 109 in chat</a:t>
+            </a:r>
+          </a:p>
+        </p:txBody>
+      </p:sp>
+      <p:cxnSp>
+        <p:nvCxnSpPr>
+          <p:cNvPr id="9" name="Connector 8"/>
+          <p:cNvCxnSpPr/>
+          <p:nvPr/>
+        </p:nvCxnSpPr>
+        <p:spPr>
+          <a:xfrm>
+            <a:off x="3154680" y="2029968"/>
+            <a:ext cx="365760" cy="0"/>
+          </a:xfrm>
+          <a:prstGeom prst="line">
             <a:avLst/>
           </a:prstGeom>
-          <a:noFill/>
-        </p:spPr>
-        <p:txBody>
-          <a:bodyPr wrap="square" anchor="t" lIns="0" rIns="0" tIns="0" bIns="0">
-            <a:spAutoFit/>
-          </a:bodyPr>
-          <a:lstStyle/>
-          <a:p>
-            <a:pPr algn="l">
-              <a:spcAft>
-                <a:spcPts val="0"/>
-              </a:spcAft>
-            </a:pPr>
-            <a:r>
-              <a:rPr sz="1000" b="1">
-                <a:solidFill>
-                  <a:srgbClr val="5B3A6E"/>
-                </a:solidFill>
-                <a:latin typeface="Segoe UI"/>
-              </a:rPr>
-              <a:t>WHAT MAY LEAVE  —  a byte reaching the network</a:t>
-            </a:r>
-          </a:p>
-        </p:txBody>
-      </p:sp>
-      <p:sp>
-        <p:nvSpPr>
-          <p:cNvPr id="9" name="Rounded Rectangle 8"/>
+          <a:ln w="19050">
+            <a:solidFill>
+              <a:srgbClr val="C9C9C9"/>
+            </a:solidFill>
+            <a:tailEnd type="triangle" w="med" len="med"/>
+          </a:ln>
+        </p:spPr>
+        <p:style>
+          <a:lnRef idx="2">
+            <a:schemeClr val="accent1"/>
+          </a:lnRef>
+          <a:fillRef idx="0">
+            <a:schemeClr val="accent1"/>
+          </a:fillRef>
+          <a:effectRef idx="1">
+            <a:schemeClr val="accent1"/>
+          </a:effectRef>
+          <a:fontRef idx="minor">
+            <a:schemeClr val="tx1"/>
+          </a:fontRef>
+        </p:style>
+      </p:cxnSp>
+      <p:sp>
+        <p:nvSpPr>
+          <p:cNvPr id="10" name="Rounded Rectangle 9"/>
           <p:cNvSpPr/>
           <p:nvPr/>
         </p:nvSpPr>
         <p:spPr>
           <a:xfrm>
-            <a:off x="685800" y="1664208"/>
-            <a:ext cx="5349240" cy="713232"/>
+            <a:off x="3520440" y="1572768"/>
+            <a:ext cx="2743200" cy="914400"/>
           </a:xfrm>
           <a:prstGeom prst="roundRect">
             <a:avLst>
@@ -10827,13 +10906,13 @@
           <a:p>
             <a:pPr algn="ctr"/>
             <a:r>
-              <a:rPr sz="1150" b="1">
+              <a:rPr sz="1300" b="1">
                 <a:solidFill>
                   <a:srgbClr val="1F4E79"/>
                 </a:solidFill>
                 <a:latin typeface="Segoe UI"/>
               </a:rPr>
-              <a:t>1 · Role tool allowlist</a:t>
+              <a:t>agents.yaml contract</a:t>
             </a:r>
           </a:p>
           <a:p>
@@ -10845,7 +10924,7 @@
                 </a:solidFill>
                 <a:latin typeface="Segoe UI"/>
               </a:rPr>
-              <a:t>agents.yaml allowed / forbidden per role. A tool off the list is</a:t>
+              <a:t>allowed ∩ NOT forbidden, per role</a:t>
             </a:r>
           </a:p>
           <a:p>
@@ -10857,173 +10936,47 @@
                 </a:solidFill>
                 <a:latin typeface="Segoe UI"/>
               </a:rPr>
-              <a:t>never offered to the model; forbidden=ALL is a tool-less role.</a:t>
-            </a:r>
-          </a:p>
-        </p:txBody>
-      </p:sp>
-      <p:sp>
-        <p:nvSpPr>
-          <p:cNvPr id="10" name="Rounded Rectangle 9"/>
-          <p:cNvSpPr/>
-          <p:nvPr/>
-        </p:nvSpPr>
-        <p:spPr>
-          <a:xfrm>
-            <a:off x="685800" y="2459736"/>
-            <a:ext cx="5349240" cy="713232"/>
-          </a:xfrm>
-          <a:prstGeom prst="roundRect">
-            <a:avLst>
-              <a:gd name="adj" fmla="val 10000"/>
-            </a:avLst>
-          </a:prstGeom>
-          <a:solidFill>
-            <a:srgbClr val="DCE7F2"/>
-          </a:solidFill>
-          <a:ln w="12700">
+              <a:t>forbidden always wins</a:t>
+            </a:r>
+          </a:p>
+        </p:txBody>
+      </p:sp>
+      <p:cxnSp>
+        <p:nvCxnSpPr>
+          <p:cNvPr id="11" name="Connector 10"/>
+          <p:cNvCxnSpPr/>
+          <p:nvPr/>
+        </p:nvCxnSpPr>
+        <p:spPr>
+          <a:xfrm>
+            <a:off x="6263640" y="2029968"/>
+            <a:ext cx="365760" cy="0"/>
+          </a:xfrm>
+          <a:prstGeom prst="line">
+            <a:avLst/>
+          </a:prstGeom>
+          <a:ln w="19050">
             <a:solidFill>
-              <a:srgbClr val="1F4E79"/>
+              <a:srgbClr val="C9C9C9"/>
             </a:solidFill>
-          </a:ln>
-          <a:effectLst/>
-        </p:spPr>
-        <p:style>
-          <a:lnRef idx="1">
-            <a:schemeClr val="accent1"/>
-          </a:lnRef>
-          <a:fillRef idx="3">
-            <a:schemeClr val="accent1"/>
-          </a:fillRef>
-          <a:effectRef idx="2">
-            <a:schemeClr val="accent1"/>
-          </a:effectRef>
-          <a:fontRef idx="minor">
-            <a:schemeClr val="lt1"/>
-          </a:fontRef>
-        </p:style>
-        <p:txBody>
-          <a:bodyPr rtlCol="0" anchor="ctr" wrap="square" lIns="54864" rIns="54864" tIns="27432" bIns="27432"/>
-          <a:lstStyle/>
-          <a:p>
-            <a:pPr algn="ctr"/>
-            <a:r>
-              <a:rPr sz="1150" b="1">
-                <a:solidFill>
-                  <a:srgbClr val="1F4E79"/>
-                </a:solidFill>
-                <a:latin typeface="Segoe UI"/>
-              </a:rPr>
-              <a:t>2 · Per-tool policy: allow · ask · deny</a:t>
-            </a:r>
-          </a:p>
-          <a:p>
-            <a:pPr algn="ctr"/>
-            <a:r>
-              <a:rPr sz="850" b="0">
-                <a:solidFill>
-                  <a:srgbClr val="1A1A1A"/>
-                </a:solidFill>
-                <a:latin typeface="Segoe UI"/>
-              </a:rPr>
-              <a:t>AIFORGE_TOOL_POLICY. deny is a hard refusal, autonomous runs too;</a:t>
-            </a:r>
-          </a:p>
-          <a:p>
-            <a:pPr algn="ctr"/>
-            <a:r>
-              <a:rPr sz="850" b="0">
-                <a:solidFill>
-                  <a:srgbClr val="1A1A1A"/>
-                </a:solidFill>
-                <a:latin typeface="Segoe UI"/>
-              </a:rPr>
-              <a:t>ask blocks for Approve/Reject whenever a human is attached.</a:t>
-            </a:r>
-          </a:p>
-        </p:txBody>
-      </p:sp>
-      <p:sp>
-        <p:nvSpPr>
-          <p:cNvPr id="11" name="Rounded Rectangle 10"/>
-          <p:cNvSpPr/>
-          <p:nvPr/>
-        </p:nvSpPr>
-        <p:spPr>
-          <a:xfrm>
-            <a:off x="685800" y="3255264"/>
-            <a:ext cx="5349240" cy="713232"/>
-          </a:xfrm>
-          <a:prstGeom prst="roundRect">
-            <a:avLst>
-              <a:gd name="adj" fmla="val 10000"/>
-            </a:avLst>
-          </a:prstGeom>
-          <a:solidFill>
-            <a:srgbClr val="DCE7F2"/>
-          </a:solidFill>
-          <a:ln w="12700">
-            <a:solidFill>
-              <a:srgbClr val="1F4E79"/>
-            </a:solidFill>
-          </a:ln>
-          <a:effectLst/>
-        </p:spPr>
-        <p:style>
-          <a:lnRef idx="1">
-            <a:schemeClr val="accent1"/>
-          </a:lnRef>
-          <a:fillRef idx="3">
-            <a:schemeClr val="accent1"/>
-          </a:fillRef>
-          <a:effectRef idx="2">
-            <a:schemeClr val="accent1"/>
-          </a:effectRef>
-          <a:fontRef idx="minor">
-            <a:schemeClr val="lt1"/>
-          </a:fontRef>
-        </p:style>
-        <p:txBody>
-          <a:bodyPr rtlCol="0" anchor="ctr" wrap="square" lIns="54864" rIns="54864" tIns="27432" bIns="27432"/>
-          <a:lstStyle/>
-          <a:p>
-            <a:pPr algn="ctr"/>
-            <a:r>
-              <a:rPr sz="1150" b="1">
-                <a:solidFill>
-                  <a:srgbClr val="1F4E79"/>
-                </a:solidFill>
-                <a:latin typeface="Segoe UI"/>
-              </a:rPr>
-              <a:t>3 · Risk verdict on every shell string</a:t>
-            </a:r>
-          </a:p>
-          <a:p>
-            <a:pPr algn="ctr"/>
-            <a:r>
-              <a:rPr sz="850" b="0">
-                <a:solidFill>
-                  <a:srgbClr val="1A1A1A"/>
-                </a:solidFill>
-                <a:latin typeface="Segoe UI"/>
-              </a:rPr>
-              <a:t>safe · caution · dangerous — dangerous forces at least ASK.</a:t>
-            </a:r>
-          </a:p>
-          <a:p>
-            <a:pPr algn="ctr"/>
-            <a:r>
-              <a:rPr sz="850" b="0">
-                <a:solidFill>
-                  <a:srgbClr val="1A1A1A"/>
-                </a:solidFill>
-                <a:latin typeface="Segoe UI"/>
-              </a:rPr>
-              <a:t>run_command · bash · serve · watch_until · ui_check all assessed.</a:t>
-            </a:r>
-          </a:p>
-        </p:txBody>
-      </p:sp>
+            <a:tailEnd type="triangle" w="med" len="med"/>
+          </a:ln>
+        </p:spPr>
+        <p:style>
+          <a:lnRef idx="2">
+            <a:schemeClr val="accent1"/>
+          </a:lnRef>
+          <a:fillRef idx="0">
+            <a:schemeClr val="accent1"/>
+          </a:fillRef>
+          <a:effectRef idx="1">
+            <a:schemeClr val="accent1"/>
+          </a:effectRef>
+          <a:fontRef idx="minor">
+            <a:schemeClr val="tx1"/>
+          </a:fontRef>
+        </p:style>
+      </p:cxnSp>
       <p:sp>
         <p:nvSpPr>
           <p:cNvPr id="12" name="Rounded Rectangle 11"/>
@@ -11032,8 +10985,8 @@
         </p:nvSpPr>
         <p:spPr>
           <a:xfrm>
-            <a:off x="685800" y="4050792"/>
-            <a:ext cx="5349240" cy="713232"/>
+            <a:off x="6629400" y="1572768"/>
+            <a:ext cx="2377440" cy="420624"/>
           </a:xfrm>
           <a:prstGeom prst="roundRect">
             <a:avLst>
@@ -11070,37 +11023,25 @@
           <a:p>
             <a:pPr algn="ctr"/>
             <a:r>
-              <a:rPr sz="1150" b="1">
+              <a:rPr sz="1100" b="1">
                 <a:solidFill>
                   <a:srgbClr val="1E6B52"/>
                 </a:solidFill>
                 <a:latin typeface="Segoe UI"/>
               </a:rPr>
-              <a:t>4 · Floors the toggles cannot lower</a:t>
-            </a:r>
-          </a:p>
-          <a:p>
-            <a:pPr algn="ctr"/>
-            <a:r>
-              <a:rPr sz="850" b="0">
-                <a:solidFill>
-                  <a:srgbClr val="1A1A1A"/>
-                </a:solidFill>
-                <a:latin typeface="Segoe UI"/>
-              </a:rPr>
-              <a:t>delete guard fires with approvals off · git add -A refused ·</a:t>
-            </a:r>
-          </a:p>
-          <a:p>
-            <a:pPr algn="ctr"/>
-            <a:r>
-              <a:rPr sz="850" b="0">
-                <a:solidFill>
-                  <a:srgbClr val="1A1A1A"/>
-                </a:solidFill>
-                <a:latin typeface="Segoe UI"/>
-              </a:rPr>
-              <a:t>push always asks · writes must land inside the ticket's scope globs.</a:t>
+              <a:t>doer · 34</a:t>
+            </a:r>
+          </a:p>
+          <a:p>
+            <a:pPr algn="ctr"/>
+            <a:r>
+              <a:rPr sz="750" b="0">
+                <a:solidFill>
+                  <a:srgbClr val="1A1A1A"/>
+                </a:solidFill>
+                <a:latin typeface="Segoe UI"/>
+              </a:rPr>
+              <a:t>file + shell surface</a:t>
             </a:r>
           </a:p>
         </p:txBody>
@@ -11113,8 +11054,8 @@
         </p:nvSpPr>
         <p:spPr>
           <a:xfrm>
-            <a:off x="685800" y="4846320"/>
-            <a:ext cx="5349240" cy="713232"/>
+            <a:off x="9144000" y="1572768"/>
+            <a:ext cx="2377440" cy="420624"/>
           </a:xfrm>
           <a:prstGeom prst="roundRect">
             <a:avLst>
@@ -11151,37 +11092,25 @@
           <a:p>
             <a:pPr algn="ctr"/>
             <a:r>
-              <a:rPr sz="1150" b="1">
+              <a:rPr sz="1100" b="1">
                 <a:solidFill>
                   <a:srgbClr val="1E6B52"/>
                 </a:solidFill>
                 <a:latin typeface="Segoe UI"/>
               </a:rPr>
-              <a:t>5 · Where it runs at all</a:t>
-            </a:r>
-          </a:p>
-          <a:p>
-            <a:pPr algn="ctr"/>
-            <a:r>
-              <a:rPr sz="850" b="0">
-                <a:solidFill>
-                  <a:srgbClr val="1A1A1A"/>
-                </a:solidFill>
-                <a:latin typeface="Segoe UI"/>
-              </a:rPr>
-              <a:t>Workspace jail on by default; Docker sandbox opt-in, and</a:t>
-            </a:r>
-          </a:p>
-          <a:p>
-            <a:pPr algn="ctr"/>
-            <a:r>
-              <a:rPr sz="850" b="0">
-                <a:solidFill>
-                  <a:srgbClr val="1A1A1A"/>
-                </a:solidFill>
-                <a:latin typeface="Segoe UI"/>
-              </a:rPr>
-              <a:t>AIFORGE_SANDBOX_REQUIRED=1 refuses to fall back to the host.</a:t>
+              <a:t>researcher · 18</a:t>
+            </a:r>
+          </a:p>
+          <a:p>
+            <a:pPr algn="ctr"/>
+            <a:r>
+              <a:rPr sz="750" b="0">
+                <a:solidFill>
+                  <a:srgbClr val="1A1A1A"/>
+                </a:solidFill>
+                <a:latin typeface="Segoe UI"/>
+              </a:rPr>
+              <a:t>+ web_read, role-only</a:t>
             </a:r>
           </a:p>
         </p:txBody>
@@ -11194,413 +11123,8 @@
         </p:nvSpPr>
         <p:spPr>
           <a:xfrm>
-            <a:off x="6355080" y="1664208"/>
-            <a:ext cx="5148072" cy="713232"/>
-          </a:xfrm>
-          <a:prstGeom prst="roundRect">
-            <a:avLst>
-              <a:gd name="adj" fmla="val 10000"/>
-            </a:avLst>
-          </a:prstGeom>
-          <a:solidFill>
-            <a:srgbClr val="EAE1F0"/>
-          </a:solidFill>
-          <a:ln w="12700">
-            <a:solidFill>
-              <a:srgbClr val="5B3A6E"/>
-            </a:solidFill>
-          </a:ln>
-          <a:effectLst/>
-        </p:spPr>
-        <p:style>
-          <a:lnRef idx="1">
-            <a:schemeClr val="accent1"/>
-          </a:lnRef>
-          <a:fillRef idx="3">
-            <a:schemeClr val="accent1"/>
-          </a:fillRef>
-          <a:effectRef idx="2">
-            <a:schemeClr val="accent1"/>
-          </a:effectRef>
-          <a:fontRef idx="minor">
-            <a:schemeClr val="lt1"/>
-          </a:fontRef>
-        </p:style>
-        <p:txBody>
-          <a:bodyPr rtlCol="0" anchor="ctr" wrap="square" lIns="54864" rIns="54864" tIns="27432" bIns="27432"/>
-          <a:lstStyle/>
-          <a:p>
-            <a:pPr algn="ctr"/>
-            <a:r>
-              <a:rPr sz="1150" b="1">
-                <a:solidFill>
-                  <a:srgbClr val="5B3A6E"/>
-                </a:solidFill>
-                <a:latin typeface="Segoe UI"/>
-              </a:rPr>
-              <a:t>1 · One module decides — net/egress.py</a:t>
-            </a:r>
-          </a:p>
-          <a:p>
-            <a:pPr algn="ctr"/>
-            <a:r>
-              <a:rPr sz="850" b="0">
-                <a:solidFill>
-                  <a:srgbClr val="1A1A1A"/>
-                </a:solidFill>
-                <a:latin typeface="Segoe UI"/>
-              </a:rPr>
-              <a:t>The switches used to be read in five places and honoured in two;</a:t>
-            </a:r>
-          </a:p>
-          <a:p>
-            <a:pPr algn="ctr"/>
-            <a:r>
-              <a:rPr sz="850" b="0">
-                <a:solidFill>
-                  <a:srgbClr val="1A1A1A"/>
-                </a:solidFill>
-                <a:latin typeface="Segoe UI"/>
-              </a:rPr>
-              <a:t>web_fetch closed while fetch_url, web_read, crawl, browse sailed past.</a:t>
-            </a:r>
-          </a:p>
-        </p:txBody>
-      </p:sp>
-      <p:sp>
-        <p:nvSpPr>
-          <p:cNvPr id="15" name="Rounded Rectangle 14"/>
-          <p:cNvSpPr/>
-          <p:nvPr/>
-        </p:nvSpPr>
-        <p:spPr>
-          <a:xfrm>
-            <a:off x="6355080" y="2459736"/>
-            <a:ext cx="5148072" cy="713232"/>
-          </a:xfrm>
-          <a:prstGeom prst="roundRect">
-            <a:avLst>
-              <a:gd name="adj" fmla="val 10000"/>
-            </a:avLst>
-          </a:prstGeom>
-          <a:solidFill>
-            <a:srgbClr val="EAE1F0"/>
-          </a:solidFill>
-          <a:ln w="12700">
-            <a:solidFill>
-              <a:srgbClr val="5B3A6E"/>
-            </a:solidFill>
-          </a:ln>
-          <a:effectLst/>
-        </p:spPr>
-        <p:style>
-          <a:lnRef idx="1">
-            <a:schemeClr val="accent1"/>
-          </a:lnRef>
-          <a:fillRef idx="3">
-            <a:schemeClr val="accent1"/>
-          </a:fillRef>
-          <a:effectRef idx="2">
-            <a:schemeClr val="accent1"/>
-          </a:effectRef>
-          <a:fontRef idx="minor">
-            <a:schemeClr val="lt1"/>
-          </a:fontRef>
-        </p:style>
-        <p:txBody>
-          <a:bodyPr rtlCol="0" anchor="ctr" wrap="square" lIns="54864" rIns="54864" tIns="27432" bIns="27432"/>
-          <a:lstStyle/>
-          <a:p>
-            <a:pPr algn="ctr"/>
-            <a:r>
-              <a:rPr sz="1150" b="1">
-                <a:solidFill>
-                  <a:srgbClr val="5B3A6E"/>
-                </a:solidFill>
-                <a:latin typeface="Segoe UI"/>
-              </a:rPr>
-              <a:t>2 · Host allowlist, default DENY</a:t>
-            </a:r>
-          </a:p>
-          <a:p>
-            <a:pPr algn="ctr"/>
-            <a:r>
-              <a:rPr sz="850" b="0">
-                <a:solidFill>
-                  <a:srgbClr val="1A1A1A"/>
-                </a:solidFill>
-                <a:latin typeface="Segoe UI"/>
-              </a:rPr>
-              <a:t>Seeded from the integrations you configured + the model endpoint;</a:t>
-            </a:r>
-          </a:p>
-          <a:p>
-            <a:pPr algn="ctr"/>
-            <a:r>
-              <a:rPr sz="850" b="0">
-                <a:solidFill>
-                  <a:srgbClr val="1A1A1A"/>
-                </a:solidFill>
-                <a:latin typeface="Segoe UI"/>
-              </a:rPr>
-              <a:t>extras added in Settings. A list that will not load refuses.</a:t>
-            </a:r>
-          </a:p>
-        </p:txBody>
-      </p:sp>
-      <p:sp>
-        <p:nvSpPr>
-          <p:cNvPr id="16" name="Rounded Rectangle 15"/>
-          <p:cNvSpPr/>
-          <p:nvPr/>
-        </p:nvSpPr>
-        <p:spPr>
-          <a:xfrm>
-            <a:off x="6355080" y="3255264"/>
-            <a:ext cx="5148072" cy="713232"/>
-          </a:xfrm>
-          <a:prstGeom prst="roundRect">
-            <a:avLst>
-              <a:gd name="adj" fmla="val 10000"/>
-            </a:avLst>
-          </a:prstGeom>
-          <a:solidFill>
-            <a:srgbClr val="EAE1F0"/>
-          </a:solidFill>
-          <a:ln w="12700">
-            <a:solidFill>
-              <a:srgbClr val="5B3A6E"/>
-            </a:solidFill>
-          </a:ln>
-          <a:effectLst/>
-        </p:spPr>
-        <p:style>
-          <a:lnRef idx="1">
-            <a:schemeClr val="accent1"/>
-          </a:lnRef>
-          <a:fillRef idx="3">
-            <a:schemeClr val="accent1"/>
-          </a:fillRef>
-          <a:effectRef idx="2">
-            <a:schemeClr val="accent1"/>
-          </a:effectRef>
-          <a:fontRef idx="minor">
-            <a:schemeClr val="lt1"/>
-          </a:fontRef>
-        </p:style>
-        <p:txBody>
-          <a:bodyPr rtlCol="0" anchor="ctr" wrap="square" lIns="54864" rIns="54864" tIns="27432" bIns="27432"/>
-          <a:lstStyle/>
-          <a:p>
-            <a:pPr algn="ctr"/>
-            <a:r>
-              <a:rPr sz="1150" b="1">
-                <a:solidFill>
-                  <a:srgbClr val="5B3A6E"/>
-                </a:solidFill>
-                <a:latin typeface="Segoe UI"/>
-              </a:rPr>
-              <a:t>3 · Reading is not writing</a:t>
-            </a:r>
-          </a:p>
-          <a:p>
-            <a:pPr algn="ctr"/>
-            <a:r>
-              <a:rPr sz="850" b="0">
-                <a:solidFill>
-                  <a:srgbClr val="1A1A1A"/>
-                </a:solidFill>
-                <a:latin typeface="Segoe UI"/>
-              </a:rPr>
-              <a:t>A host added in Settings is readable only. Somewhere that RECEIVES</a:t>
-            </a:r>
-          </a:p>
-          <a:p>
-            <a:pPr algn="ctr"/>
-            <a:r>
-              <a:rPr sz="850" b="0">
-                <a:solidFill>
-                  <a:srgbClr val="1A1A1A"/>
-                </a:solidFill>
-                <a:latin typeface="Segoe UI"/>
-              </a:rPr>
-              <a:t>our data must be a configured integration, with a credential.</a:t>
-            </a:r>
-          </a:p>
-        </p:txBody>
-      </p:sp>
-      <p:sp>
-        <p:nvSpPr>
-          <p:cNvPr id="17" name="Rounded Rectangle 16"/>
-          <p:cNvSpPr/>
-          <p:nvPr/>
-        </p:nvSpPr>
-        <p:spPr>
-          <a:xfrm>
-            <a:off x="6355080" y="4050792"/>
-            <a:ext cx="5148072" cy="713232"/>
-          </a:xfrm>
-          <a:prstGeom prst="roundRect">
-            <a:avLst>
-              <a:gd name="adj" fmla="val 10000"/>
-            </a:avLst>
-          </a:prstGeom>
-          <a:solidFill>
-            <a:srgbClr val="DCEEE7"/>
-          </a:solidFill>
-          <a:ln w="12700">
-            <a:solidFill>
-              <a:srgbClr val="1E6B52"/>
-            </a:solidFill>
-          </a:ln>
-          <a:effectLst/>
-        </p:spPr>
-        <p:style>
-          <a:lnRef idx="1">
-            <a:schemeClr val="accent1"/>
-          </a:lnRef>
-          <a:fillRef idx="3">
-            <a:schemeClr val="accent1"/>
-          </a:fillRef>
-          <a:effectRef idx="2">
-            <a:schemeClr val="accent1"/>
-          </a:effectRef>
-          <a:fontRef idx="minor">
-            <a:schemeClr val="lt1"/>
-          </a:fontRef>
-        </p:style>
-        <p:txBody>
-          <a:bodyPr rtlCol="0" anchor="ctr" wrap="square" lIns="54864" rIns="54864" tIns="27432" bIns="27432"/>
-          <a:lstStyle/>
-          <a:p>
-            <a:pPr algn="ctr"/>
-            <a:r>
-              <a:rPr sz="1150" b="1">
-                <a:solidFill>
-                  <a:srgbClr val="1E6B52"/>
-                </a:solidFill>
-                <a:latin typeface="Segoe UI"/>
-              </a:rPr>
-              <a:t>4 · No human attached, no external write</a:t>
-            </a:r>
-          </a:p>
-          <a:p>
-            <a:pPr algn="ctr"/>
-            <a:r>
-              <a:rPr sz="850" b="0">
-                <a:solidFill>
-                  <a:srgbClr val="1A1A1A"/>
-                </a:solidFill>
-                <a:latin typeface="Segoe UI"/>
-              </a:rPr>
-              <a:t>An unattended run refuses writes and uploads outright — approval is</a:t>
-            </a:r>
-          </a:p>
-          <a:p>
-            <a:pPr algn="ctr"/>
-            <a:r>
-              <a:rPr sz="850" b="0">
-                <a:solidFill>
-                  <a:srgbClr val="1A1A1A"/>
-                </a:solidFill>
-                <a:latin typeface="Segoe UI"/>
-              </a:rPr>
-              <a:t>what makes them safe. AIFORGE_UNATTENDED_WRITES=1 to opt in.</a:t>
-            </a:r>
-          </a:p>
-        </p:txBody>
-      </p:sp>
-      <p:sp>
-        <p:nvSpPr>
-          <p:cNvPr id="18" name="Rounded Rectangle 17"/>
-          <p:cNvSpPr/>
-          <p:nvPr/>
-        </p:nvSpPr>
-        <p:spPr>
-          <a:xfrm>
-            <a:off x="6355080" y="4846320"/>
-            <a:ext cx="5148072" cy="713232"/>
-          </a:xfrm>
-          <a:prstGeom prst="roundRect">
-            <a:avLst>
-              <a:gd name="adj" fmla="val 10000"/>
-            </a:avLst>
-          </a:prstGeom>
-          <a:solidFill>
-            <a:srgbClr val="DCEEE7"/>
-          </a:solidFill>
-          <a:ln w="12700">
-            <a:solidFill>
-              <a:srgbClr val="1E6B52"/>
-            </a:solidFill>
-          </a:ln>
-          <a:effectLst/>
-        </p:spPr>
-        <p:style>
-          <a:lnRef idx="1">
-            <a:schemeClr val="accent1"/>
-          </a:lnRef>
-          <a:fillRef idx="3">
-            <a:schemeClr val="accent1"/>
-          </a:fillRef>
-          <a:effectRef idx="2">
-            <a:schemeClr val="accent1"/>
-          </a:effectRef>
-          <a:fontRef idx="minor">
-            <a:schemeClr val="lt1"/>
-          </a:fontRef>
-        </p:style>
-        <p:txBody>
-          <a:bodyPr rtlCol="0" anchor="ctr" wrap="square" lIns="54864" rIns="54864" tIns="27432" bIns="27432"/>
-          <a:lstStyle/>
-          <a:p>
-            <a:pPr algn="ctr"/>
-            <a:r>
-              <a:rPr sz="1150" b="1">
-                <a:solidFill>
-                  <a:srgbClr val="1E6B52"/>
-                </a:solidFill>
-                <a:latin typeface="Segoe UI"/>
-              </a:rPr>
-              <a:t>5 · Re-checked on every redirect hop</a:t>
-            </a:r>
-          </a:p>
-          <a:p>
-            <a:pPr algn="ctr"/>
-            <a:r>
-              <a:rPr sz="850" b="0">
-                <a:solidFill>
-                  <a:srgbClr val="1A1A1A"/>
-                </a:solidFill>
-                <a:latin typeface="Segoe UI"/>
-              </a:rPr>
-              <a:t>Search endpoints, SSRF / metadata (169.254.169.254) and off-list</a:t>
-            </a:r>
-          </a:p>
-          <a:p>
-            <a:pPr algn="ctr"/>
-            <a:r>
-              <a:rPr sz="850" b="0">
-                <a:solidFill>
-                  <a:srgbClr val="1A1A1A"/>
-                </a:solidFill>
-                <a:latin typeface="Segoe UI"/>
-              </a:rPr>
-              <a:t>hosts are refused after the 302, not only on the URL we were handed.</a:t>
-            </a:r>
-          </a:p>
-        </p:txBody>
-      </p:sp>
-      <p:sp>
-        <p:nvSpPr>
-          <p:cNvPr id="19" name="Rounded Rectangle 18"/>
-          <p:cNvSpPr/>
-          <p:nvPr/>
-        </p:nvSpPr>
-        <p:spPr>
-          <a:xfrm>
-            <a:off x="685800" y="5715000"/>
-            <a:ext cx="10817352" cy="502920"/>
+            <a:off x="6629400" y="2066544"/>
+            <a:ext cx="2377440" cy="420624"/>
           </a:xfrm>
           <a:prstGeom prst="roundRect">
             <a:avLst>
@@ -11637,13 +11161,643 @@
           <a:p>
             <a:pPr algn="ctr"/>
             <a:r>
+              <a:rPr sz="1100" b="1">
+                <a:solidFill>
+                  <a:srgbClr val="8A5A00"/>
+                </a:solidFill>
+                <a:latin typeface="Segoe UI"/>
+              </a:rPr>
+              <a:t>ctx_repomap · 8</a:t>
+            </a:r>
+          </a:p>
+          <a:p>
+            <a:pPr algn="ctr"/>
+            <a:r>
+              <a:rPr sz="750" b="0">
+                <a:solidFill>
+                  <a:srgbClr val="1A1A1A"/>
+                </a:solidFill>
+                <a:latin typeface="Segoe UI"/>
+              </a:rPr>
+              <a:t>read-only: no bash, no write</a:t>
+            </a:r>
+          </a:p>
+        </p:txBody>
+      </p:sp>
+      <p:sp>
+        <p:nvSpPr>
+          <p:cNvPr id="15" name="Rounded Rectangle 14"/>
+          <p:cNvSpPr/>
+          <p:nvPr/>
+        </p:nvSpPr>
+        <p:spPr>
+          <a:xfrm>
+            <a:off x="9144000" y="2066544"/>
+            <a:ext cx="2377440" cy="420624"/>
+          </a:xfrm>
+          <a:prstGeom prst="roundRect">
+            <a:avLst>
+              <a:gd name="adj" fmla="val 10000"/>
+            </a:avLst>
+          </a:prstGeom>
+          <a:solidFill>
+            <a:srgbClr val="F7DFDF"/>
+          </a:solidFill>
+          <a:ln w="12700">
+            <a:solidFill>
+              <a:srgbClr val="8C2F2F"/>
+            </a:solidFill>
+          </a:ln>
+          <a:effectLst/>
+        </p:spPr>
+        <p:style>
+          <a:lnRef idx="1">
+            <a:schemeClr val="accent1"/>
+          </a:lnRef>
+          <a:fillRef idx="3">
+            <a:schemeClr val="accent1"/>
+          </a:fillRef>
+          <a:effectRef idx="2">
+            <a:schemeClr val="accent1"/>
+          </a:effectRef>
+          <a:fontRef idx="minor">
+            <a:schemeClr val="lt1"/>
+          </a:fontRef>
+        </p:style>
+        <p:txBody>
+          <a:bodyPr rtlCol="0" anchor="ctr" wrap="square" lIns="54864" rIns="54864" tIns="27432" bIns="27432"/>
+          <a:lstStyle/>
+          <a:p>
+            <a:pPr algn="ctr"/>
+            <a:r>
+              <a:rPr sz="1100" b="1">
+                <a:solidFill>
+                  <a:srgbClr val="8C2F2F"/>
+                </a:solidFill>
+                <a:latin typeface="Segoe UI"/>
+              </a:rPr>
+              <a:t>9 of 19 roles · 0</a:t>
+            </a:r>
+          </a:p>
+          <a:p>
+            <a:pPr algn="ctr"/>
+            <a:r>
+              <a:rPr sz="750" b="0">
+                <a:solidFill>
+                  <a:srgbClr val="1A1A1A"/>
+                </a:solidFill>
+                <a:latin typeface="Segoe UI"/>
+              </a:rPr>
+              <a:t>forbidden: ALL — judgement only</a:t>
+            </a:r>
+          </a:p>
+        </p:txBody>
+      </p:sp>
+      <p:sp>
+        <p:nvSpPr>
+          <p:cNvPr id="16" name="TextBox 15"/>
+          <p:cNvSpPr txBox="1"/>
+          <p:nvPr/>
+        </p:nvSpPr>
+        <p:spPr>
+          <a:xfrm>
+            <a:off x="685800" y="2697480"/>
+            <a:ext cx="7315200" cy="219456"/>
+          </a:xfrm>
+          <a:prstGeom prst="rect">
+            <a:avLst/>
+          </a:prstGeom>
+          <a:noFill/>
+        </p:spPr>
+        <p:txBody>
+          <a:bodyPr wrap="square" anchor="t" lIns="0" rIns="0" tIns="0" bIns="0">
+            <a:spAutoFit/>
+          </a:bodyPr>
+          <a:lstStyle/>
+          <a:p>
+            <a:pPr algn="l">
+              <a:spcAft>
+                <a:spcPts val="0"/>
+              </a:spcAft>
+            </a:pPr>
+            <a:r>
+              <a:rPr sz="1000" b="1">
+                <a:solidFill>
+                  <a:srgbClr val="5B3A6E"/>
+                </a:solidFill>
+                <a:latin typeface="Segoe UI"/>
+              </a:rPr>
+              <a:t>2 · WHEN THE MODEL ASKS FOR SOMETHING THAT IS NOT THERE</a:t>
+            </a:r>
+          </a:p>
+        </p:txBody>
+      </p:sp>
+      <p:sp>
+        <p:nvSpPr>
+          <p:cNvPr id="17" name="Rounded Rectangle 16"/>
+          <p:cNvSpPr/>
+          <p:nvPr/>
+        </p:nvSpPr>
+        <p:spPr>
+          <a:xfrm>
+            <a:off x="685800" y="2944368"/>
+            <a:ext cx="3520440" cy="960120"/>
+          </a:xfrm>
+          <a:prstGeom prst="roundRect">
+            <a:avLst>
+              <a:gd name="adj" fmla="val 10000"/>
+            </a:avLst>
+          </a:prstGeom>
+          <a:solidFill>
+            <a:srgbClr val="FFFFFF"/>
+          </a:solidFill>
+          <a:ln w="12700">
+            <a:solidFill>
+              <a:srgbClr val="5B3A6E"/>
+            </a:solidFill>
+          </a:ln>
+          <a:effectLst/>
+        </p:spPr>
+        <p:style>
+          <a:lnRef idx="1">
+            <a:schemeClr val="accent1"/>
+          </a:lnRef>
+          <a:fillRef idx="3">
+            <a:schemeClr val="accent1"/>
+          </a:fillRef>
+          <a:effectRef idx="2">
+            <a:schemeClr val="accent1"/>
+          </a:effectRef>
+          <a:fontRef idx="minor">
+            <a:schemeClr val="lt1"/>
+          </a:fontRef>
+        </p:style>
+        <p:txBody>
+          <a:bodyPr rtlCol="0" anchor="ctr" wrap="square" lIns="54864" rIns="54864" tIns="27432" bIns="27432"/>
+          <a:lstStyle/>
+          <a:p>
+            <a:pPr algn="ctr"/>
+            <a:r>
               <a:rPr sz="1150" b="1">
                 <a:solidFill>
+                  <a:srgbClr val="5B3A6E"/>
+                </a:solidFill>
+                <a:latin typeface="Segoe UI"/>
+              </a:rPr>
+              <a:t>Closed dispatch table</a:t>
+            </a:r>
+          </a:p>
+          <a:p>
+            <a:pPr algn="ctr"/>
+            <a:r>
+              <a:rPr sz="850" b="0">
+                <a:solidFill>
+                  <a:srgbClr val="1A1A1A"/>
+                </a:solidFill>
+                <a:latin typeface="Segoe UI"/>
+              </a:rPr>
+              <a:t>The name is looked up in a dict of registered tools. A miss returns `unknown tool: X` — there is no fall-through to a shell, an eval, or a similarly-named tool.</a:t>
+            </a:r>
+          </a:p>
+        </p:txBody>
+      </p:sp>
+      <p:sp>
+        <p:nvSpPr>
+          <p:cNvPr id="18" name="Rounded Rectangle 17"/>
+          <p:cNvSpPr/>
+          <p:nvPr/>
+        </p:nvSpPr>
+        <p:spPr>
+          <a:xfrm>
+            <a:off x="4480560" y="2944368"/>
+            <a:ext cx="3520440" cy="960120"/>
+          </a:xfrm>
+          <a:prstGeom prst="roundRect">
+            <a:avLst>
+              <a:gd name="adj" fmla="val 10000"/>
+            </a:avLst>
+          </a:prstGeom>
+          <a:solidFill>
+            <a:srgbClr val="FFFFFF"/>
+          </a:solidFill>
+          <a:ln w="12700">
+            <a:solidFill>
+              <a:srgbClr val="5B3A6E"/>
+            </a:solidFill>
+          </a:ln>
+          <a:effectLst/>
+        </p:spPr>
+        <p:style>
+          <a:lnRef idx="1">
+            <a:schemeClr val="accent1"/>
+          </a:lnRef>
+          <a:fillRef idx="3">
+            <a:schemeClr val="accent1"/>
+          </a:fillRef>
+          <a:effectRef idx="2">
+            <a:schemeClr val="accent1"/>
+          </a:effectRef>
+          <a:fontRef idx="minor">
+            <a:schemeClr val="lt1"/>
+          </a:fontRef>
+        </p:style>
+        <p:txBody>
+          <a:bodyPr rtlCol="0" anchor="ctr" wrap="square" lIns="54864" rIns="54864" tIns="27432" bIns="27432"/>
+          <a:lstStyle/>
+          <a:p>
+            <a:pPr algn="ctr"/>
+            <a:r>
+              <a:rPr sz="1150" b="1">
+                <a:solidFill>
+                  <a:srgbClr val="5B3A6E"/>
+                </a:solidFill>
+                <a:latin typeface="Segoe UI"/>
+              </a:rPr>
+              <a:t>Phantom-tool guard</a:t>
+            </a:r>
+          </a:p>
+          <a:p>
+            <a:pPr algn="ctr"/>
+            <a:r>
+              <a:rPr sz="850" b="0">
+                <a:solidFill>
+                  <a:srgbClr val="1A1A1A"/>
+                </a:solidFill>
+                <a:latin typeface="Segoe UI"/>
+              </a:rPr>
+              <a:t>An unknown-tool error is converted in-band: "this tool does not exist and is not available to you — do not call it again". One hallucinated call cannot abort the run.</a:t>
+            </a:r>
+          </a:p>
+        </p:txBody>
+      </p:sp>
+      <p:sp>
+        <p:nvSpPr>
+          <p:cNvPr id="19" name="Rounded Rectangle 18"/>
+          <p:cNvSpPr/>
+          <p:nvPr/>
+        </p:nvSpPr>
+        <p:spPr>
+          <a:xfrm>
+            <a:off x="8275320" y="2944368"/>
+            <a:ext cx="3520440" cy="960120"/>
+          </a:xfrm>
+          <a:prstGeom prst="roundRect">
+            <a:avLst>
+              <a:gd name="adj" fmla="val 10000"/>
+            </a:avLst>
+          </a:prstGeom>
+          <a:solidFill>
+            <a:srgbClr val="FFFFFF"/>
+          </a:solidFill>
+          <a:ln w="12700">
+            <a:solidFill>
+              <a:srgbClr val="5B3A6E"/>
+            </a:solidFill>
+          </a:ln>
+          <a:effectLst/>
+        </p:spPr>
+        <p:style>
+          <a:lnRef idx="1">
+            <a:schemeClr val="accent1"/>
+          </a:lnRef>
+          <a:fillRef idx="3">
+            <a:schemeClr val="accent1"/>
+          </a:fillRef>
+          <a:effectRef idx="2">
+            <a:schemeClr val="accent1"/>
+          </a:effectRef>
+          <a:fontRef idx="minor">
+            <a:schemeClr val="lt1"/>
+          </a:fontRef>
+        </p:style>
+        <p:txBody>
+          <a:bodyPr rtlCol="0" anchor="ctr" wrap="square" lIns="54864" rIns="54864" tIns="27432" bIns="27432"/>
+          <a:lstStyle/>
+          <a:p>
+            <a:pPr algn="ctr"/>
+            <a:r>
+              <a:rPr sz="1150" b="1">
+                <a:solidFill>
+                  <a:srgbClr val="5B3A6E"/>
+                </a:solidFill>
+                <a:latin typeface="Segoe UI"/>
+              </a:rPr>
+              <a:t>Removed capabilities answer for themselves</a:t>
+            </a:r>
+          </a:p>
+          <a:p>
+            <a:pPr algn="ctr"/>
+            <a:r>
+              <a:rPr sz="850" b="0">
+                <a:solidFill>
+                  <a:srgbClr val="1A1A1A"/>
+                </a:solidFill>
+                <a:latin typeface="Segoe UI"/>
+              </a:rPr>
+              <a:t>14 spellings of web search (web_search, google, tavily_search …) reply with WHY it is gone, so the model stops walking the alias carousel and asks for a URL.</a:t>
+            </a:r>
+          </a:p>
+        </p:txBody>
+      </p:sp>
+      <p:sp>
+        <p:nvSpPr>
+          <p:cNvPr id="20" name="TextBox 19"/>
+          <p:cNvSpPr txBox="1"/>
+          <p:nvPr/>
+        </p:nvSpPr>
+        <p:spPr>
+          <a:xfrm>
+            <a:off x="685800" y="4069080"/>
+            <a:ext cx="7315200" cy="219456"/>
+          </a:xfrm>
+          <a:prstGeom prst="rect">
+            <a:avLst/>
+          </a:prstGeom>
+          <a:noFill/>
+        </p:spPr>
+        <p:txBody>
+          <a:bodyPr wrap="square" anchor="t" lIns="0" rIns="0" tIns="0" bIns="0">
+            <a:spAutoFit/>
+          </a:bodyPr>
+          <a:lstStyle/>
+          <a:p>
+            <a:pPr algn="l">
+              <a:spcAft>
+                <a:spcPts val="0"/>
+              </a:spcAft>
+            </a:pPr>
+            <a:r>
+              <a:rPr sz="1000" b="1">
+                <a:solidFill>
+                  <a:srgbClr val="1E6B52"/>
+                </a:solidFill>
+                <a:latin typeface="Segoe UI"/>
+              </a:rPr>
+              <a:t>3 · AND AGAIN AT CALL TIME, ON THE TOOLS IT DOES HAVE</a:t>
+            </a:r>
+          </a:p>
+        </p:txBody>
+      </p:sp>
+      <p:sp>
+        <p:nvSpPr>
+          <p:cNvPr id="21" name="Rounded Rectangle 20"/>
+          <p:cNvSpPr/>
+          <p:nvPr/>
+        </p:nvSpPr>
+        <p:spPr>
+          <a:xfrm>
+            <a:off x="685800" y="4315968"/>
+            <a:ext cx="3520440" cy="960120"/>
+          </a:xfrm>
+          <a:prstGeom prst="roundRect">
+            <a:avLst>
+              <a:gd name="adj" fmla="val 10000"/>
+            </a:avLst>
+          </a:prstGeom>
+          <a:solidFill>
+            <a:srgbClr val="FFFFFF"/>
+          </a:solidFill>
+          <a:ln w="12700">
+            <a:solidFill>
+              <a:srgbClr val="1E6B52"/>
+            </a:solidFill>
+          </a:ln>
+          <a:effectLst/>
+        </p:spPr>
+        <p:style>
+          <a:lnRef idx="1">
+            <a:schemeClr val="accent1"/>
+          </a:lnRef>
+          <a:fillRef idx="3">
+            <a:schemeClr val="accent1"/>
+          </a:fillRef>
+          <a:effectRef idx="2">
+            <a:schemeClr val="accent1"/>
+          </a:effectRef>
+          <a:fontRef idx="minor">
+            <a:schemeClr val="lt1"/>
+          </a:fontRef>
+        </p:style>
+        <p:txBody>
+          <a:bodyPr rtlCol="0" anchor="ctr" wrap="square" lIns="54864" rIns="54864" tIns="27432" bIns="27432"/>
+          <a:lstStyle/>
+          <a:p>
+            <a:pPr algn="ctr"/>
+            <a:r>
+              <a:rPr sz="1150" b="1">
+                <a:solidFill>
+                  <a:srgbClr val="1E6B52"/>
+                </a:solidFill>
+                <a:latin typeface="Segoe UI"/>
+              </a:rPr>
+              <a:t>Policy: allow · ask · deny</a:t>
+            </a:r>
+          </a:p>
+          <a:p>
+            <a:pPr algn="ctr"/>
+            <a:r>
+              <a:rPr sz="850" b="0">
+                <a:solidFill>
+                  <a:srgbClr val="1A1A1A"/>
+                </a:solidFill>
+                <a:latin typeface="Segoe UI"/>
+              </a:rPr>
+              <a:t>Per tool, AIFORGE_TOOL_POLICY. deny is a hard refusal — autonomous runs included. 20 external-write tools default to ask.</a:t>
+            </a:r>
+          </a:p>
+        </p:txBody>
+      </p:sp>
+      <p:sp>
+        <p:nvSpPr>
+          <p:cNvPr id="22" name="Rounded Rectangle 21"/>
+          <p:cNvSpPr/>
+          <p:nvPr/>
+        </p:nvSpPr>
+        <p:spPr>
+          <a:xfrm>
+            <a:off x="4480560" y="4315968"/>
+            <a:ext cx="3520440" cy="960120"/>
+          </a:xfrm>
+          <a:prstGeom prst="roundRect">
+            <a:avLst>
+              <a:gd name="adj" fmla="val 10000"/>
+            </a:avLst>
+          </a:prstGeom>
+          <a:solidFill>
+            <a:srgbClr val="FFFFFF"/>
+          </a:solidFill>
+          <a:ln w="12700">
+            <a:solidFill>
+              <a:srgbClr val="1E6B52"/>
+            </a:solidFill>
+          </a:ln>
+          <a:effectLst/>
+        </p:spPr>
+        <p:style>
+          <a:lnRef idx="1">
+            <a:schemeClr val="accent1"/>
+          </a:lnRef>
+          <a:fillRef idx="3">
+            <a:schemeClr val="accent1"/>
+          </a:fillRef>
+          <a:effectRef idx="2">
+            <a:schemeClr val="accent1"/>
+          </a:effectRef>
+          <a:fontRef idx="minor">
+            <a:schemeClr val="lt1"/>
+          </a:fontRef>
+        </p:style>
+        <p:txBody>
+          <a:bodyPr rtlCol="0" anchor="ctr" wrap="square" lIns="54864" rIns="54864" tIns="27432" bIns="27432"/>
+          <a:lstStyle/>
+          <a:p>
+            <a:pPr algn="ctr"/>
+            <a:r>
+              <a:rPr sz="1150" b="1">
+                <a:solidFill>
+                  <a:srgbClr val="1E6B52"/>
+                </a:solidFill>
+                <a:latin typeface="Segoe UI"/>
+              </a:rPr>
+              <a:t>PreToolUse hooks</a:t>
+            </a:r>
+          </a:p>
+          <a:p>
+            <a:pPr algn="ctr"/>
+            <a:r>
+              <a:rPr sz="850" b="0">
+                <a:solidFill>
+                  <a:srgbClr val="1A1A1A"/>
+                </a:solidFill>
+                <a:latin typeface="Segoe UI"/>
+              </a:rPr>
+              <a:t>An operator's own hook can block any call before it runs; the refusal is reported to the model as a normal tool result.</a:t>
+            </a:r>
+          </a:p>
+        </p:txBody>
+      </p:sp>
+      <p:sp>
+        <p:nvSpPr>
+          <p:cNvPr id="23" name="Rounded Rectangle 22"/>
+          <p:cNvSpPr/>
+          <p:nvPr/>
+        </p:nvSpPr>
+        <p:spPr>
+          <a:xfrm>
+            <a:off x="8275320" y="4315968"/>
+            <a:ext cx="3520440" cy="960120"/>
+          </a:xfrm>
+          <a:prstGeom prst="roundRect">
+            <a:avLst>
+              <a:gd name="adj" fmla="val 10000"/>
+            </a:avLst>
+          </a:prstGeom>
+          <a:solidFill>
+            <a:srgbClr val="FFFFFF"/>
+          </a:solidFill>
+          <a:ln w="12700">
+            <a:solidFill>
+              <a:srgbClr val="1E6B52"/>
+            </a:solidFill>
+          </a:ln>
+          <a:effectLst/>
+        </p:spPr>
+        <p:style>
+          <a:lnRef idx="1">
+            <a:schemeClr val="accent1"/>
+          </a:lnRef>
+          <a:fillRef idx="3">
+            <a:schemeClr val="accent1"/>
+          </a:fillRef>
+          <a:effectRef idx="2">
+            <a:schemeClr val="accent1"/>
+          </a:effectRef>
+          <a:fontRef idx="minor">
+            <a:schemeClr val="lt1"/>
+          </a:fontRef>
+        </p:style>
+        <p:txBody>
+          <a:bodyPr rtlCol="0" anchor="ctr" wrap="square" lIns="54864" rIns="54864" tIns="27432" bIns="27432"/>
+          <a:lstStyle/>
+          <a:p>
+            <a:pPr algn="ctr"/>
+            <a:r>
+              <a:rPr sz="1150" b="1">
+                <a:solidFill>
+                  <a:srgbClr val="1E6B52"/>
+                </a:solidFill>
+                <a:latin typeface="Segoe UI"/>
+              </a:rPr>
+              <a:t>Forced review of writes</a:t>
+            </a:r>
+          </a:p>
+          <a:p>
+            <a:pPr algn="ctr"/>
+            <a:r>
+              <a:rPr sz="850" b="0">
+                <a:solidFill>
+                  <a:srgbClr val="1A1A1A"/>
+                </a:solidFill>
+                <a:latin typeface="Segoe UI"/>
+              </a:rPr>
+              <a:t>Review mode makes every file-mutating call — including the editor aliases — wait for Approve / Reject with a diff.</a:t>
+            </a:r>
+          </a:p>
+        </p:txBody>
+      </p:sp>
+      <p:sp>
+        <p:nvSpPr>
+          <p:cNvPr id="24" name="Rounded Rectangle 23"/>
+          <p:cNvSpPr/>
+          <p:nvPr/>
+        </p:nvSpPr>
+        <p:spPr>
+          <a:xfrm>
+            <a:off x="685800" y="5532120"/>
+            <a:ext cx="10817352" cy="566928"/>
+          </a:xfrm>
+          <a:prstGeom prst="roundRect">
+            <a:avLst>
+              <a:gd name="adj" fmla="val 10000"/>
+            </a:avLst>
+          </a:prstGeom>
+          <a:solidFill>
+            <a:srgbClr val="F7ECD5"/>
+          </a:solidFill>
+          <a:ln w="12700">
+            <a:solidFill>
+              <a:srgbClr val="8A5A00"/>
+            </a:solidFill>
+          </a:ln>
+          <a:effectLst/>
+        </p:spPr>
+        <p:style>
+          <a:lnRef idx="1">
+            <a:schemeClr val="accent1"/>
+          </a:lnRef>
+          <a:fillRef idx="3">
+            <a:schemeClr val="accent1"/>
+          </a:fillRef>
+          <a:effectRef idx="2">
+            <a:schemeClr val="accent1"/>
+          </a:effectRef>
+          <a:fontRef idx="minor">
+            <a:schemeClr val="lt1"/>
+          </a:fontRef>
+        </p:style>
+        <p:txBody>
+          <a:bodyPr rtlCol="0" anchor="ctr" wrap="square" lIns="54864" rIns="54864" tIns="27432" bIns="27432"/>
+          <a:lstStyle/>
+          <a:p>
+            <a:pPr algn="ctr"/>
+            <a:r>
+              <a:rPr sz="1150" b="1">
+                <a:solidFill>
                   <a:srgbClr val="8A5A00"/>
                 </a:solidFill>
                 <a:latin typeface="Segoe UI"/>
               </a:rPr>
-              <a:t>Stated plainly — the boundary this code does not draw</a:t>
+              <a:t>Where this is a filter and not a wall</a:t>
             </a:r>
           </a:p>
           <a:p>
@@ -11655,7 +11809,7 @@
                 </a:solidFill>
                 <a:latin typeface="Segoe UI"/>
               </a:rPr>
-              <a:t>run_command and execute_ipython_cell open a socket themselves: curl in a shell never passes through the egress module and cannot be made to. That line is an OS firewall or a network namespace. Regex risk-matching is a floor, not a proof — pair it with the sandbox.</a:t>
+              <a:t>An allowlist that matches no registered tool fails OPEN with a warning — a config typo must not leave an agent tool-less — and the Doer runs unfiltered by design, its list documenting intent. The hard stops are the call-time policy, the risk gate and the sandbox.</a:t>
             </a:r>
           </a:p>
         </p:txBody>
@@ -11712,7 +11866,7 @@
                 </a:solidFill>
                 <a:latin typeface="Segoe UI"/>
               </a:rPr>
-              <a:t>Security and supply chain</a:t>
+              <a:t>Shell, kernel, and data leaving the box</a:t>
             </a:r>
           </a:p>
         </p:txBody>
@@ -11751,7 +11905,7 @@
                 </a:solidFill>
                 <a:latin typeface="Segoe UI"/>
               </a:rPr>
-              <a:t>No telemetry. Nothing leaves the machine unless you point it somewhere.</a:t>
+              <a:t>The three ways an agent can do real damage, and what stands in each path.</a:t>
             </a:r>
           </a:p>
         </p:txBody>
@@ -11834,7 +11988,7 @@
                 </a:solidFill>
                 <a:latin typeface="Segoe UI"/>
               </a:rPr>
-              <a:t>Stated plainly: by default the chat agent has full, unsandboxed shell access on the host. The workspace jail guards file tools, not arbitrary shell — run untrusted work in container mode.</a:t>
+              <a:t>Switches: AIFORGE_TOOL_POLICY · AIFORGE_RISK_ASK_CAUTION · AIFORGE_SANDBOX_REQUIRED · AIFORGE_EGRESS_OFF · AIFORGE_UPLOAD_DISABLE · AIFORGE_UNATTENDED_WRITES</a:t>
             </a:r>
           </a:p>
         </p:txBody>
@@ -11880,14 +12034,83 @@
       </p:sp>
       <p:sp>
         <p:nvSpPr>
-          <p:cNvPr id="7" name="TextBox 6"/>
+          <p:cNvPr id="7" name="Rounded Rectangle 6"/>
+          <p:cNvSpPr/>
+          <p:nvPr/>
+        </p:nvSpPr>
+        <p:spPr>
+          <a:xfrm>
+            <a:off x="685800" y="1325880"/>
+            <a:ext cx="3520440" cy="475488"/>
+          </a:xfrm>
+          <a:prstGeom prst="roundRect">
+            <a:avLst>
+              <a:gd name="adj" fmla="val 10000"/>
+            </a:avLst>
+          </a:prstGeom>
+          <a:solidFill>
+            <a:srgbClr val="DCE7F2"/>
+          </a:solidFill>
+          <a:ln w="12700">
+            <a:solidFill>
+              <a:srgbClr val="1F4E79"/>
+            </a:solidFill>
+          </a:ln>
+          <a:effectLst/>
+        </p:spPr>
+        <p:style>
+          <a:lnRef idx="1">
+            <a:schemeClr val="accent1"/>
+          </a:lnRef>
+          <a:fillRef idx="3">
+            <a:schemeClr val="accent1"/>
+          </a:fillRef>
+          <a:effectRef idx="2">
+            <a:schemeClr val="accent1"/>
+          </a:effectRef>
+          <a:fontRef idx="minor">
+            <a:schemeClr val="lt1"/>
+          </a:fontRef>
+        </p:style>
+        <p:txBody>
+          <a:bodyPr rtlCol="0" anchor="ctr" wrap="square" lIns="54864" rIns="54864" tIns="27432" bIns="27432"/>
+          <a:lstStyle/>
+          <a:p>
+            <a:pPr algn="ctr"/>
+            <a:r>
+              <a:rPr sz="1300" b="1">
+                <a:solidFill>
+                  <a:srgbClr val="1F4E79"/>
+                </a:solidFill>
+                <a:latin typeface="Segoe UI"/>
+              </a:rPr>
+              <a:t>Shell commands</a:t>
+            </a:r>
+          </a:p>
+          <a:p>
+            <a:pPr algn="ctr"/>
+            <a:r>
+              <a:rPr sz="850" b="0">
+                <a:solidFill>
+                  <a:srgbClr val="1A1A1A"/>
+                </a:solidFill>
+                <a:latin typeface="Segoe UI"/>
+              </a:rPr>
+              <a:t>every tool carrying a command string</a:t>
+            </a:r>
+          </a:p>
+        </p:txBody>
+      </p:sp>
+      <p:sp>
+        <p:nvSpPr>
+          <p:cNvPr id="8" name="TextBox 7"/>
           <p:cNvSpPr txBox="1"/>
           <p:nvPr/>
         </p:nvSpPr>
         <p:spPr>
           <a:xfrm>
-            <a:off x="685800" y="1325880"/>
-            <a:ext cx="5486400" cy="228600"/>
+            <a:off x="731520" y="1938528"/>
+            <a:ext cx="3429000" cy="621792"/>
           </a:xfrm>
           <a:prstGeom prst="rect">
             <a:avLst/>
@@ -11906,27 +12129,447 @@
               </a:spcAft>
             </a:pPr>
             <a:r>
-              <a:rPr sz="1000" b="1">
-                <a:solidFill>
-                  <a:srgbClr val="6B6B6B"/>
-                </a:solidFill>
-                <a:latin typeface="Segoe UI"/>
-              </a:rPr>
-              <a:t>SCANNED AND TRIAGED</a:t>
-            </a:r>
-          </a:p>
-        </p:txBody>
-      </p:sp>
-      <p:sp>
-        <p:nvSpPr>
-          <p:cNvPr id="8" name="Rounded Rectangle 7"/>
+              <a:rPr sz="900" b="0">
+                <a:solidFill>
+                  <a:srgbClr val="1A1A1A"/>
+                </a:solidFill>
+                <a:latin typeface="Segoe UI"/>
+              </a:rPr>
+              <a:t>· Assessed on: run_command · bash · shell · run_shell · serve · watch_until · ui_check. serve, watch_until and ui_check were holes — same string, no verdict.</a:t>
+            </a:r>
+          </a:p>
+        </p:txBody>
+      </p:sp>
+      <p:sp>
+        <p:nvSpPr>
+          <p:cNvPr id="9" name="TextBox 8"/>
+          <p:cNvSpPr txBox="1"/>
+          <p:nvPr/>
+        </p:nvSpPr>
+        <p:spPr>
+          <a:xfrm>
+            <a:off x="731520" y="2596896"/>
+            <a:ext cx="3429000" cy="621792"/>
+          </a:xfrm>
+          <a:prstGeom prst="rect">
+            <a:avLst/>
+          </a:prstGeom>
+          <a:noFill/>
+        </p:spPr>
+        <p:txBody>
+          <a:bodyPr wrap="square" anchor="t" lIns="0" rIns="0" tIns="0" bIns="0">
+            <a:spAutoFit/>
+          </a:bodyPr>
+          <a:lstStyle/>
+          <a:p>
+            <a:pPr algn="l">
+              <a:spcAft>
+                <a:spcPts val="0"/>
+              </a:spcAft>
+            </a:pPr>
+            <a:r>
+              <a:rPr sz="900" b="0">
+                <a:solidFill>
+                  <a:srgbClr val="1A1A1A"/>
+                </a:solidFill>
+                <a:latin typeface="Segoe UI"/>
+              </a:rPr>
+              <a:t>· dangerous → curl | sh · base64 | sh · scp/curl of ~/.ssh, .env, id_rsa, credentials · mkfs · dd of=/dev/* · fork bomb · shred. Refused unless confirmed.</a:t>
+            </a:r>
+          </a:p>
+        </p:txBody>
+      </p:sp>
+      <p:sp>
+        <p:nvSpPr>
+          <p:cNvPr id="10" name="TextBox 9"/>
+          <p:cNvSpPr txBox="1"/>
+          <p:nvPr/>
+        </p:nvSpPr>
+        <p:spPr>
+          <a:xfrm>
+            <a:off x="731520" y="3255264"/>
+            <a:ext cx="3429000" cy="621792"/>
+          </a:xfrm>
+          <a:prstGeom prst="rect">
+            <a:avLst/>
+          </a:prstGeom>
+          <a:noFill/>
+        </p:spPr>
+        <p:txBody>
+          <a:bodyPr wrap="square" anchor="t" lIns="0" rIns="0" tIns="0" bIns="0">
+            <a:spAutoFit/>
+          </a:bodyPr>
+          <a:lstStyle/>
+          <a:p>
+            <a:pPr algn="l">
+              <a:spcAft>
+                <a:spcPts val="0"/>
+              </a:spcAft>
+            </a:pPr>
+            <a:r>
+              <a:rPr sz="900" b="0">
+                <a:solidFill>
+                  <a:srgbClr val="1A1A1A"/>
+                </a:solidFill>
+                <a:latin typeface="Segoe UI"/>
+              </a:rPr>
+              <a:t>· caution → sudo · chmod 777 · chown · ANY git push · gh pr create · global installs · crontab · iptables. Asks by default.</a:t>
+            </a:r>
+          </a:p>
+        </p:txBody>
+      </p:sp>
+      <p:sp>
+        <p:nvSpPr>
+          <p:cNvPr id="11" name="TextBox 10"/>
+          <p:cNvSpPr txBox="1"/>
+          <p:nvPr/>
+        </p:nvSpPr>
+        <p:spPr>
+          <a:xfrm>
+            <a:off x="731520" y="3913632"/>
+            <a:ext cx="3429000" cy="621792"/>
+          </a:xfrm>
+          <a:prstGeom prst="rect">
+            <a:avLst/>
+          </a:prstGeom>
+          <a:noFill/>
+        </p:spPr>
+        <p:txBody>
+          <a:bodyPr wrap="square" anchor="t" lIns="0" rIns="0" tIns="0" bIns="0">
+            <a:spAutoFit/>
+          </a:bodyPr>
+          <a:lstStyle/>
+          <a:p>
+            <a:pPr algn="l">
+              <a:spcAft>
+                <a:spcPts val="0"/>
+              </a:spcAft>
+            </a:pPr>
+            <a:r>
+              <a:rPr sz="900" b="0">
+                <a:solidFill>
+                  <a:srgbClr val="1A1A1A"/>
+                </a:solidFill>
+                <a:latin typeface="Segoe UI"/>
+              </a:rPr>
+              <a:t>· Obfuscation is normalised before matching: ${IFS}, empty quote pairs (r''m), in-word backslashes.</a:t>
+            </a:r>
+          </a:p>
+        </p:txBody>
+      </p:sp>
+      <p:sp>
+        <p:nvSpPr>
+          <p:cNvPr id="12" name="TextBox 11"/>
+          <p:cNvSpPr txBox="1"/>
+          <p:nvPr/>
+        </p:nvSpPr>
+        <p:spPr>
+          <a:xfrm>
+            <a:off x="731520" y="4572000"/>
+            <a:ext cx="3429000" cy="621792"/>
+          </a:xfrm>
+          <a:prstGeom prst="rect">
+            <a:avLst/>
+          </a:prstGeom>
+          <a:noFill/>
+        </p:spPr>
+        <p:txBody>
+          <a:bodyPr wrap="square" anchor="t" lIns="0" rIns="0" tIns="0" bIns="0">
+            <a:spAutoFit/>
+          </a:bodyPr>
+          <a:lstStyle/>
+          <a:p>
+            <a:pPr algn="l">
+              <a:spcAft>
+                <a:spcPts val="0"/>
+              </a:spcAft>
+            </a:pPr>
+            <a:r>
+              <a:rPr sz="900" b="0">
+                <a:solidFill>
+                  <a:srgbClr val="1A1A1A"/>
+                </a:solidFill>
+                <a:latin typeface="Segoe UI"/>
+              </a:rPr>
+              <a:t>· Floors underneath: delete guard fires with approvals off · git add -A refused · workspace jail clamps paths · Docker sandbox opt-in, REQUIRED mode refuses host fallback.</a:t>
+            </a:r>
+          </a:p>
+        </p:txBody>
+      </p:sp>
+      <p:sp>
+        <p:nvSpPr>
+          <p:cNvPr id="13" name="Rounded Rectangle 12"/>
           <p:cNvSpPr/>
           <p:nvPr/>
         </p:nvSpPr>
         <p:spPr>
           <a:xfrm>
-            <a:off x="685800" y="1600200"/>
-            <a:ext cx="1691640" cy="1051560"/>
+            <a:off x="4480560" y="1325880"/>
+            <a:ext cx="3520440" cy="475488"/>
+          </a:xfrm>
+          <a:prstGeom prst="roundRect">
+            <a:avLst>
+              <a:gd name="adj" fmla="val 10000"/>
+            </a:avLst>
+          </a:prstGeom>
+          <a:solidFill>
+            <a:srgbClr val="EAE1F0"/>
+          </a:solidFill>
+          <a:ln w="12700">
+            <a:solidFill>
+              <a:srgbClr val="5B3A6E"/>
+            </a:solidFill>
+          </a:ln>
+          <a:effectLst/>
+        </p:spPr>
+        <p:style>
+          <a:lnRef idx="1">
+            <a:schemeClr val="accent1"/>
+          </a:lnRef>
+          <a:fillRef idx="3">
+            <a:schemeClr val="accent1"/>
+          </a:fillRef>
+          <a:effectRef idx="2">
+            <a:schemeClr val="accent1"/>
+          </a:effectRef>
+          <a:fontRef idx="minor">
+            <a:schemeClr val="lt1"/>
+          </a:fontRef>
+        </p:style>
+        <p:txBody>
+          <a:bodyPr rtlCol="0" anchor="ctr" wrap="square" lIns="54864" rIns="54864" tIns="27432" bIns="27432"/>
+          <a:lstStyle/>
+          <a:p>
+            <a:pPr algn="ctr"/>
+            <a:r>
+              <a:rPr sz="1300" b="1">
+                <a:solidFill>
+                  <a:srgbClr val="5B3A6E"/>
+                </a:solidFill>
+                <a:latin typeface="Segoe UI"/>
+              </a:rPr>
+              <a:t>IPython kernel</a:t>
+            </a:r>
+          </a:p>
+          <a:p>
+            <a:pPr algn="ctr"/>
+            <a:r>
+              <a:rPr sz="850" b="0">
+                <a:solidFill>
+                  <a:srgbClr val="1A1A1A"/>
+                </a:solidFill>
+                <a:latin typeface="Segoe UI"/>
+              </a:rPr>
+              <a:t>execute_ipython_cell — arbitrary Python</a:t>
+            </a:r>
+          </a:p>
+        </p:txBody>
+      </p:sp>
+      <p:sp>
+        <p:nvSpPr>
+          <p:cNvPr id="14" name="TextBox 13"/>
+          <p:cNvSpPr txBox="1"/>
+          <p:nvPr/>
+        </p:nvSpPr>
+        <p:spPr>
+          <a:xfrm>
+            <a:off x="4526280" y="1938528"/>
+            <a:ext cx="3429000" cy="621792"/>
+          </a:xfrm>
+          <a:prstGeom prst="rect">
+            <a:avLst/>
+          </a:prstGeom>
+          <a:noFill/>
+        </p:spPr>
+        <p:txBody>
+          <a:bodyPr wrap="square" anchor="t" lIns="0" rIns="0" tIns="0" bIns="0">
+            <a:spAutoFit/>
+          </a:bodyPr>
+          <a:lstStyle/>
+          <a:p>
+            <a:pPr algn="l">
+              <a:spcAft>
+                <a:spcPts val="0"/>
+              </a:spcAft>
+            </a:pPr>
+            <a:r>
+              <a:rPr sz="900" b="0">
+                <a:solidFill>
+                  <a:srgbClr val="1A1A1A"/>
+                </a:solidFill>
+                <a:latin typeface="Segoe UI"/>
+              </a:rPr>
+              <a:t>· Defaults to ASK, like Cursor and Claude Code gate code execution: arbitrary code in a live kernel is never a silent call.</a:t>
+            </a:r>
+          </a:p>
+        </p:txBody>
+      </p:sp>
+      <p:sp>
+        <p:nvSpPr>
+          <p:cNvPr id="15" name="TextBox 14"/>
+          <p:cNvSpPr txBox="1"/>
+          <p:nvPr/>
+        </p:nvSpPr>
+        <p:spPr>
+          <a:xfrm>
+            <a:off x="4526280" y="2596896"/>
+            <a:ext cx="3429000" cy="621792"/>
+          </a:xfrm>
+          <a:prstGeom prst="rect">
+            <a:avLst/>
+          </a:prstGeom>
+          <a:noFill/>
+        </p:spPr>
+        <p:txBody>
+          <a:bodyPr wrap="square" anchor="t" lIns="0" rIns="0" tIns="0" bIns="0">
+            <a:spAutoFit/>
+          </a:bodyPr>
+          <a:lstStyle/>
+          <a:p>
+            <a:pPr algn="l">
+              <a:spcAft>
+                <a:spcPts val="0"/>
+              </a:spcAft>
+            </a:pPr>
+            <a:r>
+              <a:rPr sz="900" b="0">
+                <a:solidFill>
+                  <a:srgbClr val="1A1A1A"/>
+                </a:solidFill>
+                <a:latin typeface="Segoe UI"/>
+              </a:rPr>
+              <a:t>· Bounded: 60 s timeout then the kernel is interrupted, output capped at 8 KB, one kernel per run, destroyed in the runner's finally block.</a:t>
+            </a:r>
+          </a:p>
+        </p:txBody>
+      </p:sp>
+      <p:sp>
+        <p:nvSpPr>
+          <p:cNvPr id="16" name="TextBox 15"/>
+          <p:cNvSpPr txBox="1"/>
+          <p:nvPr/>
+        </p:nvSpPr>
+        <p:spPr>
+          <a:xfrm>
+            <a:off x="4526280" y="3255264"/>
+            <a:ext cx="3429000" cy="621792"/>
+          </a:xfrm>
+          <a:prstGeom prst="rect">
+            <a:avLst/>
+          </a:prstGeom>
+          <a:noFill/>
+        </p:spPr>
+        <p:txBody>
+          <a:bodyPr wrap="square" anchor="t" lIns="0" rIns="0" tIns="0" bIns="0">
+            <a:spAutoFit/>
+          </a:bodyPr>
+          <a:lstStyle/>
+          <a:p>
+            <a:pPr algn="l">
+              <a:spcAft>
+                <a:spcPts val="0"/>
+              </a:spcAft>
+            </a:pPr>
+            <a:r>
+              <a:rPr sz="900" b="0">
+                <a:solidFill>
+                  <a:srgbClr val="1A1A1A"/>
+                </a:solidFill>
+                <a:latin typeface="Segoe UI"/>
+              </a:rPr>
+              <a:t>· Scoped away entirely from the roles that have no business running code — the nine forbidden: ALL judgement agents and the read-only ctx_* gatherers.</a:t>
+            </a:r>
+          </a:p>
+        </p:txBody>
+      </p:sp>
+      <p:sp>
+        <p:nvSpPr>
+          <p:cNvPr id="17" name="TextBox 16"/>
+          <p:cNvSpPr txBox="1"/>
+          <p:nvPr/>
+        </p:nvSpPr>
+        <p:spPr>
+          <a:xfrm>
+            <a:off x="4526280" y="3913632"/>
+            <a:ext cx="3429000" cy="621792"/>
+          </a:xfrm>
+          <a:prstGeom prst="rect">
+            <a:avLst/>
+          </a:prstGeom>
+          <a:noFill/>
+        </p:spPr>
+        <p:txBody>
+          <a:bodyPr wrap="square" anchor="t" lIns="0" rIns="0" tIns="0" bIns="0">
+            <a:spAutoFit/>
+          </a:bodyPr>
+          <a:lstStyle/>
+          <a:p>
+            <a:pPr algn="l">
+              <a:spcAft>
+                <a:spcPts val="0"/>
+              </a:spcAft>
+            </a:pPr>
+            <a:r>
+              <a:rPr sz="900" b="0">
+                <a:solidFill>
+                  <a:srgbClr val="1A1A1A"/>
+                </a:solidFill>
+                <a:latin typeface="Segoe UI"/>
+              </a:rPr>
+              <a:t>· It can still open a socket and write a file: it is Python, not a tool with a schema. The sandbox routes bash, not the kernel.</a:t>
+            </a:r>
+          </a:p>
+        </p:txBody>
+      </p:sp>
+      <p:sp>
+        <p:nvSpPr>
+          <p:cNvPr id="18" name="TextBox 17"/>
+          <p:cNvSpPr txBox="1"/>
+          <p:nvPr/>
+        </p:nvSpPr>
+        <p:spPr>
+          <a:xfrm>
+            <a:off x="4526280" y="4572000"/>
+            <a:ext cx="3429000" cy="621792"/>
+          </a:xfrm>
+          <a:prstGeom prst="rect">
+            <a:avLst/>
+          </a:prstGeom>
+          <a:noFill/>
+        </p:spPr>
+        <p:txBody>
+          <a:bodyPr wrap="square" anchor="t" lIns="0" rIns="0" tIns="0" bIns="0">
+            <a:spAutoFit/>
+          </a:bodyPr>
+          <a:lstStyle/>
+          <a:p>
+            <a:pPr algn="l">
+              <a:spcAft>
+                <a:spcPts val="0"/>
+              </a:spcAft>
+            </a:pPr>
+            <a:r>
+              <a:rPr sz="900" b="0">
+                <a:solidFill>
+                  <a:srgbClr val="1A1A1A"/>
+                </a:solidFill>
+                <a:latin typeface="Segoe UI"/>
+              </a:rPr>
+              <a:t>· An unattended run has no approver, so ASK degrades to allow. Container mode is the boundary for untrusted work.</a:t>
+            </a:r>
+          </a:p>
+        </p:txBody>
+      </p:sp>
+      <p:sp>
+        <p:nvSpPr>
+          <p:cNvPr id="19" name="Rounded Rectangle 18"/>
+          <p:cNvSpPr/>
+          <p:nvPr/>
+        </p:nvSpPr>
+        <p:spPr>
+          <a:xfrm>
+            <a:off x="8183879" y="1325880"/>
+            <a:ext cx="3319272" cy="475488"/>
           </a:xfrm>
           <a:prstGeom prst="roundRect">
             <a:avLst>
@@ -11963,13 +12606,13 @@
           <a:p>
             <a:pPr algn="ctr"/>
             <a:r>
-              <a:rPr sz="2200" b="1">
+              <a:rPr sz="1300" b="1">
                 <a:solidFill>
                   <a:srgbClr val="1E6B52"/>
                 </a:solidFill>
                 <a:latin typeface="Segoe UI"/>
               </a:rPr>
-              <a:t>0</a:t>
+              <a:t>Data leaving</a:t>
             </a:r>
           </a:p>
           <a:p>
@@ -11981,90 +12624,216 @@
                 </a:solidFill>
                 <a:latin typeface="Segoe UI"/>
               </a:rPr>
-              <a:t>Sonar bugs</a:t>
-            </a:r>
-          </a:p>
-        </p:txBody>
-      </p:sp>
-      <p:sp>
-        <p:nvSpPr>
-          <p:cNvPr id="9" name="Rounded Rectangle 8"/>
+              <a:t>API calls, uploads, mail, telemetry</a:t>
+            </a:r>
+          </a:p>
+        </p:txBody>
+      </p:sp>
+      <p:sp>
+        <p:nvSpPr>
+          <p:cNvPr id="20" name="TextBox 19"/>
+          <p:cNvSpPr txBox="1"/>
+          <p:nvPr/>
+        </p:nvSpPr>
+        <p:spPr>
+          <a:xfrm>
+            <a:off x="8229599" y="1938528"/>
+            <a:ext cx="3227832" cy="621792"/>
+          </a:xfrm>
+          <a:prstGeom prst="rect">
+            <a:avLst/>
+          </a:prstGeom>
+          <a:noFill/>
+        </p:spPr>
+        <p:txBody>
+          <a:bodyPr wrap="square" anchor="t" lIns="0" rIns="0" tIns="0" bIns="0">
+            <a:spAutoFit/>
+          </a:bodyPr>
+          <a:lstStyle/>
+          <a:p>
+            <a:pPr algn="l">
+              <a:spcAft>
+                <a:spcPts val="0"/>
+              </a:spcAft>
+            </a:pPr>
+            <a:r>
+              <a:rPr sz="900" b="0">
+                <a:solidFill>
+                  <a:srgbClr val="1A1A1A"/>
+                </a:solidFill>
+                <a:latin typeface="Segoe UI"/>
+              </a:rPr>
+              <a:t>· One decision point: egress.allow() on integration · email · telemetry · mcp · sync, and on every page fetch.</a:t>
+            </a:r>
+          </a:p>
+        </p:txBody>
+      </p:sp>
+      <p:sp>
+        <p:nvSpPr>
+          <p:cNvPr id="21" name="TextBox 20"/>
+          <p:cNvSpPr txBox="1"/>
+          <p:nvPr/>
+        </p:nvSpPr>
+        <p:spPr>
+          <a:xfrm>
+            <a:off x="8229599" y="2596896"/>
+            <a:ext cx="3227832" cy="621792"/>
+          </a:xfrm>
+          <a:prstGeom prst="rect">
+            <a:avLst/>
+          </a:prstGeom>
+          <a:noFill/>
+        </p:spPr>
+        <p:txBody>
+          <a:bodyPr wrap="square" anchor="t" lIns="0" rIns="0" tIns="0" bIns="0">
+            <a:spAutoFit/>
+          </a:bodyPr>
+          <a:lstStyle/>
+          <a:p>
+            <a:pPr algn="l">
+              <a:spcAft>
+                <a:spcPts val="0"/>
+              </a:spcAft>
+            </a:pPr>
+            <a:r>
+              <a:rPr sz="900" b="0">
+                <a:solidFill>
+                  <a:srgbClr val="1A1A1A"/>
+                </a:solidFill>
+                <a:latin typeface="Segoe UI"/>
+              </a:rPr>
+              <a:t>· Host allowlist defaults to DENY, seeded from the integrations you configured. If the list cannot be read, the call is refused.</a:t>
+            </a:r>
+          </a:p>
+        </p:txBody>
+      </p:sp>
+      <p:sp>
+        <p:nvSpPr>
+          <p:cNvPr id="22" name="TextBox 21"/>
+          <p:cNvSpPr txBox="1"/>
+          <p:nvPr/>
+        </p:nvSpPr>
+        <p:spPr>
+          <a:xfrm>
+            <a:off x="8229599" y="3255264"/>
+            <a:ext cx="3227832" cy="621792"/>
+          </a:xfrm>
+          <a:prstGeom prst="rect">
+            <a:avLst/>
+          </a:prstGeom>
+          <a:noFill/>
+        </p:spPr>
+        <p:txBody>
+          <a:bodyPr wrap="square" anchor="t" lIns="0" rIns="0" tIns="0" bIns="0">
+            <a:spAutoFit/>
+          </a:bodyPr>
+          <a:lstStyle/>
+          <a:p>
+            <a:pPr algn="l">
+              <a:spcAft>
+                <a:spcPts val="0"/>
+              </a:spcAft>
+            </a:pPr>
+            <a:r>
+              <a:rPr sz="900" b="0">
+                <a:solidFill>
+                  <a:srgbClr val="1A1A1A"/>
+                </a:solidFill>
+                <a:latin typeface="Segoe UI"/>
+              </a:rPr>
+              <a:t>· Reading is not writing: a host added in Settings can be read, never posted to. A destination that RECEIVES data must be a configured integration with a credential.</a:t>
+            </a:r>
+          </a:p>
+        </p:txBody>
+      </p:sp>
+      <p:sp>
+        <p:nvSpPr>
+          <p:cNvPr id="23" name="TextBox 22"/>
+          <p:cNvSpPr txBox="1"/>
+          <p:nvPr/>
+        </p:nvSpPr>
+        <p:spPr>
+          <a:xfrm>
+            <a:off x="8229599" y="3913632"/>
+            <a:ext cx="3227832" cy="621792"/>
+          </a:xfrm>
+          <a:prstGeom prst="rect">
+            <a:avLst/>
+          </a:prstGeom>
+          <a:noFill/>
+        </p:spPr>
+        <p:txBody>
+          <a:bodyPr wrap="square" anchor="t" lIns="0" rIns="0" tIns="0" bIns="0">
+            <a:spAutoFit/>
+          </a:bodyPr>
+          <a:lstStyle/>
+          <a:p>
+            <a:pPr algn="l">
+              <a:spcAft>
+                <a:spcPts val="0"/>
+              </a:spcAft>
+            </a:pPr>
+            <a:r>
+              <a:rPr sz="900" b="0">
+                <a:solidFill>
+                  <a:srgbClr val="1A1A1A"/>
+                </a:solidFill>
+                <a:latin typeface="Segoe UI"/>
+              </a:rPr>
+              <a:t>· An upload has its own switch — an attachment is file content, not a sentence (AIFORGE_UPLOAD_DISABLE).</a:t>
+            </a:r>
+          </a:p>
+        </p:txBody>
+      </p:sp>
+      <p:sp>
+        <p:nvSpPr>
+          <p:cNvPr id="24" name="TextBox 23"/>
+          <p:cNvSpPr txBox="1"/>
+          <p:nvPr/>
+        </p:nvSpPr>
+        <p:spPr>
+          <a:xfrm>
+            <a:off x="8229599" y="4572000"/>
+            <a:ext cx="3227832" cy="621792"/>
+          </a:xfrm>
+          <a:prstGeom prst="rect">
+            <a:avLst/>
+          </a:prstGeom>
+          <a:noFill/>
+        </p:spPr>
+        <p:txBody>
+          <a:bodyPr wrap="square" anchor="t" lIns="0" rIns="0" tIns="0" bIns="0">
+            <a:spAutoFit/>
+          </a:bodyPr>
+          <a:lstStyle/>
+          <a:p>
+            <a:pPr algn="l">
+              <a:spcAft>
+                <a:spcPts val="0"/>
+              </a:spcAft>
+            </a:pPr>
+            <a:r>
+              <a:rPr sz="900" b="0">
+                <a:solidFill>
+                  <a:srgbClr val="1A1A1A"/>
+                </a:solidFill>
+                <a:latin typeface="Segoe UI"/>
+              </a:rPr>
+              <a:t>· 20 write tools (jira · confluence · gitlab · email_send · github_pr) default to ASK, and an unattended run refuses them outright. No telemetry by default.</a:t>
+            </a:r>
+          </a:p>
+        </p:txBody>
+      </p:sp>
+      <p:sp>
+        <p:nvSpPr>
+          <p:cNvPr id="25" name="Rounded Rectangle 24"/>
           <p:cNvSpPr/>
           <p:nvPr/>
         </p:nvSpPr>
         <p:spPr>
           <a:xfrm>
-            <a:off x="2532888" y="1600200"/>
-            <a:ext cx="1691640" cy="1051560"/>
-          </a:xfrm>
-          <a:prstGeom prst="roundRect">
-            <a:avLst>
-              <a:gd name="adj" fmla="val 10000"/>
-            </a:avLst>
-          </a:prstGeom>
-          <a:solidFill>
-            <a:srgbClr val="DCEEE7"/>
-          </a:solidFill>
-          <a:ln w="12700">
-            <a:solidFill>
-              <a:srgbClr val="1E6B52"/>
-            </a:solidFill>
-          </a:ln>
-          <a:effectLst/>
-        </p:spPr>
-        <p:style>
-          <a:lnRef idx="1">
-            <a:schemeClr val="accent1"/>
-          </a:lnRef>
-          <a:fillRef idx="3">
-            <a:schemeClr val="accent1"/>
-          </a:fillRef>
-          <a:effectRef idx="2">
-            <a:schemeClr val="accent1"/>
-          </a:effectRef>
-          <a:fontRef idx="minor">
-            <a:schemeClr val="lt1"/>
-          </a:fontRef>
-        </p:style>
-        <p:txBody>
-          <a:bodyPr rtlCol="0" anchor="ctr" wrap="square" lIns="54864" rIns="54864" tIns="27432" bIns="27432"/>
-          <a:lstStyle/>
-          <a:p>
-            <a:pPr algn="ctr"/>
-            <a:r>
-              <a:rPr sz="2200" b="1">
-                <a:solidFill>
-                  <a:srgbClr val="1E6B52"/>
-                </a:solidFill>
-                <a:latin typeface="Segoe UI"/>
-              </a:rPr>
-              <a:t>0</a:t>
-            </a:r>
-          </a:p>
-          <a:p>
-            <a:pPr algn="ctr"/>
-            <a:r>
-              <a:rPr sz="850" b="0">
-                <a:solidFill>
-                  <a:srgbClr val="1A1A1A"/>
-                </a:solidFill>
-                <a:latin typeface="Segoe UI"/>
-              </a:rPr>
-              <a:t>Trivy findings</a:t>
-            </a:r>
-          </a:p>
-        </p:txBody>
-      </p:sp>
-      <p:sp>
-        <p:nvSpPr>
-          <p:cNvPr id="10" name="Rounded Rectangle 9"/>
-          <p:cNvSpPr/>
-          <p:nvPr/>
-        </p:nvSpPr>
-        <p:spPr>
-          <a:xfrm>
-            <a:off x="4379976" y="1600200"/>
-            <a:ext cx="1691640" cy="1051560"/>
+            <a:off x="685800" y="5321808"/>
+            <a:ext cx="10817352" cy="566928"/>
           </a:xfrm>
           <a:prstGeom prst="roundRect">
             <a:avLst>
@@ -12101,1252 +12870,25 @@
           <a:p>
             <a:pPr algn="ctr"/>
             <a:r>
-              <a:rPr sz="2200" b="1">
+              <a:rPr sz="1150" b="1">
                 <a:solidFill>
                   <a:srgbClr val="8A5A00"/>
                 </a:solidFill>
                 <a:latin typeface="Segoe UI"/>
               </a:rPr>
-              <a:t>9</a:t>
-            </a:r>
-          </a:p>
-          <a:p>
-            <a:pPr algn="ctr"/>
-            <a:r>
-              <a:rPr sz="850" b="0">
-                <a:solidFill>
-                  <a:srgbClr val="1A1A1A"/>
-                </a:solidFill>
-                <a:latin typeface="Segoe UI"/>
-              </a:rPr>
-              <a:t>vulns — all</a:t>
-            </a:r>
-          </a:p>
-          <a:p>
-            <a:pPr algn="ctr"/>
-            <a:r>
-              <a:rPr sz="850" b="0">
-                <a:solidFill>
-                  <a:srgbClr val="1A1A1A"/>
-                </a:solidFill>
-                <a:latin typeface="Segoe UI"/>
-              </a:rPr>
-              <a:t>documented TLS</a:t>
-            </a:r>
-          </a:p>
-          <a:p>
-            <a:pPr algn="ctr"/>
-            <a:r>
-              <a:rPr sz="850" b="0">
-                <a:solidFill>
-                  <a:srgbClr val="1A1A1A"/>
-                </a:solidFill>
-                <a:latin typeface="Segoe UI"/>
-              </a:rPr>
-              <a:t>opt-outs</a:t>
-            </a:r>
-          </a:p>
-        </p:txBody>
-      </p:sp>
-      <p:sp>
-        <p:nvSpPr>
-          <p:cNvPr id="11" name="Rounded Rectangle 10"/>
-          <p:cNvSpPr/>
-          <p:nvPr/>
-        </p:nvSpPr>
-        <p:spPr>
-          <a:xfrm>
-            <a:off x="6227064" y="1600200"/>
-            <a:ext cx="1691640" cy="1051560"/>
-          </a:xfrm>
-          <a:prstGeom prst="roundRect">
-            <a:avLst>
-              <a:gd name="adj" fmla="val 10000"/>
-            </a:avLst>
-          </a:prstGeom>
-          <a:solidFill>
-            <a:srgbClr val="ECECEC"/>
-          </a:solidFill>
-          <a:ln w="12700">
-            <a:solidFill>
-              <a:srgbClr val="3A3A3A"/>
-            </a:solidFill>
-          </a:ln>
-          <a:effectLst/>
-        </p:spPr>
-        <p:style>
-          <a:lnRef idx="1">
-            <a:schemeClr val="accent1"/>
-          </a:lnRef>
-          <a:fillRef idx="3">
-            <a:schemeClr val="accent1"/>
-          </a:fillRef>
-          <a:effectRef idx="2">
-            <a:schemeClr val="accent1"/>
-          </a:effectRef>
-          <a:fontRef idx="minor">
-            <a:schemeClr val="lt1"/>
-          </a:fontRef>
-        </p:style>
-        <p:txBody>
-          <a:bodyPr rtlCol="0" anchor="ctr" wrap="square" lIns="54864" rIns="54864" tIns="27432" bIns="27432"/>
-          <a:lstStyle/>
-          <a:p>
-            <a:pPr algn="ctr"/>
-            <a:r>
-              <a:rPr sz="2200" b="1">
-                <a:solidFill>
-                  <a:srgbClr val="3A3A3A"/>
-                </a:solidFill>
-                <a:latin typeface="Segoe UI"/>
-              </a:rPr>
-              <a:t>186</a:t>
-            </a:r>
-          </a:p>
-          <a:p>
-            <a:pPr algn="ctr"/>
-            <a:r>
-              <a:rPr sz="850" b="0">
-                <a:solidFill>
-                  <a:srgbClr val="1A1A1A"/>
-                </a:solidFill>
-                <a:latin typeface="Segoe UI"/>
-              </a:rPr>
-              <a:t>dependency</a:t>
-            </a:r>
-          </a:p>
-          <a:p>
-            <a:pPr algn="ctr"/>
-            <a:r>
-              <a:rPr sz="850" b="0">
-                <a:solidFill>
-                  <a:srgbClr val="1A1A1A"/>
-                </a:solidFill>
-                <a:latin typeface="Segoe UI"/>
-              </a:rPr>
-              <a:t>packages</a:t>
-            </a:r>
-          </a:p>
-        </p:txBody>
-      </p:sp>
-      <p:sp>
-        <p:nvSpPr>
-          <p:cNvPr id="12" name="Rounded Rectangle 11"/>
-          <p:cNvSpPr/>
-          <p:nvPr/>
-        </p:nvSpPr>
-        <p:spPr>
-          <a:xfrm>
-            <a:off x="8074152" y="1600200"/>
-            <a:ext cx="1691640" cy="1051560"/>
-          </a:xfrm>
-          <a:prstGeom prst="roundRect">
-            <a:avLst>
-              <a:gd name="adj" fmla="val 10000"/>
-            </a:avLst>
-          </a:prstGeom>
-          <a:solidFill>
-            <a:srgbClr val="DCEEE7"/>
-          </a:solidFill>
-          <a:ln w="12700">
-            <a:solidFill>
-              <a:srgbClr val="1E6B52"/>
-            </a:solidFill>
-          </a:ln>
-          <a:effectLst/>
-        </p:spPr>
-        <p:style>
-          <a:lnRef idx="1">
-            <a:schemeClr val="accent1"/>
-          </a:lnRef>
-          <a:fillRef idx="3">
-            <a:schemeClr val="accent1"/>
-          </a:fillRef>
-          <a:effectRef idx="2">
-            <a:schemeClr val="accent1"/>
-          </a:effectRef>
-          <a:fontRef idx="minor">
-            <a:schemeClr val="lt1"/>
-          </a:fontRef>
-        </p:style>
-        <p:txBody>
-          <a:bodyPr rtlCol="0" anchor="ctr" wrap="square" lIns="54864" rIns="54864" tIns="27432" bIns="27432"/>
-          <a:lstStyle/>
-          <a:p>
-            <a:pPr algn="ctr"/>
-            <a:r>
-              <a:rPr sz="2200" b="1">
-                <a:solidFill>
-                  <a:srgbClr val="1E6B52"/>
-                </a:solidFill>
-                <a:latin typeface="Segoe UI"/>
-              </a:rPr>
-              <a:t>86%</a:t>
-            </a:r>
-          </a:p>
-          <a:p>
-            <a:pPr algn="ctr"/>
-            <a:r>
-              <a:rPr sz="850" b="0">
-                <a:solidFill>
-                  <a:srgbClr val="1A1A1A"/>
-                </a:solidFill>
-                <a:latin typeface="Segoe UI"/>
-              </a:rPr>
-              <a:t>line coverage</a:t>
-            </a:r>
-          </a:p>
-          <a:p>
-            <a:pPr algn="ctr"/>
-            <a:r>
-              <a:rPr sz="850" b="0">
-                <a:solidFill>
-                  <a:srgbClr val="1A1A1A"/>
-                </a:solidFill>
-                <a:latin typeface="Segoe UI"/>
-              </a:rPr>
-              <a:t>~4,000 tests</a:t>
-            </a:r>
-          </a:p>
-        </p:txBody>
-      </p:sp>
-      <p:sp>
-        <p:nvSpPr>
-          <p:cNvPr id="13" name="Rounded Rectangle 12"/>
-          <p:cNvSpPr/>
-          <p:nvPr/>
-        </p:nvSpPr>
-        <p:spPr>
-          <a:xfrm>
-            <a:off x="9921240" y="1600200"/>
-            <a:ext cx="1691640" cy="1051560"/>
-          </a:xfrm>
-          <a:prstGeom prst="roundRect">
-            <a:avLst>
-              <a:gd name="adj" fmla="val 10000"/>
-            </a:avLst>
-          </a:prstGeom>
-          <a:solidFill>
-            <a:srgbClr val="DCEEE7"/>
-          </a:solidFill>
-          <a:ln w="12700">
-            <a:solidFill>
-              <a:srgbClr val="1E6B52"/>
-            </a:solidFill>
-          </a:ln>
-          <a:effectLst/>
-        </p:spPr>
-        <p:style>
-          <a:lnRef idx="1">
-            <a:schemeClr val="accent1"/>
-          </a:lnRef>
-          <a:fillRef idx="3">
-            <a:schemeClr val="accent1"/>
-          </a:fillRef>
-          <a:effectRef idx="2">
-            <a:schemeClr val="accent1"/>
-          </a:effectRef>
-          <a:fontRef idx="minor">
-            <a:schemeClr val="lt1"/>
-          </a:fontRef>
-        </p:style>
-        <p:txBody>
-          <a:bodyPr rtlCol="0" anchor="ctr" wrap="square" lIns="54864" rIns="54864" tIns="27432" bIns="27432"/>
-          <a:lstStyle/>
-          <a:p>
-            <a:pPr algn="ctr"/>
-            <a:r>
-              <a:rPr sz="2200" b="1">
-                <a:solidFill>
-                  <a:srgbClr val="1E6B52"/>
-                </a:solidFill>
-                <a:latin typeface="Segoe UI"/>
-              </a:rPr>
-              <a:t>≤15</a:t>
-            </a:r>
-          </a:p>
-          <a:p>
-            <a:pPr algn="ctr"/>
-            <a:r>
-              <a:rPr sz="850" b="0">
-                <a:solidFill>
-                  <a:srgbClr val="1A1A1A"/>
-                </a:solidFill>
-                <a:latin typeface="Segoe UI"/>
-              </a:rPr>
-              <a:t>cognitive</a:t>
-            </a:r>
-          </a:p>
-          <a:p>
-            <a:pPr algn="ctr"/>
-            <a:r>
-              <a:rPr sz="850" b="0">
-                <a:solidFill>
-                  <a:srgbClr val="1A1A1A"/>
-                </a:solidFill>
-                <a:latin typeface="Segoe UI"/>
-              </a:rPr>
-              <a:t>complexity, every</a:t>
-            </a:r>
-          </a:p>
-          <a:p>
-            <a:pPr algn="ctr"/>
-            <a:r>
-              <a:rPr sz="850" b="0">
-                <a:solidFill>
-                  <a:srgbClr val="1A1A1A"/>
-                </a:solidFill>
-                <a:latin typeface="Segoe UI"/>
-              </a:rPr>
-              <a:t>function</a:t>
-            </a:r>
-          </a:p>
-        </p:txBody>
-      </p:sp>
-      <p:sp>
-        <p:nvSpPr>
-          <p:cNvPr id="14" name="TextBox 13"/>
-          <p:cNvSpPr txBox="1"/>
-          <p:nvPr/>
-        </p:nvSpPr>
-        <p:spPr>
-          <a:xfrm>
-            <a:off x="685800" y="2880360"/>
-            <a:ext cx="5486400" cy="228600"/>
-          </a:xfrm>
-          <a:prstGeom prst="rect">
-            <a:avLst/>
-          </a:prstGeom>
-          <a:noFill/>
-        </p:spPr>
-        <p:txBody>
-          <a:bodyPr wrap="square" anchor="t" lIns="0" rIns="0" tIns="0" bIns="0">
-            <a:spAutoFit/>
-          </a:bodyPr>
-          <a:lstStyle/>
-          <a:p>
-            <a:pPr algn="l">
-              <a:spcAft>
-                <a:spcPts val="0"/>
-              </a:spcAft>
-            </a:pPr>
-            <a:r>
-              <a:rPr sz="1000" b="1">
-                <a:solidFill>
-                  <a:srgbClr val="6B6B6B"/>
-                </a:solidFill>
-                <a:latin typeface="Segoe UI"/>
-              </a:rPr>
-              <a:t>CI SCAN PIPELINE  (.gitlab-ci.yml)</a:t>
-            </a:r>
-          </a:p>
-        </p:txBody>
-      </p:sp>
-      <p:sp>
-        <p:nvSpPr>
-          <p:cNvPr id="15" name="Rounded Rectangle 14"/>
-          <p:cNvSpPr/>
-          <p:nvPr/>
-        </p:nvSpPr>
-        <p:spPr>
-          <a:xfrm>
-            <a:off x="685800" y="3154680"/>
-            <a:ext cx="2103120" cy="868680"/>
-          </a:xfrm>
-          <a:prstGeom prst="roundRect">
-            <a:avLst>
-              <a:gd name="adj" fmla="val 10000"/>
-            </a:avLst>
-          </a:prstGeom>
-          <a:solidFill>
-            <a:srgbClr val="DCE7F2"/>
-          </a:solidFill>
-          <a:ln w="12700">
-            <a:solidFill>
-              <a:srgbClr val="1F4E79"/>
-            </a:solidFill>
-          </a:ln>
-          <a:effectLst/>
-        </p:spPr>
-        <p:style>
-          <a:lnRef idx="1">
-            <a:schemeClr val="accent1"/>
-          </a:lnRef>
-          <a:fillRef idx="3">
-            <a:schemeClr val="accent1"/>
-          </a:fillRef>
-          <a:effectRef idx="2">
-            <a:schemeClr val="accent1"/>
-          </a:effectRef>
-          <a:fontRef idx="minor">
-            <a:schemeClr val="lt1"/>
-          </a:fontRef>
-        </p:style>
-        <p:txBody>
-          <a:bodyPr rtlCol="0" anchor="ctr" wrap="square" lIns="54864" rIns="54864" tIns="27432" bIns="27432"/>
-          <a:lstStyle/>
-          <a:p>
-            <a:pPr algn="ctr"/>
-            <a:r>
-              <a:rPr sz="1250" b="1">
-                <a:solidFill>
-                  <a:srgbClr val="1F4E79"/>
-                </a:solidFill>
-                <a:latin typeface="Segoe UI"/>
-              </a:rPr>
-              <a:t>build</a:t>
-            </a:r>
-          </a:p>
-          <a:p>
-            <a:pPr algn="ctr"/>
-            <a:r>
-              <a:rPr sz="850" b="0">
-                <a:solidFill>
-                  <a:srgbClr val="1A1A1A"/>
-                </a:solidFill>
-                <a:latin typeface="Segoe UI"/>
-              </a:rPr>
-              <a:t>uv sync --frozen</a:t>
-            </a:r>
-          </a:p>
-          <a:p>
-            <a:pPr algn="ctr"/>
-            <a:r>
-              <a:rPr sz="850" b="0">
-                <a:solidFill>
-                  <a:srgbClr val="1A1A1A"/>
-                </a:solidFill>
-                <a:latin typeface="Segoe UI"/>
-              </a:rPr>
-              <a:t>uv.lock decides versions</a:t>
-            </a:r>
-          </a:p>
-        </p:txBody>
-      </p:sp>
-      <p:cxnSp>
-        <p:nvCxnSpPr>
-          <p:cNvPr id="16" name="Connector 15"/>
-          <p:cNvCxnSpPr/>
-          <p:nvPr/>
-        </p:nvCxnSpPr>
-        <p:spPr>
-          <a:xfrm>
-            <a:off x="2788920" y="3584448"/>
-            <a:ext cx="365760" cy="0"/>
-          </a:xfrm>
-          <a:prstGeom prst="line">
-            <a:avLst/>
-          </a:prstGeom>
-          <a:ln w="19050">
-            <a:solidFill>
-              <a:srgbClr val="C9C9C9"/>
-            </a:solidFill>
-            <a:tailEnd type="triangle" w="med" len="med"/>
-          </a:ln>
-        </p:spPr>
-        <p:style>
-          <a:lnRef idx="2">
-            <a:schemeClr val="accent1"/>
-          </a:lnRef>
-          <a:fillRef idx="0">
-            <a:schemeClr val="accent1"/>
-          </a:fillRef>
-          <a:effectRef idx="1">
-            <a:schemeClr val="accent1"/>
-          </a:effectRef>
-          <a:fontRef idx="minor">
-            <a:schemeClr val="tx1"/>
-          </a:fontRef>
-        </p:style>
-      </p:cxnSp>
-      <p:sp>
-        <p:nvSpPr>
-          <p:cNvPr id="17" name="Rounded Rectangle 16"/>
-          <p:cNvSpPr/>
-          <p:nvPr/>
-        </p:nvSpPr>
-        <p:spPr>
-          <a:xfrm>
-            <a:off x="3154680" y="3154680"/>
-            <a:ext cx="2103120" cy="868680"/>
-          </a:xfrm>
-          <a:prstGeom prst="roundRect">
-            <a:avLst>
-              <a:gd name="adj" fmla="val 10000"/>
-            </a:avLst>
-          </a:prstGeom>
-          <a:solidFill>
-            <a:srgbClr val="DCEEE7"/>
-          </a:solidFill>
-          <a:ln w="12700">
-            <a:solidFill>
-              <a:srgbClr val="1E6B52"/>
-            </a:solidFill>
-          </a:ln>
-          <a:effectLst/>
-        </p:spPr>
-        <p:style>
-          <a:lnRef idx="1">
-            <a:schemeClr val="accent1"/>
-          </a:lnRef>
-          <a:fillRef idx="3">
-            <a:schemeClr val="accent1"/>
-          </a:fillRef>
-          <a:effectRef idx="2">
-            <a:schemeClr val="accent1"/>
-          </a:effectRef>
-          <a:fontRef idx="minor">
-            <a:schemeClr val="lt1"/>
-          </a:fontRef>
-        </p:style>
-        <p:txBody>
-          <a:bodyPr rtlCol="0" anchor="ctr" wrap="square" lIns="54864" rIns="54864" tIns="27432" bIns="27432"/>
-          <a:lstStyle/>
-          <a:p>
-            <a:pPr algn="ctr"/>
-            <a:r>
-              <a:rPr sz="1250" b="1">
-                <a:solidFill>
-                  <a:srgbClr val="1E6B52"/>
-                </a:solidFill>
-                <a:latin typeface="Segoe UI"/>
-              </a:rPr>
-              <a:t>sonar/</a:t>
-            </a:r>
-          </a:p>
-          <a:p>
-            <a:pPr algn="ctr"/>
-            <a:r>
-              <a:rPr sz="850" b="0">
-                <a:solidFill>
-                  <a:srgbClr val="1A1A1A"/>
-                </a:solidFill>
-                <a:latin typeface="Segoe UI"/>
-              </a:rPr>
-              <a:t>coverage.xml · junit.xml</a:t>
-            </a:r>
-          </a:p>
-          <a:p>
-            <a:pPr algn="ctr"/>
-            <a:r>
-              <a:rPr sz="850" b="0">
-                <a:solidFill>
-                  <a:srgbClr val="1A1A1A"/>
-                </a:solidFill>
-                <a:latin typeface="Segoe UI"/>
-              </a:rPr>
-              <a:t>+ web/src included</a:t>
-            </a:r>
-          </a:p>
-        </p:txBody>
-      </p:sp>
-      <p:sp>
-        <p:nvSpPr>
-          <p:cNvPr id="18" name="Rounded Rectangle 17"/>
-          <p:cNvSpPr/>
-          <p:nvPr/>
-        </p:nvSpPr>
-        <p:spPr>
-          <a:xfrm>
-            <a:off x="3154680" y="4160520"/>
-            <a:ext cx="2103120" cy="868680"/>
-          </a:xfrm>
-          <a:prstGeom prst="roundRect">
-            <a:avLst>
-              <a:gd name="adj" fmla="val 10000"/>
-            </a:avLst>
-          </a:prstGeom>
-          <a:solidFill>
-            <a:srgbClr val="EAE1F0"/>
-          </a:solidFill>
-          <a:ln w="12700">
-            <a:solidFill>
-              <a:srgbClr val="5B3A6E"/>
-            </a:solidFill>
-          </a:ln>
-          <a:effectLst/>
-        </p:spPr>
-        <p:style>
-          <a:lnRef idx="1">
-            <a:schemeClr val="accent1"/>
-          </a:lnRef>
-          <a:fillRef idx="3">
-            <a:schemeClr val="accent1"/>
-          </a:fillRef>
-          <a:effectRef idx="2">
-            <a:schemeClr val="accent1"/>
-          </a:effectRef>
-          <a:fontRef idx="minor">
-            <a:schemeClr val="lt1"/>
-          </a:fontRef>
-        </p:style>
-        <p:txBody>
-          <a:bodyPr rtlCol="0" anchor="ctr" wrap="square" lIns="54864" rIns="54864" tIns="27432" bIns="27432"/>
-          <a:lstStyle/>
-          <a:p>
-            <a:pPr algn="ctr"/>
-            <a:r>
-              <a:rPr sz="1250" b="1">
-                <a:solidFill>
-                  <a:srgbClr val="5B3A6E"/>
-                </a:solidFill>
-                <a:latin typeface="Segoe UI"/>
-              </a:rPr>
-              <a:t>blackduck/</a:t>
-            </a:r>
-          </a:p>
-          <a:p>
-            <a:pPr algn="ctr"/>
-            <a:r>
-              <a:rPr sz="850" b="0">
-                <a:solidFill>
-                  <a:srgbClr val="1A1A1A"/>
-                </a:solidFill>
-                <a:latin typeface="Segoe UI"/>
-              </a:rPr>
-              <a:t>pinned requirements</a:t>
-            </a:r>
-          </a:p>
-          <a:p>
-            <a:pPr algn="ctr"/>
-            <a:r>
-              <a:rPr sz="850" b="0">
-                <a:solidFill>
-                  <a:srgbClr val="1A1A1A"/>
-                </a:solidFill>
-                <a:latin typeface="Segoe UI"/>
-              </a:rPr>
-              <a:t>CycloneDX SBOM · wheels</a:t>
-            </a:r>
-          </a:p>
-        </p:txBody>
-      </p:sp>
-      <p:cxnSp>
-        <p:nvCxnSpPr>
-          <p:cNvPr id="19" name="Connector 18"/>
-          <p:cNvCxnSpPr/>
-          <p:nvPr/>
-        </p:nvCxnSpPr>
-        <p:spPr>
-          <a:xfrm>
-            <a:off x="2788920" y="3584448"/>
-            <a:ext cx="365760" cy="1005840"/>
-          </a:xfrm>
-          <a:prstGeom prst="line">
-            <a:avLst/>
-          </a:prstGeom>
-          <a:ln w="19050">
-            <a:solidFill>
-              <a:srgbClr val="C9C9C9"/>
-            </a:solidFill>
-            <a:tailEnd type="triangle" w="med" len="med"/>
-          </a:ln>
-        </p:spPr>
-        <p:style>
-          <a:lnRef idx="2">
-            <a:schemeClr val="accent1"/>
-          </a:lnRef>
-          <a:fillRef idx="0">
-            <a:schemeClr val="accent1"/>
-          </a:fillRef>
-          <a:effectRef idx="1">
-            <a:schemeClr val="accent1"/>
-          </a:effectRef>
-          <a:fontRef idx="minor">
-            <a:schemeClr val="tx1"/>
-          </a:fontRef>
-        </p:style>
-      </p:cxnSp>
-      <p:cxnSp>
-        <p:nvCxnSpPr>
-          <p:cNvPr id="20" name="Connector 19"/>
-          <p:cNvCxnSpPr/>
-          <p:nvPr/>
-        </p:nvCxnSpPr>
-        <p:spPr>
-          <a:xfrm>
-            <a:off x="5257800" y="3584448"/>
-            <a:ext cx="365760" cy="0"/>
-          </a:xfrm>
-          <a:prstGeom prst="line">
-            <a:avLst/>
-          </a:prstGeom>
-          <a:ln w="19050">
-            <a:solidFill>
-              <a:srgbClr val="C9C9C9"/>
-            </a:solidFill>
-            <a:tailEnd type="triangle" w="med" len="med"/>
-          </a:ln>
-        </p:spPr>
-        <p:style>
-          <a:lnRef idx="2">
-            <a:schemeClr val="accent1"/>
-          </a:lnRef>
-          <a:fillRef idx="0">
-            <a:schemeClr val="accent1"/>
-          </a:fillRef>
-          <a:effectRef idx="1">
-            <a:schemeClr val="accent1"/>
-          </a:effectRef>
-          <a:fontRef idx="minor">
-            <a:schemeClr val="tx1"/>
-          </a:fontRef>
-        </p:style>
-      </p:cxnSp>
-      <p:sp>
-        <p:nvSpPr>
-          <p:cNvPr id="21" name="Rounded Rectangle 20"/>
-          <p:cNvSpPr/>
-          <p:nvPr/>
-        </p:nvSpPr>
-        <p:spPr>
-          <a:xfrm>
-            <a:off x="5623560" y="3154680"/>
-            <a:ext cx="2011680" cy="868680"/>
-          </a:xfrm>
-          <a:prstGeom prst="roundRect">
-            <a:avLst>
-              <a:gd name="adj" fmla="val 10000"/>
-            </a:avLst>
-          </a:prstGeom>
-          <a:solidFill>
-            <a:srgbClr val="FFFFFF"/>
-          </a:solidFill>
-          <a:ln w="12700">
-            <a:solidFill>
-              <a:srgbClr val="1E6B52"/>
-            </a:solidFill>
-          </a:ln>
-          <a:effectLst/>
-        </p:spPr>
-        <p:style>
-          <a:lnRef idx="1">
-            <a:schemeClr val="accent1"/>
-          </a:lnRef>
-          <a:fillRef idx="3">
-            <a:schemeClr val="accent1"/>
-          </a:fillRef>
-          <a:effectRef idx="2">
-            <a:schemeClr val="accent1"/>
-          </a:effectRef>
-          <a:fontRef idx="minor">
-            <a:schemeClr val="lt1"/>
-          </a:fontRef>
-        </p:style>
-        <p:txBody>
-          <a:bodyPr rtlCol="0" anchor="ctr" wrap="square" lIns="54864" rIns="54864" tIns="27432" bIns="27432"/>
-          <a:lstStyle/>
-          <a:p>
-            <a:pPr algn="ctr"/>
-            <a:r>
-              <a:rPr sz="1250" b="1">
-                <a:solidFill>
-                  <a:srgbClr val="1E6B52"/>
-                </a:solidFill>
-                <a:latin typeface="Segoe UI"/>
-              </a:rPr>
-              <a:t>SonarQube</a:t>
-            </a:r>
-          </a:p>
-          <a:p>
-            <a:pPr algn="ctr"/>
-            <a:r>
-              <a:rPr sz="850" b="0">
-                <a:solidFill>
-                  <a:srgbClr val="1A1A1A"/>
-                </a:solidFill>
-                <a:latin typeface="Segoe UI"/>
-              </a:rPr>
-              <a:t>scanner-cli</a:t>
-            </a:r>
-          </a:p>
-          <a:p>
-            <a:pPr algn="ctr"/>
-            <a:r>
-              <a:rPr sz="850" b="0">
-                <a:solidFill>
-                  <a:srgbClr val="1A1A1A"/>
-                </a:solidFill>
-                <a:latin typeface="Segoe UI"/>
-              </a:rPr>
-              <a:t>GIT_DEPTH 0</a:t>
-            </a:r>
-          </a:p>
-        </p:txBody>
-      </p:sp>
-      <p:cxnSp>
-        <p:nvCxnSpPr>
-          <p:cNvPr id="22" name="Connector 21"/>
-          <p:cNvCxnSpPr/>
-          <p:nvPr/>
-        </p:nvCxnSpPr>
-        <p:spPr>
-          <a:xfrm>
-            <a:off x="5257800" y="4590288"/>
-            <a:ext cx="365760" cy="0"/>
-          </a:xfrm>
-          <a:prstGeom prst="line">
-            <a:avLst/>
-          </a:prstGeom>
-          <a:ln w="19050">
-            <a:solidFill>
-              <a:srgbClr val="C9C9C9"/>
-            </a:solidFill>
-            <a:tailEnd type="triangle" w="med" len="med"/>
-          </a:ln>
-        </p:spPr>
-        <p:style>
-          <a:lnRef idx="2">
-            <a:schemeClr val="accent1"/>
-          </a:lnRef>
-          <a:fillRef idx="0">
-            <a:schemeClr val="accent1"/>
-          </a:fillRef>
-          <a:effectRef idx="1">
-            <a:schemeClr val="accent1"/>
-          </a:effectRef>
-          <a:fontRef idx="minor">
-            <a:schemeClr val="tx1"/>
-          </a:fontRef>
-        </p:style>
-      </p:cxnSp>
-      <p:sp>
-        <p:nvSpPr>
-          <p:cNvPr id="23" name="Rounded Rectangle 22"/>
-          <p:cNvSpPr/>
-          <p:nvPr/>
-        </p:nvSpPr>
-        <p:spPr>
-          <a:xfrm>
-            <a:off x="5623560" y="4160520"/>
-            <a:ext cx="2011680" cy="868680"/>
-          </a:xfrm>
-          <a:prstGeom prst="roundRect">
-            <a:avLst>
-              <a:gd name="adj" fmla="val 10000"/>
-            </a:avLst>
-          </a:prstGeom>
-          <a:solidFill>
-            <a:srgbClr val="FFFFFF"/>
-          </a:solidFill>
-          <a:ln w="12700">
-            <a:solidFill>
-              <a:srgbClr val="5B3A6E"/>
-            </a:solidFill>
-          </a:ln>
-          <a:effectLst/>
-        </p:spPr>
-        <p:style>
-          <a:lnRef idx="1">
-            <a:schemeClr val="accent1"/>
-          </a:lnRef>
-          <a:fillRef idx="3">
-            <a:schemeClr val="accent1"/>
-          </a:fillRef>
-          <a:effectRef idx="2">
-            <a:schemeClr val="accent1"/>
-          </a:effectRef>
-          <a:fontRef idx="minor">
-            <a:schemeClr val="lt1"/>
-          </a:fontRef>
-        </p:style>
-        <p:txBody>
-          <a:bodyPr rtlCol="0" anchor="ctr" wrap="square" lIns="54864" rIns="54864" tIns="27432" bIns="27432"/>
-          <a:lstStyle/>
-          <a:p>
-            <a:pPr algn="ctr"/>
-            <a:r>
-              <a:rPr sz="1250" b="1">
-                <a:solidFill>
-                  <a:srgbClr val="5B3A6E"/>
-                </a:solidFill>
-                <a:latin typeface="Segoe UI"/>
-              </a:rPr>
-              <a:t>Black Duck</a:t>
-            </a:r>
-          </a:p>
-          <a:p>
-            <a:pPr algn="ctr"/>
-            <a:r>
-              <a:rPr sz="850" b="0">
-                <a:solidFill>
-                  <a:srgbClr val="1A1A1A"/>
-                </a:solidFill>
-                <a:latin typeface="Segoe UI"/>
-              </a:rPr>
-              <a:t>detect10.sh</a:t>
-            </a:r>
-          </a:p>
-          <a:p>
-            <a:pPr algn="ctr"/>
-            <a:r>
-              <a:rPr sz="850" b="0">
-                <a:solidFill>
-                  <a:srgbClr val="1A1A1A"/>
-                </a:solidFill>
-                <a:latin typeface="Segoe UI"/>
-              </a:rPr>
-              <a:t>ships SHIPPED pins</a:t>
-            </a:r>
-          </a:p>
-        </p:txBody>
-      </p:sp>
-      <p:sp>
-        <p:nvSpPr>
-          <p:cNvPr id="24" name="Rounded Rectangle 23"/>
-          <p:cNvSpPr/>
-          <p:nvPr/>
-        </p:nvSpPr>
-        <p:spPr>
-          <a:xfrm>
-            <a:off x="8001000" y="3154680"/>
-            <a:ext cx="3520440" cy="1874519"/>
-          </a:xfrm>
-          <a:prstGeom prst="roundRect">
-            <a:avLst>
-              <a:gd name="adj" fmla="val 10000"/>
-            </a:avLst>
-          </a:prstGeom>
-          <a:solidFill>
-            <a:srgbClr val="FFFFFF"/>
-          </a:solidFill>
-          <a:ln w="12700">
-            <a:solidFill>
-              <a:srgbClr val="3A3A3A"/>
-            </a:solidFill>
-          </a:ln>
-          <a:effectLst/>
-        </p:spPr>
-        <p:style>
-          <a:lnRef idx="1">
-            <a:schemeClr val="accent1"/>
-          </a:lnRef>
-          <a:fillRef idx="3">
-            <a:schemeClr val="accent1"/>
-          </a:fillRef>
-          <a:effectRef idx="2">
-            <a:schemeClr val="accent1"/>
-          </a:effectRef>
-          <a:fontRef idx="minor">
-            <a:schemeClr val="lt1"/>
-          </a:fontRef>
-        </p:style>
-        <p:txBody>
-          <a:bodyPr rtlCol="0" anchor="ctr" wrap="square" lIns="54864" rIns="54864" tIns="27432" bIns="27432"/>
-          <a:lstStyle/>
-          <a:p>
-            <a:pPr algn="ctr"/>
-            <a:r>
-              <a:rPr sz="1250" b="1">
-                <a:solidFill>
-                  <a:srgbClr val="3A3A3A"/>
-                </a:solidFill>
-                <a:latin typeface="Segoe UI"/>
-              </a:rPr>
-              <a:t>Data control</a:t>
-            </a:r>
-          </a:p>
-        </p:txBody>
-      </p:sp>
-      <p:sp>
-        <p:nvSpPr>
-          <p:cNvPr id="25" name="TextBox 24"/>
-          <p:cNvSpPr txBox="1"/>
-          <p:nvPr/>
-        </p:nvSpPr>
-        <p:spPr>
-          <a:xfrm>
-            <a:off x="8183879" y="3566160"/>
-            <a:ext cx="3246120" cy="228600"/>
-          </a:xfrm>
-          <a:prstGeom prst="rect">
-            <a:avLst/>
-          </a:prstGeom>
-          <a:noFill/>
-        </p:spPr>
-        <p:txBody>
-          <a:bodyPr wrap="square" anchor="t" lIns="0" rIns="0" tIns="0" bIns="0">
-            <a:spAutoFit/>
-          </a:bodyPr>
-          <a:lstStyle/>
-          <a:p>
-            <a:pPr algn="l">
-              <a:spcAft>
-                <a:spcPts val="0"/>
-              </a:spcAft>
-            </a:pPr>
-            <a:r>
-              <a:rPr sz="950" b="0">
-                <a:solidFill>
-                  <a:srgbClr val="1A1A1A"/>
-                </a:solidFill>
-                <a:latin typeface="Segoe UI"/>
-              </a:rPr>
-              <a:t>· Telemetry: none, and none in the lock</a:t>
-            </a:r>
-          </a:p>
-        </p:txBody>
-      </p:sp>
-      <p:sp>
-        <p:nvSpPr>
-          <p:cNvPr id="26" name="TextBox 25"/>
-          <p:cNvSpPr txBox="1"/>
-          <p:nvPr/>
-        </p:nvSpPr>
-        <p:spPr>
-          <a:xfrm>
-            <a:off x="8183879" y="3803904"/>
-            <a:ext cx="3246120" cy="228600"/>
-          </a:xfrm>
-          <a:prstGeom prst="rect">
-            <a:avLst/>
-          </a:prstGeom>
-          <a:noFill/>
-        </p:spPr>
-        <p:txBody>
-          <a:bodyPr wrap="square" anchor="t" lIns="0" rIns="0" tIns="0" bIns="0">
-            <a:spAutoFit/>
-          </a:bodyPr>
-          <a:lstStyle/>
-          <a:p>
-            <a:pPr algn="l">
-              <a:spcAft>
-                <a:spcPts val="0"/>
-              </a:spcAft>
-            </a:pPr>
-            <a:r>
-              <a:rPr sz="950" b="0">
-                <a:solidFill>
-                  <a:srgbClr val="1A1A1A"/>
-                </a:solidFill>
-                <a:latin typeface="Segoe UI"/>
-              </a:rPr>
-              <a:t>· Prompts go only to YOUR endpoint</a:t>
-            </a:r>
-          </a:p>
-        </p:txBody>
-      </p:sp>
-      <p:sp>
-        <p:nvSpPr>
-          <p:cNvPr id="27" name="TextBox 26"/>
-          <p:cNvSpPr txBox="1"/>
-          <p:nvPr/>
-        </p:nvSpPr>
-        <p:spPr>
-          <a:xfrm>
-            <a:off x="8183879" y="4041648"/>
-            <a:ext cx="3246120" cy="228600"/>
-          </a:xfrm>
-          <a:prstGeom prst="rect">
-            <a:avLst/>
-          </a:prstGeom>
-          <a:noFill/>
-        </p:spPr>
-        <p:txBody>
-          <a:bodyPr wrap="square" anchor="t" lIns="0" rIns="0" tIns="0" bIns="0">
-            <a:spAutoFit/>
-          </a:bodyPr>
-          <a:lstStyle/>
-          <a:p>
-            <a:pPr algn="l">
-              <a:spcAft>
-                <a:spcPts val="0"/>
-              </a:spcAft>
-            </a:pPr>
-            <a:r>
-              <a:rPr sz="950" b="0">
-                <a:solidFill>
-                  <a:srgbClr val="1A1A1A"/>
-                </a:solidFill>
-                <a:latin typeface="Segoe UI"/>
-              </a:rPr>
-              <a:t>· At rest: ~/.aiforge/ — delete it, it is gone</a:t>
-            </a:r>
-          </a:p>
-        </p:txBody>
-      </p:sp>
-      <p:sp>
-        <p:nvSpPr>
-          <p:cNvPr id="28" name="TextBox 27"/>
-          <p:cNvSpPr txBox="1"/>
-          <p:nvPr/>
-        </p:nvSpPr>
-        <p:spPr>
-          <a:xfrm>
-            <a:off x="8183879" y="4279392"/>
-            <a:ext cx="3246120" cy="228600"/>
-          </a:xfrm>
-          <a:prstGeom prst="rect">
-            <a:avLst/>
-          </a:prstGeom>
-          <a:noFill/>
-        </p:spPr>
-        <p:txBody>
-          <a:bodyPr wrap="square" anchor="t" lIns="0" rIns="0" tIns="0" bIns="0">
-            <a:spAutoFit/>
-          </a:bodyPr>
-          <a:lstStyle/>
-          <a:p>
-            <a:pPr algn="l">
-              <a:spcAft>
-                <a:spcPts val="0"/>
-              </a:spcAft>
-            </a:pPr>
-            <a:r>
-              <a:rPr sz="950" b="0">
-                <a:solidFill>
-                  <a:srgbClr val="1A1A1A"/>
-                </a:solidFill>
-                <a:latin typeface="Segoe UI"/>
-              </a:rPr>
-              <a:t>· Loopback by default; loud warning if not</a:t>
-            </a:r>
-          </a:p>
-        </p:txBody>
-      </p:sp>
-      <p:sp>
-        <p:nvSpPr>
-          <p:cNvPr id="29" name="TextBox 28"/>
-          <p:cNvSpPr txBox="1"/>
-          <p:nvPr/>
-        </p:nvSpPr>
-        <p:spPr>
-          <a:xfrm>
-            <a:off x="8183879" y="4517136"/>
-            <a:ext cx="3246120" cy="228600"/>
-          </a:xfrm>
-          <a:prstGeom prst="rect">
-            <a:avLst/>
-          </a:prstGeom>
-          <a:noFill/>
-        </p:spPr>
-        <p:txBody>
-          <a:bodyPr wrap="square" anchor="t" lIns="0" rIns="0" tIns="0" bIns="0">
-            <a:spAutoFit/>
-          </a:bodyPr>
-          <a:lstStyle/>
-          <a:p>
-            <a:pPr algn="l">
-              <a:spcAft>
-                <a:spcPts val="0"/>
-              </a:spcAft>
-            </a:pPr>
-            <a:r>
-              <a:rPr sz="950" b="0">
-                <a:solidFill>
-                  <a:srgbClr val="1A1A1A"/>
-                </a:solidFill>
-                <a:latin typeface="Segoe UI"/>
-              </a:rPr>
-              <a:t>· SSRF guard on fetch and crawl</a:t>
-            </a:r>
-          </a:p>
-        </p:txBody>
-      </p:sp>
-      <p:sp>
-        <p:nvSpPr>
-          <p:cNvPr id="30" name="TextBox 29"/>
-          <p:cNvSpPr txBox="1"/>
-          <p:nvPr/>
-        </p:nvSpPr>
-        <p:spPr>
-          <a:xfrm>
-            <a:off x="8183879" y="4754880"/>
-            <a:ext cx="3246120" cy="228600"/>
-          </a:xfrm>
-          <a:prstGeom prst="rect">
-            <a:avLst/>
-          </a:prstGeom>
-          <a:noFill/>
-        </p:spPr>
-        <p:txBody>
-          <a:bodyPr wrap="square" anchor="t" lIns="0" rIns="0" tIns="0" bIns="0">
-            <a:spAutoFit/>
-          </a:bodyPr>
-          <a:lstStyle/>
-          <a:p>
-            <a:pPr algn="l">
-              <a:spcAft>
-                <a:spcPts val="0"/>
-              </a:spcAft>
-            </a:pPr>
-            <a:r>
-              <a:rPr sz="950" b="0">
-                <a:solidFill>
-                  <a:srgbClr val="1A1A1A"/>
-                </a:solidFill>
-                <a:latin typeface="Segoe UI"/>
-              </a:rPr>
-              <a:t>· Workspace jail on by default</a:t>
-            </a:r>
-          </a:p>
-        </p:txBody>
-      </p:sp>
-      <p:sp>
-        <p:nvSpPr>
-          <p:cNvPr id="31" name="Rounded Rectangle 30"/>
-          <p:cNvSpPr/>
-          <p:nvPr/>
-        </p:nvSpPr>
-        <p:spPr>
-          <a:xfrm>
-            <a:off x="685800" y="5230368"/>
-            <a:ext cx="10853928" cy="548640"/>
-          </a:xfrm>
-          <a:prstGeom prst="roundRect">
-            <a:avLst>
-              <a:gd name="adj" fmla="val 10000"/>
-            </a:avLst>
-          </a:prstGeom>
-          <a:solidFill>
-            <a:srgbClr val="F7ECD5"/>
-          </a:solidFill>
-          <a:ln w="12700">
-            <a:solidFill>
-              <a:srgbClr val="8A5A00"/>
-            </a:solidFill>
-          </a:ln>
-          <a:effectLst/>
-        </p:spPr>
-        <p:style>
-          <a:lnRef idx="1">
-            <a:schemeClr val="accent1"/>
-          </a:lnRef>
-          <a:fillRef idx="3">
-            <a:schemeClr val="accent1"/>
-          </a:fillRef>
-          <a:effectRef idx="2">
-            <a:schemeClr val="accent1"/>
-          </a:effectRef>
-          <a:fontRef idx="minor">
-            <a:schemeClr val="lt1"/>
-          </a:fontRef>
-        </p:style>
-        <p:txBody>
-          <a:bodyPr rtlCol="0" anchor="ctr" wrap="square" lIns="54864" rIns="54864" tIns="27432" bIns="27432"/>
-          <a:lstStyle/>
-          <a:p>
-            <a:pPr algn="ctr"/>
-            <a:r>
-              <a:rPr sz="1200" b="1">
-                <a:solidFill>
-                  <a:srgbClr val="8A5A00"/>
-                </a:solidFill>
-                <a:latin typeface="Segoe UI"/>
-              </a:rPr>
-              <a:t>The 9 vulnerabilities are decisions, not debt</a:t>
-            </a:r>
-          </a:p>
-          <a:p>
-            <a:pPr algn="ctr"/>
-            <a:r>
-              <a:rPr sz="950" b="0">
-                <a:solidFill>
-                  <a:srgbClr val="1A1A1A"/>
-                </a:solidFill>
-                <a:latin typeface="Segoe UI"/>
-              </a:rPr>
-              <a:t>TLS verification is disabled only per endpoint, opt-in, for self-signed internal hosts (Jira / Confluence / GitLab) — each one individually triaged and documented</a:t>
+              <a:t>The boundary this code does not draw</a:t>
+            </a:r>
+          </a:p>
+          <a:p>
+            <a:pPr algn="ctr"/>
+            <a:r>
+              <a:rPr sz="900" b="0">
+                <a:solidFill>
+                  <a:srgbClr val="1A1A1A"/>
+                </a:solidFill>
+                <a:latin typeface="Segoe UI"/>
+              </a:rPr>
+              <a:t>run_command and execute_ipython_cell open sockets themselves: curl in a shell never passes through the egress module and cannot be made to. That line is an OS firewall or a network namespace. Regex risk-matching is a floor, not a proof — pair it with the sandbox.</a:t>
             </a:r>
           </a:p>
         </p:txBody>
@@ -13403,7 +12945,7 @@
                 </a:solidFill>
                 <a:latin typeface="Segoe UI"/>
               </a:rPr>
-              <a:t>Where it differs from the other agent tools</a:t>
+              <a:t>Security and supply chain</a:t>
             </a:r>
           </a:p>
         </p:txBody>
@@ -13442,7 +12984,7 @@
                 </a:solidFill>
                 <a:latin typeface="Segoe UI"/>
               </a:rPr>
-              <a:t>It adopts their formats rather than replacing them — then adds the two things none of them do.</a:t>
+              <a:t>No telemetry. Nothing leaves the machine unless you point it somewhere.</a:t>
             </a:r>
           </a:p>
         </p:txBody>
@@ -13525,7 +13067,7 @@
                 </a:solidFill>
                 <a:latin typeface="Segoe UI"/>
               </a:rPr>
-              <a:t>Named comparisons are the ones the codebase itself cites: the SKILL.md gaps vs Hermes Agent / OpenClaw, and Cursor's glob-scoped rule format.</a:t>
+              <a:t>Stated plainly: by default the chat agent has full, unsandboxed shell access on the host. The workspace jail guards file tools, not arbitrary shell — run untrusted work in container mode.</a:t>
             </a:r>
           </a:p>
         </p:txBody>
@@ -13571,14 +13113,53 @@
       </p:sp>
       <p:sp>
         <p:nvSpPr>
-          <p:cNvPr id="7" name="Rounded Rectangle 6"/>
+          <p:cNvPr id="7" name="TextBox 6"/>
+          <p:cNvSpPr txBox="1"/>
+          <p:nvPr/>
+        </p:nvSpPr>
+        <p:spPr>
+          <a:xfrm>
+            <a:off x="685800" y="1325880"/>
+            <a:ext cx="5486400" cy="228600"/>
+          </a:xfrm>
+          <a:prstGeom prst="rect">
+            <a:avLst/>
+          </a:prstGeom>
+          <a:noFill/>
+        </p:spPr>
+        <p:txBody>
+          <a:bodyPr wrap="square" anchor="t" lIns="0" rIns="0" tIns="0" bIns="0">
+            <a:spAutoFit/>
+          </a:bodyPr>
+          <a:lstStyle/>
+          <a:p>
+            <a:pPr algn="l">
+              <a:spcAft>
+                <a:spcPts val="0"/>
+              </a:spcAft>
+            </a:pPr>
+            <a:r>
+              <a:rPr sz="1000" b="1">
+                <a:solidFill>
+                  <a:srgbClr val="6B6B6B"/>
+                </a:solidFill>
+                <a:latin typeface="Segoe UI"/>
+              </a:rPr>
+              <a:t>SCANNED AND TRIAGED</a:t>
+            </a:r>
+          </a:p>
+        </p:txBody>
+      </p:sp>
+      <p:sp>
+        <p:nvSpPr>
+          <p:cNvPr id="8" name="Rounded Rectangle 7"/>
           <p:cNvSpPr/>
           <p:nvPr/>
         </p:nvSpPr>
         <p:spPr>
           <a:xfrm>
-            <a:off x="685800" y="1389888"/>
-            <a:ext cx="10853928" cy="713232"/>
+            <a:off x="685800" y="1600200"/>
+            <a:ext cx="1691640" cy="1051560"/>
           </a:xfrm>
           <a:prstGeom prst="roundRect">
             <a:avLst>
@@ -13615,48 +13196,52 @@
           <a:p>
             <a:pPr algn="ctr"/>
             <a:r>
-              <a:rPr sz="1400" b="1">
+              <a:rPr sz="2200" b="1">
                 <a:solidFill>
                   <a:srgbClr val="1E6B52"/>
                 </a:solidFill>
                 <a:latin typeface="Segoe UI"/>
               </a:rPr>
-              <a:t>Reads what your repo already has</a:t>
-            </a:r>
-          </a:p>
-          <a:p>
-            <a:pPr algn="ctr"/>
-            <a:r>
-              <a:rPr sz="1050" b="0">
-                <a:solidFill>
-                  <a:srgbClr val="1A1A1A"/>
-                </a:solidFill>
-                <a:latin typeface="Segoe UI"/>
-              </a:rPr>
-              <a:t>.cursor/rules/*.mdc  ·  .cursorrules  ·  AGENTS.md  ·  SKILL.md (agentskills.io)  —  no migration, no lock-in</a:t>
-            </a:r>
-          </a:p>
-        </p:txBody>
-      </p:sp>
-      <p:sp>
-        <p:nvSpPr>
-          <p:cNvPr id="8" name="Rectangle 7"/>
+              <a:t>0</a:t>
+            </a:r>
+          </a:p>
+          <a:p>
+            <a:pPr algn="ctr"/>
+            <a:r>
+              <a:rPr sz="850" b="0">
+                <a:solidFill>
+                  <a:srgbClr val="1A1A1A"/>
+                </a:solidFill>
+                <a:latin typeface="Segoe UI"/>
+              </a:rPr>
+              <a:t>Sonar bugs</a:t>
+            </a:r>
+          </a:p>
+        </p:txBody>
+      </p:sp>
+      <p:sp>
+        <p:nvSpPr>
+          <p:cNvPr id="9" name="Rounded Rectangle 8"/>
           <p:cNvSpPr/>
           <p:nvPr/>
         </p:nvSpPr>
         <p:spPr>
           <a:xfrm>
-            <a:off x="685800" y="2267712"/>
-            <a:ext cx="10853928" cy="475488"/>
-          </a:xfrm>
-          <a:prstGeom prst="rect">
-            <a:avLst/>
+            <a:off x="2532888" y="1600200"/>
+            <a:ext cx="1691640" cy="1051560"/>
+          </a:xfrm>
+          <a:prstGeom prst="roundRect">
+            <a:avLst>
+              <a:gd name="adj" fmla="val 10000"/>
+            </a:avLst>
           </a:prstGeom>
           <a:solidFill>
-            <a:srgbClr val="F7F7F7"/>
+            <a:srgbClr val="DCEEE7"/>
           </a:solidFill>
-          <a:ln>
-            <a:noFill/>
+          <a:ln w="12700">
+            <a:solidFill>
+              <a:srgbClr val="1E6B52"/>
+            </a:solidFill>
           </a:ln>
           <a:effectLst/>
         </p:spPr>
@@ -13675,23 +13260,392 @@
           </a:fontRef>
         </p:style>
         <p:txBody>
-          <a:bodyPr rtlCol="0" anchor="ctr"/>
-          <a:lstStyle/>
-          <a:p>
-            <a:pPr algn="ctr"/>
-          </a:p>
-        </p:txBody>
-      </p:sp>
-      <p:sp>
-        <p:nvSpPr>
-          <p:cNvPr id="9" name="TextBox 8"/>
+          <a:bodyPr rtlCol="0" anchor="ctr" wrap="square" lIns="54864" rIns="54864" tIns="27432" bIns="27432"/>
+          <a:lstStyle/>
+          <a:p>
+            <a:pPr algn="ctr"/>
+            <a:r>
+              <a:rPr sz="2200" b="1">
+                <a:solidFill>
+                  <a:srgbClr val="1E6B52"/>
+                </a:solidFill>
+                <a:latin typeface="Segoe UI"/>
+              </a:rPr>
+              <a:t>0</a:t>
+            </a:r>
+          </a:p>
+          <a:p>
+            <a:pPr algn="ctr"/>
+            <a:r>
+              <a:rPr sz="850" b="0">
+                <a:solidFill>
+                  <a:srgbClr val="1A1A1A"/>
+                </a:solidFill>
+                <a:latin typeface="Segoe UI"/>
+              </a:rPr>
+              <a:t>Trivy findings</a:t>
+            </a:r>
+          </a:p>
+        </p:txBody>
+      </p:sp>
+      <p:sp>
+        <p:nvSpPr>
+          <p:cNvPr id="10" name="Rounded Rectangle 9"/>
+          <p:cNvSpPr/>
+          <p:nvPr/>
+        </p:nvSpPr>
+        <p:spPr>
+          <a:xfrm>
+            <a:off x="4379976" y="1600200"/>
+            <a:ext cx="1691640" cy="1051560"/>
+          </a:xfrm>
+          <a:prstGeom prst="roundRect">
+            <a:avLst>
+              <a:gd name="adj" fmla="val 10000"/>
+            </a:avLst>
+          </a:prstGeom>
+          <a:solidFill>
+            <a:srgbClr val="F7ECD5"/>
+          </a:solidFill>
+          <a:ln w="12700">
+            <a:solidFill>
+              <a:srgbClr val="8A5A00"/>
+            </a:solidFill>
+          </a:ln>
+          <a:effectLst/>
+        </p:spPr>
+        <p:style>
+          <a:lnRef idx="1">
+            <a:schemeClr val="accent1"/>
+          </a:lnRef>
+          <a:fillRef idx="3">
+            <a:schemeClr val="accent1"/>
+          </a:fillRef>
+          <a:effectRef idx="2">
+            <a:schemeClr val="accent1"/>
+          </a:effectRef>
+          <a:fontRef idx="minor">
+            <a:schemeClr val="lt1"/>
+          </a:fontRef>
+        </p:style>
+        <p:txBody>
+          <a:bodyPr rtlCol="0" anchor="ctr" wrap="square" lIns="54864" rIns="54864" tIns="27432" bIns="27432"/>
+          <a:lstStyle/>
+          <a:p>
+            <a:pPr algn="ctr"/>
+            <a:r>
+              <a:rPr sz="2200" b="1">
+                <a:solidFill>
+                  <a:srgbClr val="8A5A00"/>
+                </a:solidFill>
+                <a:latin typeface="Segoe UI"/>
+              </a:rPr>
+              <a:t>9</a:t>
+            </a:r>
+          </a:p>
+          <a:p>
+            <a:pPr algn="ctr"/>
+            <a:r>
+              <a:rPr sz="850" b="0">
+                <a:solidFill>
+                  <a:srgbClr val="1A1A1A"/>
+                </a:solidFill>
+                <a:latin typeface="Segoe UI"/>
+              </a:rPr>
+              <a:t>vulns — all</a:t>
+            </a:r>
+          </a:p>
+          <a:p>
+            <a:pPr algn="ctr"/>
+            <a:r>
+              <a:rPr sz="850" b="0">
+                <a:solidFill>
+                  <a:srgbClr val="1A1A1A"/>
+                </a:solidFill>
+                <a:latin typeface="Segoe UI"/>
+              </a:rPr>
+              <a:t>documented TLS</a:t>
+            </a:r>
+          </a:p>
+          <a:p>
+            <a:pPr algn="ctr"/>
+            <a:r>
+              <a:rPr sz="850" b="0">
+                <a:solidFill>
+                  <a:srgbClr val="1A1A1A"/>
+                </a:solidFill>
+                <a:latin typeface="Segoe UI"/>
+              </a:rPr>
+              <a:t>opt-outs</a:t>
+            </a:r>
+          </a:p>
+        </p:txBody>
+      </p:sp>
+      <p:sp>
+        <p:nvSpPr>
+          <p:cNvPr id="11" name="Rounded Rectangle 10"/>
+          <p:cNvSpPr/>
+          <p:nvPr/>
+        </p:nvSpPr>
+        <p:spPr>
+          <a:xfrm>
+            <a:off x="6227064" y="1600200"/>
+            <a:ext cx="1691640" cy="1051560"/>
+          </a:xfrm>
+          <a:prstGeom prst="roundRect">
+            <a:avLst>
+              <a:gd name="adj" fmla="val 10000"/>
+            </a:avLst>
+          </a:prstGeom>
+          <a:solidFill>
+            <a:srgbClr val="ECECEC"/>
+          </a:solidFill>
+          <a:ln w="12700">
+            <a:solidFill>
+              <a:srgbClr val="3A3A3A"/>
+            </a:solidFill>
+          </a:ln>
+          <a:effectLst/>
+        </p:spPr>
+        <p:style>
+          <a:lnRef idx="1">
+            <a:schemeClr val="accent1"/>
+          </a:lnRef>
+          <a:fillRef idx="3">
+            <a:schemeClr val="accent1"/>
+          </a:fillRef>
+          <a:effectRef idx="2">
+            <a:schemeClr val="accent1"/>
+          </a:effectRef>
+          <a:fontRef idx="minor">
+            <a:schemeClr val="lt1"/>
+          </a:fontRef>
+        </p:style>
+        <p:txBody>
+          <a:bodyPr rtlCol="0" anchor="ctr" wrap="square" lIns="54864" rIns="54864" tIns="27432" bIns="27432"/>
+          <a:lstStyle/>
+          <a:p>
+            <a:pPr algn="ctr"/>
+            <a:r>
+              <a:rPr sz="2200" b="1">
+                <a:solidFill>
+                  <a:srgbClr val="3A3A3A"/>
+                </a:solidFill>
+                <a:latin typeface="Segoe UI"/>
+              </a:rPr>
+              <a:t>186</a:t>
+            </a:r>
+          </a:p>
+          <a:p>
+            <a:pPr algn="ctr"/>
+            <a:r>
+              <a:rPr sz="850" b="0">
+                <a:solidFill>
+                  <a:srgbClr val="1A1A1A"/>
+                </a:solidFill>
+                <a:latin typeface="Segoe UI"/>
+              </a:rPr>
+              <a:t>dependency</a:t>
+            </a:r>
+          </a:p>
+          <a:p>
+            <a:pPr algn="ctr"/>
+            <a:r>
+              <a:rPr sz="850" b="0">
+                <a:solidFill>
+                  <a:srgbClr val="1A1A1A"/>
+                </a:solidFill>
+                <a:latin typeface="Segoe UI"/>
+              </a:rPr>
+              <a:t>packages</a:t>
+            </a:r>
+          </a:p>
+        </p:txBody>
+      </p:sp>
+      <p:sp>
+        <p:nvSpPr>
+          <p:cNvPr id="12" name="Rounded Rectangle 11"/>
+          <p:cNvSpPr/>
+          <p:nvPr/>
+        </p:nvSpPr>
+        <p:spPr>
+          <a:xfrm>
+            <a:off x="8074152" y="1600200"/>
+            <a:ext cx="1691640" cy="1051560"/>
+          </a:xfrm>
+          <a:prstGeom prst="roundRect">
+            <a:avLst>
+              <a:gd name="adj" fmla="val 10000"/>
+            </a:avLst>
+          </a:prstGeom>
+          <a:solidFill>
+            <a:srgbClr val="DCEEE7"/>
+          </a:solidFill>
+          <a:ln w="12700">
+            <a:solidFill>
+              <a:srgbClr val="1E6B52"/>
+            </a:solidFill>
+          </a:ln>
+          <a:effectLst/>
+        </p:spPr>
+        <p:style>
+          <a:lnRef idx="1">
+            <a:schemeClr val="accent1"/>
+          </a:lnRef>
+          <a:fillRef idx="3">
+            <a:schemeClr val="accent1"/>
+          </a:fillRef>
+          <a:effectRef idx="2">
+            <a:schemeClr val="accent1"/>
+          </a:effectRef>
+          <a:fontRef idx="minor">
+            <a:schemeClr val="lt1"/>
+          </a:fontRef>
+        </p:style>
+        <p:txBody>
+          <a:bodyPr rtlCol="0" anchor="ctr" wrap="square" lIns="54864" rIns="54864" tIns="27432" bIns="27432"/>
+          <a:lstStyle/>
+          <a:p>
+            <a:pPr algn="ctr"/>
+            <a:r>
+              <a:rPr sz="2200" b="1">
+                <a:solidFill>
+                  <a:srgbClr val="1E6B52"/>
+                </a:solidFill>
+                <a:latin typeface="Segoe UI"/>
+              </a:rPr>
+              <a:t>86%</a:t>
+            </a:r>
+          </a:p>
+          <a:p>
+            <a:pPr algn="ctr"/>
+            <a:r>
+              <a:rPr sz="850" b="0">
+                <a:solidFill>
+                  <a:srgbClr val="1A1A1A"/>
+                </a:solidFill>
+                <a:latin typeface="Segoe UI"/>
+              </a:rPr>
+              <a:t>line coverage</a:t>
+            </a:r>
+          </a:p>
+          <a:p>
+            <a:pPr algn="ctr"/>
+            <a:r>
+              <a:rPr sz="850" b="0">
+                <a:solidFill>
+                  <a:srgbClr val="1A1A1A"/>
+                </a:solidFill>
+                <a:latin typeface="Segoe UI"/>
+              </a:rPr>
+              <a:t>~4,000 tests</a:t>
+            </a:r>
+          </a:p>
+        </p:txBody>
+      </p:sp>
+      <p:sp>
+        <p:nvSpPr>
+          <p:cNvPr id="13" name="Rounded Rectangle 12"/>
+          <p:cNvSpPr/>
+          <p:nvPr/>
+        </p:nvSpPr>
+        <p:spPr>
+          <a:xfrm>
+            <a:off x="9921240" y="1600200"/>
+            <a:ext cx="1691640" cy="1051560"/>
+          </a:xfrm>
+          <a:prstGeom prst="roundRect">
+            <a:avLst>
+              <a:gd name="adj" fmla="val 10000"/>
+            </a:avLst>
+          </a:prstGeom>
+          <a:solidFill>
+            <a:srgbClr val="DCEEE7"/>
+          </a:solidFill>
+          <a:ln w="12700">
+            <a:solidFill>
+              <a:srgbClr val="1E6B52"/>
+            </a:solidFill>
+          </a:ln>
+          <a:effectLst/>
+        </p:spPr>
+        <p:style>
+          <a:lnRef idx="1">
+            <a:schemeClr val="accent1"/>
+          </a:lnRef>
+          <a:fillRef idx="3">
+            <a:schemeClr val="accent1"/>
+          </a:fillRef>
+          <a:effectRef idx="2">
+            <a:schemeClr val="accent1"/>
+          </a:effectRef>
+          <a:fontRef idx="minor">
+            <a:schemeClr val="lt1"/>
+          </a:fontRef>
+        </p:style>
+        <p:txBody>
+          <a:bodyPr rtlCol="0" anchor="ctr" wrap="square" lIns="54864" rIns="54864" tIns="27432" bIns="27432"/>
+          <a:lstStyle/>
+          <a:p>
+            <a:pPr algn="ctr"/>
+            <a:r>
+              <a:rPr sz="2200" b="1">
+                <a:solidFill>
+                  <a:srgbClr val="1E6B52"/>
+                </a:solidFill>
+                <a:latin typeface="Segoe UI"/>
+              </a:rPr>
+              <a:t>≤15</a:t>
+            </a:r>
+          </a:p>
+          <a:p>
+            <a:pPr algn="ctr"/>
+            <a:r>
+              <a:rPr sz="850" b="0">
+                <a:solidFill>
+                  <a:srgbClr val="1A1A1A"/>
+                </a:solidFill>
+                <a:latin typeface="Segoe UI"/>
+              </a:rPr>
+              <a:t>cognitive</a:t>
+            </a:r>
+          </a:p>
+          <a:p>
+            <a:pPr algn="ctr"/>
+            <a:r>
+              <a:rPr sz="850" b="0">
+                <a:solidFill>
+                  <a:srgbClr val="1A1A1A"/>
+                </a:solidFill>
+                <a:latin typeface="Segoe UI"/>
+              </a:rPr>
+              <a:t>complexity, every</a:t>
+            </a:r>
+          </a:p>
+          <a:p>
+            <a:pPr algn="ctr"/>
+            <a:r>
+              <a:rPr sz="850" b="0">
+                <a:solidFill>
+                  <a:srgbClr val="1A1A1A"/>
+                </a:solidFill>
+                <a:latin typeface="Segoe UI"/>
+              </a:rPr>
+              <a:t>function</a:t>
+            </a:r>
+          </a:p>
+        </p:txBody>
+      </p:sp>
+      <p:sp>
+        <p:nvSpPr>
+          <p:cNvPr id="14" name="TextBox 13"/>
           <p:cNvSpPr txBox="1"/>
           <p:nvPr/>
         </p:nvSpPr>
         <p:spPr>
           <a:xfrm>
-            <a:off x="822960" y="2395728"/>
-            <a:ext cx="2377440" cy="274320"/>
+            <a:off x="685800" y="2880360"/>
+            <a:ext cx="5486400" cy="228600"/>
           </a:xfrm>
           <a:prstGeom prst="rect">
             <a:avLst/>
@@ -13710,27 +13664,633 @@
               </a:spcAft>
             </a:pPr>
             <a:r>
-              <a:rPr sz="1100" b="1">
-                <a:solidFill>
-                  <a:srgbClr val="1A1A1A"/>
-                </a:solidFill>
-                <a:latin typeface="Segoe UI"/>
-              </a:rPr>
-              <a:t>Ticket → PR AND chat</a:t>
-            </a:r>
-          </a:p>
-        </p:txBody>
-      </p:sp>
-      <p:sp>
-        <p:nvSpPr>
-          <p:cNvPr id="10" name="TextBox 9"/>
+              <a:rPr sz="1000" b="1">
+                <a:solidFill>
+                  <a:srgbClr val="6B6B6B"/>
+                </a:solidFill>
+                <a:latin typeface="Segoe UI"/>
+              </a:rPr>
+              <a:t>CI SCAN PIPELINE  (.gitlab-ci.yml)</a:t>
+            </a:r>
+          </a:p>
+        </p:txBody>
+      </p:sp>
+      <p:sp>
+        <p:nvSpPr>
+          <p:cNvPr id="15" name="Rounded Rectangle 14"/>
+          <p:cNvSpPr/>
+          <p:nvPr/>
+        </p:nvSpPr>
+        <p:spPr>
+          <a:xfrm>
+            <a:off x="685800" y="3154680"/>
+            <a:ext cx="2103120" cy="868680"/>
+          </a:xfrm>
+          <a:prstGeom prst="roundRect">
+            <a:avLst>
+              <a:gd name="adj" fmla="val 10000"/>
+            </a:avLst>
+          </a:prstGeom>
+          <a:solidFill>
+            <a:srgbClr val="DCE7F2"/>
+          </a:solidFill>
+          <a:ln w="12700">
+            <a:solidFill>
+              <a:srgbClr val="1F4E79"/>
+            </a:solidFill>
+          </a:ln>
+          <a:effectLst/>
+        </p:spPr>
+        <p:style>
+          <a:lnRef idx="1">
+            <a:schemeClr val="accent1"/>
+          </a:lnRef>
+          <a:fillRef idx="3">
+            <a:schemeClr val="accent1"/>
+          </a:fillRef>
+          <a:effectRef idx="2">
+            <a:schemeClr val="accent1"/>
+          </a:effectRef>
+          <a:fontRef idx="minor">
+            <a:schemeClr val="lt1"/>
+          </a:fontRef>
+        </p:style>
+        <p:txBody>
+          <a:bodyPr rtlCol="0" anchor="ctr" wrap="square" lIns="54864" rIns="54864" tIns="27432" bIns="27432"/>
+          <a:lstStyle/>
+          <a:p>
+            <a:pPr algn="ctr"/>
+            <a:r>
+              <a:rPr sz="1250" b="1">
+                <a:solidFill>
+                  <a:srgbClr val="1F4E79"/>
+                </a:solidFill>
+                <a:latin typeface="Segoe UI"/>
+              </a:rPr>
+              <a:t>build</a:t>
+            </a:r>
+          </a:p>
+          <a:p>
+            <a:pPr algn="ctr"/>
+            <a:r>
+              <a:rPr sz="850" b="0">
+                <a:solidFill>
+                  <a:srgbClr val="1A1A1A"/>
+                </a:solidFill>
+                <a:latin typeface="Segoe UI"/>
+              </a:rPr>
+              <a:t>uv sync --frozen</a:t>
+            </a:r>
+          </a:p>
+          <a:p>
+            <a:pPr algn="ctr"/>
+            <a:r>
+              <a:rPr sz="850" b="0">
+                <a:solidFill>
+                  <a:srgbClr val="1A1A1A"/>
+                </a:solidFill>
+                <a:latin typeface="Segoe UI"/>
+              </a:rPr>
+              <a:t>uv.lock decides versions</a:t>
+            </a:r>
+          </a:p>
+        </p:txBody>
+      </p:sp>
+      <p:cxnSp>
+        <p:nvCxnSpPr>
+          <p:cNvPr id="16" name="Connector 15"/>
+          <p:cNvCxnSpPr/>
+          <p:nvPr/>
+        </p:nvCxnSpPr>
+        <p:spPr>
+          <a:xfrm>
+            <a:off x="2788920" y="3584448"/>
+            <a:ext cx="365760" cy="0"/>
+          </a:xfrm>
+          <a:prstGeom prst="line">
+            <a:avLst/>
+          </a:prstGeom>
+          <a:ln w="19050">
+            <a:solidFill>
+              <a:srgbClr val="C9C9C9"/>
+            </a:solidFill>
+            <a:tailEnd type="triangle" w="med" len="med"/>
+          </a:ln>
+        </p:spPr>
+        <p:style>
+          <a:lnRef idx="2">
+            <a:schemeClr val="accent1"/>
+          </a:lnRef>
+          <a:fillRef idx="0">
+            <a:schemeClr val="accent1"/>
+          </a:fillRef>
+          <a:effectRef idx="1">
+            <a:schemeClr val="accent1"/>
+          </a:effectRef>
+          <a:fontRef idx="minor">
+            <a:schemeClr val="tx1"/>
+          </a:fontRef>
+        </p:style>
+      </p:cxnSp>
+      <p:sp>
+        <p:nvSpPr>
+          <p:cNvPr id="17" name="Rounded Rectangle 16"/>
+          <p:cNvSpPr/>
+          <p:nvPr/>
+        </p:nvSpPr>
+        <p:spPr>
+          <a:xfrm>
+            <a:off x="3154680" y="3154680"/>
+            <a:ext cx="2103120" cy="868680"/>
+          </a:xfrm>
+          <a:prstGeom prst="roundRect">
+            <a:avLst>
+              <a:gd name="adj" fmla="val 10000"/>
+            </a:avLst>
+          </a:prstGeom>
+          <a:solidFill>
+            <a:srgbClr val="DCEEE7"/>
+          </a:solidFill>
+          <a:ln w="12700">
+            <a:solidFill>
+              <a:srgbClr val="1E6B52"/>
+            </a:solidFill>
+          </a:ln>
+          <a:effectLst/>
+        </p:spPr>
+        <p:style>
+          <a:lnRef idx="1">
+            <a:schemeClr val="accent1"/>
+          </a:lnRef>
+          <a:fillRef idx="3">
+            <a:schemeClr val="accent1"/>
+          </a:fillRef>
+          <a:effectRef idx="2">
+            <a:schemeClr val="accent1"/>
+          </a:effectRef>
+          <a:fontRef idx="minor">
+            <a:schemeClr val="lt1"/>
+          </a:fontRef>
+        </p:style>
+        <p:txBody>
+          <a:bodyPr rtlCol="0" anchor="ctr" wrap="square" lIns="54864" rIns="54864" tIns="27432" bIns="27432"/>
+          <a:lstStyle/>
+          <a:p>
+            <a:pPr algn="ctr"/>
+            <a:r>
+              <a:rPr sz="1250" b="1">
+                <a:solidFill>
+                  <a:srgbClr val="1E6B52"/>
+                </a:solidFill>
+                <a:latin typeface="Segoe UI"/>
+              </a:rPr>
+              <a:t>sonar/</a:t>
+            </a:r>
+          </a:p>
+          <a:p>
+            <a:pPr algn="ctr"/>
+            <a:r>
+              <a:rPr sz="850" b="0">
+                <a:solidFill>
+                  <a:srgbClr val="1A1A1A"/>
+                </a:solidFill>
+                <a:latin typeface="Segoe UI"/>
+              </a:rPr>
+              <a:t>coverage.xml · junit.xml</a:t>
+            </a:r>
+          </a:p>
+          <a:p>
+            <a:pPr algn="ctr"/>
+            <a:r>
+              <a:rPr sz="850" b="0">
+                <a:solidFill>
+                  <a:srgbClr val="1A1A1A"/>
+                </a:solidFill>
+                <a:latin typeface="Segoe UI"/>
+              </a:rPr>
+              <a:t>+ web/src included</a:t>
+            </a:r>
+          </a:p>
+        </p:txBody>
+      </p:sp>
+      <p:sp>
+        <p:nvSpPr>
+          <p:cNvPr id="18" name="Rounded Rectangle 17"/>
+          <p:cNvSpPr/>
+          <p:nvPr/>
+        </p:nvSpPr>
+        <p:spPr>
+          <a:xfrm>
+            <a:off x="3154680" y="4160520"/>
+            <a:ext cx="2103120" cy="868680"/>
+          </a:xfrm>
+          <a:prstGeom prst="roundRect">
+            <a:avLst>
+              <a:gd name="adj" fmla="val 10000"/>
+            </a:avLst>
+          </a:prstGeom>
+          <a:solidFill>
+            <a:srgbClr val="EAE1F0"/>
+          </a:solidFill>
+          <a:ln w="12700">
+            <a:solidFill>
+              <a:srgbClr val="5B3A6E"/>
+            </a:solidFill>
+          </a:ln>
+          <a:effectLst/>
+        </p:spPr>
+        <p:style>
+          <a:lnRef idx="1">
+            <a:schemeClr val="accent1"/>
+          </a:lnRef>
+          <a:fillRef idx="3">
+            <a:schemeClr val="accent1"/>
+          </a:fillRef>
+          <a:effectRef idx="2">
+            <a:schemeClr val="accent1"/>
+          </a:effectRef>
+          <a:fontRef idx="minor">
+            <a:schemeClr val="lt1"/>
+          </a:fontRef>
+        </p:style>
+        <p:txBody>
+          <a:bodyPr rtlCol="0" anchor="ctr" wrap="square" lIns="54864" rIns="54864" tIns="27432" bIns="27432"/>
+          <a:lstStyle/>
+          <a:p>
+            <a:pPr algn="ctr"/>
+            <a:r>
+              <a:rPr sz="1250" b="1">
+                <a:solidFill>
+                  <a:srgbClr val="5B3A6E"/>
+                </a:solidFill>
+                <a:latin typeface="Segoe UI"/>
+              </a:rPr>
+              <a:t>blackduck/</a:t>
+            </a:r>
+          </a:p>
+          <a:p>
+            <a:pPr algn="ctr"/>
+            <a:r>
+              <a:rPr sz="850" b="0">
+                <a:solidFill>
+                  <a:srgbClr val="1A1A1A"/>
+                </a:solidFill>
+                <a:latin typeface="Segoe UI"/>
+              </a:rPr>
+              <a:t>pinned requirements</a:t>
+            </a:r>
+          </a:p>
+          <a:p>
+            <a:pPr algn="ctr"/>
+            <a:r>
+              <a:rPr sz="850" b="0">
+                <a:solidFill>
+                  <a:srgbClr val="1A1A1A"/>
+                </a:solidFill>
+                <a:latin typeface="Segoe UI"/>
+              </a:rPr>
+              <a:t>CycloneDX SBOM · wheels</a:t>
+            </a:r>
+          </a:p>
+        </p:txBody>
+      </p:sp>
+      <p:cxnSp>
+        <p:nvCxnSpPr>
+          <p:cNvPr id="19" name="Connector 18"/>
+          <p:cNvCxnSpPr/>
+          <p:nvPr/>
+        </p:nvCxnSpPr>
+        <p:spPr>
+          <a:xfrm>
+            <a:off x="2788920" y="3584448"/>
+            <a:ext cx="365760" cy="1005840"/>
+          </a:xfrm>
+          <a:prstGeom prst="line">
+            <a:avLst/>
+          </a:prstGeom>
+          <a:ln w="19050">
+            <a:solidFill>
+              <a:srgbClr val="C9C9C9"/>
+            </a:solidFill>
+            <a:tailEnd type="triangle" w="med" len="med"/>
+          </a:ln>
+        </p:spPr>
+        <p:style>
+          <a:lnRef idx="2">
+            <a:schemeClr val="accent1"/>
+          </a:lnRef>
+          <a:fillRef idx="0">
+            <a:schemeClr val="accent1"/>
+          </a:fillRef>
+          <a:effectRef idx="1">
+            <a:schemeClr val="accent1"/>
+          </a:effectRef>
+          <a:fontRef idx="minor">
+            <a:schemeClr val="tx1"/>
+          </a:fontRef>
+        </p:style>
+      </p:cxnSp>
+      <p:cxnSp>
+        <p:nvCxnSpPr>
+          <p:cNvPr id="20" name="Connector 19"/>
+          <p:cNvCxnSpPr/>
+          <p:nvPr/>
+        </p:nvCxnSpPr>
+        <p:spPr>
+          <a:xfrm>
+            <a:off x="5257800" y="3584448"/>
+            <a:ext cx="365760" cy="0"/>
+          </a:xfrm>
+          <a:prstGeom prst="line">
+            <a:avLst/>
+          </a:prstGeom>
+          <a:ln w="19050">
+            <a:solidFill>
+              <a:srgbClr val="C9C9C9"/>
+            </a:solidFill>
+            <a:tailEnd type="triangle" w="med" len="med"/>
+          </a:ln>
+        </p:spPr>
+        <p:style>
+          <a:lnRef idx="2">
+            <a:schemeClr val="accent1"/>
+          </a:lnRef>
+          <a:fillRef idx="0">
+            <a:schemeClr val="accent1"/>
+          </a:fillRef>
+          <a:effectRef idx="1">
+            <a:schemeClr val="accent1"/>
+          </a:effectRef>
+          <a:fontRef idx="minor">
+            <a:schemeClr val="tx1"/>
+          </a:fontRef>
+        </p:style>
+      </p:cxnSp>
+      <p:sp>
+        <p:nvSpPr>
+          <p:cNvPr id="21" name="Rounded Rectangle 20"/>
+          <p:cNvSpPr/>
+          <p:nvPr/>
+        </p:nvSpPr>
+        <p:spPr>
+          <a:xfrm>
+            <a:off x="5623560" y="3154680"/>
+            <a:ext cx="2011680" cy="868680"/>
+          </a:xfrm>
+          <a:prstGeom prst="roundRect">
+            <a:avLst>
+              <a:gd name="adj" fmla="val 10000"/>
+            </a:avLst>
+          </a:prstGeom>
+          <a:solidFill>
+            <a:srgbClr val="FFFFFF"/>
+          </a:solidFill>
+          <a:ln w="12700">
+            <a:solidFill>
+              <a:srgbClr val="1E6B52"/>
+            </a:solidFill>
+          </a:ln>
+          <a:effectLst/>
+        </p:spPr>
+        <p:style>
+          <a:lnRef idx="1">
+            <a:schemeClr val="accent1"/>
+          </a:lnRef>
+          <a:fillRef idx="3">
+            <a:schemeClr val="accent1"/>
+          </a:fillRef>
+          <a:effectRef idx="2">
+            <a:schemeClr val="accent1"/>
+          </a:effectRef>
+          <a:fontRef idx="minor">
+            <a:schemeClr val="lt1"/>
+          </a:fontRef>
+        </p:style>
+        <p:txBody>
+          <a:bodyPr rtlCol="0" anchor="ctr" wrap="square" lIns="54864" rIns="54864" tIns="27432" bIns="27432"/>
+          <a:lstStyle/>
+          <a:p>
+            <a:pPr algn="ctr"/>
+            <a:r>
+              <a:rPr sz="1250" b="1">
+                <a:solidFill>
+                  <a:srgbClr val="1E6B52"/>
+                </a:solidFill>
+                <a:latin typeface="Segoe UI"/>
+              </a:rPr>
+              <a:t>SonarQube</a:t>
+            </a:r>
+          </a:p>
+          <a:p>
+            <a:pPr algn="ctr"/>
+            <a:r>
+              <a:rPr sz="850" b="0">
+                <a:solidFill>
+                  <a:srgbClr val="1A1A1A"/>
+                </a:solidFill>
+                <a:latin typeface="Segoe UI"/>
+              </a:rPr>
+              <a:t>scanner-cli</a:t>
+            </a:r>
+          </a:p>
+          <a:p>
+            <a:pPr algn="ctr"/>
+            <a:r>
+              <a:rPr sz="850" b="0">
+                <a:solidFill>
+                  <a:srgbClr val="1A1A1A"/>
+                </a:solidFill>
+                <a:latin typeface="Segoe UI"/>
+              </a:rPr>
+              <a:t>GIT_DEPTH 0</a:t>
+            </a:r>
+          </a:p>
+        </p:txBody>
+      </p:sp>
+      <p:cxnSp>
+        <p:nvCxnSpPr>
+          <p:cNvPr id="22" name="Connector 21"/>
+          <p:cNvCxnSpPr/>
+          <p:nvPr/>
+        </p:nvCxnSpPr>
+        <p:spPr>
+          <a:xfrm>
+            <a:off x="5257800" y="4590288"/>
+            <a:ext cx="365760" cy="0"/>
+          </a:xfrm>
+          <a:prstGeom prst="line">
+            <a:avLst/>
+          </a:prstGeom>
+          <a:ln w="19050">
+            <a:solidFill>
+              <a:srgbClr val="C9C9C9"/>
+            </a:solidFill>
+            <a:tailEnd type="triangle" w="med" len="med"/>
+          </a:ln>
+        </p:spPr>
+        <p:style>
+          <a:lnRef idx="2">
+            <a:schemeClr val="accent1"/>
+          </a:lnRef>
+          <a:fillRef idx="0">
+            <a:schemeClr val="accent1"/>
+          </a:fillRef>
+          <a:effectRef idx="1">
+            <a:schemeClr val="accent1"/>
+          </a:effectRef>
+          <a:fontRef idx="minor">
+            <a:schemeClr val="tx1"/>
+          </a:fontRef>
+        </p:style>
+      </p:cxnSp>
+      <p:sp>
+        <p:nvSpPr>
+          <p:cNvPr id="23" name="Rounded Rectangle 22"/>
+          <p:cNvSpPr/>
+          <p:nvPr/>
+        </p:nvSpPr>
+        <p:spPr>
+          <a:xfrm>
+            <a:off x="5623560" y="4160520"/>
+            <a:ext cx="2011680" cy="868680"/>
+          </a:xfrm>
+          <a:prstGeom prst="roundRect">
+            <a:avLst>
+              <a:gd name="adj" fmla="val 10000"/>
+            </a:avLst>
+          </a:prstGeom>
+          <a:solidFill>
+            <a:srgbClr val="FFFFFF"/>
+          </a:solidFill>
+          <a:ln w="12700">
+            <a:solidFill>
+              <a:srgbClr val="5B3A6E"/>
+            </a:solidFill>
+          </a:ln>
+          <a:effectLst/>
+        </p:spPr>
+        <p:style>
+          <a:lnRef idx="1">
+            <a:schemeClr val="accent1"/>
+          </a:lnRef>
+          <a:fillRef idx="3">
+            <a:schemeClr val="accent1"/>
+          </a:fillRef>
+          <a:effectRef idx="2">
+            <a:schemeClr val="accent1"/>
+          </a:effectRef>
+          <a:fontRef idx="minor">
+            <a:schemeClr val="lt1"/>
+          </a:fontRef>
+        </p:style>
+        <p:txBody>
+          <a:bodyPr rtlCol="0" anchor="ctr" wrap="square" lIns="54864" rIns="54864" tIns="27432" bIns="27432"/>
+          <a:lstStyle/>
+          <a:p>
+            <a:pPr algn="ctr"/>
+            <a:r>
+              <a:rPr sz="1250" b="1">
+                <a:solidFill>
+                  <a:srgbClr val="5B3A6E"/>
+                </a:solidFill>
+                <a:latin typeface="Segoe UI"/>
+              </a:rPr>
+              <a:t>Black Duck</a:t>
+            </a:r>
+          </a:p>
+          <a:p>
+            <a:pPr algn="ctr"/>
+            <a:r>
+              <a:rPr sz="850" b="0">
+                <a:solidFill>
+                  <a:srgbClr val="1A1A1A"/>
+                </a:solidFill>
+                <a:latin typeface="Segoe UI"/>
+              </a:rPr>
+              <a:t>detect10.sh</a:t>
+            </a:r>
+          </a:p>
+          <a:p>
+            <a:pPr algn="ctr"/>
+            <a:r>
+              <a:rPr sz="850" b="0">
+                <a:solidFill>
+                  <a:srgbClr val="1A1A1A"/>
+                </a:solidFill>
+                <a:latin typeface="Segoe UI"/>
+              </a:rPr>
+              <a:t>ships SHIPPED pins</a:t>
+            </a:r>
+          </a:p>
+        </p:txBody>
+      </p:sp>
+      <p:sp>
+        <p:nvSpPr>
+          <p:cNvPr id="24" name="Rounded Rectangle 23"/>
+          <p:cNvSpPr/>
+          <p:nvPr/>
+        </p:nvSpPr>
+        <p:spPr>
+          <a:xfrm>
+            <a:off x="8001000" y="3154680"/>
+            <a:ext cx="3520440" cy="1874519"/>
+          </a:xfrm>
+          <a:prstGeom prst="roundRect">
+            <a:avLst>
+              <a:gd name="adj" fmla="val 10000"/>
+            </a:avLst>
+          </a:prstGeom>
+          <a:solidFill>
+            <a:srgbClr val="FFFFFF"/>
+          </a:solidFill>
+          <a:ln w="12700">
+            <a:solidFill>
+              <a:srgbClr val="3A3A3A"/>
+            </a:solidFill>
+          </a:ln>
+          <a:effectLst/>
+        </p:spPr>
+        <p:style>
+          <a:lnRef idx="1">
+            <a:schemeClr val="accent1"/>
+          </a:lnRef>
+          <a:fillRef idx="3">
+            <a:schemeClr val="accent1"/>
+          </a:fillRef>
+          <a:effectRef idx="2">
+            <a:schemeClr val="accent1"/>
+          </a:effectRef>
+          <a:fontRef idx="minor">
+            <a:schemeClr val="lt1"/>
+          </a:fontRef>
+        </p:style>
+        <p:txBody>
+          <a:bodyPr rtlCol="0" anchor="ctr" wrap="square" lIns="54864" rIns="54864" tIns="27432" bIns="27432"/>
+          <a:lstStyle/>
+          <a:p>
+            <a:pPr algn="ctr"/>
+            <a:r>
+              <a:rPr sz="1250" b="1">
+                <a:solidFill>
+                  <a:srgbClr val="3A3A3A"/>
+                </a:solidFill>
+                <a:latin typeface="Segoe UI"/>
+              </a:rPr>
+              <a:t>Data control</a:t>
+            </a:r>
+          </a:p>
+        </p:txBody>
+      </p:sp>
+      <p:sp>
+        <p:nvSpPr>
+          <p:cNvPr id="25" name="TextBox 24"/>
           <p:cNvSpPr txBox="1"/>
           <p:nvPr/>
         </p:nvSpPr>
         <p:spPr>
           <a:xfrm>
-            <a:off x="3246120" y="2395728"/>
-            <a:ext cx="3657600" cy="274320"/>
+            <a:off x="8183879" y="3566160"/>
+            <a:ext cx="3246120" cy="228600"/>
           </a:xfrm>
           <a:prstGeom prst="rect">
             <a:avLst/>
@@ -13749,27 +14309,27 @@
               </a:spcAft>
             </a:pPr>
             <a:r>
-              <a:rPr sz="1050" b="0">
-                <a:solidFill>
-                  <a:srgbClr val="6B6B6B"/>
-                </a:solidFill>
-                <a:latin typeface="Segoe UI"/>
-              </a:rPr>
-              <a:t>usually one or the other</a:t>
-            </a:r>
-          </a:p>
-        </p:txBody>
-      </p:sp>
-      <p:sp>
-        <p:nvSpPr>
-          <p:cNvPr id="11" name="TextBox 10"/>
+              <a:rPr sz="950" b="0">
+                <a:solidFill>
+                  <a:srgbClr val="1A1A1A"/>
+                </a:solidFill>
+                <a:latin typeface="Segoe UI"/>
+              </a:rPr>
+              <a:t>· Telemetry: none, and none in the lock</a:t>
+            </a:r>
+          </a:p>
+        </p:txBody>
+      </p:sp>
+      <p:sp>
+        <p:nvSpPr>
+          <p:cNvPr id="26" name="TextBox 25"/>
           <p:cNvSpPr txBox="1"/>
           <p:nvPr/>
         </p:nvSpPr>
         <p:spPr>
           <a:xfrm>
-            <a:off x="7040880" y="2395728"/>
-            <a:ext cx="4389120" cy="274320"/>
+            <a:off x="8183879" y="3803904"/>
+            <a:ext cx="3246120" cy="228600"/>
           </a:xfrm>
           <a:prstGeom prst="rect">
             <a:avLst/>
@@ -13788,71 +14348,27 @@
               </a:spcAft>
             </a:pPr>
             <a:r>
-              <a:rPr sz="1050" b="0">
-                <a:solidFill>
-                  <a:srgbClr val="1A1A1A"/>
-                </a:solidFill>
-                <a:latin typeface="Segoe UI"/>
-              </a:rPr>
-              <a:t>▸ one service does both, on the same tool registry</a:t>
-            </a:r>
-          </a:p>
-        </p:txBody>
-      </p:sp>
-      <p:sp>
-        <p:nvSpPr>
-          <p:cNvPr id="12" name="Rectangle 11"/>
-          <p:cNvSpPr/>
-          <p:nvPr/>
-        </p:nvSpPr>
-        <p:spPr>
-          <a:xfrm>
-            <a:off x="685800" y="2798064"/>
-            <a:ext cx="10853928" cy="475488"/>
-          </a:xfrm>
-          <a:prstGeom prst="rect">
-            <a:avLst/>
-          </a:prstGeom>
-          <a:solidFill>
-            <a:srgbClr val="FFFFFF"/>
-          </a:solidFill>
-          <a:ln>
-            <a:noFill/>
-          </a:ln>
-          <a:effectLst/>
-        </p:spPr>
-        <p:style>
-          <a:lnRef idx="1">
-            <a:schemeClr val="accent1"/>
-          </a:lnRef>
-          <a:fillRef idx="3">
-            <a:schemeClr val="accent1"/>
-          </a:fillRef>
-          <a:effectRef idx="2">
-            <a:schemeClr val="accent1"/>
-          </a:effectRef>
-          <a:fontRef idx="minor">
-            <a:schemeClr val="lt1"/>
-          </a:fontRef>
-        </p:style>
-        <p:txBody>
-          <a:bodyPr rtlCol="0" anchor="ctr"/>
-          <a:lstStyle/>
-          <a:p>
-            <a:pPr algn="ctr"/>
-          </a:p>
-        </p:txBody>
-      </p:sp>
-      <p:sp>
-        <p:nvSpPr>
-          <p:cNvPr id="13" name="TextBox 12"/>
+              <a:rPr sz="950" b="0">
+                <a:solidFill>
+                  <a:srgbClr val="1A1A1A"/>
+                </a:solidFill>
+                <a:latin typeface="Segoe UI"/>
+              </a:rPr>
+              <a:t>· Prompts go only to YOUR endpoint</a:t>
+            </a:r>
+          </a:p>
+        </p:txBody>
+      </p:sp>
+      <p:sp>
+        <p:nvSpPr>
+          <p:cNvPr id="27" name="TextBox 26"/>
           <p:cNvSpPr txBox="1"/>
           <p:nvPr/>
         </p:nvSpPr>
         <p:spPr>
           <a:xfrm>
-            <a:off x="822960" y="2926080"/>
-            <a:ext cx="2377440" cy="274320"/>
+            <a:off x="8183879" y="4041648"/>
+            <a:ext cx="3246120" cy="228600"/>
           </a:xfrm>
           <a:prstGeom prst="rect">
             <a:avLst/>
@@ -13871,27 +14387,27 @@
               </a:spcAft>
             </a:pPr>
             <a:r>
-              <a:rPr sz="1100" b="1">
-                <a:solidFill>
-                  <a:srgbClr val="1A1A1A"/>
-                </a:solidFill>
-                <a:latin typeface="Segoe UI"/>
-              </a:rPr>
-              <a:t>Model requirement</a:t>
-            </a:r>
-          </a:p>
-        </p:txBody>
-      </p:sp>
-      <p:sp>
-        <p:nvSpPr>
-          <p:cNvPr id="14" name="TextBox 13"/>
+              <a:rPr sz="950" b="0">
+                <a:solidFill>
+                  <a:srgbClr val="1A1A1A"/>
+                </a:solidFill>
+                <a:latin typeface="Segoe UI"/>
+              </a:rPr>
+              <a:t>· At rest: ~/.aiforge/ — delete it, it is gone</a:t>
+            </a:r>
+          </a:p>
+        </p:txBody>
+      </p:sp>
+      <p:sp>
+        <p:nvSpPr>
+          <p:cNvPr id="28" name="TextBox 27"/>
           <p:cNvSpPr txBox="1"/>
           <p:nvPr/>
         </p:nvSpPr>
         <p:spPr>
           <a:xfrm>
-            <a:off x="3246120" y="2926080"/>
-            <a:ext cx="3657600" cy="274320"/>
+            <a:off x="8183879" y="4279392"/>
+            <a:ext cx="3246120" cy="228600"/>
           </a:xfrm>
           <a:prstGeom prst="rect">
             <a:avLst/>
@@ -13910,27 +14426,27 @@
               </a:spcAft>
             </a:pPr>
             <a:r>
-              <a:rPr sz="1050" b="0">
-                <a:solidFill>
-                  <a:srgbClr val="6B6B6B"/>
-                </a:solidFill>
-                <a:latin typeface="Segoe UI"/>
-              </a:rPr>
-              <a:t>vendor function-calling</a:t>
-            </a:r>
-          </a:p>
-        </p:txBody>
-      </p:sp>
-      <p:sp>
-        <p:nvSpPr>
-          <p:cNvPr id="15" name="TextBox 14"/>
+              <a:rPr sz="950" b="0">
+                <a:solidFill>
+                  <a:srgbClr val="1A1A1A"/>
+                </a:solidFill>
+                <a:latin typeface="Segoe UI"/>
+              </a:rPr>
+              <a:t>· Loopback by default; loud warning if not</a:t>
+            </a:r>
+          </a:p>
+        </p:txBody>
+      </p:sp>
+      <p:sp>
+        <p:nvSpPr>
+          <p:cNvPr id="29" name="TextBox 28"/>
           <p:cNvSpPr txBox="1"/>
           <p:nvPr/>
         </p:nvSpPr>
         <p:spPr>
           <a:xfrm>
-            <a:off x="7040880" y="2926080"/>
-            <a:ext cx="4389120" cy="274320"/>
+            <a:off x="8183879" y="4517136"/>
+            <a:ext cx="3246120" cy="228600"/>
           </a:xfrm>
           <a:prstGeom prst="rect">
             <a:avLst/>
@@ -13949,71 +14465,27 @@
               </a:spcAft>
             </a:pPr>
             <a:r>
-              <a:rPr sz="1050" b="0">
-                <a:solidFill>
-                  <a:srgbClr val="1A1A1A"/>
-                </a:solidFill>
-                <a:latin typeface="Segoe UI"/>
-              </a:rPr>
-              <a:t>▸ plain-text ReAct — a 4-bit local model drives it</a:t>
-            </a:r>
-          </a:p>
-        </p:txBody>
-      </p:sp>
-      <p:sp>
-        <p:nvSpPr>
-          <p:cNvPr id="16" name="Rectangle 15"/>
-          <p:cNvSpPr/>
-          <p:nvPr/>
-        </p:nvSpPr>
-        <p:spPr>
-          <a:xfrm>
-            <a:off x="685800" y="3328416"/>
-            <a:ext cx="10853928" cy="475488"/>
-          </a:xfrm>
-          <a:prstGeom prst="rect">
-            <a:avLst/>
-          </a:prstGeom>
-          <a:solidFill>
-            <a:srgbClr val="F7F7F7"/>
-          </a:solidFill>
-          <a:ln>
-            <a:noFill/>
-          </a:ln>
-          <a:effectLst/>
-        </p:spPr>
-        <p:style>
-          <a:lnRef idx="1">
-            <a:schemeClr val="accent1"/>
-          </a:lnRef>
-          <a:fillRef idx="3">
-            <a:schemeClr val="accent1"/>
-          </a:fillRef>
-          <a:effectRef idx="2">
-            <a:schemeClr val="accent1"/>
-          </a:effectRef>
-          <a:fontRef idx="minor">
-            <a:schemeClr val="lt1"/>
-          </a:fontRef>
-        </p:style>
-        <p:txBody>
-          <a:bodyPr rtlCol="0" anchor="ctr"/>
-          <a:lstStyle/>
-          <a:p>
-            <a:pPr algn="ctr"/>
-          </a:p>
-        </p:txBody>
-      </p:sp>
-      <p:sp>
-        <p:nvSpPr>
-          <p:cNvPr id="17" name="TextBox 16"/>
+              <a:rPr sz="950" b="0">
+                <a:solidFill>
+                  <a:srgbClr val="1A1A1A"/>
+                </a:solidFill>
+                <a:latin typeface="Segoe UI"/>
+              </a:rPr>
+              <a:t>· SSRF guard on fetch and crawl</a:t>
+            </a:r>
+          </a:p>
+        </p:txBody>
+      </p:sp>
+      <p:sp>
+        <p:nvSpPr>
+          <p:cNvPr id="30" name="TextBox 29"/>
           <p:cNvSpPr txBox="1"/>
           <p:nvPr/>
         </p:nvSpPr>
         <p:spPr>
           <a:xfrm>
-            <a:off x="822960" y="3456432"/>
-            <a:ext cx="2377440" cy="274320"/>
+            <a:off x="8183879" y="4754880"/>
+            <a:ext cx="3246120" cy="228600"/>
           </a:xfrm>
           <a:prstGeom prst="rect">
             <a:avLst/>
@@ -14032,114 +14504,40 @@
               </a:spcAft>
             </a:pPr>
             <a:r>
-              <a:rPr sz="1100" b="1">
-                <a:solidFill>
-                  <a:srgbClr val="1A1A1A"/>
-                </a:solidFill>
-                <a:latin typeface="Segoe UI"/>
-              </a:rPr>
-              <a:t>Memory store</a:t>
-            </a:r>
-          </a:p>
-        </p:txBody>
-      </p:sp>
-      <p:sp>
-        <p:nvSpPr>
-          <p:cNvPr id="18" name="TextBox 17"/>
-          <p:cNvSpPr txBox="1"/>
-          <p:nvPr/>
-        </p:nvSpPr>
-        <p:spPr>
-          <a:xfrm>
-            <a:off x="3246120" y="3456432"/>
-            <a:ext cx="3657600" cy="274320"/>
-          </a:xfrm>
-          <a:prstGeom prst="rect">
-            <a:avLst/>
-          </a:prstGeom>
-          <a:noFill/>
-        </p:spPr>
-        <p:txBody>
-          <a:bodyPr wrap="square" anchor="t" lIns="0" rIns="0" tIns="0" bIns="0">
-            <a:spAutoFit/>
-          </a:bodyPr>
-          <a:lstStyle/>
-          <a:p>
-            <a:pPr algn="l">
-              <a:spcAft>
-                <a:spcPts val="0"/>
-              </a:spcAft>
-            </a:pPr>
-            <a:r>
-              <a:rPr sz="1050" b="0">
-                <a:solidFill>
-                  <a:srgbClr val="6B6B6B"/>
-                </a:solidFill>
-                <a:latin typeface="Segoe UI"/>
-              </a:rPr>
-              <a:t>a vector DB to install, tune, back up</a:t>
-            </a:r>
-          </a:p>
-        </p:txBody>
-      </p:sp>
-      <p:sp>
-        <p:nvSpPr>
-          <p:cNvPr id="19" name="TextBox 18"/>
-          <p:cNvSpPr txBox="1"/>
-          <p:nvPr/>
-        </p:nvSpPr>
-        <p:spPr>
-          <a:xfrm>
-            <a:off x="7040880" y="3456432"/>
-            <a:ext cx="4389120" cy="274320"/>
-          </a:xfrm>
-          <a:prstGeom prst="rect">
-            <a:avLst/>
-          </a:prstGeom>
-          <a:noFill/>
-        </p:spPr>
-        <p:txBody>
-          <a:bodyPr wrap="square" anchor="t" lIns="0" rIns="0" tIns="0" bIns="0">
-            <a:spAutoFit/>
-          </a:bodyPr>
-          <a:lstStyle/>
-          <a:p>
-            <a:pPr algn="l">
-              <a:spcAft>
-                <a:spcPts val="0"/>
-              </a:spcAft>
-            </a:pPr>
-            <a:r>
-              <a:rPr sz="1050" b="0">
-                <a:solidFill>
-                  <a:srgbClr val="1A1A1A"/>
-                </a:solidFill>
-                <a:latin typeface="Segoe UI"/>
-              </a:rPr>
-              <a:t>▸ markdown + one SQLite file; grep it, delete it</a:t>
-            </a:r>
-          </a:p>
-        </p:txBody>
-      </p:sp>
-      <p:sp>
-        <p:nvSpPr>
-          <p:cNvPr id="20" name="Rectangle 19"/>
+              <a:rPr sz="950" b="0">
+                <a:solidFill>
+                  <a:srgbClr val="1A1A1A"/>
+                </a:solidFill>
+                <a:latin typeface="Segoe UI"/>
+              </a:rPr>
+              <a:t>· Workspace jail on by default</a:t>
+            </a:r>
+          </a:p>
+        </p:txBody>
+      </p:sp>
+      <p:sp>
+        <p:nvSpPr>
+          <p:cNvPr id="31" name="Rounded Rectangle 30"/>
           <p:cNvSpPr/>
           <p:nvPr/>
         </p:nvSpPr>
         <p:spPr>
           <a:xfrm>
-            <a:off x="685800" y="3858768"/>
-            <a:ext cx="10853928" cy="475488"/>
-          </a:xfrm>
-          <a:prstGeom prst="rect">
-            <a:avLst/>
+            <a:off x="685800" y="5230368"/>
+            <a:ext cx="10853928" cy="548640"/>
+          </a:xfrm>
+          <a:prstGeom prst="roundRect">
+            <a:avLst>
+              <a:gd name="adj" fmla="val 10000"/>
+            </a:avLst>
           </a:prstGeom>
           <a:solidFill>
-            <a:srgbClr val="FFFFFF"/>
+            <a:srgbClr val="F7ECD5"/>
           </a:solidFill>
-          <a:ln>
-            <a:noFill/>
+          <a:ln w="12700">
+            <a:solidFill>
+              <a:srgbClr val="8A5A00"/>
+            </a:solidFill>
           </a:ln>
           <a:effectLst/>
         </p:spPr>
@@ -14158,687 +14556,30 @@
           </a:fontRef>
         </p:style>
         <p:txBody>
-          <a:bodyPr rtlCol="0" anchor="ctr"/>
-          <a:lstStyle/>
-          <a:p>
-            <a:pPr algn="ctr"/>
-          </a:p>
-        </p:txBody>
-      </p:sp>
-      <p:sp>
-        <p:nvSpPr>
-          <p:cNvPr id="21" name="TextBox 20"/>
-          <p:cNvSpPr txBox="1"/>
-          <p:nvPr/>
-        </p:nvSpPr>
-        <p:spPr>
-          <a:xfrm>
-            <a:off x="822960" y="3986784"/>
-            <a:ext cx="2377440" cy="274320"/>
-          </a:xfrm>
-          <a:prstGeom prst="rect">
-            <a:avLst/>
-          </a:prstGeom>
-          <a:noFill/>
-        </p:spPr>
-        <p:txBody>
-          <a:bodyPr wrap="square" anchor="t" lIns="0" rIns="0" tIns="0" bIns="0">
-            <a:spAutoFit/>
-          </a:bodyPr>
-          <a:lstStyle/>
-          <a:p>
-            <a:pPr algn="l">
-              <a:spcAft>
-                <a:spcPts val="0"/>
-              </a:spcAft>
-            </a:pPr>
-            <a:r>
-              <a:rPr sz="1100" b="1">
-                <a:solidFill>
-                  <a:srgbClr val="1A1A1A"/>
-                </a:solidFill>
-                <a:latin typeface="Segoe UI"/>
-              </a:rPr>
-              <a:t>Skill discovery</a:t>
-            </a:r>
-          </a:p>
-        </p:txBody>
-      </p:sp>
-      <p:sp>
-        <p:nvSpPr>
-          <p:cNvPr id="22" name="TextBox 21"/>
-          <p:cNvSpPr txBox="1"/>
-          <p:nvPr/>
-        </p:nvSpPr>
-        <p:spPr>
-          <a:xfrm>
-            <a:off x="3246120" y="3986784"/>
-            <a:ext cx="3657600" cy="274320"/>
-          </a:xfrm>
-          <a:prstGeom prst="rect">
-            <a:avLst/>
-          </a:prstGeom>
-          <a:noFill/>
-        </p:spPr>
-        <p:txBody>
-          <a:bodyPr wrap="square" anchor="t" lIns="0" rIns="0" tIns="0" bIns="0">
-            <a:spAutoFit/>
-          </a:bodyPr>
-          <a:lstStyle/>
-          <a:p>
-            <a:pPr algn="l">
-              <a:spcAft>
-                <a:spcPts val="0"/>
-              </a:spcAft>
-            </a:pPr>
-            <a:r>
-              <a:rPr sz="1050" b="0">
-                <a:solidFill>
-                  <a:srgbClr val="6B6B6B"/>
-                </a:solidFill>
-                <a:latin typeface="Segoe UI"/>
-              </a:rPr>
-              <a:t>trigger substring match</a:t>
-            </a:r>
-          </a:p>
-        </p:txBody>
-      </p:sp>
-      <p:sp>
-        <p:nvSpPr>
-          <p:cNvPr id="23" name="TextBox 22"/>
-          <p:cNvSpPr txBox="1"/>
-          <p:nvPr/>
-        </p:nvSpPr>
-        <p:spPr>
-          <a:xfrm>
-            <a:off x="7040880" y="3986784"/>
-            <a:ext cx="4389120" cy="274320"/>
-          </a:xfrm>
-          <a:prstGeom prst="rect">
-            <a:avLst/>
-          </a:prstGeom>
-          <a:noFill/>
-        </p:spPr>
-        <p:txBody>
-          <a:bodyPr wrap="square" anchor="t" lIns="0" rIns="0" tIns="0" bIns="0">
-            <a:spAutoFit/>
-          </a:bodyPr>
-          <a:lstStyle/>
-          <a:p>
-            <a:pPr algn="l">
-              <a:spcAft>
-                <a:spcPts val="0"/>
-              </a:spcAft>
-            </a:pPr>
-            <a:r>
-              <a:rPr sz="1050" b="0">
-                <a:solidFill>
-                  <a:srgbClr val="1A1A1A"/>
-                </a:solidFill>
-                <a:latin typeface="Segoe UI"/>
-              </a:rPr>
-              <a:t>▸ searched by RELEVANCE, so the right one is found</a:t>
-            </a:r>
-          </a:p>
-        </p:txBody>
-      </p:sp>
-      <p:sp>
-        <p:nvSpPr>
-          <p:cNvPr id="24" name="Rectangle 23"/>
-          <p:cNvSpPr/>
-          <p:nvPr/>
-        </p:nvSpPr>
-        <p:spPr>
-          <a:xfrm>
-            <a:off x="685800" y="4389120"/>
-            <a:ext cx="10853928" cy="475488"/>
-          </a:xfrm>
-          <a:prstGeom prst="rect">
-            <a:avLst/>
-          </a:prstGeom>
-          <a:solidFill>
-            <a:srgbClr val="F7F7F7"/>
-          </a:solidFill>
-          <a:ln>
-            <a:noFill/>
-          </a:ln>
-          <a:effectLst/>
-        </p:spPr>
-        <p:style>
-          <a:lnRef idx="1">
-            <a:schemeClr val="accent1"/>
-          </a:lnRef>
-          <a:fillRef idx="3">
-            <a:schemeClr val="accent1"/>
-          </a:fillRef>
-          <a:effectRef idx="2">
-            <a:schemeClr val="accent1"/>
-          </a:effectRef>
-          <a:fontRef idx="minor">
-            <a:schemeClr val="lt1"/>
-          </a:fontRef>
-        </p:style>
-        <p:txBody>
-          <a:bodyPr rtlCol="0" anchor="ctr"/>
-          <a:lstStyle/>
-          <a:p>
-            <a:pPr algn="ctr"/>
-          </a:p>
-        </p:txBody>
-      </p:sp>
-      <p:sp>
-        <p:nvSpPr>
-          <p:cNvPr id="25" name="TextBox 24"/>
-          <p:cNvSpPr txBox="1"/>
-          <p:nvPr/>
-        </p:nvSpPr>
-        <p:spPr>
-          <a:xfrm>
-            <a:off x="822960" y="4517136"/>
-            <a:ext cx="2377440" cy="274320"/>
-          </a:xfrm>
-          <a:prstGeom prst="rect">
-            <a:avLst/>
-          </a:prstGeom>
-          <a:noFill/>
-        </p:spPr>
-        <p:txBody>
-          <a:bodyPr wrap="square" anchor="t" lIns="0" rIns="0" tIns="0" bIns="0">
-            <a:spAutoFit/>
-          </a:bodyPr>
-          <a:lstStyle/>
-          <a:p>
-            <a:pPr algn="l">
-              <a:spcAft>
-                <a:spcPts val="0"/>
-              </a:spcAft>
-            </a:pPr>
-            <a:r>
-              <a:rPr sz="1100" b="1">
-                <a:solidFill>
-                  <a:srgbClr val="1A1A1A"/>
-                </a:solidFill>
-                <a:latin typeface="Segoe UI"/>
-              </a:rPr>
-              <a:t>Gets better how</a:t>
-            </a:r>
-          </a:p>
-        </p:txBody>
-      </p:sp>
-      <p:sp>
-        <p:nvSpPr>
-          <p:cNvPr id="26" name="TextBox 25"/>
-          <p:cNvSpPr txBox="1"/>
-          <p:nvPr/>
-        </p:nvSpPr>
-        <p:spPr>
-          <a:xfrm>
-            <a:off x="3246120" y="4517136"/>
-            <a:ext cx="3657600" cy="274320"/>
-          </a:xfrm>
-          <a:prstGeom prst="rect">
-            <a:avLst/>
-          </a:prstGeom>
-          <a:noFill/>
-        </p:spPr>
-        <p:txBody>
-          <a:bodyPr wrap="square" anchor="t" lIns="0" rIns="0" tIns="0" bIns="0">
-            <a:spAutoFit/>
-          </a:bodyPr>
-          <a:lstStyle/>
-          <a:p>
-            <a:pPr algn="l">
-              <a:spcAft>
-                <a:spcPts val="0"/>
-              </a:spcAft>
-            </a:pPr>
-            <a:r>
-              <a:rPr sz="1050" b="0">
-                <a:solidFill>
-                  <a:srgbClr val="6B6B6B"/>
-                </a:solidFill>
-                <a:latin typeface="Segoe UI"/>
-              </a:rPr>
-              <a:t>you write the prompts</a:t>
-            </a:r>
-          </a:p>
-        </p:txBody>
-      </p:sp>
-      <p:sp>
-        <p:nvSpPr>
-          <p:cNvPr id="27" name="TextBox 26"/>
-          <p:cNvSpPr txBox="1"/>
-          <p:nvPr/>
-        </p:nvSpPr>
-        <p:spPr>
-          <a:xfrm>
-            <a:off x="7040880" y="4517136"/>
-            <a:ext cx="4389120" cy="274320"/>
-          </a:xfrm>
-          <a:prstGeom prst="rect">
-            <a:avLst/>
-          </a:prstGeom>
-          <a:noFill/>
-        </p:spPr>
-        <p:txBody>
-          <a:bodyPr wrap="square" anchor="t" lIns="0" rIns="0" tIns="0" bIns="0">
-            <a:spAutoFit/>
-          </a:bodyPr>
-          <a:lstStyle/>
-          <a:p>
-            <a:pPr algn="l">
-              <a:spcAft>
-                <a:spcPts val="0"/>
-              </a:spcAft>
-            </a:pPr>
-            <a:r>
-              <a:rPr sz="1050" b="0">
-                <a:solidFill>
-                  <a:srgbClr val="1A1A1A"/>
-                </a:solidFill>
-                <a:latin typeface="Segoe UI"/>
-              </a:rPr>
-              <a:t>▸ write_skill() / write_workflow() — it authors its own</a:t>
-            </a:r>
-          </a:p>
-        </p:txBody>
-      </p:sp>
-      <p:sp>
-        <p:nvSpPr>
-          <p:cNvPr id="28" name="Rectangle 27"/>
-          <p:cNvSpPr/>
-          <p:nvPr/>
-        </p:nvSpPr>
-        <p:spPr>
-          <a:xfrm>
-            <a:off x="685800" y="4919472"/>
-            <a:ext cx="10853928" cy="475488"/>
-          </a:xfrm>
-          <a:prstGeom prst="rect">
-            <a:avLst/>
-          </a:prstGeom>
-          <a:solidFill>
-            <a:srgbClr val="FFFFFF"/>
-          </a:solidFill>
-          <a:ln>
-            <a:noFill/>
-          </a:ln>
-          <a:effectLst/>
-        </p:spPr>
-        <p:style>
-          <a:lnRef idx="1">
-            <a:schemeClr val="accent1"/>
-          </a:lnRef>
-          <a:fillRef idx="3">
-            <a:schemeClr val="accent1"/>
-          </a:fillRef>
-          <a:effectRef idx="2">
-            <a:schemeClr val="accent1"/>
-          </a:effectRef>
-          <a:fontRef idx="minor">
-            <a:schemeClr val="lt1"/>
-          </a:fontRef>
-        </p:style>
-        <p:txBody>
-          <a:bodyPr rtlCol="0" anchor="ctr"/>
-          <a:lstStyle/>
-          <a:p>
-            <a:pPr algn="ctr"/>
-          </a:p>
-        </p:txBody>
-      </p:sp>
-      <p:sp>
-        <p:nvSpPr>
-          <p:cNvPr id="29" name="TextBox 28"/>
-          <p:cNvSpPr txBox="1"/>
-          <p:nvPr/>
-        </p:nvSpPr>
-        <p:spPr>
-          <a:xfrm>
-            <a:off x="822960" y="5047488"/>
-            <a:ext cx="2377440" cy="274320"/>
-          </a:xfrm>
-          <a:prstGeom prst="rect">
-            <a:avLst/>
-          </a:prstGeom>
-          <a:noFill/>
-        </p:spPr>
-        <p:txBody>
-          <a:bodyPr wrap="square" anchor="t" lIns="0" rIns="0" tIns="0" bIns="0">
-            <a:spAutoFit/>
-          </a:bodyPr>
-          <a:lstStyle/>
-          <a:p>
-            <a:pPr algn="l">
-              <a:spcAft>
-                <a:spcPts val="0"/>
-              </a:spcAft>
-            </a:pPr>
-            <a:r>
-              <a:rPr sz="1100" b="1">
-                <a:solidFill>
-                  <a:srgbClr val="1A1A1A"/>
-                </a:solidFill>
-                <a:latin typeface="Segoe UI"/>
-              </a:rPr>
-              <a:t>Across machines</a:t>
-            </a:r>
-          </a:p>
-        </p:txBody>
-      </p:sp>
-      <p:sp>
-        <p:nvSpPr>
-          <p:cNvPr id="30" name="TextBox 29"/>
-          <p:cNvSpPr txBox="1"/>
-          <p:nvPr/>
-        </p:nvSpPr>
-        <p:spPr>
-          <a:xfrm>
-            <a:off x="3246120" y="5047488"/>
-            <a:ext cx="3657600" cy="274320"/>
-          </a:xfrm>
-          <a:prstGeom prst="rect">
-            <a:avLst/>
-          </a:prstGeom>
-          <a:noFill/>
-        </p:spPr>
-        <p:txBody>
-          <a:bodyPr wrap="square" anchor="t" lIns="0" rIns="0" tIns="0" bIns="0">
-            <a:spAutoFit/>
-          </a:bodyPr>
-          <a:lstStyle/>
-          <a:p>
-            <a:pPr algn="l">
-              <a:spcAft>
-                <a:spcPts val="0"/>
-              </a:spcAft>
-            </a:pPr>
-            <a:r>
-              <a:rPr sz="1050" b="0">
-                <a:solidFill>
-                  <a:srgbClr val="6B6B6B"/>
-                </a:solidFill>
-                <a:latin typeface="Segoe UI"/>
-              </a:rPr>
-              <a:t>per-machine, or a vendor cloud</a:t>
-            </a:r>
-          </a:p>
-        </p:txBody>
-      </p:sp>
-      <p:sp>
-        <p:nvSpPr>
-          <p:cNvPr id="31" name="TextBox 30"/>
-          <p:cNvSpPr txBox="1"/>
-          <p:nvPr/>
-        </p:nvSpPr>
-        <p:spPr>
-          <a:xfrm>
-            <a:off x="7040880" y="5047488"/>
-            <a:ext cx="4389120" cy="274320"/>
-          </a:xfrm>
-          <a:prstGeom prst="rect">
-            <a:avLst/>
-          </a:prstGeom>
-          <a:noFill/>
-        </p:spPr>
-        <p:txBody>
-          <a:bodyPr wrap="square" anchor="t" lIns="0" rIns="0" tIns="0" bIns="0">
-            <a:spAutoFit/>
-          </a:bodyPr>
-          <a:lstStyle/>
-          <a:p>
-            <a:pPr algn="l">
-              <a:spcAft>
-                <a:spcPts val="0"/>
-              </a:spcAft>
-            </a:pPr>
-            <a:r>
-              <a:rPr sz="1050" b="0">
-                <a:solidFill>
-                  <a:srgbClr val="1A1A1A"/>
-                </a:solidFill>
-                <a:latin typeface="Segoe UI"/>
-              </a:rPr>
-              <a:t>▸ fleet sync: groups, redaction, snapshot + revert</a:t>
-            </a:r>
-          </a:p>
-        </p:txBody>
-      </p:sp>
-      <p:sp>
-        <p:nvSpPr>
-          <p:cNvPr id="32" name="Rectangle 31"/>
-          <p:cNvSpPr/>
-          <p:nvPr/>
-        </p:nvSpPr>
-        <p:spPr>
-          <a:xfrm>
-            <a:off x="685800" y="5449824"/>
-            <a:ext cx="10853928" cy="475488"/>
-          </a:xfrm>
-          <a:prstGeom prst="rect">
-            <a:avLst/>
-          </a:prstGeom>
-          <a:solidFill>
-            <a:srgbClr val="F7F7F7"/>
-          </a:solidFill>
-          <a:ln>
-            <a:noFill/>
-          </a:ln>
-          <a:effectLst/>
-        </p:spPr>
-        <p:style>
-          <a:lnRef idx="1">
-            <a:schemeClr val="accent1"/>
-          </a:lnRef>
-          <a:fillRef idx="3">
-            <a:schemeClr val="accent1"/>
-          </a:fillRef>
-          <a:effectRef idx="2">
-            <a:schemeClr val="accent1"/>
-          </a:effectRef>
-          <a:fontRef idx="minor">
-            <a:schemeClr val="lt1"/>
-          </a:fontRef>
-        </p:style>
-        <p:txBody>
-          <a:bodyPr rtlCol="0" anchor="ctr"/>
-          <a:lstStyle/>
-          <a:p>
-            <a:pPr algn="ctr"/>
-          </a:p>
-        </p:txBody>
-      </p:sp>
-      <p:sp>
-        <p:nvSpPr>
-          <p:cNvPr id="33" name="TextBox 32"/>
-          <p:cNvSpPr txBox="1"/>
-          <p:nvPr/>
-        </p:nvSpPr>
-        <p:spPr>
-          <a:xfrm>
-            <a:off x="822960" y="5577840"/>
-            <a:ext cx="2377440" cy="274320"/>
-          </a:xfrm>
-          <a:prstGeom prst="rect">
-            <a:avLst/>
-          </a:prstGeom>
-          <a:noFill/>
-        </p:spPr>
-        <p:txBody>
-          <a:bodyPr wrap="square" anchor="t" lIns="0" rIns="0" tIns="0" bIns="0">
-            <a:spAutoFit/>
-          </a:bodyPr>
-          <a:lstStyle/>
-          <a:p>
-            <a:pPr algn="l">
-              <a:spcAft>
-                <a:spcPts val="0"/>
-              </a:spcAft>
-            </a:pPr>
-            <a:r>
-              <a:rPr sz="1100" b="1">
-                <a:solidFill>
-                  <a:srgbClr val="1A1A1A"/>
-                </a:solidFill>
-                <a:latin typeface="Segoe UI"/>
-              </a:rPr>
-              <a:t>Telemetry</a:t>
-            </a:r>
-          </a:p>
-        </p:txBody>
-      </p:sp>
-      <p:sp>
-        <p:nvSpPr>
-          <p:cNvPr id="34" name="TextBox 33"/>
-          <p:cNvSpPr txBox="1"/>
-          <p:nvPr/>
-        </p:nvSpPr>
-        <p:spPr>
-          <a:xfrm>
-            <a:off x="3246120" y="5577840"/>
-            <a:ext cx="3657600" cy="274320"/>
-          </a:xfrm>
-          <a:prstGeom prst="rect">
-            <a:avLst/>
-          </a:prstGeom>
-          <a:noFill/>
-        </p:spPr>
-        <p:txBody>
-          <a:bodyPr wrap="square" anchor="t" lIns="0" rIns="0" tIns="0" bIns="0">
-            <a:spAutoFit/>
-          </a:bodyPr>
-          <a:lstStyle/>
-          <a:p>
-            <a:pPr algn="l">
-              <a:spcAft>
-                <a:spcPts val="0"/>
-              </a:spcAft>
-            </a:pPr>
-            <a:r>
-              <a:rPr sz="1050" b="0">
-                <a:solidFill>
-                  <a:srgbClr val="6B6B6B"/>
-                </a:solidFill>
-                <a:latin typeface="Segoe UI"/>
-              </a:rPr>
-              <a:t>usually on by default</a:t>
-            </a:r>
-          </a:p>
-        </p:txBody>
-      </p:sp>
-      <p:sp>
-        <p:nvSpPr>
-          <p:cNvPr id="35" name="TextBox 34"/>
-          <p:cNvSpPr txBox="1"/>
-          <p:nvPr/>
-        </p:nvSpPr>
-        <p:spPr>
-          <a:xfrm>
-            <a:off x="7040880" y="5577840"/>
-            <a:ext cx="4389120" cy="274320"/>
-          </a:xfrm>
-          <a:prstGeom prst="rect">
-            <a:avLst/>
-          </a:prstGeom>
-          <a:noFill/>
-        </p:spPr>
-        <p:txBody>
-          <a:bodyPr wrap="square" anchor="t" lIns="0" rIns="0" tIns="0" bIns="0">
-            <a:spAutoFit/>
-          </a:bodyPr>
-          <a:lstStyle/>
-          <a:p>
-            <a:pPr algn="l">
-              <a:spcAft>
-                <a:spcPts val="0"/>
-              </a:spcAft>
-            </a:pPr>
-            <a:r>
-              <a:rPr sz="1050" b="0">
-                <a:solidFill>
-                  <a:srgbClr val="1A1A1A"/>
-                </a:solidFill>
-                <a:latin typeface="Segoe UI"/>
-              </a:rPr>
-              <a:t>▸ none, and none in the lock</a:t>
-            </a:r>
-          </a:p>
-        </p:txBody>
-      </p:sp>
-      <p:sp>
-        <p:nvSpPr>
-          <p:cNvPr id="36" name="TextBox 35"/>
-          <p:cNvSpPr txBox="1"/>
-          <p:nvPr/>
-        </p:nvSpPr>
-        <p:spPr>
-          <a:xfrm>
-            <a:off x="3246120" y="2011680"/>
-            <a:ext cx="3657600" cy="256032"/>
-          </a:xfrm>
-          <a:prstGeom prst="rect">
-            <a:avLst/>
-          </a:prstGeom>
-          <a:noFill/>
-        </p:spPr>
-        <p:txBody>
-          <a:bodyPr wrap="square" anchor="t" lIns="0" rIns="0" tIns="0" bIns="0">
-            <a:spAutoFit/>
-          </a:bodyPr>
-          <a:lstStyle/>
-          <a:p>
-            <a:pPr algn="l">
-              <a:spcAft>
-                <a:spcPts val="0"/>
-              </a:spcAft>
-            </a:pPr>
-            <a:r>
-              <a:rPr sz="1100" b="1">
-                <a:solidFill>
-                  <a:srgbClr val="6B6B6B"/>
-                </a:solidFill>
-                <a:latin typeface="Segoe UI"/>
-              </a:rPr>
-              <a:t>typical agent tool</a:t>
-            </a:r>
-          </a:p>
-        </p:txBody>
-      </p:sp>
-      <p:sp>
-        <p:nvSpPr>
-          <p:cNvPr id="37" name="TextBox 36"/>
-          <p:cNvSpPr txBox="1"/>
-          <p:nvPr/>
-        </p:nvSpPr>
-        <p:spPr>
-          <a:xfrm>
-            <a:off x="7040880" y="2011680"/>
-            <a:ext cx="4389120" cy="256032"/>
-          </a:xfrm>
-          <a:prstGeom prst="rect">
-            <a:avLst/>
-          </a:prstGeom>
-          <a:noFill/>
-        </p:spPr>
-        <p:txBody>
-          <a:bodyPr wrap="square" anchor="t" lIns="0" rIns="0" tIns="0" bIns="0">
-            <a:spAutoFit/>
-          </a:bodyPr>
-          <a:lstStyle/>
-          <a:p>
-            <a:pPr algn="l">
-              <a:spcAft>
-                <a:spcPts val="0"/>
-              </a:spcAft>
-            </a:pPr>
-            <a:r>
-              <a:rPr sz="1100" b="1">
-                <a:solidFill>
-                  <a:srgbClr val="1F4E79"/>
-                </a:solidFill>
-                <a:latin typeface="Segoe UI"/>
-              </a:rPr>
-              <a:t>AIForgeCrew</a:t>
+          <a:bodyPr rtlCol="0" anchor="ctr" wrap="square" lIns="54864" rIns="54864" tIns="27432" bIns="27432"/>
+          <a:lstStyle/>
+          <a:p>
+            <a:pPr algn="ctr"/>
+            <a:r>
+              <a:rPr sz="1200" b="1">
+                <a:solidFill>
+                  <a:srgbClr val="8A5A00"/>
+                </a:solidFill>
+                <a:latin typeface="Segoe UI"/>
+              </a:rPr>
+              <a:t>The 9 vulnerabilities are decisions, not debt</a:t>
+            </a:r>
+          </a:p>
+          <a:p>
+            <a:pPr algn="ctr"/>
+            <a:r>
+              <a:rPr sz="950" b="0">
+                <a:solidFill>
+                  <a:srgbClr val="1A1A1A"/>
+                </a:solidFill>
+                <a:latin typeface="Segoe UI"/>
+              </a:rPr>
+              <a:t>TLS verification is disabled only per endpoint, opt-in, for self-signed internal hosts (Jira / Confluence / GitLab) — each one individually triaged and documented</a:t>
             </a:r>
           </a:p>
         </p:txBody>
@@ -14895,7 +14636,7 @@
                 </a:solidFill>
                 <a:latin typeface="Segoe UI"/>
               </a:rPr>
-              <a:t>Compared with the usual approach</a:t>
+              <a:t>Where it differs from the other agent tools</a:t>
             </a:r>
           </a:p>
         </p:txBody>
@@ -14934,7 +14675,7 @@
                 </a:solidFill>
                 <a:latin typeface="Segoe UI"/>
               </a:rPr>
-              <a:t>Every operational burden a vector-database stack adds, removed.</a:t>
+              <a:t>It adopts their formats rather than replacing them — then adds the two things none of them do.</a:t>
             </a:r>
           </a:p>
         </p:txBody>
@@ -14991,6 +14732,45 @@
         </p:nvSpPr>
         <p:spPr>
           <a:xfrm>
+            <a:off x="548640" y="6327648"/>
+            <a:ext cx="9692640" cy="320040"/>
+          </a:xfrm>
+          <a:prstGeom prst="rect">
+            <a:avLst/>
+          </a:prstGeom>
+          <a:noFill/>
+        </p:spPr>
+        <p:txBody>
+          <a:bodyPr wrap="square" anchor="t" lIns="0" rIns="0" tIns="0" bIns="0">
+            <a:spAutoFit/>
+          </a:bodyPr>
+          <a:lstStyle/>
+          <a:p>
+            <a:pPr algn="l">
+              <a:spcAft>
+                <a:spcPts val="0"/>
+              </a:spcAft>
+            </a:pPr>
+            <a:r>
+              <a:rPr sz="950" b="0">
+                <a:solidFill>
+                  <a:srgbClr val="6B6B6B"/>
+                </a:solidFill>
+                <a:latin typeface="Segoe UI"/>
+              </a:rPr>
+              <a:t>Named comparisons are the ones the codebase itself cites: the SKILL.md gaps vs Hermes Agent / OpenClaw, and Cursor's glob-scoped rule format.</a:t>
+            </a:r>
+          </a:p>
+        </p:txBody>
+      </p:sp>
+      <p:sp>
+        <p:nvSpPr>
+          <p:cNvPr id="6" name="TextBox 5"/>
+          <p:cNvSpPr txBox="1"/>
+          <p:nvPr/>
+        </p:nvSpPr>
+        <p:spPr>
+          <a:xfrm>
             <a:off x="11018520" y="6327648"/>
             <a:ext cx="640080" cy="274320"/>
           </a:xfrm>
@@ -15024,14 +14804,127 @@
       </p:sp>
       <p:sp>
         <p:nvSpPr>
-          <p:cNvPr id="6" name="TextBox 5"/>
+          <p:cNvPr id="7" name="Rounded Rectangle 6"/>
+          <p:cNvSpPr/>
+          <p:nvPr/>
+        </p:nvSpPr>
+        <p:spPr>
+          <a:xfrm>
+            <a:off x="685800" y="1389888"/>
+            <a:ext cx="10853928" cy="713232"/>
+          </a:xfrm>
+          <a:prstGeom prst="roundRect">
+            <a:avLst>
+              <a:gd name="adj" fmla="val 10000"/>
+            </a:avLst>
+          </a:prstGeom>
+          <a:solidFill>
+            <a:srgbClr val="DCEEE7"/>
+          </a:solidFill>
+          <a:ln w="12700">
+            <a:solidFill>
+              <a:srgbClr val="1E6B52"/>
+            </a:solidFill>
+          </a:ln>
+          <a:effectLst/>
+        </p:spPr>
+        <p:style>
+          <a:lnRef idx="1">
+            <a:schemeClr val="accent1"/>
+          </a:lnRef>
+          <a:fillRef idx="3">
+            <a:schemeClr val="accent1"/>
+          </a:fillRef>
+          <a:effectRef idx="2">
+            <a:schemeClr val="accent1"/>
+          </a:effectRef>
+          <a:fontRef idx="minor">
+            <a:schemeClr val="lt1"/>
+          </a:fontRef>
+        </p:style>
+        <p:txBody>
+          <a:bodyPr rtlCol="0" anchor="ctr" wrap="square" lIns="54864" rIns="54864" tIns="27432" bIns="27432"/>
+          <a:lstStyle/>
+          <a:p>
+            <a:pPr algn="ctr"/>
+            <a:r>
+              <a:rPr sz="1400" b="1">
+                <a:solidFill>
+                  <a:srgbClr val="1E6B52"/>
+                </a:solidFill>
+                <a:latin typeface="Segoe UI"/>
+              </a:rPr>
+              <a:t>Reads what your repo already has</a:t>
+            </a:r>
+          </a:p>
+          <a:p>
+            <a:pPr algn="ctr"/>
+            <a:r>
+              <a:rPr sz="1050" b="0">
+                <a:solidFill>
+                  <a:srgbClr val="1A1A1A"/>
+                </a:solidFill>
+                <a:latin typeface="Segoe UI"/>
+              </a:rPr>
+              <a:t>.cursor/rules/*.mdc  ·  .cursorrules  ·  AGENTS.md  ·  SKILL.md (agentskills.io)  —  no migration, no lock-in</a:t>
+            </a:r>
+          </a:p>
+        </p:txBody>
+      </p:sp>
+      <p:sp>
+        <p:nvSpPr>
+          <p:cNvPr id="8" name="Rectangle 7"/>
+          <p:cNvSpPr/>
+          <p:nvPr/>
+        </p:nvSpPr>
+        <p:spPr>
+          <a:xfrm>
+            <a:off x="685800" y="2267712"/>
+            <a:ext cx="10853928" cy="475488"/>
+          </a:xfrm>
+          <a:prstGeom prst="rect">
+            <a:avLst/>
+          </a:prstGeom>
+          <a:solidFill>
+            <a:srgbClr val="F7F7F7"/>
+          </a:solidFill>
+          <a:ln>
+            <a:noFill/>
+          </a:ln>
+          <a:effectLst/>
+        </p:spPr>
+        <p:style>
+          <a:lnRef idx="1">
+            <a:schemeClr val="accent1"/>
+          </a:lnRef>
+          <a:fillRef idx="3">
+            <a:schemeClr val="accent1"/>
+          </a:fillRef>
+          <a:effectRef idx="2">
+            <a:schemeClr val="accent1"/>
+          </a:effectRef>
+          <a:fontRef idx="minor">
+            <a:schemeClr val="lt1"/>
+          </a:fontRef>
+        </p:style>
+        <p:txBody>
+          <a:bodyPr rtlCol="0" anchor="ctr"/>
+          <a:lstStyle/>
+          <a:p>
+            <a:pPr algn="ctr"/>
+          </a:p>
+        </p:txBody>
+      </p:sp>
+      <p:sp>
+        <p:nvSpPr>
+          <p:cNvPr id="9" name="TextBox 8"/>
           <p:cNvSpPr txBox="1"/>
           <p:nvPr/>
         </p:nvSpPr>
         <p:spPr>
           <a:xfrm>
-            <a:off x="2788920" y="1417320"/>
-            <a:ext cx="4114800" cy="274320"/>
+            <a:off x="822960" y="2395728"/>
+            <a:ext cx="2377440" cy="274320"/>
           </a:xfrm>
           <a:prstGeom prst="rect">
             <a:avLst/>
@@ -15050,27 +14943,27 @@
               </a:spcAft>
             </a:pPr>
             <a:r>
-              <a:rPr sz="1150" b="1">
-                <a:solidFill>
-                  <a:srgbClr val="6B6B6B"/>
-                </a:solidFill>
-                <a:latin typeface="Segoe UI"/>
-              </a:rPr>
-              <a:t>Typical agent stack</a:t>
-            </a:r>
-          </a:p>
-        </p:txBody>
-      </p:sp>
-      <p:sp>
-        <p:nvSpPr>
-          <p:cNvPr id="7" name="TextBox 6"/>
+              <a:rPr sz="1100" b="1">
+                <a:solidFill>
+                  <a:srgbClr val="1A1A1A"/>
+                </a:solidFill>
+                <a:latin typeface="Segoe UI"/>
+              </a:rPr>
+              <a:t>Ticket → PR AND chat</a:t>
+            </a:r>
+          </a:p>
+        </p:txBody>
+      </p:sp>
+      <p:sp>
+        <p:nvSpPr>
+          <p:cNvPr id="10" name="TextBox 9"/>
           <p:cNvSpPr txBox="1"/>
           <p:nvPr/>
         </p:nvSpPr>
         <p:spPr>
           <a:xfrm>
-            <a:off x="7086600" y="1417320"/>
-            <a:ext cx="4453128" cy="274320"/>
+            <a:off x="3246120" y="2395728"/>
+            <a:ext cx="3657600" cy="274320"/>
           </a:xfrm>
           <a:prstGeom prst="rect">
             <a:avLst/>
@@ -15089,27 +14982,227 @@
               </a:spcAft>
             </a:pPr>
             <a:r>
-              <a:rPr sz="1150" b="1">
-                <a:solidFill>
-                  <a:srgbClr val="1F4E79"/>
-                </a:solidFill>
-                <a:latin typeface="Segoe UI"/>
-              </a:rPr>
-              <a:t>AIForgeCrew</a:t>
-            </a:r>
-          </a:p>
-        </p:txBody>
-      </p:sp>
-      <p:sp>
-        <p:nvSpPr>
-          <p:cNvPr id="8" name="Rectangle 7"/>
+              <a:rPr sz="1050" b="0">
+                <a:solidFill>
+                  <a:srgbClr val="6B6B6B"/>
+                </a:solidFill>
+                <a:latin typeface="Segoe UI"/>
+              </a:rPr>
+              <a:t>usually one or the other</a:t>
+            </a:r>
+          </a:p>
+        </p:txBody>
+      </p:sp>
+      <p:sp>
+        <p:nvSpPr>
+          <p:cNvPr id="11" name="TextBox 10"/>
+          <p:cNvSpPr txBox="1"/>
+          <p:nvPr/>
+        </p:nvSpPr>
+        <p:spPr>
+          <a:xfrm>
+            <a:off x="7040880" y="2395728"/>
+            <a:ext cx="4389120" cy="274320"/>
+          </a:xfrm>
+          <a:prstGeom prst="rect">
+            <a:avLst/>
+          </a:prstGeom>
+          <a:noFill/>
+        </p:spPr>
+        <p:txBody>
+          <a:bodyPr wrap="square" anchor="t" lIns="0" rIns="0" tIns="0" bIns="0">
+            <a:spAutoFit/>
+          </a:bodyPr>
+          <a:lstStyle/>
+          <a:p>
+            <a:pPr algn="l">
+              <a:spcAft>
+                <a:spcPts val="0"/>
+              </a:spcAft>
+            </a:pPr>
+            <a:r>
+              <a:rPr sz="1050" b="0">
+                <a:solidFill>
+                  <a:srgbClr val="1A1A1A"/>
+                </a:solidFill>
+                <a:latin typeface="Segoe UI"/>
+              </a:rPr>
+              <a:t>▸ one service does both, on the same tool registry</a:t>
+            </a:r>
+          </a:p>
+        </p:txBody>
+      </p:sp>
+      <p:sp>
+        <p:nvSpPr>
+          <p:cNvPr id="12" name="Rectangle 11"/>
           <p:cNvSpPr/>
           <p:nvPr/>
         </p:nvSpPr>
         <p:spPr>
           <a:xfrm>
-            <a:off x="685800" y="1783080"/>
-            <a:ext cx="10853928" cy="548640"/>
+            <a:off x="685800" y="2798064"/>
+            <a:ext cx="10853928" cy="475488"/>
+          </a:xfrm>
+          <a:prstGeom prst="rect">
+            <a:avLst/>
+          </a:prstGeom>
+          <a:solidFill>
+            <a:srgbClr val="FFFFFF"/>
+          </a:solidFill>
+          <a:ln>
+            <a:noFill/>
+          </a:ln>
+          <a:effectLst/>
+        </p:spPr>
+        <p:style>
+          <a:lnRef idx="1">
+            <a:schemeClr val="accent1"/>
+          </a:lnRef>
+          <a:fillRef idx="3">
+            <a:schemeClr val="accent1"/>
+          </a:fillRef>
+          <a:effectRef idx="2">
+            <a:schemeClr val="accent1"/>
+          </a:effectRef>
+          <a:fontRef idx="minor">
+            <a:schemeClr val="lt1"/>
+          </a:fontRef>
+        </p:style>
+        <p:txBody>
+          <a:bodyPr rtlCol="0" anchor="ctr"/>
+          <a:lstStyle/>
+          <a:p>
+            <a:pPr algn="ctr"/>
+          </a:p>
+        </p:txBody>
+      </p:sp>
+      <p:sp>
+        <p:nvSpPr>
+          <p:cNvPr id="13" name="TextBox 12"/>
+          <p:cNvSpPr txBox="1"/>
+          <p:nvPr/>
+        </p:nvSpPr>
+        <p:spPr>
+          <a:xfrm>
+            <a:off x="822960" y="2926080"/>
+            <a:ext cx="2377440" cy="274320"/>
+          </a:xfrm>
+          <a:prstGeom prst="rect">
+            <a:avLst/>
+          </a:prstGeom>
+          <a:noFill/>
+        </p:spPr>
+        <p:txBody>
+          <a:bodyPr wrap="square" anchor="t" lIns="0" rIns="0" tIns="0" bIns="0">
+            <a:spAutoFit/>
+          </a:bodyPr>
+          <a:lstStyle/>
+          <a:p>
+            <a:pPr algn="l">
+              <a:spcAft>
+                <a:spcPts val="0"/>
+              </a:spcAft>
+            </a:pPr>
+            <a:r>
+              <a:rPr sz="1100" b="1">
+                <a:solidFill>
+                  <a:srgbClr val="1A1A1A"/>
+                </a:solidFill>
+                <a:latin typeface="Segoe UI"/>
+              </a:rPr>
+              <a:t>Model requirement</a:t>
+            </a:r>
+          </a:p>
+        </p:txBody>
+      </p:sp>
+      <p:sp>
+        <p:nvSpPr>
+          <p:cNvPr id="14" name="TextBox 13"/>
+          <p:cNvSpPr txBox="1"/>
+          <p:nvPr/>
+        </p:nvSpPr>
+        <p:spPr>
+          <a:xfrm>
+            <a:off x="3246120" y="2926080"/>
+            <a:ext cx="3657600" cy="274320"/>
+          </a:xfrm>
+          <a:prstGeom prst="rect">
+            <a:avLst/>
+          </a:prstGeom>
+          <a:noFill/>
+        </p:spPr>
+        <p:txBody>
+          <a:bodyPr wrap="square" anchor="t" lIns="0" rIns="0" tIns="0" bIns="0">
+            <a:spAutoFit/>
+          </a:bodyPr>
+          <a:lstStyle/>
+          <a:p>
+            <a:pPr algn="l">
+              <a:spcAft>
+                <a:spcPts val="0"/>
+              </a:spcAft>
+            </a:pPr>
+            <a:r>
+              <a:rPr sz="1050" b="0">
+                <a:solidFill>
+                  <a:srgbClr val="6B6B6B"/>
+                </a:solidFill>
+                <a:latin typeface="Segoe UI"/>
+              </a:rPr>
+              <a:t>vendor function-calling</a:t>
+            </a:r>
+          </a:p>
+        </p:txBody>
+      </p:sp>
+      <p:sp>
+        <p:nvSpPr>
+          <p:cNvPr id="15" name="TextBox 14"/>
+          <p:cNvSpPr txBox="1"/>
+          <p:nvPr/>
+        </p:nvSpPr>
+        <p:spPr>
+          <a:xfrm>
+            <a:off x="7040880" y="2926080"/>
+            <a:ext cx="4389120" cy="274320"/>
+          </a:xfrm>
+          <a:prstGeom prst="rect">
+            <a:avLst/>
+          </a:prstGeom>
+          <a:noFill/>
+        </p:spPr>
+        <p:txBody>
+          <a:bodyPr wrap="square" anchor="t" lIns="0" rIns="0" tIns="0" bIns="0">
+            <a:spAutoFit/>
+          </a:bodyPr>
+          <a:lstStyle/>
+          <a:p>
+            <a:pPr algn="l">
+              <a:spcAft>
+                <a:spcPts val="0"/>
+              </a:spcAft>
+            </a:pPr>
+            <a:r>
+              <a:rPr sz="1050" b="0">
+                <a:solidFill>
+                  <a:srgbClr val="1A1A1A"/>
+                </a:solidFill>
+                <a:latin typeface="Segoe UI"/>
+              </a:rPr>
+              <a:t>▸ plain-text ReAct — a 4-bit local model drives it</a:t>
+            </a:r>
+          </a:p>
+        </p:txBody>
+      </p:sp>
+      <p:sp>
+        <p:nvSpPr>
+          <p:cNvPr id="16" name="Rectangle 15"/>
+          <p:cNvSpPr/>
+          <p:nvPr/>
+        </p:nvSpPr>
+        <p:spPr>
+          <a:xfrm>
+            <a:off x="685800" y="3328416"/>
+            <a:ext cx="10853928" cy="475488"/>
           </a:xfrm>
           <a:prstGeom prst="rect">
             <a:avLst/>
@@ -15146,14 +15239,14 @@
       </p:sp>
       <p:sp>
         <p:nvSpPr>
-          <p:cNvPr id="9" name="TextBox 8"/>
+          <p:cNvPr id="17" name="TextBox 16"/>
           <p:cNvSpPr txBox="1"/>
           <p:nvPr/>
         </p:nvSpPr>
         <p:spPr>
           <a:xfrm>
-            <a:off x="822960" y="1938528"/>
-            <a:ext cx="1920240" cy="274320"/>
+            <a:off x="822960" y="3456432"/>
+            <a:ext cx="2377440" cy="274320"/>
           </a:xfrm>
           <a:prstGeom prst="rect">
             <a:avLst/>
@@ -15178,21 +15271,21 @@
                 </a:solidFill>
                 <a:latin typeface="Segoe UI"/>
               </a:rPr>
-              <a:t>Storage</a:t>
-            </a:r>
-          </a:p>
-        </p:txBody>
-      </p:sp>
-      <p:sp>
-        <p:nvSpPr>
-          <p:cNvPr id="10" name="TextBox 9"/>
+              <a:t>Memory store</a:t>
+            </a:r>
+          </a:p>
+        </p:txBody>
+      </p:sp>
+      <p:sp>
+        <p:nvSpPr>
+          <p:cNvPr id="18" name="TextBox 17"/>
           <p:cNvSpPr txBox="1"/>
           <p:nvPr/>
         </p:nvSpPr>
         <p:spPr>
           <a:xfrm>
-            <a:off x="2788920" y="1938528"/>
-            <a:ext cx="4114800" cy="274320"/>
+            <a:off x="3246120" y="3456432"/>
+            <a:ext cx="3657600" cy="274320"/>
           </a:xfrm>
           <a:prstGeom prst="rect">
             <a:avLst/>
@@ -15217,21 +15310,21 @@
                 </a:solidFill>
                 <a:latin typeface="Segoe UI"/>
               </a:rPr>
-              <a:t>vector DB service to install, tune, back up</a:t>
-            </a:r>
-          </a:p>
-        </p:txBody>
-      </p:sp>
-      <p:sp>
-        <p:nvSpPr>
-          <p:cNvPr id="11" name="TextBox 10"/>
+              <a:t>a vector DB to install, tune, back up</a:t>
+            </a:r>
+          </a:p>
+        </p:txBody>
+      </p:sp>
+      <p:sp>
+        <p:nvSpPr>
+          <p:cNvPr id="19" name="TextBox 18"/>
           <p:cNvSpPr txBox="1"/>
           <p:nvPr/>
         </p:nvSpPr>
         <p:spPr>
           <a:xfrm>
-            <a:off x="7086600" y="1938528"/>
-            <a:ext cx="4297680" cy="274320"/>
+            <a:off x="7040880" y="3456432"/>
+            <a:ext cx="4389120" cy="274320"/>
           </a:xfrm>
           <a:prstGeom prst="rect">
             <a:avLst/>
@@ -15256,21 +15349,21 @@
                 </a:solidFill>
                 <a:latin typeface="Segoe UI"/>
               </a:rPr>
-              <a:t>markdown files + one SQLite under ~/.aiforge/</a:t>
-            </a:r>
-          </a:p>
-        </p:txBody>
-      </p:sp>
-      <p:sp>
-        <p:nvSpPr>
-          <p:cNvPr id="12" name="Rectangle 11"/>
+              <a:t>▸ markdown + one SQLite file; grep it, delete it</a:t>
+            </a:r>
+          </a:p>
+        </p:txBody>
+      </p:sp>
+      <p:sp>
+        <p:nvSpPr>
+          <p:cNvPr id="20" name="Rectangle 19"/>
           <p:cNvSpPr/>
           <p:nvPr/>
         </p:nvSpPr>
         <p:spPr>
           <a:xfrm>
-            <a:off x="685800" y="2386584"/>
-            <a:ext cx="10853928" cy="548640"/>
+            <a:off x="685800" y="3858768"/>
+            <a:ext cx="10853928" cy="475488"/>
           </a:xfrm>
           <a:prstGeom prst="rect">
             <a:avLst/>
@@ -15307,14 +15400,14 @@
       </p:sp>
       <p:sp>
         <p:nvSpPr>
-          <p:cNvPr id="13" name="TextBox 12"/>
+          <p:cNvPr id="21" name="TextBox 20"/>
           <p:cNvSpPr txBox="1"/>
           <p:nvPr/>
         </p:nvSpPr>
         <p:spPr>
           <a:xfrm>
-            <a:off x="822960" y="2542032"/>
-            <a:ext cx="1920240" cy="274320"/>
+            <a:off x="822960" y="3986784"/>
+            <a:ext cx="2377440" cy="274320"/>
           </a:xfrm>
           <a:prstGeom prst="rect">
             <a:avLst/>
@@ -15339,21 +15432,21 @@
                 </a:solidFill>
                 <a:latin typeface="Segoe UI"/>
               </a:rPr>
-              <a:t>Inspect</a:t>
-            </a:r>
-          </a:p>
-        </p:txBody>
-      </p:sp>
-      <p:sp>
-        <p:nvSpPr>
-          <p:cNvPr id="14" name="TextBox 13"/>
+              <a:t>Skill discovery</a:t>
+            </a:r>
+          </a:p>
+        </p:txBody>
+      </p:sp>
+      <p:sp>
+        <p:nvSpPr>
+          <p:cNvPr id="22" name="TextBox 21"/>
           <p:cNvSpPr txBox="1"/>
           <p:nvPr/>
         </p:nvSpPr>
         <p:spPr>
           <a:xfrm>
-            <a:off x="2788920" y="2542032"/>
-            <a:ext cx="4114800" cy="274320"/>
+            <a:off x="3246120" y="3986784"/>
+            <a:ext cx="3657600" cy="274320"/>
           </a:xfrm>
           <a:prstGeom prst="rect">
             <a:avLst/>
@@ -15378,21 +15471,21 @@
                 </a:solidFill>
                 <a:latin typeface="Segoe UI"/>
               </a:rPr>
-              <a:t>query the DB, decode embeddings</a:t>
-            </a:r>
-          </a:p>
-        </p:txBody>
-      </p:sp>
-      <p:sp>
-        <p:nvSpPr>
-          <p:cNvPr id="15" name="TextBox 14"/>
+              <a:t>trigger substring match</a:t>
+            </a:r>
+          </a:p>
+        </p:txBody>
+      </p:sp>
+      <p:sp>
+        <p:nvSpPr>
+          <p:cNvPr id="23" name="TextBox 22"/>
           <p:cNvSpPr txBox="1"/>
           <p:nvPr/>
         </p:nvSpPr>
         <p:spPr>
           <a:xfrm>
-            <a:off x="7086600" y="2542032"/>
-            <a:ext cx="4297680" cy="274320"/>
+            <a:off x="7040880" y="3986784"/>
+            <a:ext cx="4389120" cy="274320"/>
           </a:xfrm>
           <a:prstGeom prst="rect">
             <a:avLst/>
@@ -15417,21 +15510,21 @@
                 </a:solidFill>
                 <a:latin typeface="Segoe UI"/>
               </a:rPr>
-              <a:t>cat · grep · an editor</a:t>
-            </a:r>
-          </a:p>
-        </p:txBody>
-      </p:sp>
-      <p:sp>
-        <p:nvSpPr>
-          <p:cNvPr id="16" name="Rectangle 15"/>
+              <a:t>▸ searched by RELEVANCE, so the right one is found</a:t>
+            </a:r>
+          </a:p>
+        </p:txBody>
+      </p:sp>
+      <p:sp>
+        <p:nvSpPr>
+          <p:cNvPr id="24" name="Rectangle 23"/>
           <p:cNvSpPr/>
           <p:nvPr/>
         </p:nvSpPr>
         <p:spPr>
           <a:xfrm>
-            <a:off x="685800" y="2990088"/>
-            <a:ext cx="10853928" cy="548640"/>
+            <a:off x="685800" y="4389120"/>
+            <a:ext cx="10853928" cy="475488"/>
           </a:xfrm>
           <a:prstGeom prst="rect">
             <a:avLst/>
@@ -15468,14 +15561,14 @@
       </p:sp>
       <p:sp>
         <p:nvSpPr>
-          <p:cNvPr id="17" name="TextBox 16"/>
+          <p:cNvPr id="25" name="TextBox 24"/>
           <p:cNvSpPr txBox="1"/>
           <p:nvPr/>
         </p:nvSpPr>
         <p:spPr>
           <a:xfrm>
-            <a:off x="822960" y="3145536"/>
-            <a:ext cx="1920240" cy="274320"/>
+            <a:off x="822960" y="4517136"/>
+            <a:ext cx="2377440" cy="274320"/>
           </a:xfrm>
           <a:prstGeom prst="rect">
             <a:avLst/>
@@ -15500,21 +15593,21 @@
                 </a:solidFill>
                 <a:latin typeface="Segoe UI"/>
               </a:rPr>
-              <a:t>Version</a:t>
-            </a:r>
-          </a:p>
-        </p:txBody>
-      </p:sp>
-      <p:sp>
-        <p:nvSpPr>
-          <p:cNvPr id="18" name="TextBox 17"/>
+              <a:t>Gets better how</a:t>
+            </a:r>
+          </a:p>
+        </p:txBody>
+      </p:sp>
+      <p:sp>
+        <p:nvSpPr>
+          <p:cNvPr id="26" name="TextBox 25"/>
           <p:cNvSpPr txBox="1"/>
           <p:nvPr/>
         </p:nvSpPr>
         <p:spPr>
           <a:xfrm>
-            <a:off x="2788920" y="3145536"/>
-            <a:ext cx="4114800" cy="274320"/>
+            <a:off x="3246120" y="4517136"/>
+            <a:ext cx="3657600" cy="274320"/>
           </a:xfrm>
           <a:prstGeom prst="rect">
             <a:avLst/>
@@ -15539,21 +15632,21 @@
                 </a:solidFill>
                 <a:latin typeface="Segoe UI"/>
               </a:rPr>
-              <a:t>opaque rows</a:t>
-            </a:r>
-          </a:p>
-        </p:txBody>
-      </p:sp>
-      <p:sp>
-        <p:nvSpPr>
-          <p:cNvPr id="19" name="TextBox 18"/>
+              <a:t>you write the prompts</a:t>
+            </a:r>
+          </a:p>
+        </p:txBody>
+      </p:sp>
+      <p:sp>
+        <p:nvSpPr>
+          <p:cNvPr id="27" name="TextBox 26"/>
           <p:cNvSpPr txBox="1"/>
           <p:nvPr/>
         </p:nvSpPr>
         <p:spPr>
           <a:xfrm>
-            <a:off x="7086600" y="3145536"/>
-            <a:ext cx="4297680" cy="274320"/>
+            <a:off x="7040880" y="4517136"/>
+            <a:ext cx="4389120" cy="274320"/>
           </a:xfrm>
           <a:prstGeom prst="rect">
             <a:avLst/>
@@ -15578,21 +15671,21 @@
                 </a:solidFill>
                 <a:latin typeface="Segoe UI"/>
               </a:rPr>
-              <a:t>git-diffable; hardlink snapshots + revert endpoint</a:t>
-            </a:r>
-          </a:p>
-        </p:txBody>
-      </p:sp>
-      <p:sp>
-        <p:nvSpPr>
-          <p:cNvPr id="20" name="Rectangle 19"/>
+              <a:t>▸ write_skill() / write_workflow() — it authors its own</a:t>
+            </a:r>
+          </a:p>
+        </p:txBody>
+      </p:sp>
+      <p:sp>
+        <p:nvSpPr>
+          <p:cNvPr id="28" name="Rectangle 27"/>
           <p:cNvSpPr/>
           <p:nvPr/>
         </p:nvSpPr>
         <p:spPr>
           <a:xfrm>
-            <a:off x="685800" y="3593592"/>
-            <a:ext cx="10853928" cy="548640"/>
+            <a:off x="685800" y="4919472"/>
+            <a:ext cx="10853928" cy="475488"/>
           </a:xfrm>
           <a:prstGeom prst="rect">
             <a:avLst/>
@@ -15629,14 +15722,14 @@
       </p:sp>
       <p:sp>
         <p:nvSpPr>
-          <p:cNvPr id="21" name="TextBox 20"/>
+          <p:cNvPr id="29" name="TextBox 28"/>
           <p:cNvSpPr txBox="1"/>
           <p:nvPr/>
         </p:nvSpPr>
         <p:spPr>
           <a:xfrm>
-            <a:off x="822960" y="3749040"/>
-            <a:ext cx="1920240" cy="274320"/>
+            <a:off x="822960" y="5047488"/>
+            <a:ext cx="2377440" cy="274320"/>
           </a:xfrm>
           <a:prstGeom prst="rect">
             <a:avLst/>
@@ -15661,21 +15754,21 @@
                 </a:solidFill>
                 <a:latin typeface="Segoe UI"/>
               </a:rPr>
-              <a:t>Move a machine</a:t>
-            </a:r>
-          </a:p>
-        </p:txBody>
-      </p:sp>
-      <p:sp>
-        <p:nvSpPr>
-          <p:cNvPr id="22" name="TextBox 21"/>
+              <a:t>Across machines</a:t>
+            </a:r>
+          </a:p>
+        </p:txBody>
+      </p:sp>
+      <p:sp>
+        <p:nvSpPr>
+          <p:cNvPr id="30" name="TextBox 29"/>
           <p:cNvSpPr txBox="1"/>
           <p:nvPr/>
         </p:nvSpPr>
         <p:spPr>
           <a:xfrm>
-            <a:off x="2788920" y="3749040"/>
-            <a:ext cx="4114800" cy="274320"/>
+            <a:off x="3246120" y="5047488"/>
+            <a:ext cx="3657600" cy="274320"/>
           </a:xfrm>
           <a:prstGeom prst="rect">
             <a:avLst/>
@@ -15700,21 +15793,21 @@
                 </a:solidFill>
                 <a:latin typeface="Segoe UI"/>
               </a:rPr>
-              <a:t>dump and restore</a:t>
-            </a:r>
-          </a:p>
-        </p:txBody>
-      </p:sp>
-      <p:sp>
-        <p:nvSpPr>
-          <p:cNvPr id="23" name="TextBox 22"/>
+              <a:t>per-machine, or a vendor cloud</a:t>
+            </a:r>
+          </a:p>
+        </p:txBody>
+      </p:sp>
+      <p:sp>
+        <p:nvSpPr>
+          <p:cNvPr id="31" name="TextBox 30"/>
           <p:cNvSpPr txBox="1"/>
           <p:nvPr/>
         </p:nvSpPr>
         <p:spPr>
           <a:xfrm>
-            <a:off x="7086600" y="3749040"/>
-            <a:ext cx="4297680" cy="274320"/>
+            <a:off x="7040880" y="5047488"/>
+            <a:ext cx="4389120" cy="274320"/>
           </a:xfrm>
           <a:prstGeom prst="rect">
             <a:avLst/>
@@ -15739,21 +15832,21 @@
                 </a:solidFill>
                 <a:latin typeface="Segoe UI"/>
               </a:rPr>
-              <a:t>copy a folder</a:t>
-            </a:r>
-          </a:p>
-        </p:txBody>
-      </p:sp>
-      <p:sp>
-        <p:nvSpPr>
-          <p:cNvPr id="24" name="Rectangle 23"/>
+              <a:t>▸ fleet sync: groups, redaction, snapshot + revert</a:t>
+            </a:r>
+          </a:p>
+        </p:txBody>
+      </p:sp>
+      <p:sp>
+        <p:nvSpPr>
+          <p:cNvPr id="32" name="Rectangle 31"/>
           <p:cNvSpPr/>
           <p:nvPr/>
         </p:nvSpPr>
         <p:spPr>
           <a:xfrm>
-            <a:off x="685800" y="4197096"/>
-            <a:ext cx="10853928" cy="548640"/>
+            <a:off x="685800" y="5449824"/>
+            <a:ext cx="10853928" cy="475488"/>
           </a:xfrm>
           <a:prstGeom prst="rect">
             <a:avLst/>
@@ -15790,14 +15883,14 @@
       </p:sp>
       <p:sp>
         <p:nvSpPr>
-          <p:cNvPr id="25" name="TextBox 24"/>
+          <p:cNvPr id="33" name="TextBox 32"/>
           <p:cNvSpPr txBox="1"/>
           <p:nvPr/>
         </p:nvSpPr>
         <p:spPr>
           <a:xfrm>
-            <a:off x="822960" y="4352544"/>
-            <a:ext cx="1920240" cy="274320"/>
+            <a:off x="822960" y="5577840"/>
+            <a:ext cx="2377440" cy="274320"/>
           </a:xfrm>
           <a:prstGeom prst="rect">
             <a:avLst/>
@@ -15822,21 +15915,21 @@
                 </a:solidFill>
                 <a:latin typeface="Segoe UI"/>
               </a:rPr>
-              <a:t>Delete</a:t>
-            </a:r>
-          </a:p>
-        </p:txBody>
-      </p:sp>
-      <p:sp>
-        <p:nvSpPr>
-          <p:cNvPr id="26" name="TextBox 25"/>
+              <a:t>Telemetry</a:t>
+            </a:r>
+          </a:p>
+        </p:txBody>
+      </p:sp>
+      <p:sp>
+        <p:nvSpPr>
+          <p:cNvPr id="34" name="TextBox 33"/>
           <p:cNvSpPr txBox="1"/>
           <p:nvPr/>
         </p:nvSpPr>
         <p:spPr>
           <a:xfrm>
-            <a:off x="2788920" y="4352544"/>
-            <a:ext cx="4114800" cy="274320"/>
+            <a:off x="3246120" y="5577840"/>
+            <a:ext cx="3657600" cy="274320"/>
           </a:xfrm>
           <a:prstGeom prst="rect">
             <a:avLst/>
@@ -15861,21 +15954,21 @@
                 </a:solidFill>
                 <a:latin typeface="Segoe UI"/>
               </a:rPr>
-              <a:t>hope the rows are gone</a:t>
-            </a:r>
-          </a:p>
-        </p:txBody>
-      </p:sp>
-      <p:sp>
-        <p:nvSpPr>
-          <p:cNvPr id="27" name="TextBox 26"/>
+              <a:t>usually on by default</a:t>
+            </a:r>
+          </a:p>
+        </p:txBody>
+      </p:sp>
+      <p:sp>
+        <p:nvSpPr>
+          <p:cNvPr id="35" name="TextBox 34"/>
           <p:cNvSpPr txBox="1"/>
           <p:nvPr/>
         </p:nvSpPr>
         <p:spPr>
           <a:xfrm>
-            <a:off x="7086600" y="4352544"/>
-            <a:ext cx="4297680" cy="274320"/>
+            <a:off x="7040880" y="5577840"/>
+            <a:ext cx="4389120" cy="274320"/>
           </a:xfrm>
           <a:prstGeom prst="rect">
             <a:avLst/>
@@ -15900,65 +15993,21 @@
                 </a:solidFill>
                 <a:latin typeface="Segoe UI"/>
               </a:rPr>
-              <a:t>delete the folder — there is no second copy</a:t>
-            </a:r>
-          </a:p>
-        </p:txBody>
-      </p:sp>
-      <p:sp>
-        <p:nvSpPr>
-          <p:cNvPr id="28" name="Rectangle 27"/>
-          <p:cNvSpPr/>
-          <p:nvPr/>
-        </p:nvSpPr>
-        <p:spPr>
-          <a:xfrm>
-            <a:off x="685800" y="4800600"/>
-            <a:ext cx="10853928" cy="548640"/>
-          </a:xfrm>
-          <a:prstGeom prst="rect">
-            <a:avLst/>
-          </a:prstGeom>
-          <a:solidFill>
-            <a:srgbClr val="FFFFFF"/>
-          </a:solidFill>
-          <a:ln>
-            <a:noFill/>
-          </a:ln>
-          <a:effectLst/>
-        </p:spPr>
-        <p:style>
-          <a:lnRef idx="1">
-            <a:schemeClr val="accent1"/>
-          </a:lnRef>
-          <a:fillRef idx="3">
-            <a:schemeClr val="accent1"/>
-          </a:fillRef>
-          <a:effectRef idx="2">
-            <a:schemeClr val="accent1"/>
-          </a:effectRef>
-          <a:fontRef idx="minor">
-            <a:schemeClr val="lt1"/>
-          </a:fontRef>
-        </p:style>
-        <p:txBody>
-          <a:bodyPr rtlCol="0" anchor="ctr"/>
-          <a:lstStyle/>
-          <a:p>
-            <a:pPr algn="ctr"/>
-          </a:p>
-        </p:txBody>
-      </p:sp>
-      <p:sp>
-        <p:nvSpPr>
-          <p:cNvPr id="29" name="TextBox 28"/>
+              <a:t>▸ none, and none in the lock</a:t>
+            </a:r>
+          </a:p>
+        </p:txBody>
+      </p:sp>
+      <p:sp>
+        <p:nvSpPr>
+          <p:cNvPr id="36" name="TextBox 35"/>
           <p:cNvSpPr txBox="1"/>
           <p:nvPr/>
         </p:nvSpPr>
         <p:spPr>
           <a:xfrm>
-            <a:off x="822960" y="4956048"/>
-            <a:ext cx="1920240" cy="274320"/>
+            <a:off x="3246120" y="2011680"/>
+            <a:ext cx="3657600" cy="256032"/>
           </a:xfrm>
           <a:prstGeom prst="rect">
             <a:avLst/>
@@ -15979,25 +16028,25 @@
             <a:r>
               <a:rPr sz="1100" b="1">
                 <a:solidFill>
-                  <a:srgbClr val="1A1A1A"/>
-                </a:solidFill>
-                <a:latin typeface="Segoe UI"/>
-              </a:rPr>
-              <a:t>Model</a:t>
-            </a:r>
-          </a:p>
-        </p:txBody>
-      </p:sp>
-      <p:sp>
-        <p:nvSpPr>
-          <p:cNvPr id="30" name="TextBox 29"/>
+                  <a:srgbClr val="6B6B6B"/>
+                </a:solidFill>
+                <a:latin typeface="Segoe UI"/>
+              </a:rPr>
+              <a:t>typical agent tool</a:t>
+            </a:r>
+          </a:p>
+        </p:txBody>
+      </p:sp>
+      <p:sp>
+        <p:nvSpPr>
+          <p:cNvPr id="37" name="TextBox 36"/>
           <p:cNvSpPr txBox="1"/>
           <p:nvPr/>
         </p:nvSpPr>
         <p:spPr>
           <a:xfrm>
-            <a:off x="2788920" y="4956048"/>
-            <a:ext cx="4114800" cy="274320"/>
+            <a:off x="7040880" y="2011680"/>
+            <a:ext cx="4389120" cy="256032"/>
           </a:xfrm>
           <a:prstGeom prst="rect">
             <a:avLst/>
@@ -16016,213 +16065,13 @@
               </a:spcAft>
             </a:pPr>
             <a:r>
-              <a:rPr sz="1050" b="0">
-                <a:solidFill>
-                  <a:srgbClr val="6B6B6B"/>
-                </a:solidFill>
-                <a:latin typeface="Segoe UI"/>
-              </a:rPr>
-              <a:t>vendor function-calling required</a:t>
-            </a:r>
-          </a:p>
-        </p:txBody>
-      </p:sp>
-      <p:sp>
-        <p:nvSpPr>
-          <p:cNvPr id="31" name="TextBox 30"/>
-          <p:cNvSpPr txBox="1"/>
-          <p:nvPr/>
-        </p:nvSpPr>
-        <p:spPr>
-          <a:xfrm>
-            <a:off x="7086600" y="4956048"/>
-            <a:ext cx="4297680" cy="274320"/>
-          </a:xfrm>
-          <a:prstGeom prst="rect">
-            <a:avLst/>
-          </a:prstGeom>
-          <a:noFill/>
-        </p:spPr>
-        <p:txBody>
-          <a:bodyPr wrap="square" anchor="t" lIns="0" rIns="0" tIns="0" bIns="0">
-            <a:spAutoFit/>
-          </a:bodyPr>
-          <a:lstStyle/>
-          <a:p>
-            <a:pPr algn="l">
-              <a:spcAft>
-                <a:spcPts val="0"/>
-              </a:spcAft>
-            </a:pPr>
-            <a:r>
-              <a:rPr sz="1050" b="0">
-                <a:solidFill>
-                  <a:srgbClr val="1A1A1A"/>
-                </a:solidFill>
-                <a:latin typeface="Segoe UI"/>
-              </a:rPr>
-              <a:t>plain-text ReAct — any model drives it</a:t>
-            </a:r>
-          </a:p>
-        </p:txBody>
-      </p:sp>
-      <p:sp>
-        <p:nvSpPr>
-          <p:cNvPr id="32" name="Rectangle 31"/>
-          <p:cNvSpPr/>
-          <p:nvPr/>
-        </p:nvSpPr>
-        <p:spPr>
-          <a:xfrm>
-            <a:off x="685800" y="5404104"/>
-            <a:ext cx="10853928" cy="548640"/>
-          </a:xfrm>
-          <a:prstGeom prst="rect">
-            <a:avLst/>
-          </a:prstGeom>
-          <a:solidFill>
-            <a:srgbClr val="F7F7F7"/>
-          </a:solidFill>
-          <a:ln>
-            <a:noFill/>
-          </a:ln>
-          <a:effectLst/>
-        </p:spPr>
-        <p:style>
-          <a:lnRef idx="1">
-            <a:schemeClr val="accent1"/>
-          </a:lnRef>
-          <a:fillRef idx="3">
-            <a:schemeClr val="accent1"/>
-          </a:fillRef>
-          <a:effectRef idx="2">
-            <a:schemeClr val="accent1"/>
-          </a:effectRef>
-          <a:fontRef idx="minor">
-            <a:schemeClr val="lt1"/>
-          </a:fontRef>
-        </p:style>
-        <p:txBody>
-          <a:bodyPr rtlCol="0" anchor="ctr"/>
-          <a:lstStyle/>
-          <a:p>
-            <a:pPr algn="ctr"/>
-          </a:p>
-        </p:txBody>
-      </p:sp>
-      <p:sp>
-        <p:nvSpPr>
-          <p:cNvPr id="33" name="TextBox 32"/>
-          <p:cNvSpPr txBox="1"/>
-          <p:nvPr/>
-        </p:nvSpPr>
-        <p:spPr>
-          <a:xfrm>
-            <a:off x="822960" y="5559552"/>
-            <a:ext cx="1920240" cy="274320"/>
-          </a:xfrm>
-          <a:prstGeom prst="rect">
-            <a:avLst/>
-          </a:prstGeom>
-          <a:noFill/>
-        </p:spPr>
-        <p:txBody>
-          <a:bodyPr wrap="square" anchor="t" lIns="0" rIns="0" tIns="0" bIns="0">
-            <a:spAutoFit/>
-          </a:bodyPr>
-          <a:lstStyle/>
-          <a:p>
-            <a:pPr algn="l">
-              <a:spcAft>
-                <a:spcPts val="0"/>
-              </a:spcAft>
-            </a:pPr>
-            <a:r>
               <a:rPr sz="1100" b="1">
                 <a:solidFill>
-                  <a:srgbClr val="1A1A1A"/>
-                </a:solidFill>
-                <a:latin typeface="Segoe UI"/>
-              </a:rPr>
-              <a:t>Telemetry</a:t>
-            </a:r>
-          </a:p>
-        </p:txBody>
-      </p:sp>
-      <p:sp>
-        <p:nvSpPr>
-          <p:cNvPr id="34" name="TextBox 33"/>
-          <p:cNvSpPr txBox="1"/>
-          <p:nvPr/>
-        </p:nvSpPr>
-        <p:spPr>
-          <a:xfrm>
-            <a:off x="2788920" y="5559552"/>
-            <a:ext cx="4114800" cy="274320"/>
-          </a:xfrm>
-          <a:prstGeom prst="rect">
-            <a:avLst/>
-          </a:prstGeom>
-          <a:noFill/>
-        </p:spPr>
-        <p:txBody>
-          <a:bodyPr wrap="square" anchor="t" lIns="0" rIns="0" tIns="0" bIns="0">
-            <a:spAutoFit/>
-          </a:bodyPr>
-          <a:lstStyle/>
-          <a:p>
-            <a:pPr algn="l">
-              <a:spcAft>
-                <a:spcPts val="0"/>
-              </a:spcAft>
-            </a:pPr>
-            <a:r>
-              <a:rPr sz="1050" b="0">
-                <a:solidFill>
-                  <a:srgbClr val="6B6B6B"/>
-                </a:solidFill>
-                <a:latin typeface="Segoe UI"/>
-              </a:rPr>
-              <a:t>usually on by default</a:t>
-            </a:r>
-          </a:p>
-        </p:txBody>
-      </p:sp>
-      <p:sp>
-        <p:nvSpPr>
-          <p:cNvPr id="35" name="TextBox 34"/>
-          <p:cNvSpPr txBox="1"/>
-          <p:nvPr/>
-        </p:nvSpPr>
-        <p:spPr>
-          <a:xfrm>
-            <a:off x="7086600" y="5559552"/>
-            <a:ext cx="4297680" cy="274320"/>
-          </a:xfrm>
-          <a:prstGeom prst="rect">
-            <a:avLst/>
-          </a:prstGeom>
-          <a:noFill/>
-        </p:spPr>
-        <p:txBody>
-          <a:bodyPr wrap="square" anchor="t" lIns="0" rIns="0" tIns="0" bIns="0">
-            <a:spAutoFit/>
-          </a:bodyPr>
-          <a:lstStyle/>
-          <a:p>
-            <a:pPr algn="l">
-              <a:spcAft>
-                <a:spcPts val="0"/>
-              </a:spcAft>
-            </a:pPr>
-            <a:r>
-              <a:rPr sz="1050" b="0">
-                <a:solidFill>
-                  <a:srgbClr val="1A1A1A"/>
-                </a:solidFill>
-                <a:latin typeface="Segoe UI"/>
-              </a:rPr>
-              <a:t>none, and none in the lock</a:t>
+                  <a:srgbClr val="1F4E79"/>
+                </a:solidFill>
+                <a:latin typeface="Segoe UI"/>
+              </a:rPr>
+              <a:t>AIForgeCrew</a:t>
             </a:r>
           </a:p>
         </p:txBody>
@@ -16279,7 +16128,7 @@
                 </a:solidFill>
                 <a:latin typeface="Segoe UI"/>
               </a:rPr>
-              <a:t>How to deploy it</a:t>
+              <a:t>Compared with the usual approach</a:t>
             </a:r>
           </a:p>
         </p:txBody>
@@ -16318,7 +16167,7 @@
                 </a:solidFill>
                 <a:latin typeface="Segoe UI"/>
               </a:rPr>
-              <a:t>Zero-Docker is a first-class mode, not a degraded one.</a:t>
+              <a:t>Every operational burden a vector-database stack adds, removed.</a:t>
             </a:r>
           </a:p>
         </p:txBody>
@@ -16375,8 +16224,47 @@
         </p:nvSpPr>
         <p:spPr>
           <a:xfrm>
-            <a:off x="548640" y="6327648"/>
-            <a:ext cx="9692640" cy="320040"/>
+            <a:off x="11018520" y="6327648"/>
+            <a:ext cx="640080" cy="274320"/>
+          </a:xfrm>
+          <a:prstGeom prst="rect">
+            <a:avLst/>
+          </a:prstGeom>
+          <a:noFill/>
+        </p:spPr>
+        <p:txBody>
+          <a:bodyPr wrap="square" anchor="t" lIns="0" rIns="0" tIns="0" bIns="0">
+            <a:spAutoFit/>
+          </a:bodyPr>
+          <a:lstStyle/>
+          <a:p>
+            <a:pPr algn="r">
+              <a:spcAft>
+                <a:spcPts val="0"/>
+              </a:spcAft>
+            </a:pPr>
+            <a:r>
+              <a:rPr sz="950" b="0">
+                <a:solidFill>
+                  <a:srgbClr val="6B6B6B"/>
+                </a:solidFill>
+                <a:latin typeface="Segoe UI"/>
+              </a:rPr>
+              <a:t>18</a:t>
+            </a:r>
+          </a:p>
+        </p:txBody>
+      </p:sp>
+      <p:sp>
+        <p:nvSpPr>
+          <p:cNvPr id="6" name="TextBox 5"/>
+          <p:cNvSpPr txBox="1"/>
+          <p:nvPr/>
+        </p:nvSpPr>
+        <p:spPr>
+          <a:xfrm>
+            <a:off x="2788920" y="1417320"/>
+            <a:ext cx="4114800" cy="274320"/>
           </a:xfrm>
           <a:prstGeom prst="rect">
             <a:avLst/>
@@ -16395,27 +16283,27 @@
               </a:spcAft>
             </a:pPr>
             <a:r>
-              <a:rPr sz="950" b="0">
+              <a:rPr sz="1150" b="1">
                 <a:solidFill>
                   <a:srgbClr val="6B6B6B"/>
                 </a:solidFill>
                 <a:latin typeface="Segoe UI"/>
               </a:rPr>
-              <a:t>One service, one port, one folder of state. Moving a machine is copying ~/.aiforge/.</a:t>
-            </a:r>
-          </a:p>
-        </p:txBody>
-      </p:sp>
-      <p:sp>
-        <p:nvSpPr>
-          <p:cNvPr id="6" name="TextBox 5"/>
+              <a:t>Typical agent stack</a:t>
+            </a:r>
+          </a:p>
+        </p:txBody>
+      </p:sp>
+      <p:sp>
+        <p:nvSpPr>
+          <p:cNvPr id="7" name="TextBox 6"/>
           <p:cNvSpPr txBox="1"/>
           <p:nvPr/>
         </p:nvSpPr>
         <p:spPr>
           <a:xfrm>
-            <a:off x="11018520" y="6327648"/>
-            <a:ext cx="640080" cy="274320"/>
+            <a:off x="7086600" y="1417320"/>
+            <a:ext cx="4453128" cy="274320"/>
           </a:xfrm>
           <a:prstGeom prst="rect">
             <a:avLst/>
@@ -16428,343 +16316,203 @@
           </a:bodyPr>
           <a:lstStyle/>
           <a:p>
-            <a:pPr algn="r">
+            <a:pPr algn="l">
               <a:spcAft>
                 <a:spcPts val="0"/>
               </a:spcAft>
             </a:pPr>
             <a:r>
-              <a:rPr sz="950" b="0">
+              <a:rPr sz="1150" b="1">
+                <a:solidFill>
+                  <a:srgbClr val="1F4E79"/>
+                </a:solidFill>
+                <a:latin typeface="Segoe UI"/>
+              </a:rPr>
+              <a:t>AIForgeCrew</a:t>
+            </a:r>
+          </a:p>
+        </p:txBody>
+      </p:sp>
+      <p:sp>
+        <p:nvSpPr>
+          <p:cNvPr id="8" name="Rectangle 7"/>
+          <p:cNvSpPr/>
+          <p:nvPr/>
+        </p:nvSpPr>
+        <p:spPr>
+          <a:xfrm>
+            <a:off x="685800" y="1783080"/>
+            <a:ext cx="10853928" cy="548640"/>
+          </a:xfrm>
+          <a:prstGeom prst="rect">
+            <a:avLst/>
+          </a:prstGeom>
+          <a:solidFill>
+            <a:srgbClr val="F7F7F7"/>
+          </a:solidFill>
+          <a:ln>
+            <a:noFill/>
+          </a:ln>
+          <a:effectLst/>
+        </p:spPr>
+        <p:style>
+          <a:lnRef idx="1">
+            <a:schemeClr val="accent1"/>
+          </a:lnRef>
+          <a:fillRef idx="3">
+            <a:schemeClr val="accent1"/>
+          </a:fillRef>
+          <a:effectRef idx="2">
+            <a:schemeClr val="accent1"/>
+          </a:effectRef>
+          <a:fontRef idx="minor">
+            <a:schemeClr val="lt1"/>
+          </a:fontRef>
+        </p:style>
+        <p:txBody>
+          <a:bodyPr rtlCol="0" anchor="ctr"/>
+          <a:lstStyle/>
+          <a:p>
+            <a:pPr algn="ctr"/>
+          </a:p>
+        </p:txBody>
+      </p:sp>
+      <p:sp>
+        <p:nvSpPr>
+          <p:cNvPr id="9" name="TextBox 8"/>
+          <p:cNvSpPr txBox="1"/>
+          <p:nvPr/>
+        </p:nvSpPr>
+        <p:spPr>
+          <a:xfrm>
+            <a:off x="822960" y="1938528"/>
+            <a:ext cx="1920240" cy="274320"/>
+          </a:xfrm>
+          <a:prstGeom prst="rect">
+            <a:avLst/>
+          </a:prstGeom>
+          <a:noFill/>
+        </p:spPr>
+        <p:txBody>
+          <a:bodyPr wrap="square" anchor="t" lIns="0" rIns="0" tIns="0" bIns="0">
+            <a:spAutoFit/>
+          </a:bodyPr>
+          <a:lstStyle/>
+          <a:p>
+            <a:pPr algn="l">
+              <a:spcAft>
+                <a:spcPts val="0"/>
+              </a:spcAft>
+            </a:pPr>
+            <a:r>
+              <a:rPr sz="1100" b="1">
+                <a:solidFill>
+                  <a:srgbClr val="1A1A1A"/>
+                </a:solidFill>
+                <a:latin typeface="Segoe UI"/>
+              </a:rPr>
+              <a:t>Storage</a:t>
+            </a:r>
+          </a:p>
+        </p:txBody>
+      </p:sp>
+      <p:sp>
+        <p:nvSpPr>
+          <p:cNvPr id="10" name="TextBox 9"/>
+          <p:cNvSpPr txBox="1"/>
+          <p:nvPr/>
+        </p:nvSpPr>
+        <p:spPr>
+          <a:xfrm>
+            <a:off x="2788920" y="1938528"/>
+            <a:ext cx="4114800" cy="274320"/>
+          </a:xfrm>
+          <a:prstGeom prst="rect">
+            <a:avLst/>
+          </a:prstGeom>
+          <a:noFill/>
+        </p:spPr>
+        <p:txBody>
+          <a:bodyPr wrap="square" anchor="t" lIns="0" rIns="0" tIns="0" bIns="0">
+            <a:spAutoFit/>
+          </a:bodyPr>
+          <a:lstStyle/>
+          <a:p>
+            <a:pPr algn="l">
+              <a:spcAft>
+                <a:spcPts val="0"/>
+              </a:spcAft>
+            </a:pPr>
+            <a:r>
+              <a:rPr sz="1050" b="0">
                 <a:solidFill>
                   <a:srgbClr val="6B6B6B"/>
                 </a:solidFill>
                 <a:latin typeface="Segoe UI"/>
               </a:rPr>
-              <a:t>18</a:t>
-            </a:r>
-          </a:p>
-        </p:txBody>
-      </p:sp>
-      <p:sp>
-        <p:nvSpPr>
-          <p:cNvPr id="7" name="Rounded Rectangle 6"/>
+              <a:t>vector DB service to install, tune, back up</a:t>
+            </a:r>
+          </a:p>
+        </p:txBody>
+      </p:sp>
+      <p:sp>
+        <p:nvSpPr>
+          <p:cNvPr id="11" name="TextBox 10"/>
+          <p:cNvSpPr txBox="1"/>
+          <p:nvPr/>
+        </p:nvSpPr>
+        <p:spPr>
+          <a:xfrm>
+            <a:off x="7086600" y="1938528"/>
+            <a:ext cx="4297680" cy="274320"/>
+          </a:xfrm>
+          <a:prstGeom prst="rect">
+            <a:avLst/>
+          </a:prstGeom>
+          <a:noFill/>
+        </p:spPr>
+        <p:txBody>
+          <a:bodyPr wrap="square" anchor="t" lIns="0" rIns="0" tIns="0" bIns="0">
+            <a:spAutoFit/>
+          </a:bodyPr>
+          <a:lstStyle/>
+          <a:p>
+            <a:pPr algn="l">
+              <a:spcAft>
+                <a:spcPts val="0"/>
+              </a:spcAft>
+            </a:pPr>
+            <a:r>
+              <a:rPr sz="1050" b="0">
+                <a:solidFill>
+                  <a:srgbClr val="1A1A1A"/>
+                </a:solidFill>
+                <a:latin typeface="Segoe UI"/>
+              </a:rPr>
+              <a:t>markdown files + one SQLite under ~/.aiforge/</a:t>
+            </a:r>
+          </a:p>
+        </p:txBody>
+      </p:sp>
+      <p:sp>
+        <p:nvSpPr>
+          <p:cNvPr id="12" name="Rectangle 11"/>
           <p:cNvSpPr/>
           <p:nvPr/>
         </p:nvSpPr>
         <p:spPr>
           <a:xfrm>
-            <a:off x="685800" y="1554480"/>
-            <a:ext cx="3383280" cy="1737360"/>
-          </a:xfrm>
-          <a:prstGeom prst="roundRect">
-            <a:avLst>
-              <a:gd name="adj" fmla="val 10000"/>
-            </a:avLst>
-          </a:prstGeom>
-          <a:solidFill>
-            <a:srgbClr val="DCEEE7"/>
-          </a:solidFill>
-          <a:ln w="12700">
-            <a:solidFill>
-              <a:srgbClr val="1E6B52"/>
-            </a:solidFill>
-          </a:ln>
-          <a:effectLst/>
-        </p:spPr>
-        <p:style>
-          <a:lnRef idx="1">
-            <a:schemeClr val="accent1"/>
-          </a:lnRef>
-          <a:fillRef idx="3">
-            <a:schemeClr val="accent1"/>
-          </a:fillRef>
-          <a:effectRef idx="2">
-            <a:schemeClr val="accent1"/>
-          </a:effectRef>
-          <a:fontRef idx="minor">
-            <a:schemeClr val="lt1"/>
-          </a:fontRef>
-        </p:style>
-        <p:txBody>
-          <a:bodyPr rtlCol="0" anchor="ctr" wrap="square" lIns="54864" rIns="54864" tIns="27432" bIns="27432"/>
-          <a:lstStyle/>
-          <a:p>
-            <a:pPr algn="ctr"/>
-            <a:r>
-              <a:rPr sz="1700" b="1">
-                <a:solidFill>
-                  <a:srgbClr val="1E6B52"/>
-                </a:solidFill>
-                <a:latin typeface="Segoe UI"/>
-              </a:rPr>
-              <a:t>Laptop</a:t>
-            </a:r>
-          </a:p>
-          <a:p>
-            <a:pPr algn="ctr"/>
-          </a:p>
-          <a:p>
-            <a:pPr algn="ctr"/>
-            <a:r>
-              <a:rPr sz="1050" b="0">
-                <a:solidFill>
-                  <a:srgbClr val="1A1A1A"/>
-                </a:solidFill>
-                <a:latin typeface="Segoe UI"/>
-              </a:rPr>
-              <a:t>./run.sh</a:t>
-            </a:r>
-          </a:p>
-          <a:p>
-            <a:pPr algn="ctr"/>
-          </a:p>
-          <a:p>
-            <a:pPr algn="ctr"/>
-            <a:r>
-              <a:rPr sz="1050" b="0">
-                <a:solidFill>
-                  <a:srgbClr val="1A1A1A"/>
-                </a:solidFill>
-                <a:latin typeface="Segoe UI"/>
-              </a:rPr>
-              <a:t>everything local</a:t>
-            </a:r>
-          </a:p>
-          <a:p>
-            <a:pPr algn="ctr"/>
-            <a:r>
-              <a:rPr sz="1050" b="0">
-                <a:solidFill>
-                  <a:srgbClr val="1A1A1A"/>
-                </a:solidFill>
-                <a:latin typeface="Segoe UI"/>
-              </a:rPr>
-              <a:t>unset admin URL = you are the admin</a:t>
-            </a:r>
-          </a:p>
-        </p:txBody>
-      </p:sp>
-      <p:sp>
-        <p:nvSpPr>
-          <p:cNvPr id="8" name="Rounded Rectangle 7"/>
-          <p:cNvSpPr/>
-          <p:nvPr/>
-        </p:nvSpPr>
-        <p:spPr>
-          <a:xfrm>
-            <a:off x="4361687" y="1554480"/>
-            <a:ext cx="3383280" cy="1737360"/>
-          </a:xfrm>
-          <a:prstGeom prst="roundRect">
-            <a:avLst>
-              <a:gd name="adj" fmla="val 10000"/>
-            </a:avLst>
-          </a:prstGeom>
-          <a:solidFill>
-            <a:srgbClr val="DCE7F2"/>
-          </a:solidFill>
-          <a:ln w="12700">
-            <a:solidFill>
-              <a:srgbClr val="1F4E79"/>
-            </a:solidFill>
-          </a:ln>
-          <a:effectLst/>
-        </p:spPr>
-        <p:style>
-          <a:lnRef idx="1">
-            <a:schemeClr val="accent1"/>
-          </a:lnRef>
-          <a:fillRef idx="3">
-            <a:schemeClr val="accent1"/>
-          </a:fillRef>
-          <a:effectRef idx="2">
-            <a:schemeClr val="accent1"/>
-          </a:effectRef>
-          <a:fontRef idx="minor">
-            <a:schemeClr val="lt1"/>
-          </a:fontRef>
-        </p:style>
-        <p:txBody>
-          <a:bodyPr rtlCol="0" anchor="ctr" wrap="square" lIns="54864" rIns="54864" tIns="27432" bIns="27432"/>
-          <a:lstStyle/>
-          <a:p>
-            <a:pPr algn="ctr"/>
-            <a:r>
-              <a:rPr sz="1700" b="1">
-                <a:solidFill>
-                  <a:srgbClr val="1F4E79"/>
-                </a:solidFill>
-                <a:latin typeface="Segoe UI"/>
-              </a:rPr>
-              <a:t>NUC / server</a:t>
-            </a:r>
-          </a:p>
-          <a:p>
-            <a:pPr algn="ctr"/>
-          </a:p>
-          <a:p>
-            <a:pPr algn="ctr"/>
-            <a:r>
-              <a:rPr sz="1050" b="0">
-                <a:solidFill>
-                  <a:srgbClr val="1A1A1A"/>
-                </a:solidFill>
-                <a:latin typeface="Segoe UI"/>
-              </a:rPr>
-              <a:t>systemd user unit</a:t>
-            </a:r>
-          </a:p>
-          <a:p>
-            <a:pPr algn="ctr"/>
-          </a:p>
-          <a:p>
-            <a:pPr algn="ctr"/>
-            <a:r>
-              <a:rPr sz="1050" b="0">
-                <a:solidFill>
-                  <a:srgbClr val="1A1A1A"/>
-                </a:solidFill>
-                <a:latin typeface="Segoe UI"/>
-              </a:rPr>
-              <a:t>always-on admin hub</a:t>
-            </a:r>
-          </a:p>
-          <a:p>
-            <a:pPr algn="ctr"/>
-            <a:r>
-              <a:rPr sz="1050" b="0">
-                <a:solidFill>
-                  <a:srgbClr val="1A1A1A"/>
-                </a:solidFill>
-                <a:latin typeface="Segoe UI"/>
-              </a:rPr>
-              <a:t>spokes sync to it</a:t>
-            </a:r>
-          </a:p>
-        </p:txBody>
-      </p:sp>
-      <p:sp>
-        <p:nvSpPr>
-          <p:cNvPr id="9" name="Rounded Rectangle 8"/>
-          <p:cNvSpPr/>
-          <p:nvPr/>
-        </p:nvSpPr>
-        <p:spPr>
-          <a:xfrm>
-            <a:off x="8037574" y="1554480"/>
-            <a:ext cx="3383280" cy="1737360"/>
-          </a:xfrm>
-          <a:prstGeom prst="roundRect">
-            <a:avLst>
-              <a:gd name="adj" fmla="val 10000"/>
-            </a:avLst>
-          </a:prstGeom>
-          <a:solidFill>
-            <a:srgbClr val="EAE1F0"/>
-          </a:solidFill>
-          <a:ln w="12700">
-            <a:solidFill>
-              <a:srgbClr val="5B3A6E"/>
-            </a:solidFill>
-          </a:ln>
-          <a:effectLst/>
-        </p:spPr>
-        <p:style>
-          <a:lnRef idx="1">
-            <a:schemeClr val="accent1"/>
-          </a:lnRef>
-          <a:fillRef idx="3">
-            <a:schemeClr val="accent1"/>
-          </a:fillRef>
-          <a:effectRef idx="2">
-            <a:schemeClr val="accent1"/>
-          </a:effectRef>
-          <a:fontRef idx="minor">
-            <a:schemeClr val="lt1"/>
-          </a:fontRef>
-        </p:style>
-        <p:txBody>
-          <a:bodyPr rtlCol="0" anchor="ctr" wrap="square" lIns="54864" rIns="54864" tIns="27432" bIns="27432"/>
-          <a:lstStyle/>
-          <a:p>
-            <a:pPr algn="ctr"/>
-            <a:r>
-              <a:rPr sz="1700" b="1">
-                <a:solidFill>
-                  <a:srgbClr val="5B3A6E"/>
-                </a:solidFill>
-                <a:latin typeface="Segoe UI"/>
-              </a:rPr>
-              <a:t>Container</a:t>
-            </a:r>
-          </a:p>
-          <a:p>
-            <a:pPr algn="ctr"/>
-          </a:p>
-          <a:p>
-            <a:pPr algn="ctr"/>
-            <a:r>
-              <a:rPr sz="1050" b="0">
-                <a:solidFill>
-                  <a:srgbClr val="1A1A1A"/>
-                </a:solidFill>
-                <a:latin typeface="Segoe UI"/>
-              </a:rPr>
-              <a:t>docker compose</a:t>
-            </a:r>
-          </a:p>
-          <a:p>
-            <a:pPr algn="ctr"/>
-          </a:p>
-          <a:p>
-            <a:pPr algn="ctr"/>
-            <a:r>
-              <a:rPr sz="1050" b="0">
-                <a:solidFill>
-                  <a:srgbClr val="1A1A1A"/>
-                </a:solidFill>
-                <a:latin typeface="Segoe UI"/>
-              </a:rPr>
-              <a:t>for untrusted work</a:t>
-            </a:r>
-          </a:p>
-          <a:p>
-            <a:pPr algn="ctr"/>
-            <a:r>
-              <a:rPr sz="1050" b="0">
-                <a:solidFill>
-                  <a:srgbClr val="1A1A1A"/>
-                </a:solidFill>
-                <a:latin typeface="Segoe UI"/>
-              </a:rPr>
-              <a:t>the jail you actually want</a:t>
-            </a:r>
-          </a:p>
-        </p:txBody>
-      </p:sp>
-      <p:sp>
-        <p:nvSpPr>
-          <p:cNvPr id="10" name="Rounded Rectangle 9"/>
-          <p:cNvSpPr/>
-          <p:nvPr/>
-        </p:nvSpPr>
-        <p:spPr>
-          <a:xfrm>
-            <a:off x="685800" y="3611880"/>
-            <a:ext cx="10835640" cy="566928"/>
-          </a:xfrm>
-          <a:prstGeom prst="roundRect">
-            <a:avLst>
-              <a:gd name="adj" fmla="val 10000"/>
-            </a:avLst>
+            <a:off x="685800" y="2386584"/>
+            <a:ext cx="10853928" cy="548640"/>
+          </a:xfrm>
+          <a:prstGeom prst="rect">
+            <a:avLst/>
           </a:prstGeom>
           <a:solidFill>
             <a:srgbClr val="FFFFFF"/>
           </a:solidFill>
-          <a:ln w="12700">
-            <a:solidFill>
-              <a:srgbClr val="C9C9C9"/>
-            </a:solidFill>
+          <a:ln>
+            <a:noFill/>
           </a:ln>
           <a:effectLst/>
         </p:spPr>
@@ -16783,57 +16531,149 @@
           </a:fontRef>
         </p:style>
         <p:txBody>
-          <a:bodyPr rtlCol="0" anchor="ctr" wrap="square" lIns="54864" rIns="54864" tIns="27432" bIns="27432"/>
-          <a:lstStyle/>
-          <a:p>
-            <a:pPr algn="ctr"/>
-            <a:r>
-              <a:rPr sz="1300" b="1">
-                <a:solidFill>
-                  <a:srgbClr val="1A1A1A"/>
-                </a:solidFill>
-                <a:latin typeface="Segoe UI"/>
-              </a:rPr>
-              <a:t>Requires</a:t>
-            </a:r>
-          </a:p>
-          <a:p>
-            <a:pPr algn="ctr"/>
+          <a:bodyPr rtlCol="0" anchor="ctr"/>
+          <a:lstStyle/>
+          <a:p>
+            <a:pPr algn="ctr"/>
+          </a:p>
+        </p:txBody>
+      </p:sp>
+      <p:sp>
+        <p:nvSpPr>
+          <p:cNvPr id="13" name="TextBox 12"/>
+          <p:cNvSpPr txBox="1"/>
+          <p:nvPr/>
+        </p:nvSpPr>
+        <p:spPr>
+          <a:xfrm>
+            <a:off x="822960" y="2542032"/>
+            <a:ext cx="1920240" cy="274320"/>
+          </a:xfrm>
+          <a:prstGeom prst="rect">
+            <a:avLst/>
+          </a:prstGeom>
+          <a:noFill/>
+        </p:spPr>
+        <p:txBody>
+          <a:bodyPr wrap="square" anchor="t" lIns="0" rIns="0" tIns="0" bIns="0">
+            <a:spAutoFit/>
+          </a:bodyPr>
+          <a:lstStyle/>
+          <a:p>
+            <a:pPr algn="l">
+              <a:spcAft>
+                <a:spcPts val="0"/>
+              </a:spcAft>
+            </a:pPr>
+            <a:r>
+              <a:rPr sz="1100" b="1">
+                <a:solidFill>
+                  <a:srgbClr val="1A1A1A"/>
+                </a:solidFill>
+                <a:latin typeface="Segoe UI"/>
+              </a:rPr>
+              <a:t>Inspect</a:t>
+            </a:r>
+          </a:p>
+        </p:txBody>
+      </p:sp>
+      <p:sp>
+        <p:nvSpPr>
+          <p:cNvPr id="14" name="TextBox 13"/>
+          <p:cNvSpPr txBox="1"/>
+          <p:nvPr/>
+        </p:nvSpPr>
+        <p:spPr>
+          <a:xfrm>
+            <a:off x="2788920" y="2542032"/>
+            <a:ext cx="4114800" cy="274320"/>
+          </a:xfrm>
+          <a:prstGeom prst="rect">
+            <a:avLst/>
+          </a:prstGeom>
+          <a:noFill/>
+        </p:spPr>
+        <p:txBody>
+          <a:bodyPr wrap="square" anchor="t" lIns="0" rIns="0" tIns="0" bIns="0">
+            <a:spAutoFit/>
+          </a:bodyPr>
+          <a:lstStyle/>
+          <a:p>
+            <a:pPr algn="l">
+              <a:spcAft>
+                <a:spcPts val="0"/>
+              </a:spcAft>
+            </a:pPr>
             <a:r>
               <a:rPr sz="1050" b="0">
                 <a:solidFill>
-                  <a:srgbClr val="1A1A1A"/>
-                </a:solidFill>
-                <a:latin typeface="Segoe UI"/>
-              </a:rPr>
-              <a:t>Python 3.12  ·  one OpenAI-compatible endpoint  ·  no GPU, no torch, no Postgres, no Neo4j</a:t>
-            </a:r>
-          </a:p>
-        </p:txBody>
-      </p:sp>
-      <p:sp>
-        <p:nvSpPr>
-          <p:cNvPr id="11" name="Rounded Rectangle 10"/>
+                  <a:srgbClr val="6B6B6B"/>
+                </a:solidFill>
+                <a:latin typeface="Segoe UI"/>
+              </a:rPr>
+              <a:t>query the DB, decode embeddings</a:t>
+            </a:r>
+          </a:p>
+        </p:txBody>
+      </p:sp>
+      <p:sp>
+        <p:nvSpPr>
+          <p:cNvPr id="15" name="TextBox 14"/>
+          <p:cNvSpPr txBox="1"/>
+          <p:nvPr/>
+        </p:nvSpPr>
+        <p:spPr>
+          <a:xfrm>
+            <a:off x="7086600" y="2542032"/>
+            <a:ext cx="4297680" cy="274320"/>
+          </a:xfrm>
+          <a:prstGeom prst="rect">
+            <a:avLst/>
+          </a:prstGeom>
+          <a:noFill/>
+        </p:spPr>
+        <p:txBody>
+          <a:bodyPr wrap="square" anchor="t" lIns="0" rIns="0" tIns="0" bIns="0">
+            <a:spAutoFit/>
+          </a:bodyPr>
+          <a:lstStyle/>
+          <a:p>
+            <a:pPr algn="l">
+              <a:spcAft>
+                <a:spcPts val="0"/>
+              </a:spcAft>
+            </a:pPr>
+            <a:r>
+              <a:rPr sz="1050" b="0">
+                <a:solidFill>
+                  <a:srgbClr val="1A1A1A"/>
+                </a:solidFill>
+                <a:latin typeface="Segoe UI"/>
+              </a:rPr>
+              <a:t>cat · grep · an editor</a:t>
+            </a:r>
+          </a:p>
+        </p:txBody>
+      </p:sp>
+      <p:sp>
+        <p:nvSpPr>
+          <p:cNvPr id="16" name="Rectangle 15"/>
           <p:cNvSpPr/>
           <p:nvPr/>
         </p:nvSpPr>
         <p:spPr>
           <a:xfrm>
-            <a:off x="685800" y="4389120"/>
-            <a:ext cx="10835640" cy="1234440"/>
-          </a:xfrm>
-          <a:prstGeom prst="roundRect">
-            <a:avLst>
-              <a:gd name="adj" fmla="val 10000"/>
-            </a:avLst>
+            <a:off x="685800" y="2990088"/>
+            <a:ext cx="10853928" cy="548640"/>
+          </a:xfrm>
+          <a:prstGeom prst="rect">
+            <a:avLst/>
           </a:prstGeom>
           <a:solidFill>
-            <a:srgbClr val="ECECEC"/>
+            <a:srgbClr val="F7F7F7"/>
           </a:solidFill>
-          <a:ln w="12700">
-            <a:solidFill>
-              <a:srgbClr val="3A3A3A"/>
-            </a:solidFill>
+          <a:ln>
+            <a:noFill/>
           </a:ln>
           <a:effectLst/>
         </p:spPr>
@@ -16852,34 +16692,118 @@
           </a:fontRef>
         </p:style>
         <p:txBody>
-          <a:bodyPr rtlCol="0" anchor="ctr" wrap="square" lIns="54864" rIns="54864" tIns="27432" bIns="27432"/>
-          <a:lstStyle/>
-          <a:p>
-            <a:pPr algn="ctr"/>
-            <a:r>
-              <a:rPr sz="1300" b="1">
-                <a:solidFill>
-                  <a:srgbClr val="3A3A3A"/>
-                </a:solidFill>
-                <a:latin typeface="Segoe UI"/>
-              </a:rPr>
-              <a:t>Kept honest</a:t>
-            </a:r>
-          </a:p>
-          <a:p>
-            <a:pPr algn="ctr"/>
+          <a:bodyPr rtlCol="0" anchor="ctr"/>
+          <a:lstStyle/>
+          <a:p>
+            <a:pPr algn="ctr"/>
+          </a:p>
+        </p:txBody>
+      </p:sp>
+      <p:sp>
+        <p:nvSpPr>
+          <p:cNvPr id="17" name="TextBox 16"/>
+          <p:cNvSpPr txBox="1"/>
+          <p:nvPr/>
+        </p:nvSpPr>
+        <p:spPr>
+          <a:xfrm>
+            <a:off x="822960" y="3145536"/>
+            <a:ext cx="1920240" cy="274320"/>
+          </a:xfrm>
+          <a:prstGeom prst="rect">
+            <a:avLst/>
+          </a:prstGeom>
+          <a:noFill/>
+        </p:spPr>
+        <p:txBody>
+          <a:bodyPr wrap="square" anchor="t" lIns="0" rIns="0" tIns="0" bIns="0">
+            <a:spAutoFit/>
+          </a:bodyPr>
+          <a:lstStyle/>
+          <a:p>
+            <a:pPr algn="l">
+              <a:spcAft>
+                <a:spcPts val="0"/>
+              </a:spcAft>
+            </a:pPr>
+            <a:r>
+              <a:rPr sz="1100" b="1">
+                <a:solidFill>
+                  <a:srgbClr val="1A1A1A"/>
+                </a:solidFill>
+                <a:latin typeface="Segoe UI"/>
+              </a:rPr>
+              <a:t>Version</a:t>
+            </a:r>
+          </a:p>
+        </p:txBody>
+      </p:sp>
+      <p:sp>
+        <p:nvSpPr>
+          <p:cNvPr id="18" name="TextBox 17"/>
+          <p:cNvSpPr txBox="1"/>
+          <p:nvPr/>
+        </p:nvSpPr>
+        <p:spPr>
+          <a:xfrm>
+            <a:off x="2788920" y="3145536"/>
+            <a:ext cx="4114800" cy="274320"/>
+          </a:xfrm>
+          <a:prstGeom prst="rect">
+            <a:avLst/>
+          </a:prstGeom>
+          <a:noFill/>
+        </p:spPr>
+        <p:txBody>
+          <a:bodyPr wrap="square" anchor="t" lIns="0" rIns="0" tIns="0" bIns="0">
+            <a:spAutoFit/>
+          </a:bodyPr>
+          <a:lstStyle/>
+          <a:p>
+            <a:pPr algn="l">
+              <a:spcAft>
+                <a:spcPts val="0"/>
+              </a:spcAft>
+            </a:pPr>
             <a:r>
               <a:rPr sz="1050" b="0">
                 <a:solidFill>
-                  <a:srgbClr val="1A1A1A"/>
-                </a:solidFill>
-                <a:latin typeface="Segoe UI"/>
-              </a:rPr>
-              <a:t>~4,000 tests, 0 failing  ·  86% line coverage  ·  Sonar 0 bugs, every function under cognitive complexity 15</a:t>
-            </a:r>
-          </a:p>
-          <a:p>
-            <a:pPr algn="ctr"/>
+                  <a:srgbClr val="6B6B6B"/>
+                </a:solidFill>
+                <a:latin typeface="Segoe UI"/>
+              </a:rPr>
+              <a:t>opaque rows</a:t>
+            </a:r>
+          </a:p>
+        </p:txBody>
+      </p:sp>
+      <p:sp>
+        <p:nvSpPr>
+          <p:cNvPr id="19" name="TextBox 18"/>
+          <p:cNvSpPr txBox="1"/>
+          <p:nvPr/>
+        </p:nvSpPr>
+        <p:spPr>
+          <a:xfrm>
+            <a:off x="7086600" y="3145536"/>
+            <a:ext cx="4297680" cy="274320"/>
+          </a:xfrm>
+          <a:prstGeom prst="rect">
+            <a:avLst/>
+          </a:prstGeom>
+          <a:noFill/>
+        </p:spPr>
+        <p:txBody>
+          <a:bodyPr wrap="square" anchor="t" lIns="0" rIns="0" tIns="0" bIns="0">
+            <a:spAutoFit/>
+          </a:bodyPr>
+          <a:lstStyle/>
+          <a:p>
+            <a:pPr algn="l">
+              <a:spcAft>
+                <a:spcPts val="0"/>
+              </a:spcAft>
+            </a:pPr>
             <a:r>
               <a:rPr sz="1050" b="0">
                 <a:solidFill>
@@ -16887,7 +16811,651 @@
                 </a:solidFill>
                 <a:latin typeface="Segoe UI"/>
               </a:rPr>
-              <a:t>chat and pipeline tool registries are parity-tested  ·  uv.lock pinned and shipped  ·  CycloneDX SBOM in CI</a:t>
+              <a:t>git-diffable; hardlink snapshots + revert endpoint</a:t>
+            </a:r>
+          </a:p>
+        </p:txBody>
+      </p:sp>
+      <p:sp>
+        <p:nvSpPr>
+          <p:cNvPr id="20" name="Rectangle 19"/>
+          <p:cNvSpPr/>
+          <p:nvPr/>
+        </p:nvSpPr>
+        <p:spPr>
+          <a:xfrm>
+            <a:off x="685800" y="3593592"/>
+            <a:ext cx="10853928" cy="548640"/>
+          </a:xfrm>
+          <a:prstGeom prst="rect">
+            <a:avLst/>
+          </a:prstGeom>
+          <a:solidFill>
+            <a:srgbClr val="FFFFFF"/>
+          </a:solidFill>
+          <a:ln>
+            <a:noFill/>
+          </a:ln>
+          <a:effectLst/>
+        </p:spPr>
+        <p:style>
+          <a:lnRef idx="1">
+            <a:schemeClr val="accent1"/>
+          </a:lnRef>
+          <a:fillRef idx="3">
+            <a:schemeClr val="accent1"/>
+          </a:fillRef>
+          <a:effectRef idx="2">
+            <a:schemeClr val="accent1"/>
+          </a:effectRef>
+          <a:fontRef idx="minor">
+            <a:schemeClr val="lt1"/>
+          </a:fontRef>
+        </p:style>
+        <p:txBody>
+          <a:bodyPr rtlCol="0" anchor="ctr"/>
+          <a:lstStyle/>
+          <a:p>
+            <a:pPr algn="ctr"/>
+          </a:p>
+        </p:txBody>
+      </p:sp>
+      <p:sp>
+        <p:nvSpPr>
+          <p:cNvPr id="21" name="TextBox 20"/>
+          <p:cNvSpPr txBox="1"/>
+          <p:nvPr/>
+        </p:nvSpPr>
+        <p:spPr>
+          <a:xfrm>
+            <a:off x="822960" y="3749040"/>
+            <a:ext cx="1920240" cy="274320"/>
+          </a:xfrm>
+          <a:prstGeom prst="rect">
+            <a:avLst/>
+          </a:prstGeom>
+          <a:noFill/>
+        </p:spPr>
+        <p:txBody>
+          <a:bodyPr wrap="square" anchor="t" lIns="0" rIns="0" tIns="0" bIns="0">
+            <a:spAutoFit/>
+          </a:bodyPr>
+          <a:lstStyle/>
+          <a:p>
+            <a:pPr algn="l">
+              <a:spcAft>
+                <a:spcPts val="0"/>
+              </a:spcAft>
+            </a:pPr>
+            <a:r>
+              <a:rPr sz="1100" b="1">
+                <a:solidFill>
+                  <a:srgbClr val="1A1A1A"/>
+                </a:solidFill>
+                <a:latin typeface="Segoe UI"/>
+              </a:rPr>
+              <a:t>Move a machine</a:t>
+            </a:r>
+          </a:p>
+        </p:txBody>
+      </p:sp>
+      <p:sp>
+        <p:nvSpPr>
+          <p:cNvPr id="22" name="TextBox 21"/>
+          <p:cNvSpPr txBox="1"/>
+          <p:nvPr/>
+        </p:nvSpPr>
+        <p:spPr>
+          <a:xfrm>
+            <a:off x="2788920" y="3749040"/>
+            <a:ext cx="4114800" cy="274320"/>
+          </a:xfrm>
+          <a:prstGeom prst="rect">
+            <a:avLst/>
+          </a:prstGeom>
+          <a:noFill/>
+        </p:spPr>
+        <p:txBody>
+          <a:bodyPr wrap="square" anchor="t" lIns="0" rIns="0" tIns="0" bIns="0">
+            <a:spAutoFit/>
+          </a:bodyPr>
+          <a:lstStyle/>
+          <a:p>
+            <a:pPr algn="l">
+              <a:spcAft>
+                <a:spcPts val="0"/>
+              </a:spcAft>
+            </a:pPr>
+            <a:r>
+              <a:rPr sz="1050" b="0">
+                <a:solidFill>
+                  <a:srgbClr val="6B6B6B"/>
+                </a:solidFill>
+                <a:latin typeface="Segoe UI"/>
+              </a:rPr>
+              <a:t>dump and restore</a:t>
+            </a:r>
+          </a:p>
+        </p:txBody>
+      </p:sp>
+      <p:sp>
+        <p:nvSpPr>
+          <p:cNvPr id="23" name="TextBox 22"/>
+          <p:cNvSpPr txBox="1"/>
+          <p:nvPr/>
+        </p:nvSpPr>
+        <p:spPr>
+          <a:xfrm>
+            <a:off x="7086600" y="3749040"/>
+            <a:ext cx="4297680" cy="274320"/>
+          </a:xfrm>
+          <a:prstGeom prst="rect">
+            <a:avLst/>
+          </a:prstGeom>
+          <a:noFill/>
+        </p:spPr>
+        <p:txBody>
+          <a:bodyPr wrap="square" anchor="t" lIns="0" rIns="0" tIns="0" bIns="0">
+            <a:spAutoFit/>
+          </a:bodyPr>
+          <a:lstStyle/>
+          <a:p>
+            <a:pPr algn="l">
+              <a:spcAft>
+                <a:spcPts val="0"/>
+              </a:spcAft>
+            </a:pPr>
+            <a:r>
+              <a:rPr sz="1050" b="0">
+                <a:solidFill>
+                  <a:srgbClr val="1A1A1A"/>
+                </a:solidFill>
+                <a:latin typeface="Segoe UI"/>
+              </a:rPr>
+              <a:t>copy a folder</a:t>
+            </a:r>
+          </a:p>
+        </p:txBody>
+      </p:sp>
+      <p:sp>
+        <p:nvSpPr>
+          <p:cNvPr id="24" name="Rectangle 23"/>
+          <p:cNvSpPr/>
+          <p:nvPr/>
+        </p:nvSpPr>
+        <p:spPr>
+          <a:xfrm>
+            <a:off x="685800" y="4197096"/>
+            <a:ext cx="10853928" cy="548640"/>
+          </a:xfrm>
+          <a:prstGeom prst="rect">
+            <a:avLst/>
+          </a:prstGeom>
+          <a:solidFill>
+            <a:srgbClr val="F7F7F7"/>
+          </a:solidFill>
+          <a:ln>
+            <a:noFill/>
+          </a:ln>
+          <a:effectLst/>
+        </p:spPr>
+        <p:style>
+          <a:lnRef idx="1">
+            <a:schemeClr val="accent1"/>
+          </a:lnRef>
+          <a:fillRef idx="3">
+            <a:schemeClr val="accent1"/>
+          </a:fillRef>
+          <a:effectRef idx="2">
+            <a:schemeClr val="accent1"/>
+          </a:effectRef>
+          <a:fontRef idx="minor">
+            <a:schemeClr val="lt1"/>
+          </a:fontRef>
+        </p:style>
+        <p:txBody>
+          <a:bodyPr rtlCol="0" anchor="ctr"/>
+          <a:lstStyle/>
+          <a:p>
+            <a:pPr algn="ctr"/>
+          </a:p>
+        </p:txBody>
+      </p:sp>
+      <p:sp>
+        <p:nvSpPr>
+          <p:cNvPr id="25" name="TextBox 24"/>
+          <p:cNvSpPr txBox="1"/>
+          <p:nvPr/>
+        </p:nvSpPr>
+        <p:spPr>
+          <a:xfrm>
+            <a:off x="822960" y="4352544"/>
+            <a:ext cx="1920240" cy="274320"/>
+          </a:xfrm>
+          <a:prstGeom prst="rect">
+            <a:avLst/>
+          </a:prstGeom>
+          <a:noFill/>
+        </p:spPr>
+        <p:txBody>
+          <a:bodyPr wrap="square" anchor="t" lIns="0" rIns="0" tIns="0" bIns="0">
+            <a:spAutoFit/>
+          </a:bodyPr>
+          <a:lstStyle/>
+          <a:p>
+            <a:pPr algn="l">
+              <a:spcAft>
+                <a:spcPts val="0"/>
+              </a:spcAft>
+            </a:pPr>
+            <a:r>
+              <a:rPr sz="1100" b="1">
+                <a:solidFill>
+                  <a:srgbClr val="1A1A1A"/>
+                </a:solidFill>
+                <a:latin typeface="Segoe UI"/>
+              </a:rPr>
+              <a:t>Delete</a:t>
+            </a:r>
+          </a:p>
+        </p:txBody>
+      </p:sp>
+      <p:sp>
+        <p:nvSpPr>
+          <p:cNvPr id="26" name="TextBox 25"/>
+          <p:cNvSpPr txBox="1"/>
+          <p:nvPr/>
+        </p:nvSpPr>
+        <p:spPr>
+          <a:xfrm>
+            <a:off x="2788920" y="4352544"/>
+            <a:ext cx="4114800" cy="274320"/>
+          </a:xfrm>
+          <a:prstGeom prst="rect">
+            <a:avLst/>
+          </a:prstGeom>
+          <a:noFill/>
+        </p:spPr>
+        <p:txBody>
+          <a:bodyPr wrap="square" anchor="t" lIns="0" rIns="0" tIns="0" bIns="0">
+            <a:spAutoFit/>
+          </a:bodyPr>
+          <a:lstStyle/>
+          <a:p>
+            <a:pPr algn="l">
+              <a:spcAft>
+                <a:spcPts val="0"/>
+              </a:spcAft>
+            </a:pPr>
+            <a:r>
+              <a:rPr sz="1050" b="0">
+                <a:solidFill>
+                  <a:srgbClr val="6B6B6B"/>
+                </a:solidFill>
+                <a:latin typeface="Segoe UI"/>
+              </a:rPr>
+              <a:t>hope the rows are gone</a:t>
+            </a:r>
+          </a:p>
+        </p:txBody>
+      </p:sp>
+      <p:sp>
+        <p:nvSpPr>
+          <p:cNvPr id="27" name="TextBox 26"/>
+          <p:cNvSpPr txBox="1"/>
+          <p:nvPr/>
+        </p:nvSpPr>
+        <p:spPr>
+          <a:xfrm>
+            <a:off x="7086600" y="4352544"/>
+            <a:ext cx="4297680" cy="274320"/>
+          </a:xfrm>
+          <a:prstGeom prst="rect">
+            <a:avLst/>
+          </a:prstGeom>
+          <a:noFill/>
+        </p:spPr>
+        <p:txBody>
+          <a:bodyPr wrap="square" anchor="t" lIns="0" rIns="0" tIns="0" bIns="0">
+            <a:spAutoFit/>
+          </a:bodyPr>
+          <a:lstStyle/>
+          <a:p>
+            <a:pPr algn="l">
+              <a:spcAft>
+                <a:spcPts val="0"/>
+              </a:spcAft>
+            </a:pPr>
+            <a:r>
+              <a:rPr sz="1050" b="0">
+                <a:solidFill>
+                  <a:srgbClr val="1A1A1A"/>
+                </a:solidFill>
+                <a:latin typeface="Segoe UI"/>
+              </a:rPr>
+              <a:t>delete the folder — there is no second copy</a:t>
+            </a:r>
+          </a:p>
+        </p:txBody>
+      </p:sp>
+      <p:sp>
+        <p:nvSpPr>
+          <p:cNvPr id="28" name="Rectangle 27"/>
+          <p:cNvSpPr/>
+          <p:nvPr/>
+        </p:nvSpPr>
+        <p:spPr>
+          <a:xfrm>
+            <a:off x="685800" y="4800600"/>
+            <a:ext cx="10853928" cy="548640"/>
+          </a:xfrm>
+          <a:prstGeom prst="rect">
+            <a:avLst/>
+          </a:prstGeom>
+          <a:solidFill>
+            <a:srgbClr val="FFFFFF"/>
+          </a:solidFill>
+          <a:ln>
+            <a:noFill/>
+          </a:ln>
+          <a:effectLst/>
+        </p:spPr>
+        <p:style>
+          <a:lnRef idx="1">
+            <a:schemeClr val="accent1"/>
+          </a:lnRef>
+          <a:fillRef idx="3">
+            <a:schemeClr val="accent1"/>
+          </a:fillRef>
+          <a:effectRef idx="2">
+            <a:schemeClr val="accent1"/>
+          </a:effectRef>
+          <a:fontRef idx="minor">
+            <a:schemeClr val="lt1"/>
+          </a:fontRef>
+        </p:style>
+        <p:txBody>
+          <a:bodyPr rtlCol="0" anchor="ctr"/>
+          <a:lstStyle/>
+          <a:p>
+            <a:pPr algn="ctr"/>
+          </a:p>
+        </p:txBody>
+      </p:sp>
+      <p:sp>
+        <p:nvSpPr>
+          <p:cNvPr id="29" name="TextBox 28"/>
+          <p:cNvSpPr txBox="1"/>
+          <p:nvPr/>
+        </p:nvSpPr>
+        <p:spPr>
+          <a:xfrm>
+            <a:off x="822960" y="4956048"/>
+            <a:ext cx="1920240" cy="274320"/>
+          </a:xfrm>
+          <a:prstGeom prst="rect">
+            <a:avLst/>
+          </a:prstGeom>
+          <a:noFill/>
+        </p:spPr>
+        <p:txBody>
+          <a:bodyPr wrap="square" anchor="t" lIns="0" rIns="0" tIns="0" bIns="0">
+            <a:spAutoFit/>
+          </a:bodyPr>
+          <a:lstStyle/>
+          <a:p>
+            <a:pPr algn="l">
+              <a:spcAft>
+                <a:spcPts val="0"/>
+              </a:spcAft>
+            </a:pPr>
+            <a:r>
+              <a:rPr sz="1100" b="1">
+                <a:solidFill>
+                  <a:srgbClr val="1A1A1A"/>
+                </a:solidFill>
+                <a:latin typeface="Segoe UI"/>
+              </a:rPr>
+              <a:t>Model</a:t>
+            </a:r>
+          </a:p>
+        </p:txBody>
+      </p:sp>
+      <p:sp>
+        <p:nvSpPr>
+          <p:cNvPr id="30" name="TextBox 29"/>
+          <p:cNvSpPr txBox="1"/>
+          <p:nvPr/>
+        </p:nvSpPr>
+        <p:spPr>
+          <a:xfrm>
+            <a:off x="2788920" y="4956048"/>
+            <a:ext cx="4114800" cy="274320"/>
+          </a:xfrm>
+          <a:prstGeom prst="rect">
+            <a:avLst/>
+          </a:prstGeom>
+          <a:noFill/>
+        </p:spPr>
+        <p:txBody>
+          <a:bodyPr wrap="square" anchor="t" lIns="0" rIns="0" tIns="0" bIns="0">
+            <a:spAutoFit/>
+          </a:bodyPr>
+          <a:lstStyle/>
+          <a:p>
+            <a:pPr algn="l">
+              <a:spcAft>
+                <a:spcPts val="0"/>
+              </a:spcAft>
+            </a:pPr>
+            <a:r>
+              <a:rPr sz="1050" b="0">
+                <a:solidFill>
+                  <a:srgbClr val="6B6B6B"/>
+                </a:solidFill>
+                <a:latin typeface="Segoe UI"/>
+              </a:rPr>
+              <a:t>vendor function-calling required</a:t>
+            </a:r>
+          </a:p>
+        </p:txBody>
+      </p:sp>
+      <p:sp>
+        <p:nvSpPr>
+          <p:cNvPr id="31" name="TextBox 30"/>
+          <p:cNvSpPr txBox="1"/>
+          <p:nvPr/>
+        </p:nvSpPr>
+        <p:spPr>
+          <a:xfrm>
+            <a:off x="7086600" y="4956048"/>
+            <a:ext cx="4297680" cy="274320"/>
+          </a:xfrm>
+          <a:prstGeom prst="rect">
+            <a:avLst/>
+          </a:prstGeom>
+          <a:noFill/>
+        </p:spPr>
+        <p:txBody>
+          <a:bodyPr wrap="square" anchor="t" lIns="0" rIns="0" tIns="0" bIns="0">
+            <a:spAutoFit/>
+          </a:bodyPr>
+          <a:lstStyle/>
+          <a:p>
+            <a:pPr algn="l">
+              <a:spcAft>
+                <a:spcPts val="0"/>
+              </a:spcAft>
+            </a:pPr>
+            <a:r>
+              <a:rPr sz="1050" b="0">
+                <a:solidFill>
+                  <a:srgbClr val="1A1A1A"/>
+                </a:solidFill>
+                <a:latin typeface="Segoe UI"/>
+              </a:rPr>
+              <a:t>plain-text ReAct — any model drives it</a:t>
+            </a:r>
+          </a:p>
+        </p:txBody>
+      </p:sp>
+      <p:sp>
+        <p:nvSpPr>
+          <p:cNvPr id="32" name="Rectangle 31"/>
+          <p:cNvSpPr/>
+          <p:nvPr/>
+        </p:nvSpPr>
+        <p:spPr>
+          <a:xfrm>
+            <a:off x="685800" y="5404104"/>
+            <a:ext cx="10853928" cy="548640"/>
+          </a:xfrm>
+          <a:prstGeom prst="rect">
+            <a:avLst/>
+          </a:prstGeom>
+          <a:solidFill>
+            <a:srgbClr val="F7F7F7"/>
+          </a:solidFill>
+          <a:ln>
+            <a:noFill/>
+          </a:ln>
+          <a:effectLst/>
+        </p:spPr>
+        <p:style>
+          <a:lnRef idx="1">
+            <a:schemeClr val="accent1"/>
+          </a:lnRef>
+          <a:fillRef idx="3">
+            <a:schemeClr val="accent1"/>
+          </a:fillRef>
+          <a:effectRef idx="2">
+            <a:schemeClr val="accent1"/>
+          </a:effectRef>
+          <a:fontRef idx="minor">
+            <a:schemeClr val="lt1"/>
+          </a:fontRef>
+        </p:style>
+        <p:txBody>
+          <a:bodyPr rtlCol="0" anchor="ctr"/>
+          <a:lstStyle/>
+          <a:p>
+            <a:pPr algn="ctr"/>
+          </a:p>
+        </p:txBody>
+      </p:sp>
+      <p:sp>
+        <p:nvSpPr>
+          <p:cNvPr id="33" name="TextBox 32"/>
+          <p:cNvSpPr txBox="1"/>
+          <p:nvPr/>
+        </p:nvSpPr>
+        <p:spPr>
+          <a:xfrm>
+            <a:off x="822960" y="5559552"/>
+            <a:ext cx="1920240" cy="274320"/>
+          </a:xfrm>
+          <a:prstGeom prst="rect">
+            <a:avLst/>
+          </a:prstGeom>
+          <a:noFill/>
+        </p:spPr>
+        <p:txBody>
+          <a:bodyPr wrap="square" anchor="t" lIns="0" rIns="0" tIns="0" bIns="0">
+            <a:spAutoFit/>
+          </a:bodyPr>
+          <a:lstStyle/>
+          <a:p>
+            <a:pPr algn="l">
+              <a:spcAft>
+                <a:spcPts val="0"/>
+              </a:spcAft>
+            </a:pPr>
+            <a:r>
+              <a:rPr sz="1100" b="1">
+                <a:solidFill>
+                  <a:srgbClr val="1A1A1A"/>
+                </a:solidFill>
+                <a:latin typeface="Segoe UI"/>
+              </a:rPr>
+              <a:t>Telemetry</a:t>
+            </a:r>
+          </a:p>
+        </p:txBody>
+      </p:sp>
+      <p:sp>
+        <p:nvSpPr>
+          <p:cNvPr id="34" name="TextBox 33"/>
+          <p:cNvSpPr txBox="1"/>
+          <p:nvPr/>
+        </p:nvSpPr>
+        <p:spPr>
+          <a:xfrm>
+            <a:off x="2788920" y="5559552"/>
+            <a:ext cx="4114800" cy="274320"/>
+          </a:xfrm>
+          <a:prstGeom prst="rect">
+            <a:avLst/>
+          </a:prstGeom>
+          <a:noFill/>
+        </p:spPr>
+        <p:txBody>
+          <a:bodyPr wrap="square" anchor="t" lIns="0" rIns="0" tIns="0" bIns="0">
+            <a:spAutoFit/>
+          </a:bodyPr>
+          <a:lstStyle/>
+          <a:p>
+            <a:pPr algn="l">
+              <a:spcAft>
+                <a:spcPts val="0"/>
+              </a:spcAft>
+            </a:pPr>
+            <a:r>
+              <a:rPr sz="1050" b="0">
+                <a:solidFill>
+                  <a:srgbClr val="6B6B6B"/>
+                </a:solidFill>
+                <a:latin typeface="Segoe UI"/>
+              </a:rPr>
+              <a:t>usually on by default</a:t>
+            </a:r>
+          </a:p>
+        </p:txBody>
+      </p:sp>
+      <p:sp>
+        <p:nvSpPr>
+          <p:cNvPr id="35" name="TextBox 34"/>
+          <p:cNvSpPr txBox="1"/>
+          <p:nvPr/>
+        </p:nvSpPr>
+        <p:spPr>
+          <a:xfrm>
+            <a:off x="7086600" y="5559552"/>
+            <a:ext cx="4297680" cy="274320"/>
+          </a:xfrm>
+          <a:prstGeom prst="rect">
+            <a:avLst/>
+          </a:prstGeom>
+          <a:noFill/>
+        </p:spPr>
+        <p:txBody>
+          <a:bodyPr wrap="square" anchor="t" lIns="0" rIns="0" tIns="0" bIns="0">
+            <a:spAutoFit/>
+          </a:bodyPr>
+          <a:lstStyle/>
+          <a:p>
+            <a:pPr algn="l">
+              <a:spcAft>
+                <a:spcPts val="0"/>
+              </a:spcAft>
+            </a:pPr>
+            <a:r>
+              <a:rPr sz="1050" b="0">
+                <a:solidFill>
+                  <a:srgbClr val="1A1A1A"/>
+                </a:solidFill>
+                <a:latin typeface="Segoe UI"/>
+              </a:rPr>
+              <a:t>none, and none in the lock</a:t>
             </a:r>
           </a:p>
         </p:txBody>
@@ -18347,14 +18915,53 @@
                 </a:solidFill>
                 <a:latin typeface="Segoe UI"/>
               </a:rPr>
-              <a:t>In one slide</a:t>
-            </a:r>
-          </a:p>
-        </p:txBody>
-      </p:sp>
-      <p:sp>
-        <p:nvSpPr>
-          <p:cNvPr id="3" name="Rectangle 2"/>
+              <a:t>How to deploy it</a:t>
+            </a:r>
+          </a:p>
+        </p:txBody>
+      </p:sp>
+      <p:sp>
+        <p:nvSpPr>
+          <p:cNvPr id="3" name="TextBox 2"/>
+          <p:cNvSpPr txBox="1"/>
+          <p:nvPr/>
+        </p:nvSpPr>
+        <p:spPr>
+          <a:xfrm>
+            <a:off x="548640" y="841248"/>
+            <a:ext cx="11155680" cy="292608"/>
+          </a:xfrm>
+          <a:prstGeom prst="rect">
+            <a:avLst/>
+          </a:prstGeom>
+          <a:noFill/>
+        </p:spPr>
+        <p:txBody>
+          <a:bodyPr wrap="square" anchor="t" lIns="0" rIns="0" tIns="0" bIns="0">
+            <a:spAutoFit/>
+          </a:bodyPr>
+          <a:lstStyle/>
+          <a:p>
+            <a:pPr algn="l">
+              <a:spcAft>
+                <a:spcPts val="0"/>
+              </a:spcAft>
+            </a:pPr>
+            <a:r>
+              <a:rPr sz="1250" b="0">
+                <a:solidFill>
+                  <a:srgbClr val="6B6B6B"/>
+                </a:solidFill>
+                <a:latin typeface="Segoe UI"/>
+              </a:rPr>
+              <a:t>Zero-Docker is a first-class mode, not a degraded one.</a:t>
+            </a:r>
+          </a:p>
+        </p:txBody>
+      </p:sp>
+      <p:sp>
+        <p:nvSpPr>
+          <p:cNvPr id="4" name="Rectangle 3"/>
           <p:cNvSpPr/>
           <p:nvPr/>
         </p:nvSpPr>
@@ -18398,7 +19005,46 @@
       </p:sp>
       <p:sp>
         <p:nvSpPr>
-          <p:cNvPr id="4" name="TextBox 3"/>
+          <p:cNvPr id="5" name="TextBox 4"/>
+          <p:cNvSpPr txBox="1"/>
+          <p:nvPr/>
+        </p:nvSpPr>
+        <p:spPr>
+          <a:xfrm>
+            <a:off x="548640" y="6327648"/>
+            <a:ext cx="9692640" cy="320040"/>
+          </a:xfrm>
+          <a:prstGeom prst="rect">
+            <a:avLst/>
+          </a:prstGeom>
+          <a:noFill/>
+        </p:spPr>
+        <p:txBody>
+          <a:bodyPr wrap="square" anchor="t" lIns="0" rIns="0" tIns="0" bIns="0">
+            <a:spAutoFit/>
+          </a:bodyPr>
+          <a:lstStyle/>
+          <a:p>
+            <a:pPr algn="l">
+              <a:spcAft>
+                <a:spcPts val="0"/>
+              </a:spcAft>
+            </a:pPr>
+            <a:r>
+              <a:rPr sz="950" b="0">
+                <a:solidFill>
+                  <a:srgbClr val="6B6B6B"/>
+                </a:solidFill>
+                <a:latin typeface="Segoe UI"/>
+              </a:rPr>
+              <a:t>One service, one port, one folder of state. Moving a machine is copying ~/.aiforge/.</a:t>
+            </a:r>
+          </a:p>
+        </p:txBody>
+      </p:sp>
+      <p:sp>
+        <p:nvSpPr>
+          <p:cNvPr id="6" name="TextBox 5"/>
           <p:cNvSpPr txBox="1"/>
           <p:nvPr/>
         </p:nvSpPr>
@@ -18431,6 +19077,593 @@
                 <a:latin typeface="Segoe UI"/>
               </a:rPr>
               <a:t>19</a:t>
+            </a:r>
+          </a:p>
+        </p:txBody>
+      </p:sp>
+      <p:sp>
+        <p:nvSpPr>
+          <p:cNvPr id="7" name="Rounded Rectangle 6"/>
+          <p:cNvSpPr/>
+          <p:nvPr/>
+        </p:nvSpPr>
+        <p:spPr>
+          <a:xfrm>
+            <a:off x="685800" y="1554480"/>
+            <a:ext cx="3383280" cy="1737360"/>
+          </a:xfrm>
+          <a:prstGeom prst="roundRect">
+            <a:avLst>
+              <a:gd name="adj" fmla="val 10000"/>
+            </a:avLst>
+          </a:prstGeom>
+          <a:solidFill>
+            <a:srgbClr val="DCEEE7"/>
+          </a:solidFill>
+          <a:ln w="12700">
+            <a:solidFill>
+              <a:srgbClr val="1E6B52"/>
+            </a:solidFill>
+          </a:ln>
+          <a:effectLst/>
+        </p:spPr>
+        <p:style>
+          <a:lnRef idx="1">
+            <a:schemeClr val="accent1"/>
+          </a:lnRef>
+          <a:fillRef idx="3">
+            <a:schemeClr val="accent1"/>
+          </a:fillRef>
+          <a:effectRef idx="2">
+            <a:schemeClr val="accent1"/>
+          </a:effectRef>
+          <a:fontRef idx="minor">
+            <a:schemeClr val="lt1"/>
+          </a:fontRef>
+        </p:style>
+        <p:txBody>
+          <a:bodyPr rtlCol="0" anchor="ctr" wrap="square" lIns="54864" rIns="54864" tIns="27432" bIns="27432"/>
+          <a:lstStyle/>
+          <a:p>
+            <a:pPr algn="ctr"/>
+            <a:r>
+              <a:rPr sz="1700" b="1">
+                <a:solidFill>
+                  <a:srgbClr val="1E6B52"/>
+                </a:solidFill>
+                <a:latin typeface="Segoe UI"/>
+              </a:rPr>
+              <a:t>Laptop</a:t>
+            </a:r>
+          </a:p>
+          <a:p>
+            <a:pPr algn="ctr"/>
+          </a:p>
+          <a:p>
+            <a:pPr algn="ctr"/>
+            <a:r>
+              <a:rPr sz="1050" b="0">
+                <a:solidFill>
+                  <a:srgbClr val="1A1A1A"/>
+                </a:solidFill>
+                <a:latin typeface="Segoe UI"/>
+              </a:rPr>
+              <a:t>./run.sh</a:t>
+            </a:r>
+          </a:p>
+          <a:p>
+            <a:pPr algn="ctr"/>
+          </a:p>
+          <a:p>
+            <a:pPr algn="ctr"/>
+            <a:r>
+              <a:rPr sz="1050" b="0">
+                <a:solidFill>
+                  <a:srgbClr val="1A1A1A"/>
+                </a:solidFill>
+                <a:latin typeface="Segoe UI"/>
+              </a:rPr>
+              <a:t>everything local</a:t>
+            </a:r>
+          </a:p>
+          <a:p>
+            <a:pPr algn="ctr"/>
+            <a:r>
+              <a:rPr sz="1050" b="0">
+                <a:solidFill>
+                  <a:srgbClr val="1A1A1A"/>
+                </a:solidFill>
+                <a:latin typeface="Segoe UI"/>
+              </a:rPr>
+              <a:t>unset admin URL = you are the admin</a:t>
+            </a:r>
+          </a:p>
+        </p:txBody>
+      </p:sp>
+      <p:sp>
+        <p:nvSpPr>
+          <p:cNvPr id="8" name="Rounded Rectangle 7"/>
+          <p:cNvSpPr/>
+          <p:nvPr/>
+        </p:nvSpPr>
+        <p:spPr>
+          <a:xfrm>
+            <a:off x="4361687" y="1554480"/>
+            <a:ext cx="3383280" cy="1737360"/>
+          </a:xfrm>
+          <a:prstGeom prst="roundRect">
+            <a:avLst>
+              <a:gd name="adj" fmla="val 10000"/>
+            </a:avLst>
+          </a:prstGeom>
+          <a:solidFill>
+            <a:srgbClr val="DCE7F2"/>
+          </a:solidFill>
+          <a:ln w="12700">
+            <a:solidFill>
+              <a:srgbClr val="1F4E79"/>
+            </a:solidFill>
+          </a:ln>
+          <a:effectLst/>
+        </p:spPr>
+        <p:style>
+          <a:lnRef idx="1">
+            <a:schemeClr val="accent1"/>
+          </a:lnRef>
+          <a:fillRef idx="3">
+            <a:schemeClr val="accent1"/>
+          </a:fillRef>
+          <a:effectRef idx="2">
+            <a:schemeClr val="accent1"/>
+          </a:effectRef>
+          <a:fontRef idx="minor">
+            <a:schemeClr val="lt1"/>
+          </a:fontRef>
+        </p:style>
+        <p:txBody>
+          <a:bodyPr rtlCol="0" anchor="ctr" wrap="square" lIns="54864" rIns="54864" tIns="27432" bIns="27432"/>
+          <a:lstStyle/>
+          <a:p>
+            <a:pPr algn="ctr"/>
+            <a:r>
+              <a:rPr sz="1700" b="1">
+                <a:solidFill>
+                  <a:srgbClr val="1F4E79"/>
+                </a:solidFill>
+                <a:latin typeface="Segoe UI"/>
+              </a:rPr>
+              <a:t>NUC / server</a:t>
+            </a:r>
+          </a:p>
+          <a:p>
+            <a:pPr algn="ctr"/>
+          </a:p>
+          <a:p>
+            <a:pPr algn="ctr"/>
+            <a:r>
+              <a:rPr sz="1050" b="0">
+                <a:solidFill>
+                  <a:srgbClr val="1A1A1A"/>
+                </a:solidFill>
+                <a:latin typeface="Segoe UI"/>
+              </a:rPr>
+              <a:t>systemd user unit</a:t>
+            </a:r>
+          </a:p>
+          <a:p>
+            <a:pPr algn="ctr"/>
+          </a:p>
+          <a:p>
+            <a:pPr algn="ctr"/>
+            <a:r>
+              <a:rPr sz="1050" b="0">
+                <a:solidFill>
+                  <a:srgbClr val="1A1A1A"/>
+                </a:solidFill>
+                <a:latin typeface="Segoe UI"/>
+              </a:rPr>
+              <a:t>always-on admin hub</a:t>
+            </a:r>
+          </a:p>
+          <a:p>
+            <a:pPr algn="ctr"/>
+            <a:r>
+              <a:rPr sz="1050" b="0">
+                <a:solidFill>
+                  <a:srgbClr val="1A1A1A"/>
+                </a:solidFill>
+                <a:latin typeface="Segoe UI"/>
+              </a:rPr>
+              <a:t>spokes sync to it</a:t>
+            </a:r>
+          </a:p>
+        </p:txBody>
+      </p:sp>
+      <p:sp>
+        <p:nvSpPr>
+          <p:cNvPr id="9" name="Rounded Rectangle 8"/>
+          <p:cNvSpPr/>
+          <p:nvPr/>
+        </p:nvSpPr>
+        <p:spPr>
+          <a:xfrm>
+            <a:off x="8037574" y="1554480"/>
+            <a:ext cx="3383280" cy="1737360"/>
+          </a:xfrm>
+          <a:prstGeom prst="roundRect">
+            <a:avLst>
+              <a:gd name="adj" fmla="val 10000"/>
+            </a:avLst>
+          </a:prstGeom>
+          <a:solidFill>
+            <a:srgbClr val="EAE1F0"/>
+          </a:solidFill>
+          <a:ln w="12700">
+            <a:solidFill>
+              <a:srgbClr val="5B3A6E"/>
+            </a:solidFill>
+          </a:ln>
+          <a:effectLst/>
+        </p:spPr>
+        <p:style>
+          <a:lnRef idx="1">
+            <a:schemeClr val="accent1"/>
+          </a:lnRef>
+          <a:fillRef idx="3">
+            <a:schemeClr val="accent1"/>
+          </a:fillRef>
+          <a:effectRef idx="2">
+            <a:schemeClr val="accent1"/>
+          </a:effectRef>
+          <a:fontRef idx="minor">
+            <a:schemeClr val="lt1"/>
+          </a:fontRef>
+        </p:style>
+        <p:txBody>
+          <a:bodyPr rtlCol="0" anchor="ctr" wrap="square" lIns="54864" rIns="54864" tIns="27432" bIns="27432"/>
+          <a:lstStyle/>
+          <a:p>
+            <a:pPr algn="ctr"/>
+            <a:r>
+              <a:rPr sz="1700" b="1">
+                <a:solidFill>
+                  <a:srgbClr val="5B3A6E"/>
+                </a:solidFill>
+                <a:latin typeface="Segoe UI"/>
+              </a:rPr>
+              <a:t>Container</a:t>
+            </a:r>
+          </a:p>
+          <a:p>
+            <a:pPr algn="ctr"/>
+          </a:p>
+          <a:p>
+            <a:pPr algn="ctr"/>
+            <a:r>
+              <a:rPr sz="1050" b="0">
+                <a:solidFill>
+                  <a:srgbClr val="1A1A1A"/>
+                </a:solidFill>
+                <a:latin typeface="Segoe UI"/>
+              </a:rPr>
+              <a:t>docker compose</a:t>
+            </a:r>
+          </a:p>
+          <a:p>
+            <a:pPr algn="ctr"/>
+          </a:p>
+          <a:p>
+            <a:pPr algn="ctr"/>
+            <a:r>
+              <a:rPr sz="1050" b="0">
+                <a:solidFill>
+                  <a:srgbClr val="1A1A1A"/>
+                </a:solidFill>
+                <a:latin typeface="Segoe UI"/>
+              </a:rPr>
+              <a:t>for untrusted work</a:t>
+            </a:r>
+          </a:p>
+          <a:p>
+            <a:pPr algn="ctr"/>
+            <a:r>
+              <a:rPr sz="1050" b="0">
+                <a:solidFill>
+                  <a:srgbClr val="1A1A1A"/>
+                </a:solidFill>
+                <a:latin typeface="Segoe UI"/>
+              </a:rPr>
+              <a:t>the jail you actually want</a:t>
+            </a:r>
+          </a:p>
+        </p:txBody>
+      </p:sp>
+      <p:sp>
+        <p:nvSpPr>
+          <p:cNvPr id="10" name="Rounded Rectangle 9"/>
+          <p:cNvSpPr/>
+          <p:nvPr/>
+        </p:nvSpPr>
+        <p:spPr>
+          <a:xfrm>
+            <a:off x="685800" y="3611880"/>
+            <a:ext cx="10835640" cy="566928"/>
+          </a:xfrm>
+          <a:prstGeom prst="roundRect">
+            <a:avLst>
+              <a:gd name="adj" fmla="val 10000"/>
+            </a:avLst>
+          </a:prstGeom>
+          <a:solidFill>
+            <a:srgbClr val="FFFFFF"/>
+          </a:solidFill>
+          <a:ln w="12700">
+            <a:solidFill>
+              <a:srgbClr val="C9C9C9"/>
+            </a:solidFill>
+          </a:ln>
+          <a:effectLst/>
+        </p:spPr>
+        <p:style>
+          <a:lnRef idx="1">
+            <a:schemeClr val="accent1"/>
+          </a:lnRef>
+          <a:fillRef idx="3">
+            <a:schemeClr val="accent1"/>
+          </a:fillRef>
+          <a:effectRef idx="2">
+            <a:schemeClr val="accent1"/>
+          </a:effectRef>
+          <a:fontRef idx="minor">
+            <a:schemeClr val="lt1"/>
+          </a:fontRef>
+        </p:style>
+        <p:txBody>
+          <a:bodyPr rtlCol="0" anchor="ctr" wrap="square" lIns="54864" rIns="54864" tIns="27432" bIns="27432"/>
+          <a:lstStyle/>
+          <a:p>
+            <a:pPr algn="ctr"/>
+            <a:r>
+              <a:rPr sz="1300" b="1">
+                <a:solidFill>
+                  <a:srgbClr val="1A1A1A"/>
+                </a:solidFill>
+                <a:latin typeface="Segoe UI"/>
+              </a:rPr>
+              <a:t>Requires</a:t>
+            </a:r>
+          </a:p>
+          <a:p>
+            <a:pPr algn="ctr"/>
+            <a:r>
+              <a:rPr sz="1050" b="0">
+                <a:solidFill>
+                  <a:srgbClr val="1A1A1A"/>
+                </a:solidFill>
+                <a:latin typeface="Segoe UI"/>
+              </a:rPr>
+              <a:t>Python 3.12  ·  one OpenAI-compatible endpoint  ·  no GPU, no torch, no Postgres, no Neo4j</a:t>
+            </a:r>
+          </a:p>
+        </p:txBody>
+      </p:sp>
+      <p:sp>
+        <p:nvSpPr>
+          <p:cNvPr id="11" name="Rounded Rectangle 10"/>
+          <p:cNvSpPr/>
+          <p:nvPr/>
+        </p:nvSpPr>
+        <p:spPr>
+          <a:xfrm>
+            <a:off x="685800" y="4389120"/>
+            <a:ext cx="10835640" cy="1234440"/>
+          </a:xfrm>
+          <a:prstGeom prst="roundRect">
+            <a:avLst>
+              <a:gd name="adj" fmla="val 10000"/>
+            </a:avLst>
+          </a:prstGeom>
+          <a:solidFill>
+            <a:srgbClr val="ECECEC"/>
+          </a:solidFill>
+          <a:ln w="12700">
+            <a:solidFill>
+              <a:srgbClr val="3A3A3A"/>
+            </a:solidFill>
+          </a:ln>
+          <a:effectLst/>
+        </p:spPr>
+        <p:style>
+          <a:lnRef idx="1">
+            <a:schemeClr val="accent1"/>
+          </a:lnRef>
+          <a:fillRef idx="3">
+            <a:schemeClr val="accent1"/>
+          </a:fillRef>
+          <a:effectRef idx="2">
+            <a:schemeClr val="accent1"/>
+          </a:effectRef>
+          <a:fontRef idx="minor">
+            <a:schemeClr val="lt1"/>
+          </a:fontRef>
+        </p:style>
+        <p:txBody>
+          <a:bodyPr rtlCol="0" anchor="ctr" wrap="square" lIns="54864" rIns="54864" tIns="27432" bIns="27432"/>
+          <a:lstStyle/>
+          <a:p>
+            <a:pPr algn="ctr"/>
+            <a:r>
+              <a:rPr sz="1300" b="1">
+                <a:solidFill>
+                  <a:srgbClr val="3A3A3A"/>
+                </a:solidFill>
+                <a:latin typeface="Segoe UI"/>
+              </a:rPr>
+              <a:t>Kept honest</a:t>
+            </a:r>
+          </a:p>
+          <a:p>
+            <a:pPr algn="ctr"/>
+            <a:r>
+              <a:rPr sz="1050" b="0">
+                <a:solidFill>
+                  <a:srgbClr val="1A1A1A"/>
+                </a:solidFill>
+                <a:latin typeface="Segoe UI"/>
+              </a:rPr>
+              <a:t>~4,000 tests, 0 failing  ·  86% line coverage  ·  Sonar 0 bugs, every function under cognitive complexity 15</a:t>
+            </a:r>
+          </a:p>
+          <a:p>
+            <a:pPr algn="ctr"/>
+            <a:r>
+              <a:rPr sz="1050" b="0">
+                <a:solidFill>
+                  <a:srgbClr val="1A1A1A"/>
+                </a:solidFill>
+                <a:latin typeface="Segoe UI"/>
+              </a:rPr>
+              <a:t>chat and pipeline tool registries are parity-tested  ·  uv.lock pinned and shipped  ·  CycloneDX SBOM in CI</a:t>
+            </a:r>
+          </a:p>
+        </p:txBody>
+      </p:sp>
+    </p:spTree>
+  </p:cSld>
+  <p:clrMapOvr>
+    <a:masterClrMapping/>
+  </p:clrMapOvr>
+</p:sld>
+</file>
+
+<file path=ppt/slides/slide21.xml><?xml version="1.0" encoding="utf-8"?>
+<p:sld xmlns:a="http://schemas.openxmlformats.org/drawingml/2006/main" xmlns:p="http://schemas.openxmlformats.org/presentationml/2006/main" xmlns:r="http://schemas.openxmlformats.org/officeDocument/2006/relationships">
+  <p:cSld>
+    <p:spTree>
+      <p:nvGrpSpPr>
+        <p:cNvPr id="1" name=""/>
+        <p:cNvGrpSpPr/>
+        <p:nvPr/>
+      </p:nvGrpSpPr>
+      <p:grpSpPr/>
+      <p:sp>
+        <p:nvSpPr>
+          <p:cNvPr id="2" name="TextBox 1"/>
+          <p:cNvSpPr txBox="1"/>
+          <p:nvPr/>
+        </p:nvSpPr>
+        <p:spPr>
+          <a:xfrm>
+            <a:off x="548640" y="310896"/>
+            <a:ext cx="11155680" cy="457200"/>
+          </a:xfrm>
+          <a:prstGeom prst="rect">
+            <a:avLst/>
+          </a:prstGeom>
+          <a:noFill/>
+        </p:spPr>
+        <p:txBody>
+          <a:bodyPr wrap="square" anchor="t" lIns="0" rIns="0" tIns="0" bIns="0">
+            <a:spAutoFit/>
+          </a:bodyPr>
+          <a:lstStyle/>
+          <a:p>
+            <a:pPr algn="l">
+              <a:spcAft>
+                <a:spcPts val="0"/>
+              </a:spcAft>
+            </a:pPr>
+            <a:r>
+              <a:rPr sz="2700" b="1">
+                <a:solidFill>
+                  <a:srgbClr val="1A1A1A"/>
+                </a:solidFill>
+                <a:latin typeface="Segoe UI"/>
+              </a:rPr>
+              <a:t>In one slide</a:t>
+            </a:r>
+          </a:p>
+        </p:txBody>
+      </p:sp>
+      <p:sp>
+        <p:nvSpPr>
+          <p:cNvPr id="3" name="Rectangle 2"/>
+          <p:cNvSpPr/>
+          <p:nvPr/>
+        </p:nvSpPr>
+        <p:spPr>
+          <a:xfrm>
+            <a:off x="548640" y="1170432"/>
+            <a:ext cx="11091672" cy="9525"/>
+          </a:xfrm>
+          <a:prstGeom prst="rect">
+            <a:avLst/>
+          </a:prstGeom>
+          <a:solidFill>
+            <a:srgbClr val="C9C9C9"/>
+          </a:solidFill>
+          <a:ln>
+            <a:noFill/>
+          </a:ln>
+          <a:effectLst/>
+        </p:spPr>
+        <p:style>
+          <a:lnRef idx="1">
+            <a:schemeClr val="accent1"/>
+          </a:lnRef>
+          <a:fillRef idx="3">
+            <a:schemeClr val="accent1"/>
+          </a:fillRef>
+          <a:effectRef idx="2">
+            <a:schemeClr val="accent1"/>
+          </a:effectRef>
+          <a:fontRef idx="minor">
+            <a:schemeClr val="lt1"/>
+          </a:fontRef>
+        </p:style>
+        <p:txBody>
+          <a:bodyPr rtlCol="0" anchor="ctr"/>
+          <a:lstStyle/>
+          <a:p>
+            <a:pPr algn="ctr"/>
+          </a:p>
+        </p:txBody>
+      </p:sp>
+      <p:sp>
+        <p:nvSpPr>
+          <p:cNvPr id="4" name="TextBox 3"/>
+          <p:cNvSpPr txBox="1"/>
+          <p:nvPr/>
+        </p:nvSpPr>
+        <p:spPr>
+          <a:xfrm>
+            <a:off x="11018520" y="6327648"/>
+            <a:ext cx="640080" cy="274320"/>
+          </a:xfrm>
+          <a:prstGeom prst="rect">
+            <a:avLst/>
+          </a:prstGeom>
+          <a:noFill/>
+        </p:spPr>
+        <p:txBody>
+          <a:bodyPr wrap="square" anchor="t" lIns="0" rIns="0" tIns="0" bIns="0">
+            <a:spAutoFit/>
+          </a:bodyPr>
+          <a:lstStyle/>
+          <a:p>
+            <a:pPr algn="r">
+              <a:spcAft>
+                <a:spcPts val="0"/>
+              </a:spcAft>
+            </a:pPr>
+            <a:r>
+              <a:rPr sz="950" b="0">
+                <a:solidFill>
+                  <a:srgbClr val="6B6B6B"/>
+                </a:solidFill>
+                <a:latin typeface="Segoe UI"/>
+              </a:rPr>
+              <a:t>20</a:t>
             </a:r>
           </a:p>
         </p:txBody>

--- a/docs/AIForgeCrew-Overview.pptx
+++ b/docs/AIForgeCrew-Overview.pptx
@@ -10538,7 +10538,7 @@
                 </a:solidFill>
                 <a:latin typeface="Segoe UI"/>
               </a:rPr>
-              <a:t>Tool access: who may call what</a:t>
+              <a:t>Five ways an agent goes wrong</a:t>
             </a:r>
           </a:p>
         </p:txBody>
@@ -10577,7 +10577,7 @@
                 </a:solidFill>
                 <a:latin typeface="Segoe UI"/>
               </a:rPr>
-              <a:t>A role does not merely refrain from a tool — it never receives the schema.</a:t>
+              <a:t>One control each. Every one of them is a refusal, not a warning.</a:t>
             </a:r>
           </a:p>
         </p:txBody>
@@ -10660,7 +10660,7 @@
                 </a:solidFill>
                 <a:latin typeface="Segoe UI"/>
               </a:rPr>
-              <a:t>Names are matched verbatim against the function name. Master opt-out: AIFORGE_TOOL_ENFORCE=0.</a:t>
+              <a:t>Detail on the next slide. Switches: AIFORGE_TOOL_POLICY · AIFORGE_UNATTENDED_DANGEROUS · AIFORGE_SANDBOX_REQUIRED · AIFORGE_EGRESS_OFF</a:t>
             </a:r>
           </a:p>
         </p:txBody>
@@ -10706,53 +10706,14 @@
       </p:sp>
       <p:sp>
         <p:nvSpPr>
-          <p:cNvPr id="7" name="TextBox 6"/>
-          <p:cNvSpPr txBox="1"/>
-          <p:nvPr/>
-        </p:nvSpPr>
-        <p:spPr>
-          <a:xfrm>
-            <a:off x="685800" y="1298448"/>
-            <a:ext cx="5486400" cy="219456"/>
-          </a:xfrm>
-          <a:prstGeom prst="rect">
-            <a:avLst/>
-          </a:prstGeom>
-          <a:noFill/>
-        </p:spPr>
-        <p:txBody>
-          <a:bodyPr wrap="square" anchor="t" lIns="0" rIns="0" tIns="0" bIns="0">
-            <a:spAutoFit/>
-          </a:bodyPr>
-          <a:lstStyle/>
-          <a:p>
-            <a:pPr algn="l">
-              <a:spcAft>
-                <a:spcPts val="0"/>
-              </a:spcAft>
-            </a:pPr>
-            <a:r>
-              <a:rPr sz="1000" b="1">
-                <a:solidFill>
-                  <a:srgbClr val="1F4E79"/>
-                </a:solidFill>
-                <a:latin typeface="Segoe UI"/>
-              </a:rPr>
-              <a:t>1 · THE LIST IS APPLIED WHERE THE TOOLS ARE WIRED</a:t>
-            </a:r>
-          </a:p>
-        </p:txBody>
-      </p:sp>
-      <p:sp>
-        <p:nvSpPr>
-          <p:cNvPr id="8" name="Rounded Rectangle 7"/>
+          <p:cNvPr id="7" name="Rounded Rectangle 6"/>
           <p:cNvSpPr/>
           <p:nvPr/>
         </p:nvSpPr>
         <p:spPr>
           <a:xfrm>
-            <a:off x="685800" y="1572768"/>
-            <a:ext cx="2468880" cy="914400"/>
+            <a:off x="685800" y="1417320"/>
+            <a:ext cx="3246120" cy="786384"/>
           </a:xfrm>
           <a:prstGeom prst="roundRect">
             <a:avLst>
@@ -10760,11 +10721,11 @@
             </a:avLst>
           </a:prstGeom>
           <a:solidFill>
-            <a:srgbClr val="ECECEC"/>
+            <a:srgbClr val="F7DFDF"/>
           </a:solidFill>
           <a:ln w="12700">
             <a:solidFill>
-              <a:srgbClr val="3A3A3A"/>
+              <a:srgbClr val="8C2F2F"/>
             </a:solidFill>
           </a:ln>
           <a:effectLst/>
@@ -10788,52 +10749,31 @@
           <a:lstStyle/>
           <a:p>
             <a:pPr algn="ctr"/>
-            <a:r>
-              <a:rPr sz="1300" b="1">
-                <a:solidFill>
-                  <a:srgbClr val="3A3A3A"/>
-                </a:solidFill>
-                <a:latin typeface="Segoe UI"/>
-              </a:rPr>
-              <a:t>Tool registry</a:t>
-            </a:r>
-          </a:p>
-          <a:p>
-            <a:pPr algn="ctr"/>
-            <a:r>
-              <a:rPr sz="850" b="0">
+          </a:p>
+          <a:p>
+            <a:pPr algn="ctr"/>
+            <a:r>
+              <a:rPr sz="1150" b="0">
                 <a:solidFill>
                   <a:srgbClr val="1A1A1A"/>
                 </a:solidFill>
                 <a:latin typeface="Segoe UI"/>
               </a:rPr>
-              <a:t>92 ADK tools for the</a:t>
-            </a:r>
-          </a:p>
-          <a:p>
-            <a:pPr algn="ctr"/>
-            <a:r>
-              <a:rPr sz="850" b="0">
-                <a:solidFill>
-                  <a:srgbClr val="1A1A1A"/>
-                </a:solidFill>
-                <a:latin typeface="Segoe UI"/>
-              </a:rPr>
-              <a:t>pipeline · 109 in chat</a:t>
+              <a:t>It calls a tool we never gave it</a:t>
             </a:r>
           </a:p>
         </p:txBody>
       </p:sp>
       <p:cxnSp>
         <p:nvCxnSpPr>
-          <p:cNvPr id="9" name="Connector 8"/>
+          <p:cNvPr id="8" name="Connector 7"/>
           <p:cNvCxnSpPr/>
           <p:nvPr/>
         </p:nvCxnSpPr>
         <p:spPr>
           <a:xfrm>
-            <a:off x="3154680" y="2029968"/>
-            <a:ext cx="365760" cy="0"/>
+            <a:off x="3931920" y="1810512"/>
+            <a:ext cx="292608" cy="0"/>
           </a:xfrm>
           <a:prstGeom prst="line">
             <a:avLst/>
@@ -10862,131 +10802,14 @@
       </p:cxnSp>
       <p:sp>
         <p:nvSpPr>
-          <p:cNvPr id="10" name="Rounded Rectangle 9"/>
+          <p:cNvPr id="9" name="Rounded Rectangle 8"/>
           <p:cNvSpPr/>
           <p:nvPr/>
         </p:nvSpPr>
         <p:spPr>
           <a:xfrm>
-            <a:off x="3520440" y="1572768"/>
-            <a:ext cx="2743200" cy="914400"/>
-          </a:xfrm>
-          <a:prstGeom prst="roundRect">
-            <a:avLst>
-              <a:gd name="adj" fmla="val 10000"/>
-            </a:avLst>
-          </a:prstGeom>
-          <a:solidFill>
-            <a:srgbClr val="DCE7F2"/>
-          </a:solidFill>
-          <a:ln w="12700">
-            <a:solidFill>
-              <a:srgbClr val="1F4E79"/>
-            </a:solidFill>
-          </a:ln>
-          <a:effectLst/>
-        </p:spPr>
-        <p:style>
-          <a:lnRef idx="1">
-            <a:schemeClr val="accent1"/>
-          </a:lnRef>
-          <a:fillRef idx="3">
-            <a:schemeClr val="accent1"/>
-          </a:fillRef>
-          <a:effectRef idx="2">
-            <a:schemeClr val="accent1"/>
-          </a:effectRef>
-          <a:fontRef idx="minor">
-            <a:schemeClr val="lt1"/>
-          </a:fontRef>
-        </p:style>
-        <p:txBody>
-          <a:bodyPr rtlCol="0" anchor="ctr" wrap="square" lIns="54864" rIns="54864" tIns="27432" bIns="27432"/>
-          <a:lstStyle/>
-          <a:p>
-            <a:pPr algn="ctr"/>
-            <a:r>
-              <a:rPr sz="1300" b="1">
-                <a:solidFill>
-                  <a:srgbClr val="1F4E79"/>
-                </a:solidFill>
-                <a:latin typeface="Segoe UI"/>
-              </a:rPr>
-              <a:t>agents.yaml contract</a:t>
-            </a:r>
-          </a:p>
-          <a:p>
-            <a:pPr algn="ctr"/>
-            <a:r>
-              <a:rPr sz="850" b="0">
-                <a:solidFill>
-                  <a:srgbClr val="1A1A1A"/>
-                </a:solidFill>
-                <a:latin typeface="Segoe UI"/>
-              </a:rPr>
-              <a:t>allowed ∩ NOT forbidden, per role</a:t>
-            </a:r>
-          </a:p>
-          <a:p>
-            <a:pPr algn="ctr"/>
-            <a:r>
-              <a:rPr sz="850" b="0">
-                <a:solidFill>
-                  <a:srgbClr val="1A1A1A"/>
-                </a:solidFill>
-                <a:latin typeface="Segoe UI"/>
-              </a:rPr>
-              <a:t>forbidden always wins</a:t>
-            </a:r>
-          </a:p>
-        </p:txBody>
-      </p:sp>
-      <p:cxnSp>
-        <p:nvCxnSpPr>
-          <p:cNvPr id="11" name="Connector 10"/>
-          <p:cNvCxnSpPr/>
-          <p:nvPr/>
-        </p:nvCxnSpPr>
-        <p:spPr>
-          <a:xfrm>
-            <a:off x="6263640" y="2029968"/>
-            <a:ext cx="365760" cy="0"/>
-          </a:xfrm>
-          <a:prstGeom prst="line">
-            <a:avLst/>
-          </a:prstGeom>
-          <a:ln w="19050">
-            <a:solidFill>
-              <a:srgbClr val="C9C9C9"/>
-            </a:solidFill>
-            <a:tailEnd type="triangle" w="med" len="med"/>
-          </a:ln>
-        </p:spPr>
-        <p:style>
-          <a:lnRef idx="2">
-            <a:schemeClr val="accent1"/>
-          </a:lnRef>
-          <a:fillRef idx="0">
-            <a:schemeClr val="accent1"/>
-          </a:fillRef>
-          <a:effectRef idx="1">
-            <a:schemeClr val="accent1"/>
-          </a:effectRef>
-          <a:fontRef idx="minor">
-            <a:schemeClr val="tx1"/>
-          </a:fontRef>
-        </p:style>
-      </p:cxnSp>
-      <p:sp>
-        <p:nvSpPr>
-          <p:cNvPr id="12" name="Rounded Rectangle 11"/>
-          <p:cNvSpPr/>
-          <p:nvPr/>
-        </p:nvSpPr>
-        <p:spPr>
-          <a:xfrm>
-            <a:off x="6629400" y="1572768"/>
-            <a:ext cx="2377440" cy="420624"/>
+            <a:off x="4224528" y="1417320"/>
+            <a:ext cx="3703320" cy="786384"/>
           </a:xfrm>
           <a:prstGeom prst="roundRect">
             <a:avLst>
@@ -11022,30 +10845,156 @@
           <a:lstStyle/>
           <a:p>
             <a:pPr algn="ctr"/>
-            <a:r>
-              <a:rPr sz="1100" b="1">
-                <a:solidFill>
-                  <a:srgbClr val="1E6B52"/>
-                </a:solidFill>
-                <a:latin typeface="Segoe UI"/>
-              </a:rPr>
-              <a:t>doer · 34</a:t>
-            </a:r>
-          </a:p>
-          <a:p>
-            <a:pPr algn="ctr"/>
-            <a:r>
-              <a:rPr sz="750" b="0">
+          </a:p>
+          <a:p>
+            <a:pPr algn="ctr"/>
+            <a:r>
+              <a:rPr sz="1150" b="0">
                 <a:solidFill>
                   <a:srgbClr val="1A1A1A"/>
                 </a:solidFill>
                 <a:latin typeface="Segoe UI"/>
               </a:rPr>
-              <a:t>file + shell surface</a:t>
-            </a:r>
-          </a:p>
-        </p:txBody>
-      </p:sp>
+              <a:t>Per-agent allowlist, applied where tools are wired</a:t>
+            </a:r>
+          </a:p>
+        </p:txBody>
+      </p:sp>
+      <p:sp>
+        <p:nvSpPr>
+          <p:cNvPr id="10" name="TextBox 9"/>
+          <p:cNvSpPr txBox="1"/>
+          <p:nvPr/>
+        </p:nvSpPr>
+        <p:spPr>
+          <a:xfrm>
+            <a:off x="8183879" y="1636776"/>
+            <a:ext cx="3319272" cy="457200"/>
+          </a:xfrm>
+          <a:prstGeom prst="rect">
+            <a:avLst/>
+          </a:prstGeom>
+          <a:noFill/>
+        </p:spPr>
+        <p:txBody>
+          <a:bodyPr wrap="square" anchor="t" lIns="0" rIns="0" tIns="0" bIns="0">
+            <a:spAutoFit/>
+          </a:bodyPr>
+          <a:lstStyle/>
+          <a:p>
+            <a:pPr algn="l">
+              <a:spcAft>
+                <a:spcPts val="0"/>
+              </a:spcAft>
+            </a:pPr>
+            <a:r>
+              <a:rPr sz="1000" b="0">
+                <a:solidFill>
+                  <a:srgbClr val="6B6B6B"/>
+                </a:solidFill>
+                <a:latin typeface="Segoe UI"/>
+              </a:rPr>
+              <a:t>It never receives the schema · 9 of 19 roles get zero tools</a:t>
+            </a:r>
+          </a:p>
+        </p:txBody>
+      </p:sp>
+      <p:sp>
+        <p:nvSpPr>
+          <p:cNvPr id="11" name="Rounded Rectangle 10"/>
+          <p:cNvSpPr/>
+          <p:nvPr/>
+        </p:nvSpPr>
+        <p:spPr>
+          <a:xfrm>
+            <a:off x="685800" y="2350008"/>
+            <a:ext cx="3246120" cy="786384"/>
+          </a:xfrm>
+          <a:prstGeom prst="roundRect">
+            <a:avLst>
+              <a:gd name="adj" fmla="val 10000"/>
+            </a:avLst>
+          </a:prstGeom>
+          <a:solidFill>
+            <a:srgbClr val="F7DFDF"/>
+          </a:solidFill>
+          <a:ln w="12700">
+            <a:solidFill>
+              <a:srgbClr val="8C2F2F"/>
+            </a:solidFill>
+          </a:ln>
+          <a:effectLst/>
+        </p:spPr>
+        <p:style>
+          <a:lnRef idx="1">
+            <a:schemeClr val="accent1"/>
+          </a:lnRef>
+          <a:fillRef idx="3">
+            <a:schemeClr val="accent1"/>
+          </a:fillRef>
+          <a:effectRef idx="2">
+            <a:schemeClr val="accent1"/>
+          </a:effectRef>
+          <a:fontRef idx="minor">
+            <a:schemeClr val="lt1"/>
+          </a:fontRef>
+        </p:style>
+        <p:txBody>
+          <a:bodyPr rtlCol="0" anchor="ctr" wrap="square" lIns="54864" rIns="54864" tIns="27432" bIns="27432"/>
+          <a:lstStyle/>
+          <a:p>
+            <a:pPr algn="ctr"/>
+          </a:p>
+          <a:p>
+            <a:pPr algn="ctr"/>
+            <a:r>
+              <a:rPr sz="1150" b="0">
+                <a:solidFill>
+                  <a:srgbClr val="1A1A1A"/>
+                </a:solidFill>
+                <a:latin typeface="Segoe UI"/>
+              </a:rPr>
+              <a:t>It invents a tool that does not exist</a:t>
+            </a:r>
+          </a:p>
+        </p:txBody>
+      </p:sp>
+      <p:cxnSp>
+        <p:nvCxnSpPr>
+          <p:cNvPr id="12" name="Connector 11"/>
+          <p:cNvCxnSpPr/>
+          <p:nvPr/>
+        </p:nvCxnSpPr>
+        <p:spPr>
+          <a:xfrm>
+            <a:off x="3931920" y="2743200"/>
+            <a:ext cx="292608" cy="0"/>
+          </a:xfrm>
+          <a:prstGeom prst="line">
+            <a:avLst/>
+          </a:prstGeom>
+          <a:ln w="19050">
+            <a:solidFill>
+              <a:srgbClr val="C9C9C9"/>
+            </a:solidFill>
+            <a:tailEnd type="triangle" w="med" len="med"/>
+          </a:ln>
+        </p:spPr>
+        <p:style>
+          <a:lnRef idx="2">
+            <a:schemeClr val="accent1"/>
+          </a:lnRef>
+          <a:fillRef idx="0">
+            <a:schemeClr val="accent1"/>
+          </a:fillRef>
+          <a:effectRef idx="1">
+            <a:schemeClr val="accent1"/>
+          </a:effectRef>
+          <a:fontRef idx="minor">
+            <a:schemeClr val="tx1"/>
+          </a:fontRef>
+        </p:style>
+      </p:cxnSp>
       <p:sp>
         <p:nvSpPr>
           <p:cNvPr id="13" name="Rounded Rectangle 12"/>
@@ -11054,8 +11003,8 @@
         </p:nvSpPr>
         <p:spPr>
           <a:xfrm>
-            <a:off x="9144000" y="1572768"/>
-            <a:ext cx="2377440" cy="420624"/>
+            <a:off x="4224528" y="2350008"/>
+            <a:ext cx="3703320" cy="786384"/>
           </a:xfrm>
           <a:prstGeom prst="roundRect">
             <a:avLst>
@@ -11091,95 +11040,56 @@
           <a:lstStyle/>
           <a:p>
             <a:pPr algn="ctr"/>
-            <a:r>
-              <a:rPr sz="1100" b="1">
-                <a:solidFill>
-                  <a:srgbClr val="1E6B52"/>
-                </a:solidFill>
-                <a:latin typeface="Segoe UI"/>
-              </a:rPr>
-              <a:t>researcher · 18</a:t>
-            </a:r>
-          </a:p>
-          <a:p>
-            <a:pPr algn="ctr"/>
-            <a:r>
-              <a:rPr sz="750" b="0">
+          </a:p>
+          <a:p>
+            <a:pPr algn="ctr"/>
+            <a:r>
+              <a:rPr sz="1150" b="0">
                 <a:solidFill>
                   <a:srgbClr val="1A1A1A"/>
                 </a:solidFill>
                 <a:latin typeface="Segoe UI"/>
               </a:rPr>
-              <a:t>+ web_read, role-only</a:t>
-            </a:r>
-          </a:p>
-        </p:txBody>
-      </p:sp>
-      <p:sp>
-        <p:nvSpPr>
-          <p:cNvPr id="14" name="Rounded Rectangle 13"/>
-          <p:cNvSpPr/>
-          <p:nvPr/>
-        </p:nvSpPr>
-        <p:spPr>
-          <a:xfrm>
-            <a:off x="6629400" y="2066544"/>
-            <a:ext cx="2377440" cy="420624"/>
-          </a:xfrm>
-          <a:prstGeom prst="roundRect">
-            <a:avLst>
-              <a:gd name="adj" fmla="val 10000"/>
-            </a:avLst>
-          </a:prstGeom>
-          <a:solidFill>
-            <a:srgbClr val="F7ECD5"/>
-          </a:solidFill>
-          <a:ln w="12700">
-            <a:solidFill>
-              <a:srgbClr val="8A5A00"/>
-            </a:solidFill>
-          </a:ln>
-          <a:effectLst/>
-        </p:spPr>
-        <p:style>
-          <a:lnRef idx="1">
-            <a:schemeClr val="accent1"/>
-          </a:lnRef>
-          <a:fillRef idx="3">
-            <a:schemeClr val="accent1"/>
-          </a:fillRef>
-          <a:effectRef idx="2">
-            <a:schemeClr val="accent1"/>
-          </a:effectRef>
-          <a:fontRef idx="minor">
-            <a:schemeClr val="lt1"/>
-          </a:fontRef>
-        </p:style>
-        <p:txBody>
-          <a:bodyPr rtlCol="0" anchor="ctr" wrap="square" lIns="54864" rIns="54864" tIns="27432" bIns="27432"/>
-          <a:lstStyle/>
-          <a:p>
-            <a:pPr algn="ctr"/>
-            <a:r>
-              <a:rPr sz="1100" b="1">
-                <a:solidFill>
-                  <a:srgbClr val="8A5A00"/>
-                </a:solidFill>
-                <a:latin typeface="Segoe UI"/>
-              </a:rPr>
-              <a:t>ctx_repomap · 8</a:t>
-            </a:r>
-          </a:p>
-          <a:p>
-            <a:pPr algn="ctr"/>
-            <a:r>
-              <a:rPr sz="750" b="0">
-                <a:solidFill>
-                  <a:srgbClr val="1A1A1A"/>
-                </a:solidFill>
-                <a:latin typeface="Segoe UI"/>
-              </a:rPr>
-              <a:t>read-only: no bash, no write</a:t>
+              <a:t>Closed dispatch table + phantom-tool guard</a:t>
+            </a:r>
+          </a:p>
+        </p:txBody>
+      </p:sp>
+      <p:sp>
+        <p:nvSpPr>
+          <p:cNvPr id="14" name="TextBox 13"/>
+          <p:cNvSpPr txBox="1"/>
+          <p:nvPr/>
+        </p:nvSpPr>
+        <p:spPr>
+          <a:xfrm>
+            <a:off x="8183879" y="2569464"/>
+            <a:ext cx="3319272" cy="457200"/>
+          </a:xfrm>
+          <a:prstGeom prst="rect">
+            <a:avLst/>
+          </a:prstGeom>
+          <a:noFill/>
+        </p:spPr>
+        <p:txBody>
+          <a:bodyPr wrap="square" anchor="t" lIns="0" rIns="0" tIns="0" bIns="0">
+            <a:spAutoFit/>
+          </a:bodyPr>
+          <a:lstStyle/>
+          <a:p>
+            <a:pPr algn="l">
+              <a:spcAft>
+                <a:spcPts val="0"/>
+              </a:spcAft>
+            </a:pPr>
+            <a:r>
+              <a:rPr sz="1000" b="0">
+                <a:solidFill>
+                  <a:srgbClr val="6B6B6B"/>
+                </a:solidFill>
+                <a:latin typeface="Segoe UI"/>
+              </a:rPr>
+              <a:t>"unknown tool" — no fall-through, and the run survives it</a:t>
             </a:r>
           </a:p>
         </p:txBody>
@@ -11192,8 +11102,8 @@
         </p:nvSpPr>
         <p:spPr>
           <a:xfrm>
-            <a:off x="9144000" y="2066544"/>
-            <a:ext cx="2377440" cy="420624"/>
+            <a:off x="685800" y="3282696"/>
+            <a:ext cx="3246120" cy="786384"/>
           </a:xfrm>
           <a:prstGeom prst="roundRect">
             <a:avLst>
@@ -11229,40 +11139,127 @@
           <a:lstStyle/>
           <a:p>
             <a:pPr algn="ctr"/>
-            <a:r>
-              <a:rPr sz="1100" b="1">
-                <a:solidFill>
-                  <a:srgbClr val="8C2F2F"/>
-                </a:solidFill>
-                <a:latin typeface="Segoe UI"/>
-              </a:rPr>
-              <a:t>9 of 19 roles · 0</a:t>
-            </a:r>
-          </a:p>
-          <a:p>
-            <a:pPr algn="ctr"/>
-            <a:r>
-              <a:rPr sz="750" b="0">
+          </a:p>
+          <a:p>
+            <a:pPr algn="ctr"/>
+            <a:r>
+              <a:rPr sz="1150" b="0">
                 <a:solidFill>
                   <a:srgbClr val="1A1A1A"/>
                 </a:solidFill>
                 <a:latin typeface="Segoe UI"/>
               </a:rPr>
-              <a:t>forbidden: ALL — judgement only</a:t>
-            </a:r>
-          </a:p>
-        </p:txBody>
-      </p:sp>
-      <p:sp>
-        <p:nvSpPr>
-          <p:cNvPr id="16" name="TextBox 15"/>
+              <a:t>A shell command wrecks something</a:t>
+            </a:r>
+          </a:p>
+        </p:txBody>
+      </p:sp>
+      <p:cxnSp>
+        <p:nvCxnSpPr>
+          <p:cNvPr id="16" name="Connector 15"/>
+          <p:cNvCxnSpPr/>
+          <p:nvPr/>
+        </p:nvCxnSpPr>
+        <p:spPr>
+          <a:xfrm>
+            <a:off x="3931920" y="3675888"/>
+            <a:ext cx="292608" cy="0"/>
+          </a:xfrm>
+          <a:prstGeom prst="line">
+            <a:avLst/>
+          </a:prstGeom>
+          <a:ln w="19050">
+            <a:solidFill>
+              <a:srgbClr val="C9C9C9"/>
+            </a:solidFill>
+            <a:tailEnd type="triangle" w="med" len="med"/>
+          </a:ln>
+        </p:spPr>
+        <p:style>
+          <a:lnRef idx="2">
+            <a:schemeClr val="accent1"/>
+          </a:lnRef>
+          <a:fillRef idx="0">
+            <a:schemeClr val="accent1"/>
+          </a:fillRef>
+          <a:effectRef idx="1">
+            <a:schemeClr val="accent1"/>
+          </a:effectRef>
+          <a:fontRef idx="minor">
+            <a:schemeClr val="tx1"/>
+          </a:fontRef>
+        </p:style>
+      </p:cxnSp>
+      <p:sp>
+        <p:nvSpPr>
+          <p:cNvPr id="17" name="Rounded Rectangle 16"/>
+          <p:cNvSpPr/>
+          <p:nvPr/>
+        </p:nvSpPr>
+        <p:spPr>
+          <a:xfrm>
+            <a:off x="4224528" y="3282696"/>
+            <a:ext cx="3703320" cy="786384"/>
+          </a:xfrm>
+          <a:prstGeom prst="roundRect">
+            <a:avLst>
+              <a:gd name="adj" fmla="val 10000"/>
+            </a:avLst>
+          </a:prstGeom>
+          <a:solidFill>
+            <a:srgbClr val="DCEEE7"/>
+          </a:solidFill>
+          <a:ln w="12700">
+            <a:solidFill>
+              <a:srgbClr val="1E6B52"/>
+            </a:solidFill>
+          </a:ln>
+          <a:effectLst/>
+        </p:spPr>
+        <p:style>
+          <a:lnRef idx="1">
+            <a:schemeClr val="accent1"/>
+          </a:lnRef>
+          <a:fillRef idx="3">
+            <a:schemeClr val="accent1"/>
+          </a:fillRef>
+          <a:effectRef idx="2">
+            <a:schemeClr val="accent1"/>
+          </a:effectRef>
+          <a:fontRef idx="minor">
+            <a:schemeClr val="lt1"/>
+          </a:fontRef>
+        </p:style>
+        <p:txBody>
+          <a:bodyPr rtlCol="0" anchor="ctr" wrap="square" lIns="54864" rIns="54864" tIns="27432" bIns="27432"/>
+          <a:lstStyle/>
+          <a:p>
+            <a:pPr algn="ctr"/>
+          </a:p>
+          <a:p>
+            <a:pPr algn="ctr"/>
+            <a:r>
+              <a:rPr sz="1150" b="0">
+                <a:solidFill>
+                  <a:srgbClr val="1A1A1A"/>
+                </a:solidFill>
+                <a:latin typeface="Segoe UI"/>
+              </a:rPr>
+              <a:t>Risk classifier on every command-carrying tool</a:t>
+            </a:r>
+          </a:p>
+        </p:txBody>
+      </p:sp>
+      <p:sp>
+        <p:nvSpPr>
+          <p:cNvPr id="18" name="TextBox 17"/>
           <p:cNvSpPr txBox="1"/>
           <p:nvPr/>
         </p:nvSpPr>
         <p:spPr>
           <a:xfrm>
-            <a:off x="685800" y="2697480"/>
-            <a:ext cx="7315200" cy="219456"/>
+            <a:off x="8183879" y="3502152"/>
+            <a:ext cx="3319272" cy="457200"/>
           </a:xfrm>
           <a:prstGeom prst="rect">
             <a:avLst/>
@@ -11281,27 +11278,27 @@
               </a:spcAft>
             </a:pPr>
             <a:r>
-              <a:rPr sz="1000" b="1">
-                <a:solidFill>
-                  <a:srgbClr val="5B3A6E"/>
-                </a:solidFill>
-                <a:latin typeface="Segoe UI"/>
-              </a:rPr>
-              <a:t>2 · WHEN THE MODEL ASKS FOR SOMETHING THAT IS NOT THERE</a:t>
-            </a:r>
-          </a:p>
-        </p:txBody>
-      </p:sp>
-      <p:sp>
-        <p:nvSpPr>
-          <p:cNvPr id="17" name="Rounded Rectangle 16"/>
+              <a:rPr sz="1000" b="0">
+                <a:solidFill>
+                  <a:srgbClr val="6B6B6B"/>
+                </a:solidFill>
+                <a:latin typeface="Segoe UI"/>
+              </a:rPr>
+              <a:t>dangerous refused · caution asks · obfuscation normalised first</a:t>
+            </a:r>
+          </a:p>
+        </p:txBody>
+      </p:sp>
+      <p:sp>
+        <p:nvSpPr>
+          <p:cNvPr id="19" name="Rounded Rectangle 18"/>
           <p:cNvSpPr/>
           <p:nvPr/>
         </p:nvSpPr>
         <p:spPr>
           <a:xfrm>
-            <a:off x="685800" y="2944368"/>
-            <a:ext cx="3520440" cy="960120"/>
+            <a:off x="685800" y="4215384"/>
+            <a:ext cx="3246120" cy="786384"/>
           </a:xfrm>
           <a:prstGeom prst="roundRect">
             <a:avLst>
@@ -11309,11 +11306,11 @@
             </a:avLst>
           </a:prstGeom>
           <a:solidFill>
-            <a:srgbClr val="FFFFFF"/>
+            <a:srgbClr val="F7DFDF"/>
           </a:solidFill>
           <a:ln w="12700">
             <a:solidFill>
-              <a:srgbClr val="5B3A6E"/>
+              <a:srgbClr val="8C2F2F"/>
             </a:solidFill>
           </a:ln>
           <a:effectLst/>
@@ -11337,40 +11334,67 @@
           <a:lstStyle/>
           <a:p>
             <a:pPr algn="ctr"/>
-            <a:r>
-              <a:rPr sz="1150" b="1">
-                <a:solidFill>
-                  <a:srgbClr val="5B3A6E"/>
-                </a:solidFill>
-                <a:latin typeface="Segoe UI"/>
-              </a:rPr>
-              <a:t>Closed dispatch table</a:t>
-            </a:r>
-          </a:p>
-          <a:p>
-            <a:pPr algn="ctr"/>
-            <a:r>
-              <a:rPr sz="850" b="0">
+          </a:p>
+          <a:p>
+            <a:pPr algn="ctr"/>
+            <a:r>
+              <a:rPr sz="1150" b="0">
                 <a:solidFill>
                   <a:srgbClr val="1A1A1A"/>
                 </a:solidFill>
                 <a:latin typeface="Segoe UI"/>
               </a:rPr>
-              <a:t>The name is looked up in a dict of registered tools. A miss returns `unknown tool: X` — there is no fall-through to a shell, an eval, or a similarly-named tool.</a:t>
-            </a:r>
-          </a:p>
-        </p:txBody>
-      </p:sp>
-      <p:sp>
-        <p:nvSpPr>
-          <p:cNvPr id="18" name="Rounded Rectangle 17"/>
+              <a:t>A notebook cell does whatever it likes</a:t>
+            </a:r>
+          </a:p>
+        </p:txBody>
+      </p:sp>
+      <p:cxnSp>
+        <p:nvCxnSpPr>
+          <p:cNvPr id="20" name="Connector 19"/>
+          <p:cNvCxnSpPr/>
+          <p:nvPr/>
+        </p:nvCxnSpPr>
+        <p:spPr>
+          <a:xfrm>
+            <a:off x="3931920" y="4608576"/>
+            <a:ext cx="292608" cy="0"/>
+          </a:xfrm>
+          <a:prstGeom prst="line">
+            <a:avLst/>
+          </a:prstGeom>
+          <a:ln w="19050">
+            <a:solidFill>
+              <a:srgbClr val="C9C9C9"/>
+            </a:solidFill>
+            <a:tailEnd type="triangle" w="med" len="med"/>
+          </a:ln>
+        </p:spPr>
+        <p:style>
+          <a:lnRef idx="2">
+            <a:schemeClr val="accent1"/>
+          </a:lnRef>
+          <a:fillRef idx="0">
+            <a:schemeClr val="accent1"/>
+          </a:fillRef>
+          <a:effectRef idx="1">
+            <a:schemeClr val="accent1"/>
+          </a:effectRef>
+          <a:fontRef idx="minor">
+            <a:schemeClr val="tx1"/>
+          </a:fontRef>
+        </p:style>
+      </p:cxnSp>
+      <p:sp>
+        <p:nvSpPr>
+          <p:cNvPr id="21" name="Rounded Rectangle 20"/>
           <p:cNvSpPr/>
           <p:nvPr/>
         </p:nvSpPr>
         <p:spPr>
           <a:xfrm>
-            <a:off x="4480560" y="2944368"/>
-            <a:ext cx="3520440" cy="960120"/>
+            <a:off x="4224528" y="4215384"/>
+            <a:ext cx="3703320" cy="786384"/>
           </a:xfrm>
           <a:prstGeom prst="roundRect">
             <a:avLst>
@@ -11378,11 +11402,11 @@
             </a:avLst>
           </a:prstGeom>
           <a:solidFill>
-            <a:srgbClr val="FFFFFF"/>
+            <a:srgbClr val="DCEEE7"/>
           </a:solidFill>
           <a:ln w="12700">
             <a:solidFill>
-              <a:srgbClr val="5B3A6E"/>
+              <a:srgbClr val="1E6B52"/>
             </a:solidFill>
           </a:ln>
           <a:effectLst/>
@@ -11406,109 +11430,31 @@
           <a:lstStyle/>
           <a:p>
             <a:pPr algn="ctr"/>
-            <a:r>
-              <a:rPr sz="1150" b="1">
-                <a:solidFill>
-                  <a:srgbClr val="5B3A6E"/>
-                </a:solidFill>
-                <a:latin typeface="Segoe UI"/>
-              </a:rPr>
-              <a:t>Phantom-tool guard</a:t>
-            </a:r>
-          </a:p>
-          <a:p>
-            <a:pPr algn="ctr"/>
-            <a:r>
-              <a:rPr sz="850" b="0">
+          </a:p>
+          <a:p>
+            <a:pPr algn="ctr"/>
+            <a:r>
+              <a:rPr sz="1150" b="0">
                 <a:solidFill>
                   <a:srgbClr val="1A1A1A"/>
                 </a:solidFill>
                 <a:latin typeface="Segoe UI"/>
               </a:rPr>
-              <a:t>An unknown-tool error is converted in-band: "this tool does not exist and is not available to you — do not call it again". One hallucinated call cannot abort the run.</a:t>
-            </a:r>
-          </a:p>
-        </p:txBody>
-      </p:sp>
-      <p:sp>
-        <p:nvSpPr>
-          <p:cNvPr id="19" name="Rounded Rectangle 18"/>
-          <p:cNvSpPr/>
-          <p:nvPr/>
-        </p:nvSpPr>
-        <p:spPr>
-          <a:xfrm>
-            <a:off x="8275320" y="2944368"/>
-            <a:ext cx="3520440" cy="960120"/>
-          </a:xfrm>
-          <a:prstGeom prst="roundRect">
-            <a:avLst>
-              <a:gd name="adj" fmla="val 10000"/>
-            </a:avLst>
-          </a:prstGeom>
-          <a:solidFill>
-            <a:srgbClr val="FFFFFF"/>
-          </a:solidFill>
-          <a:ln w="12700">
-            <a:solidFill>
-              <a:srgbClr val="5B3A6E"/>
-            </a:solidFill>
-          </a:ln>
-          <a:effectLst/>
-        </p:spPr>
-        <p:style>
-          <a:lnRef idx="1">
-            <a:schemeClr val="accent1"/>
-          </a:lnRef>
-          <a:fillRef idx="3">
-            <a:schemeClr val="accent1"/>
-          </a:fillRef>
-          <a:effectRef idx="2">
-            <a:schemeClr val="accent1"/>
-          </a:effectRef>
-          <a:fontRef idx="minor">
-            <a:schemeClr val="lt1"/>
-          </a:fontRef>
-        </p:style>
-        <p:txBody>
-          <a:bodyPr rtlCol="0" anchor="ctr" wrap="square" lIns="54864" rIns="54864" tIns="27432" bIns="27432"/>
-          <a:lstStyle/>
-          <a:p>
-            <a:pPr algn="ctr"/>
-            <a:r>
-              <a:rPr sz="1150" b="1">
-                <a:solidFill>
-                  <a:srgbClr val="5B3A6E"/>
-                </a:solidFill>
-                <a:latin typeface="Segoe UI"/>
-              </a:rPr>
-              <a:t>Removed capabilities answer for themselves</a:t>
-            </a:r>
-          </a:p>
-          <a:p>
-            <a:pPr algn="ctr"/>
-            <a:r>
-              <a:rPr sz="850" b="0">
-                <a:solidFill>
-                  <a:srgbClr val="1A1A1A"/>
-                </a:solidFill>
-                <a:latin typeface="Segoe UI"/>
-              </a:rPr>
-              <a:t>14 spellings of web search (web_search, google, tavily_search …) reply with WHY it is gone, so the model stops walking the alias carousel and asks for a URL.</a:t>
-            </a:r>
-          </a:p>
-        </p:txBody>
-      </p:sp>
-      <p:sp>
-        <p:nvSpPr>
-          <p:cNvPr id="20" name="TextBox 19"/>
+              <a:t>The cell's own shell calls are read and classified</a:t>
+            </a:r>
+          </a:p>
+        </p:txBody>
+      </p:sp>
+      <p:sp>
+        <p:nvSpPr>
+          <p:cNvPr id="22" name="TextBox 21"/>
           <p:cNvSpPr txBox="1"/>
           <p:nvPr/>
         </p:nvSpPr>
         <p:spPr>
           <a:xfrm>
-            <a:off x="685800" y="4069080"/>
-            <a:ext cx="7315200" cy="219456"/>
+            <a:off x="8183879" y="4434840"/>
+            <a:ext cx="3319272" cy="457200"/>
           </a:xfrm>
           <a:prstGeom prst="rect">
             <a:avLst/>
@@ -11527,27 +11473,27 @@
               </a:spcAft>
             </a:pPr>
             <a:r>
-              <a:rPr sz="1000" b="1">
-                <a:solidFill>
-                  <a:srgbClr val="1E6B52"/>
-                </a:solidFill>
-                <a:latin typeface="Segoe UI"/>
-              </a:rPr>
-              <a:t>3 · AND AGAIN AT CALL TIME, ON THE TOOLS IT DOES HAVE</a:t>
-            </a:r>
-          </a:p>
-        </p:txBody>
-      </p:sp>
-      <p:sp>
-        <p:nvSpPr>
-          <p:cNvPr id="21" name="Rounded Rectangle 20"/>
+              <a:rPr sz="1000" b="0">
+                <a:solidFill>
+                  <a:srgbClr val="6B6B6B"/>
+                </a:solidFill>
+                <a:latin typeface="Segoe UI"/>
+              </a:rPr>
+              <a:t>!cmd · os.system · subprocess — approval-gated by default</a:t>
+            </a:r>
+          </a:p>
+        </p:txBody>
+      </p:sp>
+      <p:sp>
+        <p:nvSpPr>
+          <p:cNvPr id="23" name="Rounded Rectangle 22"/>
           <p:cNvSpPr/>
           <p:nvPr/>
         </p:nvSpPr>
         <p:spPr>
           <a:xfrm>
-            <a:off x="685800" y="4315968"/>
-            <a:ext cx="3520440" cy="960120"/>
+            <a:off x="685800" y="5148072"/>
+            <a:ext cx="3246120" cy="786384"/>
           </a:xfrm>
           <a:prstGeom prst="roundRect">
             <a:avLst>
@@ -11555,7 +11501,103 @@
             </a:avLst>
           </a:prstGeom>
           <a:solidFill>
-            <a:srgbClr val="FFFFFF"/>
+            <a:srgbClr val="F7DFDF"/>
+          </a:solidFill>
+          <a:ln w="12700">
+            <a:solidFill>
+              <a:srgbClr val="8C2F2F"/>
+            </a:solidFill>
+          </a:ln>
+          <a:effectLst/>
+        </p:spPr>
+        <p:style>
+          <a:lnRef idx="1">
+            <a:schemeClr val="accent1"/>
+          </a:lnRef>
+          <a:fillRef idx="3">
+            <a:schemeClr val="accent1"/>
+          </a:fillRef>
+          <a:effectRef idx="2">
+            <a:schemeClr val="accent1"/>
+          </a:effectRef>
+          <a:fontRef idx="minor">
+            <a:schemeClr val="lt1"/>
+          </a:fontRef>
+        </p:style>
+        <p:txBody>
+          <a:bodyPr rtlCol="0" anchor="ctr" wrap="square" lIns="54864" rIns="54864" tIns="27432" bIns="27432"/>
+          <a:lstStyle/>
+          <a:p>
+            <a:pPr algn="ctr"/>
+          </a:p>
+          <a:p>
+            <a:pPr algn="ctr"/>
+            <a:r>
+              <a:rPr sz="1150" b="0">
+                <a:solidFill>
+                  <a:srgbClr val="1A1A1A"/>
+                </a:solidFill>
+                <a:latin typeface="Segoe UI"/>
+              </a:rPr>
+              <a:t>Our data gets posted or uploaded somewhere</a:t>
+            </a:r>
+          </a:p>
+        </p:txBody>
+      </p:sp>
+      <p:cxnSp>
+        <p:nvCxnSpPr>
+          <p:cNvPr id="24" name="Connector 23"/>
+          <p:cNvCxnSpPr/>
+          <p:nvPr/>
+        </p:nvCxnSpPr>
+        <p:spPr>
+          <a:xfrm>
+            <a:off x="3931920" y="5541264"/>
+            <a:ext cx="292608" cy="0"/>
+          </a:xfrm>
+          <a:prstGeom prst="line">
+            <a:avLst/>
+          </a:prstGeom>
+          <a:ln w="19050">
+            <a:solidFill>
+              <a:srgbClr val="C9C9C9"/>
+            </a:solidFill>
+            <a:tailEnd type="triangle" w="med" len="med"/>
+          </a:ln>
+        </p:spPr>
+        <p:style>
+          <a:lnRef idx="2">
+            <a:schemeClr val="accent1"/>
+          </a:lnRef>
+          <a:fillRef idx="0">
+            <a:schemeClr val="accent1"/>
+          </a:fillRef>
+          <a:effectRef idx="1">
+            <a:schemeClr val="accent1"/>
+          </a:effectRef>
+          <a:fontRef idx="minor">
+            <a:schemeClr val="tx1"/>
+          </a:fontRef>
+        </p:style>
+      </p:cxnSp>
+      <p:sp>
+        <p:nvSpPr>
+          <p:cNvPr id="25" name="Rounded Rectangle 24"/>
+          <p:cNvSpPr/>
+          <p:nvPr/>
+        </p:nvSpPr>
+        <p:spPr>
+          <a:xfrm>
+            <a:off x="4224528" y="5148072"/>
+            <a:ext cx="3703320" cy="786384"/>
+          </a:xfrm>
+          <a:prstGeom prst="roundRect">
+            <a:avLst>
+              <a:gd name="adj" fmla="val 10000"/>
+            </a:avLst>
+          </a:prstGeom>
+          <a:solidFill>
+            <a:srgbClr val="DCEEE7"/>
           </a:solidFill>
           <a:ln w="12700">
             <a:solidFill>
@@ -11583,52 +11625,250 @@
           <a:lstStyle/>
           <a:p>
             <a:pPr algn="ctr"/>
-            <a:r>
-              <a:rPr sz="1150" b="1">
-                <a:solidFill>
-                  <a:srgbClr val="1E6B52"/>
-                </a:solidFill>
-                <a:latin typeface="Segoe UI"/>
-              </a:rPr>
-              <a:t>Policy: allow · ask · deny</a:t>
-            </a:r>
-          </a:p>
-          <a:p>
-            <a:pPr algn="ctr"/>
-            <a:r>
-              <a:rPr sz="850" b="0">
+          </a:p>
+          <a:p>
+            <a:pPr algn="ctr"/>
+            <a:r>
+              <a:rPr sz="1150" b="0">
                 <a:solidFill>
                   <a:srgbClr val="1A1A1A"/>
                 </a:solidFill>
                 <a:latin typeface="Segoe UI"/>
               </a:rPr>
-              <a:t>Per tool, AIFORGE_TOOL_POLICY. deny is a hard refusal — autonomous runs included. 20 external-write tools default to ask.</a:t>
-            </a:r>
-          </a:p>
-        </p:txBody>
-      </p:sp>
-      <p:sp>
-        <p:nvSpPr>
-          <p:cNvPr id="22" name="Rounded Rectangle 21"/>
+              <a:t>Default-deny host list, and reading is not writing</a:t>
+            </a:r>
+          </a:p>
+        </p:txBody>
+      </p:sp>
+      <p:sp>
+        <p:nvSpPr>
+          <p:cNvPr id="26" name="TextBox 25"/>
+          <p:cNvSpPr txBox="1"/>
+          <p:nvPr/>
+        </p:nvSpPr>
+        <p:spPr>
+          <a:xfrm>
+            <a:off x="8183879" y="5367528"/>
+            <a:ext cx="3319272" cy="457200"/>
+          </a:xfrm>
+          <a:prstGeom prst="rect">
+            <a:avLst/>
+          </a:prstGeom>
+          <a:noFill/>
+        </p:spPr>
+        <p:txBody>
+          <a:bodyPr wrap="square" anchor="t" lIns="0" rIns="0" tIns="0" bIns="0">
+            <a:spAutoFit/>
+          </a:bodyPr>
+          <a:lstStyle/>
+          <a:p>
+            <a:pPr algn="l">
+              <a:spcAft>
+                <a:spcPts val="0"/>
+              </a:spcAft>
+            </a:pPr>
+            <a:r>
+              <a:rPr sz="1000" b="0">
+                <a:solidFill>
+                  <a:srgbClr val="6B6B6B"/>
+                </a:solidFill>
+                <a:latin typeface="Segoe UI"/>
+              </a:rPr>
+              <a:t>uploads have their own switch · no human, no external write</a:t>
+            </a:r>
+          </a:p>
+        </p:txBody>
+      </p:sp>
+      <p:sp>
+        <p:nvSpPr>
+          <p:cNvPr id="27" name="Rounded Rectangle 26"/>
           <p:cNvSpPr/>
           <p:nvPr/>
         </p:nvSpPr>
         <p:spPr>
           <a:xfrm>
-            <a:off x="4480560" y="4315968"/>
-            <a:ext cx="3520440" cy="960120"/>
+            <a:off x="685800" y="6172200"/>
+            <a:ext cx="155448" cy="155448"/>
           </a:xfrm>
           <a:prstGeom prst="roundRect">
-            <a:avLst>
-              <a:gd name="adj" fmla="val 10000"/>
-            </a:avLst>
+            <a:avLst/>
+          </a:prstGeom>
+          <a:solidFill>
+            <a:srgbClr val="F7DFDF"/>
+          </a:solidFill>
+          <a:ln>
+            <a:solidFill>
+              <a:srgbClr val="8C2F2F"/>
+            </a:solidFill>
+          </a:ln>
+          <a:effectLst/>
+        </p:spPr>
+        <p:style>
+          <a:lnRef idx="1">
+            <a:schemeClr val="accent1"/>
+          </a:lnRef>
+          <a:fillRef idx="3">
+            <a:schemeClr val="accent1"/>
+          </a:fillRef>
+          <a:effectRef idx="2">
+            <a:schemeClr val="accent1"/>
+          </a:effectRef>
+          <a:fontRef idx="minor">
+            <a:schemeClr val="lt1"/>
+          </a:fontRef>
+        </p:style>
+        <p:txBody>
+          <a:bodyPr rtlCol="0" anchor="ctr"/>
+          <a:lstStyle/>
+          <a:p>
+            <a:pPr algn="ctr"/>
+          </a:p>
+        </p:txBody>
+      </p:sp>
+      <p:sp>
+        <p:nvSpPr>
+          <p:cNvPr id="28" name="TextBox 27"/>
+          <p:cNvSpPr txBox="1"/>
+          <p:nvPr/>
+        </p:nvSpPr>
+        <p:spPr>
+          <a:xfrm>
+            <a:off x="905256" y="6153912"/>
+            <a:ext cx="2103120" cy="201168"/>
+          </a:xfrm>
+          <a:prstGeom prst="rect">
+            <a:avLst/>
+          </a:prstGeom>
+          <a:noFill/>
+        </p:spPr>
+        <p:txBody>
+          <a:bodyPr wrap="square" anchor="t" lIns="0" rIns="0" tIns="0" bIns="0">
+            <a:spAutoFit/>
+          </a:bodyPr>
+          <a:lstStyle/>
+          <a:p>
+            <a:pPr algn="l">
+              <a:spcAft>
+                <a:spcPts val="0"/>
+              </a:spcAft>
+            </a:pPr>
+            <a:r>
+              <a:rPr sz="950" b="0">
+                <a:solidFill>
+                  <a:srgbClr val="6B6B6B"/>
+                </a:solidFill>
+                <a:latin typeface="Segoe UI"/>
+              </a:rPr>
+              <a:t>the worry</a:t>
+            </a:r>
+          </a:p>
+        </p:txBody>
+      </p:sp>
+      <p:sp>
+        <p:nvSpPr>
+          <p:cNvPr id="29" name="Rounded Rectangle 28"/>
+          <p:cNvSpPr/>
+          <p:nvPr/>
+        </p:nvSpPr>
+        <p:spPr>
+          <a:xfrm>
+            <a:off x="1470355" y="6172200"/>
+            <a:ext cx="155448" cy="155448"/>
+          </a:xfrm>
+          <a:prstGeom prst="roundRect">
+            <a:avLst/>
+          </a:prstGeom>
+          <a:solidFill>
+            <a:srgbClr val="DCEEE7"/>
+          </a:solidFill>
+          <a:ln>
+            <a:solidFill>
+              <a:srgbClr val="1E6B52"/>
+            </a:solidFill>
+          </a:ln>
+          <a:effectLst/>
+        </p:spPr>
+        <p:style>
+          <a:lnRef idx="1">
+            <a:schemeClr val="accent1"/>
+          </a:lnRef>
+          <a:fillRef idx="3">
+            <a:schemeClr val="accent1"/>
+          </a:fillRef>
+          <a:effectRef idx="2">
+            <a:schemeClr val="accent1"/>
+          </a:effectRef>
+          <a:fontRef idx="minor">
+            <a:schemeClr val="lt1"/>
+          </a:fontRef>
+        </p:style>
+        <p:txBody>
+          <a:bodyPr rtlCol="0" anchor="ctr"/>
+          <a:lstStyle/>
+          <a:p>
+            <a:pPr algn="ctr"/>
+          </a:p>
+        </p:txBody>
+      </p:sp>
+      <p:sp>
+        <p:nvSpPr>
+          <p:cNvPr id="30" name="TextBox 29"/>
+          <p:cNvSpPr txBox="1"/>
+          <p:nvPr/>
+        </p:nvSpPr>
+        <p:spPr>
+          <a:xfrm>
+            <a:off x="1689811" y="6153912"/>
+            <a:ext cx="2103120" cy="201168"/>
+          </a:xfrm>
+          <a:prstGeom prst="rect">
+            <a:avLst/>
+          </a:prstGeom>
+          <a:noFill/>
+        </p:spPr>
+        <p:txBody>
+          <a:bodyPr wrap="square" anchor="t" lIns="0" rIns="0" tIns="0" bIns="0">
+            <a:spAutoFit/>
+          </a:bodyPr>
+          <a:lstStyle/>
+          <a:p>
+            <a:pPr algn="l">
+              <a:spcAft>
+                <a:spcPts val="0"/>
+              </a:spcAft>
+            </a:pPr>
+            <a:r>
+              <a:rPr sz="950" b="0">
+                <a:solidFill>
+                  <a:srgbClr val="6B6B6B"/>
+                </a:solidFill>
+                <a:latin typeface="Segoe UI"/>
+              </a:rPr>
+              <a:t>the control</a:t>
+            </a:r>
+          </a:p>
+        </p:txBody>
+      </p:sp>
+      <p:sp>
+        <p:nvSpPr>
+          <p:cNvPr id="31" name="Rounded Rectangle 30"/>
+          <p:cNvSpPr/>
+          <p:nvPr/>
+        </p:nvSpPr>
+        <p:spPr>
+          <a:xfrm>
+            <a:off x="2368295" y="6172200"/>
+            <a:ext cx="155448" cy="155448"/>
+          </a:xfrm>
+          <a:prstGeom prst="roundRect">
+            <a:avLst/>
           </a:prstGeom>
           <a:solidFill>
             <a:srgbClr val="FFFFFF"/>
           </a:solidFill>
-          <a:ln w="12700">
+          <a:ln>
             <a:solidFill>
-              <a:srgbClr val="1E6B52"/>
+              <a:srgbClr val="C9C9C9"/>
             </a:solidFill>
           </a:ln>
           <a:effectLst/>
@@ -11648,168 +11888,48 @@
           </a:fontRef>
         </p:style>
         <p:txBody>
-          <a:bodyPr rtlCol="0" anchor="ctr" wrap="square" lIns="54864" rIns="54864" tIns="27432" bIns="27432"/>
-          <a:lstStyle/>
-          <a:p>
-            <a:pPr algn="ctr"/>
-            <a:r>
-              <a:rPr sz="1150" b="1">
-                <a:solidFill>
-                  <a:srgbClr val="1E6B52"/>
-                </a:solidFill>
-                <a:latin typeface="Segoe UI"/>
-              </a:rPr>
-              <a:t>PreToolUse hooks</a:t>
-            </a:r>
-          </a:p>
-          <a:p>
-            <a:pPr algn="ctr"/>
-            <a:r>
-              <a:rPr sz="850" b="0">
-                <a:solidFill>
-                  <a:srgbClr val="1A1A1A"/>
-                </a:solidFill>
-                <a:latin typeface="Segoe UI"/>
-              </a:rPr>
-              <a:t>An operator's own hook can block any call before it runs; the refusal is reported to the model as a normal tool result.</a:t>
-            </a:r>
-          </a:p>
-        </p:txBody>
-      </p:sp>
-      <p:sp>
-        <p:nvSpPr>
-          <p:cNvPr id="23" name="Rounded Rectangle 22"/>
-          <p:cNvSpPr/>
-          <p:nvPr/>
-        </p:nvSpPr>
-        <p:spPr>
-          <a:xfrm>
-            <a:off x="8275320" y="4315968"/>
-            <a:ext cx="3520440" cy="960120"/>
-          </a:xfrm>
-          <a:prstGeom prst="roundRect">
-            <a:avLst>
-              <a:gd name="adj" fmla="val 10000"/>
-            </a:avLst>
-          </a:prstGeom>
-          <a:solidFill>
-            <a:srgbClr val="FFFFFF"/>
-          </a:solidFill>
-          <a:ln w="12700">
-            <a:solidFill>
-              <a:srgbClr val="1E6B52"/>
-            </a:solidFill>
-          </a:ln>
-          <a:effectLst/>
-        </p:spPr>
-        <p:style>
-          <a:lnRef idx="1">
-            <a:schemeClr val="accent1"/>
-          </a:lnRef>
-          <a:fillRef idx="3">
-            <a:schemeClr val="accent1"/>
-          </a:fillRef>
-          <a:effectRef idx="2">
-            <a:schemeClr val="accent1"/>
-          </a:effectRef>
-          <a:fontRef idx="minor">
-            <a:schemeClr val="lt1"/>
-          </a:fontRef>
-        </p:style>
-        <p:txBody>
-          <a:bodyPr rtlCol="0" anchor="ctr" wrap="square" lIns="54864" rIns="54864" tIns="27432" bIns="27432"/>
-          <a:lstStyle/>
-          <a:p>
-            <a:pPr algn="ctr"/>
-            <a:r>
-              <a:rPr sz="1150" b="1">
-                <a:solidFill>
-                  <a:srgbClr val="1E6B52"/>
-                </a:solidFill>
-                <a:latin typeface="Segoe UI"/>
-              </a:rPr>
-              <a:t>Forced review of writes</a:t>
-            </a:r>
-          </a:p>
-          <a:p>
-            <a:pPr algn="ctr"/>
-            <a:r>
-              <a:rPr sz="850" b="0">
-                <a:solidFill>
-                  <a:srgbClr val="1A1A1A"/>
-                </a:solidFill>
-                <a:latin typeface="Segoe UI"/>
-              </a:rPr>
-              <a:t>Review mode makes every file-mutating call — including the editor aliases — wait for Approve / Reject with a diff.</a:t>
-            </a:r>
-          </a:p>
-        </p:txBody>
-      </p:sp>
-      <p:sp>
-        <p:nvSpPr>
-          <p:cNvPr id="24" name="Rounded Rectangle 23"/>
-          <p:cNvSpPr/>
-          <p:nvPr/>
-        </p:nvSpPr>
-        <p:spPr>
-          <a:xfrm>
-            <a:off x="685800" y="5532120"/>
-            <a:ext cx="10817352" cy="566928"/>
-          </a:xfrm>
-          <a:prstGeom prst="roundRect">
-            <a:avLst>
-              <a:gd name="adj" fmla="val 10000"/>
-            </a:avLst>
-          </a:prstGeom>
-          <a:solidFill>
-            <a:srgbClr val="F7ECD5"/>
-          </a:solidFill>
-          <a:ln w="12700">
-            <a:solidFill>
-              <a:srgbClr val="8A5A00"/>
-            </a:solidFill>
-          </a:ln>
-          <a:effectLst/>
-        </p:spPr>
-        <p:style>
-          <a:lnRef idx="1">
-            <a:schemeClr val="accent1"/>
-          </a:lnRef>
-          <a:fillRef idx="3">
-            <a:schemeClr val="accent1"/>
-          </a:fillRef>
-          <a:effectRef idx="2">
-            <a:schemeClr val="accent1"/>
-          </a:effectRef>
-          <a:fontRef idx="minor">
-            <a:schemeClr val="lt1"/>
-          </a:fontRef>
-        </p:style>
-        <p:txBody>
-          <a:bodyPr rtlCol="0" anchor="ctr" wrap="square" lIns="54864" rIns="54864" tIns="27432" bIns="27432"/>
-          <a:lstStyle/>
-          <a:p>
-            <a:pPr algn="ctr"/>
-            <a:r>
-              <a:rPr sz="1150" b="1">
-                <a:solidFill>
-                  <a:srgbClr val="8A5A00"/>
-                </a:solidFill>
-                <a:latin typeface="Segoe UI"/>
-              </a:rPr>
-              <a:t>Where this is a filter and not a wall</a:t>
-            </a:r>
-          </a:p>
-          <a:p>
-            <a:pPr algn="ctr"/>
-            <a:r>
-              <a:rPr sz="900" b="0">
-                <a:solidFill>
-                  <a:srgbClr val="1A1A1A"/>
-                </a:solidFill>
-                <a:latin typeface="Segoe UI"/>
-              </a:rPr>
-              <a:t>An allowlist that matches no registered tool fails OPEN with a warning — a config typo must not leave an agent tool-less — and the Doer runs unfiltered by design, its list documenting intent. The hard stops are the call-time policy, the risk gate and the sandbox.</a:t>
+          <a:bodyPr rtlCol="0" anchor="ctr"/>
+          <a:lstStyle/>
+          <a:p>
+            <a:pPr algn="ctr"/>
+          </a:p>
+        </p:txBody>
+      </p:sp>
+      <p:sp>
+        <p:nvSpPr>
+          <p:cNvPr id="32" name="TextBox 31"/>
+          <p:cNvSpPr txBox="1"/>
+          <p:nvPr/>
+        </p:nvSpPr>
+        <p:spPr>
+          <a:xfrm>
+            <a:off x="2587751" y="6153912"/>
+            <a:ext cx="2103120" cy="201168"/>
+          </a:xfrm>
+          <a:prstGeom prst="rect">
+            <a:avLst/>
+          </a:prstGeom>
+          <a:noFill/>
+        </p:spPr>
+        <p:txBody>
+          <a:bodyPr wrap="square" anchor="t" lIns="0" rIns="0" tIns="0" bIns="0">
+            <a:spAutoFit/>
+          </a:bodyPr>
+          <a:lstStyle/>
+          <a:p>
+            <a:pPr algn="l">
+              <a:spcAft>
+                <a:spcPts val="0"/>
+              </a:spcAft>
+            </a:pPr>
+            <a:r>
+              <a:rPr sz="950" b="0">
+                <a:solidFill>
+                  <a:srgbClr val="6B6B6B"/>
+                </a:solidFill>
+                <a:latin typeface="Segoe UI"/>
+              </a:rPr>
+              <a:t>how you can tell it is real</a:t>
             </a:r>
           </a:p>
         </p:txBody>
@@ -11866,7 +11986,7 @@
                 </a:solidFill>
                 <a:latin typeface="Segoe UI"/>
               </a:rPr>
-              <a:t>Shell, kernel, and data leaving the box</a:t>
+              <a:t>What one tool call passes through</a:t>
             </a:r>
           </a:p>
         </p:txBody>
@@ -11905,7 +12025,7 @@
                 </a:solidFill>
                 <a:latin typeface="Segoe UI"/>
               </a:rPr>
-              <a:t>The three ways an agent can do real damage, and what stands in each path.</a:t>
+              <a:t>Four gates. A call that fails any of them comes back as a refusal the model can read.</a:t>
             </a:r>
           </a:p>
         </p:txBody>
@@ -11988,7 +12108,7 @@
                 </a:solidFill>
                 <a:latin typeface="Segoe UI"/>
               </a:rPr>
-              <a:t>Switches: AIFORGE_TOOL_POLICY · AIFORGE_RISK_ASK_CAUTION · AIFORGE_SANDBOX_REQUIRED · AIFORGE_EGRESS_OFF · AIFORGE_UPLOAD_DISABLE · AIFORGE_UNATTENDED_WRITES</a:t>
+              <a:t>Not covered, and said so: run_command and a notebook cell open sockets themselves — curl in a shell never passes through the egress module. That line is an OS firewall.</a:t>
             </a:r>
           </a:p>
         </p:txBody>
@@ -12040,8 +12160,113 @@
         </p:nvSpPr>
         <p:spPr>
           <a:xfrm>
-            <a:off x="685800" y="1325880"/>
-            <a:ext cx="3520440" cy="475488"/>
+            <a:off x="685800" y="1554480"/>
+            <a:ext cx="1783080" cy="868680"/>
+          </a:xfrm>
+          <a:prstGeom prst="roundRect">
+            <a:avLst>
+              <a:gd name="adj" fmla="val 10000"/>
+            </a:avLst>
+          </a:prstGeom>
+          <a:solidFill>
+            <a:srgbClr val="ECECEC"/>
+          </a:solidFill>
+          <a:ln w="12700">
+            <a:solidFill>
+              <a:srgbClr val="3A3A3A"/>
+            </a:solidFill>
+          </a:ln>
+          <a:effectLst/>
+        </p:spPr>
+        <p:style>
+          <a:lnRef idx="1">
+            <a:schemeClr val="accent1"/>
+          </a:lnRef>
+          <a:fillRef idx="3">
+            <a:schemeClr val="accent1"/>
+          </a:fillRef>
+          <a:effectRef idx="2">
+            <a:schemeClr val="accent1"/>
+          </a:effectRef>
+          <a:fontRef idx="minor">
+            <a:schemeClr val="lt1"/>
+          </a:fontRef>
+        </p:style>
+        <p:txBody>
+          <a:bodyPr rtlCol="0" anchor="ctr" wrap="square" lIns="54864" rIns="54864" tIns="27432" bIns="27432"/>
+          <a:lstStyle/>
+          <a:p>
+            <a:pPr algn="ctr"/>
+            <a:r>
+              <a:rPr sz="1300" b="1">
+                <a:solidFill>
+                  <a:srgbClr val="3A3A3A"/>
+                </a:solidFill>
+                <a:latin typeface="Segoe UI"/>
+              </a:rPr>
+              <a:t>The model</a:t>
+            </a:r>
+          </a:p>
+          <a:p>
+            <a:pPr algn="ctr"/>
+            <a:r>
+              <a:rPr sz="900" b="0">
+                <a:solidFill>
+                  <a:srgbClr val="1A1A1A"/>
+                </a:solidFill>
+                <a:latin typeface="Segoe UI"/>
+              </a:rPr>
+              <a:t>asks for a tool</a:t>
+            </a:r>
+          </a:p>
+        </p:txBody>
+      </p:sp>
+      <p:cxnSp>
+        <p:nvCxnSpPr>
+          <p:cNvPr id="8" name="Connector 7"/>
+          <p:cNvCxnSpPr/>
+          <p:nvPr/>
+        </p:nvCxnSpPr>
+        <p:spPr>
+          <a:xfrm>
+            <a:off x="2468880" y="1984248"/>
+            <a:ext cx="320040" cy="0"/>
+          </a:xfrm>
+          <a:prstGeom prst="line">
+            <a:avLst/>
+          </a:prstGeom>
+          <a:ln w="19050">
+            <a:solidFill>
+              <a:srgbClr val="C9C9C9"/>
+            </a:solidFill>
+            <a:tailEnd type="triangle" w="med" len="med"/>
+          </a:ln>
+        </p:spPr>
+        <p:style>
+          <a:lnRef idx="2">
+            <a:schemeClr val="accent1"/>
+          </a:lnRef>
+          <a:fillRef idx="0">
+            <a:schemeClr val="accent1"/>
+          </a:fillRef>
+          <a:effectRef idx="1">
+            <a:schemeClr val="accent1"/>
+          </a:effectRef>
+          <a:fontRef idx="minor">
+            <a:schemeClr val="tx1"/>
+          </a:fontRef>
+        </p:style>
+      </p:cxnSp>
+      <p:sp>
+        <p:nvSpPr>
+          <p:cNvPr id="9" name="Rounded Rectangle 8"/>
+          <p:cNvSpPr/>
+          <p:nvPr/>
+        </p:nvSpPr>
+        <p:spPr>
+          <a:xfrm>
+            <a:off x="2788920" y="1554480"/>
+            <a:ext cx="1965960" cy="868680"/>
           </a:xfrm>
           <a:prstGeom prst="roundRect">
             <a:avLst>
@@ -12078,13 +12303,118 @@
           <a:p>
             <a:pPr algn="ctr"/>
             <a:r>
-              <a:rPr sz="1300" b="1">
+              <a:rPr sz="1150" b="1">
                 <a:solidFill>
                   <a:srgbClr val="1F4E79"/>
                 </a:solidFill>
                 <a:latin typeface="Segoe UI"/>
               </a:rPr>
-              <a:t>Shell commands</a:t>
+              <a:t>1 · In this role's list?</a:t>
+            </a:r>
+          </a:p>
+          <a:p>
+            <a:pPr algn="ctr"/>
+            <a:r>
+              <a:rPr sz="900" b="0">
+                <a:solidFill>
+                  <a:srgbClr val="1A1A1A"/>
+                </a:solidFill>
+                <a:latin typeface="Segoe UI"/>
+              </a:rPr>
+              <a:t>agents.yaml</a:t>
+            </a:r>
+          </a:p>
+        </p:txBody>
+      </p:sp>
+      <p:cxnSp>
+        <p:nvCxnSpPr>
+          <p:cNvPr id="10" name="Connector 9"/>
+          <p:cNvCxnSpPr/>
+          <p:nvPr/>
+        </p:nvCxnSpPr>
+        <p:spPr>
+          <a:xfrm>
+            <a:off x="3767328" y="2423160"/>
+            <a:ext cx="0" cy="457200"/>
+          </a:xfrm>
+          <a:prstGeom prst="line">
+            <a:avLst/>
+          </a:prstGeom>
+          <a:ln w="19050">
+            <a:solidFill>
+              <a:srgbClr val="8C2F2F"/>
+            </a:solidFill>
+            <a:tailEnd type="triangle" w="med" len="med"/>
+          </a:ln>
+        </p:spPr>
+        <p:style>
+          <a:lnRef idx="2">
+            <a:schemeClr val="accent1"/>
+          </a:lnRef>
+          <a:fillRef idx="0">
+            <a:schemeClr val="accent1"/>
+          </a:fillRef>
+          <a:effectRef idx="1">
+            <a:schemeClr val="accent1"/>
+          </a:effectRef>
+          <a:fontRef idx="minor">
+            <a:schemeClr val="tx1"/>
+          </a:fontRef>
+        </p:style>
+      </p:cxnSp>
+      <p:sp>
+        <p:nvSpPr>
+          <p:cNvPr id="11" name="Rounded Rectangle 10"/>
+          <p:cNvSpPr/>
+          <p:nvPr/>
+        </p:nvSpPr>
+        <p:spPr>
+          <a:xfrm>
+            <a:off x="2697480" y="2880360"/>
+            <a:ext cx="2148840" cy="822960"/>
+          </a:xfrm>
+          <a:prstGeom prst="roundRect">
+            <a:avLst>
+              <a:gd name="adj" fmla="val 10000"/>
+            </a:avLst>
+          </a:prstGeom>
+          <a:solidFill>
+            <a:srgbClr val="F7DFDF"/>
+          </a:solidFill>
+          <a:ln w="12700">
+            <a:solidFill>
+              <a:srgbClr val="8C2F2F"/>
+            </a:solidFill>
+          </a:ln>
+          <a:effectLst/>
+        </p:spPr>
+        <p:style>
+          <a:lnRef idx="1">
+            <a:schemeClr val="accent1"/>
+          </a:lnRef>
+          <a:fillRef idx="3">
+            <a:schemeClr val="accent1"/>
+          </a:fillRef>
+          <a:effectRef idx="2">
+            <a:schemeClr val="accent1"/>
+          </a:effectRef>
+          <a:fontRef idx="minor">
+            <a:schemeClr val="lt1"/>
+          </a:fontRef>
+        </p:style>
+        <p:txBody>
+          <a:bodyPr rtlCol="0" anchor="ctr" wrap="square" lIns="54864" rIns="54864" tIns="27432" bIns="27432"/>
+          <a:lstStyle/>
+          <a:p>
+            <a:pPr algn="ctr"/>
+            <a:r>
+              <a:rPr sz="1050" b="1">
+                <a:solidFill>
+                  <a:srgbClr val="8C2F2F"/>
+                </a:solidFill>
+                <a:latin typeface="Segoe UI"/>
+              </a:rPr>
+              <a:t>refused</a:t>
             </a:r>
           </a:p>
           <a:p>
@@ -12096,206 +12426,47 @@
                 </a:solidFill>
                 <a:latin typeface="Segoe UI"/>
               </a:rPr>
-              <a:t>every tool carrying a command string</a:t>
-            </a:r>
-          </a:p>
-        </p:txBody>
-      </p:sp>
-      <p:sp>
-        <p:nvSpPr>
-          <p:cNvPr id="8" name="TextBox 7"/>
-          <p:cNvSpPr txBox="1"/>
-          <p:nvPr/>
-        </p:nvSpPr>
-        <p:spPr>
-          <a:xfrm>
-            <a:off x="731520" y="1938528"/>
-            <a:ext cx="3429000" cy="621792"/>
-          </a:xfrm>
-          <a:prstGeom prst="rect">
+              <a:t>no schema was ever offered</a:t>
+            </a:r>
+          </a:p>
+        </p:txBody>
+      </p:sp>
+      <p:cxnSp>
+        <p:nvCxnSpPr>
+          <p:cNvPr id="12" name="Connector 11"/>
+          <p:cNvCxnSpPr/>
+          <p:nvPr/>
+        </p:nvCxnSpPr>
+        <p:spPr>
+          <a:xfrm>
+            <a:off x="4754880" y="1984248"/>
+            <a:ext cx="320040" cy="0"/>
+          </a:xfrm>
+          <a:prstGeom prst="line">
             <a:avLst/>
           </a:prstGeom>
-          <a:noFill/>
-        </p:spPr>
-        <p:txBody>
-          <a:bodyPr wrap="square" anchor="t" lIns="0" rIns="0" tIns="0" bIns="0">
-            <a:spAutoFit/>
-          </a:bodyPr>
-          <a:lstStyle/>
-          <a:p>
-            <a:pPr algn="l">
-              <a:spcAft>
-                <a:spcPts val="0"/>
-              </a:spcAft>
-            </a:pPr>
-            <a:r>
-              <a:rPr sz="900" b="0">
-                <a:solidFill>
-                  <a:srgbClr val="1A1A1A"/>
-                </a:solidFill>
-                <a:latin typeface="Segoe UI"/>
-              </a:rPr>
-              <a:t>· Assessed on: run_command · bash · shell · run_shell · serve · watch_until · ui_check. serve, watch_until and ui_check were holes — same string, no verdict.</a:t>
-            </a:r>
-          </a:p>
-        </p:txBody>
-      </p:sp>
-      <p:sp>
-        <p:nvSpPr>
-          <p:cNvPr id="9" name="TextBox 8"/>
-          <p:cNvSpPr txBox="1"/>
-          <p:nvPr/>
-        </p:nvSpPr>
-        <p:spPr>
-          <a:xfrm>
-            <a:off x="731520" y="2596896"/>
-            <a:ext cx="3429000" cy="621792"/>
-          </a:xfrm>
-          <a:prstGeom prst="rect">
-            <a:avLst/>
-          </a:prstGeom>
-          <a:noFill/>
-        </p:spPr>
-        <p:txBody>
-          <a:bodyPr wrap="square" anchor="t" lIns="0" rIns="0" tIns="0" bIns="0">
-            <a:spAutoFit/>
-          </a:bodyPr>
-          <a:lstStyle/>
-          <a:p>
-            <a:pPr algn="l">
-              <a:spcAft>
-                <a:spcPts val="0"/>
-              </a:spcAft>
-            </a:pPr>
-            <a:r>
-              <a:rPr sz="900" b="0">
-                <a:solidFill>
-                  <a:srgbClr val="1A1A1A"/>
-                </a:solidFill>
-                <a:latin typeface="Segoe UI"/>
-              </a:rPr>
-              <a:t>· dangerous → curl | sh · base64 | sh · scp/curl of ~/.ssh, .env, id_rsa, credentials · mkfs · dd of=/dev/* · fork bomb · shred. Refused unless confirmed.</a:t>
-            </a:r>
-          </a:p>
-        </p:txBody>
-      </p:sp>
-      <p:sp>
-        <p:nvSpPr>
-          <p:cNvPr id="10" name="TextBox 9"/>
-          <p:cNvSpPr txBox="1"/>
-          <p:nvPr/>
-        </p:nvSpPr>
-        <p:spPr>
-          <a:xfrm>
-            <a:off x="731520" y="3255264"/>
-            <a:ext cx="3429000" cy="621792"/>
-          </a:xfrm>
-          <a:prstGeom prst="rect">
-            <a:avLst/>
-          </a:prstGeom>
-          <a:noFill/>
-        </p:spPr>
-        <p:txBody>
-          <a:bodyPr wrap="square" anchor="t" lIns="0" rIns="0" tIns="0" bIns="0">
-            <a:spAutoFit/>
-          </a:bodyPr>
-          <a:lstStyle/>
-          <a:p>
-            <a:pPr algn="l">
-              <a:spcAft>
-                <a:spcPts val="0"/>
-              </a:spcAft>
-            </a:pPr>
-            <a:r>
-              <a:rPr sz="900" b="0">
-                <a:solidFill>
-                  <a:srgbClr val="1A1A1A"/>
-                </a:solidFill>
-                <a:latin typeface="Segoe UI"/>
-              </a:rPr>
-              <a:t>· caution → sudo · chmod 777 · chown · ANY git push · gh pr create · global installs · crontab · iptables. Asks by default.</a:t>
-            </a:r>
-          </a:p>
-        </p:txBody>
-      </p:sp>
-      <p:sp>
-        <p:nvSpPr>
-          <p:cNvPr id="11" name="TextBox 10"/>
-          <p:cNvSpPr txBox="1"/>
-          <p:nvPr/>
-        </p:nvSpPr>
-        <p:spPr>
-          <a:xfrm>
-            <a:off x="731520" y="3913632"/>
-            <a:ext cx="3429000" cy="621792"/>
-          </a:xfrm>
-          <a:prstGeom prst="rect">
-            <a:avLst/>
-          </a:prstGeom>
-          <a:noFill/>
-        </p:spPr>
-        <p:txBody>
-          <a:bodyPr wrap="square" anchor="t" lIns="0" rIns="0" tIns="0" bIns="0">
-            <a:spAutoFit/>
-          </a:bodyPr>
-          <a:lstStyle/>
-          <a:p>
-            <a:pPr algn="l">
-              <a:spcAft>
-                <a:spcPts val="0"/>
-              </a:spcAft>
-            </a:pPr>
-            <a:r>
-              <a:rPr sz="900" b="0">
-                <a:solidFill>
-                  <a:srgbClr val="1A1A1A"/>
-                </a:solidFill>
-                <a:latin typeface="Segoe UI"/>
-              </a:rPr>
-              <a:t>· Obfuscation is normalised before matching: ${IFS}, empty quote pairs (r''m), in-word backslashes.</a:t>
-            </a:r>
-          </a:p>
-        </p:txBody>
-      </p:sp>
-      <p:sp>
-        <p:nvSpPr>
-          <p:cNvPr id="12" name="TextBox 11"/>
-          <p:cNvSpPr txBox="1"/>
-          <p:nvPr/>
-        </p:nvSpPr>
-        <p:spPr>
-          <a:xfrm>
-            <a:off x="731520" y="4572000"/>
-            <a:ext cx="3429000" cy="621792"/>
-          </a:xfrm>
-          <a:prstGeom prst="rect">
-            <a:avLst/>
-          </a:prstGeom>
-          <a:noFill/>
-        </p:spPr>
-        <p:txBody>
-          <a:bodyPr wrap="square" anchor="t" lIns="0" rIns="0" tIns="0" bIns="0">
-            <a:spAutoFit/>
-          </a:bodyPr>
-          <a:lstStyle/>
-          <a:p>
-            <a:pPr algn="l">
-              <a:spcAft>
-                <a:spcPts val="0"/>
-              </a:spcAft>
-            </a:pPr>
-            <a:r>
-              <a:rPr sz="900" b="0">
-                <a:solidFill>
-                  <a:srgbClr val="1A1A1A"/>
-                </a:solidFill>
-                <a:latin typeface="Segoe UI"/>
-              </a:rPr>
-              <a:t>· Floors underneath: delete guard fires with approvals off · git add -A refused · workspace jail clamps paths · Docker sandbox opt-in, REQUIRED mode refuses host fallback.</a:t>
-            </a:r>
-          </a:p>
-        </p:txBody>
-      </p:sp>
+          <a:ln w="19050">
+            <a:solidFill>
+              <a:srgbClr val="C9C9C9"/>
+            </a:solidFill>
+            <a:tailEnd type="triangle" w="med" len="med"/>
+          </a:ln>
+        </p:spPr>
+        <p:style>
+          <a:lnRef idx="2">
+            <a:schemeClr val="accent1"/>
+          </a:lnRef>
+          <a:fillRef idx="0">
+            <a:schemeClr val="accent1"/>
+          </a:fillRef>
+          <a:effectRef idx="1">
+            <a:schemeClr val="accent1"/>
+          </a:effectRef>
+          <a:fontRef idx="minor">
+            <a:schemeClr val="tx1"/>
+          </a:fontRef>
+        </p:style>
+      </p:cxnSp>
       <p:sp>
         <p:nvSpPr>
           <p:cNvPr id="13" name="Rounded Rectangle 12"/>
@@ -12304,8 +12475,8 @@
         </p:nvSpPr>
         <p:spPr>
           <a:xfrm>
-            <a:off x="4480560" y="1325880"/>
-            <a:ext cx="3520440" cy="475488"/>
+            <a:off x="5074920" y="1554480"/>
+            <a:ext cx="1965960" cy="868680"/>
           </a:xfrm>
           <a:prstGeom prst="roundRect">
             <a:avLst>
@@ -12342,13 +12513,118 @@
           <a:p>
             <a:pPr algn="ctr"/>
             <a:r>
-              <a:rPr sz="1300" b="1">
+              <a:rPr sz="1150" b="1">
                 <a:solidFill>
                   <a:srgbClr val="5B3A6E"/>
                 </a:solidFill>
                 <a:latin typeface="Segoe UI"/>
               </a:rPr>
-              <a:t>IPython kernel</a:t>
+              <a:t>2 · Policy for this tool</a:t>
+            </a:r>
+          </a:p>
+          <a:p>
+            <a:pPr algn="ctr"/>
+            <a:r>
+              <a:rPr sz="900" b="0">
+                <a:solidFill>
+                  <a:srgbClr val="1A1A1A"/>
+                </a:solidFill>
+                <a:latin typeface="Segoe UI"/>
+              </a:rPr>
+              <a:t>allow · ask · deny</a:t>
+            </a:r>
+          </a:p>
+        </p:txBody>
+      </p:sp>
+      <p:cxnSp>
+        <p:nvCxnSpPr>
+          <p:cNvPr id="14" name="Connector 13"/>
+          <p:cNvCxnSpPr/>
+          <p:nvPr/>
+        </p:nvCxnSpPr>
+        <p:spPr>
+          <a:xfrm>
+            <a:off x="6053328" y="2423160"/>
+            <a:ext cx="0" cy="457200"/>
+          </a:xfrm>
+          <a:prstGeom prst="line">
+            <a:avLst/>
+          </a:prstGeom>
+          <a:ln w="19050">
+            <a:solidFill>
+              <a:srgbClr val="8C2F2F"/>
+            </a:solidFill>
+            <a:tailEnd type="triangle" w="med" len="med"/>
+          </a:ln>
+        </p:spPr>
+        <p:style>
+          <a:lnRef idx="2">
+            <a:schemeClr val="accent1"/>
+          </a:lnRef>
+          <a:fillRef idx="0">
+            <a:schemeClr val="accent1"/>
+          </a:fillRef>
+          <a:effectRef idx="1">
+            <a:schemeClr val="accent1"/>
+          </a:effectRef>
+          <a:fontRef idx="minor">
+            <a:schemeClr val="tx1"/>
+          </a:fontRef>
+        </p:style>
+      </p:cxnSp>
+      <p:sp>
+        <p:nvSpPr>
+          <p:cNvPr id="15" name="Rounded Rectangle 14"/>
+          <p:cNvSpPr/>
+          <p:nvPr/>
+        </p:nvSpPr>
+        <p:spPr>
+          <a:xfrm>
+            <a:off x="4983480" y="2880360"/>
+            <a:ext cx="2148840" cy="822960"/>
+          </a:xfrm>
+          <a:prstGeom prst="roundRect">
+            <a:avLst>
+              <a:gd name="adj" fmla="val 10000"/>
+            </a:avLst>
+          </a:prstGeom>
+          <a:solidFill>
+            <a:srgbClr val="F7DFDF"/>
+          </a:solidFill>
+          <a:ln w="12700">
+            <a:solidFill>
+              <a:srgbClr val="8C2F2F"/>
+            </a:solidFill>
+          </a:ln>
+          <a:effectLst/>
+        </p:spPr>
+        <p:style>
+          <a:lnRef idx="1">
+            <a:schemeClr val="accent1"/>
+          </a:lnRef>
+          <a:fillRef idx="3">
+            <a:schemeClr val="accent1"/>
+          </a:fillRef>
+          <a:effectRef idx="2">
+            <a:schemeClr val="accent1"/>
+          </a:effectRef>
+          <a:fontRef idx="minor">
+            <a:schemeClr val="lt1"/>
+          </a:fontRef>
+        </p:style>
+        <p:txBody>
+          <a:bodyPr rtlCol="0" anchor="ctr" wrap="square" lIns="54864" rIns="54864" tIns="27432" bIns="27432"/>
+          <a:lstStyle/>
+          <a:p>
+            <a:pPr algn="ctr"/>
+            <a:r>
+              <a:rPr sz="1050" b="1">
+                <a:solidFill>
+                  <a:srgbClr val="8C2F2F"/>
+                </a:solidFill>
+                <a:latin typeface="Segoe UI"/>
+              </a:rPr>
+              <a:t>refused</a:t>
             </a:r>
           </a:p>
           <a:p>
@@ -12360,38 +12636,104 @@
                 </a:solidFill>
                 <a:latin typeface="Segoe UI"/>
               </a:rPr>
-              <a:t>execute_ipython_cell — arbitrary Python</a:t>
-            </a:r>
-          </a:p>
-        </p:txBody>
-      </p:sp>
-      <p:sp>
-        <p:nvSpPr>
-          <p:cNvPr id="14" name="TextBox 13"/>
-          <p:cNvSpPr txBox="1"/>
-          <p:nvPr/>
-        </p:nvSpPr>
-        <p:spPr>
-          <a:xfrm>
-            <a:off x="4526280" y="1938528"/>
-            <a:ext cx="3429000" cy="621792"/>
-          </a:xfrm>
-          <a:prstGeom prst="rect">
+              <a:t>deny is a hard refusal</a:t>
+            </a:r>
+          </a:p>
+        </p:txBody>
+      </p:sp>
+      <p:cxnSp>
+        <p:nvCxnSpPr>
+          <p:cNvPr id="16" name="Connector 15"/>
+          <p:cNvCxnSpPr/>
+          <p:nvPr/>
+        </p:nvCxnSpPr>
+        <p:spPr>
+          <a:xfrm>
+            <a:off x="7040880" y="1984248"/>
+            <a:ext cx="320040" cy="0"/>
+          </a:xfrm>
+          <a:prstGeom prst="line">
             <a:avLst/>
           </a:prstGeom>
-          <a:noFill/>
-        </p:spPr>
-        <p:txBody>
-          <a:bodyPr wrap="square" anchor="t" lIns="0" rIns="0" tIns="0" bIns="0">
-            <a:spAutoFit/>
-          </a:bodyPr>
-          <a:lstStyle/>
-          <a:p>
-            <a:pPr algn="l">
-              <a:spcAft>
-                <a:spcPts val="0"/>
-              </a:spcAft>
-            </a:pPr>
+          <a:ln w="19050">
+            <a:solidFill>
+              <a:srgbClr val="C9C9C9"/>
+            </a:solidFill>
+            <a:tailEnd type="triangle" w="med" len="med"/>
+          </a:ln>
+        </p:spPr>
+        <p:style>
+          <a:lnRef idx="2">
+            <a:schemeClr val="accent1"/>
+          </a:lnRef>
+          <a:fillRef idx="0">
+            <a:schemeClr val="accent1"/>
+          </a:fillRef>
+          <a:effectRef idx="1">
+            <a:schemeClr val="accent1"/>
+          </a:effectRef>
+          <a:fontRef idx="minor">
+            <a:schemeClr val="tx1"/>
+          </a:fontRef>
+        </p:style>
+      </p:cxnSp>
+      <p:sp>
+        <p:nvSpPr>
+          <p:cNvPr id="17" name="Rounded Rectangle 16"/>
+          <p:cNvSpPr/>
+          <p:nvPr/>
+        </p:nvSpPr>
+        <p:spPr>
+          <a:xfrm>
+            <a:off x="7360920" y="1554480"/>
+            <a:ext cx="1965960" cy="868680"/>
+          </a:xfrm>
+          <a:prstGeom prst="roundRect">
+            <a:avLst>
+              <a:gd name="adj" fmla="val 10000"/>
+            </a:avLst>
+          </a:prstGeom>
+          <a:solidFill>
+            <a:srgbClr val="F7ECD5"/>
+          </a:solidFill>
+          <a:ln w="12700">
+            <a:solidFill>
+              <a:srgbClr val="8A5A00"/>
+            </a:solidFill>
+          </a:ln>
+          <a:effectLst/>
+        </p:spPr>
+        <p:style>
+          <a:lnRef idx="1">
+            <a:schemeClr val="accent1"/>
+          </a:lnRef>
+          <a:fillRef idx="3">
+            <a:schemeClr val="accent1"/>
+          </a:fillRef>
+          <a:effectRef idx="2">
+            <a:schemeClr val="accent1"/>
+          </a:effectRef>
+          <a:fontRef idx="minor">
+            <a:schemeClr val="lt1"/>
+          </a:fontRef>
+        </p:style>
+        <p:txBody>
+          <a:bodyPr rtlCol="0" anchor="ctr" wrap="square" lIns="54864" rIns="54864" tIns="27432" bIns="27432"/>
+          <a:lstStyle/>
+          <a:p>
+            <a:pPr algn="ctr"/>
+            <a:r>
+              <a:rPr sz="1150" b="1">
+                <a:solidFill>
+                  <a:srgbClr val="8A5A00"/>
+                </a:solidFill>
+                <a:latin typeface="Segoe UI"/>
+              </a:rPr>
+              <a:t>3 · How risky is it?</a:t>
+            </a:r>
+          </a:p>
+          <a:p>
+            <a:pPr algn="ctr"/>
             <a:r>
               <a:rPr sz="900" b="0">
                 <a:solidFill>
@@ -12399,167 +12741,47 @@
                 </a:solidFill>
                 <a:latin typeface="Segoe UI"/>
               </a:rPr>
-              <a:t>· Defaults to ASK, like Cursor and Claude Code gate code execution: arbitrary code in a live kernel is never a silent call.</a:t>
-            </a:r>
-          </a:p>
-        </p:txBody>
-      </p:sp>
-      <p:sp>
-        <p:nvSpPr>
-          <p:cNvPr id="15" name="TextBox 14"/>
-          <p:cNvSpPr txBox="1"/>
-          <p:nvPr/>
-        </p:nvSpPr>
-        <p:spPr>
-          <a:xfrm>
-            <a:off x="4526280" y="2596896"/>
-            <a:ext cx="3429000" cy="621792"/>
-          </a:xfrm>
-          <a:prstGeom prst="rect">
+              <a:t>command + cell</a:t>
+            </a:r>
+          </a:p>
+        </p:txBody>
+      </p:sp>
+      <p:cxnSp>
+        <p:nvCxnSpPr>
+          <p:cNvPr id="18" name="Connector 17"/>
+          <p:cNvCxnSpPr/>
+          <p:nvPr/>
+        </p:nvCxnSpPr>
+        <p:spPr>
+          <a:xfrm>
+            <a:off x="8339328" y="2423160"/>
+            <a:ext cx="0" cy="457200"/>
+          </a:xfrm>
+          <a:prstGeom prst="line">
             <a:avLst/>
           </a:prstGeom>
-          <a:noFill/>
-        </p:spPr>
-        <p:txBody>
-          <a:bodyPr wrap="square" anchor="t" lIns="0" rIns="0" tIns="0" bIns="0">
-            <a:spAutoFit/>
-          </a:bodyPr>
-          <a:lstStyle/>
-          <a:p>
-            <a:pPr algn="l">
-              <a:spcAft>
-                <a:spcPts val="0"/>
-              </a:spcAft>
-            </a:pPr>
-            <a:r>
-              <a:rPr sz="900" b="0">
-                <a:solidFill>
-                  <a:srgbClr val="1A1A1A"/>
-                </a:solidFill>
-                <a:latin typeface="Segoe UI"/>
-              </a:rPr>
-              <a:t>· Bounded: 60 s timeout then the kernel is interrupted, output capped at 8 KB, one kernel per run, destroyed in the runner's finally block.</a:t>
-            </a:r>
-          </a:p>
-        </p:txBody>
-      </p:sp>
-      <p:sp>
-        <p:nvSpPr>
-          <p:cNvPr id="16" name="TextBox 15"/>
-          <p:cNvSpPr txBox="1"/>
-          <p:nvPr/>
-        </p:nvSpPr>
-        <p:spPr>
-          <a:xfrm>
-            <a:off x="4526280" y="3255264"/>
-            <a:ext cx="3429000" cy="621792"/>
-          </a:xfrm>
-          <a:prstGeom prst="rect">
-            <a:avLst/>
-          </a:prstGeom>
-          <a:noFill/>
-        </p:spPr>
-        <p:txBody>
-          <a:bodyPr wrap="square" anchor="t" lIns="0" rIns="0" tIns="0" bIns="0">
-            <a:spAutoFit/>
-          </a:bodyPr>
-          <a:lstStyle/>
-          <a:p>
-            <a:pPr algn="l">
-              <a:spcAft>
-                <a:spcPts val="0"/>
-              </a:spcAft>
-            </a:pPr>
-            <a:r>
-              <a:rPr sz="900" b="0">
-                <a:solidFill>
-                  <a:srgbClr val="1A1A1A"/>
-                </a:solidFill>
-                <a:latin typeface="Segoe UI"/>
-              </a:rPr>
-              <a:t>· Scoped away entirely from the roles that have no business running code — the nine forbidden: ALL judgement agents and the read-only ctx_* gatherers.</a:t>
-            </a:r>
-          </a:p>
-        </p:txBody>
-      </p:sp>
-      <p:sp>
-        <p:nvSpPr>
-          <p:cNvPr id="17" name="TextBox 16"/>
-          <p:cNvSpPr txBox="1"/>
-          <p:nvPr/>
-        </p:nvSpPr>
-        <p:spPr>
-          <a:xfrm>
-            <a:off x="4526280" y="3913632"/>
-            <a:ext cx="3429000" cy="621792"/>
-          </a:xfrm>
-          <a:prstGeom prst="rect">
-            <a:avLst/>
-          </a:prstGeom>
-          <a:noFill/>
-        </p:spPr>
-        <p:txBody>
-          <a:bodyPr wrap="square" anchor="t" lIns="0" rIns="0" tIns="0" bIns="0">
-            <a:spAutoFit/>
-          </a:bodyPr>
-          <a:lstStyle/>
-          <a:p>
-            <a:pPr algn="l">
-              <a:spcAft>
-                <a:spcPts val="0"/>
-              </a:spcAft>
-            </a:pPr>
-            <a:r>
-              <a:rPr sz="900" b="0">
-                <a:solidFill>
-                  <a:srgbClr val="1A1A1A"/>
-                </a:solidFill>
-                <a:latin typeface="Segoe UI"/>
-              </a:rPr>
-              <a:t>· It can still open a socket and write a file: it is Python, not a tool with a schema. The sandbox routes bash, not the kernel.</a:t>
-            </a:r>
-          </a:p>
-        </p:txBody>
-      </p:sp>
-      <p:sp>
-        <p:nvSpPr>
-          <p:cNvPr id="18" name="TextBox 17"/>
-          <p:cNvSpPr txBox="1"/>
-          <p:nvPr/>
-        </p:nvSpPr>
-        <p:spPr>
-          <a:xfrm>
-            <a:off x="4526280" y="4572000"/>
-            <a:ext cx="3429000" cy="621792"/>
-          </a:xfrm>
-          <a:prstGeom prst="rect">
-            <a:avLst/>
-          </a:prstGeom>
-          <a:noFill/>
-        </p:spPr>
-        <p:txBody>
-          <a:bodyPr wrap="square" anchor="t" lIns="0" rIns="0" tIns="0" bIns="0">
-            <a:spAutoFit/>
-          </a:bodyPr>
-          <a:lstStyle/>
-          <a:p>
-            <a:pPr algn="l">
-              <a:spcAft>
-                <a:spcPts val="0"/>
-              </a:spcAft>
-            </a:pPr>
-            <a:r>
-              <a:rPr sz="900" b="0">
-                <a:solidFill>
-                  <a:srgbClr val="1A1A1A"/>
-                </a:solidFill>
-                <a:latin typeface="Segoe UI"/>
-              </a:rPr>
-              <a:t>· An unattended run has no approver, so ASK degrades to allow. Container mode is the boundary for untrusted work.</a:t>
-            </a:r>
-          </a:p>
-        </p:txBody>
-      </p:sp>
+          <a:ln w="19050">
+            <a:solidFill>
+              <a:srgbClr val="8C2F2F"/>
+            </a:solidFill>
+            <a:tailEnd type="triangle" w="med" len="med"/>
+          </a:ln>
+        </p:spPr>
+        <p:style>
+          <a:lnRef idx="2">
+            <a:schemeClr val="accent1"/>
+          </a:lnRef>
+          <a:fillRef idx="0">
+            <a:schemeClr val="accent1"/>
+          </a:fillRef>
+          <a:effectRef idx="1">
+            <a:schemeClr val="accent1"/>
+          </a:effectRef>
+          <a:fontRef idx="minor">
+            <a:schemeClr val="tx1"/>
+          </a:fontRef>
+        </p:style>
+      </p:cxnSp>
       <p:sp>
         <p:nvSpPr>
           <p:cNvPr id="19" name="Rounded Rectangle 18"/>
@@ -12568,8 +12790,125 @@
         </p:nvSpPr>
         <p:spPr>
           <a:xfrm>
-            <a:off x="8183879" y="1325880"/>
-            <a:ext cx="3319272" cy="475488"/>
+            <a:off x="7269480" y="2880360"/>
+            <a:ext cx="2148840" cy="822960"/>
+          </a:xfrm>
+          <a:prstGeom prst="roundRect">
+            <a:avLst>
+              <a:gd name="adj" fmla="val 10000"/>
+            </a:avLst>
+          </a:prstGeom>
+          <a:solidFill>
+            <a:srgbClr val="F7DFDF"/>
+          </a:solidFill>
+          <a:ln w="12700">
+            <a:solidFill>
+              <a:srgbClr val="8C2F2F"/>
+            </a:solidFill>
+          </a:ln>
+          <a:effectLst/>
+        </p:spPr>
+        <p:style>
+          <a:lnRef idx="1">
+            <a:schemeClr val="accent1"/>
+          </a:lnRef>
+          <a:fillRef idx="3">
+            <a:schemeClr val="accent1"/>
+          </a:fillRef>
+          <a:effectRef idx="2">
+            <a:schemeClr val="accent1"/>
+          </a:effectRef>
+          <a:fontRef idx="minor">
+            <a:schemeClr val="lt1"/>
+          </a:fontRef>
+        </p:style>
+        <p:txBody>
+          <a:bodyPr rtlCol="0" anchor="ctr" wrap="square" lIns="54864" rIns="54864" tIns="27432" bIns="27432"/>
+          <a:lstStyle/>
+          <a:p>
+            <a:pPr algn="ctr"/>
+            <a:r>
+              <a:rPr sz="1050" b="1">
+                <a:solidFill>
+                  <a:srgbClr val="8C2F2F"/>
+                </a:solidFill>
+                <a:latin typeface="Segoe UI"/>
+              </a:rPr>
+              <a:t>refused</a:t>
+            </a:r>
+          </a:p>
+          <a:p>
+            <a:pPr algn="ctr"/>
+            <a:r>
+              <a:rPr sz="850" b="0">
+                <a:solidFill>
+                  <a:srgbClr val="1A1A1A"/>
+                </a:solidFill>
+                <a:latin typeface="Segoe UI"/>
+              </a:rPr>
+              <a:t>dangerous: refused, not asked,</a:t>
+            </a:r>
+          </a:p>
+          <a:p>
+            <a:pPr algn="ctr"/>
+            <a:r>
+              <a:rPr sz="850" b="0">
+                <a:solidFill>
+                  <a:srgbClr val="1A1A1A"/>
+                </a:solidFill>
+                <a:latin typeface="Segoe UI"/>
+              </a:rPr>
+              <a:t>when nobody can approve</a:t>
+            </a:r>
+          </a:p>
+        </p:txBody>
+      </p:sp>
+      <p:cxnSp>
+        <p:nvCxnSpPr>
+          <p:cNvPr id="20" name="Connector 19"/>
+          <p:cNvCxnSpPr/>
+          <p:nvPr/>
+        </p:nvCxnSpPr>
+        <p:spPr>
+          <a:xfrm>
+            <a:off x="9326880" y="1984248"/>
+            <a:ext cx="320040" cy="0"/>
+          </a:xfrm>
+          <a:prstGeom prst="line">
+            <a:avLst/>
+          </a:prstGeom>
+          <a:ln w="19050">
+            <a:solidFill>
+              <a:srgbClr val="C9C9C9"/>
+            </a:solidFill>
+            <a:tailEnd type="triangle" w="med" len="med"/>
+          </a:ln>
+        </p:spPr>
+        <p:style>
+          <a:lnRef idx="2">
+            <a:schemeClr val="accent1"/>
+          </a:lnRef>
+          <a:fillRef idx="0">
+            <a:schemeClr val="accent1"/>
+          </a:fillRef>
+          <a:effectRef idx="1">
+            <a:schemeClr val="accent1"/>
+          </a:effectRef>
+          <a:fontRef idx="minor">
+            <a:schemeClr val="tx1"/>
+          </a:fontRef>
+        </p:style>
+      </p:cxnSp>
+      <p:sp>
+        <p:nvSpPr>
+          <p:cNvPr id="21" name="Rounded Rectangle 20"/>
+          <p:cNvSpPr/>
+          <p:nvPr/>
+        </p:nvSpPr>
+        <p:spPr>
+          <a:xfrm>
+            <a:off x="9646920" y="1554480"/>
+            <a:ext cx="1965960" cy="868680"/>
           </a:xfrm>
           <a:prstGeom prst="roundRect">
             <a:avLst>
@@ -12606,234 +12945,75 @@
           <a:p>
             <a:pPr algn="ctr"/>
             <a:r>
-              <a:rPr sz="1300" b="1">
+              <a:rPr sz="1150" b="1">
                 <a:solidFill>
                   <a:srgbClr val="1E6B52"/>
                 </a:solidFill>
                 <a:latin typeface="Segoe UI"/>
               </a:rPr>
-              <a:t>Data leaving</a:t>
-            </a:r>
-          </a:p>
-          <a:p>
-            <a:pPr algn="ctr"/>
-            <a:r>
-              <a:rPr sz="850" b="0">
+              <a:t>4 · May it leave the box?</a:t>
+            </a:r>
+          </a:p>
+          <a:p>
+            <a:pPr algn="ctr"/>
+            <a:r>
+              <a:rPr sz="900" b="0">
                 <a:solidFill>
                   <a:srgbClr val="1A1A1A"/>
                 </a:solidFill>
                 <a:latin typeface="Segoe UI"/>
               </a:rPr>
-              <a:t>API calls, uploads, mail, telemetry</a:t>
-            </a:r>
-          </a:p>
-        </p:txBody>
-      </p:sp>
-      <p:sp>
-        <p:nvSpPr>
-          <p:cNvPr id="20" name="TextBox 19"/>
-          <p:cNvSpPr txBox="1"/>
-          <p:nvPr/>
-        </p:nvSpPr>
-        <p:spPr>
-          <a:xfrm>
-            <a:off x="8229599" y="1938528"/>
-            <a:ext cx="3227832" cy="621792"/>
-          </a:xfrm>
-          <a:prstGeom prst="rect">
+              <a:t>egress allowlist</a:t>
+            </a:r>
+          </a:p>
+        </p:txBody>
+      </p:sp>
+      <p:cxnSp>
+        <p:nvCxnSpPr>
+          <p:cNvPr id="22" name="Connector 21"/>
+          <p:cNvCxnSpPr/>
+          <p:nvPr/>
+        </p:nvCxnSpPr>
+        <p:spPr>
+          <a:xfrm>
+            <a:off x="10625328" y="2423160"/>
+            <a:ext cx="0" cy="457200"/>
+          </a:xfrm>
+          <a:prstGeom prst="line">
             <a:avLst/>
           </a:prstGeom>
-          <a:noFill/>
-        </p:spPr>
-        <p:txBody>
-          <a:bodyPr wrap="square" anchor="t" lIns="0" rIns="0" tIns="0" bIns="0">
-            <a:spAutoFit/>
-          </a:bodyPr>
-          <a:lstStyle/>
-          <a:p>
-            <a:pPr algn="l">
-              <a:spcAft>
-                <a:spcPts val="0"/>
-              </a:spcAft>
-            </a:pPr>
-            <a:r>
-              <a:rPr sz="900" b="0">
-                <a:solidFill>
-                  <a:srgbClr val="1A1A1A"/>
-                </a:solidFill>
-                <a:latin typeface="Segoe UI"/>
-              </a:rPr>
-              <a:t>· One decision point: egress.allow() on integration · email · telemetry · mcp · sync, and on every page fetch.</a:t>
-            </a:r>
-          </a:p>
-        </p:txBody>
-      </p:sp>
-      <p:sp>
-        <p:nvSpPr>
-          <p:cNvPr id="21" name="TextBox 20"/>
-          <p:cNvSpPr txBox="1"/>
-          <p:nvPr/>
-        </p:nvSpPr>
-        <p:spPr>
-          <a:xfrm>
-            <a:off x="8229599" y="2596896"/>
-            <a:ext cx="3227832" cy="621792"/>
-          </a:xfrm>
-          <a:prstGeom prst="rect">
-            <a:avLst/>
-          </a:prstGeom>
-          <a:noFill/>
-        </p:spPr>
-        <p:txBody>
-          <a:bodyPr wrap="square" anchor="t" lIns="0" rIns="0" tIns="0" bIns="0">
-            <a:spAutoFit/>
-          </a:bodyPr>
-          <a:lstStyle/>
-          <a:p>
-            <a:pPr algn="l">
-              <a:spcAft>
-                <a:spcPts val="0"/>
-              </a:spcAft>
-            </a:pPr>
-            <a:r>
-              <a:rPr sz="900" b="0">
-                <a:solidFill>
-                  <a:srgbClr val="1A1A1A"/>
-                </a:solidFill>
-                <a:latin typeface="Segoe UI"/>
-              </a:rPr>
-              <a:t>· Host allowlist defaults to DENY, seeded from the integrations you configured. If the list cannot be read, the call is refused.</a:t>
-            </a:r>
-          </a:p>
-        </p:txBody>
-      </p:sp>
-      <p:sp>
-        <p:nvSpPr>
-          <p:cNvPr id="22" name="TextBox 21"/>
-          <p:cNvSpPr txBox="1"/>
-          <p:nvPr/>
-        </p:nvSpPr>
-        <p:spPr>
-          <a:xfrm>
-            <a:off x="8229599" y="3255264"/>
-            <a:ext cx="3227832" cy="621792"/>
-          </a:xfrm>
-          <a:prstGeom prst="rect">
-            <a:avLst/>
-          </a:prstGeom>
-          <a:noFill/>
-        </p:spPr>
-        <p:txBody>
-          <a:bodyPr wrap="square" anchor="t" lIns="0" rIns="0" tIns="0" bIns="0">
-            <a:spAutoFit/>
-          </a:bodyPr>
-          <a:lstStyle/>
-          <a:p>
-            <a:pPr algn="l">
-              <a:spcAft>
-                <a:spcPts val="0"/>
-              </a:spcAft>
-            </a:pPr>
-            <a:r>
-              <a:rPr sz="900" b="0">
-                <a:solidFill>
-                  <a:srgbClr val="1A1A1A"/>
-                </a:solidFill>
-                <a:latin typeface="Segoe UI"/>
-              </a:rPr>
-              <a:t>· Reading is not writing: a host added in Settings can be read, never posted to. A destination that RECEIVES data must be a configured integration with a credential.</a:t>
-            </a:r>
-          </a:p>
-        </p:txBody>
-      </p:sp>
-      <p:sp>
-        <p:nvSpPr>
-          <p:cNvPr id="23" name="TextBox 22"/>
-          <p:cNvSpPr txBox="1"/>
-          <p:nvPr/>
-        </p:nvSpPr>
-        <p:spPr>
-          <a:xfrm>
-            <a:off x="8229599" y="3913632"/>
-            <a:ext cx="3227832" cy="621792"/>
-          </a:xfrm>
-          <a:prstGeom prst="rect">
-            <a:avLst/>
-          </a:prstGeom>
-          <a:noFill/>
-        </p:spPr>
-        <p:txBody>
-          <a:bodyPr wrap="square" anchor="t" lIns="0" rIns="0" tIns="0" bIns="0">
-            <a:spAutoFit/>
-          </a:bodyPr>
-          <a:lstStyle/>
-          <a:p>
-            <a:pPr algn="l">
-              <a:spcAft>
-                <a:spcPts val="0"/>
-              </a:spcAft>
-            </a:pPr>
-            <a:r>
-              <a:rPr sz="900" b="0">
-                <a:solidFill>
-                  <a:srgbClr val="1A1A1A"/>
-                </a:solidFill>
-                <a:latin typeface="Segoe UI"/>
-              </a:rPr>
-              <a:t>· An upload has its own switch — an attachment is file content, not a sentence (AIFORGE_UPLOAD_DISABLE).</a:t>
-            </a:r>
-          </a:p>
-        </p:txBody>
-      </p:sp>
-      <p:sp>
-        <p:nvSpPr>
-          <p:cNvPr id="24" name="TextBox 23"/>
-          <p:cNvSpPr txBox="1"/>
-          <p:nvPr/>
-        </p:nvSpPr>
-        <p:spPr>
-          <a:xfrm>
-            <a:off x="8229599" y="4572000"/>
-            <a:ext cx="3227832" cy="621792"/>
-          </a:xfrm>
-          <a:prstGeom prst="rect">
-            <a:avLst/>
-          </a:prstGeom>
-          <a:noFill/>
-        </p:spPr>
-        <p:txBody>
-          <a:bodyPr wrap="square" anchor="t" lIns="0" rIns="0" tIns="0" bIns="0">
-            <a:spAutoFit/>
-          </a:bodyPr>
-          <a:lstStyle/>
-          <a:p>
-            <a:pPr algn="l">
-              <a:spcAft>
-                <a:spcPts val="0"/>
-              </a:spcAft>
-            </a:pPr>
-            <a:r>
-              <a:rPr sz="900" b="0">
-                <a:solidFill>
-                  <a:srgbClr val="1A1A1A"/>
-                </a:solidFill>
-                <a:latin typeface="Segoe UI"/>
-              </a:rPr>
-              <a:t>· 20 write tools (jira · confluence · gitlab · email_send · github_pr) default to ASK, and an unattended run refuses them outright. No telemetry by default.</a:t>
-            </a:r>
-          </a:p>
-        </p:txBody>
-      </p:sp>
-      <p:sp>
-        <p:nvSpPr>
-          <p:cNvPr id="25" name="Rounded Rectangle 24"/>
+          <a:ln w="19050">
+            <a:solidFill>
+              <a:srgbClr val="8C2F2F"/>
+            </a:solidFill>
+            <a:tailEnd type="triangle" w="med" len="med"/>
+          </a:ln>
+        </p:spPr>
+        <p:style>
+          <a:lnRef idx="2">
+            <a:schemeClr val="accent1"/>
+          </a:lnRef>
+          <a:fillRef idx="0">
+            <a:schemeClr val="accent1"/>
+          </a:fillRef>
+          <a:effectRef idx="1">
+            <a:schemeClr val="accent1"/>
+          </a:effectRef>
+          <a:fontRef idx="minor">
+            <a:schemeClr val="tx1"/>
+          </a:fontRef>
+        </p:style>
+      </p:cxnSp>
+      <p:sp>
+        <p:nvSpPr>
+          <p:cNvPr id="23" name="Rounded Rectangle 22"/>
           <p:cNvSpPr/>
           <p:nvPr/>
         </p:nvSpPr>
         <p:spPr>
           <a:xfrm>
-            <a:off x="685800" y="5321808"/>
-            <a:ext cx="10817352" cy="566928"/>
+            <a:off x="9555480" y="2880360"/>
+            <a:ext cx="2148840" cy="822960"/>
           </a:xfrm>
           <a:prstGeom prst="roundRect">
             <a:avLst>
@@ -12841,11 +13021,11 @@
             </a:avLst>
           </a:prstGeom>
           <a:solidFill>
-            <a:srgbClr val="F7ECD5"/>
+            <a:srgbClr val="F7DFDF"/>
           </a:solidFill>
           <a:ln w="12700">
             <a:solidFill>
-              <a:srgbClr val="8A5A00"/>
+              <a:srgbClr val="8C2F2F"/>
             </a:solidFill>
           </a:ln>
           <a:effectLst/>
@@ -12870,25 +13050,382 @@
           <a:p>
             <a:pPr algn="ctr"/>
             <a:r>
-              <a:rPr sz="1150" b="1">
-                <a:solidFill>
-                  <a:srgbClr val="8A5A00"/>
-                </a:solidFill>
-                <a:latin typeface="Segoe UI"/>
-              </a:rPr>
-              <a:t>The boundary this code does not draw</a:t>
-            </a:r>
-          </a:p>
-          <a:p>
-            <a:pPr algn="ctr"/>
-            <a:r>
-              <a:rPr sz="900" b="0">
+              <a:rPr sz="1050" b="1">
+                <a:solidFill>
+                  <a:srgbClr val="8C2F2F"/>
+                </a:solidFill>
+                <a:latin typeface="Segoe UI"/>
+              </a:rPr>
+              <a:t>refused</a:t>
+            </a:r>
+          </a:p>
+          <a:p>
+            <a:pPr algn="ctr"/>
+            <a:r>
+              <a:rPr sz="850" b="0">
                 <a:solidFill>
                   <a:srgbClr val="1A1A1A"/>
                 </a:solidFill>
                 <a:latin typeface="Segoe UI"/>
               </a:rPr>
-              <a:t>run_command and execute_ipython_cell open sockets themselves: curl in a shell never passes through the egress module and cannot be made to. That line is an OS firewall or a network namespace. Regex risk-matching is a floor, not a proof — pair it with the sandbox.</a:t>
+              <a:t>default deny · read ≠ write ·</a:t>
+            </a:r>
+          </a:p>
+          <a:p>
+            <a:pPr algn="ctr"/>
+            <a:r>
+              <a:rPr sz="850" b="0">
+                <a:solidFill>
+                  <a:srgbClr val="1A1A1A"/>
+                </a:solidFill>
+                <a:latin typeface="Segoe UI"/>
+              </a:rPr>
+              <a:t>uploads switched separately</a:t>
+            </a:r>
+          </a:p>
+        </p:txBody>
+      </p:sp>
+      <p:sp>
+        <p:nvSpPr>
+          <p:cNvPr id="24" name="Rounded Rectangle 23"/>
+          <p:cNvSpPr/>
+          <p:nvPr/>
+        </p:nvSpPr>
+        <p:spPr>
+          <a:xfrm>
+            <a:off x="685800" y="3977639"/>
+            <a:ext cx="10817352" cy="868680"/>
+          </a:xfrm>
+          <a:prstGeom prst="roundRect">
+            <a:avLst>
+              <a:gd name="adj" fmla="val 10000"/>
+            </a:avLst>
+          </a:prstGeom>
+          <a:solidFill>
+            <a:srgbClr val="FFFFFF"/>
+          </a:solidFill>
+          <a:ln w="12700">
+            <a:solidFill>
+              <a:srgbClr val="3A3A3A"/>
+            </a:solidFill>
+          </a:ln>
+          <a:effectLst/>
+        </p:spPr>
+        <p:style>
+          <a:lnRef idx="1">
+            <a:schemeClr val="accent1"/>
+          </a:lnRef>
+          <a:fillRef idx="3">
+            <a:schemeClr val="accent1"/>
+          </a:fillRef>
+          <a:effectRef idx="2">
+            <a:schemeClr val="accent1"/>
+          </a:effectRef>
+          <a:fontRef idx="minor">
+            <a:schemeClr val="lt1"/>
+          </a:fontRef>
+        </p:style>
+        <p:txBody>
+          <a:bodyPr rtlCol="0" anchor="ctr" wrap="square" lIns="54864" rIns="54864" tIns="27432" bIns="27432"/>
+          <a:lstStyle/>
+          <a:p>
+            <a:pPr algn="ctr"/>
+            <a:r>
+              <a:rPr sz="1250" b="1">
+                <a:solidFill>
+                  <a:srgbClr val="3A3A3A"/>
+                </a:solidFill>
+                <a:latin typeface="Segoe UI"/>
+              </a:rPr>
+              <a:t>Floors underneath, which no toggle lowers</a:t>
+            </a:r>
+          </a:p>
+          <a:p>
+            <a:pPr algn="ctr"/>
+            <a:r>
+              <a:rPr sz="950" b="0">
+                <a:solidFill>
+                  <a:srgbClr val="1A1A1A"/>
+                </a:solidFill>
+                <a:latin typeface="Segoe UI"/>
+              </a:rPr>
+              <a:t>The delete guard fires with approvals off · git add -A is refused · writes stay inside the ticket's scope · the workspace jail clamps paths · a REQUIRED sandbox refuses to fall back to the host, and the notebook kernel refuses with it.</a:t>
+            </a:r>
+          </a:p>
+        </p:txBody>
+      </p:sp>
+      <p:sp>
+        <p:nvSpPr>
+          <p:cNvPr id="25" name="Rounded Rectangle 24"/>
+          <p:cNvSpPr/>
+          <p:nvPr/>
+        </p:nvSpPr>
+        <p:spPr>
+          <a:xfrm>
+            <a:off x="685800" y="5074920"/>
+            <a:ext cx="2560320" cy="777240"/>
+          </a:xfrm>
+          <a:prstGeom prst="roundRect">
+            <a:avLst>
+              <a:gd name="adj" fmla="val 10000"/>
+            </a:avLst>
+          </a:prstGeom>
+          <a:solidFill>
+            <a:srgbClr val="ECECEC"/>
+          </a:solidFill>
+          <a:ln w="12700">
+            <a:solidFill>
+              <a:srgbClr val="3A3A3A"/>
+            </a:solidFill>
+          </a:ln>
+          <a:effectLst/>
+        </p:spPr>
+        <p:style>
+          <a:lnRef idx="1">
+            <a:schemeClr val="accent1"/>
+          </a:lnRef>
+          <a:fillRef idx="3">
+            <a:schemeClr val="accent1"/>
+          </a:fillRef>
+          <a:effectRef idx="2">
+            <a:schemeClr val="accent1"/>
+          </a:effectRef>
+          <a:fontRef idx="minor">
+            <a:schemeClr val="lt1"/>
+          </a:fontRef>
+        </p:style>
+        <p:txBody>
+          <a:bodyPr rtlCol="0" anchor="ctr" wrap="square" lIns="54864" rIns="54864" tIns="27432" bIns="27432"/>
+          <a:lstStyle/>
+          <a:p>
+            <a:pPr algn="ctr"/>
+            <a:r>
+              <a:rPr sz="2000" b="1">
+                <a:solidFill>
+                  <a:srgbClr val="3A3A3A"/>
+                </a:solidFill>
+                <a:latin typeface="Segoe UI"/>
+              </a:rPr>
+              <a:t>92</a:t>
+            </a:r>
+          </a:p>
+          <a:p>
+            <a:pPr algn="ctr"/>
+            <a:r>
+              <a:rPr sz="850" b="0">
+                <a:solidFill>
+                  <a:srgbClr val="1A1A1A"/>
+                </a:solidFill>
+                <a:latin typeface="Segoe UI"/>
+              </a:rPr>
+              <a:t>tools in the registry</a:t>
+            </a:r>
+          </a:p>
+        </p:txBody>
+      </p:sp>
+      <p:sp>
+        <p:nvSpPr>
+          <p:cNvPr id="26" name="Rounded Rectangle 25"/>
+          <p:cNvSpPr/>
+          <p:nvPr/>
+        </p:nvSpPr>
+        <p:spPr>
+          <a:xfrm>
+            <a:off x="3429000" y="5074920"/>
+            <a:ext cx="2560320" cy="777240"/>
+          </a:xfrm>
+          <a:prstGeom prst="roundRect">
+            <a:avLst>
+              <a:gd name="adj" fmla="val 10000"/>
+            </a:avLst>
+          </a:prstGeom>
+          <a:solidFill>
+            <a:srgbClr val="ECECEC"/>
+          </a:solidFill>
+          <a:ln w="12700">
+            <a:solidFill>
+              <a:srgbClr val="3A3A3A"/>
+            </a:solidFill>
+          </a:ln>
+          <a:effectLst/>
+        </p:spPr>
+        <p:style>
+          <a:lnRef idx="1">
+            <a:schemeClr val="accent1"/>
+          </a:lnRef>
+          <a:fillRef idx="3">
+            <a:schemeClr val="accent1"/>
+          </a:fillRef>
+          <a:effectRef idx="2">
+            <a:schemeClr val="accent1"/>
+          </a:effectRef>
+          <a:fontRef idx="minor">
+            <a:schemeClr val="lt1"/>
+          </a:fontRef>
+        </p:style>
+        <p:txBody>
+          <a:bodyPr rtlCol="0" anchor="ctr" wrap="square" lIns="54864" rIns="54864" tIns="27432" bIns="27432"/>
+          <a:lstStyle/>
+          <a:p>
+            <a:pPr algn="ctr"/>
+            <a:r>
+              <a:rPr sz="2000" b="1">
+                <a:solidFill>
+                  <a:srgbClr val="3A3A3A"/>
+                </a:solidFill>
+                <a:latin typeface="Segoe UI"/>
+              </a:rPr>
+              <a:t>19</a:t>
+            </a:r>
+          </a:p>
+          <a:p>
+            <a:pPr algn="ctr"/>
+            <a:r>
+              <a:rPr sz="850" b="0">
+                <a:solidFill>
+                  <a:srgbClr val="1A1A1A"/>
+                </a:solidFill>
+                <a:latin typeface="Segoe UI"/>
+              </a:rPr>
+              <a:t>agent roles, each with its own list</a:t>
+            </a:r>
+          </a:p>
+        </p:txBody>
+      </p:sp>
+      <p:sp>
+        <p:nvSpPr>
+          <p:cNvPr id="27" name="Rounded Rectangle 26"/>
+          <p:cNvSpPr/>
+          <p:nvPr/>
+        </p:nvSpPr>
+        <p:spPr>
+          <a:xfrm>
+            <a:off x="6172200" y="5074920"/>
+            <a:ext cx="2560320" cy="777240"/>
+          </a:xfrm>
+          <a:prstGeom prst="roundRect">
+            <a:avLst>
+              <a:gd name="adj" fmla="val 10000"/>
+            </a:avLst>
+          </a:prstGeom>
+          <a:solidFill>
+            <a:srgbClr val="ECECEC"/>
+          </a:solidFill>
+          <a:ln w="12700">
+            <a:solidFill>
+              <a:srgbClr val="3A3A3A"/>
+            </a:solidFill>
+          </a:ln>
+          <a:effectLst/>
+        </p:spPr>
+        <p:style>
+          <a:lnRef idx="1">
+            <a:schemeClr val="accent1"/>
+          </a:lnRef>
+          <a:fillRef idx="3">
+            <a:schemeClr val="accent1"/>
+          </a:fillRef>
+          <a:effectRef idx="2">
+            <a:schemeClr val="accent1"/>
+          </a:effectRef>
+          <a:fontRef idx="minor">
+            <a:schemeClr val="lt1"/>
+          </a:fontRef>
+        </p:style>
+        <p:txBody>
+          <a:bodyPr rtlCol="0" anchor="ctr" wrap="square" lIns="54864" rIns="54864" tIns="27432" bIns="27432"/>
+          <a:lstStyle/>
+          <a:p>
+            <a:pPr algn="ctr"/>
+            <a:r>
+              <a:rPr sz="2000" b="1">
+                <a:solidFill>
+                  <a:srgbClr val="3A3A3A"/>
+                </a:solidFill>
+                <a:latin typeface="Segoe UI"/>
+              </a:rPr>
+              <a:t>0</a:t>
+            </a:r>
+          </a:p>
+          <a:p>
+            <a:pPr algn="ctr"/>
+            <a:r>
+              <a:rPr sz="850" b="0">
+                <a:solidFill>
+                  <a:srgbClr val="1A1A1A"/>
+                </a:solidFill>
+                <a:latin typeface="Segoe UI"/>
+              </a:rPr>
+              <a:t>tools for 9 of those roles</a:t>
+            </a:r>
+          </a:p>
+        </p:txBody>
+      </p:sp>
+      <p:sp>
+        <p:nvSpPr>
+          <p:cNvPr id="28" name="Rounded Rectangle 27"/>
+          <p:cNvSpPr/>
+          <p:nvPr/>
+        </p:nvSpPr>
+        <p:spPr>
+          <a:xfrm>
+            <a:off x="8915400" y="5074920"/>
+            <a:ext cx="2560320" cy="777240"/>
+          </a:xfrm>
+          <a:prstGeom prst="roundRect">
+            <a:avLst>
+              <a:gd name="adj" fmla="val 10000"/>
+            </a:avLst>
+          </a:prstGeom>
+          <a:solidFill>
+            <a:srgbClr val="ECECEC"/>
+          </a:solidFill>
+          <a:ln w="12700">
+            <a:solidFill>
+              <a:srgbClr val="3A3A3A"/>
+            </a:solidFill>
+          </a:ln>
+          <a:effectLst/>
+        </p:spPr>
+        <p:style>
+          <a:lnRef idx="1">
+            <a:schemeClr val="accent1"/>
+          </a:lnRef>
+          <a:fillRef idx="3">
+            <a:schemeClr val="accent1"/>
+          </a:fillRef>
+          <a:effectRef idx="2">
+            <a:schemeClr val="accent1"/>
+          </a:effectRef>
+          <a:fontRef idx="minor">
+            <a:schemeClr val="lt1"/>
+          </a:fontRef>
+        </p:style>
+        <p:txBody>
+          <a:bodyPr rtlCol="0" anchor="ctr" wrap="square" lIns="54864" rIns="54864" tIns="27432" bIns="27432"/>
+          <a:lstStyle/>
+          <a:p>
+            <a:pPr algn="ctr"/>
+            <a:r>
+              <a:rPr sz="2000" b="1">
+                <a:solidFill>
+                  <a:srgbClr val="3A3A3A"/>
+                </a:solidFill>
+                <a:latin typeface="Segoe UI"/>
+              </a:rPr>
+              <a:t>20</a:t>
+            </a:r>
+          </a:p>
+          <a:p>
+            <a:pPr algn="ctr"/>
+            <a:r>
+              <a:rPr sz="850" b="0">
+                <a:solidFill>
+                  <a:srgbClr val="1A1A1A"/>
+                </a:solidFill>
+                <a:latin typeface="Segoe UI"/>
+              </a:rPr>
+              <a:t>write tools that ask before they post</a:t>
             </a:r>
           </a:p>
         </p:txBody>

--- a/docs/AIForgeCrew-Overview.pptx
+++ b/docs/AIForgeCrew-Overview.pptx
@@ -10897,6 +10897,22 @@
               <a:t>It never receives the schema · 9 of 19 roles get zero tools</a:t>
             </a:r>
           </a:p>
+          <a:p>
+            <a:pPr algn="l">
+              <a:spcAft>
+                <a:spcPts val="0"/>
+              </a:spcAft>
+            </a:pPr>
+            <a:r>
+              <a:rPr sz="1000" b="0">
+                <a:solidFill>
+                  <a:srgbClr val="6B6B6B"/>
+                </a:solidFill>
+                <a:latin typeface="Segoe UI"/>
+              </a:rPr>
+              <a:t>(the Doer runs unfiltered by design — its list documents intent)</a:t>
+            </a:r>
+          </a:p>
         </p:txBody>
       </p:sp>
       <p:sp>
@@ -13149,7 +13165,7 @@
                 </a:solidFill>
                 <a:latin typeface="Segoe UI"/>
               </a:rPr>
-              <a:t>The delete guard fires with approvals off · git add -A is refused · writes stay inside the ticket's scope · the workspace jail clamps paths · a REQUIRED sandbox refuses to fall back to the host, and the notebook kernel refuses with it.</a:t>
+              <a:t>The delete guard fires with approvals off · git add -A is refused · writes stay inside the ticket's scope · the workspace jail clamps the file tools (a shell can still cd out of it) · a REQUIRED sandbox refuses to fall back to the host, kernel included.</a:t>
             </a:r>
           </a:p>
         </p:txBody>
